--- a/src/Files/Final_ppt.pptx
+++ b/src/Files/Final_ppt.pptx
@@ -132,6 +132,85 @@
 
 <file path=ppt/changesInfos/changesInfo1.xml><?xml version="1.0" encoding="utf-8"?>
 <pc:chgInfo xmlns:a="http://schemas.openxmlformats.org/drawingml/2006/main" xmlns:r="http://schemas.openxmlformats.org/officeDocument/2006/relationships" xmlns:ac="http://schemas.microsoft.com/office/drawing/2013/main/command" xmlns:pc="http://schemas.microsoft.com/office/powerpoint/2013/main/command">
+  <pc:docChgLst>
+    <pc:chgData name="Yao, Ruichen" userId="S::ryao8@illinois.edu::64b3276a-3eb4-4a6d-a3fe-b4c6a8a61eb8" providerId="AD" clId="Web-{AFA3993F-5A7F-C637-90D9-997620B4E1B2}"/>
+    <pc:docChg chg="addSld delSld modSld sldOrd">
+      <pc:chgData name="Yao, Ruichen" userId="S::ryao8@illinois.edu::64b3276a-3eb4-4a6d-a3fe-b4c6a8a61eb8" providerId="AD" clId="Web-{AFA3993F-5A7F-C637-90D9-997620B4E1B2}" dt="2026-02-26T08:51:08.874" v="144"/>
+      <pc:docMkLst>
+        <pc:docMk/>
+      </pc:docMkLst>
+      <pc:sldChg chg="modSp">
+        <pc:chgData name="Yao, Ruichen" userId="S::ryao8@illinois.edu::64b3276a-3eb4-4a6d-a3fe-b4c6a8a61eb8" providerId="AD" clId="Web-{AFA3993F-5A7F-C637-90D9-997620B4E1B2}" dt="2026-02-26T08:17:21.876" v="51" actId="20577"/>
+        <pc:sldMkLst>
+          <pc:docMk/>
+          <pc:sldMk cId="21174566" sldId="292"/>
+        </pc:sldMkLst>
+      </pc:sldChg>
+      <pc:sldChg chg="addSp delSp modSp">
+        <pc:chgData name="Yao, Ruichen" userId="S::ryao8@illinois.edu::64b3276a-3eb4-4a6d-a3fe-b4c6a8a61eb8" providerId="AD" clId="Web-{AFA3993F-5A7F-C637-90D9-997620B4E1B2}" dt="2026-02-26T08:36:39.370" v="106" actId="1076"/>
+        <pc:sldMkLst>
+          <pc:docMk/>
+          <pc:sldMk cId="1439606174" sldId="294"/>
+        </pc:sldMkLst>
+      </pc:sldChg>
+      <pc:sldChg chg="modSp">
+        <pc:chgData name="Yao, Ruichen" userId="S::ryao8@illinois.edu::64b3276a-3eb4-4a6d-a3fe-b4c6a8a61eb8" providerId="AD" clId="Web-{AFA3993F-5A7F-C637-90D9-997620B4E1B2}" dt="2026-02-26T08:16:54.751" v="47" actId="20577"/>
+        <pc:sldMkLst>
+          <pc:docMk/>
+          <pc:sldMk cId="2833865287" sldId="296"/>
+        </pc:sldMkLst>
+      </pc:sldChg>
+      <pc:sldChg chg="addSp delSp modSp ord">
+        <pc:chgData name="Yao, Ruichen" userId="S::ryao8@illinois.edu::64b3276a-3eb4-4a6d-a3fe-b4c6a8a61eb8" providerId="AD" clId="Web-{AFA3993F-5A7F-C637-90D9-997620B4E1B2}" dt="2026-02-26T08:34:03.869" v="79"/>
+        <pc:sldMkLst>
+          <pc:docMk/>
+          <pc:sldMk cId="901659859" sldId="297"/>
+        </pc:sldMkLst>
+      </pc:sldChg>
+      <pc:sldChg chg="del">
+        <pc:chgData name="Yao, Ruichen" userId="S::ryao8@illinois.edu::64b3276a-3eb4-4a6d-a3fe-b4c6a8a61eb8" providerId="AD" clId="Web-{AFA3993F-5A7F-C637-90D9-997620B4E1B2}" dt="2026-02-26T08:35:00.104" v="82"/>
+        <pc:sldMkLst>
+          <pc:docMk/>
+          <pc:sldMk cId="1922390234" sldId="298"/>
+        </pc:sldMkLst>
+      </pc:sldChg>
+      <pc:sldChg chg="del">
+        <pc:chgData name="Yao, Ruichen" userId="S::ryao8@illinois.edu::64b3276a-3eb4-4a6d-a3fe-b4c6a8a61eb8" providerId="AD" clId="Web-{AFA3993F-5A7F-C637-90D9-997620B4E1B2}" dt="2026-02-26T08:35:11.432" v="83"/>
+        <pc:sldMkLst>
+          <pc:docMk/>
+          <pc:sldMk cId="4110718270" sldId="299"/>
+        </pc:sldMkLst>
+      </pc:sldChg>
+      <pc:sldChg chg="addSp delSp modSp">
+        <pc:chgData name="Yao, Ruichen" userId="S::ryao8@illinois.edu::64b3276a-3eb4-4a6d-a3fe-b4c6a8a61eb8" providerId="AD" clId="Web-{AFA3993F-5A7F-C637-90D9-997620B4E1B2}" dt="2026-02-26T08:51:08.874" v="144"/>
+        <pc:sldMkLst>
+          <pc:docMk/>
+          <pc:sldMk cId="3470139659" sldId="300"/>
+        </pc:sldMkLst>
+      </pc:sldChg>
+      <pc:sldChg chg="addSp delSp modSp add replId">
+        <pc:chgData name="Yao, Ruichen" userId="S::ryao8@illinois.edu::64b3276a-3eb4-4a6d-a3fe-b4c6a8a61eb8" providerId="AD" clId="Web-{AFA3993F-5A7F-C637-90D9-997620B4E1B2}" dt="2026-02-26T08:43:15.932" v="129" actId="1076"/>
+        <pc:sldMkLst>
+          <pc:docMk/>
+          <pc:sldMk cId="3024746747" sldId="304"/>
+        </pc:sldMkLst>
+      </pc:sldChg>
+      <pc:sldChg chg="addSp delSp modSp add replId">
+        <pc:chgData name="Yao, Ruichen" userId="S::ryao8@illinois.edu::64b3276a-3eb4-4a6d-a3fe-b4c6a8a61eb8" providerId="AD" clId="Web-{AFA3993F-5A7F-C637-90D9-997620B4E1B2}" dt="2026-02-26T08:41:28.698" v="116" actId="1076"/>
+        <pc:sldMkLst>
+          <pc:docMk/>
+          <pc:sldMk cId="2575150923" sldId="305"/>
+        </pc:sldMkLst>
+      </pc:sldChg>
+      <pc:sldChg chg="addSp delSp modSp add del replId">
+        <pc:chgData name="Yao, Ruichen" userId="S::ryao8@illinois.edu::64b3276a-3eb4-4a6d-a3fe-b4c6a8a61eb8" providerId="AD" clId="Web-{AFA3993F-5A7F-C637-90D9-997620B4E1B2}" dt="2026-02-26T08:50:06.186" v="143"/>
+        <pc:sldMkLst>
+          <pc:docMk/>
+          <pc:sldMk cId="2350991126" sldId="306"/>
+        </pc:sldMkLst>
+      </pc:sldChg>
+    </pc:docChg>
+  </pc:docChgLst>
   <pc:docChgLst>
     <pc:chgData name="Kang, Zhanchen" userId="87889b69-70fd-4160-a433-c416f2f6134f" providerId="ADAL" clId="{A95CA354-6E5E-4965-872C-DF5C63559AE0}"/>
     <pc:docChg chg="undo custSel addSld delSld modSld sldOrd">
@@ -969,85 +1048,6 @@
       </pc:sldChg>
     </pc:docChg>
   </pc:docChgLst>
-  <pc:docChgLst>
-    <pc:chgData name="Yao, Ruichen" userId="S::ryao8@illinois.edu::64b3276a-3eb4-4a6d-a3fe-b4c6a8a61eb8" providerId="AD" clId="Web-{AFA3993F-5A7F-C637-90D9-997620B4E1B2}"/>
-    <pc:docChg chg="addSld delSld modSld sldOrd">
-      <pc:chgData name="Yao, Ruichen" userId="S::ryao8@illinois.edu::64b3276a-3eb4-4a6d-a3fe-b4c6a8a61eb8" providerId="AD" clId="Web-{AFA3993F-5A7F-C637-90D9-997620B4E1B2}" dt="2026-02-26T08:51:08.874" v="144"/>
-      <pc:docMkLst>
-        <pc:docMk/>
-      </pc:docMkLst>
-      <pc:sldChg chg="modSp">
-        <pc:chgData name="Yao, Ruichen" userId="S::ryao8@illinois.edu::64b3276a-3eb4-4a6d-a3fe-b4c6a8a61eb8" providerId="AD" clId="Web-{AFA3993F-5A7F-C637-90D9-997620B4E1B2}" dt="2026-02-26T08:17:21.876" v="51" actId="20577"/>
-        <pc:sldMkLst>
-          <pc:docMk/>
-          <pc:sldMk cId="21174566" sldId="292"/>
-        </pc:sldMkLst>
-      </pc:sldChg>
-      <pc:sldChg chg="addSp delSp modSp">
-        <pc:chgData name="Yao, Ruichen" userId="S::ryao8@illinois.edu::64b3276a-3eb4-4a6d-a3fe-b4c6a8a61eb8" providerId="AD" clId="Web-{AFA3993F-5A7F-C637-90D9-997620B4E1B2}" dt="2026-02-26T08:36:39.370" v="106" actId="1076"/>
-        <pc:sldMkLst>
-          <pc:docMk/>
-          <pc:sldMk cId="1439606174" sldId="294"/>
-        </pc:sldMkLst>
-      </pc:sldChg>
-      <pc:sldChg chg="modSp">
-        <pc:chgData name="Yao, Ruichen" userId="S::ryao8@illinois.edu::64b3276a-3eb4-4a6d-a3fe-b4c6a8a61eb8" providerId="AD" clId="Web-{AFA3993F-5A7F-C637-90D9-997620B4E1B2}" dt="2026-02-26T08:16:54.751" v="47" actId="20577"/>
-        <pc:sldMkLst>
-          <pc:docMk/>
-          <pc:sldMk cId="2833865287" sldId="296"/>
-        </pc:sldMkLst>
-      </pc:sldChg>
-      <pc:sldChg chg="addSp delSp modSp ord">
-        <pc:chgData name="Yao, Ruichen" userId="S::ryao8@illinois.edu::64b3276a-3eb4-4a6d-a3fe-b4c6a8a61eb8" providerId="AD" clId="Web-{AFA3993F-5A7F-C637-90D9-997620B4E1B2}" dt="2026-02-26T08:34:03.869" v="79"/>
-        <pc:sldMkLst>
-          <pc:docMk/>
-          <pc:sldMk cId="901659859" sldId="297"/>
-        </pc:sldMkLst>
-      </pc:sldChg>
-      <pc:sldChg chg="del">
-        <pc:chgData name="Yao, Ruichen" userId="S::ryao8@illinois.edu::64b3276a-3eb4-4a6d-a3fe-b4c6a8a61eb8" providerId="AD" clId="Web-{AFA3993F-5A7F-C637-90D9-997620B4E1B2}" dt="2026-02-26T08:35:00.104" v="82"/>
-        <pc:sldMkLst>
-          <pc:docMk/>
-          <pc:sldMk cId="1922390234" sldId="298"/>
-        </pc:sldMkLst>
-      </pc:sldChg>
-      <pc:sldChg chg="del">
-        <pc:chgData name="Yao, Ruichen" userId="S::ryao8@illinois.edu::64b3276a-3eb4-4a6d-a3fe-b4c6a8a61eb8" providerId="AD" clId="Web-{AFA3993F-5A7F-C637-90D9-997620B4E1B2}" dt="2026-02-26T08:35:11.432" v="83"/>
-        <pc:sldMkLst>
-          <pc:docMk/>
-          <pc:sldMk cId="4110718270" sldId="299"/>
-        </pc:sldMkLst>
-      </pc:sldChg>
-      <pc:sldChg chg="addSp delSp modSp">
-        <pc:chgData name="Yao, Ruichen" userId="S::ryao8@illinois.edu::64b3276a-3eb4-4a6d-a3fe-b4c6a8a61eb8" providerId="AD" clId="Web-{AFA3993F-5A7F-C637-90D9-997620B4E1B2}" dt="2026-02-26T08:51:08.874" v="144"/>
-        <pc:sldMkLst>
-          <pc:docMk/>
-          <pc:sldMk cId="3470139659" sldId="300"/>
-        </pc:sldMkLst>
-      </pc:sldChg>
-      <pc:sldChg chg="addSp delSp modSp add replId">
-        <pc:chgData name="Yao, Ruichen" userId="S::ryao8@illinois.edu::64b3276a-3eb4-4a6d-a3fe-b4c6a8a61eb8" providerId="AD" clId="Web-{AFA3993F-5A7F-C637-90D9-997620B4E1B2}" dt="2026-02-26T08:43:15.932" v="129" actId="1076"/>
-        <pc:sldMkLst>
-          <pc:docMk/>
-          <pc:sldMk cId="3024746747" sldId="304"/>
-        </pc:sldMkLst>
-      </pc:sldChg>
-      <pc:sldChg chg="addSp delSp modSp add replId">
-        <pc:chgData name="Yao, Ruichen" userId="S::ryao8@illinois.edu::64b3276a-3eb4-4a6d-a3fe-b4c6a8a61eb8" providerId="AD" clId="Web-{AFA3993F-5A7F-C637-90D9-997620B4E1B2}" dt="2026-02-26T08:41:28.698" v="116" actId="1076"/>
-        <pc:sldMkLst>
-          <pc:docMk/>
-          <pc:sldMk cId="2575150923" sldId="305"/>
-        </pc:sldMkLst>
-      </pc:sldChg>
-      <pc:sldChg chg="addSp delSp modSp add del replId">
-        <pc:chgData name="Yao, Ruichen" userId="S::ryao8@illinois.edu::64b3276a-3eb4-4a6d-a3fe-b4c6a8a61eb8" providerId="AD" clId="Web-{AFA3993F-5A7F-C637-90D9-997620B4E1B2}" dt="2026-02-26T08:50:06.186" v="143"/>
-        <pc:sldMkLst>
-          <pc:docMk/>
-          <pc:sldMk cId="2350991126" sldId="306"/>
-        </pc:sldMkLst>
-      </pc:sldChg>
-    </pc:docChg>
-  </pc:docChgLst>
 </pc:chgInfo>
 </file>
 
@@ -7587,29 +7587,7 @@
                 <a:ea typeface="宋体"/>
                 <a:cs typeface="Calibri"/>
               </a:rPr>
-              <a:t>Team members: </a:t>
-            </a:r>
-            <a:r>
-              <a:rPr lang="en-US" altLang="zh-CN" sz="3200" dirty="0" err="1">
-                <a:solidFill>
-                  <a:srgbClr val="13294B"/>
-                </a:solidFill>
-                <a:latin typeface="Calibri"/>
-                <a:ea typeface="宋体"/>
-                <a:cs typeface="Calibri"/>
-              </a:rPr>
-              <a:t>Yuliang</a:t>
-            </a:r>
-            <a:r>
-              <a:rPr lang="en-US" altLang="zh-CN" sz="3200" dirty="0">
-                <a:solidFill>
-                  <a:srgbClr val="13294B"/>
-                </a:solidFill>
-                <a:latin typeface="Calibri"/>
-                <a:ea typeface="宋体"/>
-                <a:cs typeface="Calibri"/>
-              </a:rPr>
-              <a:t> Lin, Zhanchen Kang</a:t>
+              <a:t>Team members: Yu-Liang Lin, Zhanchen Kang</a:t>
             </a:r>
           </a:p>
           <a:p>

--- a/src/Files/Final_ppt.pptx
+++ b/src/Files/Final_ppt.pptx
@@ -5,7 +5,7 @@
     <p:sldMasterId id="2147483648" r:id="rId1"/>
   </p:sldMasterIdLst>
   <p:notesMasterIdLst>
-    <p:notesMasterId r:id="rId18"/>
+    <p:notesMasterId r:id="rId19"/>
   </p:notesMasterIdLst>
   <p:sldIdLst>
     <p:sldId id="263" r:id="rId2"/>
@@ -13,17 +13,18 @@
     <p:sldId id="297" r:id="rId4"/>
     <p:sldId id="277" r:id="rId5"/>
     <p:sldId id="298" r:id="rId6"/>
-    <p:sldId id="299" r:id="rId7"/>
-    <p:sldId id="304" r:id="rId8"/>
-    <p:sldId id="305" r:id="rId9"/>
-    <p:sldId id="306" r:id="rId10"/>
-    <p:sldId id="307" r:id="rId11"/>
-    <p:sldId id="296" r:id="rId12"/>
-    <p:sldId id="300" r:id="rId13"/>
-    <p:sldId id="308" r:id="rId14"/>
-    <p:sldId id="302" r:id="rId15"/>
-    <p:sldId id="303" r:id="rId16"/>
-    <p:sldId id="301" r:id="rId17"/>
+    <p:sldId id="309" r:id="rId7"/>
+    <p:sldId id="299" r:id="rId8"/>
+    <p:sldId id="304" r:id="rId9"/>
+    <p:sldId id="305" r:id="rId10"/>
+    <p:sldId id="306" r:id="rId11"/>
+    <p:sldId id="307" r:id="rId12"/>
+    <p:sldId id="296" r:id="rId13"/>
+    <p:sldId id="300" r:id="rId14"/>
+    <p:sldId id="308" r:id="rId15"/>
+    <p:sldId id="302" r:id="rId16"/>
+    <p:sldId id="303" r:id="rId17"/>
+    <p:sldId id="301" r:id="rId18"/>
   </p:sldIdLst>
   <p:sldSz cx="12192000" cy="6858000"/>
   <p:notesSz cx="6858000" cy="9144000"/>
@@ -1590,6 +1591,170 @@
         <p:cNvPr id="1" name="">
           <a:extLst>
             <a:ext uri="{FF2B5EF4-FFF2-40B4-BE49-F238E27FC236}">
+              <a16:creationId xmlns:a16="http://schemas.microsoft.com/office/drawing/2014/main" id="{F08AD704-5687-C897-37EE-639D76BAB2B0}"/>
+            </a:ext>
+          </a:extLst>
+        </p:cNvPr>
+        <p:cNvGrpSpPr/>
+        <p:nvPr/>
+      </p:nvGrpSpPr>
+      <p:grpSpPr>
+        <a:xfrm>
+          <a:off x="0" y="0"/>
+          <a:ext cx="0" cy="0"/>
+          <a:chOff x="0" y="0"/>
+          <a:chExt cx="0" cy="0"/>
+        </a:xfrm>
+      </p:grpSpPr>
+      <p:sp>
+        <p:nvSpPr>
+          <p:cNvPr id="2" name="幻灯片图像占位符 1">
+            <a:extLst>
+              <a:ext uri="{FF2B5EF4-FFF2-40B4-BE49-F238E27FC236}">
+                <a16:creationId xmlns:a16="http://schemas.microsoft.com/office/drawing/2014/main" id="{F168772D-C045-02A6-3693-429AE9AF84FE}"/>
+              </a:ext>
+            </a:extLst>
+          </p:cNvPr>
+          <p:cNvSpPr>
+            <a:spLocks noGrp="1" noRot="1" noChangeAspect="1"/>
+          </p:cNvSpPr>
+          <p:nvPr>
+            <p:ph type="sldImg"/>
+          </p:nvPr>
+        </p:nvSpPr>
+        <p:spPr/>
+      </p:sp>
+      <p:sp>
+        <p:nvSpPr>
+          <p:cNvPr id="3" name="备注占位符 2">
+            <a:extLst>
+              <a:ext uri="{FF2B5EF4-FFF2-40B4-BE49-F238E27FC236}">
+                <a16:creationId xmlns:a16="http://schemas.microsoft.com/office/drawing/2014/main" id="{BAC52383-BBDD-CD06-582E-1C52A422B852}"/>
+              </a:ext>
+            </a:extLst>
+          </p:cNvPr>
+          <p:cNvSpPr>
+            <a:spLocks noGrp="1"/>
+          </p:cNvSpPr>
+          <p:nvPr>
+            <p:ph type="body" idx="1"/>
+          </p:nvPr>
+        </p:nvSpPr>
+        <p:spPr/>
+        <p:txBody>
+          <a:bodyPr/>
+          <a:lstStyle/>
+          <a:p>
+            <a:pPr algn="l">
+              <a:spcBef>
+                <a:spcPts val="450"/>
+              </a:spcBef>
+              <a:spcAft>
+                <a:spcPts val="450"/>
+              </a:spcAft>
+            </a:pPr>
+            <a:r>
+              <a:rPr lang="en-US" altLang="zh-CN" sz="1800" b="1" i="0">
+                <a:solidFill>
+                  <a:srgbClr val="2D3B45"/>
+                </a:solidFill>
+                <a:effectLst/>
+                <a:latin typeface="Lato Extended"/>
+              </a:rPr>
+              <a:t>Introduction Slide</a:t>
+            </a:r>
+            <a:endParaRPr lang="en-US" altLang="zh-CN" sz="1800" b="0" i="0">
+              <a:solidFill>
+                <a:srgbClr val="2D3B45"/>
+              </a:solidFill>
+              <a:effectLst/>
+              <a:latin typeface="Lato Extended"/>
+            </a:endParaRPr>
+          </a:p>
+          <a:p>
+            <a:pPr algn="l">
+              <a:spcAft>
+                <a:spcPts val="450"/>
+              </a:spcAft>
+              <a:buFont typeface="Arial" panose="020B0604020202020204" pitchFamily="34" charset="0"/>
+              <a:buChar char="•"/>
+            </a:pPr>
+            <a:r>
+              <a:rPr lang="en-US" altLang="zh-CN" sz="1800" b="1" i="0">
+                <a:solidFill>
+                  <a:srgbClr val="2D3B45"/>
+                </a:solidFill>
+                <a:effectLst/>
+                <a:latin typeface="v-sans"/>
+              </a:rPr>
+              <a:t>Brief Introduction:</a:t>
+            </a:r>
+            <a:r>
+              <a:rPr lang="en-US" altLang="zh-CN" sz="1800" b="0" i="0">
+                <a:solidFill>
+                  <a:srgbClr val="2D3B45"/>
+                </a:solidFill>
+                <a:effectLst/>
+                <a:latin typeface="v-sans"/>
+              </a:rPr>
+              <a:t> of the team and the topic</a:t>
+            </a:r>
+          </a:p>
+          <a:p>
+            <a:endParaRPr lang="zh-CN" altLang="en-US"/>
+          </a:p>
+        </p:txBody>
+      </p:sp>
+      <p:sp>
+        <p:nvSpPr>
+          <p:cNvPr id="4" name="灯片编号占位符 3">
+            <a:extLst>
+              <a:ext uri="{FF2B5EF4-FFF2-40B4-BE49-F238E27FC236}">
+                <a16:creationId xmlns:a16="http://schemas.microsoft.com/office/drawing/2014/main" id="{4EC632BB-84C0-6D94-8195-420737B13DE8}"/>
+              </a:ext>
+            </a:extLst>
+          </p:cNvPr>
+          <p:cNvSpPr>
+            <a:spLocks noGrp="1"/>
+          </p:cNvSpPr>
+          <p:nvPr>
+            <p:ph type="sldNum" sz="quarter" idx="5"/>
+          </p:nvPr>
+        </p:nvSpPr>
+        <p:spPr/>
+        <p:txBody>
+          <a:bodyPr/>
+          <a:lstStyle/>
+          <a:p>
+            <a:fld id="{EED2C466-1B0F-4591-A952-5F31096967DE}" type="slidenum">
+              <a:rPr lang="zh-CN" altLang="en-US" smtClean="0"/>
+              <a:t>10</a:t>
+            </a:fld>
+            <a:endParaRPr lang="zh-CN" altLang="en-US"/>
+          </a:p>
+        </p:txBody>
+      </p:sp>
+    </p:spTree>
+    <p:extLst>
+      <p:ext uri="{BB962C8B-B14F-4D97-AF65-F5344CB8AC3E}">
+        <p14:creationId xmlns:p14="http://schemas.microsoft.com/office/powerpoint/2010/main" val="3723329139"/>
+      </p:ext>
+    </p:extLst>
+  </p:cSld>
+  <p:clrMapOvr>
+    <a:masterClrMapping/>
+  </p:clrMapOvr>
+</p:notes>
+</file>
+
+<file path=ppt/notesSlides/notesSlide11.xml><?xml version="1.0" encoding="utf-8"?>
+<p:notes xmlns:a="http://schemas.openxmlformats.org/drawingml/2006/main" xmlns:r="http://schemas.openxmlformats.org/officeDocument/2006/relationships" xmlns:p="http://schemas.openxmlformats.org/presentationml/2006/main">
+  <p:cSld>
+    <p:spTree>
+      <p:nvGrpSpPr>
+        <p:cNvPr id="1" name="">
+          <a:extLst>
+            <a:ext uri="{FF2B5EF4-FFF2-40B4-BE49-F238E27FC236}">
               <a16:creationId xmlns:a16="http://schemas.microsoft.com/office/drawing/2014/main" id="{A3780624-88CC-1F28-3EA6-BBF568054237}"/>
             </a:ext>
           </a:extLst>
@@ -1727,7 +1892,7 @@
           <a:p>
             <a:fld id="{EED2C466-1B0F-4591-A952-5F31096967DE}" type="slidenum">
               <a:rPr lang="zh-CN" altLang="en-US" smtClean="0"/>
-              <a:t>10</a:t>
+              <a:t>11</a:t>
             </a:fld>
             <a:endParaRPr lang="zh-CN" altLang="en-US"/>
           </a:p>
@@ -1746,7 +1911,7 @@
 </p:notes>
 </file>
 
-<file path=ppt/notesSlides/notesSlide11.xml><?xml version="1.0" encoding="utf-8"?>
+<file path=ppt/notesSlides/notesSlide12.xml><?xml version="1.0" encoding="utf-8"?>
 <p:notes xmlns:a="http://schemas.openxmlformats.org/drawingml/2006/main" xmlns:r="http://schemas.openxmlformats.org/officeDocument/2006/relationships" xmlns:p="http://schemas.openxmlformats.org/presentationml/2006/main">
   <p:cSld>
     <p:spTree>
@@ -1891,7 +2056,7 @@
           <a:p>
             <a:fld id="{EED2C466-1B0F-4591-A952-5F31096967DE}" type="slidenum">
               <a:rPr lang="zh-CN" altLang="en-US" smtClean="0"/>
-              <a:t>11</a:t>
+              <a:t>12</a:t>
             </a:fld>
             <a:endParaRPr lang="zh-CN" altLang="en-US"/>
           </a:p>
@@ -1910,7 +2075,7 @@
 </p:notes>
 </file>
 
-<file path=ppt/notesSlides/notesSlide12.xml><?xml version="1.0" encoding="utf-8"?>
+<file path=ppt/notesSlides/notesSlide13.xml><?xml version="1.0" encoding="utf-8"?>
 <p:notes xmlns:a="http://schemas.openxmlformats.org/drawingml/2006/main" xmlns:r="http://schemas.openxmlformats.org/officeDocument/2006/relationships" xmlns:p="http://schemas.openxmlformats.org/presentationml/2006/main">
   <p:cSld>
     <p:spTree>
@@ -2055,7 +2220,7 @@
           <a:p>
             <a:fld id="{EED2C466-1B0F-4591-A952-5F31096967DE}" type="slidenum">
               <a:rPr lang="zh-CN" altLang="en-US" smtClean="0"/>
-              <a:t>12</a:t>
+              <a:t>13</a:t>
             </a:fld>
             <a:endParaRPr lang="zh-CN" altLang="en-US"/>
           </a:p>
@@ -2074,7 +2239,7 @@
 </p:notes>
 </file>
 
-<file path=ppt/notesSlides/notesSlide13.xml><?xml version="1.0" encoding="utf-8"?>
+<file path=ppt/notesSlides/notesSlide14.xml><?xml version="1.0" encoding="utf-8"?>
 <p:notes xmlns:a="http://schemas.openxmlformats.org/drawingml/2006/main" xmlns:r="http://schemas.openxmlformats.org/officeDocument/2006/relationships" xmlns:p="http://schemas.openxmlformats.org/presentationml/2006/main">
   <p:cSld>
     <p:spTree>
@@ -2219,7 +2384,7 @@
           <a:p>
             <a:fld id="{EED2C466-1B0F-4591-A952-5F31096967DE}" type="slidenum">
               <a:rPr lang="zh-CN" altLang="en-US" smtClean="0"/>
-              <a:t>13</a:t>
+              <a:t>14</a:t>
             </a:fld>
             <a:endParaRPr lang="zh-CN" altLang="en-US"/>
           </a:p>
@@ -2238,7 +2403,7 @@
 </p:notes>
 </file>
 
-<file path=ppt/notesSlides/notesSlide14.xml><?xml version="1.0" encoding="utf-8"?>
+<file path=ppt/notesSlides/notesSlide15.xml><?xml version="1.0" encoding="utf-8"?>
 <p:notes xmlns:a="http://schemas.openxmlformats.org/drawingml/2006/main" xmlns:r="http://schemas.openxmlformats.org/officeDocument/2006/relationships" xmlns:p="http://schemas.openxmlformats.org/presentationml/2006/main">
   <p:cSld>
     <p:spTree>
@@ -2383,7 +2548,7 @@
           <a:p>
             <a:fld id="{EED2C466-1B0F-4591-A952-5F31096967DE}" type="slidenum">
               <a:rPr lang="zh-CN" altLang="en-US" smtClean="0"/>
-              <a:t>14</a:t>
+              <a:t>15</a:t>
             </a:fld>
             <a:endParaRPr lang="zh-CN" altLang="en-US"/>
           </a:p>
@@ -2402,7 +2567,7 @@
 </p:notes>
 </file>
 
-<file path=ppt/notesSlides/notesSlide15.xml><?xml version="1.0" encoding="utf-8"?>
+<file path=ppt/notesSlides/notesSlide16.xml><?xml version="1.0" encoding="utf-8"?>
 <p:notes xmlns:a="http://schemas.openxmlformats.org/drawingml/2006/main" xmlns:r="http://schemas.openxmlformats.org/officeDocument/2006/relationships" xmlns:p="http://schemas.openxmlformats.org/presentationml/2006/main">
   <p:cSld>
     <p:spTree>
@@ -2547,7 +2712,7 @@
           <a:p>
             <a:fld id="{EED2C466-1B0F-4591-A952-5F31096967DE}" type="slidenum">
               <a:rPr lang="zh-CN" altLang="en-US" smtClean="0"/>
-              <a:t>15</a:t>
+              <a:t>16</a:t>
             </a:fld>
             <a:endParaRPr lang="zh-CN" altLang="en-US"/>
           </a:p>
@@ -2566,7 +2731,7 @@
 </p:notes>
 </file>
 
-<file path=ppt/notesSlides/notesSlide16.xml><?xml version="1.0" encoding="utf-8"?>
+<file path=ppt/notesSlides/notesSlide17.xml><?xml version="1.0" encoding="utf-8"?>
 <p:notes xmlns:a="http://schemas.openxmlformats.org/drawingml/2006/main" xmlns:r="http://schemas.openxmlformats.org/officeDocument/2006/relationships" xmlns:p="http://schemas.openxmlformats.org/presentationml/2006/main">
   <p:cSld>
     <p:spTree>
@@ -2711,7 +2876,7 @@
           <a:p>
             <a:fld id="{EED2C466-1B0F-4591-A952-5F31096967DE}" type="slidenum">
               <a:rPr lang="zh-CN" altLang="en-US" smtClean="0"/>
-              <a:t>16</a:t>
+              <a:t>17</a:t>
             </a:fld>
             <a:endParaRPr lang="zh-CN" altLang="en-US"/>
           </a:p>
@@ -3394,6 +3559,170 @@
         <p:cNvPr id="1" name="">
           <a:extLst>
             <a:ext uri="{FF2B5EF4-FFF2-40B4-BE49-F238E27FC236}">
+              <a16:creationId xmlns:a16="http://schemas.microsoft.com/office/drawing/2014/main" id="{D1B6132A-B803-ED4F-A2A3-F6936AF16EBB}"/>
+            </a:ext>
+          </a:extLst>
+        </p:cNvPr>
+        <p:cNvGrpSpPr/>
+        <p:nvPr/>
+      </p:nvGrpSpPr>
+      <p:grpSpPr>
+        <a:xfrm>
+          <a:off x="0" y="0"/>
+          <a:ext cx="0" cy="0"/>
+          <a:chOff x="0" y="0"/>
+          <a:chExt cx="0" cy="0"/>
+        </a:xfrm>
+      </p:grpSpPr>
+      <p:sp>
+        <p:nvSpPr>
+          <p:cNvPr id="2" name="幻灯片图像占位符 1">
+            <a:extLst>
+              <a:ext uri="{FF2B5EF4-FFF2-40B4-BE49-F238E27FC236}">
+                <a16:creationId xmlns:a16="http://schemas.microsoft.com/office/drawing/2014/main" id="{E6A59B16-2CF6-6E32-0D11-D6F97D825B90}"/>
+              </a:ext>
+            </a:extLst>
+          </p:cNvPr>
+          <p:cNvSpPr>
+            <a:spLocks noGrp="1" noRot="1" noChangeAspect="1"/>
+          </p:cNvSpPr>
+          <p:nvPr>
+            <p:ph type="sldImg"/>
+          </p:nvPr>
+        </p:nvSpPr>
+        <p:spPr/>
+      </p:sp>
+      <p:sp>
+        <p:nvSpPr>
+          <p:cNvPr id="3" name="备注占位符 2">
+            <a:extLst>
+              <a:ext uri="{FF2B5EF4-FFF2-40B4-BE49-F238E27FC236}">
+                <a16:creationId xmlns:a16="http://schemas.microsoft.com/office/drawing/2014/main" id="{921616EB-8305-6357-163B-4EF465896EBF}"/>
+              </a:ext>
+            </a:extLst>
+          </p:cNvPr>
+          <p:cNvSpPr>
+            <a:spLocks noGrp="1"/>
+          </p:cNvSpPr>
+          <p:nvPr>
+            <p:ph type="body" idx="1"/>
+          </p:nvPr>
+        </p:nvSpPr>
+        <p:spPr/>
+        <p:txBody>
+          <a:bodyPr/>
+          <a:lstStyle/>
+          <a:p>
+            <a:pPr algn="l">
+              <a:spcBef>
+                <a:spcPts val="450"/>
+              </a:spcBef>
+              <a:spcAft>
+                <a:spcPts val="450"/>
+              </a:spcAft>
+            </a:pPr>
+            <a:r>
+              <a:rPr lang="en-US" altLang="zh-CN" sz="1800" b="1" i="0">
+                <a:solidFill>
+                  <a:srgbClr val="2D3B45"/>
+                </a:solidFill>
+                <a:effectLst/>
+                <a:latin typeface="Lato Extended"/>
+              </a:rPr>
+              <a:t>Introduction Slide</a:t>
+            </a:r>
+            <a:endParaRPr lang="en-US" altLang="zh-CN" sz="1800" b="0" i="0">
+              <a:solidFill>
+                <a:srgbClr val="2D3B45"/>
+              </a:solidFill>
+              <a:effectLst/>
+              <a:latin typeface="Lato Extended"/>
+            </a:endParaRPr>
+          </a:p>
+          <a:p>
+            <a:pPr algn="l">
+              <a:spcAft>
+                <a:spcPts val="450"/>
+              </a:spcAft>
+              <a:buFont typeface="Arial" panose="020B0604020202020204" pitchFamily="34" charset="0"/>
+              <a:buChar char="•"/>
+            </a:pPr>
+            <a:r>
+              <a:rPr lang="en-US" altLang="zh-CN" sz="1800" b="1" i="0">
+                <a:solidFill>
+                  <a:srgbClr val="2D3B45"/>
+                </a:solidFill>
+                <a:effectLst/>
+                <a:latin typeface="v-sans"/>
+              </a:rPr>
+              <a:t>Brief Introduction:</a:t>
+            </a:r>
+            <a:r>
+              <a:rPr lang="en-US" altLang="zh-CN" sz="1800" b="0" i="0">
+                <a:solidFill>
+                  <a:srgbClr val="2D3B45"/>
+                </a:solidFill>
+                <a:effectLst/>
+                <a:latin typeface="v-sans"/>
+              </a:rPr>
+              <a:t> of the team and the topic</a:t>
+            </a:r>
+          </a:p>
+          <a:p>
+            <a:endParaRPr lang="zh-CN" altLang="en-US"/>
+          </a:p>
+        </p:txBody>
+      </p:sp>
+      <p:sp>
+        <p:nvSpPr>
+          <p:cNvPr id="4" name="灯片编号占位符 3">
+            <a:extLst>
+              <a:ext uri="{FF2B5EF4-FFF2-40B4-BE49-F238E27FC236}">
+                <a16:creationId xmlns:a16="http://schemas.microsoft.com/office/drawing/2014/main" id="{D8244A0C-C891-E6C3-38AA-F52EB1CAE714}"/>
+              </a:ext>
+            </a:extLst>
+          </p:cNvPr>
+          <p:cNvSpPr>
+            <a:spLocks noGrp="1"/>
+          </p:cNvSpPr>
+          <p:nvPr>
+            <p:ph type="sldNum" sz="quarter" idx="5"/>
+          </p:nvPr>
+        </p:nvSpPr>
+        <p:spPr/>
+        <p:txBody>
+          <a:bodyPr/>
+          <a:lstStyle/>
+          <a:p>
+            <a:fld id="{EED2C466-1B0F-4591-A952-5F31096967DE}" type="slidenum">
+              <a:rPr lang="zh-CN" altLang="en-US" smtClean="0"/>
+              <a:t>6</a:t>
+            </a:fld>
+            <a:endParaRPr lang="zh-CN" altLang="en-US"/>
+          </a:p>
+        </p:txBody>
+      </p:sp>
+    </p:spTree>
+    <p:extLst>
+      <p:ext uri="{BB962C8B-B14F-4D97-AF65-F5344CB8AC3E}">
+        <p14:creationId xmlns:p14="http://schemas.microsoft.com/office/powerpoint/2010/main" val="2766418503"/>
+      </p:ext>
+    </p:extLst>
+  </p:cSld>
+  <p:clrMapOvr>
+    <a:masterClrMapping/>
+  </p:clrMapOvr>
+</p:notes>
+</file>
+
+<file path=ppt/notesSlides/notesSlide7.xml><?xml version="1.0" encoding="utf-8"?>
+<p:notes xmlns:a="http://schemas.openxmlformats.org/drawingml/2006/main" xmlns:r="http://schemas.openxmlformats.org/officeDocument/2006/relationships" xmlns:p="http://schemas.openxmlformats.org/presentationml/2006/main">
+  <p:cSld>
+    <p:spTree>
+      <p:nvGrpSpPr>
+        <p:cNvPr id="1" name="">
+          <a:extLst>
+            <a:ext uri="{FF2B5EF4-FFF2-40B4-BE49-F238E27FC236}">
               <a16:creationId xmlns:a16="http://schemas.microsoft.com/office/drawing/2014/main" id="{60665CC6-AC88-B6F5-345E-C493DD2E9EE3}"/>
             </a:ext>
           </a:extLst>
@@ -3531,7 +3860,7 @@
           <a:p>
             <a:fld id="{EED2C466-1B0F-4591-A952-5F31096967DE}" type="slidenum">
               <a:rPr lang="zh-CN" altLang="en-US" smtClean="0"/>
-              <a:t>6</a:t>
+              <a:t>7</a:t>
             </a:fld>
             <a:endParaRPr lang="zh-CN" altLang="en-US"/>
           </a:p>
@@ -3550,7 +3879,7 @@
 </p:notes>
 </file>
 
-<file path=ppt/notesSlides/notesSlide7.xml><?xml version="1.0" encoding="utf-8"?>
+<file path=ppt/notesSlides/notesSlide8.xml><?xml version="1.0" encoding="utf-8"?>
 <p:notes xmlns:a="http://schemas.openxmlformats.org/drawingml/2006/main" xmlns:r="http://schemas.openxmlformats.org/officeDocument/2006/relationships" xmlns:p="http://schemas.openxmlformats.org/presentationml/2006/main">
   <p:cSld>
     <p:spTree>
@@ -3695,7 +4024,7 @@
           <a:p>
             <a:fld id="{EED2C466-1B0F-4591-A952-5F31096967DE}" type="slidenum">
               <a:rPr lang="zh-CN" altLang="en-US" smtClean="0"/>
-              <a:t>7</a:t>
+              <a:t>8</a:t>
             </a:fld>
             <a:endParaRPr lang="zh-CN" altLang="en-US"/>
           </a:p>
@@ -3714,7 +4043,7 @@
 </p:notes>
 </file>
 
-<file path=ppt/notesSlides/notesSlide8.xml><?xml version="1.0" encoding="utf-8"?>
+<file path=ppt/notesSlides/notesSlide9.xml><?xml version="1.0" encoding="utf-8"?>
 <p:notes xmlns:a="http://schemas.openxmlformats.org/drawingml/2006/main" xmlns:r="http://schemas.openxmlformats.org/officeDocument/2006/relationships" xmlns:p="http://schemas.openxmlformats.org/presentationml/2006/main">
   <p:cSld>
     <p:spTree>
@@ -3859,7 +4188,7 @@
           <a:p>
             <a:fld id="{EED2C466-1B0F-4591-A952-5F31096967DE}" type="slidenum">
               <a:rPr lang="zh-CN" altLang="en-US" smtClean="0"/>
-              <a:t>8</a:t>
+              <a:t>9</a:t>
             </a:fld>
             <a:endParaRPr lang="zh-CN" altLang="en-US"/>
           </a:p>
@@ -3869,170 +4198,6 @@
     <p:extLst>
       <p:ext uri="{BB962C8B-B14F-4D97-AF65-F5344CB8AC3E}">
         <p14:creationId xmlns:p14="http://schemas.microsoft.com/office/powerpoint/2010/main" val="1486106821"/>
-      </p:ext>
-    </p:extLst>
-  </p:cSld>
-  <p:clrMapOvr>
-    <a:masterClrMapping/>
-  </p:clrMapOvr>
-</p:notes>
-</file>
-
-<file path=ppt/notesSlides/notesSlide9.xml><?xml version="1.0" encoding="utf-8"?>
-<p:notes xmlns:a="http://schemas.openxmlformats.org/drawingml/2006/main" xmlns:r="http://schemas.openxmlformats.org/officeDocument/2006/relationships" xmlns:p="http://schemas.openxmlformats.org/presentationml/2006/main">
-  <p:cSld>
-    <p:spTree>
-      <p:nvGrpSpPr>
-        <p:cNvPr id="1" name="">
-          <a:extLst>
-            <a:ext uri="{FF2B5EF4-FFF2-40B4-BE49-F238E27FC236}">
-              <a16:creationId xmlns:a16="http://schemas.microsoft.com/office/drawing/2014/main" id="{F08AD704-5687-C897-37EE-639D76BAB2B0}"/>
-            </a:ext>
-          </a:extLst>
-        </p:cNvPr>
-        <p:cNvGrpSpPr/>
-        <p:nvPr/>
-      </p:nvGrpSpPr>
-      <p:grpSpPr>
-        <a:xfrm>
-          <a:off x="0" y="0"/>
-          <a:ext cx="0" cy="0"/>
-          <a:chOff x="0" y="0"/>
-          <a:chExt cx="0" cy="0"/>
-        </a:xfrm>
-      </p:grpSpPr>
-      <p:sp>
-        <p:nvSpPr>
-          <p:cNvPr id="2" name="幻灯片图像占位符 1">
-            <a:extLst>
-              <a:ext uri="{FF2B5EF4-FFF2-40B4-BE49-F238E27FC236}">
-                <a16:creationId xmlns:a16="http://schemas.microsoft.com/office/drawing/2014/main" id="{F168772D-C045-02A6-3693-429AE9AF84FE}"/>
-              </a:ext>
-            </a:extLst>
-          </p:cNvPr>
-          <p:cNvSpPr>
-            <a:spLocks noGrp="1" noRot="1" noChangeAspect="1"/>
-          </p:cNvSpPr>
-          <p:nvPr>
-            <p:ph type="sldImg"/>
-          </p:nvPr>
-        </p:nvSpPr>
-        <p:spPr/>
-      </p:sp>
-      <p:sp>
-        <p:nvSpPr>
-          <p:cNvPr id="3" name="备注占位符 2">
-            <a:extLst>
-              <a:ext uri="{FF2B5EF4-FFF2-40B4-BE49-F238E27FC236}">
-                <a16:creationId xmlns:a16="http://schemas.microsoft.com/office/drawing/2014/main" id="{BAC52383-BBDD-CD06-582E-1C52A422B852}"/>
-              </a:ext>
-            </a:extLst>
-          </p:cNvPr>
-          <p:cNvSpPr>
-            <a:spLocks noGrp="1"/>
-          </p:cNvSpPr>
-          <p:nvPr>
-            <p:ph type="body" idx="1"/>
-          </p:nvPr>
-        </p:nvSpPr>
-        <p:spPr/>
-        <p:txBody>
-          <a:bodyPr/>
-          <a:lstStyle/>
-          <a:p>
-            <a:pPr algn="l">
-              <a:spcBef>
-                <a:spcPts val="450"/>
-              </a:spcBef>
-              <a:spcAft>
-                <a:spcPts val="450"/>
-              </a:spcAft>
-            </a:pPr>
-            <a:r>
-              <a:rPr lang="en-US" altLang="zh-CN" sz="1800" b="1" i="0">
-                <a:solidFill>
-                  <a:srgbClr val="2D3B45"/>
-                </a:solidFill>
-                <a:effectLst/>
-                <a:latin typeface="Lato Extended"/>
-              </a:rPr>
-              <a:t>Introduction Slide</a:t>
-            </a:r>
-            <a:endParaRPr lang="en-US" altLang="zh-CN" sz="1800" b="0" i="0">
-              <a:solidFill>
-                <a:srgbClr val="2D3B45"/>
-              </a:solidFill>
-              <a:effectLst/>
-              <a:latin typeface="Lato Extended"/>
-            </a:endParaRPr>
-          </a:p>
-          <a:p>
-            <a:pPr algn="l">
-              <a:spcAft>
-                <a:spcPts val="450"/>
-              </a:spcAft>
-              <a:buFont typeface="Arial" panose="020B0604020202020204" pitchFamily="34" charset="0"/>
-              <a:buChar char="•"/>
-            </a:pPr>
-            <a:r>
-              <a:rPr lang="en-US" altLang="zh-CN" sz="1800" b="1" i="0">
-                <a:solidFill>
-                  <a:srgbClr val="2D3B45"/>
-                </a:solidFill>
-                <a:effectLst/>
-                <a:latin typeface="v-sans"/>
-              </a:rPr>
-              <a:t>Brief Introduction:</a:t>
-            </a:r>
-            <a:r>
-              <a:rPr lang="en-US" altLang="zh-CN" sz="1800" b="0" i="0">
-                <a:solidFill>
-                  <a:srgbClr val="2D3B45"/>
-                </a:solidFill>
-                <a:effectLst/>
-                <a:latin typeface="v-sans"/>
-              </a:rPr>
-              <a:t> of the team and the topic</a:t>
-            </a:r>
-          </a:p>
-          <a:p>
-            <a:endParaRPr lang="zh-CN" altLang="en-US"/>
-          </a:p>
-        </p:txBody>
-      </p:sp>
-      <p:sp>
-        <p:nvSpPr>
-          <p:cNvPr id="4" name="灯片编号占位符 3">
-            <a:extLst>
-              <a:ext uri="{FF2B5EF4-FFF2-40B4-BE49-F238E27FC236}">
-                <a16:creationId xmlns:a16="http://schemas.microsoft.com/office/drawing/2014/main" id="{4EC632BB-84C0-6D94-8195-420737B13DE8}"/>
-              </a:ext>
-            </a:extLst>
-          </p:cNvPr>
-          <p:cNvSpPr>
-            <a:spLocks noGrp="1"/>
-          </p:cNvSpPr>
-          <p:nvPr>
-            <p:ph type="sldNum" sz="quarter" idx="5"/>
-          </p:nvPr>
-        </p:nvSpPr>
-        <p:spPr/>
-        <p:txBody>
-          <a:bodyPr/>
-          <a:lstStyle/>
-          <a:p>
-            <a:fld id="{EED2C466-1B0F-4591-A952-5F31096967DE}" type="slidenum">
-              <a:rPr lang="zh-CN" altLang="en-US" smtClean="0"/>
-              <a:t>9</a:t>
-            </a:fld>
-            <a:endParaRPr lang="zh-CN" altLang="en-US"/>
-          </a:p>
-        </p:txBody>
-      </p:sp>
-    </p:spTree>
-    <p:extLst>
-      <p:ext uri="{BB962C8B-B14F-4D97-AF65-F5344CB8AC3E}">
-        <p14:creationId xmlns:p14="http://schemas.microsoft.com/office/powerpoint/2010/main" val="3723329139"/>
       </p:ext>
     </p:extLst>
   </p:cSld>
@@ -7653,6 +7818,601 @@
         <p:cNvPr id="1" name="">
           <a:extLst>
             <a:ext uri="{FF2B5EF4-FFF2-40B4-BE49-F238E27FC236}">
+              <a16:creationId xmlns:a16="http://schemas.microsoft.com/office/drawing/2014/main" id="{5924EE15-657C-E1BE-12BC-396E28BED21E}"/>
+            </a:ext>
+          </a:extLst>
+        </p:cNvPr>
+        <p:cNvGrpSpPr/>
+        <p:nvPr/>
+      </p:nvGrpSpPr>
+      <p:grpSpPr>
+        <a:xfrm>
+          <a:off x="0" y="0"/>
+          <a:ext cx="0" cy="0"/>
+          <a:chOff x="0" y="0"/>
+          <a:chExt cx="0" cy="0"/>
+        </a:xfrm>
+      </p:grpSpPr>
+      <p:sp>
+        <p:nvSpPr>
+          <p:cNvPr id="3" name="图文框 2">
+            <a:extLst>
+              <a:ext uri="{FF2B5EF4-FFF2-40B4-BE49-F238E27FC236}">
+                <a16:creationId xmlns:a16="http://schemas.microsoft.com/office/drawing/2014/main" id="{AF05072A-D479-E840-B88F-DF8176D606C0}"/>
+              </a:ext>
+            </a:extLst>
+          </p:cNvPr>
+          <p:cNvSpPr/>
+          <p:nvPr/>
+        </p:nvSpPr>
+        <p:spPr>
+          <a:xfrm>
+            <a:off x="164147" y="282575"/>
+            <a:ext cx="11863705" cy="6403975"/>
+          </a:xfrm>
+          <a:prstGeom prst="frame">
+            <a:avLst>
+              <a:gd name="adj1" fmla="val 1196"/>
+            </a:avLst>
+          </a:prstGeom>
+          <a:solidFill>
+            <a:srgbClr val="13294B"/>
+          </a:solidFill>
+          <a:ln>
+            <a:solidFill>
+              <a:srgbClr val="13294B"/>
+            </a:solidFill>
+          </a:ln>
+          <a:effectLst>
+            <a:innerShdw blurRad="63500" dist="50800" dir="13500000">
+              <a:prstClr val="black">
+                <a:alpha val="50000"/>
+              </a:prstClr>
+            </a:innerShdw>
+          </a:effectLst>
+        </p:spPr>
+        <p:style>
+          <a:lnRef idx="2">
+            <a:schemeClr val="accent1">
+              <a:lumMod val="75000"/>
+            </a:schemeClr>
+          </a:lnRef>
+          <a:fillRef idx="1">
+            <a:schemeClr val="accent1"/>
+          </a:fillRef>
+          <a:effectRef idx="0">
+            <a:srgbClr val="FFFFFF"/>
+          </a:effectRef>
+          <a:fontRef idx="minor">
+            <a:schemeClr val="lt1"/>
+          </a:fontRef>
+        </p:style>
+        <p:txBody>
+          <a:bodyPr rtlCol="0" anchor="ctr"/>
+          <a:lstStyle/>
+          <a:p>
+            <a:pPr algn="ctr"/>
+            <a:endParaRPr lang="zh-CN" altLang="en-US"/>
+          </a:p>
+        </p:txBody>
+      </p:sp>
+      <p:sp>
+        <p:nvSpPr>
+          <p:cNvPr id="4" name="文本框 3">
+            <a:extLst>
+              <a:ext uri="{FF2B5EF4-FFF2-40B4-BE49-F238E27FC236}">
+                <a16:creationId xmlns:a16="http://schemas.microsoft.com/office/drawing/2014/main" id="{2C1F6BDC-B7C9-D88B-FC8A-17F809BE126B}"/>
+              </a:ext>
+            </a:extLst>
+          </p:cNvPr>
+          <p:cNvSpPr txBox="1"/>
+          <p:nvPr/>
+        </p:nvSpPr>
+        <p:spPr>
+          <a:xfrm>
+            <a:off x="650457" y="614859"/>
+            <a:ext cx="9446043" cy="769441"/>
+          </a:xfrm>
+          <a:prstGeom prst="rect">
+            <a:avLst/>
+          </a:prstGeom>
+          <a:noFill/>
+        </p:spPr>
+        <p:txBody>
+          <a:bodyPr wrap="square" lIns="91440" tIns="45720" rIns="91440" bIns="45720" rtlCol="0" anchor="t">
+            <a:spAutoFit/>
+          </a:bodyPr>
+          <a:lstStyle/>
+          <a:p>
+            <a:r>
+              <a:rPr lang="en-US" altLang="zh-CN" sz="4400" b="1" dirty="0">
+                <a:solidFill>
+                  <a:srgbClr val="13294B"/>
+                </a:solidFill>
+                <a:latin typeface="Calibri"/>
+                <a:ea typeface="等线"/>
+                <a:cs typeface="+mj-lt"/>
+              </a:rPr>
+              <a:t>Empathy Calibration Score (ECS)</a:t>
+            </a:r>
+          </a:p>
+        </p:txBody>
+      </p:sp>
+      <p:sp>
+        <p:nvSpPr>
+          <p:cNvPr id="9" name="半闭框 8">
+            <a:extLst>
+              <a:ext uri="{FF2B5EF4-FFF2-40B4-BE49-F238E27FC236}">
+                <a16:creationId xmlns:a16="http://schemas.microsoft.com/office/drawing/2014/main" id="{94AAEBAE-9D2F-9263-05DC-ECECE2320254}"/>
+              </a:ext>
+            </a:extLst>
+          </p:cNvPr>
+          <p:cNvSpPr/>
+          <p:nvPr/>
+        </p:nvSpPr>
+        <p:spPr>
+          <a:xfrm>
+            <a:off x="163830" y="282575"/>
+            <a:ext cx="3148330" cy="2355215"/>
+          </a:xfrm>
+          <a:prstGeom prst="halfFrame">
+            <a:avLst>
+              <a:gd name="adj1" fmla="val 4756"/>
+              <a:gd name="adj2" fmla="val 5021"/>
+            </a:avLst>
+          </a:prstGeom>
+          <a:solidFill>
+            <a:srgbClr val="FF5F05"/>
+          </a:solidFill>
+          <a:ln>
+            <a:solidFill>
+              <a:srgbClr val="FF5F05"/>
+            </a:solidFill>
+          </a:ln>
+        </p:spPr>
+        <p:style>
+          <a:lnRef idx="2">
+            <a:schemeClr val="accent1">
+              <a:lumMod val="75000"/>
+            </a:schemeClr>
+          </a:lnRef>
+          <a:fillRef idx="1">
+            <a:schemeClr val="accent1"/>
+          </a:fillRef>
+          <a:effectRef idx="0">
+            <a:srgbClr val="FFFFFF"/>
+          </a:effectRef>
+          <a:fontRef idx="minor">
+            <a:schemeClr val="lt1"/>
+          </a:fontRef>
+        </p:style>
+        <p:txBody>
+          <a:bodyPr rtlCol="0" anchor="ctr"/>
+          <a:lstStyle/>
+          <a:p>
+            <a:pPr algn="ctr"/>
+            <a:endParaRPr lang="zh-CN" altLang="en-US">
+              <a:solidFill>
+                <a:schemeClr val="tx1"/>
+              </a:solidFill>
+            </a:endParaRPr>
+          </a:p>
+        </p:txBody>
+      </p:sp>
+      <p:sp>
+        <p:nvSpPr>
+          <p:cNvPr id="10" name="半闭框 9">
+            <a:extLst>
+              <a:ext uri="{FF2B5EF4-FFF2-40B4-BE49-F238E27FC236}">
+                <a16:creationId xmlns:a16="http://schemas.microsoft.com/office/drawing/2014/main" id="{FE586475-6379-515B-A8C7-357240F33B6B}"/>
+              </a:ext>
+            </a:extLst>
+          </p:cNvPr>
+          <p:cNvSpPr/>
+          <p:nvPr>
+            <p:custDataLst>
+              <p:tags r:id="rId1"/>
+            </p:custDataLst>
+          </p:nvPr>
+        </p:nvSpPr>
+        <p:spPr>
+          <a:xfrm rot="10800000">
+            <a:off x="8357868" y="4262753"/>
+            <a:ext cx="3669983" cy="2423795"/>
+          </a:xfrm>
+          <a:prstGeom prst="halfFrame">
+            <a:avLst>
+              <a:gd name="adj1" fmla="val 4659"/>
+              <a:gd name="adj2" fmla="val 4349"/>
+            </a:avLst>
+          </a:prstGeom>
+          <a:solidFill>
+            <a:srgbClr val="FF5F05"/>
+          </a:solidFill>
+          <a:ln>
+            <a:solidFill>
+              <a:srgbClr val="FF5F05"/>
+            </a:solidFill>
+          </a:ln>
+        </p:spPr>
+        <p:style>
+          <a:lnRef idx="2">
+            <a:schemeClr val="accent1">
+              <a:lumMod val="75000"/>
+            </a:schemeClr>
+          </a:lnRef>
+          <a:fillRef idx="1">
+            <a:schemeClr val="accent1"/>
+          </a:fillRef>
+          <a:effectRef idx="0">
+            <a:srgbClr val="FFFFFF"/>
+          </a:effectRef>
+          <a:fontRef idx="minor">
+            <a:schemeClr val="lt1"/>
+          </a:fontRef>
+        </p:style>
+        <p:txBody>
+          <a:bodyPr rtlCol="0" anchor="ctr"/>
+          <a:lstStyle/>
+          <a:p>
+            <a:pPr algn="ctr"/>
+            <a:endParaRPr lang="zh-CN" altLang="en-US">
+              <a:solidFill>
+                <a:schemeClr val="tx1"/>
+              </a:solidFill>
+            </a:endParaRPr>
+          </a:p>
+        </p:txBody>
+      </p:sp>
+      <p:cxnSp>
+        <p:nvCxnSpPr>
+          <p:cNvPr id="13" name="直接连接符 12">
+            <a:extLst>
+              <a:ext uri="{FF2B5EF4-FFF2-40B4-BE49-F238E27FC236}">
+                <a16:creationId xmlns:a16="http://schemas.microsoft.com/office/drawing/2014/main" id="{CADDF9A0-848B-41BB-ED8B-EEDD7C7754A6}"/>
+              </a:ext>
+            </a:extLst>
+          </p:cNvPr>
+          <p:cNvCxnSpPr/>
+          <p:nvPr/>
+        </p:nvCxnSpPr>
+        <p:spPr>
+          <a:xfrm>
+            <a:off x="650457" y="1480820"/>
+            <a:ext cx="6546850" cy="14605"/>
+          </a:xfrm>
+          <a:prstGeom prst="line">
+            <a:avLst/>
+          </a:prstGeom>
+          <a:ln w="57150">
+            <a:solidFill>
+              <a:srgbClr val="FF5F05">
+                <a:alpha val="81000"/>
+              </a:srgbClr>
+            </a:solidFill>
+          </a:ln>
+        </p:spPr>
+        <p:style>
+          <a:lnRef idx="2">
+            <a:schemeClr val="accent1"/>
+          </a:lnRef>
+          <a:fillRef idx="0">
+            <a:srgbClr val="FFFFFF"/>
+          </a:fillRef>
+          <a:effectRef idx="0">
+            <a:srgbClr val="FFFFFF"/>
+          </a:effectRef>
+          <a:fontRef idx="minor">
+            <a:schemeClr val="tx1"/>
+          </a:fontRef>
+        </p:style>
+      </p:cxnSp>
+      <p:pic>
+        <p:nvPicPr>
+          <p:cNvPr id="100" name="图片 99">
+            <a:extLst>
+              <a:ext uri="{FF2B5EF4-FFF2-40B4-BE49-F238E27FC236}">
+                <a16:creationId xmlns:a16="http://schemas.microsoft.com/office/drawing/2014/main" id="{BBFAD97B-9ECD-B243-06E5-0C59695D79CB}"/>
+              </a:ext>
+            </a:extLst>
+          </p:cNvPr>
+          <p:cNvPicPr/>
+          <p:nvPr/>
+        </p:nvPicPr>
+        <p:blipFill>
+          <a:blip r:embed="rId4"/>
+          <a:stretch>
+            <a:fillRect/>
+          </a:stretch>
+        </p:blipFill>
+        <p:spPr>
+          <a:xfrm>
+            <a:off x="9906635" y="171450"/>
+            <a:ext cx="1906270" cy="1212850"/>
+          </a:xfrm>
+          <a:prstGeom prst="rect">
+            <a:avLst/>
+          </a:prstGeom>
+          <a:noFill/>
+          <a:ln w="9525">
+            <a:noFill/>
+          </a:ln>
+        </p:spPr>
+      </p:pic>
+      <p:sp>
+        <p:nvSpPr>
+          <p:cNvPr id="5" name="文本框 4">
+            <a:extLst>
+              <a:ext uri="{FF2B5EF4-FFF2-40B4-BE49-F238E27FC236}">
+                <a16:creationId xmlns:a16="http://schemas.microsoft.com/office/drawing/2014/main" id="{983ADD24-6931-539A-526C-9EE7C3AE6976}"/>
+              </a:ext>
+            </a:extLst>
+          </p:cNvPr>
+          <p:cNvSpPr txBox="1"/>
+          <p:nvPr/>
+        </p:nvSpPr>
+        <p:spPr>
+          <a:xfrm>
+            <a:off x="613543" y="1741049"/>
+            <a:ext cx="10964912" cy="2062103"/>
+          </a:xfrm>
+          <a:prstGeom prst="rect">
+            <a:avLst/>
+          </a:prstGeom>
+          <a:noFill/>
+        </p:spPr>
+        <p:txBody>
+          <a:bodyPr wrap="square" lIns="91440" tIns="45720" rIns="91440" bIns="45720" rtlCol="0" anchor="t">
+            <a:spAutoFit/>
+          </a:bodyPr>
+          <a:lstStyle/>
+          <a:p>
+            <a:pPr marL="457200" indent="-457200">
+              <a:spcAft>
+                <a:spcPts val="600"/>
+              </a:spcAft>
+              <a:buFont typeface="Arial" panose="020B0604020202020204" pitchFamily="34" charset="0"/>
+              <a:buChar char="•"/>
+            </a:pPr>
+            <a:r>
+              <a:rPr lang="en-US" altLang="zh-CN" sz="3200" dirty="0">
+                <a:solidFill>
+                  <a:srgbClr val="13294B"/>
+                </a:solidFill>
+                <a:latin typeface="Calibri"/>
+                <a:ea typeface="宋体"/>
+                <a:cs typeface="Calibri"/>
+              </a:rPr>
+              <a:t>The ECS is a two-dimensional rubric designed to measure not absolute empathy, but calibration— how well a response’s empathetic register matches what the customer’s expressed frustration level warrants.</a:t>
+            </a:r>
+          </a:p>
+        </p:txBody>
+      </p:sp>
+      <p:graphicFrame>
+        <p:nvGraphicFramePr>
+          <p:cNvPr id="2" name="表格 1">
+            <a:extLst>
+              <a:ext uri="{FF2B5EF4-FFF2-40B4-BE49-F238E27FC236}">
+                <a16:creationId xmlns:a16="http://schemas.microsoft.com/office/drawing/2014/main" id="{5B173359-1CCA-714D-463D-B6A0401E7C9C}"/>
+              </a:ext>
+            </a:extLst>
+          </p:cNvPr>
+          <p:cNvGraphicFramePr>
+            <a:graphicFrameLocks noGrp="1"/>
+          </p:cNvGraphicFramePr>
+          <p:nvPr>
+            <p:extLst>
+              <p:ext uri="{D42A27DB-BD31-4B8C-83A1-F6EECF244321}">
+                <p14:modId xmlns:p14="http://schemas.microsoft.com/office/powerpoint/2010/main" val="2090334612"/>
+              </p:ext>
+            </p:extLst>
+          </p:nvPr>
+        </p:nvGraphicFramePr>
+        <p:xfrm>
+          <a:off x="914401" y="3803152"/>
+          <a:ext cx="10469571" cy="2533953"/>
+        </p:xfrm>
+        <a:graphic>
+          <a:graphicData uri="http://schemas.openxmlformats.org/drawingml/2006/table">
+            <a:tbl>
+              <a:tblPr firstRow="1" bandRow="1">
+                <a:tableStyleId>{21E4AEA4-8DFA-4A89-87EB-49C32662AFE0}</a:tableStyleId>
+              </a:tblPr>
+              <a:tblGrid>
+                <a:gridCol w="3489857">
+                  <a:extLst>
+                    <a:ext uri="{9D8B030D-6E8A-4147-A177-3AD203B41FA5}">
+                      <a16:colId xmlns:a16="http://schemas.microsoft.com/office/drawing/2014/main" val="2473411904"/>
+                    </a:ext>
+                  </a:extLst>
+                </a:gridCol>
+                <a:gridCol w="3489857">
+                  <a:extLst>
+                    <a:ext uri="{9D8B030D-6E8A-4147-A177-3AD203B41FA5}">
+                      <a16:colId xmlns:a16="http://schemas.microsoft.com/office/drawing/2014/main" val="1406048790"/>
+                    </a:ext>
+                  </a:extLst>
+                </a:gridCol>
+                <a:gridCol w="3489857">
+                  <a:extLst>
+                    <a:ext uri="{9D8B030D-6E8A-4147-A177-3AD203B41FA5}">
+                      <a16:colId xmlns:a16="http://schemas.microsoft.com/office/drawing/2014/main" val="3813345470"/>
+                    </a:ext>
+                  </a:extLst>
+                </a:gridCol>
+              </a:tblGrid>
+              <a:tr h="317802">
+                <a:tc>
+                  <a:txBody>
+                    <a:bodyPr/>
+                    <a:lstStyle/>
+                    <a:p>
+                      <a:r>
+                        <a:rPr lang="en-US" altLang="zh-CN" dirty="0"/>
+                        <a:t>Dimension</a:t>
+                      </a:r>
+                      <a:endParaRPr lang="zh-CN" altLang="en-US" dirty="0"/>
+                    </a:p>
+                  </a:txBody>
+                  <a:tcPr/>
+                </a:tc>
+                <a:tc>
+                  <a:txBody>
+                    <a:bodyPr/>
+                    <a:lstStyle/>
+                    <a:p>
+                      <a:r>
+                        <a:rPr lang="en-US" altLang="zh-CN" dirty="0"/>
+                        <a:t>Measurement</a:t>
+                      </a:r>
+                      <a:endParaRPr lang="zh-CN" altLang="en-US" dirty="0"/>
+                    </a:p>
+                  </a:txBody>
+                  <a:tcPr/>
+                </a:tc>
+                <a:tc>
+                  <a:txBody>
+                    <a:bodyPr/>
+                    <a:lstStyle/>
+                    <a:p>
+                      <a:r>
+                        <a:rPr lang="en-US" altLang="zh-CN" dirty="0"/>
+                        <a:t>Weight at high FIS</a:t>
+                      </a:r>
+                      <a:endParaRPr lang="zh-CN" altLang="en-US" dirty="0"/>
+                    </a:p>
+                  </a:txBody>
+                  <a:tcPr/>
+                </a:tc>
+                <a:extLst>
+                  <a:ext uri="{0D108BD9-81ED-4DB2-BD59-A6C34878D82A}">
+                    <a16:rowId xmlns:a16="http://schemas.microsoft.com/office/drawing/2014/main" val="208840510"/>
+                  </a:ext>
+                </a:extLst>
+              </a:tr>
+              <a:tr h="783620">
+                <a:tc>
+                  <a:txBody>
+                    <a:bodyPr/>
+                    <a:lstStyle/>
+                    <a:p>
+                      <a:r>
+                        <a:rPr lang="en-US" altLang="zh-CN" dirty="0"/>
+                        <a:t>Apology density</a:t>
+                      </a:r>
+                      <a:endParaRPr lang="zh-CN" altLang="en-US" dirty="0"/>
+                    </a:p>
+                  </a:txBody>
+                  <a:tcPr/>
+                </a:tc>
+                <a:tc>
+                  <a:txBody>
+                    <a:bodyPr/>
+                    <a:lstStyle/>
+                    <a:p>
+                      <a:r>
+                        <a:rPr lang="en-US" altLang="zh-CN" dirty="0"/>
+                        <a:t>Normalized count of apology/regret terms (regex). Fully auto mated.</a:t>
+                      </a:r>
+                      <a:endParaRPr lang="zh-CN" altLang="en-US" dirty="0"/>
+                    </a:p>
+                  </a:txBody>
+                  <a:tcPr/>
+                </a:tc>
+                <a:tc>
+                  <a:txBody>
+                    <a:bodyPr/>
+                    <a:lstStyle/>
+                    <a:p>
+                      <a:r>
+                        <a:rPr lang="en-US" altLang="zh-CN" dirty="0"/>
+                        <a:t>Higher weight</a:t>
+                      </a:r>
+                      <a:endParaRPr lang="zh-CN" altLang="en-US" dirty="0"/>
+                    </a:p>
+                  </a:txBody>
+                  <a:tcPr/>
+                </a:tc>
+                <a:extLst>
+                  <a:ext uri="{0D108BD9-81ED-4DB2-BD59-A6C34878D82A}">
+                    <a16:rowId xmlns:a16="http://schemas.microsoft.com/office/drawing/2014/main" val="1428517476"/>
+                  </a:ext>
+                </a:extLst>
+              </a:tr>
+              <a:tr h="1253793">
+                <a:tc>
+                  <a:txBody>
+                    <a:bodyPr/>
+                    <a:lstStyle/>
+                    <a:p>
+                      <a:r>
+                        <a:rPr lang="en-US" altLang="zh-CN" dirty="0"/>
+                        <a:t>Tone-frustration fit</a:t>
+                      </a:r>
+                      <a:endParaRPr lang="zh-CN" altLang="en-US" dirty="0"/>
+                    </a:p>
+                  </a:txBody>
+                  <a:tcPr/>
+                </a:tc>
+                <a:tc>
+                  <a:txBody>
+                    <a:bodyPr/>
+                    <a:lstStyle/>
+                    <a:p>
+                      <a:r>
+                        <a:rPr lang="en-US" altLang="zh-CN" dirty="0"/>
+                        <a:t>LLM-as-judge (GPT 4o) scores 1–5: does the response tone match the emotional register of the complaint?</a:t>
+                      </a:r>
+                      <a:endParaRPr lang="zh-CN" altLang="en-US" dirty="0"/>
+                    </a:p>
+                  </a:txBody>
+                  <a:tcPr/>
+                </a:tc>
+                <a:tc>
+                  <a:txBody>
+                    <a:bodyPr/>
+                    <a:lstStyle/>
+                    <a:p>
+                      <a:r>
+                        <a:rPr lang="en-US" altLang="zh-CN" dirty="0"/>
+                        <a:t>Equal weight</a:t>
+                      </a:r>
+                      <a:endParaRPr lang="zh-CN" altLang="en-US" dirty="0"/>
+                    </a:p>
+                  </a:txBody>
+                  <a:tcPr/>
+                </a:tc>
+                <a:extLst>
+                  <a:ext uri="{0D108BD9-81ED-4DB2-BD59-A6C34878D82A}">
+                    <a16:rowId xmlns:a16="http://schemas.microsoft.com/office/drawing/2014/main" val="1053424"/>
+                  </a:ext>
+                </a:extLst>
+              </a:tr>
+            </a:tbl>
+          </a:graphicData>
+        </a:graphic>
+      </p:graphicFrame>
+    </p:spTree>
+    <p:extLst>
+      <p:ext uri="{BB962C8B-B14F-4D97-AF65-F5344CB8AC3E}">
+        <p14:creationId xmlns:p14="http://schemas.microsoft.com/office/powerpoint/2010/main" val="2558277820"/>
+      </p:ext>
+    </p:extLst>
+  </p:cSld>
+  <p:clrMapOvr>
+    <a:masterClrMapping/>
+  </p:clrMapOvr>
+</p:sld>
+</file>
+
+<file path=ppt/slides/slide11.xml><?xml version="1.0" encoding="utf-8"?>
+<p:sld xmlns:a="http://schemas.openxmlformats.org/drawingml/2006/main" xmlns:r="http://schemas.openxmlformats.org/officeDocument/2006/relationships" xmlns:p="http://schemas.openxmlformats.org/presentationml/2006/main">
+  <p:cSld>
+    <p:spTree>
+      <p:nvGrpSpPr>
+        <p:cNvPr id="1" name="">
+          <a:extLst>
+            <a:ext uri="{FF2B5EF4-FFF2-40B4-BE49-F238E27FC236}">
               <a16:creationId xmlns:a16="http://schemas.microsoft.com/office/drawing/2014/main" id="{F91C1AA8-633B-0E63-2970-BD86F8762D1B}"/>
             </a:ext>
           </a:extLst>
@@ -8234,7 +8994,7 @@
 </p:sld>
 </file>
 
-<file path=ppt/slides/slide11.xml><?xml version="1.0" encoding="utf-8"?>
+<file path=ppt/slides/slide12.xml><?xml version="1.0" encoding="utf-8"?>
 <p:sld xmlns:a="http://schemas.openxmlformats.org/drawingml/2006/main" xmlns:r="http://schemas.openxmlformats.org/officeDocument/2006/relationships" xmlns:p="http://schemas.openxmlformats.org/presentationml/2006/main">
   <p:cSld>
     <p:spTree>
@@ -8694,7 +9454,7 @@
 </p:sld>
 </file>
 
-<file path=ppt/slides/slide12.xml><?xml version="1.0" encoding="utf-8"?>
+<file path=ppt/slides/slide13.xml><?xml version="1.0" encoding="utf-8"?>
 <p:sld xmlns:a="http://schemas.openxmlformats.org/drawingml/2006/main" xmlns:r="http://schemas.openxmlformats.org/officeDocument/2006/relationships" xmlns:p="http://schemas.openxmlformats.org/presentationml/2006/main">
   <p:cSld>
     <p:spTree>
@@ -9145,7 +9905,7 @@
 </p:sld>
 </file>
 
-<file path=ppt/slides/slide13.xml><?xml version="1.0" encoding="utf-8"?>
+<file path=ppt/slides/slide14.xml><?xml version="1.0" encoding="utf-8"?>
 <p:sld xmlns:a="http://schemas.openxmlformats.org/drawingml/2006/main" xmlns:r="http://schemas.openxmlformats.org/officeDocument/2006/relationships" xmlns:p="http://schemas.openxmlformats.org/presentationml/2006/main">
   <p:cSld>
     <p:spTree>
@@ -9544,7 +10304,7 @@
 </p:sld>
 </file>
 
-<file path=ppt/slides/slide14.xml><?xml version="1.0" encoding="utf-8"?>
+<file path=ppt/slides/slide15.xml><?xml version="1.0" encoding="utf-8"?>
 <p:sld xmlns:a="http://schemas.openxmlformats.org/drawingml/2006/main" xmlns:r="http://schemas.openxmlformats.org/officeDocument/2006/relationships" xmlns:p="http://schemas.openxmlformats.org/presentationml/2006/main">
   <p:cSld>
     <p:spTree>
@@ -10047,7 +10807,7 @@
 </p:sld>
 </file>
 
-<file path=ppt/slides/slide15.xml><?xml version="1.0" encoding="utf-8"?>
+<file path=ppt/slides/slide16.xml><?xml version="1.0" encoding="utf-8"?>
 <p:sld xmlns:a="http://schemas.openxmlformats.org/drawingml/2006/main" xmlns:r="http://schemas.openxmlformats.org/officeDocument/2006/relationships" xmlns:p="http://schemas.openxmlformats.org/presentationml/2006/main">
   <p:cSld>
     <p:spTree>
@@ -10550,7 +11310,7 @@
 </p:sld>
 </file>
 
-<file path=ppt/slides/slide16.xml><?xml version="1.0" encoding="utf-8"?>
+<file path=ppt/slides/slide17.xml><?xml version="1.0" encoding="utf-8"?>
 <p:sld xmlns:a="http://schemas.openxmlformats.org/drawingml/2006/main" xmlns:r="http://schemas.openxmlformats.org/officeDocument/2006/relationships" xmlns:p="http://schemas.openxmlformats.org/presentationml/2006/main">
   <p:cSld>
     <p:spTree>
@@ -11853,7 +12613,7 @@
           <p:nvPr>
             <p:extLst>
               <p:ext uri="{D42A27DB-BD31-4B8C-83A1-F6EECF244321}">
-                <p14:modId xmlns:p14="http://schemas.microsoft.com/office/powerpoint/2010/main" val="1183900994"/>
+                <p14:modId xmlns:p14="http://schemas.microsoft.com/office/powerpoint/2010/main" val="215628371"/>
               </p:ext>
             </p:extLst>
           </p:nvPr>
@@ -11891,17 +12651,6 @@
                     <a:lstStyle/>
                     <a:p>
                       <a:r>
-                        <a:rPr lang="en-US" altLang="zh-CN" sz="3200" dirty="0" err="1">
-                          <a:solidFill>
-                            <a:srgbClr val="13294B"/>
-                          </a:solidFill>
-                          <a:latin typeface="Calibri"/>
-                          <a:ea typeface="宋体"/>
-                          <a:cs typeface="Calibri"/>
-                        </a:rPr>
-                        <a:t>Yuliang</a:t>
-                      </a:r>
-                      <a:r>
                         <a:rPr lang="en-US" altLang="zh-CN" sz="3200" dirty="0">
                           <a:solidFill>
                             <a:srgbClr val="13294B"/>
@@ -11910,7 +12659,7 @@
                           <a:ea typeface="宋体"/>
                           <a:cs typeface="Calibri"/>
                         </a:rPr>
-                        <a:t> Lin</a:t>
+                        <a:t>Yu-Liang Lin</a:t>
                       </a:r>
                       <a:endParaRPr lang="zh-CN" altLang="en-US" sz="3200" kern="1200" dirty="0">
                         <a:solidFill>
@@ -12956,7 +13705,7 @@
               <a:buChar char="•"/>
             </a:pPr>
             <a:r>
-              <a:rPr lang="en-US" altLang="zh-CN" sz="3200" b="1" dirty="0">
+              <a:rPr lang="en-US" altLang="zh-CN" sz="3200" dirty="0">
                 <a:solidFill>
                   <a:srgbClr val="13294B"/>
                 </a:solidFill>
@@ -12964,7 +13713,29 @@
                 <a:ea typeface="宋体"/>
                 <a:cs typeface="Calibri"/>
               </a:rPr>
-              <a:t> Do frontier LLMs systematically over empathize or under-empathize relative to trained human customer support agents, as measured by a calibration delta against a naturalistic behavioral benchmark?</a:t>
+              <a:t>Do frontier LLMs systematically </a:t>
+            </a:r>
+            <a:r>
+              <a:rPr lang="en-US" altLang="zh-CN" sz="3200" dirty="0">
+                <a:solidFill>
+                  <a:srgbClr val="FF5F05"/>
+                </a:solidFill>
+                <a:latin typeface="Calibri"/>
+                <a:ea typeface="宋体"/>
+                <a:cs typeface="Calibri"/>
+              </a:rPr>
+              <a:t>over empathize or under-empathize</a:t>
+            </a:r>
+            <a:r>
+              <a:rPr lang="en-US" altLang="zh-CN" sz="3200" dirty="0">
+                <a:solidFill>
+                  <a:srgbClr val="13294B"/>
+                </a:solidFill>
+                <a:latin typeface="Calibri"/>
+                <a:ea typeface="宋体"/>
+                <a:cs typeface="Calibri"/>
+              </a:rPr>
+              <a:t> relative to trained human customer support agents, as measured by a calibration delta against a naturalistic behavioral benchmark?</a:t>
             </a:r>
           </a:p>
           <a:p>
@@ -12976,7 +13747,7 @@
               <a:buChar char="•"/>
             </a:pPr>
             <a:r>
-              <a:rPr lang="en-US" altLang="zh-CN" sz="3200" b="1" dirty="0">
+              <a:rPr lang="en-US" altLang="zh-CN" sz="3200" dirty="0">
                 <a:solidFill>
                   <a:srgbClr val="13294B"/>
                 </a:solidFill>
@@ -12984,7 +13755,29 @@
                 <a:ea typeface="宋体"/>
                 <a:cs typeface="Calibri"/>
               </a:rPr>
-              <a:t>Is this empathy miscalibration consistent across industry domains, or does it vary by context—specifically between airlines and telecom?</a:t>
+              <a:t>Is this empathy miscalibration consistent across industry domains, or </a:t>
+            </a:r>
+            <a:r>
+              <a:rPr lang="en-US" altLang="zh-CN" sz="3200" dirty="0">
+                <a:solidFill>
+                  <a:srgbClr val="FF5F05"/>
+                </a:solidFill>
+                <a:latin typeface="Calibri"/>
+                <a:ea typeface="宋体"/>
+                <a:cs typeface="Calibri"/>
+              </a:rPr>
+              <a:t>does it vary by context</a:t>
+            </a:r>
+            <a:r>
+              <a:rPr lang="en-US" altLang="zh-CN" sz="3200" dirty="0">
+                <a:solidFill>
+                  <a:srgbClr val="13294B"/>
+                </a:solidFill>
+                <a:latin typeface="Calibri"/>
+                <a:ea typeface="宋体"/>
+                <a:cs typeface="Calibri"/>
+              </a:rPr>
+              <a:t>—specifically between airlines and telecom?</a:t>
             </a:r>
           </a:p>
         </p:txBody>
@@ -13482,7 +14275,7 @@
         <p:cNvPr id="1" name="">
           <a:extLst>
             <a:ext uri="{FF2B5EF4-FFF2-40B4-BE49-F238E27FC236}">
-              <a16:creationId xmlns:a16="http://schemas.microsoft.com/office/drawing/2014/main" id="{92063BEA-CE45-DB84-5E41-B5736BF5200C}"/>
+              <a16:creationId xmlns:a16="http://schemas.microsoft.com/office/drawing/2014/main" id="{4F7E1851-927A-B265-E122-FF50BB7F778E}"/>
             </a:ext>
           </a:extLst>
         </p:cNvPr>
@@ -13502,7 +14295,7 @@
           <p:cNvPr id="3" name="图文框 2">
             <a:extLst>
               <a:ext uri="{FF2B5EF4-FFF2-40B4-BE49-F238E27FC236}">
-                <a16:creationId xmlns:a16="http://schemas.microsoft.com/office/drawing/2014/main" id="{0812264B-D9C6-E924-C341-96FE1A2600B0}"/>
+                <a16:creationId xmlns:a16="http://schemas.microsoft.com/office/drawing/2014/main" id="{D220B63A-D205-550F-CE68-F10F7F88DDF2}"/>
               </a:ext>
             </a:extLst>
           </p:cNvPr>
@@ -13565,7 +14358,7 @@
           <p:cNvPr id="4" name="文本框 3">
             <a:extLst>
               <a:ext uri="{FF2B5EF4-FFF2-40B4-BE49-F238E27FC236}">
-                <a16:creationId xmlns:a16="http://schemas.microsoft.com/office/drawing/2014/main" id="{4E1FAF5E-E5D1-58DE-E630-975F1655BD7A}"/>
+                <a16:creationId xmlns:a16="http://schemas.microsoft.com/office/drawing/2014/main" id="{D5564321-B1AA-80EE-EF3F-D1BD240944B4}"/>
               </a:ext>
             </a:extLst>
           </p:cNvPr>
@@ -13597,7 +14390,7 @@
                 <a:ea typeface="等线"/>
                 <a:cs typeface="+mj-lt"/>
               </a:rPr>
-              <a:t>Methodology</a:t>
+              <a:t>Related Work</a:t>
             </a:r>
           </a:p>
         </p:txBody>
@@ -13607,7 +14400,7 @@
           <p:cNvPr id="9" name="半闭框 8">
             <a:extLst>
               <a:ext uri="{FF2B5EF4-FFF2-40B4-BE49-F238E27FC236}">
-                <a16:creationId xmlns:a16="http://schemas.microsoft.com/office/drawing/2014/main" id="{DE8B4F3C-D273-2EDE-98AA-D6521F9CE1BA}"/>
+                <a16:creationId xmlns:a16="http://schemas.microsoft.com/office/drawing/2014/main" id="{1DA82BCC-7E88-6D72-FD17-F895A05294FD}"/>
               </a:ext>
             </a:extLst>
           </p:cNvPr>
@@ -13668,7 +14461,7 @@
           <p:cNvPr id="10" name="半闭框 9">
             <a:extLst>
               <a:ext uri="{FF2B5EF4-FFF2-40B4-BE49-F238E27FC236}">
-                <a16:creationId xmlns:a16="http://schemas.microsoft.com/office/drawing/2014/main" id="{0B87FC49-93D6-74E5-9990-71828038361B}"/>
+                <a16:creationId xmlns:a16="http://schemas.microsoft.com/office/drawing/2014/main" id="{15925586-2913-BEFD-4E00-F7DAED0D824D}"/>
               </a:ext>
             </a:extLst>
           </p:cNvPr>
@@ -13733,7 +14526,7 @@
           <p:cNvPr id="13" name="直接连接符 12">
             <a:extLst>
               <a:ext uri="{FF2B5EF4-FFF2-40B4-BE49-F238E27FC236}">
-                <a16:creationId xmlns:a16="http://schemas.microsoft.com/office/drawing/2014/main" id="{B1B81DE7-C930-DC19-A1FD-DC4072262536}"/>
+                <a16:creationId xmlns:a16="http://schemas.microsoft.com/office/drawing/2014/main" id="{A3DC0BFC-571D-2143-6E7D-61F157F348FD}"/>
               </a:ext>
             </a:extLst>
           </p:cNvPr>
@@ -13776,7 +14569,7 @@
           <p:cNvPr id="100" name="图片 99">
             <a:extLst>
               <a:ext uri="{FF2B5EF4-FFF2-40B4-BE49-F238E27FC236}">
-                <a16:creationId xmlns:a16="http://schemas.microsoft.com/office/drawing/2014/main" id="{2164D6A5-7093-4A2F-EC32-37060E4005E7}"/>
+                <a16:creationId xmlns:a16="http://schemas.microsoft.com/office/drawing/2014/main" id="{34B27C66-754D-6FD4-05C4-D2319A7A941B}"/>
               </a:ext>
             </a:extLst>
           </p:cNvPr>
@@ -13808,6 +14601,548 @@
           <p:cNvPr id="5" name="文本框 4">
             <a:extLst>
               <a:ext uri="{FF2B5EF4-FFF2-40B4-BE49-F238E27FC236}">
+                <a16:creationId xmlns:a16="http://schemas.microsoft.com/office/drawing/2014/main" id="{1C185285-89B3-B00D-896A-38CDDD591A4B}"/>
+              </a:ext>
+            </a:extLst>
+          </p:cNvPr>
+          <p:cNvSpPr txBox="1"/>
+          <p:nvPr/>
+        </p:nvSpPr>
+        <p:spPr>
+          <a:xfrm>
+            <a:off x="613543" y="1741049"/>
+            <a:ext cx="10892338" cy="4401205"/>
+          </a:xfrm>
+          <a:prstGeom prst="rect">
+            <a:avLst/>
+          </a:prstGeom>
+          <a:noFill/>
+        </p:spPr>
+        <p:txBody>
+          <a:bodyPr wrap="square" lIns="91440" tIns="45720" rIns="91440" bIns="45720" rtlCol="0" anchor="t">
+            <a:spAutoFit/>
+          </a:bodyPr>
+          <a:lstStyle/>
+          <a:p>
+            <a:pPr marL="457200" indent="-457200">
+              <a:spcAft>
+                <a:spcPts val="600"/>
+              </a:spcAft>
+              <a:buFont typeface="Arial" panose="020B0604020202020204" pitchFamily="34" charset="0"/>
+              <a:buChar char="•"/>
+            </a:pPr>
+            <a:r>
+              <a:rPr lang="en-US" altLang="zh-CN" sz="2800" dirty="0">
+                <a:solidFill>
+                  <a:srgbClr val="13294B"/>
+                </a:solidFill>
+                <a:latin typeface="Calibri"/>
+                <a:ea typeface="宋体"/>
+                <a:cs typeface="Calibri"/>
+              </a:rPr>
+              <a:t>A </a:t>
+            </a:r>
+            <a:r>
+              <a:rPr lang="en-US" altLang="zh-CN" sz="2800" dirty="0">
+                <a:solidFill>
+                  <a:srgbClr val="FF5F05"/>
+                </a:solidFill>
+                <a:latin typeface="Calibri"/>
+                <a:ea typeface="宋体"/>
+                <a:cs typeface="Calibri"/>
+              </a:rPr>
+              <a:t>Sycophancy</a:t>
+            </a:r>
+            <a:r>
+              <a:rPr lang="en-US" altLang="zh-CN" sz="2800" dirty="0">
+                <a:solidFill>
+                  <a:srgbClr val="13294B"/>
+                </a:solidFill>
+                <a:latin typeface="Calibri"/>
+                <a:ea typeface="宋体"/>
+                <a:cs typeface="Calibri"/>
+              </a:rPr>
+              <a:t> research measures opinion-conformity, not tonal appropriateness. </a:t>
+            </a:r>
+          </a:p>
+          <a:p>
+            <a:pPr marL="457200" indent="-457200">
+              <a:spcAft>
+                <a:spcPts val="600"/>
+              </a:spcAft>
+              <a:buFont typeface="Arial" panose="020B0604020202020204" pitchFamily="34" charset="0"/>
+              <a:buChar char="•"/>
+            </a:pPr>
+            <a:r>
+              <a:rPr lang="en-US" altLang="zh-CN" sz="2800" dirty="0">
+                <a:solidFill>
+                  <a:srgbClr val="FF5F05"/>
+                </a:solidFill>
+                <a:latin typeface="Calibri"/>
+                <a:ea typeface="宋体"/>
+                <a:cs typeface="Calibri"/>
+              </a:rPr>
+              <a:t>Empathy</a:t>
+            </a:r>
+            <a:r>
+              <a:rPr lang="en-US" altLang="zh-CN" sz="2800" dirty="0">
+                <a:solidFill>
+                  <a:srgbClr val="13294B"/>
+                </a:solidFill>
+                <a:latin typeface="Calibri"/>
+                <a:ea typeface="宋体"/>
+                <a:cs typeface="Calibri"/>
+              </a:rPr>
+              <a:t> research evaluates support-context warmth, not calibration to frustration level. </a:t>
+            </a:r>
+          </a:p>
+          <a:p>
+            <a:pPr marL="457200" indent="-457200">
+              <a:spcAft>
+                <a:spcPts val="600"/>
+              </a:spcAft>
+              <a:buFont typeface="Arial" panose="020B0604020202020204" pitchFamily="34" charset="0"/>
+              <a:buChar char="•"/>
+            </a:pPr>
+            <a:r>
+              <a:rPr lang="en-US" altLang="zh-CN" sz="2800" dirty="0">
+                <a:solidFill>
+                  <a:srgbClr val="FF5F05"/>
+                </a:solidFill>
+                <a:latin typeface="Calibri"/>
+                <a:ea typeface="宋体"/>
+                <a:cs typeface="Calibri"/>
+              </a:rPr>
+              <a:t>Customer service NLP </a:t>
+            </a:r>
+            <a:r>
+              <a:rPr lang="en-US" altLang="zh-CN" sz="2800" dirty="0">
+                <a:solidFill>
+                  <a:srgbClr val="13294B"/>
+                </a:solidFill>
+                <a:latin typeface="Calibri"/>
+                <a:ea typeface="宋体"/>
+                <a:cs typeface="Calibri"/>
+              </a:rPr>
+              <a:t>evaluates response quality against idealized rewrites, not observed human behavior.</a:t>
+            </a:r>
+          </a:p>
+          <a:p>
+            <a:pPr marL="457200" indent="-457200">
+              <a:spcAft>
+                <a:spcPts val="600"/>
+              </a:spcAft>
+              <a:buFont typeface="Arial" panose="020B0604020202020204" pitchFamily="34" charset="0"/>
+              <a:buChar char="•"/>
+            </a:pPr>
+            <a:r>
+              <a:rPr lang="en-US" altLang="zh-CN" sz="2800" dirty="0">
+                <a:solidFill>
+                  <a:srgbClr val="13294B"/>
+                </a:solidFill>
+                <a:latin typeface="Calibri"/>
+                <a:ea typeface="宋体"/>
+                <a:cs typeface="Calibri"/>
+              </a:rPr>
+              <a:t>Our study sits at the </a:t>
+            </a:r>
+            <a:r>
+              <a:rPr lang="en-US" altLang="zh-CN" sz="2800" dirty="0">
+                <a:solidFill>
+                  <a:srgbClr val="FF5F05"/>
+                </a:solidFill>
+                <a:latin typeface="Calibri"/>
+                <a:ea typeface="宋体"/>
+                <a:cs typeface="Calibri"/>
+              </a:rPr>
+              <a:t>intersection of all three</a:t>
+            </a:r>
+            <a:r>
+              <a:rPr lang="en-US" altLang="zh-CN" sz="2800" dirty="0">
+                <a:solidFill>
+                  <a:srgbClr val="13294B"/>
+                </a:solidFill>
+                <a:latin typeface="Calibri"/>
+                <a:ea typeface="宋体"/>
+                <a:cs typeface="Calibri"/>
+              </a:rPr>
+              <a:t> and uses a unique data asset—naturalistic, multi-domain, paired conversational data—to fill it.</a:t>
+            </a:r>
+            <a:endParaRPr lang="en-US" altLang="zh-CN" sz="3600" dirty="0">
+              <a:solidFill>
+                <a:srgbClr val="13294B"/>
+              </a:solidFill>
+              <a:latin typeface="Calibri"/>
+              <a:ea typeface="宋体"/>
+              <a:cs typeface="Calibri"/>
+            </a:endParaRPr>
+          </a:p>
+          <a:p>
+            <a:pPr marL="457200" indent="-457200">
+              <a:spcAft>
+                <a:spcPts val="600"/>
+              </a:spcAft>
+              <a:buFont typeface="Arial" panose="020B0604020202020204" pitchFamily="34" charset="0"/>
+              <a:buChar char="•"/>
+            </a:pPr>
+            <a:endParaRPr lang="en-US" altLang="zh-CN" sz="3600" dirty="0">
+              <a:solidFill>
+                <a:srgbClr val="13294B"/>
+              </a:solidFill>
+              <a:latin typeface="Calibri"/>
+              <a:ea typeface="宋体"/>
+              <a:cs typeface="Calibri"/>
+            </a:endParaRPr>
+          </a:p>
+        </p:txBody>
+      </p:sp>
+    </p:spTree>
+    <p:extLst>
+      <p:ext uri="{BB962C8B-B14F-4D97-AF65-F5344CB8AC3E}">
+        <p14:creationId xmlns:p14="http://schemas.microsoft.com/office/powerpoint/2010/main" val="1357738753"/>
+      </p:ext>
+    </p:extLst>
+  </p:cSld>
+  <p:clrMapOvr>
+    <a:masterClrMapping/>
+  </p:clrMapOvr>
+</p:sld>
+</file>
+
+<file path=ppt/slides/slide7.xml><?xml version="1.0" encoding="utf-8"?>
+<p:sld xmlns:a="http://schemas.openxmlformats.org/drawingml/2006/main" xmlns:r="http://schemas.openxmlformats.org/officeDocument/2006/relationships" xmlns:p="http://schemas.openxmlformats.org/presentationml/2006/main">
+  <p:cSld>
+    <p:spTree>
+      <p:nvGrpSpPr>
+        <p:cNvPr id="1" name="">
+          <a:extLst>
+            <a:ext uri="{FF2B5EF4-FFF2-40B4-BE49-F238E27FC236}">
+              <a16:creationId xmlns:a16="http://schemas.microsoft.com/office/drawing/2014/main" id="{92063BEA-CE45-DB84-5E41-B5736BF5200C}"/>
+            </a:ext>
+          </a:extLst>
+        </p:cNvPr>
+        <p:cNvGrpSpPr/>
+        <p:nvPr/>
+      </p:nvGrpSpPr>
+      <p:grpSpPr>
+        <a:xfrm>
+          <a:off x="0" y="0"/>
+          <a:ext cx="0" cy="0"/>
+          <a:chOff x="0" y="0"/>
+          <a:chExt cx="0" cy="0"/>
+        </a:xfrm>
+      </p:grpSpPr>
+      <p:sp>
+        <p:nvSpPr>
+          <p:cNvPr id="3" name="图文框 2">
+            <a:extLst>
+              <a:ext uri="{FF2B5EF4-FFF2-40B4-BE49-F238E27FC236}">
+                <a16:creationId xmlns:a16="http://schemas.microsoft.com/office/drawing/2014/main" id="{0812264B-D9C6-E924-C341-96FE1A2600B0}"/>
+              </a:ext>
+            </a:extLst>
+          </p:cNvPr>
+          <p:cNvSpPr/>
+          <p:nvPr/>
+        </p:nvSpPr>
+        <p:spPr>
+          <a:xfrm>
+            <a:off x="164147" y="282575"/>
+            <a:ext cx="11863705" cy="6403975"/>
+          </a:xfrm>
+          <a:prstGeom prst="frame">
+            <a:avLst>
+              <a:gd name="adj1" fmla="val 1196"/>
+            </a:avLst>
+          </a:prstGeom>
+          <a:solidFill>
+            <a:srgbClr val="13294B"/>
+          </a:solidFill>
+          <a:ln>
+            <a:solidFill>
+              <a:srgbClr val="13294B"/>
+            </a:solidFill>
+          </a:ln>
+          <a:effectLst>
+            <a:innerShdw blurRad="63500" dist="50800" dir="13500000">
+              <a:prstClr val="black">
+                <a:alpha val="50000"/>
+              </a:prstClr>
+            </a:innerShdw>
+          </a:effectLst>
+        </p:spPr>
+        <p:style>
+          <a:lnRef idx="2">
+            <a:schemeClr val="accent1">
+              <a:lumMod val="75000"/>
+            </a:schemeClr>
+          </a:lnRef>
+          <a:fillRef idx="1">
+            <a:schemeClr val="accent1"/>
+          </a:fillRef>
+          <a:effectRef idx="0">
+            <a:srgbClr val="FFFFFF"/>
+          </a:effectRef>
+          <a:fontRef idx="minor">
+            <a:schemeClr val="lt1"/>
+          </a:fontRef>
+        </p:style>
+        <p:txBody>
+          <a:bodyPr rtlCol="0" anchor="ctr"/>
+          <a:lstStyle/>
+          <a:p>
+            <a:pPr algn="ctr"/>
+            <a:endParaRPr lang="zh-CN" altLang="en-US"/>
+          </a:p>
+        </p:txBody>
+      </p:sp>
+      <p:sp>
+        <p:nvSpPr>
+          <p:cNvPr id="4" name="文本框 3">
+            <a:extLst>
+              <a:ext uri="{FF2B5EF4-FFF2-40B4-BE49-F238E27FC236}">
+                <a16:creationId xmlns:a16="http://schemas.microsoft.com/office/drawing/2014/main" id="{4E1FAF5E-E5D1-58DE-E630-975F1655BD7A}"/>
+              </a:ext>
+            </a:extLst>
+          </p:cNvPr>
+          <p:cNvSpPr txBox="1"/>
+          <p:nvPr/>
+        </p:nvSpPr>
+        <p:spPr>
+          <a:xfrm>
+            <a:off x="650457" y="614859"/>
+            <a:ext cx="9446043" cy="769441"/>
+          </a:xfrm>
+          <a:prstGeom prst="rect">
+            <a:avLst/>
+          </a:prstGeom>
+          <a:noFill/>
+        </p:spPr>
+        <p:txBody>
+          <a:bodyPr wrap="square" lIns="91440" tIns="45720" rIns="91440" bIns="45720" rtlCol="0" anchor="t">
+            <a:spAutoFit/>
+          </a:bodyPr>
+          <a:lstStyle/>
+          <a:p>
+            <a:r>
+              <a:rPr lang="en-US" altLang="zh-CN" sz="4400" b="1" dirty="0">
+                <a:solidFill>
+                  <a:srgbClr val="13294B"/>
+                </a:solidFill>
+                <a:latin typeface="Calibri"/>
+                <a:ea typeface="等线"/>
+                <a:cs typeface="+mj-lt"/>
+              </a:rPr>
+              <a:t>Methodology</a:t>
+            </a:r>
+          </a:p>
+        </p:txBody>
+      </p:sp>
+      <p:sp>
+        <p:nvSpPr>
+          <p:cNvPr id="9" name="半闭框 8">
+            <a:extLst>
+              <a:ext uri="{FF2B5EF4-FFF2-40B4-BE49-F238E27FC236}">
+                <a16:creationId xmlns:a16="http://schemas.microsoft.com/office/drawing/2014/main" id="{DE8B4F3C-D273-2EDE-98AA-D6521F9CE1BA}"/>
+              </a:ext>
+            </a:extLst>
+          </p:cNvPr>
+          <p:cNvSpPr/>
+          <p:nvPr/>
+        </p:nvSpPr>
+        <p:spPr>
+          <a:xfrm>
+            <a:off x="163830" y="282575"/>
+            <a:ext cx="3148330" cy="2355215"/>
+          </a:xfrm>
+          <a:prstGeom prst="halfFrame">
+            <a:avLst>
+              <a:gd name="adj1" fmla="val 4756"/>
+              <a:gd name="adj2" fmla="val 5021"/>
+            </a:avLst>
+          </a:prstGeom>
+          <a:solidFill>
+            <a:srgbClr val="FF5F05"/>
+          </a:solidFill>
+          <a:ln>
+            <a:solidFill>
+              <a:srgbClr val="FF5F05"/>
+            </a:solidFill>
+          </a:ln>
+        </p:spPr>
+        <p:style>
+          <a:lnRef idx="2">
+            <a:schemeClr val="accent1">
+              <a:lumMod val="75000"/>
+            </a:schemeClr>
+          </a:lnRef>
+          <a:fillRef idx="1">
+            <a:schemeClr val="accent1"/>
+          </a:fillRef>
+          <a:effectRef idx="0">
+            <a:srgbClr val="FFFFFF"/>
+          </a:effectRef>
+          <a:fontRef idx="minor">
+            <a:schemeClr val="lt1"/>
+          </a:fontRef>
+        </p:style>
+        <p:txBody>
+          <a:bodyPr rtlCol="0" anchor="ctr"/>
+          <a:lstStyle/>
+          <a:p>
+            <a:pPr algn="ctr"/>
+            <a:endParaRPr lang="zh-CN" altLang="en-US">
+              <a:solidFill>
+                <a:schemeClr val="tx1"/>
+              </a:solidFill>
+            </a:endParaRPr>
+          </a:p>
+        </p:txBody>
+      </p:sp>
+      <p:sp>
+        <p:nvSpPr>
+          <p:cNvPr id="10" name="半闭框 9">
+            <a:extLst>
+              <a:ext uri="{FF2B5EF4-FFF2-40B4-BE49-F238E27FC236}">
+                <a16:creationId xmlns:a16="http://schemas.microsoft.com/office/drawing/2014/main" id="{0B87FC49-93D6-74E5-9990-71828038361B}"/>
+              </a:ext>
+            </a:extLst>
+          </p:cNvPr>
+          <p:cNvSpPr/>
+          <p:nvPr>
+            <p:custDataLst>
+              <p:tags r:id="rId1"/>
+            </p:custDataLst>
+          </p:nvPr>
+        </p:nvSpPr>
+        <p:spPr>
+          <a:xfrm rot="10800000">
+            <a:off x="8357868" y="4262753"/>
+            <a:ext cx="3669983" cy="2423795"/>
+          </a:xfrm>
+          <a:prstGeom prst="halfFrame">
+            <a:avLst>
+              <a:gd name="adj1" fmla="val 4659"/>
+              <a:gd name="adj2" fmla="val 4349"/>
+            </a:avLst>
+          </a:prstGeom>
+          <a:solidFill>
+            <a:srgbClr val="FF5F05"/>
+          </a:solidFill>
+          <a:ln>
+            <a:solidFill>
+              <a:srgbClr val="FF5F05"/>
+            </a:solidFill>
+          </a:ln>
+        </p:spPr>
+        <p:style>
+          <a:lnRef idx="2">
+            <a:schemeClr val="accent1">
+              <a:lumMod val="75000"/>
+            </a:schemeClr>
+          </a:lnRef>
+          <a:fillRef idx="1">
+            <a:schemeClr val="accent1"/>
+          </a:fillRef>
+          <a:effectRef idx="0">
+            <a:srgbClr val="FFFFFF"/>
+          </a:effectRef>
+          <a:fontRef idx="minor">
+            <a:schemeClr val="lt1"/>
+          </a:fontRef>
+        </p:style>
+        <p:txBody>
+          <a:bodyPr rtlCol="0" anchor="ctr"/>
+          <a:lstStyle/>
+          <a:p>
+            <a:pPr algn="ctr"/>
+            <a:endParaRPr lang="zh-CN" altLang="en-US">
+              <a:solidFill>
+                <a:schemeClr val="tx1"/>
+              </a:solidFill>
+            </a:endParaRPr>
+          </a:p>
+        </p:txBody>
+      </p:sp>
+      <p:cxnSp>
+        <p:nvCxnSpPr>
+          <p:cNvPr id="13" name="直接连接符 12">
+            <a:extLst>
+              <a:ext uri="{FF2B5EF4-FFF2-40B4-BE49-F238E27FC236}">
+                <a16:creationId xmlns:a16="http://schemas.microsoft.com/office/drawing/2014/main" id="{B1B81DE7-C930-DC19-A1FD-DC4072262536}"/>
+              </a:ext>
+            </a:extLst>
+          </p:cNvPr>
+          <p:cNvCxnSpPr/>
+          <p:nvPr/>
+        </p:nvCxnSpPr>
+        <p:spPr>
+          <a:xfrm>
+            <a:off x="650457" y="1480820"/>
+            <a:ext cx="6546850" cy="14605"/>
+          </a:xfrm>
+          <a:prstGeom prst="line">
+            <a:avLst/>
+          </a:prstGeom>
+          <a:ln w="57150">
+            <a:solidFill>
+              <a:srgbClr val="FF5F05">
+                <a:alpha val="81000"/>
+              </a:srgbClr>
+            </a:solidFill>
+          </a:ln>
+        </p:spPr>
+        <p:style>
+          <a:lnRef idx="2">
+            <a:schemeClr val="accent1"/>
+          </a:lnRef>
+          <a:fillRef idx="0">
+            <a:srgbClr val="FFFFFF"/>
+          </a:fillRef>
+          <a:effectRef idx="0">
+            <a:srgbClr val="FFFFFF"/>
+          </a:effectRef>
+          <a:fontRef idx="minor">
+            <a:schemeClr val="tx1"/>
+          </a:fontRef>
+        </p:style>
+      </p:cxnSp>
+      <p:pic>
+        <p:nvPicPr>
+          <p:cNvPr id="100" name="图片 99">
+            <a:extLst>
+              <a:ext uri="{FF2B5EF4-FFF2-40B4-BE49-F238E27FC236}">
+                <a16:creationId xmlns:a16="http://schemas.microsoft.com/office/drawing/2014/main" id="{2164D6A5-7093-4A2F-EC32-37060E4005E7}"/>
+              </a:ext>
+            </a:extLst>
+          </p:cNvPr>
+          <p:cNvPicPr/>
+          <p:nvPr/>
+        </p:nvPicPr>
+        <p:blipFill>
+          <a:blip r:embed="rId4"/>
+          <a:stretch>
+            <a:fillRect/>
+          </a:stretch>
+        </p:blipFill>
+        <p:spPr>
+          <a:xfrm>
+            <a:off x="9906635" y="171450"/>
+            <a:ext cx="1906270" cy="1212850"/>
+          </a:xfrm>
+          <a:prstGeom prst="rect">
+            <a:avLst/>
+          </a:prstGeom>
+          <a:noFill/>
+          <a:ln w="9525">
+            <a:noFill/>
+          </a:ln>
+        </p:spPr>
+      </p:pic>
+      <p:sp>
+        <p:nvSpPr>
+          <p:cNvPr id="5" name="文本框 4">
+            <a:extLst>
+              <a:ext uri="{FF2B5EF4-FFF2-40B4-BE49-F238E27FC236}">
                 <a16:creationId xmlns:a16="http://schemas.microsoft.com/office/drawing/2014/main" id="{BC80E71F-D30C-406D-4ED7-BAE015A84762}"/>
               </a:ext>
             </a:extLst>
@@ -13925,7 +15260,7 @@
 </p:sld>
 </file>
 
-<file path=ppt/slides/slide7.xml><?xml version="1.0" encoding="utf-8"?>
+<file path=ppt/slides/slide8.xml><?xml version="1.0" encoding="utf-8"?>
 <p:sld xmlns:a="http://schemas.openxmlformats.org/drawingml/2006/main" xmlns:r="http://schemas.openxmlformats.org/officeDocument/2006/relationships" xmlns:p="http://schemas.openxmlformats.org/presentationml/2006/main">
   <p:cSld>
     <p:spTree>
@@ -14602,7 +15937,7 @@
 </p:sld>
 </file>
 
-<file path=ppt/slides/slide8.xml><?xml version="1.0" encoding="utf-8"?>
+<file path=ppt/slides/slide9.xml><?xml version="1.0" encoding="utf-8"?>
 <p:sld xmlns:a="http://schemas.openxmlformats.org/drawingml/2006/main" xmlns:r="http://schemas.openxmlformats.org/officeDocument/2006/relationships" xmlns:p="http://schemas.openxmlformats.org/presentationml/2006/main">
   <p:cSld>
     <p:spTree>
@@ -15038,601 +16373,6 @@
     <p:extLst>
       <p:ext uri="{BB962C8B-B14F-4D97-AF65-F5344CB8AC3E}">
         <p14:creationId xmlns:p14="http://schemas.microsoft.com/office/powerpoint/2010/main" val="162279002"/>
-      </p:ext>
-    </p:extLst>
-  </p:cSld>
-  <p:clrMapOvr>
-    <a:masterClrMapping/>
-  </p:clrMapOvr>
-</p:sld>
-</file>
-
-<file path=ppt/slides/slide9.xml><?xml version="1.0" encoding="utf-8"?>
-<p:sld xmlns:a="http://schemas.openxmlformats.org/drawingml/2006/main" xmlns:r="http://schemas.openxmlformats.org/officeDocument/2006/relationships" xmlns:p="http://schemas.openxmlformats.org/presentationml/2006/main">
-  <p:cSld>
-    <p:spTree>
-      <p:nvGrpSpPr>
-        <p:cNvPr id="1" name="">
-          <a:extLst>
-            <a:ext uri="{FF2B5EF4-FFF2-40B4-BE49-F238E27FC236}">
-              <a16:creationId xmlns:a16="http://schemas.microsoft.com/office/drawing/2014/main" id="{5924EE15-657C-E1BE-12BC-396E28BED21E}"/>
-            </a:ext>
-          </a:extLst>
-        </p:cNvPr>
-        <p:cNvGrpSpPr/>
-        <p:nvPr/>
-      </p:nvGrpSpPr>
-      <p:grpSpPr>
-        <a:xfrm>
-          <a:off x="0" y="0"/>
-          <a:ext cx="0" cy="0"/>
-          <a:chOff x="0" y="0"/>
-          <a:chExt cx="0" cy="0"/>
-        </a:xfrm>
-      </p:grpSpPr>
-      <p:sp>
-        <p:nvSpPr>
-          <p:cNvPr id="3" name="图文框 2">
-            <a:extLst>
-              <a:ext uri="{FF2B5EF4-FFF2-40B4-BE49-F238E27FC236}">
-                <a16:creationId xmlns:a16="http://schemas.microsoft.com/office/drawing/2014/main" id="{AF05072A-D479-E840-B88F-DF8176D606C0}"/>
-              </a:ext>
-            </a:extLst>
-          </p:cNvPr>
-          <p:cNvSpPr/>
-          <p:nvPr/>
-        </p:nvSpPr>
-        <p:spPr>
-          <a:xfrm>
-            <a:off x="164147" y="282575"/>
-            <a:ext cx="11863705" cy="6403975"/>
-          </a:xfrm>
-          <a:prstGeom prst="frame">
-            <a:avLst>
-              <a:gd name="adj1" fmla="val 1196"/>
-            </a:avLst>
-          </a:prstGeom>
-          <a:solidFill>
-            <a:srgbClr val="13294B"/>
-          </a:solidFill>
-          <a:ln>
-            <a:solidFill>
-              <a:srgbClr val="13294B"/>
-            </a:solidFill>
-          </a:ln>
-          <a:effectLst>
-            <a:innerShdw blurRad="63500" dist="50800" dir="13500000">
-              <a:prstClr val="black">
-                <a:alpha val="50000"/>
-              </a:prstClr>
-            </a:innerShdw>
-          </a:effectLst>
-        </p:spPr>
-        <p:style>
-          <a:lnRef idx="2">
-            <a:schemeClr val="accent1">
-              <a:lumMod val="75000"/>
-            </a:schemeClr>
-          </a:lnRef>
-          <a:fillRef idx="1">
-            <a:schemeClr val="accent1"/>
-          </a:fillRef>
-          <a:effectRef idx="0">
-            <a:srgbClr val="FFFFFF"/>
-          </a:effectRef>
-          <a:fontRef idx="minor">
-            <a:schemeClr val="lt1"/>
-          </a:fontRef>
-        </p:style>
-        <p:txBody>
-          <a:bodyPr rtlCol="0" anchor="ctr"/>
-          <a:lstStyle/>
-          <a:p>
-            <a:pPr algn="ctr"/>
-            <a:endParaRPr lang="zh-CN" altLang="en-US"/>
-          </a:p>
-        </p:txBody>
-      </p:sp>
-      <p:sp>
-        <p:nvSpPr>
-          <p:cNvPr id="4" name="文本框 3">
-            <a:extLst>
-              <a:ext uri="{FF2B5EF4-FFF2-40B4-BE49-F238E27FC236}">
-                <a16:creationId xmlns:a16="http://schemas.microsoft.com/office/drawing/2014/main" id="{2C1F6BDC-B7C9-D88B-FC8A-17F809BE126B}"/>
-              </a:ext>
-            </a:extLst>
-          </p:cNvPr>
-          <p:cNvSpPr txBox="1"/>
-          <p:nvPr/>
-        </p:nvSpPr>
-        <p:spPr>
-          <a:xfrm>
-            <a:off x="650457" y="614859"/>
-            <a:ext cx="9446043" cy="769441"/>
-          </a:xfrm>
-          <a:prstGeom prst="rect">
-            <a:avLst/>
-          </a:prstGeom>
-          <a:noFill/>
-        </p:spPr>
-        <p:txBody>
-          <a:bodyPr wrap="square" lIns="91440" tIns="45720" rIns="91440" bIns="45720" rtlCol="0" anchor="t">
-            <a:spAutoFit/>
-          </a:bodyPr>
-          <a:lstStyle/>
-          <a:p>
-            <a:r>
-              <a:rPr lang="en-US" altLang="zh-CN" sz="4400" b="1" dirty="0">
-                <a:solidFill>
-                  <a:srgbClr val="13294B"/>
-                </a:solidFill>
-                <a:latin typeface="Calibri"/>
-                <a:ea typeface="等线"/>
-                <a:cs typeface="+mj-lt"/>
-              </a:rPr>
-              <a:t>Empathy Calibration Score (ECS)</a:t>
-            </a:r>
-          </a:p>
-        </p:txBody>
-      </p:sp>
-      <p:sp>
-        <p:nvSpPr>
-          <p:cNvPr id="9" name="半闭框 8">
-            <a:extLst>
-              <a:ext uri="{FF2B5EF4-FFF2-40B4-BE49-F238E27FC236}">
-                <a16:creationId xmlns:a16="http://schemas.microsoft.com/office/drawing/2014/main" id="{94AAEBAE-9D2F-9263-05DC-ECECE2320254}"/>
-              </a:ext>
-            </a:extLst>
-          </p:cNvPr>
-          <p:cNvSpPr/>
-          <p:nvPr/>
-        </p:nvSpPr>
-        <p:spPr>
-          <a:xfrm>
-            <a:off x="163830" y="282575"/>
-            <a:ext cx="3148330" cy="2355215"/>
-          </a:xfrm>
-          <a:prstGeom prst="halfFrame">
-            <a:avLst>
-              <a:gd name="adj1" fmla="val 4756"/>
-              <a:gd name="adj2" fmla="val 5021"/>
-            </a:avLst>
-          </a:prstGeom>
-          <a:solidFill>
-            <a:srgbClr val="FF5F05"/>
-          </a:solidFill>
-          <a:ln>
-            <a:solidFill>
-              <a:srgbClr val="FF5F05"/>
-            </a:solidFill>
-          </a:ln>
-        </p:spPr>
-        <p:style>
-          <a:lnRef idx="2">
-            <a:schemeClr val="accent1">
-              <a:lumMod val="75000"/>
-            </a:schemeClr>
-          </a:lnRef>
-          <a:fillRef idx="1">
-            <a:schemeClr val="accent1"/>
-          </a:fillRef>
-          <a:effectRef idx="0">
-            <a:srgbClr val="FFFFFF"/>
-          </a:effectRef>
-          <a:fontRef idx="minor">
-            <a:schemeClr val="lt1"/>
-          </a:fontRef>
-        </p:style>
-        <p:txBody>
-          <a:bodyPr rtlCol="0" anchor="ctr"/>
-          <a:lstStyle/>
-          <a:p>
-            <a:pPr algn="ctr"/>
-            <a:endParaRPr lang="zh-CN" altLang="en-US">
-              <a:solidFill>
-                <a:schemeClr val="tx1"/>
-              </a:solidFill>
-            </a:endParaRPr>
-          </a:p>
-        </p:txBody>
-      </p:sp>
-      <p:sp>
-        <p:nvSpPr>
-          <p:cNvPr id="10" name="半闭框 9">
-            <a:extLst>
-              <a:ext uri="{FF2B5EF4-FFF2-40B4-BE49-F238E27FC236}">
-                <a16:creationId xmlns:a16="http://schemas.microsoft.com/office/drawing/2014/main" id="{FE586475-6379-515B-A8C7-357240F33B6B}"/>
-              </a:ext>
-            </a:extLst>
-          </p:cNvPr>
-          <p:cNvSpPr/>
-          <p:nvPr>
-            <p:custDataLst>
-              <p:tags r:id="rId1"/>
-            </p:custDataLst>
-          </p:nvPr>
-        </p:nvSpPr>
-        <p:spPr>
-          <a:xfrm rot="10800000">
-            <a:off x="8357868" y="4262753"/>
-            <a:ext cx="3669983" cy="2423795"/>
-          </a:xfrm>
-          <a:prstGeom prst="halfFrame">
-            <a:avLst>
-              <a:gd name="adj1" fmla="val 4659"/>
-              <a:gd name="adj2" fmla="val 4349"/>
-            </a:avLst>
-          </a:prstGeom>
-          <a:solidFill>
-            <a:srgbClr val="FF5F05"/>
-          </a:solidFill>
-          <a:ln>
-            <a:solidFill>
-              <a:srgbClr val="FF5F05"/>
-            </a:solidFill>
-          </a:ln>
-        </p:spPr>
-        <p:style>
-          <a:lnRef idx="2">
-            <a:schemeClr val="accent1">
-              <a:lumMod val="75000"/>
-            </a:schemeClr>
-          </a:lnRef>
-          <a:fillRef idx="1">
-            <a:schemeClr val="accent1"/>
-          </a:fillRef>
-          <a:effectRef idx="0">
-            <a:srgbClr val="FFFFFF"/>
-          </a:effectRef>
-          <a:fontRef idx="minor">
-            <a:schemeClr val="lt1"/>
-          </a:fontRef>
-        </p:style>
-        <p:txBody>
-          <a:bodyPr rtlCol="0" anchor="ctr"/>
-          <a:lstStyle/>
-          <a:p>
-            <a:pPr algn="ctr"/>
-            <a:endParaRPr lang="zh-CN" altLang="en-US">
-              <a:solidFill>
-                <a:schemeClr val="tx1"/>
-              </a:solidFill>
-            </a:endParaRPr>
-          </a:p>
-        </p:txBody>
-      </p:sp>
-      <p:cxnSp>
-        <p:nvCxnSpPr>
-          <p:cNvPr id="13" name="直接连接符 12">
-            <a:extLst>
-              <a:ext uri="{FF2B5EF4-FFF2-40B4-BE49-F238E27FC236}">
-                <a16:creationId xmlns:a16="http://schemas.microsoft.com/office/drawing/2014/main" id="{CADDF9A0-848B-41BB-ED8B-EEDD7C7754A6}"/>
-              </a:ext>
-            </a:extLst>
-          </p:cNvPr>
-          <p:cNvCxnSpPr/>
-          <p:nvPr/>
-        </p:nvCxnSpPr>
-        <p:spPr>
-          <a:xfrm>
-            <a:off x="650457" y="1480820"/>
-            <a:ext cx="6546850" cy="14605"/>
-          </a:xfrm>
-          <a:prstGeom prst="line">
-            <a:avLst/>
-          </a:prstGeom>
-          <a:ln w="57150">
-            <a:solidFill>
-              <a:srgbClr val="FF5F05">
-                <a:alpha val="81000"/>
-              </a:srgbClr>
-            </a:solidFill>
-          </a:ln>
-        </p:spPr>
-        <p:style>
-          <a:lnRef idx="2">
-            <a:schemeClr val="accent1"/>
-          </a:lnRef>
-          <a:fillRef idx="0">
-            <a:srgbClr val="FFFFFF"/>
-          </a:fillRef>
-          <a:effectRef idx="0">
-            <a:srgbClr val="FFFFFF"/>
-          </a:effectRef>
-          <a:fontRef idx="minor">
-            <a:schemeClr val="tx1"/>
-          </a:fontRef>
-        </p:style>
-      </p:cxnSp>
-      <p:pic>
-        <p:nvPicPr>
-          <p:cNvPr id="100" name="图片 99">
-            <a:extLst>
-              <a:ext uri="{FF2B5EF4-FFF2-40B4-BE49-F238E27FC236}">
-                <a16:creationId xmlns:a16="http://schemas.microsoft.com/office/drawing/2014/main" id="{BBFAD97B-9ECD-B243-06E5-0C59695D79CB}"/>
-              </a:ext>
-            </a:extLst>
-          </p:cNvPr>
-          <p:cNvPicPr/>
-          <p:nvPr/>
-        </p:nvPicPr>
-        <p:blipFill>
-          <a:blip r:embed="rId4"/>
-          <a:stretch>
-            <a:fillRect/>
-          </a:stretch>
-        </p:blipFill>
-        <p:spPr>
-          <a:xfrm>
-            <a:off x="9906635" y="171450"/>
-            <a:ext cx="1906270" cy="1212850"/>
-          </a:xfrm>
-          <a:prstGeom prst="rect">
-            <a:avLst/>
-          </a:prstGeom>
-          <a:noFill/>
-          <a:ln w="9525">
-            <a:noFill/>
-          </a:ln>
-        </p:spPr>
-      </p:pic>
-      <p:sp>
-        <p:nvSpPr>
-          <p:cNvPr id="5" name="文本框 4">
-            <a:extLst>
-              <a:ext uri="{FF2B5EF4-FFF2-40B4-BE49-F238E27FC236}">
-                <a16:creationId xmlns:a16="http://schemas.microsoft.com/office/drawing/2014/main" id="{983ADD24-6931-539A-526C-9EE7C3AE6976}"/>
-              </a:ext>
-            </a:extLst>
-          </p:cNvPr>
-          <p:cNvSpPr txBox="1"/>
-          <p:nvPr/>
-        </p:nvSpPr>
-        <p:spPr>
-          <a:xfrm>
-            <a:off x="613543" y="1741049"/>
-            <a:ext cx="10964912" cy="2062103"/>
-          </a:xfrm>
-          <a:prstGeom prst="rect">
-            <a:avLst/>
-          </a:prstGeom>
-          <a:noFill/>
-        </p:spPr>
-        <p:txBody>
-          <a:bodyPr wrap="square" lIns="91440" tIns="45720" rIns="91440" bIns="45720" rtlCol="0" anchor="t">
-            <a:spAutoFit/>
-          </a:bodyPr>
-          <a:lstStyle/>
-          <a:p>
-            <a:pPr marL="457200" indent="-457200">
-              <a:spcAft>
-                <a:spcPts val="600"/>
-              </a:spcAft>
-              <a:buFont typeface="Arial" panose="020B0604020202020204" pitchFamily="34" charset="0"/>
-              <a:buChar char="•"/>
-            </a:pPr>
-            <a:r>
-              <a:rPr lang="en-US" altLang="zh-CN" sz="3200" dirty="0">
-                <a:solidFill>
-                  <a:srgbClr val="13294B"/>
-                </a:solidFill>
-                <a:latin typeface="Calibri"/>
-                <a:ea typeface="宋体"/>
-                <a:cs typeface="Calibri"/>
-              </a:rPr>
-              <a:t>The ECS is a two-dimensional rubric designed to measure not absolute empathy, but calibration— how well a response’s empathetic register matches what the customer’s expressed frustration level warrants.</a:t>
-            </a:r>
-          </a:p>
-        </p:txBody>
-      </p:sp>
-      <p:graphicFrame>
-        <p:nvGraphicFramePr>
-          <p:cNvPr id="2" name="表格 1">
-            <a:extLst>
-              <a:ext uri="{FF2B5EF4-FFF2-40B4-BE49-F238E27FC236}">
-                <a16:creationId xmlns:a16="http://schemas.microsoft.com/office/drawing/2014/main" id="{5B173359-1CCA-714D-463D-B6A0401E7C9C}"/>
-              </a:ext>
-            </a:extLst>
-          </p:cNvPr>
-          <p:cNvGraphicFramePr>
-            <a:graphicFrameLocks noGrp="1"/>
-          </p:cNvGraphicFramePr>
-          <p:nvPr>
-            <p:extLst>
-              <p:ext uri="{D42A27DB-BD31-4B8C-83A1-F6EECF244321}">
-                <p14:modId xmlns:p14="http://schemas.microsoft.com/office/powerpoint/2010/main" val="2090334612"/>
-              </p:ext>
-            </p:extLst>
-          </p:nvPr>
-        </p:nvGraphicFramePr>
-        <p:xfrm>
-          <a:off x="914401" y="3803152"/>
-          <a:ext cx="10469571" cy="2533953"/>
-        </p:xfrm>
-        <a:graphic>
-          <a:graphicData uri="http://schemas.openxmlformats.org/drawingml/2006/table">
-            <a:tbl>
-              <a:tblPr firstRow="1" bandRow="1">
-                <a:tableStyleId>{21E4AEA4-8DFA-4A89-87EB-49C32662AFE0}</a:tableStyleId>
-              </a:tblPr>
-              <a:tblGrid>
-                <a:gridCol w="3489857">
-                  <a:extLst>
-                    <a:ext uri="{9D8B030D-6E8A-4147-A177-3AD203B41FA5}">
-                      <a16:colId xmlns:a16="http://schemas.microsoft.com/office/drawing/2014/main" val="2473411904"/>
-                    </a:ext>
-                  </a:extLst>
-                </a:gridCol>
-                <a:gridCol w="3489857">
-                  <a:extLst>
-                    <a:ext uri="{9D8B030D-6E8A-4147-A177-3AD203B41FA5}">
-                      <a16:colId xmlns:a16="http://schemas.microsoft.com/office/drawing/2014/main" val="1406048790"/>
-                    </a:ext>
-                  </a:extLst>
-                </a:gridCol>
-                <a:gridCol w="3489857">
-                  <a:extLst>
-                    <a:ext uri="{9D8B030D-6E8A-4147-A177-3AD203B41FA5}">
-                      <a16:colId xmlns:a16="http://schemas.microsoft.com/office/drawing/2014/main" val="3813345470"/>
-                    </a:ext>
-                  </a:extLst>
-                </a:gridCol>
-              </a:tblGrid>
-              <a:tr h="317802">
-                <a:tc>
-                  <a:txBody>
-                    <a:bodyPr/>
-                    <a:lstStyle/>
-                    <a:p>
-                      <a:r>
-                        <a:rPr lang="en-US" altLang="zh-CN" dirty="0"/>
-                        <a:t>Dimension</a:t>
-                      </a:r>
-                      <a:endParaRPr lang="zh-CN" altLang="en-US" dirty="0"/>
-                    </a:p>
-                  </a:txBody>
-                  <a:tcPr/>
-                </a:tc>
-                <a:tc>
-                  <a:txBody>
-                    <a:bodyPr/>
-                    <a:lstStyle/>
-                    <a:p>
-                      <a:r>
-                        <a:rPr lang="en-US" altLang="zh-CN" dirty="0"/>
-                        <a:t>Measurement</a:t>
-                      </a:r>
-                      <a:endParaRPr lang="zh-CN" altLang="en-US" dirty="0"/>
-                    </a:p>
-                  </a:txBody>
-                  <a:tcPr/>
-                </a:tc>
-                <a:tc>
-                  <a:txBody>
-                    <a:bodyPr/>
-                    <a:lstStyle/>
-                    <a:p>
-                      <a:r>
-                        <a:rPr lang="en-US" altLang="zh-CN" dirty="0"/>
-                        <a:t>Weight at high FIS</a:t>
-                      </a:r>
-                      <a:endParaRPr lang="zh-CN" altLang="en-US" dirty="0"/>
-                    </a:p>
-                  </a:txBody>
-                  <a:tcPr/>
-                </a:tc>
-                <a:extLst>
-                  <a:ext uri="{0D108BD9-81ED-4DB2-BD59-A6C34878D82A}">
-                    <a16:rowId xmlns:a16="http://schemas.microsoft.com/office/drawing/2014/main" val="208840510"/>
-                  </a:ext>
-                </a:extLst>
-              </a:tr>
-              <a:tr h="783620">
-                <a:tc>
-                  <a:txBody>
-                    <a:bodyPr/>
-                    <a:lstStyle/>
-                    <a:p>
-                      <a:r>
-                        <a:rPr lang="en-US" altLang="zh-CN" dirty="0"/>
-                        <a:t>Apology density</a:t>
-                      </a:r>
-                      <a:endParaRPr lang="zh-CN" altLang="en-US" dirty="0"/>
-                    </a:p>
-                  </a:txBody>
-                  <a:tcPr/>
-                </a:tc>
-                <a:tc>
-                  <a:txBody>
-                    <a:bodyPr/>
-                    <a:lstStyle/>
-                    <a:p>
-                      <a:r>
-                        <a:rPr lang="en-US" altLang="zh-CN" dirty="0"/>
-                        <a:t>Normalized count of apology/regret terms (regex). Fully auto mated.</a:t>
-                      </a:r>
-                      <a:endParaRPr lang="zh-CN" altLang="en-US" dirty="0"/>
-                    </a:p>
-                  </a:txBody>
-                  <a:tcPr/>
-                </a:tc>
-                <a:tc>
-                  <a:txBody>
-                    <a:bodyPr/>
-                    <a:lstStyle/>
-                    <a:p>
-                      <a:r>
-                        <a:rPr lang="en-US" altLang="zh-CN" dirty="0"/>
-                        <a:t>Higher weight</a:t>
-                      </a:r>
-                      <a:endParaRPr lang="zh-CN" altLang="en-US" dirty="0"/>
-                    </a:p>
-                  </a:txBody>
-                  <a:tcPr/>
-                </a:tc>
-                <a:extLst>
-                  <a:ext uri="{0D108BD9-81ED-4DB2-BD59-A6C34878D82A}">
-                    <a16:rowId xmlns:a16="http://schemas.microsoft.com/office/drawing/2014/main" val="1428517476"/>
-                  </a:ext>
-                </a:extLst>
-              </a:tr>
-              <a:tr h="1253793">
-                <a:tc>
-                  <a:txBody>
-                    <a:bodyPr/>
-                    <a:lstStyle/>
-                    <a:p>
-                      <a:r>
-                        <a:rPr lang="en-US" altLang="zh-CN" dirty="0"/>
-                        <a:t>Tone-frustration fit</a:t>
-                      </a:r>
-                      <a:endParaRPr lang="zh-CN" altLang="en-US" dirty="0"/>
-                    </a:p>
-                  </a:txBody>
-                  <a:tcPr/>
-                </a:tc>
-                <a:tc>
-                  <a:txBody>
-                    <a:bodyPr/>
-                    <a:lstStyle/>
-                    <a:p>
-                      <a:r>
-                        <a:rPr lang="en-US" altLang="zh-CN" dirty="0"/>
-                        <a:t>LLM-as-judge (GPT 4o) scores 1–5: does the response tone match the emotional register of the complaint?</a:t>
-                      </a:r>
-                      <a:endParaRPr lang="zh-CN" altLang="en-US" dirty="0"/>
-                    </a:p>
-                  </a:txBody>
-                  <a:tcPr/>
-                </a:tc>
-                <a:tc>
-                  <a:txBody>
-                    <a:bodyPr/>
-                    <a:lstStyle/>
-                    <a:p>
-                      <a:r>
-                        <a:rPr lang="en-US" altLang="zh-CN" dirty="0"/>
-                        <a:t>Equal weight</a:t>
-                      </a:r>
-                      <a:endParaRPr lang="zh-CN" altLang="en-US" dirty="0"/>
-                    </a:p>
-                  </a:txBody>
-                  <a:tcPr/>
-                </a:tc>
-                <a:extLst>
-                  <a:ext uri="{0D108BD9-81ED-4DB2-BD59-A6C34878D82A}">
-                    <a16:rowId xmlns:a16="http://schemas.microsoft.com/office/drawing/2014/main" val="1053424"/>
-                  </a:ext>
-                </a:extLst>
-              </a:tr>
-            </a:tbl>
-          </a:graphicData>
-        </a:graphic>
-      </p:graphicFrame>
-    </p:spTree>
-    <p:extLst>
-      <p:ext uri="{BB962C8B-B14F-4D97-AF65-F5344CB8AC3E}">
-        <p14:creationId xmlns:p14="http://schemas.microsoft.com/office/powerpoint/2010/main" val="2558277820"/>
       </p:ext>
     </p:extLst>
   </p:cSld>
@@ -15685,6 +16425,12 @@
 </file>
 
 <file path=ppt/tags/tag16.xml><?xml version="1.0" encoding="utf-8"?>
+<p:tagLst xmlns:a="http://schemas.openxmlformats.org/drawingml/2006/main" xmlns:r="http://schemas.openxmlformats.org/officeDocument/2006/relationships" xmlns:p="http://schemas.openxmlformats.org/presentationml/2006/main">
+  <p:tag name="KSO_WM_BEAUTIFY_FLAG" val=""/>
+</p:tagLst>
+</file>
+
+<file path=ppt/tags/tag17.xml><?xml version="1.0" encoding="utf-8"?>
 <p:tagLst xmlns:a="http://schemas.openxmlformats.org/drawingml/2006/main" xmlns:r="http://schemas.openxmlformats.org/officeDocument/2006/relationships" xmlns:p="http://schemas.openxmlformats.org/presentationml/2006/main">
   <p:tag name="KSO_WM_BEAUTIFY_FLAG" val=""/>
 </p:tagLst>

--- a/src/Files/Final_ppt.pptx
+++ b/src/Files/Final_ppt.pptx
@@ -5,26 +5,25 @@
     <p:sldMasterId id="2147483648" r:id="rId1"/>
   </p:sldMasterIdLst>
   <p:notesMasterIdLst>
-    <p:notesMasterId r:id="rId19"/>
+    <p:notesMasterId r:id="rId18"/>
   </p:notesMasterIdLst>
   <p:sldIdLst>
     <p:sldId id="263" r:id="rId2"/>
-    <p:sldId id="272" r:id="rId3"/>
-    <p:sldId id="297" r:id="rId4"/>
+    <p:sldId id="297" r:id="rId3"/>
+    <p:sldId id="272" r:id="rId4"/>
     <p:sldId id="277" r:id="rId5"/>
     <p:sldId id="298" r:id="rId6"/>
     <p:sldId id="309" r:id="rId7"/>
     <p:sldId id="299" r:id="rId8"/>
     <p:sldId id="304" r:id="rId9"/>
     <p:sldId id="305" r:id="rId10"/>
-    <p:sldId id="306" r:id="rId11"/>
-    <p:sldId id="307" r:id="rId12"/>
-    <p:sldId id="296" r:id="rId13"/>
-    <p:sldId id="300" r:id="rId14"/>
-    <p:sldId id="308" r:id="rId15"/>
-    <p:sldId id="302" r:id="rId16"/>
-    <p:sldId id="303" r:id="rId17"/>
-    <p:sldId id="301" r:id="rId18"/>
+    <p:sldId id="307" r:id="rId11"/>
+    <p:sldId id="296" r:id="rId12"/>
+    <p:sldId id="300" r:id="rId13"/>
+    <p:sldId id="308" r:id="rId14"/>
+    <p:sldId id="302" r:id="rId15"/>
+    <p:sldId id="303" r:id="rId16"/>
+    <p:sldId id="301" r:id="rId17"/>
   </p:sldIdLst>
   <p:sldSz cx="12192000" cy="6858000"/>
   <p:notesSz cx="6858000" cy="9144000"/>
@@ -1591,170 +1590,6 @@
         <p:cNvPr id="1" name="">
           <a:extLst>
             <a:ext uri="{FF2B5EF4-FFF2-40B4-BE49-F238E27FC236}">
-              <a16:creationId xmlns:a16="http://schemas.microsoft.com/office/drawing/2014/main" id="{F08AD704-5687-C897-37EE-639D76BAB2B0}"/>
-            </a:ext>
-          </a:extLst>
-        </p:cNvPr>
-        <p:cNvGrpSpPr/>
-        <p:nvPr/>
-      </p:nvGrpSpPr>
-      <p:grpSpPr>
-        <a:xfrm>
-          <a:off x="0" y="0"/>
-          <a:ext cx="0" cy="0"/>
-          <a:chOff x="0" y="0"/>
-          <a:chExt cx="0" cy="0"/>
-        </a:xfrm>
-      </p:grpSpPr>
-      <p:sp>
-        <p:nvSpPr>
-          <p:cNvPr id="2" name="幻灯片图像占位符 1">
-            <a:extLst>
-              <a:ext uri="{FF2B5EF4-FFF2-40B4-BE49-F238E27FC236}">
-                <a16:creationId xmlns:a16="http://schemas.microsoft.com/office/drawing/2014/main" id="{F168772D-C045-02A6-3693-429AE9AF84FE}"/>
-              </a:ext>
-            </a:extLst>
-          </p:cNvPr>
-          <p:cNvSpPr>
-            <a:spLocks noGrp="1" noRot="1" noChangeAspect="1"/>
-          </p:cNvSpPr>
-          <p:nvPr>
-            <p:ph type="sldImg"/>
-          </p:nvPr>
-        </p:nvSpPr>
-        <p:spPr/>
-      </p:sp>
-      <p:sp>
-        <p:nvSpPr>
-          <p:cNvPr id="3" name="备注占位符 2">
-            <a:extLst>
-              <a:ext uri="{FF2B5EF4-FFF2-40B4-BE49-F238E27FC236}">
-                <a16:creationId xmlns:a16="http://schemas.microsoft.com/office/drawing/2014/main" id="{BAC52383-BBDD-CD06-582E-1C52A422B852}"/>
-              </a:ext>
-            </a:extLst>
-          </p:cNvPr>
-          <p:cNvSpPr>
-            <a:spLocks noGrp="1"/>
-          </p:cNvSpPr>
-          <p:nvPr>
-            <p:ph type="body" idx="1"/>
-          </p:nvPr>
-        </p:nvSpPr>
-        <p:spPr/>
-        <p:txBody>
-          <a:bodyPr/>
-          <a:lstStyle/>
-          <a:p>
-            <a:pPr algn="l">
-              <a:spcBef>
-                <a:spcPts val="450"/>
-              </a:spcBef>
-              <a:spcAft>
-                <a:spcPts val="450"/>
-              </a:spcAft>
-            </a:pPr>
-            <a:r>
-              <a:rPr lang="en-US" altLang="zh-CN" sz="1800" b="1" i="0">
-                <a:solidFill>
-                  <a:srgbClr val="2D3B45"/>
-                </a:solidFill>
-                <a:effectLst/>
-                <a:latin typeface="Lato Extended"/>
-              </a:rPr>
-              <a:t>Introduction Slide</a:t>
-            </a:r>
-            <a:endParaRPr lang="en-US" altLang="zh-CN" sz="1800" b="0" i="0">
-              <a:solidFill>
-                <a:srgbClr val="2D3B45"/>
-              </a:solidFill>
-              <a:effectLst/>
-              <a:latin typeface="Lato Extended"/>
-            </a:endParaRPr>
-          </a:p>
-          <a:p>
-            <a:pPr algn="l">
-              <a:spcAft>
-                <a:spcPts val="450"/>
-              </a:spcAft>
-              <a:buFont typeface="Arial" panose="020B0604020202020204" pitchFamily="34" charset="0"/>
-              <a:buChar char="•"/>
-            </a:pPr>
-            <a:r>
-              <a:rPr lang="en-US" altLang="zh-CN" sz="1800" b="1" i="0">
-                <a:solidFill>
-                  <a:srgbClr val="2D3B45"/>
-                </a:solidFill>
-                <a:effectLst/>
-                <a:latin typeface="v-sans"/>
-              </a:rPr>
-              <a:t>Brief Introduction:</a:t>
-            </a:r>
-            <a:r>
-              <a:rPr lang="en-US" altLang="zh-CN" sz="1800" b="0" i="0">
-                <a:solidFill>
-                  <a:srgbClr val="2D3B45"/>
-                </a:solidFill>
-                <a:effectLst/>
-                <a:latin typeface="v-sans"/>
-              </a:rPr>
-              <a:t> of the team and the topic</a:t>
-            </a:r>
-          </a:p>
-          <a:p>
-            <a:endParaRPr lang="zh-CN" altLang="en-US"/>
-          </a:p>
-        </p:txBody>
-      </p:sp>
-      <p:sp>
-        <p:nvSpPr>
-          <p:cNvPr id="4" name="灯片编号占位符 3">
-            <a:extLst>
-              <a:ext uri="{FF2B5EF4-FFF2-40B4-BE49-F238E27FC236}">
-                <a16:creationId xmlns:a16="http://schemas.microsoft.com/office/drawing/2014/main" id="{4EC632BB-84C0-6D94-8195-420737B13DE8}"/>
-              </a:ext>
-            </a:extLst>
-          </p:cNvPr>
-          <p:cNvSpPr>
-            <a:spLocks noGrp="1"/>
-          </p:cNvSpPr>
-          <p:nvPr>
-            <p:ph type="sldNum" sz="quarter" idx="5"/>
-          </p:nvPr>
-        </p:nvSpPr>
-        <p:spPr/>
-        <p:txBody>
-          <a:bodyPr/>
-          <a:lstStyle/>
-          <a:p>
-            <a:fld id="{EED2C466-1B0F-4591-A952-5F31096967DE}" type="slidenum">
-              <a:rPr lang="zh-CN" altLang="en-US" smtClean="0"/>
-              <a:t>10</a:t>
-            </a:fld>
-            <a:endParaRPr lang="zh-CN" altLang="en-US"/>
-          </a:p>
-        </p:txBody>
-      </p:sp>
-    </p:spTree>
-    <p:extLst>
-      <p:ext uri="{BB962C8B-B14F-4D97-AF65-F5344CB8AC3E}">
-        <p14:creationId xmlns:p14="http://schemas.microsoft.com/office/powerpoint/2010/main" val="3723329139"/>
-      </p:ext>
-    </p:extLst>
-  </p:cSld>
-  <p:clrMapOvr>
-    <a:masterClrMapping/>
-  </p:clrMapOvr>
-</p:notes>
-</file>
-
-<file path=ppt/notesSlides/notesSlide11.xml><?xml version="1.0" encoding="utf-8"?>
-<p:notes xmlns:a="http://schemas.openxmlformats.org/drawingml/2006/main" xmlns:r="http://schemas.openxmlformats.org/officeDocument/2006/relationships" xmlns:p="http://schemas.openxmlformats.org/presentationml/2006/main">
-  <p:cSld>
-    <p:spTree>
-      <p:nvGrpSpPr>
-        <p:cNvPr id="1" name="">
-          <a:extLst>
-            <a:ext uri="{FF2B5EF4-FFF2-40B4-BE49-F238E27FC236}">
               <a16:creationId xmlns:a16="http://schemas.microsoft.com/office/drawing/2014/main" id="{A3780624-88CC-1F28-3EA6-BBF568054237}"/>
             </a:ext>
           </a:extLst>
@@ -1892,7 +1727,7 @@
           <a:p>
             <a:fld id="{EED2C466-1B0F-4591-A952-5F31096967DE}" type="slidenum">
               <a:rPr lang="zh-CN" altLang="en-US" smtClean="0"/>
-              <a:t>11</a:t>
+              <a:t>10</a:t>
             </a:fld>
             <a:endParaRPr lang="zh-CN" altLang="en-US"/>
           </a:p>
@@ -1911,7 +1746,7 @@
 </p:notes>
 </file>
 
-<file path=ppt/notesSlides/notesSlide12.xml><?xml version="1.0" encoding="utf-8"?>
+<file path=ppt/notesSlides/notesSlide11.xml><?xml version="1.0" encoding="utf-8"?>
 <p:notes xmlns:a="http://schemas.openxmlformats.org/drawingml/2006/main" xmlns:r="http://schemas.openxmlformats.org/officeDocument/2006/relationships" xmlns:p="http://schemas.openxmlformats.org/presentationml/2006/main">
   <p:cSld>
     <p:spTree>
@@ -2056,7 +1891,7 @@
           <a:p>
             <a:fld id="{EED2C466-1B0F-4591-A952-5F31096967DE}" type="slidenum">
               <a:rPr lang="zh-CN" altLang="en-US" smtClean="0"/>
-              <a:t>12</a:t>
+              <a:t>11</a:t>
             </a:fld>
             <a:endParaRPr lang="zh-CN" altLang="en-US"/>
           </a:p>
@@ -2075,7 +1910,7 @@
 </p:notes>
 </file>
 
-<file path=ppt/notesSlides/notesSlide13.xml><?xml version="1.0" encoding="utf-8"?>
+<file path=ppt/notesSlides/notesSlide12.xml><?xml version="1.0" encoding="utf-8"?>
 <p:notes xmlns:a="http://schemas.openxmlformats.org/drawingml/2006/main" xmlns:r="http://schemas.openxmlformats.org/officeDocument/2006/relationships" xmlns:p="http://schemas.openxmlformats.org/presentationml/2006/main">
   <p:cSld>
     <p:spTree>
@@ -2220,7 +2055,7 @@
           <a:p>
             <a:fld id="{EED2C466-1B0F-4591-A952-5F31096967DE}" type="slidenum">
               <a:rPr lang="zh-CN" altLang="en-US" smtClean="0"/>
-              <a:t>13</a:t>
+              <a:t>12</a:t>
             </a:fld>
             <a:endParaRPr lang="zh-CN" altLang="en-US"/>
           </a:p>
@@ -2239,7 +2074,7 @@
 </p:notes>
 </file>
 
-<file path=ppt/notesSlides/notesSlide14.xml><?xml version="1.0" encoding="utf-8"?>
+<file path=ppt/notesSlides/notesSlide13.xml><?xml version="1.0" encoding="utf-8"?>
 <p:notes xmlns:a="http://schemas.openxmlformats.org/drawingml/2006/main" xmlns:r="http://schemas.openxmlformats.org/officeDocument/2006/relationships" xmlns:p="http://schemas.openxmlformats.org/presentationml/2006/main">
   <p:cSld>
     <p:spTree>
@@ -2384,7 +2219,7 @@
           <a:p>
             <a:fld id="{EED2C466-1B0F-4591-A952-5F31096967DE}" type="slidenum">
               <a:rPr lang="zh-CN" altLang="en-US" smtClean="0"/>
-              <a:t>14</a:t>
+              <a:t>13</a:t>
             </a:fld>
             <a:endParaRPr lang="zh-CN" altLang="en-US"/>
           </a:p>
@@ -2403,7 +2238,7 @@
 </p:notes>
 </file>
 
-<file path=ppt/notesSlides/notesSlide15.xml><?xml version="1.0" encoding="utf-8"?>
+<file path=ppt/notesSlides/notesSlide14.xml><?xml version="1.0" encoding="utf-8"?>
 <p:notes xmlns:a="http://schemas.openxmlformats.org/drawingml/2006/main" xmlns:r="http://schemas.openxmlformats.org/officeDocument/2006/relationships" xmlns:p="http://schemas.openxmlformats.org/presentationml/2006/main">
   <p:cSld>
     <p:spTree>
@@ -2548,7 +2383,7 @@
           <a:p>
             <a:fld id="{EED2C466-1B0F-4591-A952-5F31096967DE}" type="slidenum">
               <a:rPr lang="zh-CN" altLang="en-US" smtClean="0"/>
-              <a:t>15</a:t>
+              <a:t>14</a:t>
             </a:fld>
             <a:endParaRPr lang="zh-CN" altLang="en-US"/>
           </a:p>
@@ -2567,7 +2402,7 @@
 </p:notes>
 </file>
 
-<file path=ppt/notesSlides/notesSlide16.xml><?xml version="1.0" encoding="utf-8"?>
+<file path=ppt/notesSlides/notesSlide15.xml><?xml version="1.0" encoding="utf-8"?>
 <p:notes xmlns:a="http://schemas.openxmlformats.org/drawingml/2006/main" xmlns:r="http://schemas.openxmlformats.org/officeDocument/2006/relationships" xmlns:p="http://schemas.openxmlformats.org/presentationml/2006/main">
   <p:cSld>
     <p:spTree>
@@ -2712,7 +2547,7 @@
           <a:p>
             <a:fld id="{EED2C466-1B0F-4591-A952-5F31096967DE}" type="slidenum">
               <a:rPr lang="zh-CN" altLang="en-US" smtClean="0"/>
-              <a:t>16</a:t>
+              <a:t>15</a:t>
             </a:fld>
             <a:endParaRPr lang="zh-CN" altLang="en-US"/>
           </a:p>
@@ -2731,7 +2566,7 @@
 </p:notes>
 </file>
 
-<file path=ppt/notesSlides/notesSlide17.xml><?xml version="1.0" encoding="utf-8"?>
+<file path=ppt/notesSlides/notesSlide16.xml><?xml version="1.0" encoding="utf-8"?>
 <p:notes xmlns:a="http://schemas.openxmlformats.org/drawingml/2006/main" xmlns:r="http://schemas.openxmlformats.org/officeDocument/2006/relationships" xmlns:p="http://schemas.openxmlformats.org/presentationml/2006/main">
   <p:cSld>
     <p:spTree>
@@ -2876,7 +2711,7 @@
           <a:p>
             <a:fld id="{EED2C466-1B0F-4591-A952-5F31096967DE}" type="slidenum">
               <a:rPr lang="zh-CN" altLang="en-US" smtClean="0"/>
-              <a:t>17</a:t>
+              <a:t>16</a:t>
             </a:fld>
             <a:endParaRPr lang="zh-CN" altLang="en-US"/>
           </a:p>
@@ -2896,6 +2731,170 @@
 </file>
 
 <file path=ppt/notesSlides/notesSlide2.xml><?xml version="1.0" encoding="utf-8"?>
+<p:notes xmlns:a="http://schemas.openxmlformats.org/drawingml/2006/main" xmlns:r="http://schemas.openxmlformats.org/officeDocument/2006/relationships" xmlns:p="http://schemas.openxmlformats.org/presentationml/2006/main">
+  <p:cSld>
+    <p:spTree>
+      <p:nvGrpSpPr>
+        <p:cNvPr id="1" name="">
+          <a:extLst>
+            <a:ext uri="{FF2B5EF4-FFF2-40B4-BE49-F238E27FC236}">
+              <a16:creationId xmlns:a16="http://schemas.microsoft.com/office/drawing/2014/main" id="{C99A4FFB-D8FF-F77F-B6D3-161F9726D9C3}"/>
+            </a:ext>
+          </a:extLst>
+        </p:cNvPr>
+        <p:cNvGrpSpPr/>
+        <p:nvPr/>
+      </p:nvGrpSpPr>
+      <p:grpSpPr>
+        <a:xfrm>
+          <a:off x="0" y="0"/>
+          <a:ext cx="0" cy="0"/>
+          <a:chOff x="0" y="0"/>
+          <a:chExt cx="0" cy="0"/>
+        </a:xfrm>
+      </p:grpSpPr>
+      <p:sp>
+        <p:nvSpPr>
+          <p:cNvPr id="2" name="幻灯片图像占位符 1">
+            <a:extLst>
+              <a:ext uri="{FF2B5EF4-FFF2-40B4-BE49-F238E27FC236}">
+                <a16:creationId xmlns:a16="http://schemas.microsoft.com/office/drawing/2014/main" id="{4EAC9962-BF4C-7B93-5FCD-230ADFC6B335}"/>
+              </a:ext>
+            </a:extLst>
+          </p:cNvPr>
+          <p:cNvSpPr>
+            <a:spLocks noGrp="1" noRot="1" noChangeAspect="1"/>
+          </p:cNvSpPr>
+          <p:nvPr>
+            <p:ph type="sldImg"/>
+          </p:nvPr>
+        </p:nvSpPr>
+        <p:spPr/>
+      </p:sp>
+      <p:sp>
+        <p:nvSpPr>
+          <p:cNvPr id="3" name="备注占位符 2">
+            <a:extLst>
+              <a:ext uri="{FF2B5EF4-FFF2-40B4-BE49-F238E27FC236}">
+                <a16:creationId xmlns:a16="http://schemas.microsoft.com/office/drawing/2014/main" id="{29E234C0-616B-5CD1-3DC3-B6B48136D085}"/>
+              </a:ext>
+            </a:extLst>
+          </p:cNvPr>
+          <p:cNvSpPr>
+            <a:spLocks noGrp="1"/>
+          </p:cNvSpPr>
+          <p:nvPr>
+            <p:ph type="body" idx="1"/>
+          </p:nvPr>
+        </p:nvSpPr>
+        <p:spPr/>
+        <p:txBody>
+          <a:bodyPr/>
+          <a:lstStyle/>
+          <a:p>
+            <a:pPr algn="l">
+              <a:spcBef>
+                <a:spcPts val="450"/>
+              </a:spcBef>
+              <a:spcAft>
+                <a:spcPts val="450"/>
+              </a:spcAft>
+            </a:pPr>
+            <a:r>
+              <a:rPr lang="en-US" altLang="zh-CN" sz="1800" b="1" i="0">
+                <a:solidFill>
+                  <a:srgbClr val="2D3B45"/>
+                </a:solidFill>
+                <a:effectLst/>
+                <a:latin typeface="Lato Extended"/>
+              </a:rPr>
+              <a:t>Introduction Slide</a:t>
+            </a:r>
+            <a:endParaRPr lang="en-US" altLang="zh-CN" sz="1800" b="0" i="0">
+              <a:solidFill>
+                <a:srgbClr val="2D3B45"/>
+              </a:solidFill>
+              <a:effectLst/>
+              <a:latin typeface="Lato Extended"/>
+            </a:endParaRPr>
+          </a:p>
+          <a:p>
+            <a:pPr algn="l">
+              <a:spcAft>
+                <a:spcPts val="450"/>
+              </a:spcAft>
+              <a:buFont typeface="Arial" panose="020B0604020202020204" pitchFamily="34" charset="0"/>
+              <a:buChar char="•"/>
+            </a:pPr>
+            <a:r>
+              <a:rPr lang="en-US" altLang="zh-CN" sz="1800" b="1" i="0">
+                <a:solidFill>
+                  <a:srgbClr val="2D3B45"/>
+                </a:solidFill>
+                <a:effectLst/>
+                <a:latin typeface="v-sans"/>
+              </a:rPr>
+              <a:t>Brief Introduction:</a:t>
+            </a:r>
+            <a:r>
+              <a:rPr lang="en-US" altLang="zh-CN" sz="1800" b="0" i="0">
+                <a:solidFill>
+                  <a:srgbClr val="2D3B45"/>
+                </a:solidFill>
+                <a:effectLst/>
+                <a:latin typeface="v-sans"/>
+              </a:rPr>
+              <a:t> of the team and the topic</a:t>
+            </a:r>
+          </a:p>
+          <a:p>
+            <a:endParaRPr lang="zh-CN" altLang="en-US"/>
+          </a:p>
+        </p:txBody>
+      </p:sp>
+      <p:sp>
+        <p:nvSpPr>
+          <p:cNvPr id="4" name="灯片编号占位符 3">
+            <a:extLst>
+              <a:ext uri="{FF2B5EF4-FFF2-40B4-BE49-F238E27FC236}">
+                <a16:creationId xmlns:a16="http://schemas.microsoft.com/office/drawing/2014/main" id="{CD02C3D5-768E-C1B1-FBC5-2A6D674543A0}"/>
+              </a:ext>
+            </a:extLst>
+          </p:cNvPr>
+          <p:cNvSpPr>
+            <a:spLocks noGrp="1"/>
+          </p:cNvSpPr>
+          <p:nvPr>
+            <p:ph type="sldNum" sz="quarter" idx="5"/>
+          </p:nvPr>
+        </p:nvSpPr>
+        <p:spPr/>
+        <p:txBody>
+          <a:bodyPr/>
+          <a:lstStyle/>
+          <a:p>
+            <a:fld id="{EED2C466-1B0F-4591-A952-5F31096967DE}" type="slidenum">
+              <a:rPr lang="zh-CN" altLang="en-US" smtClean="0"/>
+              <a:t>2</a:t>
+            </a:fld>
+            <a:endParaRPr lang="zh-CN" altLang="en-US"/>
+          </a:p>
+        </p:txBody>
+      </p:sp>
+    </p:spTree>
+    <p:extLst>
+      <p:ext uri="{BB962C8B-B14F-4D97-AF65-F5344CB8AC3E}">
+        <p14:creationId xmlns:p14="http://schemas.microsoft.com/office/powerpoint/2010/main" val="1757984631"/>
+      </p:ext>
+    </p:extLst>
+  </p:cSld>
+  <p:clrMapOvr>
+    <a:masterClrMapping/>
+  </p:clrMapOvr>
+</p:notes>
+</file>
+
+<file path=ppt/notesSlides/notesSlide3.xml><?xml version="1.0" encoding="utf-8"?>
 <p:notes xmlns:a="http://schemas.openxmlformats.org/drawingml/2006/main" xmlns:r="http://schemas.openxmlformats.org/officeDocument/2006/relationships" xmlns:p="http://schemas.openxmlformats.org/presentationml/2006/main">
   <p:cSld>
     <p:spTree>
@@ -3040,7 +3039,7 @@
           <a:p>
             <a:fld id="{EED2C466-1B0F-4591-A952-5F31096967DE}" type="slidenum">
               <a:rPr lang="zh-CN" altLang="en-US" smtClean="0"/>
-              <a:t>2</a:t>
+              <a:t>3</a:t>
             </a:fld>
             <a:endParaRPr lang="zh-CN" altLang="en-US"/>
           </a:p>
@@ -3050,170 +3049,6 @@
     <p:extLst>
       <p:ext uri="{BB962C8B-B14F-4D97-AF65-F5344CB8AC3E}">
         <p14:creationId xmlns:p14="http://schemas.microsoft.com/office/powerpoint/2010/main" val="1117822953"/>
-      </p:ext>
-    </p:extLst>
-  </p:cSld>
-  <p:clrMapOvr>
-    <a:masterClrMapping/>
-  </p:clrMapOvr>
-</p:notes>
-</file>
-
-<file path=ppt/notesSlides/notesSlide3.xml><?xml version="1.0" encoding="utf-8"?>
-<p:notes xmlns:a="http://schemas.openxmlformats.org/drawingml/2006/main" xmlns:r="http://schemas.openxmlformats.org/officeDocument/2006/relationships" xmlns:p="http://schemas.openxmlformats.org/presentationml/2006/main">
-  <p:cSld>
-    <p:spTree>
-      <p:nvGrpSpPr>
-        <p:cNvPr id="1" name="">
-          <a:extLst>
-            <a:ext uri="{FF2B5EF4-FFF2-40B4-BE49-F238E27FC236}">
-              <a16:creationId xmlns:a16="http://schemas.microsoft.com/office/drawing/2014/main" id="{C99A4FFB-D8FF-F77F-B6D3-161F9726D9C3}"/>
-            </a:ext>
-          </a:extLst>
-        </p:cNvPr>
-        <p:cNvGrpSpPr/>
-        <p:nvPr/>
-      </p:nvGrpSpPr>
-      <p:grpSpPr>
-        <a:xfrm>
-          <a:off x="0" y="0"/>
-          <a:ext cx="0" cy="0"/>
-          <a:chOff x="0" y="0"/>
-          <a:chExt cx="0" cy="0"/>
-        </a:xfrm>
-      </p:grpSpPr>
-      <p:sp>
-        <p:nvSpPr>
-          <p:cNvPr id="2" name="幻灯片图像占位符 1">
-            <a:extLst>
-              <a:ext uri="{FF2B5EF4-FFF2-40B4-BE49-F238E27FC236}">
-                <a16:creationId xmlns:a16="http://schemas.microsoft.com/office/drawing/2014/main" id="{4EAC9962-BF4C-7B93-5FCD-230ADFC6B335}"/>
-              </a:ext>
-            </a:extLst>
-          </p:cNvPr>
-          <p:cNvSpPr>
-            <a:spLocks noGrp="1" noRot="1" noChangeAspect="1"/>
-          </p:cNvSpPr>
-          <p:nvPr>
-            <p:ph type="sldImg"/>
-          </p:nvPr>
-        </p:nvSpPr>
-        <p:spPr/>
-      </p:sp>
-      <p:sp>
-        <p:nvSpPr>
-          <p:cNvPr id="3" name="备注占位符 2">
-            <a:extLst>
-              <a:ext uri="{FF2B5EF4-FFF2-40B4-BE49-F238E27FC236}">
-                <a16:creationId xmlns:a16="http://schemas.microsoft.com/office/drawing/2014/main" id="{29E234C0-616B-5CD1-3DC3-B6B48136D085}"/>
-              </a:ext>
-            </a:extLst>
-          </p:cNvPr>
-          <p:cNvSpPr>
-            <a:spLocks noGrp="1"/>
-          </p:cNvSpPr>
-          <p:nvPr>
-            <p:ph type="body" idx="1"/>
-          </p:nvPr>
-        </p:nvSpPr>
-        <p:spPr/>
-        <p:txBody>
-          <a:bodyPr/>
-          <a:lstStyle/>
-          <a:p>
-            <a:pPr algn="l">
-              <a:spcBef>
-                <a:spcPts val="450"/>
-              </a:spcBef>
-              <a:spcAft>
-                <a:spcPts val="450"/>
-              </a:spcAft>
-            </a:pPr>
-            <a:r>
-              <a:rPr lang="en-US" altLang="zh-CN" sz="1800" b="1" i="0">
-                <a:solidFill>
-                  <a:srgbClr val="2D3B45"/>
-                </a:solidFill>
-                <a:effectLst/>
-                <a:latin typeface="Lato Extended"/>
-              </a:rPr>
-              <a:t>Introduction Slide</a:t>
-            </a:r>
-            <a:endParaRPr lang="en-US" altLang="zh-CN" sz="1800" b="0" i="0">
-              <a:solidFill>
-                <a:srgbClr val="2D3B45"/>
-              </a:solidFill>
-              <a:effectLst/>
-              <a:latin typeface="Lato Extended"/>
-            </a:endParaRPr>
-          </a:p>
-          <a:p>
-            <a:pPr algn="l">
-              <a:spcAft>
-                <a:spcPts val="450"/>
-              </a:spcAft>
-              <a:buFont typeface="Arial" panose="020B0604020202020204" pitchFamily="34" charset="0"/>
-              <a:buChar char="•"/>
-            </a:pPr>
-            <a:r>
-              <a:rPr lang="en-US" altLang="zh-CN" sz="1800" b="1" i="0">
-                <a:solidFill>
-                  <a:srgbClr val="2D3B45"/>
-                </a:solidFill>
-                <a:effectLst/>
-                <a:latin typeface="v-sans"/>
-              </a:rPr>
-              <a:t>Brief Introduction:</a:t>
-            </a:r>
-            <a:r>
-              <a:rPr lang="en-US" altLang="zh-CN" sz="1800" b="0" i="0">
-                <a:solidFill>
-                  <a:srgbClr val="2D3B45"/>
-                </a:solidFill>
-                <a:effectLst/>
-                <a:latin typeface="v-sans"/>
-              </a:rPr>
-              <a:t> of the team and the topic</a:t>
-            </a:r>
-          </a:p>
-          <a:p>
-            <a:endParaRPr lang="zh-CN" altLang="en-US"/>
-          </a:p>
-        </p:txBody>
-      </p:sp>
-      <p:sp>
-        <p:nvSpPr>
-          <p:cNvPr id="4" name="灯片编号占位符 3">
-            <a:extLst>
-              <a:ext uri="{FF2B5EF4-FFF2-40B4-BE49-F238E27FC236}">
-                <a16:creationId xmlns:a16="http://schemas.microsoft.com/office/drawing/2014/main" id="{CD02C3D5-768E-C1B1-FBC5-2A6D674543A0}"/>
-              </a:ext>
-            </a:extLst>
-          </p:cNvPr>
-          <p:cNvSpPr>
-            <a:spLocks noGrp="1"/>
-          </p:cNvSpPr>
-          <p:nvPr>
-            <p:ph type="sldNum" sz="quarter" idx="5"/>
-          </p:nvPr>
-        </p:nvSpPr>
-        <p:spPr/>
-        <p:txBody>
-          <a:bodyPr/>
-          <a:lstStyle/>
-          <a:p>
-            <a:fld id="{EED2C466-1B0F-4591-A952-5F31096967DE}" type="slidenum">
-              <a:rPr lang="zh-CN" altLang="en-US" smtClean="0"/>
-              <a:t>3</a:t>
-            </a:fld>
-            <a:endParaRPr lang="zh-CN" altLang="en-US"/>
-          </a:p>
-        </p:txBody>
-      </p:sp>
-    </p:spTree>
-    <p:extLst>
-      <p:ext uri="{BB962C8B-B14F-4D97-AF65-F5344CB8AC3E}">
-        <p14:creationId xmlns:p14="http://schemas.microsoft.com/office/powerpoint/2010/main" val="1757984631"/>
       </p:ext>
     </p:extLst>
   </p:cSld>
@@ -7818,601 +7653,6 @@
         <p:cNvPr id="1" name="">
           <a:extLst>
             <a:ext uri="{FF2B5EF4-FFF2-40B4-BE49-F238E27FC236}">
-              <a16:creationId xmlns:a16="http://schemas.microsoft.com/office/drawing/2014/main" id="{5924EE15-657C-E1BE-12BC-396E28BED21E}"/>
-            </a:ext>
-          </a:extLst>
-        </p:cNvPr>
-        <p:cNvGrpSpPr/>
-        <p:nvPr/>
-      </p:nvGrpSpPr>
-      <p:grpSpPr>
-        <a:xfrm>
-          <a:off x="0" y="0"/>
-          <a:ext cx="0" cy="0"/>
-          <a:chOff x="0" y="0"/>
-          <a:chExt cx="0" cy="0"/>
-        </a:xfrm>
-      </p:grpSpPr>
-      <p:sp>
-        <p:nvSpPr>
-          <p:cNvPr id="3" name="图文框 2">
-            <a:extLst>
-              <a:ext uri="{FF2B5EF4-FFF2-40B4-BE49-F238E27FC236}">
-                <a16:creationId xmlns:a16="http://schemas.microsoft.com/office/drawing/2014/main" id="{AF05072A-D479-E840-B88F-DF8176D606C0}"/>
-              </a:ext>
-            </a:extLst>
-          </p:cNvPr>
-          <p:cNvSpPr/>
-          <p:nvPr/>
-        </p:nvSpPr>
-        <p:spPr>
-          <a:xfrm>
-            <a:off x="164147" y="282575"/>
-            <a:ext cx="11863705" cy="6403975"/>
-          </a:xfrm>
-          <a:prstGeom prst="frame">
-            <a:avLst>
-              <a:gd name="adj1" fmla="val 1196"/>
-            </a:avLst>
-          </a:prstGeom>
-          <a:solidFill>
-            <a:srgbClr val="13294B"/>
-          </a:solidFill>
-          <a:ln>
-            <a:solidFill>
-              <a:srgbClr val="13294B"/>
-            </a:solidFill>
-          </a:ln>
-          <a:effectLst>
-            <a:innerShdw blurRad="63500" dist="50800" dir="13500000">
-              <a:prstClr val="black">
-                <a:alpha val="50000"/>
-              </a:prstClr>
-            </a:innerShdw>
-          </a:effectLst>
-        </p:spPr>
-        <p:style>
-          <a:lnRef idx="2">
-            <a:schemeClr val="accent1">
-              <a:lumMod val="75000"/>
-            </a:schemeClr>
-          </a:lnRef>
-          <a:fillRef idx="1">
-            <a:schemeClr val="accent1"/>
-          </a:fillRef>
-          <a:effectRef idx="0">
-            <a:srgbClr val="FFFFFF"/>
-          </a:effectRef>
-          <a:fontRef idx="minor">
-            <a:schemeClr val="lt1"/>
-          </a:fontRef>
-        </p:style>
-        <p:txBody>
-          <a:bodyPr rtlCol="0" anchor="ctr"/>
-          <a:lstStyle/>
-          <a:p>
-            <a:pPr algn="ctr"/>
-            <a:endParaRPr lang="zh-CN" altLang="en-US"/>
-          </a:p>
-        </p:txBody>
-      </p:sp>
-      <p:sp>
-        <p:nvSpPr>
-          <p:cNvPr id="4" name="文本框 3">
-            <a:extLst>
-              <a:ext uri="{FF2B5EF4-FFF2-40B4-BE49-F238E27FC236}">
-                <a16:creationId xmlns:a16="http://schemas.microsoft.com/office/drawing/2014/main" id="{2C1F6BDC-B7C9-D88B-FC8A-17F809BE126B}"/>
-              </a:ext>
-            </a:extLst>
-          </p:cNvPr>
-          <p:cNvSpPr txBox="1"/>
-          <p:nvPr/>
-        </p:nvSpPr>
-        <p:spPr>
-          <a:xfrm>
-            <a:off x="650457" y="614859"/>
-            <a:ext cx="9446043" cy="769441"/>
-          </a:xfrm>
-          <a:prstGeom prst="rect">
-            <a:avLst/>
-          </a:prstGeom>
-          <a:noFill/>
-        </p:spPr>
-        <p:txBody>
-          <a:bodyPr wrap="square" lIns="91440" tIns="45720" rIns="91440" bIns="45720" rtlCol="0" anchor="t">
-            <a:spAutoFit/>
-          </a:bodyPr>
-          <a:lstStyle/>
-          <a:p>
-            <a:r>
-              <a:rPr lang="en-US" altLang="zh-CN" sz="4400" b="1" dirty="0">
-                <a:solidFill>
-                  <a:srgbClr val="13294B"/>
-                </a:solidFill>
-                <a:latin typeface="Calibri"/>
-                <a:ea typeface="等线"/>
-                <a:cs typeface="+mj-lt"/>
-              </a:rPr>
-              <a:t>Empathy Calibration Score (ECS)</a:t>
-            </a:r>
-          </a:p>
-        </p:txBody>
-      </p:sp>
-      <p:sp>
-        <p:nvSpPr>
-          <p:cNvPr id="9" name="半闭框 8">
-            <a:extLst>
-              <a:ext uri="{FF2B5EF4-FFF2-40B4-BE49-F238E27FC236}">
-                <a16:creationId xmlns:a16="http://schemas.microsoft.com/office/drawing/2014/main" id="{94AAEBAE-9D2F-9263-05DC-ECECE2320254}"/>
-              </a:ext>
-            </a:extLst>
-          </p:cNvPr>
-          <p:cNvSpPr/>
-          <p:nvPr/>
-        </p:nvSpPr>
-        <p:spPr>
-          <a:xfrm>
-            <a:off x="163830" y="282575"/>
-            <a:ext cx="3148330" cy="2355215"/>
-          </a:xfrm>
-          <a:prstGeom prst="halfFrame">
-            <a:avLst>
-              <a:gd name="adj1" fmla="val 4756"/>
-              <a:gd name="adj2" fmla="val 5021"/>
-            </a:avLst>
-          </a:prstGeom>
-          <a:solidFill>
-            <a:srgbClr val="FF5F05"/>
-          </a:solidFill>
-          <a:ln>
-            <a:solidFill>
-              <a:srgbClr val="FF5F05"/>
-            </a:solidFill>
-          </a:ln>
-        </p:spPr>
-        <p:style>
-          <a:lnRef idx="2">
-            <a:schemeClr val="accent1">
-              <a:lumMod val="75000"/>
-            </a:schemeClr>
-          </a:lnRef>
-          <a:fillRef idx="1">
-            <a:schemeClr val="accent1"/>
-          </a:fillRef>
-          <a:effectRef idx="0">
-            <a:srgbClr val="FFFFFF"/>
-          </a:effectRef>
-          <a:fontRef idx="minor">
-            <a:schemeClr val="lt1"/>
-          </a:fontRef>
-        </p:style>
-        <p:txBody>
-          <a:bodyPr rtlCol="0" anchor="ctr"/>
-          <a:lstStyle/>
-          <a:p>
-            <a:pPr algn="ctr"/>
-            <a:endParaRPr lang="zh-CN" altLang="en-US">
-              <a:solidFill>
-                <a:schemeClr val="tx1"/>
-              </a:solidFill>
-            </a:endParaRPr>
-          </a:p>
-        </p:txBody>
-      </p:sp>
-      <p:sp>
-        <p:nvSpPr>
-          <p:cNvPr id="10" name="半闭框 9">
-            <a:extLst>
-              <a:ext uri="{FF2B5EF4-FFF2-40B4-BE49-F238E27FC236}">
-                <a16:creationId xmlns:a16="http://schemas.microsoft.com/office/drawing/2014/main" id="{FE586475-6379-515B-A8C7-357240F33B6B}"/>
-              </a:ext>
-            </a:extLst>
-          </p:cNvPr>
-          <p:cNvSpPr/>
-          <p:nvPr>
-            <p:custDataLst>
-              <p:tags r:id="rId1"/>
-            </p:custDataLst>
-          </p:nvPr>
-        </p:nvSpPr>
-        <p:spPr>
-          <a:xfrm rot="10800000">
-            <a:off x="8357868" y="4262753"/>
-            <a:ext cx="3669983" cy="2423795"/>
-          </a:xfrm>
-          <a:prstGeom prst="halfFrame">
-            <a:avLst>
-              <a:gd name="adj1" fmla="val 4659"/>
-              <a:gd name="adj2" fmla="val 4349"/>
-            </a:avLst>
-          </a:prstGeom>
-          <a:solidFill>
-            <a:srgbClr val="FF5F05"/>
-          </a:solidFill>
-          <a:ln>
-            <a:solidFill>
-              <a:srgbClr val="FF5F05"/>
-            </a:solidFill>
-          </a:ln>
-        </p:spPr>
-        <p:style>
-          <a:lnRef idx="2">
-            <a:schemeClr val="accent1">
-              <a:lumMod val="75000"/>
-            </a:schemeClr>
-          </a:lnRef>
-          <a:fillRef idx="1">
-            <a:schemeClr val="accent1"/>
-          </a:fillRef>
-          <a:effectRef idx="0">
-            <a:srgbClr val="FFFFFF"/>
-          </a:effectRef>
-          <a:fontRef idx="minor">
-            <a:schemeClr val="lt1"/>
-          </a:fontRef>
-        </p:style>
-        <p:txBody>
-          <a:bodyPr rtlCol="0" anchor="ctr"/>
-          <a:lstStyle/>
-          <a:p>
-            <a:pPr algn="ctr"/>
-            <a:endParaRPr lang="zh-CN" altLang="en-US">
-              <a:solidFill>
-                <a:schemeClr val="tx1"/>
-              </a:solidFill>
-            </a:endParaRPr>
-          </a:p>
-        </p:txBody>
-      </p:sp>
-      <p:cxnSp>
-        <p:nvCxnSpPr>
-          <p:cNvPr id="13" name="直接连接符 12">
-            <a:extLst>
-              <a:ext uri="{FF2B5EF4-FFF2-40B4-BE49-F238E27FC236}">
-                <a16:creationId xmlns:a16="http://schemas.microsoft.com/office/drawing/2014/main" id="{CADDF9A0-848B-41BB-ED8B-EEDD7C7754A6}"/>
-              </a:ext>
-            </a:extLst>
-          </p:cNvPr>
-          <p:cNvCxnSpPr/>
-          <p:nvPr/>
-        </p:nvCxnSpPr>
-        <p:spPr>
-          <a:xfrm>
-            <a:off x="650457" y="1480820"/>
-            <a:ext cx="6546850" cy="14605"/>
-          </a:xfrm>
-          <a:prstGeom prst="line">
-            <a:avLst/>
-          </a:prstGeom>
-          <a:ln w="57150">
-            <a:solidFill>
-              <a:srgbClr val="FF5F05">
-                <a:alpha val="81000"/>
-              </a:srgbClr>
-            </a:solidFill>
-          </a:ln>
-        </p:spPr>
-        <p:style>
-          <a:lnRef idx="2">
-            <a:schemeClr val="accent1"/>
-          </a:lnRef>
-          <a:fillRef idx="0">
-            <a:srgbClr val="FFFFFF"/>
-          </a:fillRef>
-          <a:effectRef idx="0">
-            <a:srgbClr val="FFFFFF"/>
-          </a:effectRef>
-          <a:fontRef idx="minor">
-            <a:schemeClr val="tx1"/>
-          </a:fontRef>
-        </p:style>
-      </p:cxnSp>
-      <p:pic>
-        <p:nvPicPr>
-          <p:cNvPr id="100" name="图片 99">
-            <a:extLst>
-              <a:ext uri="{FF2B5EF4-FFF2-40B4-BE49-F238E27FC236}">
-                <a16:creationId xmlns:a16="http://schemas.microsoft.com/office/drawing/2014/main" id="{BBFAD97B-9ECD-B243-06E5-0C59695D79CB}"/>
-              </a:ext>
-            </a:extLst>
-          </p:cNvPr>
-          <p:cNvPicPr/>
-          <p:nvPr/>
-        </p:nvPicPr>
-        <p:blipFill>
-          <a:blip r:embed="rId4"/>
-          <a:stretch>
-            <a:fillRect/>
-          </a:stretch>
-        </p:blipFill>
-        <p:spPr>
-          <a:xfrm>
-            <a:off x="9906635" y="171450"/>
-            <a:ext cx="1906270" cy="1212850"/>
-          </a:xfrm>
-          <a:prstGeom prst="rect">
-            <a:avLst/>
-          </a:prstGeom>
-          <a:noFill/>
-          <a:ln w="9525">
-            <a:noFill/>
-          </a:ln>
-        </p:spPr>
-      </p:pic>
-      <p:sp>
-        <p:nvSpPr>
-          <p:cNvPr id="5" name="文本框 4">
-            <a:extLst>
-              <a:ext uri="{FF2B5EF4-FFF2-40B4-BE49-F238E27FC236}">
-                <a16:creationId xmlns:a16="http://schemas.microsoft.com/office/drawing/2014/main" id="{983ADD24-6931-539A-526C-9EE7C3AE6976}"/>
-              </a:ext>
-            </a:extLst>
-          </p:cNvPr>
-          <p:cNvSpPr txBox="1"/>
-          <p:nvPr/>
-        </p:nvSpPr>
-        <p:spPr>
-          <a:xfrm>
-            <a:off x="613543" y="1741049"/>
-            <a:ext cx="10964912" cy="2062103"/>
-          </a:xfrm>
-          <a:prstGeom prst="rect">
-            <a:avLst/>
-          </a:prstGeom>
-          <a:noFill/>
-        </p:spPr>
-        <p:txBody>
-          <a:bodyPr wrap="square" lIns="91440" tIns="45720" rIns="91440" bIns="45720" rtlCol="0" anchor="t">
-            <a:spAutoFit/>
-          </a:bodyPr>
-          <a:lstStyle/>
-          <a:p>
-            <a:pPr marL="457200" indent="-457200">
-              <a:spcAft>
-                <a:spcPts val="600"/>
-              </a:spcAft>
-              <a:buFont typeface="Arial" panose="020B0604020202020204" pitchFamily="34" charset="0"/>
-              <a:buChar char="•"/>
-            </a:pPr>
-            <a:r>
-              <a:rPr lang="en-US" altLang="zh-CN" sz="3200" dirty="0">
-                <a:solidFill>
-                  <a:srgbClr val="13294B"/>
-                </a:solidFill>
-                <a:latin typeface="Calibri"/>
-                <a:ea typeface="宋体"/>
-                <a:cs typeface="Calibri"/>
-              </a:rPr>
-              <a:t>The ECS is a two-dimensional rubric designed to measure not absolute empathy, but calibration— how well a response’s empathetic register matches what the customer’s expressed frustration level warrants.</a:t>
-            </a:r>
-          </a:p>
-        </p:txBody>
-      </p:sp>
-      <p:graphicFrame>
-        <p:nvGraphicFramePr>
-          <p:cNvPr id="2" name="表格 1">
-            <a:extLst>
-              <a:ext uri="{FF2B5EF4-FFF2-40B4-BE49-F238E27FC236}">
-                <a16:creationId xmlns:a16="http://schemas.microsoft.com/office/drawing/2014/main" id="{5B173359-1CCA-714D-463D-B6A0401E7C9C}"/>
-              </a:ext>
-            </a:extLst>
-          </p:cNvPr>
-          <p:cNvGraphicFramePr>
-            <a:graphicFrameLocks noGrp="1"/>
-          </p:cNvGraphicFramePr>
-          <p:nvPr>
-            <p:extLst>
-              <p:ext uri="{D42A27DB-BD31-4B8C-83A1-F6EECF244321}">
-                <p14:modId xmlns:p14="http://schemas.microsoft.com/office/powerpoint/2010/main" val="2090334612"/>
-              </p:ext>
-            </p:extLst>
-          </p:nvPr>
-        </p:nvGraphicFramePr>
-        <p:xfrm>
-          <a:off x="914401" y="3803152"/>
-          <a:ext cx="10469571" cy="2533953"/>
-        </p:xfrm>
-        <a:graphic>
-          <a:graphicData uri="http://schemas.openxmlformats.org/drawingml/2006/table">
-            <a:tbl>
-              <a:tblPr firstRow="1" bandRow="1">
-                <a:tableStyleId>{21E4AEA4-8DFA-4A89-87EB-49C32662AFE0}</a:tableStyleId>
-              </a:tblPr>
-              <a:tblGrid>
-                <a:gridCol w="3489857">
-                  <a:extLst>
-                    <a:ext uri="{9D8B030D-6E8A-4147-A177-3AD203B41FA5}">
-                      <a16:colId xmlns:a16="http://schemas.microsoft.com/office/drawing/2014/main" val="2473411904"/>
-                    </a:ext>
-                  </a:extLst>
-                </a:gridCol>
-                <a:gridCol w="3489857">
-                  <a:extLst>
-                    <a:ext uri="{9D8B030D-6E8A-4147-A177-3AD203B41FA5}">
-                      <a16:colId xmlns:a16="http://schemas.microsoft.com/office/drawing/2014/main" val="1406048790"/>
-                    </a:ext>
-                  </a:extLst>
-                </a:gridCol>
-                <a:gridCol w="3489857">
-                  <a:extLst>
-                    <a:ext uri="{9D8B030D-6E8A-4147-A177-3AD203B41FA5}">
-                      <a16:colId xmlns:a16="http://schemas.microsoft.com/office/drawing/2014/main" val="3813345470"/>
-                    </a:ext>
-                  </a:extLst>
-                </a:gridCol>
-              </a:tblGrid>
-              <a:tr h="317802">
-                <a:tc>
-                  <a:txBody>
-                    <a:bodyPr/>
-                    <a:lstStyle/>
-                    <a:p>
-                      <a:r>
-                        <a:rPr lang="en-US" altLang="zh-CN" dirty="0"/>
-                        <a:t>Dimension</a:t>
-                      </a:r>
-                      <a:endParaRPr lang="zh-CN" altLang="en-US" dirty="0"/>
-                    </a:p>
-                  </a:txBody>
-                  <a:tcPr/>
-                </a:tc>
-                <a:tc>
-                  <a:txBody>
-                    <a:bodyPr/>
-                    <a:lstStyle/>
-                    <a:p>
-                      <a:r>
-                        <a:rPr lang="en-US" altLang="zh-CN" dirty="0"/>
-                        <a:t>Measurement</a:t>
-                      </a:r>
-                      <a:endParaRPr lang="zh-CN" altLang="en-US" dirty="0"/>
-                    </a:p>
-                  </a:txBody>
-                  <a:tcPr/>
-                </a:tc>
-                <a:tc>
-                  <a:txBody>
-                    <a:bodyPr/>
-                    <a:lstStyle/>
-                    <a:p>
-                      <a:r>
-                        <a:rPr lang="en-US" altLang="zh-CN" dirty="0"/>
-                        <a:t>Weight at high FIS</a:t>
-                      </a:r>
-                      <a:endParaRPr lang="zh-CN" altLang="en-US" dirty="0"/>
-                    </a:p>
-                  </a:txBody>
-                  <a:tcPr/>
-                </a:tc>
-                <a:extLst>
-                  <a:ext uri="{0D108BD9-81ED-4DB2-BD59-A6C34878D82A}">
-                    <a16:rowId xmlns:a16="http://schemas.microsoft.com/office/drawing/2014/main" val="208840510"/>
-                  </a:ext>
-                </a:extLst>
-              </a:tr>
-              <a:tr h="783620">
-                <a:tc>
-                  <a:txBody>
-                    <a:bodyPr/>
-                    <a:lstStyle/>
-                    <a:p>
-                      <a:r>
-                        <a:rPr lang="en-US" altLang="zh-CN" dirty="0"/>
-                        <a:t>Apology density</a:t>
-                      </a:r>
-                      <a:endParaRPr lang="zh-CN" altLang="en-US" dirty="0"/>
-                    </a:p>
-                  </a:txBody>
-                  <a:tcPr/>
-                </a:tc>
-                <a:tc>
-                  <a:txBody>
-                    <a:bodyPr/>
-                    <a:lstStyle/>
-                    <a:p>
-                      <a:r>
-                        <a:rPr lang="en-US" altLang="zh-CN" dirty="0"/>
-                        <a:t>Normalized count of apology/regret terms (regex). Fully auto mated.</a:t>
-                      </a:r>
-                      <a:endParaRPr lang="zh-CN" altLang="en-US" dirty="0"/>
-                    </a:p>
-                  </a:txBody>
-                  <a:tcPr/>
-                </a:tc>
-                <a:tc>
-                  <a:txBody>
-                    <a:bodyPr/>
-                    <a:lstStyle/>
-                    <a:p>
-                      <a:r>
-                        <a:rPr lang="en-US" altLang="zh-CN" dirty="0"/>
-                        <a:t>Higher weight</a:t>
-                      </a:r>
-                      <a:endParaRPr lang="zh-CN" altLang="en-US" dirty="0"/>
-                    </a:p>
-                  </a:txBody>
-                  <a:tcPr/>
-                </a:tc>
-                <a:extLst>
-                  <a:ext uri="{0D108BD9-81ED-4DB2-BD59-A6C34878D82A}">
-                    <a16:rowId xmlns:a16="http://schemas.microsoft.com/office/drawing/2014/main" val="1428517476"/>
-                  </a:ext>
-                </a:extLst>
-              </a:tr>
-              <a:tr h="1253793">
-                <a:tc>
-                  <a:txBody>
-                    <a:bodyPr/>
-                    <a:lstStyle/>
-                    <a:p>
-                      <a:r>
-                        <a:rPr lang="en-US" altLang="zh-CN" dirty="0"/>
-                        <a:t>Tone-frustration fit</a:t>
-                      </a:r>
-                      <a:endParaRPr lang="zh-CN" altLang="en-US" dirty="0"/>
-                    </a:p>
-                  </a:txBody>
-                  <a:tcPr/>
-                </a:tc>
-                <a:tc>
-                  <a:txBody>
-                    <a:bodyPr/>
-                    <a:lstStyle/>
-                    <a:p>
-                      <a:r>
-                        <a:rPr lang="en-US" altLang="zh-CN" dirty="0"/>
-                        <a:t>LLM-as-judge (GPT 4o) scores 1–5: does the response tone match the emotional register of the complaint?</a:t>
-                      </a:r>
-                      <a:endParaRPr lang="zh-CN" altLang="en-US" dirty="0"/>
-                    </a:p>
-                  </a:txBody>
-                  <a:tcPr/>
-                </a:tc>
-                <a:tc>
-                  <a:txBody>
-                    <a:bodyPr/>
-                    <a:lstStyle/>
-                    <a:p>
-                      <a:r>
-                        <a:rPr lang="en-US" altLang="zh-CN" dirty="0"/>
-                        <a:t>Equal weight</a:t>
-                      </a:r>
-                      <a:endParaRPr lang="zh-CN" altLang="en-US" dirty="0"/>
-                    </a:p>
-                  </a:txBody>
-                  <a:tcPr/>
-                </a:tc>
-                <a:extLst>
-                  <a:ext uri="{0D108BD9-81ED-4DB2-BD59-A6C34878D82A}">
-                    <a16:rowId xmlns:a16="http://schemas.microsoft.com/office/drawing/2014/main" val="1053424"/>
-                  </a:ext>
-                </a:extLst>
-              </a:tr>
-            </a:tbl>
-          </a:graphicData>
-        </a:graphic>
-      </p:graphicFrame>
-    </p:spTree>
-    <p:extLst>
-      <p:ext uri="{BB962C8B-B14F-4D97-AF65-F5344CB8AC3E}">
-        <p14:creationId xmlns:p14="http://schemas.microsoft.com/office/powerpoint/2010/main" val="2558277820"/>
-      </p:ext>
-    </p:extLst>
-  </p:cSld>
-  <p:clrMapOvr>
-    <a:masterClrMapping/>
-  </p:clrMapOvr>
-</p:sld>
-</file>
-
-<file path=ppt/slides/slide11.xml><?xml version="1.0" encoding="utf-8"?>
-<p:sld xmlns:a="http://schemas.openxmlformats.org/drawingml/2006/main" xmlns:r="http://schemas.openxmlformats.org/officeDocument/2006/relationships" xmlns:p="http://schemas.openxmlformats.org/presentationml/2006/main">
-  <p:cSld>
-    <p:spTree>
-      <p:nvGrpSpPr>
-        <p:cNvPr id="1" name="">
-          <a:extLst>
-            <a:ext uri="{FF2B5EF4-FFF2-40B4-BE49-F238E27FC236}">
               <a16:creationId xmlns:a16="http://schemas.microsoft.com/office/drawing/2014/main" id="{F91C1AA8-633B-0E63-2970-BD86F8762D1B}"/>
             </a:ext>
           </a:extLst>
@@ -8994,7 +8234,7 @@
 </p:sld>
 </file>
 
-<file path=ppt/slides/slide12.xml><?xml version="1.0" encoding="utf-8"?>
+<file path=ppt/slides/slide11.xml><?xml version="1.0" encoding="utf-8"?>
 <p:sld xmlns:a="http://schemas.openxmlformats.org/drawingml/2006/main" xmlns:r="http://schemas.openxmlformats.org/officeDocument/2006/relationships" xmlns:p="http://schemas.openxmlformats.org/presentationml/2006/main">
   <p:cSld>
     <p:spTree>
@@ -9454,7 +8694,7 @@
 </p:sld>
 </file>
 
-<file path=ppt/slides/slide13.xml><?xml version="1.0" encoding="utf-8"?>
+<file path=ppt/slides/slide12.xml><?xml version="1.0" encoding="utf-8"?>
 <p:sld xmlns:a="http://schemas.openxmlformats.org/drawingml/2006/main" xmlns:r="http://schemas.openxmlformats.org/officeDocument/2006/relationships" xmlns:p="http://schemas.openxmlformats.org/presentationml/2006/main">
   <p:cSld>
     <p:spTree>
@@ -9905,7 +9145,7 @@
 </p:sld>
 </file>
 
-<file path=ppt/slides/slide14.xml><?xml version="1.0" encoding="utf-8"?>
+<file path=ppt/slides/slide13.xml><?xml version="1.0" encoding="utf-8"?>
 <p:sld xmlns:a="http://schemas.openxmlformats.org/drawingml/2006/main" xmlns:r="http://schemas.openxmlformats.org/officeDocument/2006/relationships" xmlns:p="http://schemas.openxmlformats.org/presentationml/2006/main">
   <p:cSld>
     <p:spTree>
@@ -10304,7 +9544,7 @@
 </p:sld>
 </file>
 
-<file path=ppt/slides/slide15.xml><?xml version="1.0" encoding="utf-8"?>
+<file path=ppt/slides/slide14.xml><?xml version="1.0" encoding="utf-8"?>
 <p:sld xmlns:a="http://schemas.openxmlformats.org/drawingml/2006/main" xmlns:r="http://schemas.openxmlformats.org/officeDocument/2006/relationships" xmlns:p="http://schemas.openxmlformats.org/presentationml/2006/main">
   <p:cSld>
     <p:spTree>
@@ -10807,7 +10047,7 @@
 </p:sld>
 </file>
 
-<file path=ppt/slides/slide16.xml><?xml version="1.0" encoding="utf-8"?>
+<file path=ppt/slides/slide15.xml><?xml version="1.0" encoding="utf-8"?>
 <p:sld xmlns:a="http://schemas.openxmlformats.org/drawingml/2006/main" xmlns:r="http://schemas.openxmlformats.org/officeDocument/2006/relationships" xmlns:p="http://schemas.openxmlformats.org/presentationml/2006/main">
   <p:cSld>
     <p:spTree>
@@ -11310,7 +10550,7 @@
 </p:sld>
 </file>
 
-<file path=ppt/slides/slide17.xml><?xml version="1.0" encoding="utf-8"?>
+<file path=ppt/slides/slide16.xml><?xml version="1.0" encoding="utf-8"?>
 <p:sld xmlns:a="http://schemas.openxmlformats.org/drawingml/2006/main" xmlns:r="http://schemas.openxmlformats.org/officeDocument/2006/relationships" xmlns:p="http://schemas.openxmlformats.org/presentationml/2006/main">
   <p:cSld>
     <p:spTree>
@@ -12169,6 +11409,453 @@
 </file>
 
 <file path=ppt/slides/slide2.xml><?xml version="1.0" encoding="utf-8"?>
+<p:sld xmlns:a="http://schemas.openxmlformats.org/drawingml/2006/main" xmlns:r="http://schemas.openxmlformats.org/officeDocument/2006/relationships" xmlns:p="http://schemas.openxmlformats.org/presentationml/2006/main">
+  <p:cSld>
+    <p:spTree>
+      <p:nvGrpSpPr>
+        <p:cNvPr id="1" name="">
+          <a:extLst>
+            <a:ext uri="{FF2B5EF4-FFF2-40B4-BE49-F238E27FC236}">
+              <a16:creationId xmlns:a16="http://schemas.microsoft.com/office/drawing/2014/main" id="{3F2CAE9D-349C-8D29-97B8-45694169D71D}"/>
+            </a:ext>
+          </a:extLst>
+        </p:cNvPr>
+        <p:cNvGrpSpPr/>
+        <p:nvPr/>
+      </p:nvGrpSpPr>
+      <p:grpSpPr>
+        <a:xfrm>
+          <a:off x="0" y="0"/>
+          <a:ext cx="0" cy="0"/>
+          <a:chOff x="0" y="0"/>
+          <a:chExt cx="0" cy="0"/>
+        </a:xfrm>
+      </p:grpSpPr>
+      <p:sp>
+        <p:nvSpPr>
+          <p:cNvPr id="3" name="图文框 2">
+            <a:extLst>
+              <a:ext uri="{FF2B5EF4-FFF2-40B4-BE49-F238E27FC236}">
+                <a16:creationId xmlns:a16="http://schemas.microsoft.com/office/drawing/2014/main" id="{685D7C8E-817E-F563-219D-B815CCCAE039}"/>
+              </a:ext>
+            </a:extLst>
+          </p:cNvPr>
+          <p:cNvSpPr/>
+          <p:nvPr/>
+        </p:nvSpPr>
+        <p:spPr>
+          <a:xfrm>
+            <a:off x="164147" y="282575"/>
+            <a:ext cx="11863705" cy="6403975"/>
+          </a:xfrm>
+          <a:prstGeom prst="frame">
+            <a:avLst>
+              <a:gd name="adj1" fmla="val 1196"/>
+            </a:avLst>
+          </a:prstGeom>
+          <a:solidFill>
+            <a:srgbClr val="13294B"/>
+          </a:solidFill>
+          <a:ln>
+            <a:solidFill>
+              <a:srgbClr val="13294B"/>
+            </a:solidFill>
+          </a:ln>
+          <a:effectLst>
+            <a:innerShdw blurRad="63500" dist="50800" dir="13500000">
+              <a:prstClr val="black">
+                <a:alpha val="50000"/>
+              </a:prstClr>
+            </a:innerShdw>
+          </a:effectLst>
+        </p:spPr>
+        <p:style>
+          <a:lnRef idx="2">
+            <a:schemeClr val="accent1">
+              <a:lumMod val="75000"/>
+            </a:schemeClr>
+          </a:lnRef>
+          <a:fillRef idx="1">
+            <a:schemeClr val="accent1"/>
+          </a:fillRef>
+          <a:effectRef idx="0">
+            <a:srgbClr val="FFFFFF"/>
+          </a:effectRef>
+          <a:fontRef idx="minor">
+            <a:schemeClr val="lt1"/>
+          </a:fontRef>
+        </p:style>
+        <p:txBody>
+          <a:bodyPr rtlCol="0" anchor="ctr"/>
+          <a:lstStyle/>
+          <a:p>
+            <a:pPr algn="ctr"/>
+            <a:endParaRPr lang="zh-CN" altLang="en-US"/>
+          </a:p>
+        </p:txBody>
+      </p:sp>
+      <p:sp>
+        <p:nvSpPr>
+          <p:cNvPr id="4" name="文本框 3">
+            <a:extLst>
+              <a:ext uri="{FF2B5EF4-FFF2-40B4-BE49-F238E27FC236}">
+                <a16:creationId xmlns:a16="http://schemas.microsoft.com/office/drawing/2014/main" id="{E1E581F1-1B4E-5233-3881-67F0423276DD}"/>
+              </a:ext>
+            </a:extLst>
+          </p:cNvPr>
+          <p:cNvSpPr txBox="1"/>
+          <p:nvPr/>
+        </p:nvSpPr>
+        <p:spPr>
+          <a:xfrm>
+            <a:off x="650457" y="614859"/>
+            <a:ext cx="9446043" cy="769441"/>
+          </a:xfrm>
+          <a:prstGeom prst="rect">
+            <a:avLst/>
+          </a:prstGeom>
+          <a:noFill/>
+        </p:spPr>
+        <p:txBody>
+          <a:bodyPr wrap="square" lIns="91440" tIns="45720" rIns="91440" bIns="45720" rtlCol="0" anchor="t">
+            <a:spAutoFit/>
+          </a:bodyPr>
+          <a:lstStyle/>
+          <a:p>
+            <a:r>
+              <a:rPr lang="en-US" altLang="zh-CN" sz="4400" b="1" dirty="0">
+                <a:solidFill>
+                  <a:srgbClr val="13294B"/>
+                </a:solidFill>
+                <a:latin typeface="Calibri"/>
+                <a:ea typeface="等线"/>
+                <a:cs typeface="+mj-lt"/>
+              </a:rPr>
+              <a:t>Research Question</a:t>
+            </a:r>
+          </a:p>
+        </p:txBody>
+      </p:sp>
+      <p:sp>
+        <p:nvSpPr>
+          <p:cNvPr id="9" name="半闭框 8">
+            <a:extLst>
+              <a:ext uri="{FF2B5EF4-FFF2-40B4-BE49-F238E27FC236}">
+                <a16:creationId xmlns:a16="http://schemas.microsoft.com/office/drawing/2014/main" id="{86571FCB-A371-3723-B078-6158F6C766C2}"/>
+              </a:ext>
+            </a:extLst>
+          </p:cNvPr>
+          <p:cNvSpPr/>
+          <p:nvPr/>
+        </p:nvSpPr>
+        <p:spPr>
+          <a:xfrm>
+            <a:off x="163830" y="282575"/>
+            <a:ext cx="3148330" cy="2355215"/>
+          </a:xfrm>
+          <a:prstGeom prst="halfFrame">
+            <a:avLst>
+              <a:gd name="adj1" fmla="val 4756"/>
+              <a:gd name="adj2" fmla="val 5021"/>
+            </a:avLst>
+          </a:prstGeom>
+          <a:solidFill>
+            <a:srgbClr val="FF5F05"/>
+          </a:solidFill>
+          <a:ln>
+            <a:solidFill>
+              <a:srgbClr val="FF5F05"/>
+            </a:solidFill>
+          </a:ln>
+        </p:spPr>
+        <p:style>
+          <a:lnRef idx="2">
+            <a:schemeClr val="accent1">
+              <a:lumMod val="75000"/>
+            </a:schemeClr>
+          </a:lnRef>
+          <a:fillRef idx="1">
+            <a:schemeClr val="accent1"/>
+          </a:fillRef>
+          <a:effectRef idx="0">
+            <a:srgbClr val="FFFFFF"/>
+          </a:effectRef>
+          <a:fontRef idx="minor">
+            <a:schemeClr val="lt1"/>
+          </a:fontRef>
+        </p:style>
+        <p:txBody>
+          <a:bodyPr rtlCol="0" anchor="ctr"/>
+          <a:lstStyle/>
+          <a:p>
+            <a:pPr algn="ctr"/>
+            <a:endParaRPr lang="zh-CN" altLang="en-US">
+              <a:solidFill>
+                <a:schemeClr val="tx1"/>
+              </a:solidFill>
+            </a:endParaRPr>
+          </a:p>
+        </p:txBody>
+      </p:sp>
+      <p:sp>
+        <p:nvSpPr>
+          <p:cNvPr id="10" name="半闭框 9">
+            <a:extLst>
+              <a:ext uri="{FF2B5EF4-FFF2-40B4-BE49-F238E27FC236}">
+                <a16:creationId xmlns:a16="http://schemas.microsoft.com/office/drawing/2014/main" id="{839E0284-D281-0F11-E08C-21A49FA2B942}"/>
+              </a:ext>
+            </a:extLst>
+          </p:cNvPr>
+          <p:cNvSpPr/>
+          <p:nvPr>
+            <p:custDataLst>
+              <p:tags r:id="rId1"/>
+            </p:custDataLst>
+          </p:nvPr>
+        </p:nvSpPr>
+        <p:spPr>
+          <a:xfrm rot="10800000">
+            <a:off x="8357868" y="4262753"/>
+            <a:ext cx="3669983" cy="2423795"/>
+          </a:xfrm>
+          <a:prstGeom prst="halfFrame">
+            <a:avLst>
+              <a:gd name="adj1" fmla="val 4659"/>
+              <a:gd name="adj2" fmla="val 4349"/>
+            </a:avLst>
+          </a:prstGeom>
+          <a:solidFill>
+            <a:srgbClr val="FF5F05"/>
+          </a:solidFill>
+          <a:ln>
+            <a:solidFill>
+              <a:srgbClr val="FF5F05"/>
+            </a:solidFill>
+          </a:ln>
+        </p:spPr>
+        <p:style>
+          <a:lnRef idx="2">
+            <a:schemeClr val="accent1">
+              <a:lumMod val="75000"/>
+            </a:schemeClr>
+          </a:lnRef>
+          <a:fillRef idx="1">
+            <a:schemeClr val="accent1"/>
+          </a:fillRef>
+          <a:effectRef idx="0">
+            <a:srgbClr val="FFFFFF"/>
+          </a:effectRef>
+          <a:fontRef idx="minor">
+            <a:schemeClr val="lt1"/>
+          </a:fontRef>
+        </p:style>
+        <p:txBody>
+          <a:bodyPr rtlCol="0" anchor="ctr"/>
+          <a:lstStyle/>
+          <a:p>
+            <a:pPr algn="ctr"/>
+            <a:endParaRPr lang="zh-CN" altLang="en-US">
+              <a:solidFill>
+                <a:schemeClr val="tx1"/>
+              </a:solidFill>
+            </a:endParaRPr>
+          </a:p>
+        </p:txBody>
+      </p:sp>
+      <p:cxnSp>
+        <p:nvCxnSpPr>
+          <p:cNvPr id="13" name="直接连接符 12">
+            <a:extLst>
+              <a:ext uri="{FF2B5EF4-FFF2-40B4-BE49-F238E27FC236}">
+                <a16:creationId xmlns:a16="http://schemas.microsoft.com/office/drawing/2014/main" id="{1C533638-ED2B-C619-B532-12760C01B352}"/>
+              </a:ext>
+            </a:extLst>
+          </p:cNvPr>
+          <p:cNvCxnSpPr/>
+          <p:nvPr/>
+        </p:nvCxnSpPr>
+        <p:spPr>
+          <a:xfrm>
+            <a:off x="650457" y="1480820"/>
+            <a:ext cx="6546850" cy="14605"/>
+          </a:xfrm>
+          <a:prstGeom prst="line">
+            <a:avLst/>
+          </a:prstGeom>
+          <a:ln w="57150">
+            <a:solidFill>
+              <a:srgbClr val="FF5F05">
+                <a:alpha val="81000"/>
+              </a:srgbClr>
+            </a:solidFill>
+          </a:ln>
+        </p:spPr>
+        <p:style>
+          <a:lnRef idx="2">
+            <a:schemeClr val="accent1"/>
+          </a:lnRef>
+          <a:fillRef idx="0">
+            <a:srgbClr val="FFFFFF"/>
+          </a:fillRef>
+          <a:effectRef idx="0">
+            <a:srgbClr val="FFFFFF"/>
+          </a:effectRef>
+          <a:fontRef idx="minor">
+            <a:schemeClr val="tx1"/>
+          </a:fontRef>
+        </p:style>
+      </p:cxnSp>
+      <p:pic>
+        <p:nvPicPr>
+          <p:cNvPr id="100" name="图片 99">
+            <a:extLst>
+              <a:ext uri="{FF2B5EF4-FFF2-40B4-BE49-F238E27FC236}">
+                <a16:creationId xmlns:a16="http://schemas.microsoft.com/office/drawing/2014/main" id="{64A3B441-0C5C-103B-36DF-98D7E0A6D3A6}"/>
+              </a:ext>
+            </a:extLst>
+          </p:cNvPr>
+          <p:cNvPicPr/>
+          <p:nvPr/>
+        </p:nvPicPr>
+        <p:blipFill>
+          <a:blip r:embed="rId4"/>
+          <a:stretch>
+            <a:fillRect/>
+          </a:stretch>
+        </p:blipFill>
+        <p:spPr>
+          <a:xfrm>
+            <a:off x="9906635" y="171450"/>
+            <a:ext cx="1906270" cy="1212850"/>
+          </a:xfrm>
+          <a:prstGeom prst="rect">
+            <a:avLst/>
+          </a:prstGeom>
+          <a:noFill/>
+          <a:ln w="9525">
+            <a:noFill/>
+          </a:ln>
+        </p:spPr>
+      </p:pic>
+      <p:sp>
+        <p:nvSpPr>
+          <p:cNvPr id="5" name="文本框 4">
+            <a:extLst>
+              <a:ext uri="{FF2B5EF4-FFF2-40B4-BE49-F238E27FC236}">
+                <a16:creationId xmlns:a16="http://schemas.microsoft.com/office/drawing/2014/main" id="{8D56EAC2-1C7E-0BD3-A8C8-CE21FE5081D1}"/>
+              </a:ext>
+            </a:extLst>
+          </p:cNvPr>
+          <p:cNvSpPr txBox="1"/>
+          <p:nvPr/>
+        </p:nvSpPr>
+        <p:spPr>
+          <a:xfrm>
+            <a:off x="613543" y="1741049"/>
+            <a:ext cx="5719751" cy="4170372"/>
+          </a:xfrm>
+          <a:prstGeom prst="rect">
+            <a:avLst/>
+          </a:prstGeom>
+          <a:noFill/>
+        </p:spPr>
+        <p:txBody>
+          <a:bodyPr wrap="square" lIns="91440" tIns="45720" rIns="91440" bIns="45720" rtlCol="0" anchor="t">
+            <a:spAutoFit/>
+          </a:bodyPr>
+          <a:lstStyle/>
+          <a:p>
+            <a:pPr marL="457200" indent="-457200">
+              <a:spcAft>
+                <a:spcPts val="600"/>
+              </a:spcAft>
+              <a:buFont typeface="Arial" panose="020B0604020202020204" pitchFamily="34" charset="0"/>
+              <a:buChar char="•"/>
+            </a:pPr>
+            <a:r>
+              <a:rPr lang="en-US" altLang="zh-CN" sz="3200" b="1" dirty="0">
+                <a:solidFill>
+                  <a:srgbClr val="13294B"/>
+                </a:solidFill>
+                <a:latin typeface="Calibri"/>
+                <a:ea typeface="宋体"/>
+                <a:cs typeface="Calibri"/>
+              </a:rPr>
+              <a:t>Have you ever gone through this situation?</a:t>
+            </a:r>
+          </a:p>
+          <a:p>
+            <a:pPr marL="914400" lvl="1" indent="-457200">
+              <a:spcAft>
+                <a:spcPts val="600"/>
+              </a:spcAft>
+              <a:buFont typeface="Arial" panose="020B0604020202020204" pitchFamily="34" charset="0"/>
+              <a:buChar char="•"/>
+            </a:pPr>
+            <a:r>
+              <a:rPr lang="en-US" altLang="zh-CN" sz="2800" dirty="0">
+                <a:solidFill>
+                  <a:srgbClr val="13294B"/>
+                </a:solidFill>
+                <a:latin typeface="Calibri"/>
+                <a:ea typeface="宋体"/>
+                <a:cs typeface="Calibri"/>
+              </a:rPr>
+              <a:t>When you try to chat or ask an question with an AI assistance, it keeps saying “sorry” and “I don’t know”. Then, they ask you to call a customer service and redirect you to another chat bot.</a:t>
+            </a:r>
+          </a:p>
+        </p:txBody>
+      </p:sp>
+      <p:pic>
+        <p:nvPicPr>
+          <p:cNvPr id="6" name="图片 5" descr="图形用户界面, 文本, 应用程序, 聊天或短信&#10;&#10;AI 生成的内容可能不正确。">
+            <a:extLst>
+              <a:ext uri="{FF2B5EF4-FFF2-40B4-BE49-F238E27FC236}">
+                <a16:creationId xmlns:a16="http://schemas.microsoft.com/office/drawing/2014/main" id="{879F0E7A-A5D7-4C8E-F0B6-DBA4125AE1D4}"/>
+              </a:ext>
+            </a:extLst>
+          </p:cNvPr>
+          <p:cNvPicPr>
+            <a:picLocks noChangeAspect="1"/>
+          </p:cNvPicPr>
+          <p:nvPr/>
+        </p:nvPicPr>
+        <p:blipFill>
+          <a:blip r:embed="rId5">
+            <a:extLst>
+              <a:ext uri="{28A0092B-C50C-407E-A947-70E740481C1C}">
+                <a14:useLocalDpi xmlns:a14="http://schemas.microsoft.com/office/drawing/2010/main" val="0"/>
+              </a:ext>
+            </a:extLst>
+          </a:blip>
+          <a:stretch>
+            <a:fillRect/>
+          </a:stretch>
+        </p:blipFill>
+        <p:spPr>
+          <a:xfrm>
+            <a:off x="6495604" y="1852174"/>
+            <a:ext cx="5202357" cy="4108817"/>
+          </a:xfrm>
+          <a:prstGeom prst="rect">
+            <a:avLst/>
+          </a:prstGeom>
+        </p:spPr>
+      </p:pic>
+    </p:spTree>
+    <p:extLst>
+      <p:ext uri="{BB962C8B-B14F-4D97-AF65-F5344CB8AC3E}">
+        <p14:creationId xmlns:p14="http://schemas.microsoft.com/office/powerpoint/2010/main" val="825763644"/>
+      </p:ext>
+    </p:extLst>
+  </p:cSld>
+  <p:clrMapOvr>
+    <a:masterClrMapping/>
+  </p:clrMapOvr>
+</p:sld>
+</file>
+
+<file path=ppt/slides/slide3.xml><?xml version="1.0" encoding="utf-8"?>
 <p:sld xmlns:a="http://schemas.openxmlformats.org/drawingml/2006/main" xmlns:r="http://schemas.openxmlformats.org/officeDocument/2006/relationships" xmlns:p="http://schemas.openxmlformats.org/presentationml/2006/main">
   <p:cSld>
     <p:spTree>
@@ -12893,7 +12580,7 @@
 </p:sld>
 </file>
 
-<file path=ppt/slides/slide3.xml><?xml version="1.0" encoding="utf-8"?>
+<file path=ppt/slides/slide4.xml><?xml version="1.0" encoding="utf-8"?>
 <p:sld xmlns:a="http://schemas.openxmlformats.org/drawingml/2006/main" xmlns:r="http://schemas.openxmlformats.org/officeDocument/2006/relationships" xmlns:p="http://schemas.openxmlformats.org/presentationml/2006/main">
   <p:cSld>
     <p:spTree>
@@ -12901,7 +12588,7 @@
         <p:cNvPr id="1" name="">
           <a:extLst>
             <a:ext uri="{FF2B5EF4-FFF2-40B4-BE49-F238E27FC236}">
-              <a16:creationId xmlns:a16="http://schemas.microsoft.com/office/drawing/2014/main" id="{3F2CAE9D-349C-8D29-97B8-45694169D71D}"/>
+              <a16:creationId xmlns:a16="http://schemas.microsoft.com/office/drawing/2014/main" id="{317A35A1-5778-B4EF-992B-7E0E94CA0B42}"/>
             </a:ext>
           </a:extLst>
         </p:cNvPr>
@@ -12921,7 +12608,7 @@
           <p:cNvPr id="3" name="图文框 2">
             <a:extLst>
               <a:ext uri="{FF2B5EF4-FFF2-40B4-BE49-F238E27FC236}">
-                <a16:creationId xmlns:a16="http://schemas.microsoft.com/office/drawing/2014/main" id="{685D7C8E-817E-F563-219D-B815CCCAE039}"/>
+                <a16:creationId xmlns:a16="http://schemas.microsoft.com/office/drawing/2014/main" id="{F7EE8400-517A-752C-DAE0-9F501C140119}"/>
               </a:ext>
             </a:extLst>
           </p:cNvPr>
@@ -12984,7 +12671,7 @@
           <p:cNvPr id="4" name="文本框 3">
             <a:extLst>
               <a:ext uri="{FF2B5EF4-FFF2-40B4-BE49-F238E27FC236}">
-                <a16:creationId xmlns:a16="http://schemas.microsoft.com/office/drawing/2014/main" id="{E1E581F1-1B4E-5233-3881-67F0423276DD}"/>
+                <a16:creationId xmlns:a16="http://schemas.microsoft.com/office/drawing/2014/main" id="{1D3F4BA2-9F0E-BBBA-18C6-18EDBF20C131}"/>
               </a:ext>
             </a:extLst>
           </p:cNvPr>
@@ -13008,7 +12695,7 @@
           <a:lstStyle/>
           <a:p>
             <a:r>
-              <a:rPr lang="en-US" altLang="zh-CN" sz="4400" b="1" dirty="0">
+              <a:rPr lang="en-US" altLang="zh-CN" sz="4400" b="1">
                 <a:solidFill>
                   <a:srgbClr val="13294B"/>
                 </a:solidFill>
@@ -13026,7 +12713,7 @@
           <p:cNvPr id="9" name="半闭框 8">
             <a:extLst>
               <a:ext uri="{FF2B5EF4-FFF2-40B4-BE49-F238E27FC236}">
-                <a16:creationId xmlns:a16="http://schemas.microsoft.com/office/drawing/2014/main" id="{86571FCB-A371-3723-B078-6158F6C766C2}"/>
+                <a16:creationId xmlns:a16="http://schemas.microsoft.com/office/drawing/2014/main" id="{F80FF26F-7E9E-7626-DE5B-19520869686A}"/>
               </a:ext>
             </a:extLst>
           </p:cNvPr>
@@ -13087,7 +12774,7 @@
           <p:cNvPr id="10" name="半闭框 9">
             <a:extLst>
               <a:ext uri="{FF2B5EF4-FFF2-40B4-BE49-F238E27FC236}">
-                <a16:creationId xmlns:a16="http://schemas.microsoft.com/office/drawing/2014/main" id="{839E0284-D281-0F11-E08C-21A49FA2B942}"/>
+                <a16:creationId xmlns:a16="http://schemas.microsoft.com/office/drawing/2014/main" id="{5E7DFC05-0556-27C9-3AD0-F40903155AFF}"/>
               </a:ext>
             </a:extLst>
           </p:cNvPr>
@@ -13152,7 +12839,7 @@
           <p:cNvPr id="13" name="直接连接符 12">
             <a:extLst>
               <a:ext uri="{FF2B5EF4-FFF2-40B4-BE49-F238E27FC236}">
-                <a16:creationId xmlns:a16="http://schemas.microsoft.com/office/drawing/2014/main" id="{1C533638-ED2B-C619-B532-12760C01B352}"/>
+                <a16:creationId xmlns:a16="http://schemas.microsoft.com/office/drawing/2014/main" id="{6C8A3EAC-9D25-201B-2716-D5E58EB7A8E8}"/>
               </a:ext>
             </a:extLst>
           </p:cNvPr>
@@ -13195,7 +12882,7 @@
           <p:cNvPr id="100" name="图片 99">
             <a:extLst>
               <a:ext uri="{FF2B5EF4-FFF2-40B4-BE49-F238E27FC236}">
-                <a16:creationId xmlns:a16="http://schemas.microsoft.com/office/drawing/2014/main" id="{64A3B441-0C5C-103B-36DF-98D7E0A6D3A6}"/>
+                <a16:creationId xmlns:a16="http://schemas.microsoft.com/office/drawing/2014/main" id="{D54AB51E-4E14-026B-B58D-980D99E66D24}"/>
               </a:ext>
             </a:extLst>
           </p:cNvPr>
@@ -13227,7 +12914,7 @@
           <p:cNvPr id="5" name="文本框 4">
             <a:extLst>
               <a:ext uri="{FF2B5EF4-FFF2-40B4-BE49-F238E27FC236}">
-                <a16:creationId xmlns:a16="http://schemas.microsoft.com/office/drawing/2014/main" id="{8D56EAC2-1C7E-0BD3-A8C8-CE21FE5081D1}"/>
+                <a16:creationId xmlns:a16="http://schemas.microsoft.com/office/drawing/2014/main" id="{8DB3CBD7-6A1D-40A7-8E72-11C7AFAA332C}"/>
               </a:ext>
             </a:extLst>
           </p:cNvPr>
@@ -13237,7 +12924,7 @@
         <p:spPr>
           <a:xfrm>
             <a:off x="613543" y="1741049"/>
-            <a:ext cx="5719751" cy="4170372"/>
+            <a:ext cx="10964912" cy="3616375"/>
           </a:xfrm>
           <a:prstGeom prst="rect">
             <a:avLst/>
@@ -13258,7 +12945,7 @@
               <a:buChar char="•"/>
             </a:pPr>
             <a:r>
-              <a:rPr lang="en-US" altLang="zh-CN" sz="3200" b="1" dirty="0">
+              <a:rPr lang="en-US" altLang="zh-CN" sz="3200" dirty="0">
                 <a:solidFill>
                   <a:srgbClr val="13294B"/>
                 </a:solidFill>
@@ -13266,11 +12953,33 @@
                 <a:ea typeface="宋体"/>
                 <a:cs typeface="Calibri"/>
               </a:rPr>
-              <a:t>Have you ever gone through this situation?</a:t>
-            </a:r>
-          </a:p>
-          <a:p>
-            <a:pPr marL="914400" lvl="1" indent="-457200">
+              <a:t>Do frontier LLMs systematically </a:t>
+            </a:r>
+            <a:r>
+              <a:rPr lang="en-US" altLang="zh-CN" sz="3200" dirty="0">
+                <a:solidFill>
+                  <a:srgbClr val="FF5F05"/>
+                </a:solidFill>
+                <a:latin typeface="Calibri"/>
+                <a:ea typeface="宋体"/>
+                <a:cs typeface="Calibri"/>
+              </a:rPr>
+              <a:t>over empathize or under-empathize</a:t>
+            </a:r>
+            <a:r>
+              <a:rPr lang="en-US" altLang="zh-CN" sz="3200" dirty="0">
+                <a:solidFill>
+                  <a:srgbClr val="13294B"/>
+                </a:solidFill>
+                <a:latin typeface="Calibri"/>
+                <a:ea typeface="宋体"/>
+                <a:cs typeface="Calibri"/>
+              </a:rPr>
+              <a:t> relative to trained human customer support agents, as measured by a calibration delta against a naturalistic behavioral benchmark?</a:t>
+            </a:r>
+          </a:p>
+          <a:p>
+            <a:pPr marL="457200" indent="-457200">
               <a:spcAft>
                 <a:spcPts val="600"/>
               </a:spcAft>
@@ -13278,7 +12987,7 @@
               <a:buChar char="•"/>
             </a:pPr>
             <a:r>
-              <a:rPr lang="en-US" altLang="zh-CN" sz="2800" dirty="0">
+              <a:rPr lang="en-US" altLang="zh-CN" sz="3200" dirty="0">
                 <a:solidFill>
                   <a:srgbClr val="13294B"/>
                 </a:solidFill>
@@ -13286,51 +12995,37 @@
                 <a:ea typeface="宋体"/>
                 <a:cs typeface="Calibri"/>
               </a:rPr>
-              <a:t>When you try to chat or ask an question with an AI assistance, it keeps saying “sorry” and “I don’t know”. Then, they ask you to call a customer service and redirect you to another chat bot.</a:t>
-            </a:r>
-          </a:p>
-        </p:txBody>
-      </p:sp>
-      <p:pic>
-        <p:nvPicPr>
-          <p:cNvPr id="6" name="图片 5" descr="图形用户界面, 文本, 应用程序, 聊天或短信&#10;&#10;AI 生成的内容可能不正确。">
-            <a:extLst>
-              <a:ext uri="{FF2B5EF4-FFF2-40B4-BE49-F238E27FC236}">
-                <a16:creationId xmlns:a16="http://schemas.microsoft.com/office/drawing/2014/main" id="{879F0E7A-A5D7-4C8E-F0B6-DBA4125AE1D4}"/>
-              </a:ext>
-            </a:extLst>
-          </p:cNvPr>
-          <p:cNvPicPr>
-            <a:picLocks noChangeAspect="1"/>
-          </p:cNvPicPr>
-          <p:nvPr/>
-        </p:nvPicPr>
-        <p:blipFill>
-          <a:blip r:embed="rId5">
-            <a:extLst>
-              <a:ext uri="{28A0092B-C50C-407E-A947-70E740481C1C}">
-                <a14:useLocalDpi xmlns:a14="http://schemas.microsoft.com/office/drawing/2010/main" val="0"/>
-              </a:ext>
-            </a:extLst>
-          </a:blip>
-          <a:stretch>
-            <a:fillRect/>
-          </a:stretch>
-        </p:blipFill>
-        <p:spPr>
-          <a:xfrm>
-            <a:off x="6495604" y="1852174"/>
-            <a:ext cx="5202357" cy="4108817"/>
-          </a:xfrm>
-          <a:prstGeom prst="rect">
-            <a:avLst/>
-          </a:prstGeom>
-        </p:spPr>
-      </p:pic>
+              <a:t>Is this empathy miscalibration consistent across industry domains, or </a:t>
+            </a:r>
+            <a:r>
+              <a:rPr lang="en-US" altLang="zh-CN" sz="3200" dirty="0">
+                <a:solidFill>
+                  <a:srgbClr val="FF5F05"/>
+                </a:solidFill>
+                <a:latin typeface="Calibri"/>
+                <a:ea typeface="宋体"/>
+                <a:cs typeface="Calibri"/>
+              </a:rPr>
+              <a:t>does it vary by context</a:t>
+            </a:r>
+            <a:r>
+              <a:rPr lang="en-US" altLang="zh-CN" sz="3200" dirty="0">
+                <a:solidFill>
+                  <a:srgbClr val="13294B"/>
+                </a:solidFill>
+                <a:latin typeface="Calibri"/>
+                <a:ea typeface="宋体"/>
+                <a:cs typeface="Calibri"/>
+              </a:rPr>
+              <a:t>—specifically between airlines and telecom?</a:t>
+            </a:r>
+          </a:p>
+        </p:txBody>
+      </p:sp>
     </p:spTree>
     <p:extLst>
       <p:ext uri="{BB962C8B-B14F-4D97-AF65-F5344CB8AC3E}">
-        <p14:creationId xmlns:p14="http://schemas.microsoft.com/office/powerpoint/2010/main" val="825763644"/>
+        <p14:creationId xmlns:p14="http://schemas.microsoft.com/office/powerpoint/2010/main" val="3351992377"/>
       </p:ext>
     </p:extLst>
   </p:cSld>
@@ -13340,7 +13035,7 @@
 </p:sld>
 </file>
 
-<file path=ppt/slides/slide4.xml><?xml version="1.0" encoding="utf-8"?>
+<file path=ppt/slides/slide5.xml><?xml version="1.0" encoding="utf-8"?>
 <p:sld xmlns:a="http://schemas.openxmlformats.org/drawingml/2006/main" xmlns:r="http://schemas.openxmlformats.org/officeDocument/2006/relationships" xmlns:p="http://schemas.openxmlformats.org/presentationml/2006/main">
   <p:cSld>
     <p:spTree>
@@ -13348,7 +13043,7 @@
         <p:cNvPr id="1" name="">
           <a:extLst>
             <a:ext uri="{FF2B5EF4-FFF2-40B4-BE49-F238E27FC236}">
-              <a16:creationId xmlns:a16="http://schemas.microsoft.com/office/drawing/2014/main" id="{317A35A1-5778-B4EF-992B-7E0E94CA0B42}"/>
+              <a16:creationId xmlns:a16="http://schemas.microsoft.com/office/drawing/2014/main" id="{1D539558-D6D7-2F6D-241F-20C72E1C3901}"/>
             </a:ext>
           </a:extLst>
         </p:cNvPr>
@@ -13368,7 +13063,7 @@
           <p:cNvPr id="3" name="图文框 2">
             <a:extLst>
               <a:ext uri="{FF2B5EF4-FFF2-40B4-BE49-F238E27FC236}">
-                <a16:creationId xmlns:a16="http://schemas.microsoft.com/office/drawing/2014/main" id="{F7EE8400-517A-752C-DAE0-9F501C140119}"/>
+                <a16:creationId xmlns:a16="http://schemas.microsoft.com/office/drawing/2014/main" id="{7C75D02B-F965-1522-762C-F028E8E40A18}"/>
               </a:ext>
             </a:extLst>
           </p:cNvPr>
@@ -13431,7 +13126,7 @@
           <p:cNvPr id="4" name="文本框 3">
             <a:extLst>
               <a:ext uri="{FF2B5EF4-FFF2-40B4-BE49-F238E27FC236}">
-                <a16:creationId xmlns:a16="http://schemas.microsoft.com/office/drawing/2014/main" id="{1D3F4BA2-9F0E-BBBA-18C6-18EDBF20C131}"/>
+                <a16:creationId xmlns:a16="http://schemas.microsoft.com/office/drawing/2014/main" id="{950A3583-6FBB-A7A0-8335-D547CE74FA2B}"/>
               </a:ext>
             </a:extLst>
           </p:cNvPr>
@@ -13455,7 +13150,7 @@
           <a:lstStyle/>
           <a:p>
             <a:r>
-              <a:rPr lang="en-US" altLang="zh-CN" sz="4400" b="1">
+              <a:rPr lang="en-US" altLang="zh-CN" sz="4400" b="1" dirty="0">
                 <a:solidFill>
                   <a:srgbClr val="13294B"/>
                 </a:solidFill>
@@ -13463,7 +13158,7 @@
                 <a:ea typeface="等线"/>
                 <a:cs typeface="+mj-lt"/>
               </a:rPr>
-              <a:t>Research Question</a:t>
+              <a:t>Related Work</a:t>
             </a:r>
           </a:p>
         </p:txBody>
@@ -13473,7 +13168,7 @@
           <p:cNvPr id="9" name="半闭框 8">
             <a:extLst>
               <a:ext uri="{FF2B5EF4-FFF2-40B4-BE49-F238E27FC236}">
-                <a16:creationId xmlns:a16="http://schemas.microsoft.com/office/drawing/2014/main" id="{F80FF26F-7E9E-7626-DE5B-19520869686A}"/>
+                <a16:creationId xmlns:a16="http://schemas.microsoft.com/office/drawing/2014/main" id="{6955840B-04C6-A985-2FA5-B84B1F68E8B8}"/>
               </a:ext>
             </a:extLst>
           </p:cNvPr>
@@ -13534,7 +13229,7 @@
           <p:cNvPr id="10" name="半闭框 9">
             <a:extLst>
               <a:ext uri="{FF2B5EF4-FFF2-40B4-BE49-F238E27FC236}">
-                <a16:creationId xmlns:a16="http://schemas.microsoft.com/office/drawing/2014/main" id="{5E7DFC05-0556-27C9-3AD0-F40903155AFF}"/>
+                <a16:creationId xmlns:a16="http://schemas.microsoft.com/office/drawing/2014/main" id="{E71B38FD-C561-CB1D-DE33-5CAFE6EB3875}"/>
               </a:ext>
             </a:extLst>
           </p:cNvPr>
@@ -13599,7 +13294,7 @@
           <p:cNvPr id="13" name="直接连接符 12">
             <a:extLst>
               <a:ext uri="{FF2B5EF4-FFF2-40B4-BE49-F238E27FC236}">
-                <a16:creationId xmlns:a16="http://schemas.microsoft.com/office/drawing/2014/main" id="{6C8A3EAC-9D25-201B-2716-D5E58EB7A8E8}"/>
+                <a16:creationId xmlns:a16="http://schemas.microsoft.com/office/drawing/2014/main" id="{2C01279C-4772-BAA9-51D8-214FF25EA3F2}"/>
               </a:ext>
             </a:extLst>
           </p:cNvPr>
@@ -13642,7 +13337,7 @@
           <p:cNvPr id="100" name="图片 99">
             <a:extLst>
               <a:ext uri="{FF2B5EF4-FFF2-40B4-BE49-F238E27FC236}">
-                <a16:creationId xmlns:a16="http://schemas.microsoft.com/office/drawing/2014/main" id="{D54AB51E-4E14-026B-B58D-980D99E66D24}"/>
+                <a16:creationId xmlns:a16="http://schemas.microsoft.com/office/drawing/2014/main" id="{8A9598FD-1781-C932-7821-2E27A7E8C750}"/>
               </a:ext>
             </a:extLst>
           </p:cNvPr>
@@ -13674,7 +13369,7 @@
           <p:cNvPr id="5" name="文本框 4">
             <a:extLst>
               <a:ext uri="{FF2B5EF4-FFF2-40B4-BE49-F238E27FC236}">
-                <a16:creationId xmlns:a16="http://schemas.microsoft.com/office/drawing/2014/main" id="{8DB3CBD7-6A1D-40A7-8E72-11C7AFAA332C}"/>
+                <a16:creationId xmlns:a16="http://schemas.microsoft.com/office/drawing/2014/main" id="{0318EC4D-82AE-CC0A-6522-170E10D354CE}"/>
               </a:ext>
             </a:extLst>
           </p:cNvPr>
@@ -13684,7 +13379,7 @@
         <p:spPr>
           <a:xfrm>
             <a:off x="613543" y="1741049"/>
-            <a:ext cx="10964912" cy="3616375"/>
+            <a:ext cx="10964912" cy="4693593"/>
           </a:xfrm>
           <a:prstGeom prst="rect">
             <a:avLst/>
@@ -13705,7 +13400,7 @@
               <a:buChar char="•"/>
             </a:pPr>
             <a:r>
-              <a:rPr lang="en-US" altLang="zh-CN" sz="3200" dirty="0">
+              <a:rPr lang="en-US" altLang="zh-CN" sz="2800" dirty="0">
                 <a:solidFill>
                   <a:srgbClr val="13294B"/>
                 </a:solidFill>
@@ -13713,10 +13408,10 @@
                 <a:ea typeface="宋体"/>
                 <a:cs typeface="Calibri"/>
               </a:rPr>
-              <a:t>Do frontier LLMs systematically </a:t>
-            </a:r>
-            <a:r>
-              <a:rPr lang="en-US" altLang="zh-CN" sz="3200" dirty="0">
+              <a:t>A well-documented failure mode of RLHF-trained models is sycophancy—the </a:t>
+            </a:r>
+            <a:r>
+              <a:rPr lang="en-US" altLang="zh-CN" sz="2800" dirty="0">
                 <a:solidFill>
                   <a:srgbClr val="FF5F05"/>
                 </a:solidFill>
@@ -13724,10 +13419,10 @@
                 <a:ea typeface="宋体"/>
                 <a:cs typeface="Calibri"/>
               </a:rPr>
-              <a:t>over empathize or under-empathize</a:t>
-            </a:r>
-            <a:r>
-              <a:rPr lang="en-US" altLang="zh-CN" sz="3200" dirty="0">
+              <a:t>tendency to agree with or flatter users </a:t>
+            </a:r>
+            <a:r>
+              <a:rPr lang="en-US" altLang="zh-CN" sz="2800" dirty="0">
                 <a:solidFill>
                   <a:srgbClr val="13294B"/>
                 </a:solidFill>
@@ -13735,7 +13430,7 @@
                 <a:ea typeface="宋体"/>
                 <a:cs typeface="Calibri"/>
               </a:rPr>
-              <a:t> relative to trained human customer support agents, as measured by a calibration delta against a naturalistic behavioral benchmark?</a:t>
+              <a:t>at the expense of accuracy or appropriate restraint</a:t>
             </a:r>
           </a:p>
           <a:p>
@@ -13747,7 +13442,7 @@
               <a:buChar char="•"/>
             </a:pPr>
             <a:r>
-              <a:rPr lang="en-US" altLang="zh-CN" sz="3200" dirty="0">
+              <a:rPr lang="en-US" altLang="zh-CN" sz="2800" dirty="0">
                 <a:solidFill>
                   <a:srgbClr val="13294B"/>
                 </a:solidFill>
@@ -13755,10 +13450,10 @@
                 <a:ea typeface="宋体"/>
                 <a:cs typeface="Calibri"/>
               </a:rPr>
-              <a:t>Is this empathy miscalibration consistent across industry domains, or </a:t>
-            </a:r>
-            <a:r>
-              <a:rPr lang="en-US" altLang="zh-CN" sz="3200" dirty="0">
+              <a:t>The NLP empathy literature is </a:t>
+            </a:r>
+            <a:r>
+              <a:rPr lang="en-US" altLang="zh-CN" sz="2800" dirty="0">
                 <a:solidFill>
                   <a:srgbClr val="FF5F05"/>
                 </a:solidFill>
@@ -13766,10 +13461,10 @@
                 <a:ea typeface="宋体"/>
                 <a:cs typeface="Calibri"/>
               </a:rPr>
-              <a:t>does it vary by context</a:t>
-            </a:r>
-            <a:r>
-              <a:rPr lang="en-US" altLang="zh-CN" sz="3200" dirty="0">
+              <a:t>growing but domain-narrow</a:t>
+            </a:r>
+            <a:r>
+              <a:rPr lang="en-US" altLang="zh-CN" sz="2800" dirty="0">
                 <a:solidFill>
                   <a:srgbClr val="13294B"/>
                 </a:solidFill>
@@ -13777,15 +13472,52 @@
                 <a:ea typeface="宋体"/>
                 <a:cs typeface="Calibri"/>
               </a:rPr>
-              <a:t>—specifically between airlines and telecom?</a:t>
-            </a:r>
+              <a:t>. A systematic review of 12 studies on LLMs and empathy found that 7 focused exclusively on medical contexts.</a:t>
+            </a:r>
+          </a:p>
+          <a:p>
+            <a:pPr marL="457200" indent="-457200">
+              <a:spcAft>
+                <a:spcPts val="600"/>
+              </a:spcAft>
+              <a:buFont typeface="Arial" panose="020B0604020202020204" pitchFamily="34" charset="0"/>
+              <a:buChar char="•"/>
+            </a:pPr>
+            <a:r>
+              <a:rPr lang="en-US" altLang="zh-CN" sz="2800" dirty="0">
+                <a:solidFill>
+                  <a:srgbClr val="13294B"/>
+                </a:solidFill>
+                <a:latin typeface="Calibri"/>
+                <a:ea typeface="宋体"/>
+                <a:cs typeface="Calibri"/>
+              </a:rPr>
+              <a:t>Meanwhile, LLMs nearly match expert reliability when judging empathic communication but was limited to personal-problems support contexts, rather than transactional service dialogues.</a:t>
+            </a:r>
+          </a:p>
+          <a:p>
+            <a:pPr marL="457200" indent="-457200">
+              <a:spcAft>
+                <a:spcPts val="600"/>
+              </a:spcAft>
+              <a:buFont typeface="Arial" panose="020B0604020202020204" pitchFamily="34" charset="0"/>
+              <a:buChar char="•"/>
+            </a:pPr>
+            <a:endParaRPr lang="en-US" altLang="zh-CN" sz="3200" dirty="0">
+              <a:solidFill>
+                <a:srgbClr val="13294B"/>
+              </a:solidFill>
+              <a:latin typeface="Calibri"/>
+              <a:ea typeface="宋体"/>
+              <a:cs typeface="Calibri"/>
+            </a:endParaRPr>
           </a:p>
         </p:txBody>
       </p:sp>
     </p:spTree>
     <p:extLst>
       <p:ext uri="{BB962C8B-B14F-4D97-AF65-F5344CB8AC3E}">
-        <p14:creationId xmlns:p14="http://schemas.microsoft.com/office/powerpoint/2010/main" val="3351992377"/>
+        <p14:creationId xmlns:p14="http://schemas.microsoft.com/office/powerpoint/2010/main" val="870060052"/>
       </p:ext>
     </p:extLst>
   </p:cSld>
@@ -13795,7 +13527,7 @@
 </p:sld>
 </file>
 
-<file path=ppt/slides/slide5.xml><?xml version="1.0" encoding="utf-8"?>
+<file path=ppt/slides/slide6.xml><?xml version="1.0" encoding="utf-8"?>
 <p:sld xmlns:a="http://schemas.openxmlformats.org/drawingml/2006/main" xmlns:r="http://schemas.openxmlformats.org/officeDocument/2006/relationships" xmlns:p="http://schemas.openxmlformats.org/presentationml/2006/main">
   <p:cSld>
     <p:spTree>
@@ -13803,7 +13535,7 @@
         <p:cNvPr id="1" name="">
           <a:extLst>
             <a:ext uri="{FF2B5EF4-FFF2-40B4-BE49-F238E27FC236}">
-              <a16:creationId xmlns:a16="http://schemas.microsoft.com/office/drawing/2014/main" id="{1D539558-D6D7-2F6D-241F-20C72E1C3901}"/>
+              <a16:creationId xmlns:a16="http://schemas.microsoft.com/office/drawing/2014/main" id="{4F7E1851-927A-B265-E122-FF50BB7F778E}"/>
             </a:ext>
           </a:extLst>
         </p:cNvPr>
@@ -13823,7 +13555,7 @@
           <p:cNvPr id="3" name="图文框 2">
             <a:extLst>
               <a:ext uri="{FF2B5EF4-FFF2-40B4-BE49-F238E27FC236}">
-                <a16:creationId xmlns:a16="http://schemas.microsoft.com/office/drawing/2014/main" id="{7C75D02B-F965-1522-762C-F028E8E40A18}"/>
+                <a16:creationId xmlns:a16="http://schemas.microsoft.com/office/drawing/2014/main" id="{D220B63A-D205-550F-CE68-F10F7F88DDF2}"/>
               </a:ext>
             </a:extLst>
           </p:cNvPr>
@@ -13886,7 +13618,7 @@
           <p:cNvPr id="4" name="文本框 3">
             <a:extLst>
               <a:ext uri="{FF2B5EF4-FFF2-40B4-BE49-F238E27FC236}">
-                <a16:creationId xmlns:a16="http://schemas.microsoft.com/office/drawing/2014/main" id="{950A3583-6FBB-A7A0-8335-D547CE74FA2B}"/>
+                <a16:creationId xmlns:a16="http://schemas.microsoft.com/office/drawing/2014/main" id="{D5564321-B1AA-80EE-EF3F-D1BD240944B4}"/>
               </a:ext>
             </a:extLst>
           </p:cNvPr>
@@ -13918,7 +13650,7 @@
                 <a:ea typeface="等线"/>
                 <a:cs typeface="+mj-lt"/>
               </a:rPr>
-              <a:t>Related Work</a:t>
+              <a:t>Gap</a:t>
             </a:r>
           </a:p>
         </p:txBody>
@@ -13928,7 +13660,7 @@
           <p:cNvPr id="9" name="半闭框 8">
             <a:extLst>
               <a:ext uri="{FF2B5EF4-FFF2-40B4-BE49-F238E27FC236}">
-                <a16:creationId xmlns:a16="http://schemas.microsoft.com/office/drawing/2014/main" id="{6955840B-04C6-A985-2FA5-B84B1F68E8B8}"/>
+                <a16:creationId xmlns:a16="http://schemas.microsoft.com/office/drawing/2014/main" id="{1DA82BCC-7E88-6D72-FD17-F895A05294FD}"/>
               </a:ext>
             </a:extLst>
           </p:cNvPr>
@@ -13989,7 +13721,7 @@
           <p:cNvPr id="10" name="半闭框 9">
             <a:extLst>
               <a:ext uri="{FF2B5EF4-FFF2-40B4-BE49-F238E27FC236}">
-                <a16:creationId xmlns:a16="http://schemas.microsoft.com/office/drawing/2014/main" id="{E71B38FD-C561-CB1D-DE33-5CAFE6EB3875}"/>
+                <a16:creationId xmlns:a16="http://schemas.microsoft.com/office/drawing/2014/main" id="{15925586-2913-BEFD-4E00-F7DAED0D824D}"/>
               </a:ext>
             </a:extLst>
           </p:cNvPr>
@@ -14054,7 +13786,7 @@
           <p:cNvPr id="13" name="直接连接符 12">
             <a:extLst>
               <a:ext uri="{FF2B5EF4-FFF2-40B4-BE49-F238E27FC236}">
-                <a16:creationId xmlns:a16="http://schemas.microsoft.com/office/drawing/2014/main" id="{2C01279C-4772-BAA9-51D8-214FF25EA3F2}"/>
+                <a16:creationId xmlns:a16="http://schemas.microsoft.com/office/drawing/2014/main" id="{A3DC0BFC-571D-2143-6E7D-61F157F348FD}"/>
               </a:ext>
             </a:extLst>
           </p:cNvPr>
@@ -14097,7 +13829,7 @@
           <p:cNvPr id="100" name="图片 99">
             <a:extLst>
               <a:ext uri="{FF2B5EF4-FFF2-40B4-BE49-F238E27FC236}">
-                <a16:creationId xmlns:a16="http://schemas.microsoft.com/office/drawing/2014/main" id="{8A9598FD-1781-C932-7821-2E27A7E8C750}"/>
+                <a16:creationId xmlns:a16="http://schemas.microsoft.com/office/drawing/2014/main" id="{34B27C66-754D-6FD4-05C4-D2319A7A941B}"/>
               </a:ext>
             </a:extLst>
           </p:cNvPr>
@@ -14129,7 +13861,7 @@
           <p:cNvPr id="5" name="文本框 4">
             <a:extLst>
               <a:ext uri="{FF2B5EF4-FFF2-40B4-BE49-F238E27FC236}">
-                <a16:creationId xmlns:a16="http://schemas.microsoft.com/office/drawing/2014/main" id="{0318EC4D-82AE-CC0A-6522-170E10D354CE}"/>
+                <a16:creationId xmlns:a16="http://schemas.microsoft.com/office/drawing/2014/main" id="{1C185285-89B3-B00D-896A-38CDDD591A4B}"/>
               </a:ext>
             </a:extLst>
           </p:cNvPr>
@@ -14139,7 +13871,7 @@
         <p:spPr>
           <a:xfrm>
             <a:off x="613543" y="1741049"/>
-            <a:ext cx="10964912" cy="2708434"/>
+            <a:ext cx="10892338" cy="4401205"/>
           </a:xfrm>
           <a:prstGeom prst="rect">
             <a:avLst/>
@@ -14160,7 +13892,7 @@
               <a:buChar char="•"/>
             </a:pPr>
             <a:r>
-              <a:rPr lang="en-US" altLang="zh-CN" sz="3200" dirty="0">
+              <a:rPr lang="en-US" altLang="zh-CN" sz="2800" dirty="0">
                 <a:solidFill>
                   <a:srgbClr val="13294B"/>
                 </a:solidFill>
@@ -14168,10 +13900,10 @@
                 <a:ea typeface="宋体"/>
                 <a:cs typeface="Calibri"/>
               </a:rPr>
-              <a:t>A well-documented failure mode of RLHF-trained models is sycophancy—the </a:t>
-            </a:r>
-            <a:r>
-              <a:rPr lang="en-US" altLang="zh-CN" sz="3200" dirty="0">
+              <a:t>A </a:t>
+            </a:r>
+            <a:r>
+              <a:rPr lang="en-US" altLang="zh-CN" sz="2800" dirty="0">
                 <a:solidFill>
                   <a:srgbClr val="FF5F05"/>
                 </a:solidFill>
@@ -14179,10 +13911,10 @@
                 <a:ea typeface="宋体"/>
                 <a:cs typeface="Calibri"/>
               </a:rPr>
-              <a:t>tendency to agree with or flatter users </a:t>
-            </a:r>
-            <a:r>
-              <a:rPr lang="en-US" altLang="zh-CN" sz="3200" dirty="0">
+              <a:t>Sycophancy</a:t>
+            </a:r>
+            <a:r>
+              <a:rPr lang="en-US" altLang="zh-CN" sz="2800" dirty="0">
                 <a:solidFill>
                   <a:srgbClr val="13294B"/>
                 </a:solidFill>
@@ -14190,7 +13922,7 @@
                 <a:ea typeface="宋体"/>
                 <a:cs typeface="Calibri"/>
               </a:rPr>
-              <a:t>at the expense of accuracy or appropriate restraint</a:t>
+              <a:t> research measures opinion-conformity, not tonal appropriateness. </a:t>
             </a:r>
           </a:p>
           <a:p>
@@ -14202,37 +13934,26 @@
               <a:buChar char="•"/>
             </a:pPr>
             <a:r>
-              <a:rPr lang="en-US" altLang="zh-CN" sz="3200" dirty="0">
-                <a:solidFill>
-                  <a:srgbClr val="13294B"/>
+              <a:rPr lang="en-US" altLang="zh-CN" sz="2800" dirty="0">
+                <a:solidFill>
+                  <a:srgbClr val="FF5F05"/>
                 </a:solidFill>
                 <a:latin typeface="Calibri"/>
                 <a:ea typeface="宋体"/>
                 <a:cs typeface="Calibri"/>
               </a:rPr>
-              <a:t>The NLP empathy literature is </a:t>
-            </a:r>
-            <a:r>
-              <a:rPr lang="en-US" altLang="zh-CN" sz="3200" dirty="0">
-                <a:solidFill>
-                  <a:srgbClr val="FF5F05"/>
+              <a:t>Empathy</a:t>
+            </a:r>
+            <a:r>
+              <a:rPr lang="en-US" altLang="zh-CN" sz="2800" dirty="0">
+                <a:solidFill>
+                  <a:srgbClr val="13294B"/>
                 </a:solidFill>
                 <a:latin typeface="Calibri"/>
                 <a:ea typeface="宋体"/>
                 <a:cs typeface="Calibri"/>
               </a:rPr>
-              <a:t>growing but domain-narrow</a:t>
-            </a:r>
-            <a:r>
-              <a:rPr lang="en-US" altLang="zh-CN" sz="3200" dirty="0">
-                <a:solidFill>
-                  <a:srgbClr val="13294B"/>
-                </a:solidFill>
-                <a:latin typeface="Calibri"/>
-                <a:ea typeface="宋体"/>
-                <a:cs typeface="Calibri"/>
-              </a:rPr>
-              <a:t>.</a:t>
+              <a:t> research evaluates support-context warmth, not calibration to frustration level. </a:t>
             </a:r>
           </a:p>
           <a:p>
@@ -14243,7 +13964,71 @@
               <a:buFont typeface="Arial" panose="020B0604020202020204" pitchFamily="34" charset="0"/>
               <a:buChar char="•"/>
             </a:pPr>
-            <a:endParaRPr lang="en-US" altLang="zh-CN" sz="3200" dirty="0">
+            <a:r>
+              <a:rPr lang="en-US" altLang="zh-CN" sz="2800" dirty="0">
+                <a:solidFill>
+                  <a:srgbClr val="FF5F05"/>
+                </a:solidFill>
+                <a:latin typeface="Calibri"/>
+                <a:ea typeface="宋体"/>
+                <a:cs typeface="Calibri"/>
+              </a:rPr>
+              <a:t>Customer service NLP </a:t>
+            </a:r>
+            <a:r>
+              <a:rPr lang="en-US" altLang="zh-CN" sz="2800" dirty="0">
+                <a:solidFill>
+                  <a:srgbClr val="13294B"/>
+                </a:solidFill>
+                <a:latin typeface="Calibri"/>
+                <a:ea typeface="宋体"/>
+                <a:cs typeface="Calibri"/>
+              </a:rPr>
+              <a:t>evaluates response quality against idealized rewrites, not observed human behavior.</a:t>
+            </a:r>
+          </a:p>
+          <a:p>
+            <a:pPr marL="457200" indent="-457200">
+              <a:spcAft>
+                <a:spcPts val="600"/>
+              </a:spcAft>
+              <a:buFont typeface="Arial" panose="020B0604020202020204" pitchFamily="34" charset="0"/>
+              <a:buChar char="•"/>
+            </a:pPr>
+            <a:r>
+              <a:rPr lang="en-US" altLang="zh-CN" sz="2800" dirty="0">
+                <a:solidFill>
+                  <a:srgbClr val="13294B"/>
+                </a:solidFill>
+                <a:latin typeface="Calibri"/>
+                <a:ea typeface="宋体"/>
+                <a:cs typeface="Calibri"/>
+              </a:rPr>
+              <a:t>Our study sits at the </a:t>
+            </a:r>
+            <a:r>
+              <a:rPr lang="en-US" altLang="zh-CN" sz="2800" dirty="0">
+                <a:solidFill>
+                  <a:srgbClr val="FF5F05"/>
+                </a:solidFill>
+                <a:latin typeface="Calibri"/>
+                <a:ea typeface="宋体"/>
+                <a:cs typeface="Calibri"/>
+              </a:rPr>
+              <a:t>intersection of all three</a:t>
+            </a:r>
+            <a:r>
+              <a:rPr lang="en-US" altLang="zh-CN" sz="2800" dirty="0">
+                <a:solidFill>
+                  <a:srgbClr val="13294B"/>
+                </a:solidFill>
+                <a:latin typeface="Calibri"/>
+                <a:ea typeface="宋体"/>
+                <a:cs typeface="Calibri"/>
+              </a:rPr>
+              <a:t> and uses a unique data asset—naturalistic, multi-domain, paired conversational data—to fill it.</a:t>
+            </a:r>
+            <a:endParaRPr lang="en-US" altLang="zh-CN" sz="3600" dirty="0">
               <a:solidFill>
                 <a:srgbClr val="13294B"/>
               </a:solidFill>
@@ -14252,12 +14037,29 @@
               <a:cs typeface="Calibri"/>
             </a:endParaRPr>
           </a:p>
+          <a:p>
+            <a:pPr marL="457200" indent="-457200">
+              <a:spcAft>
+                <a:spcPts val="600"/>
+              </a:spcAft>
+              <a:buFont typeface="Arial" panose="020B0604020202020204" pitchFamily="34" charset="0"/>
+              <a:buChar char="•"/>
+            </a:pPr>
+            <a:endParaRPr lang="en-US" altLang="zh-CN" sz="3600" dirty="0">
+              <a:solidFill>
+                <a:srgbClr val="13294B"/>
+              </a:solidFill>
+              <a:latin typeface="Calibri"/>
+              <a:ea typeface="宋体"/>
+              <a:cs typeface="Calibri"/>
+            </a:endParaRPr>
+          </a:p>
         </p:txBody>
       </p:sp>
     </p:spTree>
     <p:extLst>
       <p:ext uri="{BB962C8B-B14F-4D97-AF65-F5344CB8AC3E}">
-        <p14:creationId xmlns:p14="http://schemas.microsoft.com/office/powerpoint/2010/main" val="870060052"/>
+        <p14:creationId xmlns:p14="http://schemas.microsoft.com/office/powerpoint/2010/main" val="1357738753"/>
       </p:ext>
     </p:extLst>
   </p:cSld>
@@ -14267,7 +14069,7 @@
 </p:sld>
 </file>
 
-<file path=ppt/slides/slide6.xml><?xml version="1.0" encoding="utf-8"?>
+<file path=ppt/slides/slide7.xml><?xml version="1.0" encoding="utf-8"?>
 <p:sld xmlns:a="http://schemas.openxmlformats.org/drawingml/2006/main" xmlns:r="http://schemas.openxmlformats.org/officeDocument/2006/relationships" xmlns:p="http://schemas.openxmlformats.org/presentationml/2006/main">
   <p:cSld>
     <p:spTree>
@@ -14275,7 +14077,7 @@
         <p:cNvPr id="1" name="">
           <a:extLst>
             <a:ext uri="{FF2B5EF4-FFF2-40B4-BE49-F238E27FC236}">
-              <a16:creationId xmlns:a16="http://schemas.microsoft.com/office/drawing/2014/main" id="{4F7E1851-927A-B265-E122-FF50BB7F778E}"/>
+              <a16:creationId xmlns:a16="http://schemas.microsoft.com/office/drawing/2014/main" id="{92063BEA-CE45-DB84-5E41-B5736BF5200C}"/>
             </a:ext>
           </a:extLst>
         </p:cNvPr>
@@ -14295,7 +14097,7 @@
           <p:cNvPr id="3" name="图文框 2">
             <a:extLst>
               <a:ext uri="{FF2B5EF4-FFF2-40B4-BE49-F238E27FC236}">
-                <a16:creationId xmlns:a16="http://schemas.microsoft.com/office/drawing/2014/main" id="{D220B63A-D205-550F-CE68-F10F7F88DDF2}"/>
+                <a16:creationId xmlns:a16="http://schemas.microsoft.com/office/drawing/2014/main" id="{0812264B-D9C6-E924-C341-96FE1A2600B0}"/>
               </a:ext>
             </a:extLst>
           </p:cNvPr>
@@ -14358,7 +14160,7 @@
           <p:cNvPr id="4" name="文本框 3">
             <a:extLst>
               <a:ext uri="{FF2B5EF4-FFF2-40B4-BE49-F238E27FC236}">
-                <a16:creationId xmlns:a16="http://schemas.microsoft.com/office/drawing/2014/main" id="{D5564321-B1AA-80EE-EF3F-D1BD240944B4}"/>
+                <a16:creationId xmlns:a16="http://schemas.microsoft.com/office/drawing/2014/main" id="{4E1FAF5E-E5D1-58DE-E630-975F1655BD7A}"/>
               </a:ext>
             </a:extLst>
           </p:cNvPr>
@@ -14390,7 +14192,7 @@
                 <a:ea typeface="等线"/>
                 <a:cs typeface="+mj-lt"/>
               </a:rPr>
-              <a:t>Related Work</a:t>
+              <a:t>Methodology</a:t>
             </a:r>
           </a:p>
         </p:txBody>
@@ -14400,7 +14202,7 @@
           <p:cNvPr id="9" name="半闭框 8">
             <a:extLst>
               <a:ext uri="{FF2B5EF4-FFF2-40B4-BE49-F238E27FC236}">
-                <a16:creationId xmlns:a16="http://schemas.microsoft.com/office/drawing/2014/main" id="{1DA82BCC-7E88-6D72-FD17-F895A05294FD}"/>
+                <a16:creationId xmlns:a16="http://schemas.microsoft.com/office/drawing/2014/main" id="{DE8B4F3C-D273-2EDE-98AA-D6521F9CE1BA}"/>
               </a:ext>
             </a:extLst>
           </p:cNvPr>
@@ -14461,7 +14263,7 @@
           <p:cNvPr id="10" name="半闭框 9">
             <a:extLst>
               <a:ext uri="{FF2B5EF4-FFF2-40B4-BE49-F238E27FC236}">
-                <a16:creationId xmlns:a16="http://schemas.microsoft.com/office/drawing/2014/main" id="{15925586-2913-BEFD-4E00-F7DAED0D824D}"/>
+                <a16:creationId xmlns:a16="http://schemas.microsoft.com/office/drawing/2014/main" id="{0B87FC49-93D6-74E5-9990-71828038361B}"/>
               </a:ext>
             </a:extLst>
           </p:cNvPr>
@@ -14526,7 +14328,7 @@
           <p:cNvPr id="13" name="直接连接符 12">
             <a:extLst>
               <a:ext uri="{FF2B5EF4-FFF2-40B4-BE49-F238E27FC236}">
-                <a16:creationId xmlns:a16="http://schemas.microsoft.com/office/drawing/2014/main" id="{A3DC0BFC-571D-2143-6E7D-61F157F348FD}"/>
+                <a16:creationId xmlns:a16="http://schemas.microsoft.com/office/drawing/2014/main" id="{B1B81DE7-C930-DC19-A1FD-DC4072262536}"/>
               </a:ext>
             </a:extLst>
           </p:cNvPr>
@@ -14569,7 +14371,7 @@
           <p:cNvPr id="100" name="图片 99">
             <a:extLst>
               <a:ext uri="{FF2B5EF4-FFF2-40B4-BE49-F238E27FC236}">
-                <a16:creationId xmlns:a16="http://schemas.microsoft.com/office/drawing/2014/main" id="{34B27C66-754D-6FD4-05C4-D2319A7A941B}"/>
+                <a16:creationId xmlns:a16="http://schemas.microsoft.com/office/drawing/2014/main" id="{2164D6A5-7093-4A2F-EC32-37060E4005E7}"/>
               </a:ext>
             </a:extLst>
           </p:cNvPr>
@@ -14601,7 +14403,7 @@
           <p:cNvPr id="5" name="文本框 4">
             <a:extLst>
               <a:ext uri="{FF2B5EF4-FFF2-40B4-BE49-F238E27FC236}">
-                <a16:creationId xmlns:a16="http://schemas.microsoft.com/office/drawing/2014/main" id="{1C185285-89B3-B00D-896A-38CDDD591A4B}"/>
+                <a16:creationId xmlns:a16="http://schemas.microsoft.com/office/drawing/2014/main" id="{BC80E71F-D30C-406D-4ED7-BAE015A84762}"/>
               </a:ext>
             </a:extLst>
           </p:cNvPr>
@@ -14611,7 +14413,7 @@
         <p:spPr>
           <a:xfrm>
             <a:off x="613543" y="1741049"/>
-            <a:ext cx="10892338" cy="4401205"/>
+            <a:ext cx="10964912" cy="2292935"/>
           </a:xfrm>
           <a:prstGeom prst="rect">
             <a:avLst/>
@@ -14632,7 +14434,7 @@
               <a:buChar char="•"/>
             </a:pPr>
             <a:r>
-              <a:rPr lang="en-US" altLang="zh-CN" sz="2800" dirty="0">
+              <a:rPr lang="en-US" altLang="zh-CN" sz="3200" dirty="0">
                 <a:solidFill>
                   <a:srgbClr val="13294B"/>
                 </a:solidFill>
@@ -14640,33 +14442,11 @@
                 <a:ea typeface="宋体"/>
                 <a:cs typeface="Calibri"/>
               </a:rPr>
-              <a:t>A </a:t>
-            </a:r>
-            <a:r>
-              <a:rPr lang="en-US" altLang="zh-CN" sz="2800" dirty="0">
-                <a:solidFill>
-                  <a:srgbClr val="FF5F05"/>
-                </a:solidFill>
-                <a:latin typeface="Calibri"/>
-                <a:ea typeface="宋体"/>
-                <a:cs typeface="Calibri"/>
-              </a:rPr>
-              <a:t>Sycophancy</a:t>
-            </a:r>
-            <a:r>
-              <a:rPr lang="en-US" altLang="zh-CN" sz="2800" dirty="0">
-                <a:solidFill>
-                  <a:srgbClr val="13294B"/>
-                </a:solidFill>
-                <a:latin typeface="Calibri"/>
-                <a:ea typeface="宋体"/>
-                <a:cs typeface="Calibri"/>
-              </a:rPr>
-              <a:t> research measures opinion-conformity, not tonal appropriateness. </a:t>
-            </a:r>
-          </a:p>
-          <a:p>
-            <a:pPr marL="457200" indent="-457200">
+              <a:t>Our study follows a three-phase empirical design: </a:t>
+            </a:r>
+          </a:p>
+          <a:p>
+            <a:pPr marL="914400" lvl="1" indent="-457200">
               <a:spcAft>
                 <a:spcPts val="600"/>
               </a:spcAft>
@@ -14674,30 +14454,19 @@
               <a:buChar char="•"/>
             </a:pPr>
             <a:r>
-              <a:rPr lang="en-US" altLang="zh-CN" sz="2800" dirty="0">
-                <a:solidFill>
-                  <a:srgbClr val="FF5F05"/>
+              <a:rPr lang="en-US" altLang="zh-CN" sz="3200" dirty="0">
+                <a:solidFill>
+                  <a:srgbClr val="13294B"/>
                 </a:solidFill>
                 <a:latin typeface="Calibri"/>
                 <a:ea typeface="宋体"/>
                 <a:cs typeface="Calibri"/>
               </a:rPr>
-              <a:t>Empathy</a:t>
-            </a:r>
-            <a:r>
-              <a:rPr lang="en-US" altLang="zh-CN" sz="2800" dirty="0">
-                <a:solidFill>
-                  <a:srgbClr val="13294B"/>
-                </a:solidFill>
-                <a:latin typeface="Calibri"/>
-                <a:ea typeface="宋体"/>
-                <a:cs typeface="Calibri"/>
-              </a:rPr>
-              <a:t> research evaluates support-context warmth, not calibration to frustration level. </a:t>
-            </a:r>
-          </a:p>
-          <a:p>
-            <a:pPr marL="457200" indent="-457200">
+              <a:t>(1) benchmark construction from real conversational data </a:t>
+            </a:r>
+          </a:p>
+          <a:p>
+            <a:pPr marL="914400" lvl="1" indent="-457200">
               <a:spcAft>
                 <a:spcPts val="600"/>
               </a:spcAft>
@@ -14705,30 +14474,19 @@
               <a:buChar char="•"/>
             </a:pPr>
             <a:r>
-              <a:rPr lang="en-US" altLang="zh-CN" sz="2800" dirty="0">
-                <a:solidFill>
-                  <a:srgbClr val="FF5F05"/>
+              <a:rPr lang="en-US" altLang="zh-CN" sz="3200" dirty="0">
+                <a:solidFill>
+                  <a:srgbClr val="13294B"/>
                 </a:solidFill>
                 <a:latin typeface="Calibri"/>
                 <a:ea typeface="宋体"/>
                 <a:cs typeface="Calibri"/>
               </a:rPr>
-              <a:t>Customer service NLP </a:t>
-            </a:r>
-            <a:r>
-              <a:rPr lang="en-US" altLang="zh-CN" sz="2800" dirty="0">
-                <a:solidFill>
-                  <a:srgbClr val="13294B"/>
-                </a:solidFill>
-                <a:latin typeface="Calibri"/>
-                <a:ea typeface="宋体"/>
-                <a:cs typeface="Calibri"/>
-              </a:rPr>
-              <a:t>evaluates response quality against idealized rewrites, not observed human behavior.</a:t>
-            </a:r>
-          </a:p>
-          <a:p>
-            <a:pPr marL="457200" indent="-457200">
+              <a:t>(2) LLM response generation under a neutral prompt </a:t>
+            </a:r>
+          </a:p>
+          <a:p>
+            <a:pPr marL="914400" lvl="1" indent="-457200">
               <a:spcAft>
                 <a:spcPts val="600"/>
               </a:spcAft>
@@ -14736,7 +14494,7 @@
               <a:buChar char="•"/>
             </a:pPr>
             <a:r>
-              <a:rPr lang="en-US" altLang="zh-CN" sz="2800" dirty="0">
+              <a:rPr lang="en-US" altLang="zh-CN" sz="3200" dirty="0">
                 <a:solidFill>
                   <a:srgbClr val="13294B"/>
                 </a:solidFill>
@@ -14744,505 +14502,7 @@
                 <a:ea typeface="宋体"/>
                 <a:cs typeface="Calibri"/>
               </a:rPr>
-              <a:t>Our study sits at the </a:t>
-            </a:r>
-            <a:r>
-              <a:rPr lang="en-US" altLang="zh-CN" sz="2800" dirty="0">
-                <a:solidFill>
-                  <a:srgbClr val="FF5F05"/>
-                </a:solidFill>
-                <a:latin typeface="Calibri"/>
-                <a:ea typeface="宋体"/>
-                <a:cs typeface="Calibri"/>
-              </a:rPr>
-              <a:t>intersection of all three</a:t>
-            </a:r>
-            <a:r>
-              <a:rPr lang="en-US" altLang="zh-CN" sz="2800" dirty="0">
-                <a:solidFill>
-                  <a:srgbClr val="13294B"/>
-                </a:solidFill>
-                <a:latin typeface="Calibri"/>
-                <a:ea typeface="宋体"/>
-                <a:cs typeface="Calibri"/>
-              </a:rPr>
-              <a:t> and uses a unique data asset—naturalistic, multi-domain, paired conversational data—to fill it.</a:t>
-            </a:r>
-            <a:endParaRPr lang="en-US" altLang="zh-CN" sz="3600" dirty="0">
-              <a:solidFill>
-                <a:srgbClr val="13294B"/>
-              </a:solidFill>
-              <a:latin typeface="Calibri"/>
-              <a:ea typeface="宋体"/>
-              <a:cs typeface="Calibri"/>
-            </a:endParaRPr>
-          </a:p>
-          <a:p>
-            <a:pPr marL="457200" indent="-457200">
-              <a:spcAft>
-                <a:spcPts val="600"/>
-              </a:spcAft>
-              <a:buFont typeface="Arial" panose="020B0604020202020204" pitchFamily="34" charset="0"/>
-              <a:buChar char="•"/>
-            </a:pPr>
-            <a:endParaRPr lang="en-US" altLang="zh-CN" sz="3600" dirty="0">
-              <a:solidFill>
-                <a:srgbClr val="13294B"/>
-              </a:solidFill>
-              <a:latin typeface="Calibri"/>
-              <a:ea typeface="宋体"/>
-              <a:cs typeface="Calibri"/>
-            </a:endParaRPr>
-          </a:p>
-        </p:txBody>
-      </p:sp>
-    </p:spTree>
-    <p:extLst>
-      <p:ext uri="{BB962C8B-B14F-4D97-AF65-F5344CB8AC3E}">
-        <p14:creationId xmlns:p14="http://schemas.microsoft.com/office/powerpoint/2010/main" val="1357738753"/>
-      </p:ext>
-    </p:extLst>
-  </p:cSld>
-  <p:clrMapOvr>
-    <a:masterClrMapping/>
-  </p:clrMapOvr>
-</p:sld>
-</file>
-
-<file path=ppt/slides/slide7.xml><?xml version="1.0" encoding="utf-8"?>
-<p:sld xmlns:a="http://schemas.openxmlformats.org/drawingml/2006/main" xmlns:r="http://schemas.openxmlformats.org/officeDocument/2006/relationships" xmlns:p="http://schemas.openxmlformats.org/presentationml/2006/main">
-  <p:cSld>
-    <p:spTree>
-      <p:nvGrpSpPr>
-        <p:cNvPr id="1" name="">
-          <a:extLst>
-            <a:ext uri="{FF2B5EF4-FFF2-40B4-BE49-F238E27FC236}">
-              <a16:creationId xmlns:a16="http://schemas.microsoft.com/office/drawing/2014/main" id="{92063BEA-CE45-DB84-5E41-B5736BF5200C}"/>
-            </a:ext>
-          </a:extLst>
-        </p:cNvPr>
-        <p:cNvGrpSpPr/>
-        <p:nvPr/>
-      </p:nvGrpSpPr>
-      <p:grpSpPr>
-        <a:xfrm>
-          <a:off x="0" y="0"/>
-          <a:ext cx="0" cy="0"/>
-          <a:chOff x="0" y="0"/>
-          <a:chExt cx="0" cy="0"/>
-        </a:xfrm>
-      </p:grpSpPr>
-      <p:sp>
-        <p:nvSpPr>
-          <p:cNvPr id="3" name="图文框 2">
-            <a:extLst>
-              <a:ext uri="{FF2B5EF4-FFF2-40B4-BE49-F238E27FC236}">
-                <a16:creationId xmlns:a16="http://schemas.microsoft.com/office/drawing/2014/main" id="{0812264B-D9C6-E924-C341-96FE1A2600B0}"/>
-              </a:ext>
-            </a:extLst>
-          </p:cNvPr>
-          <p:cNvSpPr/>
-          <p:nvPr/>
-        </p:nvSpPr>
-        <p:spPr>
-          <a:xfrm>
-            <a:off x="164147" y="282575"/>
-            <a:ext cx="11863705" cy="6403975"/>
-          </a:xfrm>
-          <a:prstGeom prst="frame">
-            <a:avLst>
-              <a:gd name="adj1" fmla="val 1196"/>
-            </a:avLst>
-          </a:prstGeom>
-          <a:solidFill>
-            <a:srgbClr val="13294B"/>
-          </a:solidFill>
-          <a:ln>
-            <a:solidFill>
-              <a:srgbClr val="13294B"/>
-            </a:solidFill>
-          </a:ln>
-          <a:effectLst>
-            <a:innerShdw blurRad="63500" dist="50800" dir="13500000">
-              <a:prstClr val="black">
-                <a:alpha val="50000"/>
-              </a:prstClr>
-            </a:innerShdw>
-          </a:effectLst>
-        </p:spPr>
-        <p:style>
-          <a:lnRef idx="2">
-            <a:schemeClr val="accent1">
-              <a:lumMod val="75000"/>
-            </a:schemeClr>
-          </a:lnRef>
-          <a:fillRef idx="1">
-            <a:schemeClr val="accent1"/>
-          </a:fillRef>
-          <a:effectRef idx="0">
-            <a:srgbClr val="FFFFFF"/>
-          </a:effectRef>
-          <a:fontRef idx="minor">
-            <a:schemeClr val="lt1"/>
-          </a:fontRef>
-        </p:style>
-        <p:txBody>
-          <a:bodyPr rtlCol="0" anchor="ctr"/>
-          <a:lstStyle/>
-          <a:p>
-            <a:pPr algn="ctr"/>
-            <a:endParaRPr lang="zh-CN" altLang="en-US"/>
-          </a:p>
-        </p:txBody>
-      </p:sp>
-      <p:sp>
-        <p:nvSpPr>
-          <p:cNvPr id="4" name="文本框 3">
-            <a:extLst>
-              <a:ext uri="{FF2B5EF4-FFF2-40B4-BE49-F238E27FC236}">
-                <a16:creationId xmlns:a16="http://schemas.microsoft.com/office/drawing/2014/main" id="{4E1FAF5E-E5D1-58DE-E630-975F1655BD7A}"/>
-              </a:ext>
-            </a:extLst>
-          </p:cNvPr>
-          <p:cNvSpPr txBox="1"/>
-          <p:nvPr/>
-        </p:nvSpPr>
-        <p:spPr>
-          <a:xfrm>
-            <a:off x="650457" y="614859"/>
-            <a:ext cx="9446043" cy="769441"/>
-          </a:xfrm>
-          <a:prstGeom prst="rect">
-            <a:avLst/>
-          </a:prstGeom>
-          <a:noFill/>
-        </p:spPr>
-        <p:txBody>
-          <a:bodyPr wrap="square" lIns="91440" tIns="45720" rIns="91440" bIns="45720" rtlCol="0" anchor="t">
-            <a:spAutoFit/>
-          </a:bodyPr>
-          <a:lstStyle/>
-          <a:p>
-            <a:r>
-              <a:rPr lang="en-US" altLang="zh-CN" sz="4400" b="1" dirty="0">
-                <a:solidFill>
-                  <a:srgbClr val="13294B"/>
-                </a:solidFill>
-                <a:latin typeface="Calibri"/>
-                <a:ea typeface="等线"/>
-                <a:cs typeface="+mj-lt"/>
-              </a:rPr>
-              <a:t>Methodology</a:t>
-            </a:r>
-          </a:p>
-        </p:txBody>
-      </p:sp>
-      <p:sp>
-        <p:nvSpPr>
-          <p:cNvPr id="9" name="半闭框 8">
-            <a:extLst>
-              <a:ext uri="{FF2B5EF4-FFF2-40B4-BE49-F238E27FC236}">
-                <a16:creationId xmlns:a16="http://schemas.microsoft.com/office/drawing/2014/main" id="{DE8B4F3C-D273-2EDE-98AA-D6521F9CE1BA}"/>
-              </a:ext>
-            </a:extLst>
-          </p:cNvPr>
-          <p:cNvSpPr/>
-          <p:nvPr/>
-        </p:nvSpPr>
-        <p:spPr>
-          <a:xfrm>
-            <a:off x="163830" y="282575"/>
-            <a:ext cx="3148330" cy="2355215"/>
-          </a:xfrm>
-          <a:prstGeom prst="halfFrame">
-            <a:avLst>
-              <a:gd name="adj1" fmla="val 4756"/>
-              <a:gd name="adj2" fmla="val 5021"/>
-            </a:avLst>
-          </a:prstGeom>
-          <a:solidFill>
-            <a:srgbClr val="FF5F05"/>
-          </a:solidFill>
-          <a:ln>
-            <a:solidFill>
-              <a:srgbClr val="FF5F05"/>
-            </a:solidFill>
-          </a:ln>
-        </p:spPr>
-        <p:style>
-          <a:lnRef idx="2">
-            <a:schemeClr val="accent1">
-              <a:lumMod val="75000"/>
-            </a:schemeClr>
-          </a:lnRef>
-          <a:fillRef idx="1">
-            <a:schemeClr val="accent1"/>
-          </a:fillRef>
-          <a:effectRef idx="0">
-            <a:srgbClr val="FFFFFF"/>
-          </a:effectRef>
-          <a:fontRef idx="minor">
-            <a:schemeClr val="lt1"/>
-          </a:fontRef>
-        </p:style>
-        <p:txBody>
-          <a:bodyPr rtlCol="0" anchor="ctr"/>
-          <a:lstStyle/>
-          <a:p>
-            <a:pPr algn="ctr"/>
-            <a:endParaRPr lang="zh-CN" altLang="en-US">
-              <a:solidFill>
-                <a:schemeClr val="tx1"/>
-              </a:solidFill>
-            </a:endParaRPr>
-          </a:p>
-        </p:txBody>
-      </p:sp>
-      <p:sp>
-        <p:nvSpPr>
-          <p:cNvPr id="10" name="半闭框 9">
-            <a:extLst>
-              <a:ext uri="{FF2B5EF4-FFF2-40B4-BE49-F238E27FC236}">
-                <a16:creationId xmlns:a16="http://schemas.microsoft.com/office/drawing/2014/main" id="{0B87FC49-93D6-74E5-9990-71828038361B}"/>
-              </a:ext>
-            </a:extLst>
-          </p:cNvPr>
-          <p:cNvSpPr/>
-          <p:nvPr>
-            <p:custDataLst>
-              <p:tags r:id="rId1"/>
-            </p:custDataLst>
-          </p:nvPr>
-        </p:nvSpPr>
-        <p:spPr>
-          <a:xfrm rot="10800000">
-            <a:off x="8357868" y="4262753"/>
-            <a:ext cx="3669983" cy="2423795"/>
-          </a:xfrm>
-          <a:prstGeom prst="halfFrame">
-            <a:avLst>
-              <a:gd name="adj1" fmla="val 4659"/>
-              <a:gd name="adj2" fmla="val 4349"/>
-            </a:avLst>
-          </a:prstGeom>
-          <a:solidFill>
-            <a:srgbClr val="FF5F05"/>
-          </a:solidFill>
-          <a:ln>
-            <a:solidFill>
-              <a:srgbClr val="FF5F05"/>
-            </a:solidFill>
-          </a:ln>
-        </p:spPr>
-        <p:style>
-          <a:lnRef idx="2">
-            <a:schemeClr val="accent1">
-              <a:lumMod val="75000"/>
-            </a:schemeClr>
-          </a:lnRef>
-          <a:fillRef idx="1">
-            <a:schemeClr val="accent1"/>
-          </a:fillRef>
-          <a:effectRef idx="0">
-            <a:srgbClr val="FFFFFF"/>
-          </a:effectRef>
-          <a:fontRef idx="minor">
-            <a:schemeClr val="lt1"/>
-          </a:fontRef>
-        </p:style>
-        <p:txBody>
-          <a:bodyPr rtlCol="0" anchor="ctr"/>
-          <a:lstStyle/>
-          <a:p>
-            <a:pPr algn="ctr"/>
-            <a:endParaRPr lang="zh-CN" altLang="en-US">
-              <a:solidFill>
-                <a:schemeClr val="tx1"/>
-              </a:solidFill>
-            </a:endParaRPr>
-          </a:p>
-        </p:txBody>
-      </p:sp>
-      <p:cxnSp>
-        <p:nvCxnSpPr>
-          <p:cNvPr id="13" name="直接连接符 12">
-            <a:extLst>
-              <a:ext uri="{FF2B5EF4-FFF2-40B4-BE49-F238E27FC236}">
-                <a16:creationId xmlns:a16="http://schemas.microsoft.com/office/drawing/2014/main" id="{B1B81DE7-C930-DC19-A1FD-DC4072262536}"/>
-              </a:ext>
-            </a:extLst>
-          </p:cNvPr>
-          <p:cNvCxnSpPr/>
-          <p:nvPr/>
-        </p:nvCxnSpPr>
-        <p:spPr>
-          <a:xfrm>
-            <a:off x="650457" y="1480820"/>
-            <a:ext cx="6546850" cy="14605"/>
-          </a:xfrm>
-          <a:prstGeom prst="line">
-            <a:avLst/>
-          </a:prstGeom>
-          <a:ln w="57150">
-            <a:solidFill>
-              <a:srgbClr val="FF5F05">
-                <a:alpha val="81000"/>
-              </a:srgbClr>
-            </a:solidFill>
-          </a:ln>
-        </p:spPr>
-        <p:style>
-          <a:lnRef idx="2">
-            <a:schemeClr val="accent1"/>
-          </a:lnRef>
-          <a:fillRef idx="0">
-            <a:srgbClr val="FFFFFF"/>
-          </a:fillRef>
-          <a:effectRef idx="0">
-            <a:srgbClr val="FFFFFF"/>
-          </a:effectRef>
-          <a:fontRef idx="minor">
-            <a:schemeClr val="tx1"/>
-          </a:fontRef>
-        </p:style>
-      </p:cxnSp>
-      <p:pic>
-        <p:nvPicPr>
-          <p:cNvPr id="100" name="图片 99">
-            <a:extLst>
-              <a:ext uri="{FF2B5EF4-FFF2-40B4-BE49-F238E27FC236}">
-                <a16:creationId xmlns:a16="http://schemas.microsoft.com/office/drawing/2014/main" id="{2164D6A5-7093-4A2F-EC32-37060E4005E7}"/>
-              </a:ext>
-            </a:extLst>
-          </p:cNvPr>
-          <p:cNvPicPr/>
-          <p:nvPr/>
-        </p:nvPicPr>
-        <p:blipFill>
-          <a:blip r:embed="rId4"/>
-          <a:stretch>
-            <a:fillRect/>
-          </a:stretch>
-        </p:blipFill>
-        <p:spPr>
-          <a:xfrm>
-            <a:off x="9906635" y="171450"/>
-            <a:ext cx="1906270" cy="1212850"/>
-          </a:xfrm>
-          <a:prstGeom prst="rect">
-            <a:avLst/>
-          </a:prstGeom>
-          <a:noFill/>
-          <a:ln w="9525">
-            <a:noFill/>
-          </a:ln>
-        </p:spPr>
-      </p:pic>
-      <p:sp>
-        <p:nvSpPr>
-          <p:cNvPr id="5" name="文本框 4">
-            <a:extLst>
-              <a:ext uri="{FF2B5EF4-FFF2-40B4-BE49-F238E27FC236}">
-                <a16:creationId xmlns:a16="http://schemas.microsoft.com/office/drawing/2014/main" id="{BC80E71F-D30C-406D-4ED7-BAE015A84762}"/>
-              </a:ext>
-            </a:extLst>
-          </p:cNvPr>
-          <p:cNvSpPr txBox="1"/>
-          <p:nvPr/>
-        </p:nvSpPr>
-        <p:spPr>
-          <a:xfrm>
-            <a:off x="613543" y="1741049"/>
-            <a:ext cx="10964912" cy="2785378"/>
-          </a:xfrm>
-          <a:prstGeom prst="rect">
-            <a:avLst/>
-          </a:prstGeom>
-          <a:noFill/>
-        </p:spPr>
-        <p:txBody>
-          <a:bodyPr wrap="square" lIns="91440" tIns="45720" rIns="91440" bIns="45720" rtlCol="0" anchor="t">
-            <a:spAutoFit/>
-          </a:bodyPr>
-          <a:lstStyle/>
-          <a:p>
-            <a:pPr marL="457200" indent="-457200">
-              <a:spcAft>
-                <a:spcPts val="600"/>
-              </a:spcAft>
-              <a:buFont typeface="Arial" panose="020B0604020202020204" pitchFamily="34" charset="0"/>
-              <a:buChar char="•"/>
-            </a:pPr>
-            <a:r>
-              <a:rPr lang="en-US" altLang="zh-CN" sz="3200" dirty="0">
-                <a:solidFill>
-                  <a:srgbClr val="13294B"/>
-                </a:solidFill>
-                <a:latin typeface="Calibri"/>
-                <a:ea typeface="宋体"/>
-                <a:cs typeface="Calibri"/>
-              </a:rPr>
-              <a:t>The study follows a three-phase empirical design: </a:t>
-            </a:r>
-          </a:p>
-          <a:p>
-            <a:pPr marL="457200" indent="-457200">
-              <a:spcAft>
-                <a:spcPts val="600"/>
-              </a:spcAft>
-              <a:buFont typeface="Arial" panose="020B0604020202020204" pitchFamily="34" charset="0"/>
-              <a:buChar char="•"/>
-            </a:pPr>
-            <a:r>
-              <a:rPr lang="en-US" altLang="zh-CN" sz="3200" dirty="0">
-                <a:solidFill>
-                  <a:srgbClr val="13294B"/>
-                </a:solidFill>
-                <a:latin typeface="Calibri"/>
-                <a:ea typeface="宋体"/>
-                <a:cs typeface="Calibri"/>
-              </a:rPr>
-              <a:t>(1) benchmark construction from real conversational data </a:t>
-            </a:r>
-          </a:p>
-          <a:p>
-            <a:pPr marL="457200" indent="-457200">
-              <a:spcAft>
-                <a:spcPts val="600"/>
-              </a:spcAft>
-              <a:buFont typeface="Arial" panose="020B0604020202020204" pitchFamily="34" charset="0"/>
-              <a:buChar char="•"/>
-            </a:pPr>
-            <a:r>
-              <a:rPr lang="en-US" altLang="zh-CN" sz="3200" dirty="0">
-                <a:solidFill>
-                  <a:srgbClr val="13294B"/>
-                </a:solidFill>
-                <a:latin typeface="Calibri"/>
-                <a:ea typeface="宋体"/>
-                <a:cs typeface="Calibri"/>
-              </a:rPr>
-              <a:t>(2) LLM response generation under a neutral prompt </a:t>
-            </a:r>
-          </a:p>
-          <a:p>
-            <a:pPr marL="457200" indent="-457200">
-              <a:spcAft>
-                <a:spcPts val="600"/>
-              </a:spcAft>
-              <a:buFont typeface="Arial" panose="020B0604020202020204" pitchFamily="34" charset="0"/>
-              <a:buChar char="•"/>
-            </a:pPr>
-            <a:r>
-              <a:rPr lang="en-US" altLang="zh-CN" sz="3200" dirty="0">
-                <a:solidFill>
-                  <a:srgbClr val="13294B"/>
-                </a:solidFill>
-                <a:latin typeface="Calibri"/>
-                <a:ea typeface="宋体"/>
-                <a:cs typeface="Calibri"/>
-              </a:rPr>
-              <a:t>(3) calibration scoring and statistical comparison. No model training is required.</a:t>
+              <a:t>(3) calibration scoring and statistical comparison.</a:t>
             </a:r>
           </a:p>
         </p:txBody>
@@ -16425,12 +15685,6 @@
 </file>
 
 <file path=ppt/tags/tag16.xml><?xml version="1.0" encoding="utf-8"?>
-<p:tagLst xmlns:a="http://schemas.openxmlformats.org/drawingml/2006/main" xmlns:r="http://schemas.openxmlformats.org/officeDocument/2006/relationships" xmlns:p="http://schemas.openxmlformats.org/presentationml/2006/main">
-  <p:tag name="KSO_WM_BEAUTIFY_FLAG" val=""/>
-</p:tagLst>
-</file>
-
-<file path=ppt/tags/tag17.xml><?xml version="1.0" encoding="utf-8"?>
 <p:tagLst xmlns:a="http://schemas.openxmlformats.org/drawingml/2006/main" xmlns:r="http://schemas.openxmlformats.org/officeDocument/2006/relationships" xmlns:p="http://schemas.openxmlformats.org/presentationml/2006/main">
   <p:tag name="KSO_WM_BEAUTIFY_FLAG" val=""/>
 </p:tagLst>

--- a/src/Files/Final_ppt.pptx
+++ b/src/Files/Final_ppt.pptx
@@ -5,25 +5,24 @@
     <p:sldMasterId id="2147483648" r:id="rId1"/>
   </p:sldMasterIdLst>
   <p:notesMasterIdLst>
-    <p:notesMasterId r:id="rId18"/>
+    <p:notesMasterId r:id="rId17"/>
   </p:notesMasterIdLst>
   <p:sldIdLst>
     <p:sldId id="263" r:id="rId2"/>
-    <p:sldId id="297" r:id="rId3"/>
-    <p:sldId id="272" r:id="rId4"/>
-    <p:sldId id="277" r:id="rId5"/>
-    <p:sldId id="298" r:id="rId6"/>
-    <p:sldId id="309" r:id="rId7"/>
-    <p:sldId id="299" r:id="rId8"/>
-    <p:sldId id="304" r:id="rId9"/>
-    <p:sldId id="305" r:id="rId10"/>
-    <p:sldId id="307" r:id="rId11"/>
-    <p:sldId id="296" r:id="rId12"/>
-    <p:sldId id="300" r:id="rId13"/>
-    <p:sldId id="308" r:id="rId14"/>
-    <p:sldId id="302" r:id="rId15"/>
-    <p:sldId id="303" r:id="rId16"/>
-    <p:sldId id="301" r:id="rId17"/>
+    <p:sldId id="272" r:id="rId3"/>
+    <p:sldId id="277" r:id="rId4"/>
+    <p:sldId id="298" r:id="rId5"/>
+    <p:sldId id="309" r:id="rId6"/>
+    <p:sldId id="299" r:id="rId7"/>
+    <p:sldId id="304" r:id="rId8"/>
+    <p:sldId id="305" r:id="rId9"/>
+    <p:sldId id="307" r:id="rId10"/>
+    <p:sldId id="296" r:id="rId11"/>
+    <p:sldId id="300" r:id="rId12"/>
+    <p:sldId id="308" r:id="rId13"/>
+    <p:sldId id="302" r:id="rId14"/>
+    <p:sldId id="303" r:id="rId15"/>
+    <p:sldId id="301" r:id="rId16"/>
   </p:sldIdLst>
   <p:sldSz cx="12192000" cy="6858000"/>
   <p:notesSz cx="6858000" cy="9144000"/>
@@ -1133,7 +1132,7 @@
           <a:p>
             <a:fld id="{D2C19FB4-6E42-4667-9259-F43FF51FF684}" type="datetimeFigureOut">
               <a:rPr lang="zh-CN" altLang="en-US" smtClean="0"/>
-              <a:t>2026/4/29</a:t>
+              <a:t>2026/4/30</a:t>
             </a:fld>
             <a:endParaRPr lang="zh-CN" altLang="en-US"/>
           </a:p>
@@ -1590,170 +1589,6 @@
         <p:cNvPr id="1" name="">
           <a:extLst>
             <a:ext uri="{FF2B5EF4-FFF2-40B4-BE49-F238E27FC236}">
-              <a16:creationId xmlns:a16="http://schemas.microsoft.com/office/drawing/2014/main" id="{A3780624-88CC-1F28-3EA6-BBF568054237}"/>
-            </a:ext>
-          </a:extLst>
-        </p:cNvPr>
-        <p:cNvGrpSpPr/>
-        <p:nvPr/>
-      </p:nvGrpSpPr>
-      <p:grpSpPr>
-        <a:xfrm>
-          <a:off x="0" y="0"/>
-          <a:ext cx="0" cy="0"/>
-          <a:chOff x="0" y="0"/>
-          <a:chExt cx="0" cy="0"/>
-        </a:xfrm>
-      </p:grpSpPr>
-      <p:sp>
-        <p:nvSpPr>
-          <p:cNvPr id="2" name="幻灯片图像占位符 1">
-            <a:extLst>
-              <a:ext uri="{FF2B5EF4-FFF2-40B4-BE49-F238E27FC236}">
-                <a16:creationId xmlns:a16="http://schemas.microsoft.com/office/drawing/2014/main" id="{17D9BFCF-9822-FB5B-17B4-EBD5F789862C}"/>
-              </a:ext>
-            </a:extLst>
-          </p:cNvPr>
-          <p:cNvSpPr>
-            <a:spLocks noGrp="1" noRot="1" noChangeAspect="1"/>
-          </p:cNvSpPr>
-          <p:nvPr>
-            <p:ph type="sldImg"/>
-          </p:nvPr>
-        </p:nvSpPr>
-        <p:spPr/>
-      </p:sp>
-      <p:sp>
-        <p:nvSpPr>
-          <p:cNvPr id="3" name="备注占位符 2">
-            <a:extLst>
-              <a:ext uri="{FF2B5EF4-FFF2-40B4-BE49-F238E27FC236}">
-                <a16:creationId xmlns:a16="http://schemas.microsoft.com/office/drawing/2014/main" id="{87921B3E-7334-C4A1-C580-61E6AC3AB4CC}"/>
-              </a:ext>
-            </a:extLst>
-          </p:cNvPr>
-          <p:cNvSpPr>
-            <a:spLocks noGrp="1"/>
-          </p:cNvSpPr>
-          <p:nvPr>
-            <p:ph type="body" idx="1"/>
-          </p:nvPr>
-        </p:nvSpPr>
-        <p:spPr/>
-        <p:txBody>
-          <a:bodyPr/>
-          <a:lstStyle/>
-          <a:p>
-            <a:pPr algn="l">
-              <a:spcBef>
-                <a:spcPts val="450"/>
-              </a:spcBef>
-              <a:spcAft>
-                <a:spcPts val="450"/>
-              </a:spcAft>
-            </a:pPr>
-            <a:r>
-              <a:rPr lang="en-US" altLang="zh-CN" sz="1800" b="1" i="0">
-                <a:solidFill>
-                  <a:srgbClr val="2D3B45"/>
-                </a:solidFill>
-                <a:effectLst/>
-                <a:latin typeface="Lato Extended"/>
-              </a:rPr>
-              <a:t>Introduction Slide</a:t>
-            </a:r>
-            <a:endParaRPr lang="en-US" altLang="zh-CN" sz="1800" b="0" i="0">
-              <a:solidFill>
-                <a:srgbClr val="2D3B45"/>
-              </a:solidFill>
-              <a:effectLst/>
-              <a:latin typeface="Lato Extended"/>
-            </a:endParaRPr>
-          </a:p>
-          <a:p>
-            <a:pPr algn="l">
-              <a:spcAft>
-                <a:spcPts val="450"/>
-              </a:spcAft>
-              <a:buFont typeface="Arial" panose="020B0604020202020204" pitchFamily="34" charset="0"/>
-              <a:buChar char="•"/>
-            </a:pPr>
-            <a:r>
-              <a:rPr lang="en-US" altLang="zh-CN" sz="1800" b="1" i="0">
-                <a:solidFill>
-                  <a:srgbClr val="2D3B45"/>
-                </a:solidFill>
-                <a:effectLst/>
-                <a:latin typeface="v-sans"/>
-              </a:rPr>
-              <a:t>Brief Introduction:</a:t>
-            </a:r>
-            <a:r>
-              <a:rPr lang="en-US" altLang="zh-CN" sz="1800" b="0" i="0">
-                <a:solidFill>
-                  <a:srgbClr val="2D3B45"/>
-                </a:solidFill>
-                <a:effectLst/>
-                <a:latin typeface="v-sans"/>
-              </a:rPr>
-              <a:t> of the team and the topic</a:t>
-            </a:r>
-          </a:p>
-          <a:p>
-            <a:endParaRPr lang="zh-CN" altLang="en-US"/>
-          </a:p>
-        </p:txBody>
-      </p:sp>
-      <p:sp>
-        <p:nvSpPr>
-          <p:cNvPr id="4" name="灯片编号占位符 3">
-            <a:extLst>
-              <a:ext uri="{FF2B5EF4-FFF2-40B4-BE49-F238E27FC236}">
-                <a16:creationId xmlns:a16="http://schemas.microsoft.com/office/drawing/2014/main" id="{48E609CA-1FF1-16EC-BFEC-B2D0092FC102}"/>
-              </a:ext>
-            </a:extLst>
-          </p:cNvPr>
-          <p:cNvSpPr>
-            <a:spLocks noGrp="1"/>
-          </p:cNvSpPr>
-          <p:nvPr>
-            <p:ph type="sldNum" sz="quarter" idx="5"/>
-          </p:nvPr>
-        </p:nvSpPr>
-        <p:spPr/>
-        <p:txBody>
-          <a:bodyPr/>
-          <a:lstStyle/>
-          <a:p>
-            <a:fld id="{EED2C466-1B0F-4591-A952-5F31096967DE}" type="slidenum">
-              <a:rPr lang="zh-CN" altLang="en-US" smtClean="0"/>
-              <a:t>10</a:t>
-            </a:fld>
-            <a:endParaRPr lang="zh-CN" altLang="en-US"/>
-          </a:p>
-        </p:txBody>
-      </p:sp>
-    </p:spTree>
-    <p:extLst>
-      <p:ext uri="{BB962C8B-B14F-4D97-AF65-F5344CB8AC3E}">
-        <p14:creationId xmlns:p14="http://schemas.microsoft.com/office/powerpoint/2010/main" val="3655621524"/>
-      </p:ext>
-    </p:extLst>
-  </p:cSld>
-  <p:clrMapOvr>
-    <a:masterClrMapping/>
-  </p:clrMapOvr>
-</p:notes>
-</file>
-
-<file path=ppt/notesSlides/notesSlide11.xml><?xml version="1.0" encoding="utf-8"?>
-<p:notes xmlns:a="http://schemas.openxmlformats.org/drawingml/2006/main" xmlns:r="http://schemas.openxmlformats.org/officeDocument/2006/relationships" xmlns:p="http://schemas.openxmlformats.org/presentationml/2006/main">
-  <p:cSld>
-    <p:spTree>
-      <p:nvGrpSpPr>
-        <p:cNvPr id="1" name="">
-          <a:extLst>
-            <a:ext uri="{FF2B5EF4-FFF2-40B4-BE49-F238E27FC236}">
               <a16:creationId xmlns:a16="http://schemas.microsoft.com/office/drawing/2014/main" id="{6B4F455E-20C9-8E87-3904-609AB5C1931E}"/>
             </a:ext>
           </a:extLst>
@@ -1891,7 +1726,7 @@
           <a:p>
             <a:fld id="{EED2C466-1B0F-4591-A952-5F31096967DE}" type="slidenum">
               <a:rPr lang="zh-CN" altLang="en-US" smtClean="0"/>
-              <a:t>11</a:t>
+              <a:t>10</a:t>
             </a:fld>
             <a:endParaRPr lang="zh-CN" altLang="en-US"/>
           </a:p>
@@ -1910,7 +1745,7 @@
 </p:notes>
 </file>
 
-<file path=ppt/notesSlides/notesSlide12.xml><?xml version="1.0" encoding="utf-8"?>
+<file path=ppt/notesSlides/notesSlide11.xml><?xml version="1.0" encoding="utf-8"?>
 <p:notes xmlns:a="http://schemas.openxmlformats.org/drawingml/2006/main" xmlns:r="http://schemas.openxmlformats.org/officeDocument/2006/relationships" xmlns:p="http://schemas.openxmlformats.org/presentationml/2006/main">
   <p:cSld>
     <p:spTree>
@@ -2055,7 +1890,7 @@
           <a:p>
             <a:fld id="{EED2C466-1B0F-4591-A952-5F31096967DE}" type="slidenum">
               <a:rPr lang="zh-CN" altLang="en-US" smtClean="0"/>
-              <a:t>12</a:t>
+              <a:t>11</a:t>
             </a:fld>
             <a:endParaRPr lang="zh-CN" altLang="en-US"/>
           </a:p>
@@ -2074,7 +1909,7 @@
 </p:notes>
 </file>
 
-<file path=ppt/notesSlides/notesSlide13.xml><?xml version="1.0" encoding="utf-8"?>
+<file path=ppt/notesSlides/notesSlide12.xml><?xml version="1.0" encoding="utf-8"?>
 <p:notes xmlns:a="http://schemas.openxmlformats.org/drawingml/2006/main" xmlns:r="http://schemas.openxmlformats.org/officeDocument/2006/relationships" xmlns:p="http://schemas.openxmlformats.org/presentationml/2006/main">
   <p:cSld>
     <p:spTree>
@@ -2219,7 +2054,7 @@
           <a:p>
             <a:fld id="{EED2C466-1B0F-4591-A952-5F31096967DE}" type="slidenum">
               <a:rPr lang="zh-CN" altLang="en-US" smtClean="0"/>
-              <a:t>13</a:t>
+              <a:t>12</a:t>
             </a:fld>
             <a:endParaRPr lang="zh-CN" altLang="en-US"/>
           </a:p>
@@ -2238,7 +2073,7 @@
 </p:notes>
 </file>
 
-<file path=ppt/notesSlides/notesSlide14.xml><?xml version="1.0" encoding="utf-8"?>
+<file path=ppt/notesSlides/notesSlide13.xml><?xml version="1.0" encoding="utf-8"?>
 <p:notes xmlns:a="http://schemas.openxmlformats.org/drawingml/2006/main" xmlns:r="http://schemas.openxmlformats.org/officeDocument/2006/relationships" xmlns:p="http://schemas.openxmlformats.org/presentationml/2006/main">
   <p:cSld>
     <p:spTree>
@@ -2383,7 +2218,7 @@
           <a:p>
             <a:fld id="{EED2C466-1B0F-4591-A952-5F31096967DE}" type="slidenum">
               <a:rPr lang="zh-CN" altLang="en-US" smtClean="0"/>
-              <a:t>14</a:t>
+              <a:t>13</a:t>
             </a:fld>
             <a:endParaRPr lang="zh-CN" altLang="en-US"/>
           </a:p>
@@ -2402,7 +2237,7 @@
 </p:notes>
 </file>
 
-<file path=ppt/notesSlides/notesSlide15.xml><?xml version="1.0" encoding="utf-8"?>
+<file path=ppt/notesSlides/notesSlide14.xml><?xml version="1.0" encoding="utf-8"?>
 <p:notes xmlns:a="http://schemas.openxmlformats.org/drawingml/2006/main" xmlns:r="http://schemas.openxmlformats.org/officeDocument/2006/relationships" xmlns:p="http://schemas.openxmlformats.org/presentationml/2006/main">
   <p:cSld>
     <p:spTree>
@@ -2547,7 +2382,7 @@
           <a:p>
             <a:fld id="{EED2C466-1B0F-4591-A952-5F31096967DE}" type="slidenum">
               <a:rPr lang="zh-CN" altLang="en-US" smtClean="0"/>
-              <a:t>15</a:t>
+              <a:t>14</a:t>
             </a:fld>
             <a:endParaRPr lang="zh-CN" altLang="en-US"/>
           </a:p>
@@ -2566,7 +2401,7 @@
 </p:notes>
 </file>
 
-<file path=ppt/notesSlides/notesSlide16.xml><?xml version="1.0" encoding="utf-8"?>
+<file path=ppt/notesSlides/notesSlide15.xml><?xml version="1.0" encoding="utf-8"?>
 <p:notes xmlns:a="http://schemas.openxmlformats.org/drawingml/2006/main" xmlns:r="http://schemas.openxmlformats.org/officeDocument/2006/relationships" xmlns:p="http://schemas.openxmlformats.org/presentationml/2006/main">
   <p:cSld>
     <p:spTree>
@@ -2711,7 +2546,7 @@
           <a:p>
             <a:fld id="{EED2C466-1B0F-4591-A952-5F31096967DE}" type="slidenum">
               <a:rPr lang="zh-CN" altLang="en-US" smtClean="0"/>
-              <a:t>16</a:t>
+              <a:t>15</a:t>
             </a:fld>
             <a:endParaRPr lang="zh-CN" altLang="en-US"/>
           </a:p>
@@ -2731,170 +2566,6 @@
 </file>
 
 <file path=ppt/notesSlides/notesSlide2.xml><?xml version="1.0" encoding="utf-8"?>
-<p:notes xmlns:a="http://schemas.openxmlformats.org/drawingml/2006/main" xmlns:r="http://schemas.openxmlformats.org/officeDocument/2006/relationships" xmlns:p="http://schemas.openxmlformats.org/presentationml/2006/main">
-  <p:cSld>
-    <p:spTree>
-      <p:nvGrpSpPr>
-        <p:cNvPr id="1" name="">
-          <a:extLst>
-            <a:ext uri="{FF2B5EF4-FFF2-40B4-BE49-F238E27FC236}">
-              <a16:creationId xmlns:a16="http://schemas.microsoft.com/office/drawing/2014/main" id="{C99A4FFB-D8FF-F77F-B6D3-161F9726D9C3}"/>
-            </a:ext>
-          </a:extLst>
-        </p:cNvPr>
-        <p:cNvGrpSpPr/>
-        <p:nvPr/>
-      </p:nvGrpSpPr>
-      <p:grpSpPr>
-        <a:xfrm>
-          <a:off x="0" y="0"/>
-          <a:ext cx="0" cy="0"/>
-          <a:chOff x="0" y="0"/>
-          <a:chExt cx="0" cy="0"/>
-        </a:xfrm>
-      </p:grpSpPr>
-      <p:sp>
-        <p:nvSpPr>
-          <p:cNvPr id="2" name="幻灯片图像占位符 1">
-            <a:extLst>
-              <a:ext uri="{FF2B5EF4-FFF2-40B4-BE49-F238E27FC236}">
-                <a16:creationId xmlns:a16="http://schemas.microsoft.com/office/drawing/2014/main" id="{4EAC9962-BF4C-7B93-5FCD-230ADFC6B335}"/>
-              </a:ext>
-            </a:extLst>
-          </p:cNvPr>
-          <p:cNvSpPr>
-            <a:spLocks noGrp="1" noRot="1" noChangeAspect="1"/>
-          </p:cNvSpPr>
-          <p:nvPr>
-            <p:ph type="sldImg"/>
-          </p:nvPr>
-        </p:nvSpPr>
-        <p:spPr/>
-      </p:sp>
-      <p:sp>
-        <p:nvSpPr>
-          <p:cNvPr id="3" name="备注占位符 2">
-            <a:extLst>
-              <a:ext uri="{FF2B5EF4-FFF2-40B4-BE49-F238E27FC236}">
-                <a16:creationId xmlns:a16="http://schemas.microsoft.com/office/drawing/2014/main" id="{29E234C0-616B-5CD1-3DC3-B6B48136D085}"/>
-              </a:ext>
-            </a:extLst>
-          </p:cNvPr>
-          <p:cNvSpPr>
-            <a:spLocks noGrp="1"/>
-          </p:cNvSpPr>
-          <p:nvPr>
-            <p:ph type="body" idx="1"/>
-          </p:nvPr>
-        </p:nvSpPr>
-        <p:spPr/>
-        <p:txBody>
-          <a:bodyPr/>
-          <a:lstStyle/>
-          <a:p>
-            <a:pPr algn="l">
-              <a:spcBef>
-                <a:spcPts val="450"/>
-              </a:spcBef>
-              <a:spcAft>
-                <a:spcPts val="450"/>
-              </a:spcAft>
-            </a:pPr>
-            <a:r>
-              <a:rPr lang="en-US" altLang="zh-CN" sz="1800" b="1" i="0">
-                <a:solidFill>
-                  <a:srgbClr val="2D3B45"/>
-                </a:solidFill>
-                <a:effectLst/>
-                <a:latin typeface="Lato Extended"/>
-              </a:rPr>
-              <a:t>Introduction Slide</a:t>
-            </a:r>
-            <a:endParaRPr lang="en-US" altLang="zh-CN" sz="1800" b="0" i="0">
-              <a:solidFill>
-                <a:srgbClr val="2D3B45"/>
-              </a:solidFill>
-              <a:effectLst/>
-              <a:latin typeface="Lato Extended"/>
-            </a:endParaRPr>
-          </a:p>
-          <a:p>
-            <a:pPr algn="l">
-              <a:spcAft>
-                <a:spcPts val="450"/>
-              </a:spcAft>
-              <a:buFont typeface="Arial" panose="020B0604020202020204" pitchFamily="34" charset="0"/>
-              <a:buChar char="•"/>
-            </a:pPr>
-            <a:r>
-              <a:rPr lang="en-US" altLang="zh-CN" sz="1800" b="1" i="0">
-                <a:solidFill>
-                  <a:srgbClr val="2D3B45"/>
-                </a:solidFill>
-                <a:effectLst/>
-                <a:latin typeface="v-sans"/>
-              </a:rPr>
-              <a:t>Brief Introduction:</a:t>
-            </a:r>
-            <a:r>
-              <a:rPr lang="en-US" altLang="zh-CN" sz="1800" b="0" i="0">
-                <a:solidFill>
-                  <a:srgbClr val="2D3B45"/>
-                </a:solidFill>
-                <a:effectLst/>
-                <a:latin typeface="v-sans"/>
-              </a:rPr>
-              <a:t> of the team and the topic</a:t>
-            </a:r>
-          </a:p>
-          <a:p>
-            <a:endParaRPr lang="zh-CN" altLang="en-US"/>
-          </a:p>
-        </p:txBody>
-      </p:sp>
-      <p:sp>
-        <p:nvSpPr>
-          <p:cNvPr id="4" name="灯片编号占位符 3">
-            <a:extLst>
-              <a:ext uri="{FF2B5EF4-FFF2-40B4-BE49-F238E27FC236}">
-                <a16:creationId xmlns:a16="http://schemas.microsoft.com/office/drawing/2014/main" id="{CD02C3D5-768E-C1B1-FBC5-2A6D674543A0}"/>
-              </a:ext>
-            </a:extLst>
-          </p:cNvPr>
-          <p:cNvSpPr>
-            <a:spLocks noGrp="1"/>
-          </p:cNvSpPr>
-          <p:nvPr>
-            <p:ph type="sldNum" sz="quarter" idx="5"/>
-          </p:nvPr>
-        </p:nvSpPr>
-        <p:spPr/>
-        <p:txBody>
-          <a:bodyPr/>
-          <a:lstStyle/>
-          <a:p>
-            <a:fld id="{EED2C466-1B0F-4591-A952-5F31096967DE}" type="slidenum">
-              <a:rPr lang="zh-CN" altLang="en-US" smtClean="0"/>
-              <a:t>2</a:t>
-            </a:fld>
-            <a:endParaRPr lang="zh-CN" altLang="en-US"/>
-          </a:p>
-        </p:txBody>
-      </p:sp>
-    </p:spTree>
-    <p:extLst>
-      <p:ext uri="{BB962C8B-B14F-4D97-AF65-F5344CB8AC3E}">
-        <p14:creationId xmlns:p14="http://schemas.microsoft.com/office/powerpoint/2010/main" val="1757984631"/>
-      </p:ext>
-    </p:extLst>
-  </p:cSld>
-  <p:clrMapOvr>
-    <a:masterClrMapping/>
-  </p:clrMapOvr>
-</p:notes>
-</file>
-
-<file path=ppt/notesSlides/notesSlide3.xml><?xml version="1.0" encoding="utf-8"?>
 <p:notes xmlns:a="http://schemas.openxmlformats.org/drawingml/2006/main" xmlns:r="http://schemas.openxmlformats.org/officeDocument/2006/relationships" xmlns:p="http://schemas.openxmlformats.org/presentationml/2006/main">
   <p:cSld>
     <p:spTree>
@@ -3039,7 +2710,7 @@
           <a:p>
             <a:fld id="{EED2C466-1B0F-4591-A952-5F31096967DE}" type="slidenum">
               <a:rPr lang="zh-CN" altLang="en-US" smtClean="0"/>
-              <a:t>3</a:t>
+              <a:t>2</a:t>
             </a:fld>
             <a:endParaRPr lang="zh-CN" altLang="en-US"/>
           </a:p>
@@ -3058,7 +2729,7 @@
 </p:notes>
 </file>
 
-<file path=ppt/notesSlides/notesSlide4.xml><?xml version="1.0" encoding="utf-8"?>
+<file path=ppt/notesSlides/notesSlide3.xml><?xml version="1.0" encoding="utf-8"?>
 <p:notes xmlns:a="http://schemas.openxmlformats.org/drawingml/2006/main" xmlns:r="http://schemas.openxmlformats.org/officeDocument/2006/relationships" xmlns:p="http://schemas.openxmlformats.org/presentationml/2006/main">
   <p:cSld>
     <p:spTree>
@@ -3203,7 +2874,7 @@
           <a:p>
             <a:fld id="{EED2C466-1B0F-4591-A952-5F31096967DE}" type="slidenum">
               <a:rPr lang="zh-CN" altLang="en-US" smtClean="0"/>
-              <a:t>4</a:t>
+              <a:t>3</a:t>
             </a:fld>
             <a:endParaRPr lang="zh-CN" altLang="en-US"/>
           </a:p>
@@ -3222,7 +2893,7 @@
 </p:notes>
 </file>
 
-<file path=ppt/notesSlides/notesSlide5.xml><?xml version="1.0" encoding="utf-8"?>
+<file path=ppt/notesSlides/notesSlide4.xml><?xml version="1.0" encoding="utf-8"?>
 <p:notes xmlns:a="http://schemas.openxmlformats.org/drawingml/2006/main" xmlns:r="http://schemas.openxmlformats.org/officeDocument/2006/relationships" xmlns:p="http://schemas.openxmlformats.org/presentationml/2006/main">
   <p:cSld>
     <p:spTree>
@@ -3367,7 +3038,7 @@
           <a:p>
             <a:fld id="{EED2C466-1B0F-4591-A952-5F31096967DE}" type="slidenum">
               <a:rPr lang="zh-CN" altLang="en-US" smtClean="0"/>
-              <a:t>5</a:t>
+              <a:t>4</a:t>
             </a:fld>
             <a:endParaRPr lang="zh-CN" altLang="en-US"/>
           </a:p>
@@ -3386,7 +3057,7 @@
 </p:notes>
 </file>
 
-<file path=ppt/notesSlides/notesSlide6.xml><?xml version="1.0" encoding="utf-8"?>
+<file path=ppt/notesSlides/notesSlide5.xml><?xml version="1.0" encoding="utf-8"?>
 <p:notes xmlns:a="http://schemas.openxmlformats.org/drawingml/2006/main" xmlns:r="http://schemas.openxmlformats.org/officeDocument/2006/relationships" xmlns:p="http://schemas.openxmlformats.org/presentationml/2006/main">
   <p:cSld>
     <p:spTree>
@@ -3531,7 +3202,7 @@
           <a:p>
             <a:fld id="{EED2C466-1B0F-4591-A952-5F31096967DE}" type="slidenum">
               <a:rPr lang="zh-CN" altLang="en-US" smtClean="0"/>
-              <a:t>6</a:t>
+              <a:t>5</a:t>
             </a:fld>
             <a:endParaRPr lang="zh-CN" altLang="en-US"/>
           </a:p>
@@ -3550,7 +3221,7 @@
 </p:notes>
 </file>
 
-<file path=ppt/notesSlides/notesSlide7.xml><?xml version="1.0" encoding="utf-8"?>
+<file path=ppt/notesSlides/notesSlide6.xml><?xml version="1.0" encoding="utf-8"?>
 <p:notes xmlns:a="http://schemas.openxmlformats.org/drawingml/2006/main" xmlns:r="http://schemas.openxmlformats.org/officeDocument/2006/relationships" xmlns:p="http://schemas.openxmlformats.org/presentationml/2006/main">
   <p:cSld>
     <p:spTree>
@@ -3695,7 +3366,7 @@
           <a:p>
             <a:fld id="{EED2C466-1B0F-4591-A952-5F31096967DE}" type="slidenum">
               <a:rPr lang="zh-CN" altLang="en-US" smtClean="0"/>
-              <a:t>7</a:t>
+              <a:t>6</a:t>
             </a:fld>
             <a:endParaRPr lang="zh-CN" altLang="en-US"/>
           </a:p>
@@ -3714,7 +3385,7 @@
 </p:notes>
 </file>
 
-<file path=ppt/notesSlides/notesSlide8.xml><?xml version="1.0" encoding="utf-8"?>
+<file path=ppt/notesSlides/notesSlide7.xml><?xml version="1.0" encoding="utf-8"?>
 <p:notes xmlns:a="http://schemas.openxmlformats.org/drawingml/2006/main" xmlns:r="http://schemas.openxmlformats.org/officeDocument/2006/relationships" xmlns:p="http://schemas.openxmlformats.org/presentationml/2006/main">
   <p:cSld>
     <p:spTree>
@@ -3859,7 +3530,7 @@
           <a:p>
             <a:fld id="{EED2C466-1B0F-4591-A952-5F31096967DE}" type="slidenum">
               <a:rPr lang="zh-CN" altLang="en-US" smtClean="0"/>
-              <a:t>8</a:t>
+              <a:t>7</a:t>
             </a:fld>
             <a:endParaRPr lang="zh-CN" altLang="en-US"/>
           </a:p>
@@ -3878,7 +3549,7 @@
 </p:notes>
 </file>
 
-<file path=ppt/notesSlides/notesSlide9.xml><?xml version="1.0" encoding="utf-8"?>
+<file path=ppt/notesSlides/notesSlide8.xml><?xml version="1.0" encoding="utf-8"?>
 <p:notes xmlns:a="http://schemas.openxmlformats.org/drawingml/2006/main" xmlns:r="http://schemas.openxmlformats.org/officeDocument/2006/relationships" xmlns:p="http://schemas.openxmlformats.org/presentationml/2006/main">
   <p:cSld>
     <p:spTree>
@@ -4023,7 +3694,7 @@
           <a:p>
             <a:fld id="{EED2C466-1B0F-4591-A952-5F31096967DE}" type="slidenum">
               <a:rPr lang="zh-CN" altLang="en-US" smtClean="0"/>
-              <a:t>9</a:t>
+              <a:t>8</a:t>
             </a:fld>
             <a:endParaRPr lang="zh-CN" altLang="en-US"/>
           </a:p>
@@ -4033,6 +3704,170 @@
     <p:extLst>
       <p:ext uri="{BB962C8B-B14F-4D97-AF65-F5344CB8AC3E}">
         <p14:creationId xmlns:p14="http://schemas.microsoft.com/office/powerpoint/2010/main" val="1486106821"/>
+      </p:ext>
+    </p:extLst>
+  </p:cSld>
+  <p:clrMapOvr>
+    <a:masterClrMapping/>
+  </p:clrMapOvr>
+</p:notes>
+</file>
+
+<file path=ppt/notesSlides/notesSlide9.xml><?xml version="1.0" encoding="utf-8"?>
+<p:notes xmlns:a="http://schemas.openxmlformats.org/drawingml/2006/main" xmlns:r="http://schemas.openxmlformats.org/officeDocument/2006/relationships" xmlns:p="http://schemas.openxmlformats.org/presentationml/2006/main">
+  <p:cSld>
+    <p:spTree>
+      <p:nvGrpSpPr>
+        <p:cNvPr id="1" name="">
+          <a:extLst>
+            <a:ext uri="{FF2B5EF4-FFF2-40B4-BE49-F238E27FC236}">
+              <a16:creationId xmlns:a16="http://schemas.microsoft.com/office/drawing/2014/main" id="{A3780624-88CC-1F28-3EA6-BBF568054237}"/>
+            </a:ext>
+          </a:extLst>
+        </p:cNvPr>
+        <p:cNvGrpSpPr/>
+        <p:nvPr/>
+      </p:nvGrpSpPr>
+      <p:grpSpPr>
+        <a:xfrm>
+          <a:off x="0" y="0"/>
+          <a:ext cx="0" cy="0"/>
+          <a:chOff x="0" y="0"/>
+          <a:chExt cx="0" cy="0"/>
+        </a:xfrm>
+      </p:grpSpPr>
+      <p:sp>
+        <p:nvSpPr>
+          <p:cNvPr id="2" name="幻灯片图像占位符 1">
+            <a:extLst>
+              <a:ext uri="{FF2B5EF4-FFF2-40B4-BE49-F238E27FC236}">
+                <a16:creationId xmlns:a16="http://schemas.microsoft.com/office/drawing/2014/main" id="{17D9BFCF-9822-FB5B-17B4-EBD5F789862C}"/>
+              </a:ext>
+            </a:extLst>
+          </p:cNvPr>
+          <p:cNvSpPr>
+            <a:spLocks noGrp="1" noRot="1" noChangeAspect="1"/>
+          </p:cNvSpPr>
+          <p:nvPr>
+            <p:ph type="sldImg"/>
+          </p:nvPr>
+        </p:nvSpPr>
+        <p:spPr/>
+      </p:sp>
+      <p:sp>
+        <p:nvSpPr>
+          <p:cNvPr id="3" name="备注占位符 2">
+            <a:extLst>
+              <a:ext uri="{FF2B5EF4-FFF2-40B4-BE49-F238E27FC236}">
+                <a16:creationId xmlns:a16="http://schemas.microsoft.com/office/drawing/2014/main" id="{87921B3E-7334-C4A1-C580-61E6AC3AB4CC}"/>
+              </a:ext>
+            </a:extLst>
+          </p:cNvPr>
+          <p:cNvSpPr>
+            <a:spLocks noGrp="1"/>
+          </p:cNvSpPr>
+          <p:nvPr>
+            <p:ph type="body" idx="1"/>
+          </p:nvPr>
+        </p:nvSpPr>
+        <p:spPr/>
+        <p:txBody>
+          <a:bodyPr/>
+          <a:lstStyle/>
+          <a:p>
+            <a:pPr algn="l">
+              <a:spcBef>
+                <a:spcPts val="450"/>
+              </a:spcBef>
+              <a:spcAft>
+                <a:spcPts val="450"/>
+              </a:spcAft>
+            </a:pPr>
+            <a:r>
+              <a:rPr lang="en-US" altLang="zh-CN" sz="1800" b="1" i="0">
+                <a:solidFill>
+                  <a:srgbClr val="2D3B45"/>
+                </a:solidFill>
+                <a:effectLst/>
+                <a:latin typeface="Lato Extended"/>
+              </a:rPr>
+              <a:t>Introduction Slide</a:t>
+            </a:r>
+            <a:endParaRPr lang="en-US" altLang="zh-CN" sz="1800" b="0" i="0">
+              <a:solidFill>
+                <a:srgbClr val="2D3B45"/>
+              </a:solidFill>
+              <a:effectLst/>
+              <a:latin typeface="Lato Extended"/>
+            </a:endParaRPr>
+          </a:p>
+          <a:p>
+            <a:pPr algn="l">
+              <a:spcAft>
+                <a:spcPts val="450"/>
+              </a:spcAft>
+              <a:buFont typeface="Arial" panose="020B0604020202020204" pitchFamily="34" charset="0"/>
+              <a:buChar char="•"/>
+            </a:pPr>
+            <a:r>
+              <a:rPr lang="en-US" altLang="zh-CN" sz="1800" b="1" i="0">
+                <a:solidFill>
+                  <a:srgbClr val="2D3B45"/>
+                </a:solidFill>
+                <a:effectLst/>
+                <a:latin typeface="v-sans"/>
+              </a:rPr>
+              <a:t>Brief Introduction:</a:t>
+            </a:r>
+            <a:r>
+              <a:rPr lang="en-US" altLang="zh-CN" sz="1800" b="0" i="0">
+                <a:solidFill>
+                  <a:srgbClr val="2D3B45"/>
+                </a:solidFill>
+                <a:effectLst/>
+                <a:latin typeface="v-sans"/>
+              </a:rPr>
+              <a:t> of the team and the topic</a:t>
+            </a:r>
+          </a:p>
+          <a:p>
+            <a:endParaRPr lang="zh-CN" altLang="en-US"/>
+          </a:p>
+        </p:txBody>
+      </p:sp>
+      <p:sp>
+        <p:nvSpPr>
+          <p:cNvPr id="4" name="灯片编号占位符 3">
+            <a:extLst>
+              <a:ext uri="{FF2B5EF4-FFF2-40B4-BE49-F238E27FC236}">
+                <a16:creationId xmlns:a16="http://schemas.microsoft.com/office/drawing/2014/main" id="{48E609CA-1FF1-16EC-BFEC-B2D0092FC102}"/>
+              </a:ext>
+            </a:extLst>
+          </p:cNvPr>
+          <p:cNvSpPr>
+            <a:spLocks noGrp="1"/>
+          </p:cNvSpPr>
+          <p:nvPr>
+            <p:ph type="sldNum" sz="quarter" idx="5"/>
+          </p:nvPr>
+        </p:nvSpPr>
+        <p:spPr/>
+        <p:txBody>
+          <a:bodyPr/>
+          <a:lstStyle/>
+          <a:p>
+            <a:fld id="{EED2C466-1B0F-4591-A952-5F31096967DE}" type="slidenum">
+              <a:rPr lang="zh-CN" altLang="en-US" smtClean="0"/>
+              <a:t>9</a:t>
+            </a:fld>
+            <a:endParaRPr lang="zh-CN" altLang="en-US"/>
+          </a:p>
+        </p:txBody>
+      </p:sp>
+    </p:spTree>
+    <p:extLst>
+      <p:ext uri="{BB962C8B-B14F-4D97-AF65-F5344CB8AC3E}">
+        <p14:creationId xmlns:p14="http://schemas.microsoft.com/office/powerpoint/2010/main" val="3655621524"/>
       </p:ext>
     </p:extLst>
   </p:cSld>
@@ -4189,7 +4024,7 @@
           <a:p>
             <a:fld id="{A89603F3-32BE-40D2-9B36-4E0B8A351D34}" type="datetimeFigureOut">
               <a:rPr lang="zh-CN" altLang="en-US" smtClean="0"/>
-              <a:t>2026/4/29</a:t>
+              <a:t>2026/4/30</a:t>
             </a:fld>
             <a:endParaRPr lang="zh-CN" altLang="en-US"/>
           </a:p>
@@ -4388,7 +4223,7 @@
           <a:p>
             <a:fld id="{A89603F3-32BE-40D2-9B36-4E0B8A351D34}" type="datetimeFigureOut">
               <a:rPr lang="zh-CN" altLang="en-US" smtClean="0"/>
-              <a:t>2026/4/29</a:t>
+              <a:t>2026/4/30</a:t>
             </a:fld>
             <a:endParaRPr lang="zh-CN" altLang="en-US"/>
           </a:p>
@@ -4597,7 +4432,7 @@
           <a:p>
             <a:fld id="{A89603F3-32BE-40D2-9B36-4E0B8A351D34}" type="datetimeFigureOut">
               <a:rPr lang="zh-CN" altLang="en-US" smtClean="0"/>
-              <a:t>2026/4/29</a:t>
+              <a:t>2026/4/30</a:t>
             </a:fld>
             <a:endParaRPr lang="zh-CN" altLang="en-US"/>
           </a:p>
@@ -4796,7 +4631,7 @@
           <a:p>
             <a:fld id="{A89603F3-32BE-40D2-9B36-4E0B8A351D34}" type="datetimeFigureOut">
               <a:rPr lang="zh-CN" altLang="en-US" smtClean="0"/>
-              <a:t>2026/4/29</a:t>
+              <a:t>2026/4/30</a:t>
             </a:fld>
             <a:endParaRPr lang="zh-CN" altLang="en-US"/>
           </a:p>
@@ -5072,7 +4907,7 @@
           <a:p>
             <a:fld id="{A89603F3-32BE-40D2-9B36-4E0B8A351D34}" type="datetimeFigureOut">
               <a:rPr lang="zh-CN" altLang="en-US" smtClean="0"/>
-              <a:t>2026/4/29</a:t>
+              <a:t>2026/4/30</a:t>
             </a:fld>
             <a:endParaRPr lang="zh-CN" altLang="en-US"/>
           </a:p>
@@ -5338,7 +5173,7 @@
           <a:p>
             <a:fld id="{A89603F3-32BE-40D2-9B36-4E0B8A351D34}" type="datetimeFigureOut">
               <a:rPr lang="zh-CN" altLang="en-US" smtClean="0"/>
-              <a:t>2026/4/29</a:t>
+              <a:t>2026/4/30</a:t>
             </a:fld>
             <a:endParaRPr lang="zh-CN" altLang="en-US"/>
           </a:p>
@@ -5751,7 +5586,7 @@
           <a:p>
             <a:fld id="{A89603F3-32BE-40D2-9B36-4E0B8A351D34}" type="datetimeFigureOut">
               <a:rPr lang="zh-CN" altLang="en-US" smtClean="0"/>
-              <a:t>2026/4/29</a:t>
+              <a:t>2026/4/30</a:t>
             </a:fld>
             <a:endParaRPr lang="zh-CN" altLang="en-US"/>
           </a:p>
@@ -5893,7 +5728,7 @@
           <a:p>
             <a:fld id="{A89603F3-32BE-40D2-9B36-4E0B8A351D34}" type="datetimeFigureOut">
               <a:rPr lang="zh-CN" altLang="en-US" smtClean="0"/>
-              <a:t>2026/4/29</a:t>
+              <a:t>2026/4/30</a:t>
             </a:fld>
             <a:endParaRPr lang="zh-CN" altLang="en-US"/>
           </a:p>
@@ -6007,7 +5842,7 @@
           <a:p>
             <a:fld id="{A89603F3-32BE-40D2-9B36-4E0B8A351D34}" type="datetimeFigureOut">
               <a:rPr lang="zh-CN" altLang="en-US" smtClean="0"/>
-              <a:t>2026/4/29</a:t>
+              <a:t>2026/4/30</a:t>
             </a:fld>
             <a:endParaRPr lang="zh-CN" altLang="en-US"/>
           </a:p>
@@ -6319,7 +6154,7 @@
           <a:p>
             <a:fld id="{A89603F3-32BE-40D2-9B36-4E0B8A351D34}" type="datetimeFigureOut">
               <a:rPr lang="zh-CN" altLang="en-US" smtClean="0"/>
-              <a:t>2026/4/29</a:t>
+              <a:t>2026/4/30</a:t>
             </a:fld>
             <a:endParaRPr lang="zh-CN" altLang="en-US"/>
           </a:p>
@@ -6608,7 +6443,7 @@
           <a:p>
             <a:fld id="{A89603F3-32BE-40D2-9B36-4E0B8A351D34}" type="datetimeFigureOut">
               <a:rPr lang="zh-CN" altLang="en-US" smtClean="0"/>
-              <a:t>2026/4/29</a:t>
+              <a:t>2026/4/30</a:t>
             </a:fld>
             <a:endParaRPr lang="zh-CN" altLang="en-US"/>
           </a:p>
@@ -6850,7 +6685,7 @@
           <a:p>
             <a:fld id="{A89603F3-32BE-40D2-9B36-4E0B8A351D34}" type="datetimeFigureOut">
               <a:rPr lang="zh-CN" altLang="en-US" smtClean="0"/>
-              <a:t>2026/4/29</a:t>
+              <a:t>2026/4/30</a:t>
             </a:fld>
             <a:endParaRPr lang="zh-CN" altLang="en-US"/>
           </a:p>
@@ -7653,7 +7488,7 @@
         <p:cNvPr id="1" name="">
           <a:extLst>
             <a:ext uri="{FF2B5EF4-FFF2-40B4-BE49-F238E27FC236}">
-              <a16:creationId xmlns:a16="http://schemas.microsoft.com/office/drawing/2014/main" id="{F91C1AA8-633B-0E63-2970-BD86F8762D1B}"/>
+              <a16:creationId xmlns:a16="http://schemas.microsoft.com/office/drawing/2014/main" id="{0A9DCC1F-156B-E4E3-A126-1FAC4D837FC0}"/>
             </a:ext>
           </a:extLst>
         </p:cNvPr>
@@ -7673,7 +7508,7 @@
           <p:cNvPr id="3" name="图文框 2">
             <a:extLst>
               <a:ext uri="{FF2B5EF4-FFF2-40B4-BE49-F238E27FC236}">
-                <a16:creationId xmlns:a16="http://schemas.microsoft.com/office/drawing/2014/main" id="{4B77FF07-F70A-99F9-00AD-A86B7D404F83}"/>
+                <a16:creationId xmlns:a16="http://schemas.microsoft.com/office/drawing/2014/main" id="{A4C4091E-CCD6-0945-EF50-D3F8BEB8A2C3}"/>
               </a:ext>
             </a:extLst>
           </p:cNvPr>
@@ -7736,7 +7571,7 @@
           <p:cNvPr id="4" name="文本框 3">
             <a:extLst>
               <a:ext uri="{FF2B5EF4-FFF2-40B4-BE49-F238E27FC236}">
-                <a16:creationId xmlns:a16="http://schemas.microsoft.com/office/drawing/2014/main" id="{3CACD4F5-9F2B-162D-72C5-415101AEBE2F}"/>
+                <a16:creationId xmlns:a16="http://schemas.microsoft.com/office/drawing/2014/main" id="{CDA23C5F-FF08-A342-D01D-3D00A4C83290}"/>
               </a:ext>
             </a:extLst>
           </p:cNvPr>
@@ -7768,7 +7603,7 @@
                 <a:ea typeface="等线"/>
                 <a:cs typeface="+mj-lt"/>
               </a:rPr>
-              <a:t>Empathy Calibration Score (ECS)</a:t>
+              <a:t>Datasets</a:t>
             </a:r>
           </a:p>
         </p:txBody>
@@ -7778,7 +7613,7 @@
           <p:cNvPr id="9" name="半闭框 8">
             <a:extLst>
               <a:ext uri="{FF2B5EF4-FFF2-40B4-BE49-F238E27FC236}">
-                <a16:creationId xmlns:a16="http://schemas.microsoft.com/office/drawing/2014/main" id="{D0B68E8D-E966-97DF-5398-77C29D8139C3}"/>
+                <a16:creationId xmlns:a16="http://schemas.microsoft.com/office/drawing/2014/main" id="{57B828DA-13A2-CAAA-C011-5FA821ED111B}"/>
               </a:ext>
             </a:extLst>
           </p:cNvPr>
@@ -7839,7 +7674,7 @@
           <p:cNvPr id="10" name="半闭框 9">
             <a:extLst>
               <a:ext uri="{FF2B5EF4-FFF2-40B4-BE49-F238E27FC236}">
-                <a16:creationId xmlns:a16="http://schemas.microsoft.com/office/drawing/2014/main" id="{B74D2438-1FC5-C43E-152F-7C8EB19255D4}"/>
+                <a16:creationId xmlns:a16="http://schemas.microsoft.com/office/drawing/2014/main" id="{3DCE1F55-A8BD-7933-D3BC-4F4D41E6E5D8}"/>
               </a:ext>
             </a:extLst>
           </p:cNvPr>
@@ -7904,7 +7739,7 @@
           <p:cNvPr id="13" name="直接连接符 12">
             <a:extLst>
               <a:ext uri="{FF2B5EF4-FFF2-40B4-BE49-F238E27FC236}">
-                <a16:creationId xmlns:a16="http://schemas.microsoft.com/office/drawing/2014/main" id="{2EB71867-BC2D-37F6-D2FE-B19B1046FA09}"/>
+                <a16:creationId xmlns:a16="http://schemas.microsoft.com/office/drawing/2014/main" id="{0A956E9B-3F5A-7063-C090-C8C0EDCEF859}"/>
               </a:ext>
             </a:extLst>
           </p:cNvPr>
@@ -7947,7 +7782,7 @@
           <p:cNvPr id="100" name="图片 99">
             <a:extLst>
               <a:ext uri="{FF2B5EF4-FFF2-40B4-BE49-F238E27FC236}">
-                <a16:creationId xmlns:a16="http://schemas.microsoft.com/office/drawing/2014/main" id="{B9C01B72-ACDA-3241-6442-2283ED4AD889}"/>
+                <a16:creationId xmlns:a16="http://schemas.microsoft.com/office/drawing/2014/main" id="{D451128E-751E-504F-140B-D1073940021A}"/>
               </a:ext>
             </a:extLst>
           </p:cNvPr>
@@ -7979,7 +7814,7 @@
           <p:cNvPr id="5" name="文本框 4">
             <a:extLst>
               <a:ext uri="{FF2B5EF4-FFF2-40B4-BE49-F238E27FC236}">
-                <a16:creationId xmlns:a16="http://schemas.microsoft.com/office/drawing/2014/main" id="{22D702D2-7240-025C-D1AF-F04EAF2D2C46}"/>
+                <a16:creationId xmlns:a16="http://schemas.microsoft.com/office/drawing/2014/main" id="{886DC045-0072-D48D-0D23-93DAD0056235}"/>
               </a:ext>
             </a:extLst>
           </p:cNvPr>
@@ -7989,7 +7824,7 @@
         <p:spPr>
           <a:xfrm>
             <a:off x="613543" y="1741049"/>
-            <a:ext cx="10964912" cy="2062103"/>
+            <a:ext cx="10964912" cy="1154162"/>
           </a:xfrm>
           <a:prstGeom prst="rect">
             <a:avLst/>
@@ -8018,213 +7853,84 @@
                 <a:ea typeface="宋体"/>
                 <a:cs typeface="Calibri"/>
               </a:rPr>
-              <a:t>The ECS is a two-dimensional rubric designed to measure not absolute empathy, but calibration— how well a response’s empathetic register matches what the customer’s expressed frustration level warrants.</a:t>
-            </a:r>
-          </a:p>
-        </p:txBody>
-      </p:sp>
-      <p:graphicFrame>
-        <p:nvGraphicFramePr>
-          <p:cNvPr id="2" name="表格 1">
-            <a:extLst>
-              <a:ext uri="{FF2B5EF4-FFF2-40B4-BE49-F238E27FC236}">
-                <a16:creationId xmlns:a16="http://schemas.microsoft.com/office/drawing/2014/main" id="{EBEB3E93-8E77-9C44-4C4D-10AF22356183}"/>
-              </a:ext>
-            </a:extLst>
-          </p:cNvPr>
-          <p:cNvGraphicFramePr>
-            <a:graphicFrameLocks noGrp="1"/>
-          </p:cNvGraphicFramePr>
+              <a:t>Customer Support on Twitter dataset (</a:t>
+            </a:r>
+            <a:r>
+              <a:rPr lang="en-US" altLang="zh-CN" sz="3200" dirty="0" err="1">
+                <a:solidFill>
+                  <a:srgbClr val="13294B"/>
+                </a:solidFill>
+                <a:latin typeface="Calibri"/>
+                <a:ea typeface="宋体"/>
+                <a:cs typeface="Calibri"/>
+              </a:rPr>
+              <a:t>Axelbrooke</a:t>
+            </a:r>
+            <a:r>
+              <a:rPr lang="en-US" altLang="zh-CN" sz="3200" dirty="0">
+                <a:solidFill>
+                  <a:srgbClr val="13294B"/>
+                </a:solidFill>
+                <a:latin typeface="Calibri"/>
+                <a:ea typeface="宋体"/>
+                <a:cs typeface="Calibri"/>
+              </a:rPr>
+              <a:t>, 2017)</a:t>
+            </a:r>
+          </a:p>
+          <a:p>
+            <a:pPr marL="457200" indent="-457200">
+              <a:spcAft>
+                <a:spcPts val="600"/>
+              </a:spcAft>
+              <a:buFont typeface="Arial" panose="020B0604020202020204" pitchFamily="34" charset="0"/>
+              <a:buChar char="•"/>
+            </a:pPr>
+            <a:endParaRPr lang="en-US" altLang="zh-CN" sz="3200" dirty="0">
+              <a:solidFill>
+                <a:srgbClr val="13294B"/>
+              </a:solidFill>
+              <a:latin typeface="Calibri"/>
+              <a:ea typeface="宋体"/>
+              <a:cs typeface="Calibri"/>
+            </a:endParaRPr>
+          </a:p>
+        </p:txBody>
+      </p:sp>
+      <p:pic>
+        <p:nvPicPr>
+          <p:cNvPr id="6" name="图片 5">
+            <a:extLst>
+              <a:ext uri="{FF2B5EF4-FFF2-40B4-BE49-F238E27FC236}">
+                <a16:creationId xmlns:a16="http://schemas.microsoft.com/office/drawing/2014/main" id="{21E9EC38-36A8-5BD2-5491-ED2CCE6F82DA}"/>
+              </a:ext>
+            </a:extLst>
+          </p:cNvPr>
+          <p:cNvPicPr>
+            <a:picLocks noChangeAspect="1"/>
+          </p:cNvPicPr>
           <p:nvPr/>
-        </p:nvGraphicFramePr>
-        <p:xfrm>
-          <a:off x="914401" y="3803152"/>
-          <a:ext cx="10469571" cy="2533953"/>
-        </p:xfrm>
-        <a:graphic>
-          <a:graphicData uri="http://schemas.openxmlformats.org/drawingml/2006/table">
-            <a:tbl>
-              <a:tblPr firstRow="1" bandRow="1">
-                <a:tableStyleId>{21E4AEA4-8DFA-4A89-87EB-49C32662AFE0}</a:tableStyleId>
-              </a:tblPr>
-              <a:tblGrid>
-                <a:gridCol w="3489857">
-                  <a:extLst>
-                    <a:ext uri="{9D8B030D-6E8A-4147-A177-3AD203B41FA5}">
-                      <a16:colId xmlns:a16="http://schemas.microsoft.com/office/drawing/2014/main" val="2473411904"/>
-                    </a:ext>
-                  </a:extLst>
-                </a:gridCol>
-                <a:gridCol w="3489857">
-                  <a:extLst>
-                    <a:ext uri="{9D8B030D-6E8A-4147-A177-3AD203B41FA5}">
-                      <a16:colId xmlns:a16="http://schemas.microsoft.com/office/drawing/2014/main" val="1406048790"/>
-                    </a:ext>
-                  </a:extLst>
-                </a:gridCol>
-                <a:gridCol w="3489857">
-                  <a:extLst>
-                    <a:ext uri="{9D8B030D-6E8A-4147-A177-3AD203B41FA5}">
-                      <a16:colId xmlns:a16="http://schemas.microsoft.com/office/drawing/2014/main" val="3813345470"/>
-                    </a:ext>
-                  </a:extLst>
-                </a:gridCol>
-              </a:tblGrid>
-              <a:tr h="317802">
-                <a:tc>
-                  <a:txBody>
-                    <a:bodyPr/>
-                    <a:lstStyle/>
-                    <a:p>
-                      <a:r>
-                        <a:rPr lang="en-US" altLang="zh-CN" dirty="0"/>
-                        <a:t>Dimension</a:t>
-                      </a:r>
-                      <a:endParaRPr lang="zh-CN" altLang="en-US" dirty="0"/>
-                    </a:p>
-                  </a:txBody>
-                  <a:tcPr/>
-                </a:tc>
-                <a:tc>
-                  <a:txBody>
-                    <a:bodyPr/>
-                    <a:lstStyle/>
-                    <a:p>
-                      <a:r>
-                        <a:rPr lang="en-US" altLang="zh-CN" dirty="0"/>
-                        <a:t>Measurement</a:t>
-                      </a:r>
-                      <a:endParaRPr lang="zh-CN" altLang="en-US" dirty="0"/>
-                    </a:p>
-                  </a:txBody>
-                  <a:tcPr/>
-                </a:tc>
-                <a:tc>
-                  <a:txBody>
-                    <a:bodyPr/>
-                    <a:lstStyle/>
-                    <a:p>
-                      <a:r>
-                        <a:rPr lang="en-US" altLang="zh-CN" dirty="0"/>
-                        <a:t>Weight at high FIS</a:t>
-                      </a:r>
-                      <a:endParaRPr lang="zh-CN" altLang="en-US" dirty="0"/>
-                    </a:p>
-                  </a:txBody>
-                  <a:tcPr/>
-                </a:tc>
-                <a:extLst>
-                  <a:ext uri="{0D108BD9-81ED-4DB2-BD59-A6C34878D82A}">
-                    <a16:rowId xmlns:a16="http://schemas.microsoft.com/office/drawing/2014/main" val="208840510"/>
-                  </a:ext>
-                </a:extLst>
-              </a:tr>
-              <a:tr h="783620">
-                <a:tc>
-                  <a:txBody>
-                    <a:bodyPr/>
-                    <a:lstStyle/>
-                    <a:p>
-                      <a:r>
-                        <a:rPr lang="en-US" altLang="zh-CN" dirty="0"/>
-                        <a:t>Apology density</a:t>
-                      </a:r>
-                      <a:endParaRPr lang="zh-CN" altLang="en-US" dirty="0"/>
-                    </a:p>
-                  </a:txBody>
-                  <a:tcPr/>
-                </a:tc>
-                <a:tc>
-                  <a:txBody>
-                    <a:bodyPr/>
-                    <a:lstStyle/>
-                    <a:p>
-                      <a:r>
-                        <a:rPr lang="en-US" altLang="zh-CN" dirty="0"/>
-                        <a:t>Normalized count of apology/regret terms (regex). Fully auto mated.</a:t>
-                      </a:r>
-                      <a:endParaRPr lang="zh-CN" altLang="en-US" dirty="0"/>
-                    </a:p>
-                  </a:txBody>
-                  <a:tcPr/>
-                </a:tc>
-                <a:tc>
-                  <a:txBody>
-                    <a:bodyPr/>
-                    <a:lstStyle/>
-                    <a:p>
-                      <a:r>
-                        <a:rPr lang="en-US" altLang="zh-CN" dirty="0"/>
-                        <a:t>Higher weight</a:t>
-                      </a:r>
-                      <a:endParaRPr lang="zh-CN" altLang="en-US" dirty="0"/>
-                    </a:p>
-                  </a:txBody>
-                  <a:tcPr/>
-                </a:tc>
-                <a:extLst>
-                  <a:ext uri="{0D108BD9-81ED-4DB2-BD59-A6C34878D82A}">
-                    <a16:rowId xmlns:a16="http://schemas.microsoft.com/office/drawing/2014/main" val="1428517476"/>
-                  </a:ext>
-                </a:extLst>
-              </a:tr>
-              <a:tr h="1253793">
-                <a:tc>
-                  <a:txBody>
-                    <a:bodyPr/>
-                    <a:lstStyle/>
-                    <a:p>
-                      <a:r>
-                        <a:rPr lang="en-US" altLang="zh-CN" dirty="0"/>
-                        <a:t>Tone-frustration fit</a:t>
-                      </a:r>
-                      <a:endParaRPr lang="zh-CN" altLang="en-US" dirty="0"/>
-                    </a:p>
-                  </a:txBody>
-                  <a:tcPr/>
-                </a:tc>
-                <a:tc>
-                  <a:txBody>
-                    <a:bodyPr/>
-                    <a:lstStyle/>
-                    <a:p>
-                      <a:r>
-                        <a:rPr lang="en-US" altLang="zh-CN" dirty="0"/>
-                        <a:t>LLM-as-judge (GPT 4o) scores 1–5: does the response tone match the emotional register of the complaint?</a:t>
-                      </a:r>
-                      <a:endParaRPr lang="zh-CN" altLang="en-US" dirty="0"/>
-                    </a:p>
-                  </a:txBody>
-                  <a:tcPr/>
-                </a:tc>
-                <a:tc>
-                  <a:txBody>
-                    <a:bodyPr/>
-                    <a:lstStyle/>
-                    <a:p>
-                      <a:r>
-                        <a:rPr lang="en-US" altLang="zh-CN" dirty="0"/>
-                        <a:t>Equal weight</a:t>
-                      </a:r>
-                      <a:endParaRPr lang="zh-CN" altLang="en-US" dirty="0"/>
-                    </a:p>
-                  </a:txBody>
-                  <a:tcPr/>
-                </a:tc>
-                <a:extLst>
-                  <a:ext uri="{0D108BD9-81ED-4DB2-BD59-A6C34878D82A}">
-                    <a16:rowId xmlns:a16="http://schemas.microsoft.com/office/drawing/2014/main" val="1053424"/>
-                  </a:ext>
-                </a:extLst>
-              </a:tr>
-            </a:tbl>
-          </a:graphicData>
-        </a:graphic>
-      </p:graphicFrame>
+        </p:nvPicPr>
+        <p:blipFill>
+          <a:blip r:embed="rId5"/>
+          <a:stretch>
+            <a:fillRect/>
+          </a:stretch>
+        </p:blipFill>
+        <p:spPr>
+          <a:xfrm>
+            <a:off x="1248054" y="2637790"/>
+            <a:ext cx="9695892" cy="2972253"/>
+          </a:xfrm>
+          <a:prstGeom prst="rect">
+            <a:avLst/>
+          </a:prstGeom>
+        </p:spPr>
+      </p:pic>
     </p:spTree>
     <p:extLst>
       <p:ext uri="{BB962C8B-B14F-4D97-AF65-F5344CB8AC3E}">
-        <p14:creationId xmlns:p14="http://schemas.microsoft.com/office/powerpoint/2010/main" val="2004030987"/>
+        <p14:creationId xmlns:p14="http://schemas.microsoft.com/office/powerpoint/2010/main" val="2298284123"/>
       </p:ext>
     </p:extLst>
   </p:cSld>
@@ -8242,7 +7948,7 @@
         <p:cNvPr id="1" name="">
           <a:extLst>
             <a:ext uri="{FF2B5EF4-FFF2-40B4-BE49-F238E27FC236}">
-              <a16:creationId xmlns:a16="http://schemas.microsoft.com/office/drawing/2014/main" id="{0A9DCC1F-156B-E4E3-A126-1FAC4D837FC0}"/>
+              <a16:creationId xmlns:a16="http://schemas.microsoft.com/office/drawing/2014/main" id="{540518A1-EFAC-7C9D-057C-B32B36CBE32D}"/>
             </a:ext>
           </a:extLst>
         </p:cNvPr>
@@ -8262,7 +7968,7 @@
           <p:cNvPr id="3" name="图文框 2">
             <a:extLst>
               <a:ext uri="{FF2B5EF4-FFF2-40B4-BE49-F238E27FC236}">
-                <a16:creationId xmlns:a16="http://schemas.microsoft.com/office/drawing/2014/main" id="{A4C4091E-CCD6-0945-EF50-D3F8BEB8A2C3}"/>
+                <a16:creationId xmlns:a16="http://schemas.microsoft.com/office/drawing/2014/main" id="{A6E32669-E43C-81AA-4A3F-E70AE73DC568}"/>
               </a:ext>
             </a:extLst>
           </p:cNvPr>
@@ -8325,7 +8031,7 @@
           <p:cNvPr id="4" name="文本框 3">
             <a:extLst>
               <a:ext uri="{FF2B5EF4-FFF2-40B4-BE49-F238E27FC236}">
-                <a16:creationId xmlns:a16="http://schemas.microsoft.com/office/drawing/2014/main" id="{CDA23C5F-FF08-A342-D01D-3D00A4C83290}"/>
+                <a16:creationId xmlns:a16="http://schemas.microsoft.com/office/drawing/2014/main" id="{9967CEFC-D833-F21C-C860-5048BCDD3CF2}"/>
               </a:ext>
             </a:extLst>
           </p:cNvPr>
@@ -8357,7 +8063,7 @@
                 <a:ea typeface="等线"/>
                 <a:cs typeface="+mj-lt"/>
               </a:rPr>
-              <a:t>Datasets</a:t>
+              <a:t>Experiments</a:t>
             </a:r>
           </a:p>
         </p:txBody>
@@ -8367,7 +8073,7 @@
           <p:cNvPr id="9" name="半闭框 8">
             <a:extLst>
               <a:ext uri="{FF2B5EF4-FFF2-40B4-BE49-F238E27FC236}">
-                <a16:creationId xmlns:a16="http://schemas.microsoft.com/office/drawing/2014/main" id="{57B828DA-13A2-CAAA-C011-5FA821ED111B}"/>
+                <a16:creationId xmlns:a16="http://schemas.microsoft.com/office/drawing/2014/main" id="{64A9240F-1D1D-6874-7429-2808239D696F}"/>
               </a:ext>
             </a:extLst>
           </p:cNvPr>
@@ -8428,7 +8134,7 @@
           <p:cNvPr id="10" name="半闭框 9">
             <a:extLst>
               <a:ext uri="{FF2B5EF4-FFF2-40B4-BE49-F238E27FC236}">
-                <a16:creationId xmlns:a16="http://schemas.microsoft.com/office/drawing/2014/main" id="{3DCE1F55-A8BD-7933-D3BC-4F4D41E6E5D8}"/>
+                <a16:creationId xmlns:a16="http://schemas.microsoft.com/office/drawing/2014/main" id="{9576FA6A-204D-6985-EC37-276C73AFCDD3}"/>
               </a:ext>
             </a:extLst>
           </p:cNvPr>
@@ -8493,7 +8199,7 @@
           <p:cNvPr id="13" name="直接连接符 12">
             <a:extLst>
               <a:ext uri="{FF2B5EF4-FFF2-40B4-BE49-F238E27FC236}">
-                <a16:creationId xmlns:a16="http://schemas.microsoft.com/office/drawing/2014/main" id="{0A956E9B-3F5A-7063-C090-C8C0EDCEF859}"/>
+                <a16:creationId xmlns:a16="http://schemas.microsoft.com/office/drawing/2014/main" id="{31BD4A4E-80DF-0416-D31D-CC380D09CDD4}"/>
               </a:ext>
             </a:extLst>
           </p:cNvPr>
@@ -8536,7 +8242,7 @@
           <p:cNvPr id="100" name="图片 99">
             <a:extLst>
               <a:ext uri="{FF2B5EF4-FFF2-40B4-BE49-F238E27FC236}">
-                <a16:creationId xmlns:a16="http://schemas.microsoft.com/office/drawing/2014/main" id="{D451128E-751E-504F-140B-D1073940021A}"/>
+                <a16:creationId xmlns:a16="http://schemas.microsoft.com/office/drawing/2014/main" id="{935D7731-4F21-633B-F9F4-4229D89C8FA7}"/>
               </a:ext>
             </a:extLst>
           </p:cNvPr>
@@ -8568,7 +8274,7 @@
           <p:cNvPr id="5" name="文本框 4">
             <a:extLst>
               <a:ext uri="{FF2B5EF4-FFF2-40B4-BE49-F238E27FC236}">
-                <a16:creationId xmlns:a16="http://schemas.microsoft.com/office/drawing/2014/main" id="{886DC045-0072-D48D-0D23-93DAD0056235}"/>
+                <a16:creationId xmlns:a16="http://schemas.microsoft.com/office/drawing/2014/main" id="{5BF4B121-8674-D6D4-D52B-D87EBFAE8564}"/>
               </a:ext>
             </a:extLst>
           </p:cNvPr>
@@ -8578,7 +8284,7 @@
         <p:spPr>
           <a:xfrm>
             <a:off x="613543" y="1741049"/>
-            <a:ext cx="10964912" cy="1154162"/>
+            <a:ext cx="10964912" cy="3462486"/>
           </a:xfrm>
           <a:prstGeom prst="rect">
             <a:avLst/>
@@ -8607,10 +8313,19 @@
                 <a:ea typeface="宋体"/>
                 <a:cs typeface="Calibri"/>
               </a:rPr>
-              <a:t>Customer Support on Twitter dataset (</a:t>
-            </a:r>
-            <a:r>
-              <a:rPr lang="en-US" altLang="zh-CN" sz="3200" dirty="0" err="1">
+              <a:t>Evaluation Metrics:</a:t>
+            </a:r>
+          </a:p>
+          <a:p>
+            <a:pPr marL="914400" lvl="1" indent="-457200">
+              <a:spcAft>
+                <a:spcPts val="600"/>
+              </a:spcAft>
+              <a:buFont typeface="Arial" panose="020B0604020202020204" pitchFamily="34" charset="0"/>
+              <a:buChar char="•"/>
+            </a:pPr>
+            <a:r>
+              <a:rPr lang="en-US" altLang="zh-CN" sz="2000" dirty="0">
                 <a:solidFill>
                   <a:srgbClr val="13294B"/>
                 </a:solidFill>
@@ -8618,18 +8333,7 @@
                 <a:ea typeface="宋体"/>
                 <a:cs typeface="Calibri"/>
               </a:rPr>
-              <a:t>Axelbrooke</a:t>
-            </a:r>
-            <a:r>
-              <a:rPr lang="en-US" altLang="zh-CN" sz="3200" dirty="0">
-                <a:solidFill>
-                  <a:srgbClr val="13294B"/>
-                </a:solidFill>
-                <a:latin typeface="Calibri"/>
-                <a:ea typeface="宋体"/>
-                <a:cs typeface="Calibri"/>
-              </a:rPr>
-              <a:t>, 2017)</a:t>
+              <a:t>The primary outcome is the calibration delta ∆ = ECS(LLM)−ECS(human), computed per instance and aggregated per model and domain. We also report apology density independently as a fully model-agnostic signal.</a:t>
             </a:r>
           </a:p>
           <a:p>
@@ -8640,51 +8344,44 @@
               <a:buFont typeface="Arial" panose="020B0604020202020204" pitchFamily="34" charset="0"/>
               <a:buChar char="•"/>
             </a:pPr>
-            <a:endParaRPr lang="en-US" altLang="zh-CN" sz="3200" dirty="0">
-              <a:solidFill>
-                <a:srgbClr val="13294B"/>
-              </a:solidFill>
-              <a:latin typeface="Calibri"/>
-              <a:ea typeface="宋体"/>
-              <a:cs typeface="Calibri"/>
-            </a:endParaRPr>
-          </a:p>
-        </p:txBody>
-      </p:sp>
-      <p:pic>
-        <p:nvPicPr>
-          <p:cNvPr id="6" name="图片 5">
-            <a:extLst>
-              <a:ext uri="{FF2B5EF4-FFF2-40B4-BE49-F238E27FC236}">
-                <a16:creationId xmlns:a16="http://schemas.microsoft.com/office/drawing/2014/main" id="{21E9EC38-36A8-5BD2-5491-ED2CCE6F82DA}"/>
-              </a:ext>
-            </a:extLst>
-          </p:cNvPr>
-          <p:cNvPicPr>
-            <a:picLocks noChangeAspect="1"/>
-          </p:cNvPicPr>
-          <p:nvPr/>
-        </p:nvPicPr>
-        <p:blipFill>
-          <a:blip r:embed="rId5"/>
-          <a:stretch>
-            <a:fillRect/>
-          </a:stretch>
-        </p:blipFill>
-        <p:spPr>
-          <a:xfrm>
-            <a:off x="1248054" y="2637790"/>
-            <a:ext cx="9695892" cy="2972253"/>
-          </a:xfrm>
-          <a:prstGeom prst="rect">
-            <a:avLst/>
-          </a:prstGeom>
-        </p:spPr>
-      </p:pic>
+            <a:r>
+              <a:rPr lang="en-US" altLang="zh-CN" sz="3200" dirty="0">
+                <a:solidFill>
+                  <a:srgbClr val="13294B"/>
+                </a:solidFill>
+                <a:latin typeface="Calibri"/>
+                <a:ea typeface="宋体"/>
+                <a:cs typeface="Calibri"/>
+              </a:rPr>
+              <a:t>Baselines:</a:t>
+            </a:r>
+          </a:p>
+          <a:p>
+            <a:pPr marL="914400" lvl="1" indent="-457200">
+              <a:spcAft>
+                <a:spcPts val="600"/>
+              </a:spcAft>
+              <a:buFont typeface="Arial" panose="020B0604020202020204" pitchFamily="34" charset="0"/>
+              <a:buChar char="•"/>
+            </a:pPr>
+            <a:r>
+              <a:rPr lang="en-US" altLang="zh-CN" sz="2000" dirty="0">
+                <a:solidFill>
+                  <a:srgbClr val="13294B"/>
+                </a:solidFill>
+                <a:latin typeface="Calibri"/>
+                <a:ea typeface="宋体"/>
+                <a:cs typeface="Calibri"/>
+              </a:rPr>
+              <a:t>We evaluate three frontier models as candidate systems: GPT-4o, Claude 3.5 Sonnet, and Gemini 1.5 Flash. All three are evaluated under the same minimal neutral prompt with no persona or tone instruction. The human agent responses from the Twitter dataset serve as the behavioral ground truth baseline.</a:t>
+            </a:r>
+          </a:p>
+        </p:txBody>
+      </p:sp>
     </p:spTree>
     <p:extLst>
       <p:ext uri="{BB962C8B-B14F-4D97-AF65-F5344CB8AC3E}">
-        <p14:creationId xmlns:p14="http://schemas.microsoft.com/office/powerpoint/2010/main" val="2298284123"/>
+        <p14:creationId xmlns:p14="http://schemas.microsoft.com/office/powerpoint/2010/main" val="648843724"/>
       </p:ext>
     </p:extLst>
   </p:cSld>
@@ -8702,7 +8399,7 @@
         <p:cNvPr id="1" name="">
           <a:extLst>
             <a:ext uri="{FF2B5EF4-FFF2-40B4-BE49-F238E27FC236}">
-              <a16:creationId xmlns:a16="http://schemas.microsoft.com/office/drawing/2014/main" id="{540518A1-EFAC-7C9D-057C-B32B36CBE32D}"/>
+              <a16:creationId xmlns:a16="http://schemas.microsoft.com/office/drawing/2014/main" id="{C315096F-3A92-E9AB-D4DC-68371996E91E}"/>
             </a:ext>
           </a:extLst>
         </p:cNvPr>
@@ -8722,7 +8419,7 @@
           <p:cNvPr id="3" name="图文框 2">
             <a:extLst>
               <a:ext uri="{FF2B5EF4-FFF2-40B4-BE49-F238E27FC236}">
-                <a16:creationId xmlns:a16="http://schemas.microsoft.com/office/drawing/2014/main" id="{A6E32669-E43C-81AA-4A3F-E70AE73DC568}"/>
+                <a16:creationId xmlns:a16="http://schemas.microsoft.com/office/drawing/2014/main" id="{38E4C8C1-0439-8CF3-1D3C-B869BFA310EB}"/>
               </a:ext>
             </a:extLst>
           </p:cNvPr>
@@ -8785,7 +8482,7 @@
           <p:cNvPr id="4" name="文本框 3">
             <a:extLst>
               <a:ext uri="{FF2B5EF4-FFF2-40B4-BE49-F238E27FC236}">
-                <a16:creationId xmlns:a16="http://schemas.microsoft.com/office/drawing/2014/main" id="{9967CEFC-D833-F21C-C860-5048BCDD3CF2}"/>
+                <a16:creationId xmlns:a16="http://schemas.microsoft.com/office/drawing/2014/main" id="{8321A214-2494-84E4-799C-D08B7F8DC0FB}"/>
               </a:ext>
             </a:extLst>
           </p:cNvPr>
@@ -8827,7 +8524,7 @@
           <p:cNvPr id="9" name="半闭框 8">
             <a:extLst>
               <a:ext uri="{FF2B5EF4-FFF2-40B4-BE49-F238E27FC236}">
-                <a16:creationId xmlns:a16="http://schemas.microsoft.com/office/drawing/2014/main" id="{64A9240F-1D1D-6874-7429-2808239D696F}"/>
+                <a16:creationId xmlns:a16="http://schemas.microsoft.com/office/drawing/2014/main" id="{315BCC47-11C5-9C98-E7ED-6FF7A3083D52}"/>
               </a:ext>
             </a:extLst>
           </p:cNvPr>
@@ -8888,7 +8585,7 @@
           <p:cNvPr id="10" name="半闭框 9">
             <a:extLst>
               <a:ext uri="{FF2B5EF4-FFF2-40B4-BE49-F238E27FC236}">
-                <a16:creationId xmlns:a16="http://schemas.microsoft.com/office/drawing/2014/main" id="{9576FA6A-204D-6985-EC37-276C73AFCDD3}"/>
+                <a16:creationId xmlns:a16="http://schemas.microsoft.com/office/drawing/2014/main" id="{C336E2CE-A10F-E135-D5DE-85CAC09B26BF}"/>
               </a:ext>
             </a:extLst>
           </p:cNvPr>
@@ -8953,7 +8650,7 @@
           <p:cNvPr id="13" name="直接连接符 12">
             <a:extLst>
               <a:ext uri="{FF2B5EF4-FFF2-40B4-BE49-F238E27FC236}">
-                <a16:creationId xmlns:a16="http://schemas.microsoft.com/office/drawing/2014/main" id="{31BD4A4E-80DF-0416-D31D-CC380D09CDD4}"/>
+                <a16:creationId xmlns:a16="http://schemas.microsoft.com/office/drawing/2014/main" id="{D16DD379-F2CD-5040-8929-0BDEFC38FDEE}"/>
               </a:ext>
             </a:extLst>
           </p:cNvPr>
@@ -8996,7 +8693,7 @@
           <p:cNvPr id="100" name="图片 99">
             <a:extLst>
               <a:ext uri="{FF2B5EF4-FFF2-40B4-BE49-F238E27FC236}">
-                <a16:creationId xmlns:a16="http://schemas.microsoft.com/office/drawing/2014/main" id="{935D7731-4F21-633B-F9F4-4229D89C8FA7}"/>
+                <a16:creationId xmlns:a16="http://schemas.microsoft.com/office/drawing/2014/main" id="{0C605A51-1FDC-6F17-F18F-56BE131BF26E}"/>
               </a:ext>
             </a:extLst>
           </p:cNvPr>
@@ -9028,7 +8725,7 @@
           <p:cNvPr id="5" name="文本框 4">
             <a:extLst>
               <a:ext uri="{FF2B5EF4-FFF2-40B4-BE49-F238E27FC236}">
-                <a16:creationId xmlns:a16="http://schemas.microsoft.com/office/drawing/2014/main" id="{5BF4B121-8674-D6D4-D52B-D87EBFAE8564}"/>
+                <a16:creationId xmlns:a16="http://schemas.microsoft.com/office/drawing/2014/main" id="{4A026E4D-2F9F-7E3C-EABE-E1351AA45336}"/>
               </a:ext>
             </a:extLst>
           </p:cNvPr>
@@ -9038,7 +8735,7 @@
         <p:spPr>
           <a:xfrm>
             <a:off x="613543" y="1741049"/>
-            <a:ext cx="10964912" cy="3462486"/>
+            <a:ext cx="10964912" cy="584775"/>
           </a:xfrm>
           <a:prstGeom prst="rect">
             <a:avLst/>
@@ -9067,75 +8764,23 @@
                 <a:ea typeface="宋体"/>
                 <a:cs typeface="Calibri"/>
               </a:rPr>
-              <a:t>Evaluation Metrics:</a:t>
-            </a:r>
-          </a:p>
-          <a:p>
-            <a:pPr marL="914400" lvl="1" indent="-457200">
-              <a:spcAft>
-                <a:spcPts val="600"/>
-              </a:spcAft>
-              <a:buFont typeface="Arial" panose="020B0604020202020204" pitchFamily="34" charset="0"/>
-              <a:buChar char="•"/>
-            </a:pPr>
-            <a:r>
-              <a:rPr lang="en-US" altLang="zh-CN" sz="2000" dirty="0">
-                <a:solidFill>
-                  <a:srgbClr val="13294B"/>
-                </a:solidFill>
-                <a:latin typeface="Calibri"/>
-                <a:ea typeface="宋体"/>
-                <a:cs typeface="Calibri"/>
-              </a:rPr>
-              <a:t>The primary outcome is the calibration delta ∆ = ECS(LLM)−ECS(human), computed per instance and aggregated per model and domain. We also report apology density independently as a fully model-agnostic signal.</a:t>
-            </a:r>
-          </a:p>
-          <a:p>
-            <a:pPr marL="457200" indent="-457200">
-              <a:spcAft>
-                <a:spcPts val="600"/>
-              </a:spcAft>
-              <a:buFont typeface="Arial" panose="020B0604020202020204" pitchFamily="34" charset="0"/>
-              <a:buChar char="•"/>
-            </a:pPr>
-            <a:r>
-              <a:rPr lang="en-US" altLang="zh-CN" sz="3200" dirty="0">
-                <a:solidFill>
-                  <a:srgbClr val="13294B"/>
-                </a:solidFill>
-                <a:latin typeface="Calibri"/>
-                <a:ea typeface="宋体"/>
-                <a:cs typeface="Calibri"/>
-              </a:rPr>
-              <a:t>Baselines:</a:t>
-            </a:r>
-          </a:p>
-          <a:p>
-            <a:pPr marL="914400" lvl="1" indent="-457200">
-              <a:spcAft>
-                <a:spcPts val="600"/>
-              </a:spcAft>
-              <a:buFont typeface="Arial" panose="020B0604020202020204" pitchFamily="34" charset="0"/>
-              <a:buChar char="•"/>
-            </a:pPr>
-            <a:r>
-              <a:rPr lang="en-US" altLang="zh-CN" sz="2000" dirty="0">
-                <a:solidFill>
-                  <a:srgbClr val="13294B"/>
-                </a:solidFill>
-                <a:latin typeface="Calibri"/>
-                <a:ea typeface="宋体"/>
-                <a:cs typeface="Calibri"/>
-              </a:rPr>
-              <a:t>We evaluate three frontier models as candidate systems: GPT-4o, Claude 3.5 Sonnet, and Gemini 1.5 Flash. All three are evaluated under the same minimal neutral prompt with no persona or tone instruction. The human agent responses from the Twitter dataset serve as the behavioral ground truth baseline.</a:t>
-            </a:r>
+              <a:t>Results:</a:t>
+            </a:r>
+            <a:endParaRPr lang="en-US" altLang="zh-CN" sz="2000" dirty="0">
+              <a:solidFill>
+                <a:srgbClr val="13294B"/>
+              </a:solidFill>
+              <a:latin typeface="Calibri"/>
+              <a:ea typeface="宋体"/>
+              <a:cs typeface="Calibri"/>
+            </a:endParaRPr>
           </a:p>
         </p:txBody>
       </p:sp>
     </p:spTree>
     <p:extLst>
       <p:ext uri="{BB962C8B-B14F-4D97-AF65-F5344CB8AC3E}">
-        <p14:creationId xmlns:p14="http://schemas.microsoft.com/office/powerpoint/2010/main" val="648843724"/>
+        <p14:creationId xmlns:p14="http://schemas.microsoft.com/office/powerpoint/2010/main" val="818796419"/>
       </p:ext>
     </p:extLst>
   </p:cSld>
@@ -9153,7 +8798,7 @@
         <p:cNvPr id="1" name="">
           <a:extLst>
             <a:ext uri="{FF2B5EF4-FFF2-40B4-BE49-F238E27FC236}">
-              <a16:creationId xmlns:a16="http://schemas.microsoft.com/office/drawing/2014/main" id="{C315096F-3A92-E9AB-D4DC-68371996E91E}"/>
+              <a16:creationId xmlns:a16="http://schemas.microsoft.com/office/drawing/2014/main" id="{E7A27B3F-C0CE-A9E4-1359-4A4A0BE2AFC3}"/>
             </a:ext>
           </a:extLst>
         </p:cNvPr>
@@ -9173,7 +8818,7 @@
           <p:cNvPr id="3" name="图文框 2">
             <a:extLst>
               <a:ext uri="{FF2B5EF4-FFF2-40B4-BE49-F238E27FC236}">
-                <a16:creationId xmlns:a16="http://schemas.microsoft.com/office/drawing/2014/main" id="{38E4C8C1-0439-8CF3-1D3C-B869BFA310EB}"/>
+                <a16:creationId xmlns:a16="http://schemas.microsoft.com/office/drawing/2014/main" id="{8131D144-1C33-0B46-47AE-EF50F1FFB937}"/>
               </a:ext>
             </a:extLst>
           </p:cNvPr>
@@ -9236,7 +8881,7 @@
           <p:cNvPr id="4" name="文本框 3">
             <a:extLst>
               <a:ext uri="{FF2B5EF4-FFF2-40B4-BE49-F238E27FC236}">
-                <a16:creationId xmlns:a16="http://schemas.microsoft.com/office/drawing/2014/main" id="{8321A214-2494-84E4-799C-D08B7F8DC0FB}"/>
+                <a16:creationId xmlns:a16="http://schemas.microsoft.com/office/drawing/2014/main" id="{ADE65386-35E8-BF11-F93A-219CCB3C9886}"/>
               </a:ext>
             </a:extLst>
           </p:cNvPr>
@@ -9268,7 +8913,7 @@
                 <a:ea typeface="等线"/>
                 <a:cs typeface="+mj-lt"/>
               </a:rPr>
-              <a:t>Experiments</a:t>
+              <a:t>Conclusion &amp; Limitation</a:t>
             </a:r>
           </a:p>
         </p:txBody>
@@ -9278,7 +8923,7 @@
           <p:cNvPr id="9" name="半闭框 8">
             <a:extLst>
               <a:ext uri="{FF2B5EF4-FFF2-40B4-BE49-F238E27FC236}">
-                <a16:creationId xmlns:a16="http://schemas.microsoft.com/office/drawing/2014/main" id="{315BCC47-11C5-9C98-E7ED-6FF7A3083D52}"/>
+                <a16:creationId xmlns:a16="http://schemas.microsoft.com/office/drawing/2014/main" id="{FDD4F1B0-E911-555A-86C0-A48E753525CD}"/>
               </a:ext>
             </a:extLst>
           </p:cNvPr>
@@ -9339,7 +8984,7 @@
           <p:cNvPr id="10" name="半闭框 9">
             <a:extLst>
               <a:ext uri="{FF2B5EF4-FFF2-40B4-BE49-F238E27FC236}">
-                <a16:creationId xmlns:a16="http://schemas.microsoft.com/office/drawing/2014/main" id="{C336E2CE-A10F-E135-D5DE-85CAC09B26BF}"/>
+                <a16:creationId xmlns:a16="http://schemas.microsoft.com/office/drawing/2014/main" id="{C169AE3C-9591-D19E-1694-127228FA4A4A}"/>
               </a:ext>
             </a:extLst>
           </p:cNvPr>
@@ -9404,7 +9049,7 @@
           <p:cNvPr id="13" name="直接连接符 12">
             <a:extLst>
               <a:ext uri="{FF2B5EF4-FFF2-40B4-BE49-F238E27FC236}">
-                <a16:creationId xmlns:a16="http://schemas.microsoft.com/office/drawing/2014/main" id="{D16DD379-F2CD-5040-8929-0BDEFC38FDEE}"/>
+                <a16:creationId xmlns:a16="http://schemas.microsoft.com/office/drawing/2014/main" id="{C43D726A-5493-F579-0CA0-10B9C9CA6E98}"/>
               </a:ext>
             </a:extLst>
           </p:cNvPr>
@@ -9447,7 +9092,7 @@
           <p:cNvPr id="100" name="图片 99">
             <a:extLst>
               <a:ext uri="{FF2B5EF4-FFF2-40B4-BE49-F238E27FC236}">
-                <a16:creationId xmlns:a16="http://schemas.microsoft.com/office/drawing/2014/main" id="{0C605A51-1FDC-6F17-F18F-56BE131BF26E}"/>
+                <a16:creationId xmlns:a16="http://schemas.microsoft.com/office/drawing/2014/main" id="{F73F639D-26B1-9CD6-7383-43CB03DB13CF}"/>
               </a:ext>
             </a:extLst>
           </p:cNvPr>
@@ -9479,7 +9124,7 @@
           <p:cNvPr id="5" name="文本框 4">
             <a:extLst>
               <a:ext uri="{FF2B5EF4-FFF2-40B4-BE49-F238E27FC236}">
-                <a16:creationId xmlns:a16="http://schemas.microsoft.com/office/drawing/2014/main" id="{4A026E4D-2F9F-7E3C-EABE-E1351AA45336}"/>
+                <a16:creationId xmlns:a16="http://schemas.microsoft.com/office/drawing/2014/main" id="{25D8EBBB-7D89-A5FE-3A8C-9E9CFB312697}"/>
               </a:ext>
             </a:extLst>
           </p:cNvPr>
@@ -9489,7 +9134,7 @@
         <p:spPr>
           <a:xfrm>
             <a:off x="613543" y="1741049"/>
-            <a:ext cx="10964912" cy="584775"/>
+            <a:ext cx="10964912" cy="4001095"/>
           </a:xfrm>
           <a:prstGeom prst="rect">
             <a:avLst/>
@@ -9510,7 +9155,7 @@
               <a:buChar char="•"/>
             </a:pPr>
             <a:r>
-              <a:rPr lang="en-US" altLang="zh-CN" sz="3200" dirty="0">
+              <a:rPr lang="en-US" altLang="zh-CN" sz="3200" b="1" dirty="0">
                 <a:solidFill>
                   <a:srgbClr val="13294B"/>
                 </a:solidFill>
@@ -9518,9 +9163,78 @@
                 <a:ea typeface="宋体"/>
                 <a:cs typeface="Calibri"/>
               </a:rPr>
-              <a:t>Results:</a:t>
-            </a:r>
-            <a:endParaRPr lang="en-US" altLang="zh-CN" sz="2000" dirty="0">
+              <a:t>Conclusion 1:</a:t>
+            </a:r>
+          </a:p>
+          <a:p>
+            <a:pPr marL="914400" lvl="1" indent="-457200">
+              <a:spcAft>
+                <a:spcPts val="600"/>
+              </a:spcAft>
+              <a:buFont typeface="Arial" panose="020B0604020202020204" pitchFamily="34" charset="0"/>
+              <a:buChar char="•"/>
+            </a:pPr>
+            <a:r>
+              <a:rPr lang="en-US" altLang="zh-CN" sz="3200" dirty="0">
+                <a:solidFill>
+                  <a:srgbClr val="13294B"/>
+                </a:solidFill>
+                <a:latin typeface="Calibri"/>
+                <a:ea typeface="宋体"/>
+                <a:cs typeface="Calibri"/>
+              </a:rPr>
+              <a:t>11112222</a:t>
+            </a:r>
+          </a:p>
+          <a:p>
+            <a:pPr marL="457200" indent="-457200">
+              <a:spcAft>
+                <a:spcPts val="600"/>
+              </a:spcAft>
+              <a:buFont typeface="Arial" panose="020B0604020202020204" pitchFamily="34" charset="0"/>
+              <a:buChar char="•"/>
+            </a:pPr>
+            <a:r>
+              <a:rPr lang="en-US" altLang="zh-CN" sz="3200" b="1" dirty="0">
+                <a:solidFill>
+                  <a:srgbClr val="13294B"/>
+                </a:solidFill>
+                <a:latin typeface="Calibri"/>
+                <a:ea typeface="宋体"/>
+                <a:cs typeface="Calibri"/>
+              </a:rPr>
+              <a:t>Conclusion 2:</a:t>
+            </a:r>
+          </a:p>
+          <a:p>
+            <a:pPr marL="914400" lvl="1" indent="-457200">
+              <a:spcAft>
+                <a:spcPts val="600"/>
+              </a:spcAft>
+              <a:buFont typeface="Arial" panose="020B0604020202020204" pitchFamily="34" charset="0"/>
+              <a:buChar char="•"/>
+            </a:pPr>
+            <a:r>
+              <a:rPr lang="en-US" altLang="zh-CN" sz="3200" dirty="0">
+                <a:solidFill>
+                  <a:srgbClr val="13294B"/>
+                </a:solidFill>
+                <a:latin typeface="Calibri"/>
+                <a:ea typeface="宋体"/>
+                <a:cs typeface="Calibri"/>
+              </a:rPr>
+              <a:t>22223333</a:t>
+            </a:r>
+          </a:p>
+          <a:p>
+            <a:pPr marL="457200" indent="-457200">
+              <a:spcAft>
+                <a:spcPts val="600"/>
+              </a:spcAft>
+              <a:buFont typeface="Arial" panose="020B0604020202020204" pitchFamily="34" charset="0"/>
+              <a:buChar char="•"/>
+            </a:pPr>
+            <a:endParaRPr lang="en-US" altLang="zh-CN" sz="3200" b="1" dirty="0">
               <a:solidFill>
                 <a:srgbClr val="13294B"/>
               </a:solidFill>
@@ -9529,12 +9243,47 @@
               <a:cs typeface="Calibri"/>
             </a:endParaRPr>
           </a:p>
+          <a:p>
+            <a:pPr marL="457200" indent="-457200">
+              <a:spcAft>
+                <a:spcPts val="600"/>
+              </a:spcAft>
+              <a:buFont typeface="Arial" panose="020B0604020202020204" pitchFamily="34" charset="0"/>
+              <a:buChar char="•"/>
+            </a:pPr>
+            <a:endParaRPr lang="en-US" altLang="zh-CN" sz="3200" b="1" dirty="0">
+              <a:solidFill>
+                <a:srgbClr val="13294B"/>
+              </a:solidFill>
+              <a:latin typeface="Calibri"/>
+              <a:ea typeface="宋体"/>
+              <a:cs typeface="Calibri"/>
+            </a:endParaRPr>
+          </a:p>
+          <a:p>
+            <a:pPr>
+              <a:spcAft>
+                <a:spcPts val="600"/>
+              </a:spcAft>
+            </a:pPr>
+            <a:r>
+              <a:rPr lang="en-US" altLang="zh-CN" sz="3200" b="1" dirty="0">
+                <a:solidFill>
+                  <a:srgbClr val="13294B"/>
+                </a:solidFill>
+                <a:latin typeface="Calibri"/>
+                <a:ea typeface="宋体"/>
+                <a:cs typeface="Calibri"/>
+              </a:rPr>
+              <a:t> </a:t>
+            </a:r>
+          </a:p>
         </p:txBody>
       </p:sp>
     </p:spTree>
     <p:extLst>
       <p:ext uri="{BB962C8B-B14F-4D97-AF65-F5344CB8AC3E}">
-        <p14:creationId xmlns:p14="http://schemas.microsoft.com/office/powerpoint/2010/main" val="818796419"/>
+        <p14:creationId xmlns:p14="http://schemas.microsoft.com/office/powerpoint/2010/main" val="3520523714"/>
       </p:ext>
     </p:extLst>
   </p:cSld>
@@ -9552,7 +9301,7 @@
         <p:cNvPr id="1" name="">
           <a:extLst>
             <a:ext uri="{FF2B5EF4-FFF2-40B4-BE49-F238E27FC236}">
-              <a16:creationId xmlns:a16="http://schemas.microsoft.com/office/drawing/2014/main" id="{E7A27B3F-C0CE-A9E4-1359-4A4A0BE2AFC3}"/>
+              <a16:creationId xmlns:a16="http://schemas.microsoft.com/office/drawing/2014/main" id="{F0992A2E-AFD7-9943-2519-30DF0B2846D5}"/>
             </a:ext>
           </a:extLst>
         </p:cNvPr>
@@ -9572,7 +9321,7 @@
           <p:cNvPr id="3" name="图文框 2">
             <a:extLst>
               <a:ext uri="{FF2B5EF4-FFF2-40B4-BE49-F238E27FC236}">
-                <a16:creationId xmlns:a16="http://schemas.microsoft.com/office/drawing/2014/main" id="{8131D144-1C33-0B46-47AE-EF50F1FFB937}"/>
+                <a16:creationId xmlns:a16="http://schemas.microsoft.com/office/drawing/2014/main" id="{2496E383-A7BE-C8AE-CAC4-8F5A48022BA5}"/>
               </a:ext>
             </a:extLst>
           </p:cNvPr>
@@ -9635,7 +9384,7 @@
           <p:cNvPr id="4" name="文本框 3">
             <a:extLst>
               <a:ext uri="{FF2B5EF4-FFF2-40B4-BE49-F238E27FC236}">
-                <a16:creationId xmlns:a16="http://schemas.microsoft.com/office/drawing/2014/main" id="{ADE65386-35E8-BF11-F93A-219CCB3C9886}"/>
+                <a16:creationId xmlns:a16="http://schemas.microsoft.com/office/drawing/2014/main" id="{A9FB4F93-AF84-404A-0BBB-4422EC37B4FC}"/>
               </a:ext>
             </a:extLst>
           </p:cNvPr>
@@ -9667,7 +9416,7 @@
                 <a:ea typeface="等线"/>
                 <a:cs typeface="+mj-lt"/>
               </a:rPr>
-              <a:t>Conclusion &amp; Limitation</a:t>
+              <a:t>Future Works</a:t>
             </a:r>
           </a:p>
         </p:txBody>
@@ -9677,7 +9426,7 @@
           <p:cNvPr id="9" name="半闭框 8">
             <a:extLst>
               <a:ext uri="{FF2B5EF4-FFF2-40B4-BE49-F238E27FC236}">
-                <a16:creationId xmlns:a16="http://schemas.microsoft.com/office/drawing/2014/main" id="{FDD4F1B0-E911-555A-86C0-A48E753525CD}"/>
+                <a16:creationId xmlns:a16="http://schemas.microsoft.com/office/drawing/2014/main" id="{3FF36AB2-62E7-1DE0-937F-961918895C1B}"/>
               </a:ext>
             </a:extLst>
           </p:cNvPr>
@@ -9738,7 +9487,7 @@
           <p:cNvPr id="10" name="半闭框 9">
             <a:extLst>
               <a:ext uri="{FF2B5EF4-FFF2-40B4-BE49-F238E27FC236}">
-                <a16:creationId xmlns:a16="http://schemas.microsoft.com/office/drawing/2014/main" id="{C169AE3C-9591-D19E-1694-127228FA4A4A}"/>
+                <a16:creationId xmlns:a16="http://schemas.microsoft.com/office/drawing/2014/main" id="{619808A8-0E2B-499B-9C3E-6AFFF5F65A3F}"/>
               </a:ext>
             </a:extLst>
           </p:cNvPr>
@@ -9803,7 +9552,7 @@
           <p:cNvPr id="13" name="直接连接符 12">
             <a:extLst>
               <a:ext uri="{FF2B5EF4-FFF2-40B4-BE49-F238E27FC236}">
-                <a16:creationId xmlns:a16="http://schemas.microsoft.com/office/drawing/2014/main" id="{C43D726A-5493-F579-0CA0-10B9C9CA6E98}"/>
+                <a16:creationId xmlns:a16="http://schemas.microsoft.com/office/drawing/2014/main" id="{2782AA16-8086-7957-4CEE-D968A6DB722F}"/>
               </a:ext>
             </a:extLst>
           </p:cNvPr>
@@ -9846,7 +9595,7 @@
           <p:cNvPr id="100" name="图片 99">
             <a:extLst>
               <a:ext uri="{FF2B5EF4-FFF2-40B4-BE49-F238E27FC236}">
-                <a16:creationId xmlns:a16="http://schemas.microsoft.com/office/drawing/2014/main" id="{F73F639D-26B1-9CD6-7383-43CB03DB13CF}"/>
+                <a16:creationId xmlns:a16="http://schemas.microsoft.com/office/drawing/2014/main" id="{F71171B4-C3D9-CF5C-7B4B-56EFAAF3183B}"/>
               </a:ext>
             </a:extLst>
           </p:cNvPr>
@@ -9878,7 +9627,7 @@
           <p:cNvPr id="5" name="文本框 4">
             <a:extLst>
               <a:ext uri="{FF2B5EF4-FFF2-40B4-BE49-F238E27FC236}">
-                <a16:creationId xmlns:a16="http://schemas.microsoft.com/office/drawing/2014/main" id="{25D8EBBB-7D89-A5FE-3A8C-9E9CFB312697}"/>
+                <a16:creationId xmlns:a16="http://schemas.microsoft.com/office/drawing/2014/main" id="{66732831-3A48-AA96-5C7E-EF953BA75DE0}"/>
               </a:ext>
             </a:extLst>
           </p:cNvPr>
@@ -10037,7 +9786,7 @@
     </p:spTree>
     <p:extLst>
       <p:ext uri="{BB962C8B-B14F-4D97-AF65-F5344CB8AC3E}">
-        <p14:creationId xmlns:p14="http://schemas.microsoft.com/office/powerpoint/2010/main" val="3520523714"/>
+        <p14:creationId xmlns:p14="http://schemas.microsoft.com/office/powerpoint/2010/main" val="1859779982"/>
       </p:ext>
     </p:extLst>
   </p:cSld>
@@ -10055,7 +9804,7 @@
         <p:cNvPr id="1" name="">
           <a:extLst>
             <a:ext uri="{FF2B5EF4-FFF2-40B4-BE49-F238E27FC236}">
-              <a16:creationId xmlns:a16="http://schemas.microsoft.com/office/drawing/2014/main" id="{F0992A2E-AFD7-9943-2519-30DF0B2846D5}"/>
+              <a16:creationId xmlns:a16="http://schemas.microsoft.com/office/drawing/2014/main" id="{132D79BF-ED01-067B-10A9-828B61A9DE19}"/>
             </a:ext>
           </a:extLst>
         </p:cNvPr>
@@ -10075,7 +9824,7 @@
           <p:cNvPr id="3" name="图文框 2">
             <a:extLst>
               <a:ext uri="{FF2B5EF4-FFF2-40B4-BE49-F238E27FC236}">
-                <a16:creationId xmlns:a16="http://schemas.microsoft.com/office/drawing/2014/main" id="{2496E383-A7BE-C8AE-CAC4-8F5A48022BA5}"/>
+                <a16:creationId xmlns:a16="http://schemas.microsoft.com/office/drawing/2014/main" id="{F361CDB9-483A-E9B1-5401-DB5169718418}"/>
               </a:ext>
             </a:extLst>
           </p:cNvPr>
@@ -10138,7 +9887,7 @@
           <p:cNvPr id="4" name="文本框 3">
             <a:extLst>
               <a:ext uri="{FF2B5EF4-FFF2-40B4-BE49-F238E27FC236}">
-                <a16:creationId xmlns:a16="http://schemas.microsoft.com/office/drawing/2014/main" id="{A9FB4F93-AF84-404A-0BBB-4422EC37B4FC}"/>
+                <a16:creationId xmlns:a16="http://schemas.microsoft.com/office/drawing/2014/main" id="{0EC7D77F-C731-B08D-E3AF-24869C9E7DD8}"/>
               </a:ext>
             </a:extLst>
           </p:cNvPr>
@@ -10170,7 +9919,7 @@
                 <a:ea typeface="等线"/>
                 <a:cs typeface="+mj-lt"/>
               </a:rPr>
-              <a:t>Future Works</a:t>
+              <a:t>References</a:t>
             </a:r>
           </a:p>
         </p:txBody>
@@ -10180,7 +9929,7 @@
           <p:cNvPr id="9" name="半闭框 8">
             <a:extLst>
               <a:ext uri="{FF2B5EF4-FFF2-40B4-BE49-F238E27FC236}">
-                <a16:creationId xmlns:a16="http://schemas.microsoft.com/office/drawing/2014/main" id="{3FF36AB2-62E7-1DE0-937F-961918895C1B}"/>
+                <a16:creationId xmlns:a16="http://schemas.microsoft.com/office/drawing/2014/main" id="{26ED32FE-E210-F419-3665-A72391890294}"/>
               </a:ext>
             </a:extLst>
           </p:cNvPr>
@@ -10241,7 +9990,7 @@
           <p:cNvPr id="10" name="半闭框 9">
             <a:extLst>
               <a:ext uri="{FF2B5EF4-FFF2-40B4-BE49-F238E27FC236}">
-                <a16:creationId xmlns:a16="http://schemas.microsoft.com/office/drawing/2014/main" id="{619808A8-0E2B-499B-9C3E-6AFFF5F65A3F}"/>
+                <a16:creationId xmlns:a16="http://schemas.microsoft.com/office/drawing/2014/main" id="{DB9C76C6-520E-FD57-3D2F-9CBE4BC8EDEA}"/>
               </a:ext>
             </a:extLst>
           </p:cNvPr>
@@ -10306,7 +10055,7 @@
           <p:cNvPr id="13" name="直接连接符 12">
             <a:extLst>
               <a:ext uri="{FF2B5EF4-FFF2-40B4-BE49-F238E27FC236}">
-                <a16:creationId xmlns:a16="http://schemas.microsoft.com/office/drawing/2014/main" id="{2782AA16-8086-7957-4CEE-D968A6DB722F}"/>
+                <a16:creationId xmlns:a16="http://schemas.microsoft.com/office/drawing/2014/main" id="{22FF11B7-EE23-11CD-90E6-31B0D9C94502}"/>
               </a:ext>
             </a:extLst>
           </p:cNvPr>
@@ -10349,7 +10098,7 @@
           <p:cNvPr id="100" name="图片 99">
             <a:extLst>
               <a:ext uri="{FF2B5EF4-FFF2-40B4-BE49-F238E27FC236}">
-                <a16:creationId xmlns:a16="http://schemas.microsoft.com/office/drawing/2014/main" id="{F71171B4-C3D9-CF5C-7B4B-56EFAAF3183B}"/>
+                <a16:creationId xmlns:a16="http://schemas.microsoft.com/office/drawing/2014/main" id="{2DFC5ECA-1FCF-2D31-54A1-2437E5B44571}"/>
               </a:ext>
             </a:extLst>
           </p:cNvPr>
@@ -10381,509 +10130,6 @@
           <p:cNvPr id="5" name="文本框 4">
             <a:extLst>
               <a:ext uri="{FF2B5EF4-FFF2-40B4-BE49-F238E27FC236}">
-                <a16:creationId xmlns:a16="http://schemas.microsoft.com/office/drawing/2014/main" id="{66732831-3A48-AA96-5C7E-EF953BA75DE0}"/>
-              </a:ext>
-            </a:extLst>
-          </p:cNvPr>
-          <p:cNvSpPr txBox="1"/>
-          <p:nvPr/>
-        </p:nvSpPr>
-        <p:spPr>
-          <a:xfrm>
-            <a:off x="613543" y="1741049"/>
-            <a:ext cx="10964912" cy="4001095"/>
-          </a:xfrm>
-          <a:prstGeom prst="rect">
-            <a:avLst/>
-          </a:prstGeom>
-          <a:noFill/>
-        </p:spPr>
-        <p:txBody>
-          <a:bodyPr wrap="square" lIns="91440" tIns="45720" rIns="91440" bIns="45720" rtlCol="0" anchor="t">
-            <a:spAutoFit/>
-          </a:bodyPr>
-          <a:lstStyle/>
-          <a:p>
-            <a:pPr marL="457200" indent="-457200">
-              <a:spcAft>
-                <a:spcPts val="600"/>
-              </a:spcAft>
-              <a:buFont typeface="Arial" panose="020B0604020202020204" pitchFamily="34" charset="0"/>
-              <a:buChar char="•"/>
-            </a:pPr>
-            <a:r>
-              <a:rPr lang="en-US" altLang="zh-CN" sz="3200" b="1" dirty="0">
-                <a:solidFill>
-                  <a:srgbClr val="13294B"/>
-                </a:solidFill>
-                <a:latin typeface="Calibri"/>
-                <a:ea typeface="宋体"/>
-                <a:cs typeface="Calibri"/>
-              </a:rPr>
-              <a:t>Conclusion 1:</a:t>
-            </a:r>
-          </a:p>
-          <a:p>
-            <a:pPr marL="914400" lvl="1" indent="-457200">
-              <a:spcAft>
-                <a:spcPts val="600"/>
-              </a:spcAft>
-              <a:buFont typeface="Arial" panose="020B0604020202020204" pitchFamily="34" charset="0"/>
-              <a:buChar char="•"/>
-            </a:pPr>
-            <a:r>
-              <a:rPr lang="en-US" altLang="zh-CN" sz="3200" dirty="0">
-                <a:solidFill>
-                  <a:srgbClr val="13294B"/>
-                </a:solidFill>
-                <a:latin typeface="Calibri"/>
-                <a:ea typeface="宋体"/>
-                <a:cs typeface="Calibri"/>
-              </a:rPr>
-              <a:t>11112222</a:t>
-            </a:r>
-          </a:p>
-          <a:p>
-            <a:pPr marL="457200" indent="-457200">
-              <a:spcAft>
-                <a:spcPts val="600"/>
-              </a:spcAft>
-              <a:buFont typeface="Arial" panose="020B0604020202020204" pitchFamily="34" charset="0"/>
-              <a:buChar char="•"/>
-            </a:pPr>
-            <a:r>
-              <a:rPr lang="en-US" altLang="zh-CN" sz="3200" b="1" dirty="0">
-                <a:solidFill>
-                  <a:srgbClr val="13294B"/>
-                </a:solidFill>
-                <a:latin typeface="Calibri"/>
-                <a:ea typeface="宋体"/>
-                <a:cs typeface="Calibri"/>
-              </a:rPr>
-              <a:t>Conclusion 2:</a:t>
-            </a:r>
-          </a:p>
-          <a:p>
-            <a:pPr marL="914400" lvl="1" indent="-457200">
-              <a:spcAft>
-                <a:spcPts val="600"/>
-              </a:spcAft>
-              <a:buFont typeface="Arial" panose="020B0604020202020204" pitchFamily="34" charset="0"/>
-              <a:buChar char="•"/>
-            </a:pPr>
-            <a:r>
-              <a:rPr lang="en-US" altLang="zh-CN" sz="3200" dirty="0">
-                <a:solidFill>
-                  <a:srgbClr val="13294B"/>
-                </a:solidFill>
-                <a:latin typeface="Calibri"/>
-                <a:ea typeface="宋体"/>
-                <a:cs typeface="Calibri"/>
-              </a:rPr>
-              <a:t>22223333</a:t>
-            </a:r>
-          </a:p>
-          <a:p>
-            <a:pPr marL="457200" indent="-457200">
-              <a:spcAft>
-                <a:spcPts val="600"/>
-              </a:spcAft>
-              <a:buFont typeface="Arial" panose="020B0604020202020204" pitchFamily="34" charset="0"/>
-              <a:buChar char="•"/>
-            </a:pPr>
-            <a:endParaRPr lang="en-US" altLang="zh-CN" sz="3200" b="1" dirty="0">
-              <a:solidFill>
-                <a:srgbClr val="13294B"/>
-              </a:solidFill>
-              <a:latin typeface="Calibri"/>
-              <a:ea typeface="宋体"/>
-              <a:cs typeface="Calibri"/>
-            </a:endParaRPr>
-          </a:p>
-          <a:p>
-            <a:pPr marL="457200" indent="-457200">
-              <a:spcAft>
-                <a:spcPts val="600"/>
-              </a:spcAft>
-              <a:buFont typeface="Arial" panose="020B0604020202020204" pitchFamily="34" charset="0"/>
-              <a:buChar char="•"/>
-            </a:pPr>
-            <a:endParaRPr lang="en-US" altLang="zh-CN" sz="3200" b="1" dirty="0">
-              <a:solidFill>
-                <a:srgbClr val="13294B"/>
-              </a:solidFill>
-              <a:latin typeface="Calibri"/>
-              <a:ea typeface="宋体"/>
-              <a:cs typeface="Calibri"/>
-            </a:endParaRPr>
-          </a:p>
-          <a:p>
-            <a:pPr>
-              <a:spcAft>
-                <a:spcPts val="600"/>
-              </a:spcAft>
-            </a:pPr>
-            <a:r>
-              <a:rPr lang="en-US" altLang="zh-CN" sz="3200" b="1" dirty="0">
-                <a:solidFill>
-                  <a:srgbClr val="13294B"/>
-                </a:solidFill>
-                <a:latin typeface="Calibri"/>
-                <a:ea typeface="宋体"/>
-                <a:cs typeface="Calibri"/>
-              </a:rPr>
-              <a:t> </a:t>
-            </a:r>
-          </a:p>
-        </p:txBody>
-      </p:sp>
-    </p:spTree>
-    <p:extLst>
-      <p:ext uri="{BB962C8B-B14F-4D97-AF65-F5344CB8AC3E}">
-        <p14:creationId xmlns:p14="http://schemas.microsoft.com/office/powerpoint/2010/main" val="1859779982"/>
-      </p:ext>
-    </p:extLst>
-  </p:cSld>
-  <p:clrMapOvr>
-    <a:masterClrMapping/>
-  </p:clrMapOvr>
-</p:sld>
-</file>
-
-<file path=ppt/slides/slide16.xml><?xml version="1.0" encoding="utf-8"?>
-<p:sld xmlns:a="http://schemas.openxmlformats.org/drawingml/2006/main" xmlns:r="http://schemas.openxmlformats.org/officeDocument/2006/relationships" xmlns:p="http://schemas.openxmlformats.org/presentationml/2006/main">
-  <p:cSld>
-    <p:spTree>
-      <p:nvGrpSpPr>
-        <p:cNvPr id="1" name="">
-          <a:extLst>
-            <a:ext uri="{FF2B5EF4-FFF2-40B4-BE49-F238E27FC236}">
-              <a16:creationId xmlns:a16="http://schemas.microsoft.com/office/drawing/2014/main" id="{132D79BF-ED01-067B-10A9-828B61A9DE19}"/>
-            </a:ext>
-          </a:extLst>
-        </p:cNvPr>
-        <p:cNvGrpSpPr/>
-        <p:nvPr/>
-      </p:nvGrpSpPr>
-      <p:grpSpPr>
-        <a:xfrm>
-          <a:off x="0" y="0"/>
-          <a:ext cx="0" cy="0"/>
-          <a:chOff x="0" y="0"/>
-          <a:chExt cx="0" cy="0"/>
-        </a:xfrm>
-      </p:grpSpPr>
-      <p:sp>
-        <p:nvSpPr>
-          <p:cNvPr id="3" name="图文框 2">
-            <a:extLst>
-              <a:ext uri="{FF2B5EF4-FFF2-40B4-BE49-F238E27FC236}">
-                <a16:creationId xmlns:a16="http://schemas.microsoft.com/office/drawing/2014/main" id="{F361CDB9-483A-E9B1-5401-DB5169718418}"/>
-              </a:ext>
-            </a:extLst>
-          </p:cNvPr>
-          <p:cNvSpPr/>
-          <p:nvPr/>
-        </p:nvSpPr>
-        <p:spPr>
-          <a:xfrm>
-            <a:off x="164147" y="282575"/>
-            <a:ext cx="11863705" cy="6403975"/>
-          </a:xfrm>
-          <a:prstGeom prst="frame">
-            <a:avLst>
-              <a:gd name="adj1" fmla="val 1196"/>
-            </a:avLst>
-          </a:prstGeom>
-          <a:solidFill>
-            <a:srgbClr val="13294B"/>
-          </a:solidFill>
-          <a:ln>
-            <a:solidFill>
-              <a:srgbClr val="13294B"/>
-            </a:solidFill>
-          </a:ln>
-          <a:effectLst>
-            <a:innerShdw blurRad="63500" dist="50800" dir="13500000">
-              <a:prstClr val="black">
-                <a:alpha val="50000"/>
-              </a:prstClr>
-            </a:innerShdw>
-          </a:effectLst>
-        </p:spPr>
-        <p:style>
-          <a:lnRef idx="2">
-            <a:schemeClr val="accent1">
-              <a:lumMod val="75000"/>
-            </a:schemeClr>
-          </a:lnRef>
-          <a:fillRef idx="1">
-            <a:schemeClr val="accent1"/>
-          </a:fillRef>
-          <a:effectRef idx="0">
-            <a:srgbClr val="FFFFFF"/>
-          </a:effectRef>
-          <a:fontRef idx="minor">
-            <a:schemeClr val="lt1"/>
-          </a:fontRef>
-        </p:style>
-        <p:txBody>
-          <a:bodyPr rtlCol="0" anchor="ctr"/>
-          <a:lstStyle/>
-          <a:p>
-            <a:pPr algn="ctr"/>
-            <a:endParaRPr lang="zh-CN" altLang="en-US"/>
-          </a:p>
-        </p:txBody>
-      </p:sp>
-      <p:sp>
-        <p:nvSpPr>
-          <p:cNvPr id="4" name="文本框 3">
-            <a:extLst>
-              <a:ext uri="{FF2B5EF4-FFF2-40B4-BE49-F238E27FC236}">
-                <a16:creationId xmlns:a16="http://schemas.microsoft.com/office/drawing/2014/main" id="{0EC7D77F-C731-B08D-E3AF-24869C9E7DD8}"/>
-              </a:ext>
-            </a:extLst>
-          </p:cNvPr>
-          <p:cNvSpPr txBox="1"/>
-          <p:nvPr/>
-        </p:nvSpPr>
-        <p:spPr>
-          <a:xfrm>
-            <a:off x="650457" y="614859"/>
-            <a:ext cx="9446043" cy="769441"/>
-          </a:xfrm>
-          <a:prstGeom prst="rect">
-            <a:avLst/>
-          </a:prstGeom>
-          <a:noFill/>
-        </p:spPr>
-        <p:txBody>
-          <a:bodyPr wrap="square" lIns="91440" tIns="45720" rIns="91440" bIns="45720" rtlCol="0" anchor="t">
-            <a:spAutoFit/>
-          </a:bodyPr>
-          <a:lstStyle/>
-          <a:p>
-            <a:r>
-              <a:rPr lang="en-US" altLang="zh-CN" sz="4400" b="1" dirty="0">
-                <a:solidFill>
-                  <a:srgbClr val="13294B"/>
-                </a:solidFill>
-                <a:latin typeface="Calibri"/>
-                <a:ea typeface="等线"/>
-                <a:cs typeface="+mj-lt"/>
-              </a:rPr>
-              <a:t>References</a:t>
-            </a:r>
-          </a:p>
-        </p:txBody>
-      </p:sp>
-      <p:sp>
-        <p:nvSpPr>
-          <p:cNvPr id="9" name="半闭框 8">
-            <a:extLst>
-              <a:ext uri="{FF2B5EF4-FFF2-40B4-BE49-F238E27FC236}">
-                <a16:creationId xmlns:a16="http://schemas.microsoft.com/office/drawing/2014/main" id="{26ED32FE-E210-F419-3665-A72391890294}"/>
-              </a:ext>
-            </a:extLst>
-          </p:cNvPr>
-          <p:cNvSpPr/>
-          <p:nvPr/>
-        </p:nvSpPr>
-        <p:spPr>
-          <a:xfrm>
-            <a:off x="163830" y="282575"/>
-            <a:ext cx="3148330" cy="2355215"/>
-          </a:xfrm>
-          <a:prstGeom prst="halfFrame">
-            <a:avLst>
-              <a:gd name="adj1" fmla="val 4756"/>
-              <a:gd name="adj2" fmla="val 5021"/>
-            </a:avLst>
-          </a:prstGeom>
-          <a:solidFill>
-            <a:srgbClr val="FF5F05"/>
-          </a:solidFill>
-          <a:ln>
-            <a:solidFill>
-              <a:srgbClr val="FF5F05"/>
-            </a:solidFill>
-          </a:ln>
-        </p:spPr>
-        <p:style>
-          <a:lnRef idx="2">
-            <a:schemeClr val="accent1">
-              <a:lumMod val="75000"/>
-            </a:schemeClr>
-          </a:lnRef>
-          <a:fillRef idx="1">
-            <a:schemeClr val="accent1"/>
-          </a:fillRef>
-          <a:effectRef idx="0">
-            <a:srgbClr val="FFFFFF"/>
-          </a:effectRef>
-          <a:fontRef idx="minor">
-            <a:schemeClr val="lt1"/>
-          </a:fontRef>
-        </p:style>
-        <p:txBody>
-          <a:bodyPr rtlCol="0" anchor="ctr"/>
-          <a:lstStyle/>
-          <a:p>
-            <a:pPr algn="ctr"/>
-            <a:endParaRPr lang="zh-CN" altLang="en-US">
-              <a:solidFill>
-                <a:schemeClr val="tx1"/>
-              </a:solidFill>
-            </a:endParaRPr>
-          </a:p>
-        </p:txBody>
-      </p:sp>
-      <p:sp>
-        <p:nvSpPr>
-          <p:cNvPr id="10" name="半闭框 9">
-            <a:extLst>
-              <a:ext uri="{FF2B5EF4-FFF2-40B4-BE49-F238E27FC236}">
-                <a16:creationId xmlns:a16="http://schemas.microsoft.com/office/drawing/2014/main" id="{DB9C76C6-520E-FD57-3D2F-9CBE4BC8EDEA}"/>
-              </a:ext>
-            </a:extLst>
-          </p:cNvPr>
-          <p:cNvSpPr/>
-          <p:nvPr>
-            <p:custDataLst>
-              <p:tags r:id="rId1"/>
-            </p:custDataLst>
-          </p:nvPr>
-        </p:nvSpPr>
-        <p:spPr>
-          <a:xfrm rot="10800000">
-            <a:off x="8357868" y="4262753"/>
-            <a:ext cx="3669983" cy="2423795"/>
-          </a:xfrm>
-          <a:prstGeom prst="halfFrame">
-            <a:avLst>
-              <a:gd name="adj1" fmla="val 4659"/>
-              <a:gd name="adj2" fmla="val 4349"/>
-            </a:avLst>
-          </a:prstGeom>
-          <a:solidFill>
-            <a:srgbClr val="FF5F05"/>
-          </a:solidFill>
-          <a:ln>
-            <a:solidFill>
-              <a:srgbClr val="FF5F05"/>
-            </a:solidFill>
-          </a:ln>
-        </p:spPr>
-        <p:style>
-          <a:lnRef idx="2">
-            <a:schemeClr val="accent1">
-              <a:lumMod val="75000"/>
-            </a:schemeClr>
-          </a:lnRef>
-          <a:fillRef idx="1">
-            <a:schemeClr val="accent1"/>
-          </a:fillRef>
-          <a:effectRef idx="0">
-            <a:srgbClr val="FFFFFF"/>
-          </a:effectRef>
-          <a:fontRef idx="minor">
-            <a:schemeClr val="lt1"/>
-          </a:fontRef>
-        </p:style>
-        <p:txBody>
-          <a:bodyPr rtlCol="0" anchor="ctr"/>
-          <a:lstStyle/>
-          <a:p>
-            <a:pPr algn="ctr"/>
-            <a:endParaRPr lang="zh-CN" altLang="en-US">
-              <a:solidFill>
-                <a:schemeClr val="tx1"/>
-              </a:solidFill>
-            </a:endParaRPr>
-          </a:p>
-        </p:txBody>
-      </p:sp>
-      <p:cxnSp>
-        <p:nvCxnSpPr>
-          <p:cNvPr id="13" name="直接连接符 12">
-            <a:extLst>
-              <a:ext uri="{FF2B5EF4-FFF2-40B4-BE49-F238E27FC236}">
-                <a16:creationId xmlns:a16="http://schemas.microsoft.com/office/drawing/2014/main" id="{22FF11B7-EE23-11CD-90E6-31B0D9C94502}"/>
-              </a:ext>
-            </a:extLst>
-          </p:cNvPr>
-          <p:cNvCxnSpPr/>
-          <p:nvPr/>
-        </p:nvCxnSpPr>
-        <p:spPr>
-          <a:xfrm>
-            <a:off x="650457" y="1480820"/>
-            <a:ext cx="6546850" cy="14605"/>
-          </a:xfrm>
-          <a:prstGeom prst="line">
-            <a:avLst/>
-          </a:prstGeom>
-          <a:ln w="57150">
-            <a:solidFill>
-              <a:srgbClr val="FF5F05">
-                <a:alpha val="81000"/>
-              </a:srgbClr>
-            </a:solidFill>
-          </a:ln>
-        </p:spPr>
-        <p:style>
-          <a:lnRef idx="2">
-            <a:schemeClr val="accent1"/>
-          </a:lnRef>
-          <a:fillRef idx="0">
-            <a:srgbClr val="FFFFFF"/>
-          </a:fillRef>
-          <a:effectRef idx="0">
-            <a:srgbClr val="FFFFFF"/>
-          </a:effectRef>
-          <a:fontRef idx="minor">
-            <a:schemeClr val="tx1"/>
-          </a:fontRef>
-        </p:style>
-      </p:cxnSp>
-      <p:pic>
-        <p:nvPicPr>
-          <p:cNvPr id="100" name="图片 99">
-            <a:extLst>
-              <a:ext uri="{FF2B5EF4-FFF2-40B4-BE49-F238E27FC236}">
-                <a16:creationId xmlns:a16="http://schemas.microsoft.com/office/drawing/2014/main" id="{2DFC5ECA-1FCF-2D31-54A1-2437E5B44571}"/>
-              </a:ext>
-            </a:extLst>
-          </p:cNvPr>
-          <p:cNvPicPr/>
-          <p:nvPr/>
-        </p:nvPicPr>
-        <p:blipFill>
-          <a:blip r:embed="rId4"/>
-          <a:stretch>
-            <a:fillRect/>
-          </a:stretch>
-        </p:blipFill>
-        <p:spPr>
-          <a:xfrm>
-            <a:off x="9906635" y="171450"/>
-            <a:ext cx="1906270" cy="1212850"/>
-          </a:xfrm>
-          <a:prstGeom prst="rect">
-            <a:avLst/>
-          </a:prstGeom>
-          <a:noFill/>
-          <a:ln w="9525">
-            <a:noFill/>
-          </a:ln>
-        </p:spPr>
-      </p:pic>
-      <p:sp>
-        <p:nvSpPr>
-          <p:cNvPr id="5" name="文本框 4">
-            <a:extLst>
-              <a:ext uri="{FF2B5EF4-FFF2-40B4-BE49-F238E27FC236}">
                 <a16:creationId xmlns:a16="http://schemas.microsoft.com/office/drawing/2014/main" id="{95F89DC6-1B5B-DDAA-D624-9F2535720DC8}"/>
               </a:ext>
             </a:extLst>
@@ -11409,453 +10655,6 @@
 </file>
 
 <file path=ppt/slides/slide2.xml><?xml version="1.0" encoding="utf-8"?>
-<p:sld xmlns:a="http://schemas.openxmlformats.org/drawingml/2006/main" xmlns:r="http://schemas.openxmlformats.org/officeDocument/2006/relationships" xmlns:p="http://schemas.openxmlformats.org/presentationml/2006/main">
-  <p:cSld>
-    <p:spTree>
-      <p:nvGrpSpPr>
-        <p:cNvPr id="1" name="">
-          <a:extLst>
-            <a:ext uri="{FF2B5EF4-FFF2-40B4-BE49-F238E27FC236}">
-              <a16:creationId xmlns:a16="http://schemas.microsoft.com/office/drawing/2014/main" id="{3F2CAE9D-349C-8D29-97B8-45694169D71D}"/>
-            </a:ext>
-          </a:extLst>
-        </p:cNvPr>
-        <p:cNvGrpSpPr/>
-        <p:nvPr/>
-      </p:nvGrpSpPr>
-      <p:grpSpPr>
-        <a:xfrm>
-          <a:off x="0" y="0"/>
-          <a:ext cx="0" cy="0"/>
-          <a:chOff x="0" y="0"/>
-          <a:chExt cx="0" cy="0"/>
-        </a:xfrm>
-      </p:grpSpPr>
-      <p:sp>
-        <p:nvSpPr>
-          <p:cNvPr id="3" name="图文框 2">
-            <a:extLst>
-              <a:ext uri="{FF2B5EF4-FFF2-40B4-BE49-F238E27FC236}">
-                <a16:creationId xmlns:a16="http://schemas.microsoft.com/office/drawing/2014/main" id="{685D7C8E-817E-F563-219D-B815CCCAE039}"/>
-              </a:ext>
-            </a:extLst>
-          </p:cNvPr>
-          <p:cNvSpPr/>
-          <p:nvPr/>
-        </p:nvSpPr>
-        <p:spPr>
-          <a:xfrm>
-            <a:off x="164147" y="282575"/>
-            <a:ext cx="11863705" cy="6403975"/>
-          </a:xfrm>
-          <a:prstGeom prst="frame">
-            <a:avLst>
-              <a:gd name="adj1" fmla="val 1196"/>
-            </a:avLst>
-          </a:prstGeom>
-          <a:solidFill>
-            <a:srgbClr val="13294B"/>
-          </a:solidFill>
-          <a:ln>
-            <a:solidFill>
-              <a:srgbClr val="13294B"/>
-            </a:solidFill>
-          </a:ln>
-          <a:effectLst>
-            <a:innerShdw blurRad="63500" dist="50800" dir="13500000">
-              <a:prstClr val="black">
-                <a:alpha val="50000"/>
-              </a:prstClr>
-            </a:innerShdw>
-          </a:effectLst>
-        </p:spPr>
-        <p:style>
-          <a:lnRef idx="2">
-            <a:schemeClr val="accent1">
-              <a:lumMod val="75000"/>
-            </a:schemeClr>
-          </a:lnRef>
-          <a:fillRef idx="1">
-            <a:schemeClr val="accent1"/>
-          </a:fillRef>
-          <a:effectRef idx="0">
-            <a:srgbClr val="FFFFFF"/>
-          </a:effectRef>
-          <a:fontRef idx="minor">
-            <a:schemeClr val="lt1"/>
-          </a:fontRef>
-        </p:style>
-        <p:txBody>
-          <a:bodyPr rtlCol="0" anchor="ctr"/>
-          <a:lstStyle/>
-          <a:p>
-            <a:pPr algn="ctr"/>
-            <a:endParaRPr lang="zh-CN" altLang="en-US"/>
-          </a:p>
-        </p:txBody>
-      </p:sp>
-      <p:sp>
-        <p:nvSpPr>
-          <p:cNvPr id="4" name="文本框 3">
-            <a:extLst>
-              <a:ext uri="{FF2B5EF4-FFF2-40B4-BE49-F238E27FC236}">
-                <a16:creationId xmlns:a16="http://schemas.microsoft.com/office/drawing/2014/main" id="{E1E581F1-1B4E-5233-3881-67F0423276DD}"/>
-              </a:ext>
-            </a:extLst>
-          </p:cNvPr>
-          <p:cNvSpPr txBox="1"/>
-          <p:nvPr/>
-        </p:nvSpPr>
-        <p:spPr>
-          <a:xfrm>
-            <a:off x="650457" y="614859"/>
-            <a:ext cx="9446043" cy="769441"/>
-          </a:xfrm>
-          <a:prstGeom prst="rect">
-            <a:avLst/>
-          </a:prstGeom>
-          <a:noFill/>
-        </p:spPr>
-        <p:txBody>
-          <a:bodyPr wrap="square" lIns="91440" tIns="45720" rIns="91440" bIns="45720" rtlCol="0" anchor="t">
-            <a:spAutoFit/>
-          </a:bodyPr>
-          <a:lstStyle/>
-          <a:p>
-            <a:r>
-              <a:rPr lang="en-US" altLang="zh-CN" sz="4400" b="1" dirty="0">
-                <a:solidFill>
-                  <a:srgbClr val="13294B"/>
-                </a:solidFill>
-                <a:latin typeface="Calibri"/>
-                <a:ea typeface="等线"/>
-                <a:cs typeface="+mj-lt"/>
-              </a:rPr>
-              <a:t>Research Question</a:t>
-            </a:r>
-          </a:p>
-        </p:txBody>
-      </p:sp>
-      <p:sp>
-        <p:nvSpPr>
-          <p:cNvPr id="9" name="半闭框 8">
-            <a:extLst>
-              <a:ext uri="{FF2B5EF4-FFF2-40B4-BE49-F238E27FC236}">
-                <a16:creationId xmlns:a16="http://schemas.microsoft.com/office/drawing/2014/main" id="{86571FCB-A371-3723-B078-6158F6C766C2}"/>
-              </a:ext>
-            </a:extLst>
-          </p:cNvPr>
-          <p:cNvSpPr/>
-          <p:nvPr/>
-        </p:nvSpPr>
-        <p:spPr>
-          <a:xfrm>
-            <a:off x="163830" y="282575"/>
-            <a:ext cx="3148330" cy="2355215"/>
-          </a:xfrm>
-          <a:prstGeom prst="halfFrame">
-            <a:avLst>
-              <a:gd name="adj1" fmla="val 4756"/>
-              <a:gd name="adj2" fmla="val 5021"/>
-            </a:avLst>
-          </a:prstGeom>
-          <a:solidFill>
-            <a:srgbClr val="FF5F05"/>
-          </a:solidFill>
-          <a:ln>
-            <a:solidFill>
-              <a:srgbClr val="FF5F05"/>
-            </a:solidFill>
-          </a:ln>
-        </p:spPr>
-        <p:style>
-          <a:lnRef idx="2">
-            <a:schemeClr val="accent1">
-              <a:lumMod val="75000"/>
-            </a:schemeClr>
-          </a:lnRef>
-          <a:fillRef idx="1">
-            <a:schemeClr val="accent1"/>
-          </a:fillRef>
-          <a:effectRef idx="0">
-            <a:srgbClr val="FFFFFF"/>
-          </a:effectRef>
-          <a:fontRef idx="minor">
-            <a:schemeClr val="lt1"/>
-          </a:fontRef>
-        </p:style>
-        <p:txBody>
-          <a:bodyPr rtlCol="0" anchor="ctr"/>
-          <a:lstStyle/>
-          <a:p>
-            <a:pPr algn="ctr"/>
-            <a:endParaRPr lang="zh-CN" altLang="en-US">
-              <a:solidFill>
-                <a:schemeClr val="tx1"/>
-              </a:solidFill>
-            </a:endParaRPr>
-          </a:p>
-        </p:txBody>
-      </p:sp>
-      <p:sp>
-        <p:nvSpPr>
-          <p:cNvPr id="10" name="半闭框 9">
-            <a:extLst>
-              <a:ext uri="{FF2B5EF4-FFF2-40B4-BE49-F238E27FC236}">
-                <a16:creationId xmlns:a16="http://schemas.microsoft.com/office/drawing/2014/main" id="{839E0284-D281-0F11-E08C-21A49FA2B942}"/>
-              </a:ext>
-            </a:extLst>
-          </p:cNvPr>
-          <p:cNvSpPr/>
-          <p:nvPr>
-            <p:custDataLst>
-              <p:tags r:id="rId1"/>
-            </p:custDataLst>
-          </p:nvPr>
-        </p:nvSpPr>
-        <p:spPr>
-          <a:xfrm rot="10800000">
-            <a:off x="8357868" y="4262753"/>
-            <a:ext cx="3669983" cy="2423795"/>
-          </a:xfrm>
-          <a:prstGeom prst="halfFrame">
-            <a:avLst>
-              <a:gd name="adj1" fmla="val 4659"/>
-              <a:gd name="adj2" fmla="val 4349"/>
-            </a:avLst>
-          </a:prstGeom>
-          <a:solidFill>
-            <a:srgbClr val="FF5F05"/>
-          </a:solidFill>
-          <a:ln>
-            <a:solidFill>
-              <a:srgbClr val="FF5F05"/>
-            </a:solidFill>
-          </a:ln>
-        </p:spPr>
-        <p:style>
-          <a:lnRef idx="2">
-            <a:schemeClr val="accent1">
-              <a:lumMod val="75000"/>
-            </a:schemeClr>
-          </a:lnRef>
-          <a:fillRef idx="1">
-            <a:schemeClr val="accent1"/>
-          </a:fillRef>
-          <a:effectRef idx="0">
-            <a:srgbClr val="FFFFFF"/>
-          </a:effectRef>
-          <a:fontRef idx="minor">
-            <a:schemeClr val="lt1"/>
-          </a:fontRef>
-        </p:style>
-        <p:txBody>
-          <a:bodyPr rtlCol="0" anchor="ctr"/>
-          <a:lstStyle/>
-          <a:p>
-            <a:pPr algn="ctr"/>
-            <a:endParaRPr lang="zh-CN" altLang="en-US">
-              <a:solidFill>
-                <a:schemeClr val="tx1"/>
-              </a:solidFill>
-            </a:endParaRPr>
-          </a:p>
-        </p:txBody>
-      </p:sp>
-      <p:cxnSp>
-        <p:nvCxnSpPr>
-          <p:cNvPr id="13" name="直接连接符 12">
-            <a:extLst>
-              <a:ext uri="{FF2B5EF4-FFF2-40B4-BE49-F238E27FC236}">
-                <a16:creationId xmlns:a16="http://schemas.microsoft.com/office/drawing/2014/main" id="{1C533638-ED2B-C619-B532-12760C01B352}"/>
-              </a:ext>
-            </a:extLst>
-          </p:cNvPr>
-          <p:cNvCxnSpPr/>
-          <p:nvPr/>
-        </p:nvCxnSpPr>
-        <p:spPr>
-          <a:xfrm>
-            <a:off x="650457" y="1480820"/>
-            <a:ext cx="6546850" cy="14605"/>
-          </a:xfrm>
-          <a:prstGeom prst="line">
-            <a:avLst/>
-          </a:prstGeom>
-          <a:ln w="57150">
-            <a:solidFill>
-              <a:srgbClr val="FF5F05">
-                <a:alpha val="81000"/>
-              </a:srgbClr>
-            </a:solidFill>
-          </a:ln>
-        </p:spPr>
-        <p:style>
-          <a:lnRef idx="2">
-            <a:schemeClr val="accent1"/>
-          </a:lnRef>
-          <a:fillRef idx="0">
-            <a:srgbClr val="FFFFFF"/>
-          </a:fillRef>
-          <a:effectRef idx="0">
-            <a:srgbClr val="FFFFFF"/>
-          </a:effectRef>
-          <a:fontRef idx="minor">
-            <a:schemeClr val="tx1"/>
-          </a:fontRef>
-        </p:style>
-      </p:cxnSp>
-      <p:pic>
-        <p:nvPicPr>
-          <p:cNvPr id="100" name="图片 99">
-            <a:extLst>
-              <a:ext uri="{FF2B5EF4-FFF2-40B4-BE49-F238E27FC236}">
-                <a16:creationId xmlns:a16="http://schemas.microsoft.com/office/drawing/2014/main" id="{64A3B441-0C5C-103B-36DF-98D7E0A6D3A6}"/>
-              </a:ext>
-            </a:extLst>
-          </p:cNvPr>
-          <p:cNvPicPr/>
-          <p:nvPr/>
-        </p:nvPicPr>
-        <p:blipFill>
-          <a:blip r:embed="rId4"/>
-          <a:stretch>
-            <a:fillRect/>
-          </a:stretch>
-        </p:blipFill>
-        <p:spPr>
-          <a:xfrm>
-            <a:off x="9906635" y="171450"/>
-            <a:ext cx="1906270" cy="1212850"/>
-          </a:xfrm>
-          <a:prstGeom prst="rect">
-            <a:avLst/>
-          </a:prstGeom>
-          <a:noFill/>
-          <a:ln w="9525">
-            <a:noFill/>
-          </a:ln>
-        </p:spPr>
-      </p:pic>
-      <p:sp>
-        <p:nvSpPr>
-          <p:cNvPr id="5" name="文本框 4">
-            <a:extLst>
-              <a:ext uri="{FF2B5EF4-FFF2-40B4-BE49-F238E27FC236}">
-                <a16:creationId xmlns:a16="http://schemas.microsoft.com/office/drawing/2014/main" id="{8D56EAC2-1C7E-0BD3-A8C8-CE21FE5081D1}"/>
-              </a:ext>
-            </a:extLst>
-          </p:cNvPr>
-          <p:cNvSpPr txBox="1"/>
-          <p:nvPr/>
-        </p:nvSpPr>
-        <p:spPr>
-          <a:xfrm>
-            <a:off x="613543" y="1741049"/>
-            <a:ext cx="5719751" cy="4170372"/>
-          </a:xfrm>
-          <a:prstGeom prst="rect">
-            <a:avLst/>
-          </a:prstGeom>
-          <a:noFill/>
-        </p:spPr>
-        <p:txBody>
-          <a:bodyPr wrap="square" lIns="91440" tIns="45720" rIns="91440" bIns="45720" rtlCol="0" anchor="t">
-            <a:spAutoFit/>
-          </a:bodyPr>
-          <a:lstStyle/>
-          <a:p>
-            <a:pPr marL="457200" indent="-457200">
-              <a:spcAft>
-                <a:spcPts val="600"/>
-              </a:spcAft>
-              <a:buFont typeface="Arial" panose="020B0604020202020204" pitchFamily="34" charset="0"/>
-              <a:buChar char="•"/>
-            </a:pPr>
-            <a:r>
-              <a:rPr lang="en-US" altLang="zh-CN" sz="3200" b="1" dirty="0">
-                <a:solidFill>
-                  <a:srgbClr val="13294B"/>
-                </a:solidFill>
-                <a:latin typeface="Calibri"/>
-                <a:ea typeface="宋体"/>
-                <a:cs typeface="Calibri"/>
-              </a:rPr>
-              <a:t>Have you ever gone through this situation?</a:t>
-            </a:r>
-          </a:p>
-          <a:p>
-            <a:pPr marL="914400" lvl="1" indent="-457200">
-              <a:spcAft>
-                <a:spcPts val="600"/>
-              </a:spcAft>
-              <a:buFont typeface="Arial" panose="020B0604020202020204" pitchFamily="34" charset="0"/>
-              <a:buChar char="•"/>
-            </a:pPr>
-            <a:r>
-              <a:rPr lang="en-US" altLang="zh-CN" sz="2800" dirty="0">
-                <a:solidFill>
-                  <a:srgbClr val="13294B"/>
-                </a:solidFill>
-                <a:latin typeface="Calibri"/>
-                <a:ea typeface="宋体"/>
-                <a:cs typeface="Calibri"/>
-              </a:rPr>
-              <a:t>When you try to chat or ask an question with an AI assistance, it keeps saying “sorry” and “I don’t know”. Then, they ask you to call a customer service and redirect you to another chat bot.</a:t>
-            </a:r>
-          </a:p>
-        </p:txBody>
-      </p:sp>
-      <p:pic>
-        <p:nvPicPr>
-          <p:cNvPr id="6" name="图片 5" descr="图形用户界面, 文本, 应用程序, 聊天或短信&#10;&#10;AI 生成的内容可能不正确。">
-            <a:extLst>
-              <a:ext uri="{FF2B5EF4-FFF2-40B4-BE49-F238E27FC236}">
-                <a16:creationId xmlns:a16="http://schemas.microsoft.com/office/drawing/2014/main" id="{879F0E7A-A5D7-4C8E-F0B6-DBA4125AE1D4}"/>
-              </a:ext>
-            </a:extLst>
-          </p:cNvPr>
-          <p:cNvPicPr>
-            <a:picLocks noChangeAspect="1"/>
-          </p:cNvPicPr>
-          <p:nvPr/>
-        </p:nvPicPr>
-        <p:blipFill>
-          <a:blip r:embed="rId5">
-            <a:extLst>
-              <a:ext uri="{28A0092B-C50C-407E-A947-70E740481C1C}">
-                <a14:useLocalDpi xmlns:a14="http://schemas.microsoft.com/office/drawing/2010/main" val="0"/>
-              </a:ext>
-            </a:extLst>
-          </a:blip>
-          <a:stretch>
-            <a:fillRect/>
-          </a:stretch>
-        </p:blipFill>
-        <p:spPr>
-          <a:xfrm>
-            <a:off x="6495604" y="1852174"/>
-            <a:ext cx="5202357" cy="4108817"/>
-          </a:xfrm>
-          <a:prstGeom prst="rect">
-            <a:avLst/>
-          </a:prstGeom>
-        </p:spPr>
-      </p:pic>
-    </p:spTree>
-    <p:extLst>
-      <p:ext uri="{BB962C8B-B14F-4D97-AF65-F5344CB8AC3E}">
-        <p14:creationId xmlns:p14="http://schemas.microsoft.com/office/powerpoint/2010/main" val="825763644"/>
-      </p:ext>
-    </p:extLst>
-  </p:cSld>
-  <p:clrMapOvr>
-    <a:masterClrMapping/>
-  </p:clrMapOvr>
-</p:sld>
-</file>
-
-<file path=ppt/slides/slide3.xml><?xml version="1.0" encoding="utf-8"?>
 <p:sld xmlns:a="http://schemas.openxmlformats.org/drawingml/2006/main" xmlns:r="http://schemas.openxmlformats.org/officeDocument/2006/relationships" xmlns:p="http://schemas.openxmlformats.org/presentationml/2006/main">
   <p:cSld>
     <p:spTree>
@@ -12580,7 +11379,7 @@
 </p:sld>
 </file>
 
-<file path=ppt/slides/slide4.xml><?xml version="1.0" encoding="utf-8"?>
+<file path=ppt/slides/slide3.xml><?xml version="1.0" encoding="utf-8"?>
 <p:sld xmlns:a="http://schemas.openxmlformats.org/drawingml/2006/main" xmlns:r="http://schemas.openxmlformats.org/officeDocument/2006/relationships" xmlns:p="http://schemas.openxmlformats.org/presentationml/2006/main">
   <p:cSld>
     <p:spTree>
@@ -13035,7 +11834,7 @@
 </p:sld>
 </file>
 
-<file path=ppt/slides/slide5.xml><?xml version="1.0" encoding="utf-8"?>
+<file path=ppt/slides/slide4.xml><?xml version="1.0" encoding="utf-8"?>
 <p:sld xmlns:a="http://schemas.openxmlformats.org/drawingml/2006/main" xmlns:r="http://schemas.openxmlformats.org/officeDocument/2006/relationships" xmlns:p="http://schemas.openxmlformats.org/presentationml/2006/main">
   <p:cSld>
     <p:spTree>
@@ -13492,7 +12291,7 @@
                 <a:ea typeface="宋体"/>
                 <a:cs typeface="Calibri"/>
               </a:rPr>
-              <a:t>Meanwhile, LLMs nearly match expert reliability when judging empathic communication but was limited to personal-problems support contexts, rather than transactional service dialogues.</a:t>
+              <a:t>Meanwhile, LLMs nearly match expert reliability when judging empathic communication but was limited to personal-problems contexts, rather than transactional service dialogues.</a:t>
             </a:r>
           </a:p>
           <a:p>
@@ -13527,7 +12326,7 @@
 </p:sld>
 </file>
 
-<file path=ppt/slides/slide6.xml><?xml version="1.0" encoding="utf-8"?>
+<file path=ppt/slides/slide5.xml><?xml version="1.0" encoding="utf-8"?>
 <p:sld xmlns:a="http://schemas.openxmlformats.org/drawingml/2006/main" xmlns:r="http://schemas.openxmlformats.org/officeDocument/2006/relationships" xmlns:p="http://schemas.openxmlformats.org/presentationml/2006/main">
   <p:cSld>
     <p:spTree>
@@ -14069,7 +12868,7 @@
 </p:sld>
 </file>
 
-<file path=ppt/slides/slide7.xml><?xml version="1.0" encoding="utf-8"?>
+<file path=ppt/slides/slide6.xml><?xml version="1.0" encoding="utf-8"?>
 <p:sld xmlns:a="http://schemas.openxmlformats.org/drawingml/2006/main" xmlns:r="http://schemas.openxmlformats.org/officeDocument/2006/relationships" xmlns:p="http://schemas.openxmlformats.org/presentationml/2006/main">
   <p:cSld>
     <p:spTree>
@@ -14442,7 +13241,7 @@
                 <a:ea typeface="宋体"/>
                 <a:cs typeface="Calibri"/>
               </a:rPr>
-              <a:t>Our study follows a three-phase empirical design: </a:t>
+              <a:t>Our study follows a three steps empirical design: </a:t>
             </a:r>
           </a:p>
           <a:p>
@@ -14520,7 +13319,7 @@
 </p:sld>
 </file>
 
-<file path=ppt/slides/slide8.xml><?xml version="1.0" encoding="utf-8"?>
+<file path=ppt/slides/slide7.xml><?xml version="1.0" encoding="utf-8"?>
 <p:sld xmlns:a="http://schemas.openxmlformats.org/drawingml/2006/main" xmlns:r="http://schemas.openxmlformats.org/officeDocument/2006/relationships" xmlns:p="http://schemas.openxmlformats.org/presentationml/2006/main">
   <p:cSld>
     <p:spTree>
@@ -14893,7 +13692,7 @@
                 <a:ea typeface="宋体"/>
                 <a:cs typeface="Calibri"/>
               </a:rPr>
-              <a:t>We compute a Frustration Intensity Score (FIS) for each customer tweet using a composite of VADER sentiment, all-caps ratio, punctuation density, and presence of urgency vocabulary (``never again'', ``unacceptable'', ``immediately‘’).</a:t>
+              <a:t>We compute a Frustration Intensity Score (FIS) for each customer text using a composite of VADER sentiment, all-caps ratio, punctuation density, and presence of urgency vocabulary (``never again'', ``unacceptable'', ``immediately‘’).</a:t>
             </a:r>
           </a:p>
           <a:p>
@@ -15197,7 +13996,7 @@
 </p:sld>
 </file>
 
-<file path=ppt/slides/slide9.xml><?xml version="1.0" encoding="utf-8"?>
+<file path=ppt/slides/slide8.xml><?xml version="1.0" encoding="utf-8"?>
 <p:sld xmlns:a="http://schemas.openxmlformats.org/drawingml/2006/main" xmlns:r="http://schemas.openxmlformats.org/officeDocument/2006/relationships" xmlns:p="http://schemas.openxmlformats.org/presentationml/2006/main">
   <p:cSld>
     <p:spTree>
@@ -15624,7 +14423,7 @@
                 <a:ea typeface="宋体"/>
                 <a:cs typeface="Calibri"/>
               </a:rPr>
-              <a:t>No persona, no tone instruction, and no domain context is supplied. This deliberate minimalism ensures we measure the model’s default social calibration rather than a prompted one.</a:t>
+              <a:t>No persona, no tone instruction, and no domain context is supplied. This simple prompting ensures we measure the model’s default social calibration rather than a prompted one.</a:t>
             </a:r>
           </a:p>
         </p:txBody>
@@ -15633,6 +14432,595 @@
     <p:extLst>
       <p:ext uri="{BB962C8B-B14F-4D97-AF65-F5344CB8AC3E}">
         <p14:creationId xmlns:p14="http://schemas.microsoft.com/office/powerpoint/2010/main" val="162279002"/>
+      </p:ext>
+    </p:extLst>
+  </p:cSld>
+  <p:clrMapOvr>
+    <a:masterClrMapping/>
+  </p:clrMapOvr>
+</p:sld>
+</file>
+
+<file path=ppt/slides/slide9.xml><?xml version="1.0" encoding="utf-8"?>
+<p:sld xmlns:a="http://schemas.openxmlformats.org/drawingml/2006/main" xmlns:r="http://schemas.openxmlformats.org/officeDocument/2006/relationships" xmlns:p="http://schemas.openxmlformats.org/presentationml/2006/main">
+  <p:cSld>
+    <p:spTree>
+      <p:nvGrpSpPr>
+        <p:cNvPr id="1" name="">
+          <a:extLst>
+            <a:ext uri="{FF2B5EF4-FFF2-40B4-BE49-F238E27FC236}">
+              <a16:creationId xmlns:a16="http://schemas.microsoft.com/office/drawing/2014/main" id="{F91C1AA8-633B-0E63-2970-BD86F8762D1B}"/>
+            </a:ext>
+          </a:extLst>
+        </p:cNvPr>
+        <p:cNvGrpSpPr/>
+        <p:nvPr/>
+      </p:nvGrpSpPr>
+      <p:grpSpPr>
+        <a:xfrm>
+          <a:off x="0" y="0"/>
+          <a:ext cx="0" cy="0"/>
+          <a:chOff x="0" y="0"/>
+          <a:chExt cx="0" cy="0"/>
+        </a:xfrm>
+      </p:grpSpPr>
+      <p:sp>
+        <p:nvSpPr>
+          <p:cNvPr id="3" name="图文框 2">
+            <a:extLst>
+              <a:ext uri="{FF2B5EF4-FFF2-40B4-BE49-F238E27FC236}">
+                <a16:creationId xmlns:a16="http://schemas.microsoft.com/office/drawing/2014/main" id="{4B77FF07-F70A-99F9-00AD-A86B7D404F83}"/>
+              </a:ext>
+            </a:extLst>
+          </p:cNvPr>
+          <p:cNvSpPr/>
+          <p:nvPr/>
+        </p:nvSpPr>
+        <p:spPr>
+          <a:xfrm>
+            <a:off x="164147" y="282575"/>
+            <a:ext cx="11863705" cy="6403975"/>
+          </a:xfrm>
+          <a:prstGeom prst="frame">
+            <a:avLst>
+              <a:gd name="adj1" fmla="val 1196"/>
+            </a:avLst>
+          </a:prstGeom>
+          <a:solidFill>
+            <a:srgbClr val="13294B"/>
+          </a:solidFill>
+          <a:ln>
+            <a:solidFill>
+              <a:srgbClr val="13294B"/>
+            </a:solidFill>
+          </a:ln>
+          <a:effectLst>
+            <a:innerShdw blurRad="63500" dist="50800" dir="13500000">
+              <a:prstClr val="black">
+                <a:alpha val="50000"/>
+              </a:prstClr>
+            </a:innerShdw>
+          </a:effectLst>
+        </p:spPr>
+        <p:style>
+          <a:lnRef idx="2">
+            <a:schemeClr val="accent1">
+              <a:lumMod val="75000"/>
+            </a:schemeClr>
+          </a:lnRef>
+          <a:fillRef idx="1">
+            <a:schemeClr val="accent1"/>
+          </a:fillRef>
+          <a:effectRef idx="0">
+            <a:srgbClr val="FFFFFF"/>
+          </a:effectRef>
+          <a:fontRef idx="minor">
+            <a:schemeClr val="lt1"/>
+          </a:fontRef>
+        </p:style>
+        <p:txBody>
+          <a:bodyPr rtlCol="0" anchor="ctr"/>
+          <a:lstStyle/>
+          <a:p>
+            <a:pPr algn="ctr"/>
+            <a:endParaRPr lang="zh-CN" altLang="en-US"/>
+          </a:p>
+        </p:txBody>
+      </p:sp>
+      <p:sp>
+        <p:nvSpPr>
+          <p:cNvPr id="4" name="文本框 3">
+            <a:extLst>
+              <a:ext uri="{FF2B5EF4-FFF2-40B4-BE49-F238E27FC236}">
+                <a16:creationId xmlns:a16="http://schemas.microsoft.com/office/drawing/2014/main" id="{3CACD4F5-9F2B-162D-72C5-415101AEBE2F}"/>
+              </a:ext>
+            </a:extLst>
+          </p:cNvPr>
+          <p:cNvSpPr txBox="1"/>
+          <p:nvPr/>
+        </p:nvSpPr>
+        <p:spPr>
+          <a:xfrm>
+            <a:off x="650457" y="614859"/>
+            <a:ext cx="9446043" cy="769441"/>
+          </a:xfrm>
+          <a:prstGeom prst="rect">
+            <a:avLst/>
+          </a:prstGeom>
+          <a:noFill/>
+        </p:spPr>
+        <p:txBody>
+          <a:bodyPr wrap="square" lIns="91440" tIns="45720" rIns="91440" bIns="45720" rtlCol="0" anchor="t">
+            <a:spAutoFit/>
+          </a:bodyPr>
+          <a:lstStyle/>
+          <a:p>
+            <a:r>
+              <a:rPr lang="en-US" altLang="zh-CN" sz="4400" b="1" dirty="0">
+                <a:solidFill>
+                  <a:srgbClr val="13294B"/>
+                </a:solidFill>
+                <a:latin typeface="Calibri"/>
+                <a:ea typeface="等线"/>
+                <a:cs typeface="+mj-lt"/>
+              </a:rPr>
+              <a:t>Empathy Calibration Score (ECS)</a:t>
+            </a:r>
+          </a:p>
+        </p:txBody>
+      </p:sp>
+      <p:sp>
+        <p:nvSpPr>
+          <p:cNvPr id="9" name="半闭框 8">
+            <a:extLst>
+              <a:ext uri="{FF2B5EF4-FFF2-40B4-BE49-F238E27FC236}">
+                <a16:creationId xmlns:a16="http://schemas.microsoft.com/office/drawing/2014/main" id="{D0B68E8D-E966-97DF-5398-77C29D8139C3}"/>
+              </a:ext>
+            </a:extLst>
+          </p:cNvPr>
+          <p:cNvSpPr/>
+          <p:nvPr/>
+        </p:nvSpPr>
+        <p:spPr>
+          <a:xfrm>
+            <a:off x="163830" y="282575"/>
+            <a:ext cx="3148330" cy="2355215"/>
+          </a:xfrm>
+          <a:prstGeom prst="halfFrame">
+            <a:avLst>
+              <a:gd name="adj1" fmla="val 4756"/>
+              <a:gd name="adj2" fmla="val 5021"/>
+            </a:avLst>
+          </a:prstGeom>
+          <a:solidFill>
+            <a:srgbClr val="FF5F05"/>
+          </a:solidFill>
+          <a:ln>
+            <a:solidFill>
+              <a:srgbClr val="FF5F05"/>
+            </a:solidFill>
+          </a:ln>
+        </p:spPr>
+        <p:style>
+          <a:lnRef idx="2">
+            <a:schemeClr val="accent1">
+              <a:lumMod val="75000"/>
+            </a:schemeClr>
+          </a:lnRef>
+          <a:fillRef idx="1">
+            <a:schemeClr val="accent1"/>
+          </a:fillRef>
+          <a:effectRef idx="0">
+            <a:srgbClr val="FFFFFF"/>
+          </a:effectRef>
+          <a:fontRef idx="minor">
+            <a:schemeClr val="lt1"/>
+          </a:fontRef>
+        </p:style>
+        <p:txBody>
+          <a:bodyPr rtlCol="0" anchor="ctr"/>
+          <a:lstStyle/>
+          <a:p>
+            <a:pPr algn="ctr"/>
+            <a:endParaRPr lang="zh-CN" altLang="en-US">
+              <a:solidFill>
+                <a:schemeClr val="tx1"/>
+              </a:solidFill>
+            </a:endParaRPr>
+          </a:p>
+        </p:txBody>
+      </p:sp>
+      <p:sp>
+        <p:nvSpPr>
+          <p:cNvPr id="10" name="半闭框 9">
+            <a:extLst>
+              <a:ext uri="{FF2B5EF4-FFF2-40B4-BE49-F238E27FC236}">
+                <a16:creationId xmlns:a16="http://schemas.microsoft.com/office/drawing/2014/main" id="{B74D2438-1FC5-C43E-152F-7C8EB19255D4}"/>
+              </a:ext>
+            </a:extLst>
+          </p:cNvPr>
+          <p:cNvSpPr/>
+          <p:nvPr>
+            <p:custDataLst>
+              <p:tags r:id="rId1"/>
+            </p:custDataLst>
+          </p:nvPr>
+        </p:nvSpPr>
+        <p:spPr>
+          <a:xfrm rot="10800000">
+            <a:off x="8357868" y="4262753"/>
+            <a:ext cx="3669983" cy="2423795"/>
+          </a:xfrm>
+          <a:prstGeom prst="halfFrame">
+            <a:avLst>
+              <a:gd name="adj1" fmla="val 4659"/>
+              <a:gd name="adj2" fmla="val 4349"/>
+            </a:avLst>
+          </a:prstGeom>
+          <a:solidFill>
+            <a:srgbClr val="FF5F05"/>
+          </a:solidFill>
+          <a:ln>
+            <a:solidFill>
+              <a:srgbClr val="FF5F05"/>
+            </a:solidFill>
+          </a:ln>
+        </p:spPr>
+        <p:style>
+          <a:lnRef idx="2">
+            <a:schemeClr val="accent1">
+              <a:lumMod val="75000"/>
+            </a:schemeClr>
+          </a:lnRef>
+          <a:fillRef idx="1">
+            <a:schemeClr val="accent1"/>
+          </a:fillRef>
+          <a:effectRef idx="0">
+            <a:srgbClr val="FFFFFF"/>
+          </a:effectRef>
+          <a:fontRef idx="minor">
+            <a:schemeClr val="lt1"/>
+          </a:fontRef>
+        </p:style>
+        <p:txBody>
+          <a:bodyPr rtlCol="0" anchor="ctr"/>
+          <a:lstStyle/>
+          <a:p>
+            <a:pPr algn="ctr"/>
+            <a:endParaRPr lang="zh-CN" altLang="en-US">
+              <a:solidFill>
+                <a:schemeClr val="tx1"/>
+              </a:solidFill>
+            </a:endParaRPr>
+          </a:p>
+        </p:txBody>
+      </p:sp>
+      <p:cxnSp>
+        <p:nvCxnSpPr>
+          <p:cNvPr id="13" name="直接连接符 12">
+            <a:extLst>
+              <a:ext uri="{FF2B5EF4-FFF2-40B4-BE49-F238E27FC236}">
+                <a16:creationId xmlns:a16="http://schemas.microsoft.com/office/drawing/2014/main" id="{2EB71867-BC2D-37F6-D2FE-B19B1046FA09}"/>
+              </a:ext>
+            </a:extLst>
+          </p:cNvPr>
+          <p:cNvCxnSpPr/>
+          <p:nvPr/>
+        </p:nvCxnSpPr>
+        <p:spPr>
+          <a:xfrm>
+            <a:off x="650457" y="1480820"/>
+            <a:ext cx="6546850" cy="14605"/>
+          </a:xfrm>
+          <a:prstGeom prst="line">
+            <a:avLst/>
+          </a:prstGeom>
+          <a:ln w="57150">
+            <a:solidFill>
+              <a:srgbClr val="FF5F05">
+                <a:alpha val="81000"/>
+              </a:srgbClr>
+            </a:solidFill>
+          </a:ln>
+        </p:spPr>
+        <p:style>
+          <a:lnRef idx="2">
+            <a:schemeClr val="accent1"/>
+          </a:lnRef>
+          <a:fillRef idx="0">
+            <a:srgbClr val="FFFFFF"/>
+          </a:fillRef>
+          <a:effectRef idx="0">
+            <a:srgbClr val="FFFFFF"/>
+          </a:effectRef>
+          <a:fontRef idx="minor">
+            <a:schemeClr val="tx1"/>
+          </a:fontRef>
+        </p:style>
+      </p:cxnSp>
+      <p:pic>
+        <p:nvPicPr>
+          <p:cNvPr id="100" name="图片 99">
+            <a:extLst>
+              <a:ext uri="{FF2B5EF4-FFF2-40B4-BE49-F238E27FC236}">
+                <a16:creationId xmlns:a16="http://schemas.microsoft.com/office/drawing/2014/main" id="{B9C01B72-ACDA-3241-6442-2283ED4AD889}"/>
+              </a:ext>
+            </a:extLst>
+          </p:cNvPr>
+          <p:cNvPicPr/>
+          <p:nvPr/>
+        </p:nvPicPr>
+        <p:blipFill>
+          <a:blip r:embed="rId4"/>
+          <a:stretch>
+            <a:fillRect/>
+          </a:stretch>
+        </p:blipFill>
+        <p:spPr>
+          <a:xfrm>
+            <a:off x="9906635" y="171450"/>
+            <a:ext cx="1906270" cy="1212850"/>
+          </a:xfrm>
+          <a:prstGeom prst="rect">
+            <a:avLst/>
+          </a:prstGeom>
+          <a:noFill/>
+          <a:ln w="9525">
+            <a:noFill/>
+          </a:ln>
+        </p:spPr>
+      </p:pic>
+      <p:sp>
+        <p:nvSpPr>
+          <p:cNvPr id="5" name="文本框 4">
+            <a:extLst>
+              <a:ext uri="{FF2B5EF4-FFF2-40B4-BE49-F238E27FC236}">
+                <a16:creationId xmlns:a16="http://schemas.microsoft.com/office/drawing/2014/main" id="{22D702D2-7240-025C-D1AF-F04EAF2D2C46}"/>
+              </a:ext>
+            </a:extLst>
+          </p:cNvPr>
+          <p:cNvSpPr txBox="1"/>
+          <p:nvPr/>
+        </p:nvSpPr>
+        <p:spPr>
+          <a:xfrm>
+            <a:off x="613543" y="1741049"/>
+            <a:ext cx="10964912" cy="1569660"/>
+          </a:xfrm>
+          <a:prstGeom prst="rect">
+            <a:avLst/>
+          </a:prstGeom>
+          <a:noFill/>
+        </p:spPr>
+        <p:txBody>
+          <a:bodyPr wrap="square" lIns="91440" tIns="45720" rIns="91440" bIns="45720" rtlCol="0" anchor="t">
+            <a:spAutoFit/>
+          </a:bodyPr>
+          <a:lstStyle/>
+          <a:p>
+            <a:pPr marL="457200" indent="-457200">
+              <a:spcAft>
+                <a:spcPts val="600"/>
+              </a:spcAft>
+              <a:buFont typeface="Arial" panose="020B0604020202020204" pitchFamily="34" charset="0"/>
+              <a:buChar char="•"/>
+            </a:pPr>
+            <a:r>
+              <a:rPr lang="en-US" altLang="zh-CN" sz="3200" dirty="0">
+                <a:solidFill>
+                  <a:srgbClr val="13294B"/>
+                </a:solidFill>
+                <a:latin typeface="Calibri"/>
+                <a:ea typeface="宋体"/>
+                <a:cs typeface="Calibri"/>
+              </a:rPr>
+              <a:t>The ECS is a two-dimensional rubric designed to measure not absolute empathy, but calibration. On how well a response’s empathetic register matches what the customer’s expressed.</a:t>
+            </a:r>
+          </a:p>
+        </p:txBody>
+      </p:sp>
+      <p:graphicFrame>
+        <p:nvGraphicFramePr>
+          <p:cNvPr id="2" name="表格 1">
+            <a:extLst>
+              <a:ext uri="{FF2B5EF4-FFF2-40B4-BE49-F238E27FC236}">
+                <a16:creationId xmlns:a16="http://schemas.microsoft.com/office/drawing/2014/main" id="{EBEB3E93-8E77-9C44-4C4D-10AF22356183}"/>
+              </a:ext>
+            </a:extLst>
+          </p:cNvPr>
+          <p:cNvGraphicFramePr>
+            <a:graphicFrameLocks noGrp="1"/>
+          </p:cNvGraphicFramePr>
+          <p:nvPr/>
+        </p:nvGraphicFramePr>
+        <p:xfrm>
+          <a:off x="914401" y="3803152"/>
+          <a:ext cx="10469571" cy="2533953"/>
+        </p:xfrm>
+        <a:graphic>
+          <a:graphicData uri="http://schemas.openxmlformats.org/drawingml/2006/table">
+            <a:tbl>
+              <a:tblPr firstRow="1" bandRow="1">
+                <a:tableStyleId>{21E4AEA4-8DFA-4A89-87EB-49C32662AFE0}</a:tableStyleId>
+              </a:tblPr>
+              <a:tblGrid>
+                <a:gridCol w="3489857">
+                  <a:extLst>
+                    <a:ext uri="{9D8B030D-6E8A-4147-A177-3AD203B41FA5}">
+                      <a16:colId xmlns:a16="http://schemas.microsoft.com/office/drawing/2014/main" val="2473411904"/>
+                    </a:ext>
+                  </a:extLst>
+                </a:gridCol>
+                <a:gridCol w="3489857">
+                  <a:extLst>
+                    <a:ext uri="{9D8B030D-6E8A-4147-A177-3AD203B41FA5}">
+                      <a16:colId xmlns:a16="http://schemas.microsoft.com/office/drawing/2014/main" val="1406048790"/>
+                    </a:ext>
+                  </a:extLst>
+                </a:gridCol>
+                <a:gridCol w="3489857">
+                  <a:extLst>
+                    <a:ext uri="{9D8B030D-6E8A-4147-A177-3AD203B41FA5}">
+                      <a16:colId xmlns:a16="http://schemas.microsoft.com/office/drawing/2014/main" val="3813345470"/>
+                    </a:ext>
+                  </a:extLst>
+                </a:gridCol>
+              </a:tblGrid>
+              <a:tr h="317802">
+                <a:tc>
+                  <a:txBody>
+                    <a:bodyPr/>
+                    <a:lstStyle/>
+                    <a:p>
+                      <a:r>
+                        <a:rPr lang="en-US" altLang="zh-CN" dirty="0"/>
+                        <a:t>Dimension</a:t>
+                      </a:r>
+                      <a:endParaRPr lang="zh-CN" altLang="en-US" dirty="0"/>
+                    </a:p>
+                  </a:txBody>
+                  <a:tcPr/>
+                </a:tc>
+                <a:tc>
+                  <a:txBody>
+                    <a:bodyPr/>
+                    <a:lstStyle/>
+                    <a:p>
+                      <a:r>
+                        <a:rPr lang="en-US" altLang="zh-CN" dirty="0"/>
+                        <a:t>Measurement</a:t>
+                      </a:r>
+                      <a:endParaRPr lang="zh-CN" altLang="en-US" dirty="0"/>
+                    </a:p>
+                  </a:txBody>
+                  <a:tcPr/>
+                </a:tc>
+                <a:tc>
+                  <a:txBody>
+                    <a:bodyPr/>
+                    <a:lstStyle/>
+                    <a:p>
+                      <a:r>
+                        <a:rPr lang="en-US" altLang="zh-CN" dirty="0"/>
+                        <a:t>Weight at high FIS</a:t>
+                      </a:r>
+                      <a:endParaRPr lang="zh-CN" altLang="en-US" dirty="0"/>
+                    </a:p>
+                  </a:txBody>
+                  <a:tcPr/>
+                </a:tc>
+                <a:extLst>
+                  <a:ext uri="{0D108BD9-81ED-4DB2-BD59-A6C34878D82A}">
+                    <a16:rowId xmlns:a16="http://schemas.microsoft.com/office/drawing/2014/main" val="208840510"/>
+                  </a:ext>
+                </a:extLst>
+              </a:tr>
+              <a:tr h="783620">
+                <a:tc>
+                  <a:txBody>
+                    <a:bodyPr/>
+                    <a:lstStyle/>
+                    <a:p>
+                      <a:r>
+                        <a:rPr lang="en-US" altLang="zh-CN" dirty="0"/>
+                        <a:t>Apology density</a:t>
+                      </a:r>
+                      <a:endParaRPr lang="zh-CN" altLang="en-US" dirty="0"/>
+                    </a:p>
+                  </a:txBody>
+                  <a:tcPr/>
+                </a:tc>
+                <a:tc>
+                  <a:txBody>
+                    <a:bodyPr/>
+                    <a:lstStyle/>
+                    <a:p>
+                      <a:r>
+                        <a:rPr lang="en-US" altLang="zh-CN" dirty="0"/>
+                        <a:t>Normalized count of apology/regret terms (regex). Fully auto mated.</a:t>
+                      </a:r>
+                      <a:endParaRPr lang="zh-CN" altLang="en-US" dirty="0"/>
+                    </a:p>
+                  </a:txBody>
+                  <a:tcPr/>
+                </a:tc>
+                <a:tc>
+                  <a:txBody>
+                    <a:bodyPr/>
+                    <a:lstStyle/>
+                    <a:p>
+                      <a:r>
+                        <a:rPr lang="en-US" altLang="zh-CN" dirty="0"/>
+                        <a:t>Higher weight</a:t>
+                      </a:r>
+                      <a:endParaRPr lang="zh-CN" altLang="en-US" dirty="0"/>
+                    </a:p>
+                  </a:txBody>
+                  <a:tcPr/>
+                </a:tc>
+                <a:extLst>
+                  <a:ext uri="{0D108BD9-81ED-4DB2-BD59-A6C34878D82A}">
+                    <a16:rowId xmlns:a16="http://schemas.microsoft.com/office/drawing/2014/main" val="1428517476"/>
+                  </a:ext>
+                </a:extLst>
+              </a:tr>
+              <a:tr h="1253793">
+                <a:tc>
+                  <a:txBody>
+                    <a:bodyPr/>
+                    <a:lstStyle/>
+                    <a:p>
+                      <a:r>
+                        <a:rPr lang="en-US" altLang="zh-CN" dirty="0"/>
+                        <a:t>Tone-frustration fit</a:t>
+                      </a:r>
+                      <a:endParaRPr lang="zh-CN" altLang="en-US" dirty="0"/>
+                    </a:p>
+                  </a:txBody>
+                  <a:tcPr/>
+                </a:tc>
+                <a:tc>
+                  <a:txBody>
+                    <a:bodyPr/>
+                    <a:lstStyle/>
+                    <a:p>
+                      <a:r>
+                        <a:rPr lang="en-US" altLang="zh-CN" dirty="0"/>
+                        <a:t>LLM-as-judge (GPT 4o) scores 1–5: does the response tone match the emotional register of the complaint?</a:t>
+                      </a:r>
+                      <a:endParaRPr lang="zh-CN" altLang="en-US" dirty="0"/>
+                    </a:p>
+                  </a:txBody>
+                  <a:tcPr/>
+                </a:tc>
+                <a:tc>
+                  <a:txBody>
+                    <a:bodyPr/>
+                    <a:lstStyle/>
+                    <a:p>
+                      <a:r>
+                        <a:rPr lang="en-US" altLang="zh-CN" dirty="0"/>
+                        <a:t>Equal weight</a:t>
+                      </a:r>
+                      <a:endParaRPr lang="zh-CN" altLang="en-US" dirty="0"/>
+                    </a:p>
+                  </a:txBody>
+                  <a:tcPr/>
+                </a:tc>
+                <a:extLst>
+                  <a:ext uri="{0D108BD9-81ED-4DB2-BD59-A6C34878D82A}">
+                    <a16:rowId xmlns:a16="http://schemas.microsoft.com/office/drawing/2014/main" val="1053424"/>
+                  </a:ext>
+                </a:extLst>
+              </a:tr>
+            </a:tbl>
+          </a:graphicData>
+        </a:graphic>
+      </p:graphicFrame>
+    </p:spTree>
+    <p:extLst>
+      <p:ext uri="{BB962C8B-B14F-4D97-AF65-F5344CB8AC3E}">
+        <p14:creationId xmlns:p14="http://schemas.microsoft.com/office/powerpoint/2010/main" val="2004030987"/>
       </p:ext>
     </p:extLst>
   </p:cSld>
@@ -15679,12 +15067,6 @@
 </file>
 
 <file path=ppt/tags/tag15.xml><?xml version="1.0" encoding="utf-8"?>
-<p:tagLst xmlns:a="http://schemas.openxmlformats.org/drawingml/2006/main" xmlns:r="http://schemas.openxmlformats.org/officeDocument/2006/relationships" xmlns:p="http://schemas.openxmlformats.org/presentationml/2006/main">
-  <p:tag name="KSO_WM_BEAUTIFY_FLAG" val=""/>
-</p:tagLst>
-</file>
-
-<file path=ppt/tags/tag16.xml><?xml version="1.0" encoding="utf-8"?>
 <p:tagLst xmlns:a="http://schemas.openxmlformats.org/drawingml/2006/main" xmlns:r="http://schemas.openxmlformats.org/officeDocument/2006/relationships" xmlns:p="http://schemas.openxmlformats.org/presentationml/2006/main">
   <p:tag name="KSO_WM_BEAUTIFY_FLAG" val=""/>
 </p:tagLst>

--- a/src/Files/Final_ppt.pptx
+++ b/src/Files/Final_ppt.pptx
@@ -5,7 +5,7 @@
     <p:sldMasterId id="2147483648" r:id="rId1"/>
   </p:sldMasterIdLst>
   <p:notesMasterIdLst>
-    <p:notesMasterId r:id="rId17"/>
+    <p:notesMasterId r:id="rId18"/>
   </p:notesMasterIdLst>
   <p:sldIdLst>
     <p:sldId id="263" r:id="rId2"/>
@@ -20,9 +20,10 @@
     <p:sldId id="296" r:id="rId11"/>
     <p:sldId id="300" r:id="rId12"/>
     <p:sldId id="308" r:id="rId13"/>
-    <p:sldId id="302" r:id="rId14"/>
-    <p:sldId id="303" r:id="rId15"/>
-    <p:sldId id="301" r:id="rId16"/>
+    <p:sldId id="310" r:id="rId14"/>
+    <p:sldId id="302" r:id="rId15"/>
+    <p:sldId id="303" r:id="rId16"/>
+    <p:sldId id="301" r:id="rId17"/>
   </p:sldIdLst>
   <p:sldSz cx="12192000" cy="6858000"/>
   <p:notesSz cx="6858000" cy="9144000"/>
@@ -2081,6 +2082,170 @@
         <p:cNvPr id="1" name="">
           <a:extLst>
             <a:ext uri="{FF2B5EF4-FFF2-40B4-BE49-F238E27FC236}">
+              <a16:creationId xmlns:a16="http://schemas.microsoft.com/office/drawing/2014/main" id="{210B3B8C-FD09-5EA3-E3E4-4408CF90EC7E}"/>
+            </a:ext>
+          </a:extLst>
+        </p:cNvPr>
+        <p:cNvGrpSpPr/>
+        <p:nvPr/>
+      </p:nvGrpSpPr>
+      <p:grpSpPr>
+        <a:xfrm>
+          <a:off x="0" y="0"/>
+          <a:ext cx="0" cy="0"/>
+          <a:chOff x="0" y="0"/>
+          <a:chExt cx="0" cy="0"/>
+        </a:xfrm>
+      </p:grpSpPr>
+      <p:sp>
+        <p:nvSpPr>
+          <p:cNvPr id="2" name="幻灯片图像占位符 1">
+            <a:extLst>
+              <a:ext uri="{FF2B5EF4-FFF2-40B4-BE49-F238E27FC236}">
+                <a16:creationId xmlns:a16="http://schemas.microsoft.com/office/drawing/2014/main" id="{10BC2EA1-4536-3018-31FB-A0EDA3EE2EF7}"/>
+              </a:ext>
+            </a:extLst>
+          </p:cNvPr>
+          <p:cNvSpPr>
+            <a:spLocks noGrp="1" noRot="1" noChangeAspect="1"/>
+          </p:cNvSpPr>
+          <p:nvPr>
+            <p:ph type="sldImg"/>
+          </p:nvPr>
+        </p:nvSpPr>
+        <p:spPr/>
+      </p:sp>
+      <p:sp>
+        <p:nvSpPr>
+          <p:cNvPr id="3" name="备注占位符 2">
+            <a:extLst>
+              <a:ext uri="{FF2B5EF4-FFF2-40B4-BE49-F238E27FC236}">
+                <a16:creationId xmlns:a16="http://schemas.microsoft.com/office/drawing/2014/main" id="{F466AF25-165C-D947-2115-34544F7DCE6C}"/>
+              </a:ext>
+            </a:extLst>
+          </p:cNvPr>
+          <p:cNvSpPr>
+            <a:spLocks noGrp="1"/>
+          </p:cNvSpPr>
+          <p:nvPr>
+            <p:ph type="body" idx="1"/>
+          </p:nvPr>
+        </p:nvSpPr>
+        <p:spPr/>
+        <p:txBody>
+          <a:bodyPr/>
+          <a:lstStyle/>
+          <a:p>
+            <a:pPr algn="l">
+              <a:spcBef>
+                <a:spcPts val="450"/>
+              </a:spcBef>
+              <a:spcAft>
+                <a:spcPts val="450"/>
+              </a:spcAft>
+            </a:pPr>
+            <a:r>
+              <a:rPr lang="en-US" altLang="zh-CN" sz="1800" b="1" i="0">
+                <a:solidFill>
+                  <a:srgbClr val="2D3B45"/>
+                </a:solidFill>
+                <a:effectLst/>
+                <a:latin typeface="Lato Extended"/>
+              </a:rPr>
+              <a:t>Introduction Slide</a:t>
+            </a:r>
+            <a:endParaRPr lang="en-US" altLang="zh-CN" sz="1800" b="0" i="0">
+              <a:solidFill>
+                <a:srgbClr val="2D3B45"/>
+              </a:solidFill>
+              <a:effectLst/>
+              <a:latin typeface="Lato Extended"/>
+            </a:endParaRPr>
+          </a:p>
+          <a:p>
+            <a:pPr algn="l">
+              <a:spcAft>
+                <a:spcPts val="450"/>
+              </a:spcAft>
+              <a:buFont typeface="Arial" panose="020B0604020202020204" pitchFamily="34" charset="0"/>
+              <a:buChar char="•"/>
+            </a:pPr>
+            <a:r>
+              <a:rPr lang="en-US" altLang="zh-CN" sz="1800" b="1" i="0">
+                <a:solidFill>
+                  <a:srgbClr val="2D3B45"/>
+                </a:solidFill>
+                <a:effectLst/>
+                <a:latin typeface="v-sans"/>
+              </a:rPr>
+              <a:t>Brief Introduction:</a:t>
+            </a:r>
+            <a:r>
+              <a:rPr lang="en-US" altLang="zh-CN" sz="1800" b="0" i="0">
+                <a:solidFill>
+                  <a:srgbClr val="2D3B45"/>
+                </a:solidFill>
+                <a:effectLst/>
+                <a:latin typeface="v-sans"/>
+              </a:rPr>
+              <a:t> of the team and the topic</a:t>
+            </a:r>
+          </a:p>
+          <a:p>
+            <a:endParaRPr lang="zh-CN" altLang="en-US"/>
+          </a:p>
+        </p:txBody>
+      </p:sp>
+      <p:sp>
+        <p:nvSpPr>
+          <p:cNvPr id="4" name="灯片编号占位符 3">
+            <a:extLst>
+              <a:ext uri="{FF2B5EF4-FFF2-40B4-BE49-F238E27FC236}">
+                <a16:creationId xmlns:a16="http://schemas.microsoft.com/office/drawing/2014/main" id="{86628070-799D-01BF-5B05-1CA79797713E}"/>
+              </a:ext>
+            </a:extLst>
+          </p:cNvPr>
+          <p:cNvSpPr>
+            <a:spLocks noGrp="1"/>
+          </p:cNvSpPr>
+          <p:nvPr>
+            <p:ph type="sldNum" sz="quarter" idx="5"/>
+          </p:nvPr>
+        </p:nvSpPr>
+        <p:spPr/>
+        <p:txBody>
+          <a:bodyPr/>
+          <a:lstStyle/>
+          <a:p>
+            <a:fld id="{EED2C466-1B0F-4591-A952-5F31096967DE}" type="slidenum">
+              <a:rPr lang="zh-CN" altLang="en-US" smtClean="0"/>
+              <a:t>13</a:t>
+            </a:fld>
+            <a:endParaRPr lang="zh-CN" altLang="en-US"/>
+          </a:p>
+        </p:txBody>
+      </p:sp>
+    </p:spTree>
+    <p:extLst>
+      <p:ext uri="{BB962C8B-B14F-4D97-AF65-F5344CB8AC3E}">
+        <p14:creationId xmlns:p14="http://schemas.microsoft.com/office/powerpoint/2010/main" val="3177637840"/>
+      </p:ext>
+    </p:extLst>
+  </p:cSld>
+  <p:clrMapOvr>
+    <a:masterClrMapping/>
+  </p:clrMapOvr>
+</p:notes>
+</file>
+
+<file path=ppt/notesSlides/notesSlide14.xml><?xml version="1.0" encoding="utf-8"?>
+<p:notes xmlns:a="http://schemas.openxmlformats.org/drawingml/2006/main" xmlns:r="http://schemas.openxmlformats.org/officeDocument/2006/relationships" xmlns:p="http://schemas.openxmlformats.org/presentationml/2006/main">
+  <p:cSld>
+    <p:spTree>
+      <p:nvGrpSpPr>
+        <p:cNvPr id="1" name="">
+          <a:extLst>
+            <a:ext uri="{FF2B5EF4-FFF2-40B4-BE49-F238E27FC236}">
               <a16:creationId xmlns:a16="http://schemas.microsoft.com/office/drawing/2014/main" id="{332DE000-5F2E-A923-B03F-62E005DC2D2E}"/>
             </a:ext>
           </a:extLst>
@@ -2218,7 +2383,7 @@
           <a:p>
             <a:fld id="{EED2C466-1B0F-4591-A952-5F31096967DE}" type="slidenum">
               <a:rPr lang="zh-CN" altLang="en-US" smtClean="0"/>
-              <a:t>13</a:t>
+              <a:t>14</a:t>
             </a:fld>
             <a:endParaRPr lang="zh-CN" altLang="en-US"/>
           </a:p>
@@ -2237,7 +2402,7 @@
 </p:notes>
 </file>
 
-<file path=ppt/notesSlides/notesSlide14.xml><?xml version="1.0" encoding="utf-8"?>
+<file path=ppt/notesSlides/notesSlide15.xml><?xml version="1.0" encoding="utf-8"?>
 <p:notes xmlns:a="http://schemas.openxmlformats.org/drawingml/2006/main" xmlns:r="http://schemas.openxmlformats.org/officeDocument/2006/relationships" xmlns:p="http://schemas.openxmlformats.org/presentationml/2006/main">
   <p:cSld>
     <p:spTree>
@@ -2382,7 +2547,7 @@
           <a:p>
             <a:fld id="{EED2C466-1B0F-4591-A952-5F31096967DE}" type="slidenum">
               <a:rPr lang="zh-CN" altLang="en-US" smtClean="0"/>
-              <a:t>14</a:t>
+              <a:t>15</a:t>
             </a:fld>
             <a:endParaRPr lang="zh-CN" altLang="en-US"/>
           </a:p>
@@ -2401,7 +2566,7 @@
 </p:notes>
 </file>
 
-<file path=ppt/notesSlides/notesSlide15.xml><?xml version="1.0" encoding="utf-8"?>
+<file path=ppt/notesSlides/notesSlide16.xml><?xml version="1.0" encoding="utf-8"?>
 <p:notes xmlns:a="http://schemas.openxmlformats.org/drawingml/2006/main" xmlns:r="http://schemas.openxmlformats.org/officeDocument/2006/relationships" xmlns:p="http://schemas.openxmlformats.org/presentationml/2006/main">
   <p:cSld>
     <p:spTree>
@@ -2546,7 +2711,7 @@
           <a:p>
             <a:fld id="{EED2C466-1B0F-4591-A952-5F31096967DE}" type="slidenum">
               <a:rPr lang="zh-CN" altLang="en-US" smtClean="0"/>
-              <a:t>15</a:t>
+              <a:t>16</a:t>
             </a:fld>
             <a:endParaRPr lang="zh-CN" altLang="en-US"/>
           </a:p>
@@ -8777,6 +8942,36 @@
           </a:p>
         </p:txBody>
       </p:sp>
+      <p:pic>
+        <p:nvPicPr>
+          <p:cNvPr id="6" name="图片 5">
+            <a:extLst>
+              <a:ext uri="{FF2B5EF4-FFF2-40B4-BE49-F238E27FC236}">
+                <a16:creationId xmlns:a16="http://schemas.microsoft.com/office/drawing/2014/main" id="{6910E73C-F43A-5E24-754C-FBEBFA42C7EA}"/>
+              </a:ext>
+            </a:extLst>
+          </p:cNvPr>
+          <p:cNvPicPr>
+            <a:picLocks noChangeAspect="1"/>
+          </p:cNvPicPr>
+          <p:nvPr/>
+        </p:nvPicPr>
+        <p:blipFill>
+          <a:blip r:embed="rId5"/>
+          <a:stretch>
+            <a:fillRect/>
+          </a:stretch>
+        </p:blipFill>
+        <p:spPr>
+          <a:xfrm>
+            <a:off x="1447799" y="2414587"/>
+            <a:ext cx="9296400" cy="2847975"/>
+          </a:xfrm>
+          <a:prstGeom prst="rect">
+            <a:avLst/>
+          </a:prstGeom>
+        </p:spPr>
+      </p:pic>
     </p:spTree>
     <p:extLst>
       <p:ext uri="{BB962C8B-B14F-4D97-AF65-F5344CB8AC3E}">
@@ -8798,7 +8993,7 @@
         <p:cNvPr id="1" name="">
           <a:extLst>
             <a:ext uri="{FF2B5EF4-FFF2-40B4-BE49-F238E27FC236}">
-              <a16:creationId xmlns:a16="http://schemas.microsoft.com/office/drawing/2014/main" id="{E7A27B3F-C0CE-A9E4-1359-4A4A0BE2AFC3}"/>
+              <a16:creationId xmlns:a16="http://schemas.microsoft.com/office/drawing/2014/main" id="{43CCA2BB-D674-4E34-7253-35E34CCC66D9}"/>
             </a:ext>
           </a:extLst>
         </p:cNvPr>
@@ -8818,7 +9013,7 @@
           <p:cNvPr id="3" name="图文框 2">
             <a:extLst>
               <a:ext uri="{FF2B5EF4-FFF2-40B4-BE49-F238E27FC236}">
-                <a16:creationId xmlns:a16="http://schemas.microsoft.com/office/drawing/2014/main" id="{8131D144-1C33-0B46-47AE-EF50F1FFB937}"/>
+                <a16:creationId xmlns:a16="http://schemas.microsoft.com/office/drawing/2014/main" id="{4BD687AE-DB25-6C8D-A195-A88C37159C70}"/>
               </a:ext>
             </a:extLst>
           </p:cNvPr>
@@ -8881,7 +9076,7 @@
           <p:cNvPr id="4" name="文本框 3">
             <a:extLst>
               <a:ext uri="{FF2B5EF4-FFF2-40B4-BE49-F238E27FC236}">
-                <a16:creationId xmlns:a16="http://schemas.microsoft.com/office/drawing/2014/main" id="{ADE65386-35E8-BF11-F93A-219CCB3C9886}"/>
+                <a16:creationId xmlns:a16="http://schemas.microsoft.com/office/drawing/2014/main" id="{12172521-EABA-4F11-DA59-812489D75D42}"/>
               </a:ext>
             </a:extLst>
           </p:cNvPr>
@@ -8913,7 +9108,7 @@
                 <a:ea typeface="等线"/>
                 <a:cs typeface="+mj-lt"/>
               </a:rPr>
-              <a:t>Conclusion &amp; Limitation</a:t>
+              <a:t>Experiments</a:t>
             </a:r>
           </a:p>
         </p:txBody>
@@ -8923,7 +9118,7 @@
           <p:cNvPr id="9" name="半闭框 8">
             <a:extLst>
               <a:ext uri="{FF2B5EF4-FFF2-40B4-BE49-F238E27FC236}">
-                <a16:creationId xmlns:a16="http://schemas.microsoft.com/office/drawing/2014/main" id="{FDD4F1B0-E911-555A-86C0-A48E753525CD}"/>
+                <a16:creationId xmlns:a16="http://schemas.microsoft.com/office/drawing/2014/main" id="{655CC725-34FF-2160-D3CC-D78EBB325AB4}"/>
               </a:ext>
             </a:extLst>
           </p:cNvPr>
@@ -8984,7 +9179,7 @@
           <p:cNvPr id="10" name="半闭框 9">
             <a:extLst>
               <a:ext uri="{FF2B5EF4-FFF2-40B4-BE49-F238E27FC236}">
-                <a16:creationId xmlns:a16="http://schemas.microsoft.com/office/drawing/2014/main" id="{C169AE3C-9591-D19E-1694-127228FA4A4A}"/>
+                <a16:creationId xmlns:a16="http://schemas.microsoft.com/office/drawing/2014/main" id="{82399F1D-E3F0-E6A8-73B5-2069B6142036}"/>
               </a:ext>
             </a:extLst>
           </p:cNvPr>
@@ -9049,7 +9244,7 @@
           <p:cNvPr id="13" name="直接连接符 12">
             <a:extLst>
               <a:ext uri="{FF2B5EF4-FFF2-40B4-BE49-F238E27FC236}">
-                <a16:creationId xmlns:a16="http://schemas.microsoft.com/office/drawing/2014/main" id="{C43D726A-5493-F579-0CA0-10B9C9CA6E98}"/>
+                <a16:creationId xmlns:a16="http://schemas.microsoft.com/office/drawing/2014/main" id="{AE743494-7DCA-402D-B148-8076DB100667}"/>
               </a:ext>
             </a:extLst>
           </p:cNvPr>
@@ -9092,7 +9287,7 @@
           <p:cNvPr id="100" name="图片 99">
             <a:extLst>
               <a:ext uri="{FF2B5EF4-FFF2-40B4-BE49-F238E27FC236}">
-                <a16:creationId xmlns:a16="http://schemas.microsoft.com/office/drawing/2014/main" id="{F73F639D-26B1-9CD6-7383-43CB03DB13CF}"/>
+                <a16:creationId xmlns:a16="http://schemas.microsoft.com/office/drawing/2014/main" id="{639A0846-4F75-10A0-EC2E-1D2F69D48EDB}"/>
               </a:ext>
             </a:extLst>
           </p:cNvPr>
@@ -9124,7 +9319,7 @@
           <p:cNvPr id="5" name="文本框 4">
             <a:extLst>
               <a:ext uri="{FF2B5EF4-FFF2-40B4-BE49-F238E27FC236}">
-                <a16:creationId xmlns:a16="http://schemas.microsoft.com/office/drawing/2014/main" id="{25D8EBBB-7D89-A5FE-3A8C-9E9CFB312697}"/>
+                <a16:creationId xmlns:a16="http://schemas.microsoft.com/office/drawing/2014/main" id="{9663ED50-A044-4AB3-767A-19700ED97302}"/>
               </a:ext>
             </a:extLst>
           </p:cNvPr>
@@ -9134,7 +9329,7 @@
         <p:spPr>
           <a:xfrm>
             <a:off x="613543" y="1741049"/>
-            <a:ext cx="10964912" cy="4001095"/>
+            <a:ext cx="10964912" cy="584775"/>
           </a:xfrm>
           <a:prstGeom prst="rect">
             <a:avLst/>
@@ -9155,7 +9350,7 @@
               <a:buChar char="•"/>
             </a:pPr>
             <a:r>
-              <a:rPr lang="en-US" altLang="zh-CN" sz="3200" b="1" dirty="0">
+              <a:rPr lang="en-US" altLang="zh-CN" sz="3200" dirty="0">
                 <a:solidFill>
                   <a:srgbClr val="13294B"/>
                 </a:solidFill>
@@ -9163,78 +9358,9 @@
                 <a:ea typeface="宋体"/>
                 <a:cs typeface="Calibri"/>
               </a:rPr>
-              <a:t>Conclusion 1:</a:t>
-            </a:r>
-          </a:p>
-          <a:p>
-            <a:pPr marL="914400" lvl="1" indent="-457200">
-              <a:spcAft>
-                <a:spcPts val="600"/>
-              </a:spcAft>
-              <a:buFont typeface="Arial" panose="020B0604020202020204" pitchFamily="34" charset="0"/>
-              <a:buChar char="•"/>
-            </a:pPr>
-            <a:r>
-              <a:rPr lang="en-US" altLang="zh-CN" sz="3200" dirty="0">
-                <a:solidFill>
-                  <a:srgbClr val="13294B"/>
-                </a:solidFill>
-                <a:latin typeface="Calibri"/>
-                <a:ea typeface="宋体"/>
-                <a:cs typeface="Calibri"/>
-              </a:rPr>
-              <a:t>11112222</a:t>
-            </a:r>
-          </a:p>
-          <a:p>
-            <a:pPr marL="457200" indent="-457200">
-              <a:spcAft>
-                <a:spcPts val="600"/>
-              </a:spcAft>
-              <a:buFont typeface="Arial" panose="020B0604020202020204" pitchFamily="34" charset="0"/>
-              <a:buChar char="•"/>
-            </a:pPr>
-            <a:r>
-              <a:rPr lang="en-US" altLang="zh-CN" sz="3200" b="1" dirty="0">
-                <a:solidFill>
-                  <a:srgbClr val="13294B"/>
-                </a:solidFill>
-                <a:latin typeface="Calibri"/>
-                <a:ea typeface="宋体"/>
-                <a:cs typeface="Calibri"/>
-              </a:rPr>
-              <a:t>Conclusion 2:</a:t>
-            </a:r>
-          </a:p>
-          <a:p>
-            <a:pPr marL="914400" lvl="1" indent="-457200">
-              <a:spcAft>
-                <a:spcPts val="600"/>
-              </a:spcAft>
-              <a:buFont typeface="Arial" panose="020B0604020202020204" pitchFamily="34" charset="0"/>
-              <a:buChar char="•"/>
-            </a:pPr>
-            <a:r>
-              <a:rPr lang="en-US" altLang="zh-CN" sz="3200" dirty="0">
-                <a:solidFill>
-                  <a:srgbClr val="13294B"/>
-                </a:solidFill>
-                <a:latin typeface="Calibri"/>
-                <a:ea typeface="宋体"/>
-                <a:cs typeface="Calibri"/>
-              </a:rPr>
-              <a:t>22223333</a:t>
-            </a:r>
-          </a:p>
-          <a:p>
-            <a:pPr marL="457200" indent="-457200">
-              <a:spcAft>
-                <a:spcPts val="600"/>
-              </a:spcAft>
-              <a:buFont typeface="Arial" panose="020B0604020202020204" pitchFamily="34" charset="0"/>
-              <a:buChar char="•"/>
-            </a:pPr>
-            <a:endParaRPr lang="en-US" altLang="zh-CN" sz="3200" b="1" dirty="0">
+              <a:t>Results:</a:t>
+            </a:r>
+            <a:endParaRPr lang="en-US" altLang="zh-CN" sz="2000" dirty="0">
               <a:solidFill>
                 <a:srgbClr val="13294B"/>
               </a:solidFill>
@@ -9243,47 +9369,42 @@
               <a:cs typeface="Calibri"/>
             </a:endParaRPr>
           </a:p>
-          <a:p>
-            <a:pPr marL="457200" indent="-457200">
-              <a:spcAft>
-                <a:spcPts val="600"/>
-              </a:spcAft>
-              <a:buFont typeface="Arial" panose="020B0604020202020204" pitchFamily="34" charset="0"/>
-              <a:buChar char="•"/>
-            </a:pPr>
-            <a:endParaRPr lang="en-US" altLang="zh-CN" sz="3200" b="1" dirty="0">
-              <a:solidFill>
-                <a:srgbClr val="13294B"/>
-              </a:solidFill>
-              <a:latin typeface="Calibri"/>
-              <a:ea typeface="宋体"/>
-              <a:cs typeface="Calibri"/>
-            </a:endParaRPr>
-          </a:p>
-          <a:p>
-            <a:pPr>
-              <a:spcAft>
-                <a:spcPts val="600"/>
-              </a:spcAft>
-            </a:pPr>
-            <a:r>
-              <a:rPr lang="en-US" altLang="zh-CN" sz="3200" b="1" dirty="0">
-                <a:solidFill>
-                  <a:srgbClr val="13294B"/>
-                </a:solidFill>
-                <a:latin typeface="Calibri"/>
-                <a:ea typeface="宋体"/>
-                <a:cs typeface="Calibri"/>
-              </a:rPr>
-              <a:t> </a:t>
-            </a:r>
-          </a:p>
-        </p:txBody>
-      </p:sp>
+        </p:txBody>
+      </p:sp>
+      <p:pic>
+        <p:nvPicPr>
+          <p:cNvPr id="7" name="图片 6">
+            <a:extLst>
+              <a:ext uri="{FF2B5EF4-FFF2-40B4-BE49-F238E27FC236}">
+                <a16:creationId xmlns:a16="http://schemas.microsoft.com/office/drawing/2014/main" id="{53AF0997-EDB5-88E5-A955-18AE37FF0811}"/>
+              </a:ext>
+            </a:extLst>
+          </p:cNvPr>
+          <p:cNvPicPr>
+            <a:picLocks noChangeAspect="1"/>
+          </p:cNvPicPr>
+          <p:nvPr/>
+        </p:nvPicPr>
+        <p:blipFill>
+          <a:blip r:embed="rId5"/>
+          <a:stretch>
+            <a:fillRect/>
+          </a:stretch>
+        </p:blipFill>
+        <p:spPr>
+          <a:xfrm>
+            <a:off x="2333624" y="2529205"/>
+            <a:ext cx="7524750" cy="2847975"/>
+          </a:xfrm>
+          <a:prstGeom prst="rect">
+            <a:avLst/>
+          </a:prstGeom>
+        </p:spPr>
+      </p:pic>
     </p:spTree>
     <p:extLst>
       <p:ext uri="{BB962C8B-B14F-4D97-AF65-F5344CB8AC3E}">
-        <p14:creationId xmlns:p14="http://schemas.microsoft.com/office/powerpoint/2010/main" val="3520523714"/>
+        <p14:creationId xmlns:p14="http://schemas.microsoft.com/office/powerpoint/2010/main" val="1693340571"/>
       </p:ext>
     </p:extLst>
   </p:cSld>
@@ -9301,7 +9422,7 @@
         <p:cNvPr id="1" name="">
           <a:extLst>
             <a:ext uri="{FF2B5EF4-FFF2-40B4-BE49-F238E27FC236}">
-              <a16:creationId xmlns:a16="http://schemas.microsoft.com/office/drawing/2014/main" id="{F0992A2E-AFD7-9943-2519-30DF0B2846D5}"/>
+              <a16:creationId xmlns:a16="http://schemas.microsoft.com/office/drawing/2014/main" id="{E7A27B3F-C0CE-A9E4-1359-4A4A0BE2AFC3}"/>
             </a:ext>
           </a:extLst>
         </p:cNvPr>
@@ -9321,7 +9442,7 @@
           <p:cNvPr id="3" name="图文框 2">
             <a:extLst>
               <a:ext uri="{FF2B5EF4-FFF2-40B4-BE49-F238E27FC236}">
-                <a16:creationId xmlns:a16="http://schemas.microsoft.com/office/drawing/2014/main" id="{2496E383-A7BE-C8AE-CAC4-8F5A48022BA5}"/>
+                <a16:creationId xmlns:a16="http://schemas.microsoft.com/office/drawing/2014/main" id="{8131D144-1C33-0B46-47AE-EF50F1FFB937}"/>
               </a:ext>
             </a:extLst>
           </p:cNvPr>
@@ -9384,7 +9505,7 @@
           <p:cNvPr id="4" name="文本框 3">
             <a:extLst>
               <a:ext uri="{FF2B5EF4-FFF2-40B4-BE49-F238E27FC236}">
-                <a16:creationId xmlns:a16="http://schemas.microsoft.com/office/drawing/2014/main" id="{A9FB4F93-AF84-404A-0BBB-4422EC37B4FC}"/>
+                <a16:creationId xmlns:a16="http://schemas.microsoft.com/office/drawing/2014/main" id="{ADE65386-35E8-BF11-F93A-219CCB3C9886}"/>
               </a:ext>
             </a:extLst>
           </p:cNvPr>
@@ -9416,7 +9537,7 @@
                 <a:ea typeface="等线"/>
                 <a:cs typeface="+mj-lt"/>
               </a:rPr>
-              <a:t>Future Works</a:t>
+              <a:t>Conclusion &amp; Limitation</a:t>
             </a:r>
           </a:p>
         </p:txBody>
@@ -9426,7 +9547,7 @@
           <p:cNvPr id="9" name="半闭框 8">
             <a:extLst>
               <a:ext uri="{FF2B5EF4-FFF2-40B4-BE49-F238E27FC236}">
-                <a16:creationId xmlns:a16="http://schemas.microsoft.com/office/drawing/2014/main" id="{3FF36AB2-62E7-1DE0-937F-961918895C1B}"/>
+                <a16:creationId xmlns:a16="http://schemas.microsoft.com/office/drawing/2014/main" id="{FDD4F1B0-E911-555A-86C0-A48E753525CD}"/>
               </a:ext>
             </a:extLst>
           </p:cNvPr>
@@ -9487,7 +9608,7 @@
           <p:cNvPr id="10" name="半闭框 9">
             <a:extLst>
               <a:ext uri="{FF2B5EF4-FFF2-40B4-BE49-F238E27FC236}">
-                <a16:creationId xmlns:a16="http://schemas.microsoft.com/office/drawing/2014/main" id="{619808A8-0E2B-499B-9C3E-6AFFF5F65A3F}"/>
+                <a16:creationId xmlns:a16="http://schemas.microsoft.com/office/drawing/2014/main" id="{C169AE3C-9591-D19E-1694-127228FA4A4A}"/>
               </a:ext>
             </a:extLst>
           </p:cNvPr>
@@ -9552,7 +9673,7 @@
           <p:cNvPr id="13" name="直接连接符 12">
             <a:extLst>
               <a:ext uri="{FF2B5EF4-FFF2-40B4-BE49-F238E27FC236}">
-                <a16:creationId xmlns:a16="http://schemas.microsoft.com/office/drawing/2014/main" id="{2782AA16-8086-7957-4CEE-D968A6DB722F}"/>
+                <a16:creationId xmlns:a16="http://schemas.microsoft.com/office/drawing/2014/main" id="{C43D726A-5493-F579-0CA0-10B9C9CA6E98}"/>
               </a:ext>
             </a:extLst>
           </p:cNvPr>
@@ -9595,7 +9716,7 @@
           <p:cNvPr id="100" name="图片 99">
             <a:extLst>
               <a:ext uri="{FF2B5EF4-FFF2-40B4-BE49-F238E27FC236}">
-                <a16:creationId xmlns:a16="http://schemas.microsoft.com/office/drawing/2014/main" id="{F71171B4-C3D9-CF5C-7B4B-56EFAAF3183B}"/>
+                <a16:creationId xmlns:a16="http://schemas.microsoft.com/office/drawing/2014/main" id="{F73F639D-26B1-9CD6-7383-43CB03DB13CF}"/>
               </a:ext>
             </a:extLst>
           </p:cNvPr>
@@ -9627,7 +9748,7 @@
           <p:cNvPr id="5" name="文本框 4">
             <a:extLst>
               <a:ext uri="{FF2B5EF4-FFF2-40B4-BE49-F238E27FC236}">
-                <a16:creationId xmlns:a16="http://schemas.microsoft.com/office/drawing/2014/main" id="{66732831-3A48-AA96-5C7E-EF953BA75DE0}"/>
+                <a16:creationId xmlns:a16="http://schemas.microsoft.com/office/drawing/2014/main" id="{25D8EBBB-7D89-A5FE-3A8C-9E9CFB312697}"/>
               </a:ext>
             </a:extLst>
           </p:cNvPr>
@@ -9786,6 +9907,509 @@
     </p:spTree>
     <p:extLst>
       <p:ext uri="{BB962C8B-B14F-4D97-AF65-F5344CB8AC3E}">
+        <p14:creationId xmlns:p14="http://schemas.microsoft.com/office/powerpoint/2010/main" val="3520523714"/>
+      </p:ext>
+    </p:extLst>
+  </p:cSld>
+  <p:clrMapOvr>
+    <a:masterClrMapping/>
+  </p:clrMapOvr>
+</p:sld>
+</file>
+
+<file path=ppt/slides/slide15.xml><?xml version="1.0" encoding="utf-8"?>
+<p:sld xmlns:a="http://schemas.openxmlformats.org/drawingml/2006/main" xmlns:r="http://schemas.openxmlformats.org/officeDocument/2006/relationships" xmlns:p="http://schemas.openxmlformats.org/presentationml/2006/main">
+  <p:cSld>
+    <p:spTree>
+      <p:nvGrpSpPr>
+        <p:cNvPr id="1" name="">
+          <a:extLst>
+            <a:ext uri="{FF2B5EF4-FFF2-40B4-BE49-F238E27FC236}">
+              <a16:creationId xmlns:a16="http://schemas.microsoft.com/office/drawing/2014/main" id="{F0992A2E-AFD7-9943-2519-30DF0B2846D5}"/>
+            </a:ext>
+          </a:extLst>
+        </p:cNvPr>
+        <p:cNvGrpSpPr/>
+        <p:nvPr/>
+      </p:nvGrpSpPr>
+      <p:grpSpPr>
+        <a:xfrm>
+          <a:off x="0" y="0"/>
+          <a:ext cx="0" cy="0"/>
+          <a:chOff x="0" y="0"/>
+          <a:chExt cx="0" cy="0"/>
+        </a:xfrm>
+      </p:grpSpPr>
+      <p:sp>
+        <p:nvSpPr>
+          <p:cNvPr id="3" name="图文框 2">
+            <a:extLst>
+              <a:ext uri="{FF2B5EF4-FFF2-40B4-BE49-F238E27FC236}">
+                <a16:creationId xmlns:a16="http://schemas.microsoft.com/office/drawing/2014/main" id="{2496E383-A7BE-C8AE-CAC4-8F5A48022BA5}"/>
+              </a:ext>
+            </a:extLst>
+          </p:cNvPr>
+          <p:cNvSpPr/>
+          <p:nvPr/>
+        </p:nvSpPr>
+        <p:spPr>
+          <a:xfrm>
+            <a:off x="164147" y="282575"/>
+            <a:ext cx="11863705" cy="6403975"/>
+          </a:xfrm>
+          <a:prstGeom prst="frame">
+            <a:avLst>
+              <a:gd name="adj1" fmla="val 1196"/>
+            </a:avLst>
+          </a:prstGeom>
+          <a:solidFill>
+            <a:srgbClr val="13294B"/>
+          </a:solidFill>
+          <a:ln>
+            <a:solidFill>
+              <a:srgbClr val="13294B"/>
+            </a:solidFill>
+          </a:ln>
+          <a:effectLst>
+            <a:innerShdw blurRad="63500" dist="50800" dir="13500000">
+              <a:prstClr val="black">
+                <a:alpha val="50000"/>
+              </a:prstClr>
+            </a:innerShdw>
+          </a:effectLst>
+        </p:spPr>
+        <p:style>
+          <a:lnRef idx="2">
+            <a:schemeClr val="accent1">
+              <a:lumMod val="75000"/>
+            </a:schemeClr>
+          </a:lnRef>
+          <a:fillRef idx="1">
+            <a:schemeClr val="accent1"/>
+          </a:fillRef>
+          <a:effectRef idx="0">
+            <a:srgbClr val="FFFFFF"/>
+          </a:effectRef>
+          <a:fontRef idx="minor">
+            <a:schemeClr val="lt1"/>
+          </a:fontRef>
+        </p:style>
+        <p:txBody>
+          <a:bodyPr rtlCol="0" anchor="ctr"/>
+          <a:lstStyle/>
+          <a:p>
+            <a:pPr algn="ctr"/>
+            <a:endParaRPr lang="zh-CN" altLang="en-US"/>
+          </a:p>
+        </p:txBody>
+      </p:sp>
+      <p:sp>
+        <p:nvSpPr>
+          <p:cNvPr id="4" name="文本框 3">
+            <a:extLst>
+              <a:ext uri="{FF2B5EF4-FFF2-40B4-BE49-F238E27FC236}">
+                <a16:creationId xmlns:a16="http://schemas.microsoft.com/office/drawing/2014/main" id="{A9FB4F93-AF84-404A-0BBB-4422EC37B4FC}"/>
+              </a:ext>
+            </a:extLst>
+          </p:cNvPr>
+          <p:cNvSpPr txBox="1"/>
+          <p:nvPr/>
+        </p:nvSpPr>
+        <p:spPr>
+          <a:xfrm>
+            <a:off x="650457" y="614859"/>
+            <a:ext cx="9446043" cy="769441"/>
+          </a:xfrm>
+          <a:prstGeom prst="rect">
+            <a:avLst/>
+          </a:prstGeom>
+          <a:noFill/>
+        </p:spPr>
+        <p:txBody>
+          <a:bodyPr wrap="square" lIns="91440" tIns="45720" rIns="91440" bIns="45720" rtlCol="0" anchor="t">
+            <a:spAutoFit/>
+          </a:bodyPr>
+          <a:lstStyle/>
+          <a:p>
+            <a:r>
+              <a:rPr lang="en-US" altLang="zh-CN" sz="4400" b="1" dirty="0">
+                <a:solidFill>
+                  <a:srgbClr val="13294B"/>
+                </a:solidFill>
+                <a:latin typeface="Calibri"/>
+                <a:ea typeface="等线"/>
+                <a:cs typeface="+mj-lt"/>
+              </a:rPr>
+              <a:t>Future Works</a:t>
+            </a:r>
+          </a:p>
+        </p:txBody>
+      </p:sp>
+      <p:sp>
+        <p:nvSpPr>
+          <p:cNvPr id="9" name="半闭框 8">
+            <a:extLst>
+              <a:ext uri="{FF2B5EF4-FFF2-40B4-BE49-F238E27FC236}">
+                <a16:creationId xmlns:a16="http://schemas.microsoft.com/office/drawing/2014/main" id="{3FF36AB2-62E7-1DE0-937F-961918895C1B}"/>
+              </a:ext>
+            </a:extLst>
+          </p:cNvPr>
+          <p:cNvSpPr/>
+          <p:nvPr/>
+        </p:nvSpPr>
+        <p:spPr>
+          <a:xfrm>
+            <a:off x="163830" y="282575"/>
+            <a:ext cx="3148330" cy="2355215"/>
+          </a:xfrm>
+          <a:prstGeom prst="halfFrame">
+            <a:avLst>
+              <a:gd name="adj1" fmla="val 4756"/>
+              <a:gd name="adj2" fmla="val 5021"/>
+            </a:avLst>
+          </a:prstGeom>
+          <a:solidFill>
+            <a:srgbClr val="FF5F05"/>
+          </a:solidFill>
+          <a:ln>
+            <a:solidFill>
+              <a:srgbClr val="FF5F05"/>
+            </a:solidFill>
+          </a:ln>
+        </p:spPr>
+        <p:style>
+          <a:lnRef idx="2">
+            <a:schemeClr val="accent1">
+              <a:lumMod val="75000"/>
+            </a:schemeClr>
+          </a:lnRef>
+          <a:fillRef idx="1">
+            <a:schemeClr val="accent1"/>
+          </a:fillRef>
+          <a:effectRef idx="0">
+            <a:srgbClr val="FFFFFF"/>
+          </a:effectRef>
+          <a:fontRef idx="minor">
+            <a:schemeClr val="lt1"/>
+          </a:fontRef>
+        </p:style>
+        <p:txBody>
+          <a:bodyPr rtlCol="0" anchor="ctr"/>
+          <a:lstStyle/>
+          <a:p>
+            <a:pPr algn="ctr"/>
+            <a:endParaRPr lang="zh-CN" altLang="en-US">
+              <a:solidFill>
+                <a:schemeClr val="tx1"/>
+              </a:solidFill>
+            </a:endParaRPr>
+          </a:p>
+        </p:txBody>
+      </p:sp>
+      <p:sp>
+        <p:nvSpPr>
+          <p:cNvPr id="10" name="半闭框 9">
+            <a:extLst>
+              <a:ext uri="{FF2B5EF4-FFF2-40B4-BE49-F238E27FC236}">
+                <a16:creationId xmlns:a16="http://schemas.microsoft.com/office/drawing/2014/main" id="{619808A8-0E2B-499B-9C3E-6AFFF5F65A3F}"/>
+              </a:ext>
+            </a:extLst>
+          </p:cNvPr>
+          <p:cNvSpPr/>
+          <p:nvPr>
+            <p:custDataLst>
+              <p:tags r:id="rId1"/>
+            </p:custDataLst>
+          </p:nvPr>
+        </p:nvSpPr>
+        <p:spPr>
+          <a:xfrm rot="10800000">
+            <a:off x="8357868" y="4262753"/>
+            <a:ext cx="3669983" cy="2423795"/>
+          </a:xfrm>
+          <a:prstGeom prst="halfFrame">
+            <a:avLst>
+              <a:gd name="adj1" fmla="val 4659"/>
+              <a:gd name="adj2" fmla="val 4349"/>
+            </a:avLst>
+          </a:prstGeom>
+          <a:solidFill>
+            <a:srgbClr val="FF5F05"/>
+          </a:solidFill>
+          <a:ln>
+            <a:solidFill>
+              <a:srgbClr val="FF5F05"/>
+            </a:solidFill>
+          </a:ln>
+        </p:spPr>
+        <p:style>
+          <a:lnRef idx="2">
+            <a:schemeClr val="accent1">
+              <a:lumMod val="75000"/>
+            </a:schemeClr>
+          </a:lnRef>
+          <a:fillRef idx="1">
+            <a:schemeClr val="accent1"/>
+          </a:fillRef>
+          <a:effectRef idx="0">
+            <a:srgbClr val="FFFFFF"/>
+          </a:effectRef>
+          <a:fontRef idx="minor">
+            <a:schemeClr val="lt1"/>
+          </a:fontRef>
+        </p:style>
+        <p:txBody>
+          <a:bodyPr rtlCol="0" anchor="ctr"/>
+          <a:lstStyle/>
+          <a:p>
+            <a:pPr algn="ctr"/>
+            <a:endParaRPr lang="zh-CN" altLang="en-US">
+              <a:solidFill>
+                <a:schemeClr val="tx1"/>
+              </a:solidFill>
+            </a:endParaRPr>
+          </a:p>
+        </p:txBody>
+      </p:sp>
+      <p:cxnSp>
+        <p:nvCxnSpPr>
+          <p:cNvPr id="13" name="直接连接符 12">
+            <a:extLst>
+              <a:ext uri="{FF2B5EF4-FFF2-40B4-BE49-F238E27FC236}">
+                <a16:creationId xmlns:a16="http://schemas.microsoft.com/office/drawing/2014/main" id="{2782AA16-8086-7957-4CEE-D968A6DB722F}"/>
+              </a:ext>
+            </a:extLst>
+          </p:cNvPr>
+          <p:cNvCxnSpPr/>
+          <p:nvPr/>
+        </p:nvCxnSpPr>
+        <p:spPr>
+          <a:xfrm>
+            <a:off x="650457" y="1480820"/>
+            <a:ext cx="6546850" cy="14605"/>
+          </a:xfrm>
+          <a:prstGeom prst="line">
+            <a:avLst/>
+          </a:prstGeom>
+          <a:ln w="57150">
+            <a:solidFill>
+              <a:srgbClr val="FF5F05">
+                <a:alpha val="81000"/>
+              </a:srgbClr>
+            </a:solidFill>
+          </a:ln>
+        </p:spPr>
+        <p:style>
+          <a:lnRef idx="2">
+            <a:schemeClr val="accent1"/>
+          </a:lnRef>
+          <a:fillRef idx="0">
+            <a:srgbClr val="FFFFFF"/>
+          </a:fillRef>
+          <a:effectRef idx="0">
+            <a:srgbClr val="FFFFFF"/>
+          </a:effectRef>
+          <a:fontRef idx="minor">
+            <a:schemeClr val="tx1"/>
+          </a:fontRef>
+        </p:style>
+      </p:cxnSp>
+      <p:pic>
+        <p:nvPicPr>
+          <p:cNvPr id="100" name="图片 99">
+            <a:extLst>
+              <a:ext uri="{FF2B5EF4-FFF2-40B4-BE49-F238E27FC236}">
+                <a16:creationId xmlns:a16="http://schemas.microsoft.com/office/drawing/2014/main" id="{F71171B4-C3D9-CF5C-7B4B-56EFAAF3183B}"/>
+              </a:ext>
+            </a:extLst>
+          </p:cNvPr>
+          <p:cNvPicPr/>
+          <p:nvPr/>
+        </p:nvPicPr>
+        <p:blipFill>
+          <a:blip r:embed="rId4"/>
+          <a:stretch>
+            <a:fillRect/>
+          </a:stretch>
+        </p:blipFill>
+        <p:spPr>
+          <a:xfrm>
+            <a:off x="9906635" y="171450"/>
+            <a:ext cx="1906270" cy="1212850"/>
+          </a:xfrm>
+          <a:prstGeom prst="rect">
+            <a:avLst/>
+          </a:prstGeom>
+          <a:noFill/>
+          <a:ln w="9525">
+            <a:noFill/>
+          </a:ln>
+        </p:spPr>
+      </p:pic>
+      <p:sp>
+        <p:nvSpPr>
+          <p:cNvPr id="5" name="文本框 4">
+            <a:extLst>
+              <a:ext uri="{FF2B5EF4-FFF2-40B4-BE49-F238E27FC236}">
+                <a16:creationId xmlns:a16="http://schemas.microsoft.com/office/drawing/2014/main" id="{66732831-3A48-AA96-5C7E-EF953BA75DE0}"/>
+              </a:ext>
+            </a:extLst>
+          </p:cNvPr>
+          <p:cNvSpPr txBox="1"/>
+          <p:nvPr/>
+        </p:nvSpPr>
+        <p:spPr>
+          <a:xfrm>
+            <a:off x="613543" y="1741049"/>
+            <a:ext cx="10964912" cy="4001095"/>
+          </a:xfrm>
+          <a:prstGeom prst="rect">
+            <a:avLst/>
+          </a:prstGeom>
+          <a:noFill/>
+        </p:spPr>
+        <p:txBody>
+          <a:bodyPr wrap="square" lIns="91440" tIns="45720" rIns="91440" bIns="45720" rtlCol="0" anchor="t">
+            <a:spAutoFit/>
+          </a:bodyPr>
+          <a:lstStyle/>
+          <a:p>
+            <a:pPr marL="457200" indent="-457200">
+              <a:spcAft>
+                <a:spcPts val="600"/>
+              </a:spcAft>
+              <a:buFont typeface="Arial" panose="020B0604020202020204" pitchFamily="34" charset="0"/>
+              <a:buChar char="•"/>
+            </a:pPr>
+            <a:r>
+              <a:rPr lang="en-US" altLang="zh-CN" sz="3200" b="1" dirty="0">
+                <a:solidFill>
+                  <a:srgbClr val="13294B"/>
+                </a:solidFill>
+                <a:latin typeface="Calibri"/>
+                <a:ea typeface="宋体"/>
+                <a:cs typeface="Calibri"/>
+              </a:rPr>
+              <a:t>Conclusion 1:</a:t>
+            </a:r>
+          </a:p>
+          <a:p>
+            <a:pPr marL="914400" lvl="1" indent="-457200">
+              <a:spcAft>
+                <a:spcPts val="600"/>
+              </a:spcAft>
+              <a:buFont typeface="Arial" panose="020B0604020202020204" pitchFamily="34" charset="0"/>
+              <a:buChar char="•"/>
+            </a:pPr>
+            <a:r>
+              <a:rPr lang="en-US" altLang="zh-CN" sz="3200" dirty="0">
+                <a:solidFill>
+                  <a:srgbClr val="13294B"/>
+                </a:solidFill>
+                <a:latin typeface="Calibri"/>
+                <a:ea typeface="宋体"/>
+                <a:cs typeface="Calibri"/>
+              </a:rPr>
+              <a:t>11112222</a:t>
+            </a:r>
+          </a:p>
+          <a:p>
+            <a:pPr marL="457200" indent="-457200">
+              <a:spcAft>
+                <a:spcPts val="600"/>
+              </a:spcAft>
+              <a:buFont typeface="Arial" panose="020B0604020202020204" pitchFamily="34" charset="0"/>
+              <a:buChar char="•"/>
+            </a:pPr>
+            <a:r>
+              <a:rPr lang="en-US" altLang="zh-CN" sz="3200" b="1" dirty="0">
+                <a:solidFill>
+                  <a:srgbClr val="13294B"/>
+                </a:solidFill>
+                <a:latin typeface="Calibri"/>
+                <a:ea typeface="宋体"/>
+                <a:cs typeface="Calibri"/>
+              </a:rPr>
+              <a:t>Conclusion 2:</a:t>
+            </a:r>
+          </a:p>
+          <a:p>
+            <a:pPr marL="914400" lvl="1" indent="-457200">
+              <a:spcAft>
+                <a:spcPts val="600"/>
+              </a:spcAft>
+              <a:buFont typeface="Arial" panose="020B0604020202020204" pitchFamily="34" charset="0"/>
+              <a:buChar char="•"/>
+            </a:pPr>
+            <a:r>
+              <a:rPr lang="en-US" altLang="zh-CN" sz="3200" dirty="0">
+                <a:solidFill>
+                  <a:srgbClr val="13294B"/>
+                </a:solidFill>
+                <a:latin typeface="Calibri"/>
+                <a:ea typeface="宋体"/>
+                <a:cs typeface="Calibri"/>
+              </a:rPr>
+              <a:t>22223333</a:t>
+            </a:r>
+          </a:p>
+          <a:p>
+            <a:pPr marL="457200" indent="-457200">
+              <a:spcAft>
+                <a:spcPts val="600"/>
+              </a:spcAft>
+              <a:buFont typeface="Arial" panose="020B0604020202020204" pitchFamily="34" charset="0"/>
+              <a:buChar char="•"/>
+            </a:pPr>
+            <a:endParaRPr lang="en-US" altLang="zh-CN" sz="3200" b="1" dirty="0">
+              <a:solidFill>
+                <a:srgbClr val="13294B"/>
+              </a:solidFill>
+              <a:latin typeface="Calibri"/>
+              <a:ea typeface="宋体"/>
+              <a:cs typeface="Calibri"/>
+            </a:endParaRPr>
+          </a:p>
+          <a:p>
+            <a:pPr marL="457200" indent="-457200">
+              <a:spcAft>
+                <a:spcPts val="600"/>
+              </a:spcAft>
+              <a:buFont typeface="Arial" panose="020B0604020202020204" pitchFamily="34" charset="0"/>
+              <a:buChar char="•"/>
+            </a:pPr>
+            <a:endParaRPr lang="en-US" altLang="zh-CN" sz="3200" b="1" dirty="0">
+              <a:solidFill>
+                <a:srgbClr val="13294B"/>
+              </a:solidFill>
+              <a:latin typeface="Calibri"/>
+              <a:ea typeface="宋体"/>
+              <a:cs typeface="Calibri"/>
+            </a:endParaRPr>
+          </a:p>
+          <a:p>
+            <a:pPr>
+              <a:spcAft>
+                <a:spcPts val="600"/>
+              </a:spcAft>
+            </a:pPr>
+            <a:r>
+              <a:rPr lang="en-US" altLang="zh-CN" sz="3200" b="1" dirty="0">
+                <a:solidFill>
+                  <a:srgbClr val="13294B"/>
+                </a:solidFill>
+                <a:latin typeface="Calibri"/>
+                <a:ea typeface="宋体"/>
+                <a:cs typeface="Calibri"/>
+              </a:rPr>
+              <a:t> </a:t>
+            </a:r>
+          </a:p>
+        </p:txBody>
+      </p:sp>
+    </p:spTree>
+    <p:extLst>
+      <p:ext uri="{BB962C8B-B14F-4D97-AF65-F5344CB8AC3E}">
         <p14:creationId xmlns:p14="http://schemas.microsoft.com/office/powerpoint/2010/main" val="1859779982"/>
       </p:ext>
     </p:extLst>
@@ -9796,7 +10420,7 @@
 </p:sld>
 </file>
 
-<file path=ppt/slides/slide15.xml><?xml version="1.0" encoding="utf-8"?>
+<file path=ppt/slides/slide16.xml><?xml version="1.0" encoding="utf-8"?>
 <p:sld xmlns:a="http://schemas.openxmlformats.org/drawingml/2006/main" xmlns:r="http://schemas.openxmlformats.org/officeDocument/2006/relationships" xmlns:p="http://schemas.openxmlformats.org/presentationml/2006/main">
   <p:cSld>
     <p:spTree>
@@ -15067,6 +15691,12 @@
 </file>
 
 <file path=ppt/tags/tag15.xml><?xml version="1.0" encoding="utf-8"?>
+<p:tagLst xmlns:a="http://schemas.openxmlformats.org/drawingml/2006/main" xmlns:r="http://schemas.openxmlformats.org/officeDocument/2006/relationships" xmlns:p="http://schemas.openxmlformats.org/presentationml/2006/main">
+  <p:tag name="KSO_WM_BEAUTIFY_FLAG" val=""/>
+</p:tagLst>
+</file>
+
+<file path=ppt/tags/tag16.xml><?xml version="1.0" encoding="utf-8"?>
 <p:tagLst xmlns:a="http://schemas.openxmlformats.org/drawingml/2006/main" xmlns:r="http://schemas.openxmlformats.org/officeDocument/2006/relationships" xmlns:p="http://schemas.openxmlformats.org/presentationml/2006/main">
   <p:tag name="KSO_WM_BEAUTIFY_FLAG" val=""/>
 </p:tagLst>

--- a/src/Files/Final_ppt.pptx
+++ b/src/Files/Final_ppt.pptx
@@ -5,7 +5,7 @@
     <p:sldMasterId id="2147483648" r:id="rId1"/>
   </p:sldMasterIdLst>
   <p:notesMasterIdLst>
-    <p:notesMasterId r:id="rId18"/>
+    <p:notesMasterId r:id="rId22"/>
   </p:notesMasterIdLst>
   <p:sldIdLst>
     <p:sldId id="263" r:id="rId2"/>
@@ -16,14 +16,18 @@
     <p:sldId id="299" r:id="rId7"/>
     <p:sldId id="304" r:id="rId8"/>
     <p:sldId id="305" r:id="rId9"/>
-    <p:sldId id="306" r:id="rId10"/>
-    <p:sldId id="307" r:id="rId11"/>
-    <p:sldId id="296" r:id="rId12"/>
-    <p:sldId id="300" r:id="rId13"/>
-    <p:sldId id="308" r:id="rId14"/>
-    <p:sldId id="302" r:id="rId15"/>
-    <p:sldId id="303" r:id="rId16"/>
-    <p:sldId id="301" r:id="rId17"/>
+    <p:sldId id="307" r:id="rId10"/>
+    <p:sldId id="296" r:id="rId11"/>
+    <p:sldId id="300" r:id="rId12"/>
+    <p:sldId id="308" r:id="rId13"/>
+    <p:sldId id="310" r:id="rId14"/>
+    <p:sldId id="311" r:id="rId15"/>
+    <p:sldId id="312" r:id="rId16"/>
+    <p:sldId id="313" r:id="rId17"/>
+    <p:sldId id="302" r:id="rId18"/>
+    <p:sldId id="309" r:id="rId19"/>
+    <p:sldId id="303" r:id="rId20"/>
+    <p:sldId id="301" r:id="rId21"/>
   </p:sldIdLst>
   <p:sldSz cx="12192000" cy="6858000"/>
   <p:notesSz cx="6858000" cy="9144000"/>
@@ -1590,170 +1594,6 @@
         <p:cNvPr id="1" name="">
           <a:extLst>
             <a:ext uri="{FF2B5EF4-FFF2-40B4-BE49-F238E27FC236}">
-              <a16:creationId xmlns:a16="http://schemas.microsoft.com/office/drawing/2014/main" id="{A3780624-88CC-1F28-3EA6-BBF568054237}"/>
-            </a:ext>
-          </a:extLst>
-        </p:cNvPr>
-        <p:cNvGrpSpPr/>
-        <p:nvPr/>
-      </p:nvGrpSpPr>
-      <p:grpSpPr>
-        <a:xfrm>
-          <a:off x="0" y="0"/>
-          <a:ext cx="0" cy="0"/>
-          <a:chOff x="0" y="0"/>
-          <a:chExt cx="0" cy="0"/>
-        </a:xfrm>
-      </p:grpSpPr>
-      <p:sp>
-        <p:nvSpPr>
-          <p:cNvPr id="2" name="幻灯片图像占位符 1">
-            <a:extLst>
-              <a:ext uri="{FF2B5EF4-FFF2-40B4-BE49-F238E27FC236}">
-                <a16:creationId xmlns:a16="http://schemas.microsoft.com/office/drawing/2014/main" id="{17D9BFCF-9822-FB5B-17B4-EBD5F789862C}"/>
-              </a:ext>
-            </a:extLst>
-          </p:cNvPr>
-          <p:cNvSpPr>
-            <a:spLocks noGrp="1" noRot="1" noChangeAspect="1"/>
-          </p:cNvSpPr>
-          <p:nvPr>
-            <p:ph type="sldImg"/>
-          </p:nvPr>
-        </p:nvSpPr>
-        <p:spPr/>
-      </p:sp>
-      <p:sp>
-        <p:nvSpPr>
-          <p:cNvPr id="3" name="备注占位符 2">
-            <a:extLst>
-              <a:ext uri="{FF2B5EF4-FFF2-40B4-BE49-F238E27FC236}">
-                <a16:creationId xmlns:a16="http://schemas.microsoft.com/office/drawing/2014/main" id="{87921B3E-7334-C4A1-C580-61E6AC3AB4CC}"/>
-              </a:ext>
-            </a:extLst>
-          </p:cNvPr>
-          <p:cNvSpPr>
-            <a:spLocks noGrp="1"/>
-          </p:cNvSpPr>
-          <p:nvPr>
-            <p:ph type="body" idx="1"/>
-          </p:nvPr>
-        </p:nvSpPr>
-        <p:spPr/>
-        <p:txBody>
-          <a:bodyPr/>
-          <a:lstStyle/>
-          <a:p>
-            <a:pPr algn="l">
-              <a:spcBef>
-                <a:spcPts val="450"/>
-              </a:spcBef>
-              <a:spcAft>
-                <a:spcPts val="450"/>
-              </a:spcAft>
-            </a:pPr>
-            <a:r>
-              <a:rPr lang="en-US" altLang="zh-CN" sz="1800" b="1" i="0">
-                <a:solidFill>
-                  <a:srgbClr val="2D3B45"/>
-                </a:solidFill>
-                <a:effectLst/>
-                <a:latin typeface="Lato Extended"/>
-              </a:rPr>
-              <a:t>Introduction Slide</a:t>
-            </a:r>
-            <a:endParaRPr lang="en-US" altLang="zh-CN" sz="1800" b="0" i="0">
-              <a:solidFill>
-                <a:srgbClr val="2D3B45"/>
-              </a:solidFill>
-              <a:effectLst/>
-              <a:latin typeface="Lato Extended"/>
-            </a:endParaRPr>
-          </a:p>
-          <a:p>
-            <a:pPr algn="l">
-              <a:spcAft>
-                <a:spcPts val="450"/>
-              </a:spcAft>
-              <a:buFont typeface="Arial" panose="020B0604020202020204" pitchFamily="34" charset="0"/>
-              <a:buChar char="•"/>
-            </a:pPr>
-            <a:r>
-              <a:rPr lang="en-US" altLang="zh-CN" sz="1800" b="1" i="0">
-                <a:solidFill>
-                  <a:srgbClr val="2D3B45"/>
-                </a:solidFill>
-                <a:effectLst/>
-                <a:latin typeface="v-sans"/>
-              </a:rPr>
-              <a:t>Brief Introduction:</a:t>
-            </a:r>
-            <a:r>
-              <a:rPr lang="en-US" altLang="zh-CN" sz="1800" b="0" i="0">
-                <a:solidFill>
-                  <a:srgbClr val="2D3B45"/>
-                </a:solidFill>
-                <a:effectLst/>
-                <a:latin typeface="v-sans"/>
-              </a:rPr>
-              <a:t> of the team and the topic</a:t>
-            </a:r>
-          </a:p>
-          <a:p>
-            <a:endParaRPr lang="zh-CN" altLang="en-US"/>
-          </a:p>
-        </p:txBody>
-      </p:sp>
-      <p:sp>
-        <p:nvSpPr>
-          <p:cNvPr id="4" name="灯片编号占位符 3">
-            <a:extLst>
-              <a:ext uri="{FF2B5EF4-FFF2-40B4-BE49-F238E27FC236}">
-                <a16:creationId xmlns:a16="http://schemas.microsoft.com/office/drawing/2014/main" id="{48E609CA-1FF1-16EC-BFEC-B2D0092FC102}"/>
-              </a:ext>
-            </a:extLst>
-          </p:cNvPr>
-          <p:cNvSpPr>
-            <a:spLocks noGrp="1"/>
-          </p:cNvSpPr>
-          <p:nvPr>
-            <p:ph type="sldNum" sz="quarter" idx="5"/>
-          </p:nvPr>
-        </p:nvSpPr>
-        <p:spPr/>
-        <p:txBody>
-          <a:bodyPr/>
-          <a:lstStyle/>
-          <a:p>
-            <a:fld id="{EED2C466-1B0F-4591-A952-5F31096967DE}" type="slidenum">
-              <a:rPr lang="zh-CN" altLang="en-US" smtClean="0"/>
-              <a:t>10</a:t>
-            </a:fld>
-            <a:endParaRPr lang="zh-CN" altLang="en-US"/>
-          </a:p>
-        </p:txBody>
-      </p:sp>
-    </p:spTree>
-    <p:extLst>
-      <p:ext uri="{BB962C8B-B14F-4D97-AF65-F5344CB8AC3E}">
-        <p14:creationId xmlns:p14="http://schemas.microsoft.com/office/powerpoint/2010/main" val="3655621524"/>
-      </p:ext>
-    </p:extLst>
-  </p:cSld>
-  <p:clrMapOvr>
-    <a:masterClrMapping/>
-  </p:clrMapOvr>
-</p:notes>
-</file>
-
-<file path=ppt/notesSlides/notesSlide11.xml><?xml version="1.0" encoding="utf-8"?>
-<p:notes xmlns:a="http://schemas.openxmlformats.org/drawingml/2006/main" xmlns:r="http://schemas.openxmlformats.org/officeDocument/2006/relationships" xmlns:p="http://schemas.openxmlformats.org/presentationml/2006/main">
-  <p:cSld>
-    <p:spTree>
-      <p:nvGrpSpPr>
-        <p:cNvPr id="1" name="">
-          <a:extLst>
-            <a:ext uri="{FF2B5EF4-FFF2-40B4-BE49-F238E27FC236}">
               <a16:creationId xmlns:a16="http://schemas.microsoft.com/office/drawing/2014/main" id="{6B4F455E-20C9-8E87-3904-609AB5C1931E}"/>
             </a:ext>
           </a:extLst>
@@ -1891,7 +1731,7 @@
           <a:p>
             <a:fld id="{EED2C466-1B0F-4591-A952-5F31096967DE}" type="slidenum">
               <a:rPr lang="zh-CN" altLang="en-US" smtClean="0"/>
-              <a:t>11</a:t>
+              <a:t>10</a:t>
             </a:fld>
             <a:endParaRPr lang="zh-CN" altLang="en-US"/>
           </a:p>
@@ -1910,7 +1750,7 @@
 </p:notes>
 </file>
 
-<file path=ppt/notesSlides/notesSlide12.xml><?xml version="1.0" encoding="utf-8"?>
+<file path=ppt/notesSlides/notesSlide11.xml><?xml version="1.0" encoding="utf-8"?>
 <p:notes xmlns:a="http://schemas.openxmlformats.org/drawingml/2006/main" xmlns:r="http://schemas.openxmlformats.org/officeDocument/2006/relationships" xmlns:p="http://schemas.openxmlformats.org/presentationml/2006/main">
   <p:cSld>
     <p:spTree>
@@ -2055,7 +1895,7 @@
           <a:p>
             <a:fld id="{EED2C466-1B0F-4591-A952-5F31096967DE}" type="slidenum">
               <a:rPr lang="zh-CN" altLang="en-US" smtClean="0"/>
-              <a:t>12</a:t>
+              <a:t>11</a:t>
             </a:fld>
             <a:endParaRPr lang="zh-CN" altLang="en-US"/>
           </a:p>
@@ -2065,6 +1905,170 @@
     <p:extLst>
       <p:ext uri="{BB962C8B-B14F-4D97-AF65-F5344CB8AC3E}">
         <p14:creationId xmlns:p14="http://schemas.microsoft.com/office/powerpoint/2010/main" val="4014491412"/>
+      </p:ext>
+    </p:extLst>
+  </p:cSld>
+  <p:clrMapOvr>
+    <a:masterClrMapping/>
+  </p:clrMapOvr>
+</p:notes>
+</file>
+
+<file path=ppt/notesSlides/notesSlide12.xml><?xml version="1.0" encoding="utf-8"?>
+<p:notes xmlns:a="http://schemas.openxmlformats.org/drawingml/2006/main" xmlns:r="http://schemas.openxmlformats.org/officeDocument/2006/relationships" xmlns:p="http://schemas.openxmlformats.org/presentationml/2006/main">
+  <p:cSld>
+    <p:spTree>
+      <p:nvGrpSpPr>
+        <p:cNvPr id="1" name="">
+          <a:extLst>
+            <a:ext uri="{FF2B5EF4-FFF2-40B4-BE49-F238E27FC236}">
+              <a16:creationId xmlns:a16="http://schemas.microsoft.com/office/drawing/2014/main" id="{8247F8F6-43CE-1AC7-BA14-09317CE834DB}"/>
+            </a:ext>
+          </a:extLst>
+        </p:cNvPr>
+        <p:cNvGrpSpPr/>
+        <p:nvPr/>
+      </p:nvGrpSpPr>
+      <p:grpSpPr>
+        <a:xfrm>
+          <a:off x="0" y="0"/>
+          <a:ext cx="0" cy="0"/>
+          <a:chOff x="0" y="0"/>
+          <a:chExt cx="0" cy="0"/>
+        </a:xfrm>
+      </p:grpSpPr>
+      <p:sp>
+        <p:nvSpPr>
+          <p:cNvPr id="2" name="幻灯片图像占位符 1">
+            <a:extLst>
+              <a:ext uri="{FF2B5EF4-FFF2-40B4-BE49-F238E27FC236}">
+                <a16:creationId xmlns:a16="http://schemas.microsoft.com/office/drawing/2014/main" id="{3540F09F-EA74-2FDC-9F0A-305E4C9C8391}"/>
+              </a:ext>
+            </a:extLst>
+          </p:cNvPr>
+          <p:cNvSpPr>
+            <a:spLocks noGrp="1" noRot="1" noChangeAspect="1"/>
+          </p:cNvSpPr>
+          <p:nvPr>
+            <p:ph type="sldImg"/>
+          </p:nvPr>
+        </p:nvSpPr>
+        <p:spPr/>
+      </p:sp>
+      <p:sp>
+        <p:nvSpPr>
+          <p:cNvPr id="3" name="备注占位符 2">
+            <a:extLst>
+              <a:ext uri="{FF2B5EF4-FFF2-40B4-BE49-F238E27FC236}">
+                <a16:creationId xmlns:a16="http://schemas.microsoft.com/office/drawing/2014/main" id="{08F2F9F0-38A8-84C2-1CA0-CF92EB994220}"/>
+              </a:ext>
+            </a:extLst>
+          </p:cNvPr>
+          <p:cNvSpPr>
+            <a:spLocks noGrp="1"/>
+          </p:cNvSpPr>
+          <p:nvPr>
+            <p:ph type="body" idx="1"/>
+          </p:nvPr>
+        </p:nvSpPr>
+        <p:spPr/>
+        <p:txBody>
+          <a:bodyPr/>
+          <a:lstStyle/>
+          <a:p>
+            <a:pPr algn="l">
+              <a:spcBef>
+                <a:spcPts val="450"/>
+              </a:spcBef>
+              <a:spcAft>
+                <a:spcPts val="450"/>
+              </a:spcAft>
+            </a:pPr>
+            <a:r>
+              <a:rPr lang="en-US" altLang="zh-CN" sz="1800" b="1" i="0">
+                <a:solidFill>
+                  <a:srgbClr val="2D3B45"/>
+                </a:solidFill>
+                <a:effectLst/>
+                <a:latin typeface="Lato Extended"/>
+              </a:rPr>
+              <a:t>Introduction Slide</a:t>
+            </a:r>
+            <a:endParaRPr lang="en-US" altLang="zh-CN" sz="1800" b="0" i="0">
+              <a:solidFill>
+                <a:srgbClr val="2D3B45"/>
+              </a:solidFill>
+              <a:effectLst/>
+              <a:latin typeface="Lato Extended"/>
+            </a:endParaRPr>
+          </a:p>
+          <a:p>
+            <a:pPr algn="l">
+              <a:spcAft>
+                <a:spcPts val="450"/>
+              </a:spcAft>
+              <a:buFont typeface="Arial" panose="020B0604020202020204" pitchFamily="34" charset="0"/>
+              <a:buChar char="•"/>
+            </a:pPr>
+            <a:r>
+              <a:rPr lang="en-US" altLang="zh-CN" sz="1800" b="1" i="0">
+                <a:solidFill>
+                  <a:srgbClr val="2D3B45"/>
+                </a:solidFill>
+                <a:effectLst/>
+                <a:latin typeface="v-sans"/>
+              </a:rPr>
+              <a:t>Brief Introduction:</a:t>
+            </a:r>
+            <a:r>
+              <a:rPr lang="en-US" altLang="zh-CN" sz="1800" b="0" i="0">
+                <a:solidFill>
+                  <a:srgbClr val="2D3B45"/>
+                </a:solidFill>
+                <a:effectLst/>
+                <a:latin typeface="v-sans"/>
+              </a:rPr>
+              <a:t> of the team and the topic</a:t>
+            </a:r>
+          </a:p>
+          <a:p>
+            <a:endParaRPr lang="zh-CN" altLang="en-US"/>
+          </a:p>
+        </p:txBody>
+      </p:sp>
+      <p:sp>
+        <p:nvSpPr>
+          <p:cNvPr id="4" name="灯片编号占位符 3">
+            <a:extLst>
+              <a:ext uri="{FF2B5EF4-FFF2-40B4-BE49-F238E27FC236}">
+                <a16:creationId xmlns:a16="http://schemas.microsoft.com/office/drawing/2014/main" id="{C487B5A8-EF2B-7398-BCC7-3EF95CFFA0B4}"/>
+              </a:ext>
+            </a:extLst>
+          </p:cNvPr>
+          <p:cNvSpPr>
+            <a:spLocks noGrp="1"/>
+          </p:cNvSpPr>
+          <p:nvPr>
+            <p:ph type="sldNum" sz="quarter" idx="5"/>
+          </p:nvPr>
+        </p:nvSpPr>
+        <p:spPr/>
+        <p:txBody>
+          <a:bodyPr/>
+          <a:lstStyle/>
+          <a:p>
+            <a:fld id="{EED2C466-1B0F-4591-A952-5F31096967DE}" type="slidenum">
+              <a:rPr lang="zh-CN" altLang="en-US" smtClean="0"/>
+              <a:t>12</a:t>
+            </a:fld>
+            <a:endParaRPr lang="zh-CN" altLang="en-US"/>
+          </a:p>
+        </p:txBody>
+      </p:sp>
+    </p:spTree>
+    <p:extLst>
+      <p:ext uri="{BB962C8B-B14F-4D97-AF65-F5344CB8AC3E}">
+        <p14:creationId xmlns:p14="http://schemas.microsoft.com/office/powerpoint/2010/main" val="2248342885"/>
       </p:ext>
     </p:extLst>
   </p:cSld>
@@ -2228,7 +2232,7 @@
     </p:spTree>
     <p:extLst>
       <p:ext uri="{BB962C8B-B14F-4D97-AF65-F5344CB8AC3E}">
-        <p14:creationId xmlns:p14="http://schemas.microsoft.com/office/powerpoint/2010/main" val="2248342885"/>
+        <p14:creationId xmlns:p14="http://schemas.microsoft.com/office/powerpoint/2010/main" val="3145197989"/>
       </p:ext>
     </p:extLst>
   </p:cSld>
@@ -2239,6 +2243,498 @@
 </file>
 
 <file path=ppt/notesSlides/notesSlide14.xml><?xml version="1.0" encoding="utf-8"?>
+<p:notes xmlns:a="http://schemas.openxmlformats.org/drawingml/2006/main" xmlns:r="http://schemas.openxmlformats.org/officeDocument/2006/relationships" xmlns:p="http://schemas.openxmlformats.org/presentationml/2006/main">
+  <p:cSld>
+    <p:spTree>
+      <p:nvGrpSpPr>
+        <p:cNvPr id="1" name="">
+          <a:extLst>
+            <a:ext uri="{FF2B5EF4-FFF2-40B4-BE49-F238E27FC236}">
+              <a16:creationId xmlns:a16="http://schemas.microsoft.com/office/drawing/2014/main" id="{8247F8F6-43CE-1AC7-BA14-09317CE834DB}"/>
+            </a:ext>
+          </a:extLst>
+        </p:cNvPr>
+        <p:cNvGrpSpPr/>
+        <p:nvPr/>
+      </p:nvGrpSpPr>
+      <p:grpSpPr>
+        <a:xfrm>
+          <a:off x="0" y="0"/>
+          <a:ext cx="0" cy="0"/>
+          <a:chOff x="0" y="0"/>
+          <a:chExt cx="0" cy="0"/>
+        </a:xfrm>
+      </p:grpSpPr>
+      <p:sp>
+        <p:nvSpPr>
+          <p:cNvPr id="2" name="幻灯片图像占位符 1">
+            <a:extLst>
+              <a:ext uri="{FF2B5EF4-FFF2-40B4-BE49-F238E27FC236}">
+                <a16:creationId xmlns:a16="http://schemas.microsoft.com/office/drawing/2014/main" id="{3540F09F-EA74-2FDC-9F0A-305E4C9C8391}"/>
+              </a:ext>
+            </a:extLst>
+          </p:cNvPr>
+          <p:cNvSpPr>
+            <a:spLocks noGrp="1" noRot="1" noChangeAspect="1"/>
+          </p:cNvSpPr>
+          <p:nvPr>
+            <p:ph type="sldImg"/>
+          </p:nvPr>
+        </p:nvSpPr>
+        <p:spPr/>
+      </p:sp>
+      <p:sp>
+        <p:nvSpPr>
+          <p:cNvPr id="3" name="备注占位符 2">
+            <a:extLst>
+              <a:ext uri="{FF2B5EF4-FFF2-40B4-BE49-F238E27FC236}">
+                <a16:creationId xmlns:a16="http://schemas.microsoft.com/office/drawing/2014/main" id="{08F2F9F0-38A8-84C2-1CA0-CF92EB994220}"/>
+              </a:ext>
+            </a:extLst>
+          </p:cNvPr>
+          <p:cNvSpPr>
+            <a:spLocks noGrp="1"/>
+          </p:cNvSpPr>
+          <p:nvPr>
+            <p:ph type="body" idx="1"/>
+          </p:nvPr>
+        </p:nvSpPr>
+        <p:spPr/>
+        <p:txBody>
+          <a:bodyPr/>
+          <a:lstStyle/>
+          <a:p>
+            <a:pPr algn="l">
+              <a:spcBef>
+                <a:spcPts val="450"/>
+              </a:spcBef>
+              <a:spcAft>
+                <a:spcPts val="450"/>
+              </a:spcAft>
+            </a:pPr>
+            <a:r>
+              <a:rPr lang="en-US" altLang="zh-CN" sz="1800" b="1" i="0">
+                <a:solidFill>
+                  <a:srgbClr val="2D3B45"/>
+                </a:solidFill>
+                <a:effectLst/>
+                <a:latin typeface="Lato Extended"/>
+              </a:rPr>
+              <a:t>Introduction Slide</a:t>
+            </a:r>
+            <a:endParaRPr lang="en-US" altLang="zh-CN" sz="1800" b="0" i="0">
+              <a:solidFill>
+                <a:srgbClr val="2D3B45"/>
+              </a:solidFill>
+              <a:effectLst/>
+              <a:latin typeface="Lato Extended"/>
+            </a:endParaRPr>
+          </a:p>
+          <a:p>
+            <a:pPr algn="l">
+              <a:spcAft>
+                <a:spcPts val="450"/>
+              </a:spcAft>
+              <a:buFont typeface="Arial" panose="020B0604020202020204" pitchFamily="34" charset="0"/>
+              <a:buChar char="•"/>
+            </a:pPr>
+            <a:r>
+              <a:rPr lang="en-US" altLang="zh-CN" sz="1800" b="1" i="0">
+                <a:solidFill>
+                  <a:srgbClr val="2D3B45"/>
+                </a:solidFill>
+                <a:effectLst/>
+                <a:latin typeface="v-sans"/>
+              </a:rPr>
+              <a:t>Brief Introduction:</a:t>
+            </a:r>
+            <a:r>
+              <a:rPr lang="en-US" altLang="zh-CN" sz="1800" b="0" i="0">
+                <a:solidFill>
+                  <a:srgbClr val="2D3B45"/>
+                </a:solidFill>
+                <a:effectLst/>
+                <a:latin typeface="v-sans"/>
+              </a:rPr>
+              <a:t> of the team and the topic</a:t>
+            </a:r>
+          </a:p>
+          <a:p>
+            <a:endParaRPr lang="zh-CN" altLang="en-US"/>
+          </a:p>
+        </p:txBody>
+      </p:sp>
+      <p:sp>
+        <p:nvSpPr>
+          <p:cNvPr id="4" name="灯片编号占位符 3">
+            <a:extLst>
+              <a:ext uri="{FF2B5EF4-FFF2-40B4-BE49-F238E27FC236}">
+                <a16:creationId xmlns:a16="http://schemas.microsoft.com/office/drawing/2014/main" id="{C487B5A8-EF2B-7398-BCC7-3EF95CFFA0B4}"/>
+              </a:ext>
+            </a:extLst>
+          </p:cNvPr>
+          <p:cNvSpPr>
+            <a:spLocks noGrp="1"/>
+          </p:cNvSpPr>
+          <p:nvPr>
+            <p:ph type="sldNum" sz="quarter" idx="5"/>
+          </p:nvPr>
+        </p:nvSpPr>
+        <p:spPr/>
+        <p:txBody>
+          <a:bodyPr/>
+          <a:lstStyle/>
+          <a:p>
+            <a:fld id="{EED2C466-1B0F-4591-A952-5F31096967DE}" type="slidenum">
+              <a:rPr lang="zh-CN" altLang="en-US" smtClean="0"/>
+              <a:t>14</a:t>
+            </a:fld>
+            <a:endParaRPr lang="zh-CN" altLang="en-US"/>
+          </a:p>
+        </p:txBody>
+      </p:sp>
+    </p:spTree>
+    <p:extLst>
+      <p:ext uri="{BB962C8B-B14F-4D97-AF65-F5344CB8AC3E}">
+        <p14:creationId xmlns:p14="http://schemas.microsoft.com/office/powerpoint/2010/main" val="3235287201"/>
+      </p:ext>
+    </p:extLst>
+  </p:cSld>
+  <p:clrMapOvr>
+    <a:masterClrMapping/>
+  </p:clrMapOvr>
+</p:notes>
+</file>
+
+<file path=ppt/notesSlides/notesSlide15.xml><?xml version="1.0" encoding="utf-8"?>
+<p:notes xmlns:a="http://schemas.openxmlformats.org/drawingml/2006/main" xmlns:r="http://schemas.openxmlformats.org/officeDocument/2006/relationships" xmlns:p="http://schemas.openxmlformats.org/presentationml/2006/main">
+  <p:cSld>
+    <p:spTree>
+      <p:nvGrpSpPr>
+        <p:cNvPr id="1" name="">
+          <a:extLst>
+            <a:ext uri="{FF2B5EF4-FFF2-40B4-BE49-F238E27FC236}">
+              <a16:creationId xmlns:a16="http://schemas.microsoft.com/office/drawing/2014/main" id="{8247F8F6-43CE-1AC7-BA14-09317CE834DB}"/>
+            </a:ext>
+          </a:extLst>
+        </p:cNvPr>
+        <p:cNvGrpSpPr/>
+        <p:nvPr/>
+      </p:nvGrpSpPr>
+      <p:grpSpPr>
+        <a:xfrm>
+          <a:off x="0" y="0"/>
+          <a:ext cx="0" cy="0"/>
+          <a:chOff x="0" y="0"/>
+          <a:chExt cx="0" cy="0"/>
+        </a:xfrm>
+      </p:grpSpPr>
+      <p:sp>
+        <p:nvSpPr>
+          <p:cNvPr id="2" name="幻灯片图像占位符 1">
+            <a:extLst>
+              <a:ext uri="{FF2B5EF4-FFF2-40B4-BE49-F238E27FC236}">
+                <a16:creationId xmlns:a16="http://schemas.microsoft.com/office/drawing/2014/main" id="{3540F09F-EA74-2FDC-9F0A-305E4C9C8391}"/>
+              </a:ext>
+            </a:extLst>
+          </p:cNvPr>
+          <p:cNvSpPr>
+            <a:spLocks noGrp="1" noRot="1" noChangeAspect="1"/>
+          </p:cNvSpPr>
+          <p:nvPr>
+            <p:ph type="sldImg"/>
+          </p:nvPr>
+        </p:nvSpPr>
+        <p:spPr/>
+      </p:sp>
+      <p:sp>
+        <p:nvSpPr>
+          <p:cNvPr id="3" name="备注占位符 2">
+            <a:extLst>
+              <a:ext uri="{FF2B5EF4-FFF2-40B4-BE49-F238E27FC236}">
+                <a16:creationId xmlns:a16="http://schemas.microsoft.com/office/drawing/2014/main" id="{08F2F9F0-38A8-84C2-1CA0-CF92EB994220}"/>
+              </a:ext>
+            </a:extLst>
+          </p:cNvPr>
+          <p:cNvSpPr>
+            <a:spLocks noGrp="1"/>
+          </p:cNvSpPr>
+          <p:nvPr>
+            <p:ph type="body" idx="1"/>
+          </p:nvPr>
+        </p:nvSpPr>
+        <p:spPr/>
+        <p:txBody>
+          <a:bodyPr/>
+          <a:lstStyle/>
+          <a:p>
+            <a:pPr algn="l">
+              <a:spcBef>
+                <a:spcPts val="450"/>
+              </a:spcBef>
+              <a:spcAft>
+                <a:spcPts val="450"/>
+              </a:spcAft>
+            </a:pPr>
+            <a:r>
+              <a:rPr lang="en-US" altLang="zh-CN" sz="1800" b="1" i="0">
+                <a:solidFill>
+                  <a:srgbClr val="2D3B45"/>
+                </a:solidFill>
+                <a:effectLst/>
+                <a:latin typeface="Lato Extended"/>
+              </a:rPr>
+              <a:t>Introduction Slide</a:t>
+            </a:r>
+            <a:endParaRPr lang="en-US" altLang="zh-CN" sz="1800" b="0" i="0">
+              <a:solidFill>
+                <a:srgbClr val="2D3B45"/>
+              </a:solidFill>
+              <a:effectLst/>
+              <a:latin typeface="Lato Extended"/>
+            </a:endParaRPr>
+          </a:p>
+          <a:p>
+            <a:pPr algn="l">
+              <a:spcAft>
+                <a:spcPts val="450"/>
+              </a:spcAft>
+              <a:buFont typeface="Arial" panose="020B0604020202020204" pitchFamily="34" charset="0"/>
+              <a:buChar char="•"/>
+            </a:pPr>
+            <a:r>
+              <a:rPr lang="en-US" altLang="zh-CN" sz="1800" b="1" i="0">
+                <a:solidFill>
+                  <a:srgbClr val="2D3B45"/>
+                </a:solidFill>
+                <a:effectLst/>
+                <a:latin typeface="v-sans"/>
+              </a:rPr>
+              <a:t>Brief Introduction:</a:t>
+            </a:r>
+            <a:r>
+              <a:rPr lang="en-US" altLang="zh-CN" sz="1800" b="0" i="0">
+                <a:solidFill>
+                  <a:srgbClr val="2D3B45"/>
+                </a:solidFill>
+                <a:effectLst/>
+                <a:latin typeface="v-sans"/>
+              </a:rPr>
+              <a:t> of the team and the topic</a:t>
+            </a:r>
+          </a:p>
+          <a:p>
+            <a:endParaRPr lang="zh-CN" altLang="en-US"/>
+          </a:p>
+        </p:txBody>
+      </p:sp>
+      <p:sp>
+        <p:nvSpPr>
+          <p:cNvPr id="4" name="灯片编号占位符 3">
+            <a:extLst>
+              <a:ext uri="{FF2B5EF4-FFF2-40B4-BE49-F238E27FC236}">
+                <a16:creationId xmlns:a16="http://schemas.microsoft.com/office/drawing/2014/main" id="{C487B5A8-EF2B-7398-BCC7-3EF95CFFA0B4}"/>
+              </a:ext>
+            </a:extLst>
+          </p:cNvPr>
+          <p:cNvSpPr>
+            <a:spLocks noGrp="1"/>
+          </p:cNvSpPr>
+          <p:nvPr>
+            <p:ph type="sldNum" sz="quarter" idx="5"/>
+          </p:nvPr>
+        </p:nvSpPr>
+        <p:spPr/>
+        <p:txBody>
+          <a:bodyPr/>
+          <a:lstStyle/>
+          <a:p>
+            <a:fld id="{EED2C466-1B0F-4591-A952-5F31096967DE}" type="slidenum">
+              <a:rPr lang="zh-CN" altLang="en-US" smtClean="0"/>
+              <a:t>15</a:t>
+            </a:fld>
+            <a:endParaRPr lang="zh-CN" altLang="en-US"/>
+          </a:p>
+        </p:txBody>
+      </p:sp>
+    </p:spTree>
+    <p:extLst>
+      <p:ext uri="{BB962C8B-B14F-4D97-AF65-F5344CB8AC3E}">
+        <p14:creationId xmlns:p14="http://schemas.microsoft.com/office/powerpoint/2010/main" val="2966778880"/>
+      </p:ext>
+    </p:extLst>
+  </p:cSld>
+  <p:clrMapOvr>
+    <a:masterClrMapping/>
+  </p:clrMapOvr>
+</p:notes>
+</file>
+
+<file path=ppt/notesSlides/notesSlide16.xml><?xml version="1.0" encoding="utf-8"?>
+<p:notes xmlns:a="http://schemas.openxmlformats.org/drawingml/2006/main" xmlns:r="http://schemas.openxmlformats.org/officeDocument/2006/relationships" xmlns:p="http://schemas.openxmlformats.org/presentationml/2006/main">
+  <p:cSld>
+    <p:spTree>
+      <p:nvGrpSpPr>
+        <p:cNvPr id="1" name="">
+          <a:extLst>
+            <a:ext uri="{FF2B5EF4-FFF2-40B4-BE49-F238E27FC236}">
+              <a16:creationId xmlns:a16="http://schemas.microsoft.com/office/drawing/2014/main" id="{8247F8F6-43CE-1AC7-BA14-09317CE834DB}"/>
+            </a:ext>
+          </a:extLst>
+        </p:cNvPr>
+        <p:cNvGrpSpPr/>
+        <p:nvPr/>
+      </p:nvGrpSpPr>
+      <p:grpSpPr>
+        <a:xfrm>
+          <a:off x="0" y="0"/>
+          <a:ext cx="0" cy="0"/>
+          <a:chOff x="0" y="0"/>
+          <a:chExt cx="0" cy="0"/>
+        </a:xfrm>
+      </p:grpSpPr>
+      <p:sp>
+        <p:nvSpPr>
+          <p:cNvPr id="2" name="幻灯片图像占位符 1">
+            <a:extLst>
+              <a:ext uri="{FF2B5EF4-FFF2-40B4-BE49-F238E27FC236}">
+                <a16:creationId xmlns:a16="http://schemas.microsoft.com/office/drawing/2014/main" id="{3540F09F-EA74-2FDC-9F0A-305E4C9C8391}"/>
+              </a:ext>
+            </a:extLst>
+          </p:cNvPr>
+          <p:cNvSpPr>
+            <a:spLocks noGrp="1" noRot="1" noChangeAspect="1"/>
+          </p:cNvSpPr>
+          <p:nvPr>
+            <p:ph type="sldImg"/>
+          </p:nvPr>
+        </p:nvSpPr>
+        <p:spPr/>
+      </p:sp>
+      <p:sp>
+        <p:nvSpPr>
+          <p:cNvPr id="3" name="备注占位符 2">
+            <a:extLst>
+              <a:ext uri="{FF2B5EF4-FFF2-40B4-BE49-F238E27FC236}">
+                <a16:creationId xmlns:a16="http://schemas.microsoft.com/office/drawing/2014/main" id="{08F2F9F0-38A8-84C2-1CA0-CF92EB994220}"/>
+              </a:ext>
+            </a:extLst>
+          </p:cNvPr>
+          <p:cNvSpPr>
+            <a:spLocks noGrp="1"/>
+          </p:cNvSpPr>
+          <p:nvPr>
+            <p:ph type="body" idx="1"/>
+          </p:nvPr>
+        </p:nvSpPr>
+        <p:spPr/>
+        <p:txBody>
+          <a:bodyPr/>
+          <a:lstStyle/>
+          <a:p>
+            <a:pPr algn="l">
+              <a:spcBef>
+                <a:spcPts val="450"/>
+              </a:spcBef>
+              <a:spcAft>
+                <a:spcPts val="450"/>
+              </a:spcAft>
+            </a:pPr>
+            <a:r>
+              <a:rPr lang="en-US" altLang="zh-CN" sz="1800" b="1" i="0">
+                <a:solidFill>
+                  <a:srgbClr val="2D3B45"/>
+                </a:solidFill>
+                <a:effectLst/>
+                <a:latin typeface="Lato Extended"/>
+              </a:rPr>
+              <a:t>Introduction Slide</a:t>
+            </a:r>
+            <a:endParaRPr lang="en-US" altLang="zh-CN" sz="1800" b="0" i="0">
+              <a:solidFill>
+                <a:srgbClr val="2D3B45"/>
+              </a:solidFill>
+              <a:effectLst/>
+              <a:latin typeface="Lato Extended"/>
+            </a:endParaRPr>
+          </a:p>
+          <a:p>
+            <a:pPr algn="l">
+              <a:spcAft>
+                <a:spcPts val="450"/>
+              </a:spcAft>
+              <a:buFont typeface="Arial" panose="020B0604020202020204" pitchFamily="34" charset="0"/>
+              <a:buChar char="•"/>
+            </a:pPr>
+            <a:r>
+              <a:rPr lang="en-US" altLang="zh-CN" sz="1800" b="1" i="0">
+                <a:solidFill>
+                  <a:srgbClr val="2D3B45"/>
+                </a:solidFill>
+                <a:effectLst/>
+                <a:latin typeface="v-sans"/>
+              </a:rPr>
+              <a:t>Brief Introduction:</a:t>
+            </a:r>
+            <a:r>
+              <a:rPr lang="en-US" altLang="zh-CN" sz="1800" b="0" i="0">
+                <a:solidFill>
+                  <a:srgbClr val="2D3B45"/>
+                </a:solidFill>
+                <a:effectLst/>
+                <a:latin typeface="v-sans"/>
+              </a:rPr>
+              <a:t> of the team and the topic</a:t>
+            </a:r>
+          </a:p>
+          <a:p>
+            <a:endParaRPr lang="zh-CN" altLang="en-US"/>
+          </a:p>
+        </p:txBody>
+      </p:sp>
+      <p:sp>
+        <p:nvSpPr>
+          <p:cNvPr id="4" name="灯片编号占位符 3">
+            <a:extLst>
+              <a:ext uri="{FF2B5EF4-FFF2-40B4-BE49-F238E27FC236}">
+                <a16:creationId xmlns:a16="http://schemas.microsoft.com/office/drawing/2014/main" id="{C487B5A8-EF2B-7398-BCC7-3EF95CFFA0B4}"/>
+              </a:ext>
+            </a:extLst>
+          </p:cNvPr>
+          <p:cNvSpPr>
+            <a:spLocks noGrp="1"/>
+          </p:cNvSpPr>
+          <p:nvPr>
+            <p:ph type="sldNum" sz="quarter" idx="5"/>
+          </p:nvPr>
+        </p:nvSpPr>
+        <p:spPr/>
+        <p:txBody>
+          <a:bodyPr/>
+          <a:lstStyle/>
+          <a:p>
+            <a:fld id="{EED2C466-1B0F-4591-A952-5F31096967DE}" type="slidenum">
+              <a:rPr lang="zh-CN" altLang="en-US" smtClean="0"/>
+              <a:t>16</a:t>
+            </a:fld>
+            <a:endParaRPr lang="zh-CN" altLang="en-US"/>
+          </a:p>
+        </p:txBody>
+      </p:sp>
+    </p:spTree>
+    <p:extLst>
+      <p:ext uri="{BB962C8B-B14F-4D97-AF65-F5344CB8AC3E}">
+        <p14:creationId xmlns:p14="http://schemas.microsoft.com/office/powerpoint/2010/main" val="3200344274"/>
+      </p:ext>
+    </p:extLst>
+  </p:cSld>
+  <p:clrMapOvr>
+    <a:masterClrMapping/>
+  </p:clrMapOvr>
+</p:notes>
+</file>
+
+<file path=ppt/notesSlides/notesSlide17.xml><?xml version="1.0" encoding="utf-8"?>
 <p:notes xmlns:a="http://schemas.openxmlformats.org/drawingml/2006/main" xmlns:r="http://schemas.openxmlformats.org/officeDocument/2006/relationships" xmlns:p="http://schemas.openxmlformats.org/presentationml/2006/main">
   <p:cSld>
     <p:spTree>
@@ -2383,7 +2879,7 @@
           <a:p>
             <a:fld id="{EED2C466-1B0F-4591-A952-5F31096967DE}" type="slidenum">
               <a:rPr lang="zh-CN" altLang="en-US" smtClean="0"/>
-              <a:t>14</a:t>
+              <a:t>17</a:t>
             </a:fld>
             <a:endParaRPr lang="zh-CN" altLang="en-US"/>
           </a:p>
@@ -2402,7 +2898,171 @@
 </p:notes>
 </file>
 
-<file path=ppt/notesSlides/notesSlide15.xml><?xml version="1.0" encoding="utf-8"?>
+<file path=ppt/notesSlides/notesSlide18.xml><?xml version="1.0" encoding="utf-8"?>
+<p:notes xmlns:a="http://schemas.openxmlformats.org/drawingml/2006/main" xmlns:r="http://schemas.openxmlformats.org/officeDocument/2006/relationships" xmlns:p="http://schemas.openxmlformats.org/presentationml/2006/main">
+  <p:cSld>
+    <p:spTree>
+      <p:nvGrpSpPr>
+        <p:cNvPr id="1" name="">
+          <a:extLst>
+            <a:ext uri="{FF2B5EF4-FFF2-40B4-BE49-F238E27FC236}">
+              <a16:creationId xmlns:a16="http://schemas.microsoft.com/office/drawing/2014/main" id="{332DE000-5F2E-A923-B03F-62E005DC2D2E}"/>
+            </a:ext>
+          </a:extLst>
+        </p:cNvPr>
+        <p:cNvGrpSpPr/>
+        <p:nvPr/>
+      </p:nvGrpSpPr>
+      <p:grpSpPr>
+        <a:xfrm>
+          <a:off x="0" y="0"/>
+          <a:ext cx="0" cy="0"/>
+          <a:chOff x="0" y="0"/>
+          <a:chExt cx="0" cy="0"/>
+        </a:xfrm>
+      </p:grpSpPr>
+      <p:sp>
+        <p:nvSpPr>
+          <p:cNvPr id="2" name="幻灯片图像占位符 1">
+            <a:extLst>
+              <a:ext uri="{FF2B5EF4-FFF2-40B4-BE49-F238E27FC236}">
+                <a16:creationId xmlns:a16="http://schemas.microsoft.com/office/drawing/2014/main" id="{B6B6B69F-2873-5F2D-2568-11B9EB7DB573}"/>
+              </a:ext>
+            </a:extLst>
+          </p:cNvPr>
+          <p:cNvSpPr>
+            <a:spLocks noGrp="1" noRot="1" noChangeAspect="1"/>
+          </p:cNvSpPr>
+          <p:nvPr>
+            <p:ph type="sldImg"/>
+          </p:nvPr>
+        </p:nvSpPr>
+        <p:spPr/>
+      </p:sp>
+      <p:sp>
+        <p:nvSpPr>
+          <p:cNvPr id="3" name="备注占位符 2">
+            <a:extLst>
+              <a:ext uri="{FF2B5EF4-FFF2-40B4-BE49-F238E27FC236}">
+                <a16:creationId xmlns:a16="http://schemas.microsoft.com/office/drawing/2014/main" id="{3C825DC4-3A3C-E810-5B72-DEC4224C5D0B}"/>
+              </a:ext>
+            </a:extLst>
+          </p:cNvPr>
+          <p:cNvSpPr>
+            <a:spLocks noGrp="1"/>
+          </p:cNvSpPr>
+          <p:nvPr>
+            <p:ph type="body" idx="1"/>
+          </p:nvPr>
+        </p:nvSpPr>
+        <p:spPr/>
+        <p:txBody>
+          <a:bodyPr/>
+          <a:lstStyle/>
+          <a:p>
+            <a:pPr algn="l">
+              <a:spcBef>
+                <a:spcPts val="450"/>
+              </a:spcBef>
+              <a:spcAft>
+                <a:spcPts val="450"/>
+              </a:spcAft>
+            </a:pPr>
+            <a:r>
+              <a:rPr lang="en-US" altLang="zh-CN" sz="1800" b="1" i="0">
+                <a:solidFill>
+                  <a:srgbClr val="2D3B45"/>
+                </a:solidFill>
+                <a:effectLst/>
+                <a:latin typeface="Lato Extended"/>
+              </a:rPr>
+              <a:t>Introduction Slide</a:t>
+            </a:r>
+            <a:endParaRPr lang="en-US" altLang="zh-CN" sz="1800" b="0" i="0">
+              <a:solidFill>
+                <a:srgbClr val="2D3B45"/>
+              </a:solidFill>
+              <a:effectLst/>
+              <a:latin typeface="Lato Extended"/>
+            </a:endParaRPr>
+          </a:p>
+          <a:p>
+            <a:pPr algn="l">
+              <a:spcAft>
+                <a:spcPts val="450"/>
+              </a:spcAft>
+              <a:buFont typeface="Arial" panose="020B0604020202020204" pitchFamily="34" charset="0"/>
+              <a:buChar char="•"/>
+            </a:pPr>
+            <a:r>
+              <a:rPr lang="en-US" altLang="zh-CN" sz="1800" b="1" i="0">
+                <a:solidFill>
+                  <a:srgbClr val="2D3B45"/>
+                </a:solidFill>
+                <a:effectLst/>
+                <a:latin typeface="v-sans"/>
+              </a:rPr>
+              <a:t>Brief Introduction:</a:t>
+            </a:r>
+            <a:r>
+              <a:rPr lang="en-US" altLang="zh-CN" sz="1800" b="0" i="0">
+                <a:solidFill>
+                  <a:srgbClr val="2D3B45"/>
+                </a:solidFill>
+                <a:effectLst/>
+                <a:latin typeface="v-sans"/>
+              </a:rPr>
+              <a:t> of the team and the topic</a:t>
+            </a:r>
+          </a:p>
+          <a:p>
+            <a:endParaRPr lang="zh-CN" altLang="en-US"/>
+          </a:p>
+        </p:txBody>
+      </p:sp>
+      <p:sp>
+        <p:nvSpPr>
+          <p:cNvPr id="4" name="灯片编号占位符 3">
+            <a:extLst>
+              <a:ext uri="{FF2B5EF4-FFF2-40B4-BE49-F238E27FC236}">
+                <a16:creationId xmlns:a16="http://schemas.microsoft.com/office/drawing/2014/main" id="{ABF76AD1-1C9A-4140-DCE9-E920FE9D9D63}"/>
+              </a:ext>
+            </a:extLst>
+          </p:cNvPr>
+          <p:cNvSpPr>
+            <a:spLocks noGrp="1"/>
+          </p:cNvSpPr>
+          <p:nvPr>
+            <p:ph type="sldNum" sz="quarter" idx="5"/>
+          </p:nvPr>
+        </p:nvSpPr>
+        <p:spPr/>
+        <p:txBody>
+          <a:bodyPr/>
+          <a:lstStyle/>
+          <a:p>
+            <a:fld id="{EED2C466-1B0F-4591-A952-5F31096967DE}" type="slidenum">
+              <a:rPr lang="zh-CN" altLang="en-US" smtClean="0"/>
+              <a:t>18</a:t>
+            </a:fld>
+            <a:endParaRPr lang="zh-CN" altLang="en-US"/>
+          </a:p>
+        </p:txBody>
+      </p:sp>
+    </p:spTree>
+    <p:extLst>
+      <p:ext uri="{BB962C8B-B14F-4D97-AF65-F5344CB8AC3E}">
+        <p14:creationId xmlns:p14="http://schemas.microsoft.com/office/powerpoint/2010/main" val="1993938721"/>
+      </p:ext>
+    </p:extLst>
+  </p:cSld>
+  <p:clrMapOvr>
+    <a:masterClrMapping/>
+  </p:clrMapOvr>
+</p:notes>
+</file>
+
+<file path=ppt/notesSlides/notesSlide19.xml><?xml version="1.0" encoding="utf-8"?>
 <p:notes xmlns:a="http://schemas.openxmlformats.org/drawingml/2006/main" xmlns:r="http://schemas.openxmlformats.org/officeDocument/2006/relationships" xmlns:p="http://schemas.openxmlformats.org/presentationml/2006/main">
   <p:cSld>
     <p:spTree>
@@ -2547,7 +3207,7 @@
           <a:p>
             <a:fld id="{EED2C466-1B0F-4591-A952-5F31096967DE}" type="slidenum">
               <a:rPr lang="zh-CN" altLang="en-US" smtClean="0"/>
-              <a:t>15</a:t>
+              <a:t>19</a:t>
             </a:fld>
             <a:endParaRPr lang="zh-CN" altLang="en-US"/>
           </a:p>
@@ -2557,170 +3217,6 @@
     <p:extLst>
       <p:ext uri="{BB962C8B-B14F-4D97-AF65-F5344CB8AC3E}">
         <p14:creationId xmlns:p14="http://schemas.microsoft.com/office/powerpoint/2010/main" val="4049543388"/>
-      </p:ext>
-    </p:extLst>
-  </p:cSld>
-  <p:clrMapOvr>
-    <a:masterClrMapping/>
-  </p:clrMapOvr>
-</p:notes>
-</file>
-
-<file path=ppt/notesSlides/notesSlide16.xml><?xml version="1.0" encoding="utf-8"?>
-<p:notes xmlns:a="http://schemas.openxmlformats.org/drawingml/2006/main" xmlns:r="http://schemas.openxmlformats.org/officeDocument/2006/relationships" xmlns:p="http://schemas.openxmlformats.org/presentationml/2006/main">
-  <p:cSld>
-    <p:spTree>
-      <p:nvGrpSpPr>
-        <p:cNvPr id="1" name="">
-          <a:extLst>
-            <a:ext uri="{FF2B5EF4-FFF2-40B4-BE49-F238E27FC236}">
-              <a16:creationId xmlns:a16="http://schemas.microsoft.com/office/drawing/2014/main" id="{528CD5CE-3672-5E54-5E42-BB1D3E0132E2}"/>
-            </a:ext>
-          </a:extLst>
-        </p:cNvPr>
-        <p:cNvGrpSpPr/>
-        <p:nvPr/>
-      </p:nvGrpSpPr>
-      <p:grpSpPr>
-        <a:xfrm>
-          <a:off x="0" y="0"/>
-          <a:ext cx="0" cy="0"/>
-          <a:chOff x="0" y="0"/>
-          <a:chExt cx="0" cy="0"/>
-        </a:xfrm>
-      </p:grpSpPr>
-      <p:sp>
-        <p:nvSpPr>
-          <p:cNvPr id="2" name="幻灯片图像占位符 1">
-            <a:extLst>
-              <a:ext uri="{FF2B5EF4-FFF2-40B4-BE49-F238E27FC236}">
-                <a16:creationId xmlns:a16="http://schemas.microsoft.com/office/drawing/2014/main" id="{DDDB85E1-341D-1792-5327-3E407C9DABDD}"/>
-              </a:ext>
-            </a:extLst>
-          </p:cNvPr>
-          <p:cNvSpPr>
-            <a:spLocks noGrp="1" noRot="1" noChangeAspect="1"/>
-          </p:cNvSpPr>
-          <p:nvPr>
-            <p:ph type="sldImg"/>
-          </p:nvPr>
-        </p:nvSpPr>
-        <p:spPr/>
-      </p:sp>
-      <p:sp>
-        <p:nvSpPr>
-          <p:cNvPr id="3" name="备注占位符 2">
-            <a:extLst>
-              <a:ext uri="{FF2B5EF4-FFF2-40B4-BE49-F238E27FC236}">
-                <a16:creationId xmlns:a16="http://schemas.microsoft.com/office/drawing/2014/main" id="{3284F48F-0E63-34BB-95E7-E2CC4BFA858F}"/>
-              </a:ext>
-            </a:extLst>
-          </p:cNvPr>
-          <p:cNvSpPr>
-            <a:spLocks noGrp="1"/>
-          </p:cNvSpPr>
-          <p:nvPr>
-            <p:ph type="body" idx="1"/>
-          </p:nvPr>
-        </p:nvSpPr>
-        <p:spPr/>
-        <p:txBody>
-          <a:bodyPr/>
-          <a:lstStyle/>
-          <a:p>
-            <a:pPr algn="l">
-              <a:spcBef>
-                <a:spcPts val="450"/>
-              </a:spcBef>
-              <a:spcAft>
-                <a:spcPts val="450"/>
-              </a:spcAft>
-            </a:pPr>
-            <a:r>
-              <a:rPr lang="en-US" altLang="zh-CN" sz="1800" b="1" i="0">
-                <a:solidFill>
-                  <a:srgbClr val="2D3B45"/>
-                </a:solidFill>
-                <a:effectLst/>
-                <a:latin typeface="Lato Extended"/>
-              </a:rPr>
-              <a:t>Introduction Slide</a:t>
-            </a:r>
-            <a:endParaRPr lang="en-US" altLang="zh-CN" sz="1800" b="0" i="0">
-              <a:solidFill>
-                <a:srgbClr val="2D3B45"/>
-              </a:solidFill>
-              <a:effectLst/>
-              <a:latin typeface="Lato Extended"/>
-            </a:endParaRPr>
-          </a:p>
-          <a:p>
-            <a:pPr algn="l">
-              <a:spcAft>
-                <a:spcPts val="450"/>
-              </a:spcAft>
-              <a:buFont typeface="Arial" panose="020B0604020202020204" pitchFamily="34" charset="0"/>
-              <a:buChar char="•"/>
-            </a:pPr>
-            <a:r>
-              <a:rPr lang="en-US" altLang="zh-CN" sz="1800" b="1" i="0">
-                <a:solidFill>
-                  <a:srgbClr val="2D3B45"/>
-                </a:solidFill>
-                <a:effectLst/>
-                <a:latin typeface="v-sans"/>
-              </a:rPr>
-              <a:t>Brief Introduction:</a:t>
-            </a:r>
-            <a:r>
-              <a:rPr lang="en-US" altLang="zh-CN" sz="1800" b="0" i="0">
-                <a:solidFill>
-                  <a:srgbClr val="2D3B45"/>
-                </a:solidFill>
-                <a:effectLst/>
-                <a:latin typeface="v-sans"/>
-              </a:rPr>
-              <a:t> of the team and the topic</a:t>
-            </a:r>
-          </a:p>
-          <a:p>
-            <a:endParaRPr lang="zh-CN" altLang="en-US"/>
-          </a:p>
-        </p:txBody>
-      </p:sp>
-      <p:sp>
-        <p:nvSpPr>
-          <p:cNvPr id="4" name="灯片编号占位符 3">
-            <a:extLst>
-              <a:ext uri="{FF2B5EF4-FFF2-40B4-BE49-F238E27FC236}">
-                <a16:creationId xmlns:a16="http://schemas.microsoft.com/office/drawing/2014/main" id="{11FA0245-A640-2959-ECDD-A9DFEDB80253}"/>
-              </a:ext>
-            </a:extLst>
-          </p:cNvPr>
-          <p:cNvSpPr>
-            <a:spLocks noGrp="1"/>
-          </p:cNvSpPr>
-          <p:nvPr>
-            <p:ph type="sldNum" sz="quarter" idx="5"/>
-          </p:nvPr>
-        </p:nvSpPr>
-        <p:spPr/>
-        <p:txBody>
-          <a:bodyPr/>
-          <a:lstStyle/>
-          <a:p>
-            <a:fld id="{EED2C466-1B0F-4591-A952-5F31096967DE}" type="slidenum">
-              <a:rPr lang="zh-CN" altLang="en-US" smtClean="0"/>
-              <a:t>16</a:t>
-            </a:fld>
-            <a:endParaRPr lang="zh-CN" altLang="en-US"/>
-          </a:p>
-        </p:txBody>
-      </p:sp>
-    </p:spTree>
-    <p:extLst>
-      <p:ext uri="{BB962C8B-B14F-4D97-AF65-F5344CB8AC3E}">
-        <p14:creationId xmlns:p14="http://schemas.microsoft.com/office/powerpoint/2010/main" val="2465791248"/>
       </p:ext>
     </p:extLst>
   </p:cSld>
@@ -2885,6 +3381,170 @@
     <p:extLst>
       <p:ext uri="{BB962C8B-B14F-4D97-AF65-F5344CB8AC3E}">
         <p14:creationId xmlns:p14="http://schemas.microsoft.com/office/powerpoint/2010/main" val="1117822953"/>
+      </p:ext>
+    </p:extLst>
+  </p:cSld>
+  <p:clrMapOvr>
+    <a:masterClrMapping/>
+  </p:clrMapOvr>
+</p:notes>
+</file>
+
+<file path=ppt/notesSlides/notesSlide20.xml><?xml version="1.0" encoding="utf-8"?>
+<p:notes xmlns:a="http://schemas.openxmlformats.org/drawingml/2006/main" xmlns:r="http://schemas.openxmlformats.org/officeDocument/2006/relationships" xmlns:p="http://schemas.openxmlformats.org/presentationml/2006/main">
+  <p:cSld>
+    <p:spTree>
+      <p:nvGrpSpPr>
+        <p:cNvPr id="1" name="">
+          <a:extLst>
+            <a:ext uri="{FF2B5EF4-FFF2-40B4-BE49-F238E27FC236}">
+              <a16:creationId xmlns:a16="http://schemas.microsoft.com/office/drawing/2014/main" id="{528CD5CE-3672-5E54-5E42-BB1D3E0132E2}"/>
+            </a:ext>
+          </a:extLst>
+        </p:cNvPr>
+        <p:cNvGrpSpPr/>
+        <p:nvPr/>
+      </p:nvGrpSpPr>
+      <p:grpSpPr>
+        <a:xfrm>
+          <a:off x="0" y="0"/>
+          <a:ext cx="0" cy="0"/>
+          <a:chOff x="0" y="0"/>
+          <a:chExt cx="0" cy="0"/>
+        </a:xfrm>
+      </p:grpSpPr>
+      <p:sp>
+        <p:nvSpPr>
+          <p:cNvPr id="2" name="幻灯片图像占位符 1">
+            <a:extLst>
+              <a:ext uri="{FF2B5EF4-FFF2-40B4-BE49-F238E27FC236}">
+                <a16:creationId xmlns:a16="http://schemas.microsoft.com/office/drawing/2014/main" id="{DDDB85E1-341D-1792-5327-3E407C9DABDD}"/>
+              </a:ext>
+            </a:extLst>
+          </p:cNvPr>
+          <p:cNvSpPr>
+            <a:spLocks noGrp="1" noRot="1" noChangeAspect="1"/>
+          </p:cNvSpPr>
+          <p:nvPr>
+            <p:ph type="sldImg"/>
+          </p:nvPr>
+        </p:nvSpPr>
+        <p:spPr/>
+      </p:sp>
+      <p:sp>
+        <p:nvSpPr>
+          <p:cNvPr id="3" name="备注占位符 2">
+            <a:extLst>
+              <a:ext uri="{FF2B5EF4-FFF2-40B4-BE49-F238E27FC236}">
+                <a16:creationId xmlns:a16="http://schemas.microsoft.com/office/drawing/2014/main" id="{3284F48F-0E63-34BB-95E7-E2CC4BFA858F}"/>
+              </a:ext>
+            </a:extLst>
+          </p:cNvPr>
+          <p:cNvSpPr>
+            <a:spLocks noGrp="1"/>
+          </p:cNvSpPr>
+          <p:nvPr>
+            <p:ph type="body" idx="1"/>
+          </p:nvPr>
+        </p:nvSpPr>
+        <p:spPr/>
+        <p:txBody>
+          <a:bodyPr/>
+          <a:lstStyle/>
+          <a:p>
+            <a:pPr algn="l">
+              <a:spcBef>
+                <a:spcPts val="450"/>
+              </a:spcBef>
+              <a:spcAft>
+                <a:spcPts val="450"/>
+              </a:spcAft>
+            </a:pPr>
+            <a:r>
+              <a:rPr lang="en-US" altLang="zh-CN" sz="1800" b="1" i="0">
+                <a:solidFill>
+                  <a:srgbClr val="2D3B45"/>
+                </a:solidFill>
+                <a:effectLst/>
+                <a:latin typeface="Lato Extended"/>
+              </a:rPr>
+              <a:t>Introduction Slide</a:t>
+            </a:r>
+            <a:endParaRPr lang="en-US" altLang="zh-CN" sz="1800" b="0" i="0">
+              <a:solidFill>
+                <a:srgbClr val="2D3B45"/>
+              </a:solidFill>
+              <a:effectLst/>
+              <a:latin typeface="Lato Extended"/>
+            </a:endParaRPr>
+          </a:p>
+          <a:p>
+            <a:pPr algn="l">
+              <a:spcAft>
+                <a:spcPts val="450"/>
+              </a:spcAft>
+              <a:buFont typeface="Arial" panose="020B0604020202020204" pitchFamily="34" charset="0"/>
+              <a:buChar char="•"/>
+            </a:pPr>
+            <a:r>
+              <a:rPr lang="en-US" altLang="zh-CN" sz="1800" b="1" i="0">
+                <a:solidFill>
+                  <a:srgbClr val="2D3B45"/>
+                </a:solidFill>
+                <a:effectLst/>
+                <a:latin typeface="v-sans"/>
+              </a:rPr>
+              <a:t>Brief Introduction:</a:t>
+            </a:r>
+            <a:r>
+              <a:rPr lang="en-US" altLang="zh-CN" sz="1800" b="0" i="0">
+                <a:solidFill>
+                  <a:srgbClr val="2D3B45"/>
+                </a:solidFill>
+                <a:effectLst/>
+                <a:latin typeface="v-sans"/>
+              </a:rPr>
+              <a:t> of the team and the topic</a:t>
+            </a:r>
+          </a:p>
+          <a:p>
+            <a:endParaRPr lang="zh-CN" altLang="en-US"/>
+          </a:p>
+        </p:txBody>
+      </p:sp>
+      <p:sp>
+        <p:nvSpPr>
+          <p:cNvPr id="4" name="灯片编号占位符 3">
+            <a:extLst>
+              <a:ext uri="{FF2B5EF4-FFF2-40B4-BE49-F238E27FC236}">
+                <a16:creationId xmlns:a16="http://schemas.microsoft.com/office/drawing/2014/main" id="{11FA0245-A640-2959-ECDD-A9DFEDB80253}"/>
+              </a:ext>
+            </a:extLst>
+          </p:cNvPr>
+          <p:cNvSpPr>
+            <a:spLocks noGrp="1"/>
+          </p:cNvSpPr>
+          <p:nvPr>
+            <p:ph type="sldNum" sz="quarter" idx="5"/>
+          </p:nvPr>
+        </p:nvSpPr>
+        <p:spPr/>
+        <p:txBody>
+          <a:bodyPr/>
+          <a:lstStyle/>
+          <a:p>
+            <a:fld id="{EED2C466-1B0F-4591-A952-5F31096967DE}" type="slidenum">
+              <a:rPr lang="zh-CN" altLang="en-US" smtClean="0"/>
+              <a:t>20</a:t>
+            </a:fld>
+            <a:endParaRPr lang="zh-CN" altLang="en-US"/>
+          </a:p>
+        </p:txBody>
+      </p:sp>
+    </p:spTree>
+    <p:extLst>
+      <p:ext uri="{BB962C8B-B14F-4D97-AF65-F5344CB8AC3E}">
+        <p14:creationId xmlns:p14="http://schemas.microsoft.com/office/powerpoint/2010/main" val="2465791248"/>
       </p:ext>
     </p:extLst>
   </p:cSld>
@@ -3886,7 +4546,7 @@
         <p:cNvPr id="1" name="">
           <a:extLst>
             <a:ext uri="{FF2B5EF4-FFF2-40B4-BE49-F238E27FC236}">
-              <a16:creationId xmlns:a16="http://schemas.microsoft.com/office/drawing/2014/main" id="{F08AD704-5687-C897-37EE-639D76BAB2B0}"/>
+              <a16:creationId xmlns:a16="http://schemas.microsoft.com/office/drawing/2014/main" id="{A3780624-88CC-1F28-3EA6-BBF568054237}"/>
             </a:ext>
           </a:extLst>
         </p:cNvPr>
@@ -3906,7 +4566,7 @@
           <p:cNvPr id="2" name="幻灯片图像占位符 1">
             <a:extLst>
               <a:ext uri="{FF2B5EF4-FFF2-40B4-BE49-F238E27FC236}">
-                <a16:creationId xmlns:a16="http://schemas.microsoft.com/office/drawing/2014/main" id="{F168772D-C045-02A6-3693-429AE9AF84FE}"/>
+                <a16:creationId xmlns:a16="http://schemas.microsoft.com/office/drawing/2014/main" id="{17D9BFCF-9822-FB5B-17B4-EBD5F789862C}"/>
               </a:ext>
             </a:extLst>
           </p:cNvPr>
@@ -3924,7 +4584,7 @@
           <p:cNvPr id="3" name="备注占位符 2">
             <a:extLst>
               <a:ext uri="{FF2B5EF4-FFF2-40B4-BE49-F238E27FC236}">
-                <a16:creationId xmlns:a16="http://schemas.microsoft.com/office/drawing/2014/main" id="{BAC52383-BBDD-CD06-582E-1C52A422B852}"/>
+                <a16:creationId xmlns:a16="http://schemas.microsoft.com/office/drawing/2014/main" id="{87921B3E-7334-C4A1-C580-61E6AC3AB4CC}"/>
               </a:ext>
             </a:extLst>
           </p:cNvPr>
@@ -3949,7 +4609,7 @@
               </a:spcAft>
             </a:pPr>
             <a:r>
-              <a:rPr lang="en-US" altLang="zh-CN" sz="1800" b="1" i="0">
+              <a:rPr lang="en-US" altLang="zh-CN" sz="1800" b="1" i="0" dirty="0">
                 <a:solidFill>
                   <a:srgbClr val="2D3B45"/>
                 </a:solidFill>
@@ -3958,7 +4618,7 @@
               </a:rPr>
               <a:t>Introduction Slide</a:t>
             </a:r>
-            <a:endParaRPr lang="en-US" altLang="zh-CN" sz="1800" b="0" i="0">
+            <a:endParaRPr lang="en-US" altLang="zh-CN" sz="1800" b="0" i="0" dirty="0">
               <a:solidFill>
                 <a:srgbClr val="2D3B45"/>
               </a:solidFill>
@@ -3975,7 +4635,7 @@
               <a:buChar char="•"/>
             </a:pPr>
             <a:r>
-              <a:rPr lang="en-US" altLang="zh-CN" sz="1800" b="1" i="0">
+              <a:rPr lang="en-US" altLang="zh-CN" sz="1800" b="1" i="0" dirty="0">
                 <a:solidFill>
                   <a:srgbClr val="2D3B45"/>
                 </a:solidFill>
@@ -3985,7 +4645,7 @@
               <a:t>Brief Introduction:</a:t>
             </a:r>
             <a:r>
-              <a:rPr lang="en-US" altLang="zh-CN" sz="1800" b="0" i="0">
+              <a:rPr lang="en-US" altLang="zh-CN" sz="1800" b="0" i="0" dirty="0">
                 <a:solidFill>
                   <a:srgbClr val="2D3B45"/>
                 </a:solidFill>
@@ -3996,7 +4656,7 @@
             </a:r>
           </a:p>
           <a:p>
-            <a:endParaRPr lang="zh-CN" altLang="en-US"/>
+            <a:endParaRPr lang="zh-CN" altLang="en-US" dirty="0"/>
           </a:p>
         </p:txBody>
       </p:sp>
@@ -4005,7 +4665,7 @@
           <p:cNvPr id="4" name="灯片编号占位符 3">
             <a:extLst>
               <a:ext uri="{FF2B5EF4-FFF2-40B4-BE49-F238E27FC236}">
-                <a16:creationId xmlns:a16="http://schemas.microsoft.com/office/drawing/2014/main" id="{4EC632BB-84C0-6D94-8195-420737B13DE8}"/>
+                <a16:creationId xmlns:a16="http://schemas.microsoft.com/office/drawing/2014/main" id="{48E609CA-1FF1-16EC-BFEC-B2D0092FC102}"/>
               </a:ext>
             </a:extLst>
           </p:cNvPr>
@@ -4032,7 +4692,7 @@
     </p:spTree>
     <p:extLst>
       <p:ext uri="{BB962C8B-B14F-4D97-AF65-F5344CB8AC3E}">
-        <p14:creationId xmlns:p14="http://schemas.microsoft.com/office/powerpoint/2010/main" val="3723329139"/>
+        <p14:creationId xmlns:p14="http://schemas.microsoft.com/office/powerpoint/2010/main" val="3655621524"/>
       </p:ext>
     </p:extLst>
   </p:cSld>
@@ -7653,7 +8313,7 @@
         <p:cNvPr id="1" name="">
           <a:extLst>
             <a:ext uri="{FF2B5EF4-FFF2-40B4-BE49-F238E27FC236}">
-              <a16:creationId xmlns:a16="http://schemas.microsoft.com/office/drawing/2014/main" id="{F91C1AA8-633B-0E63-2970-BD86F8762D1B}"/>
+              <a16:creationId xmlns:a16="http://schemas.microsoft.com/office/drawing/2014/main" id="{0A9DCC1F-156B-E4E3-A126-1FAC4D837FC0}"/>
             </a:ext>
           </a:extLst>
         </p:cNvPr>
@@ -7673,7 +8333,7 @@
           <p:cNvPr id="3" name="图文框 2">
             <a:extLst>
               <a:ext uri="{FF2B5EF4-FFF2-40B4-BE49-F238E27FC236}">
-                <a16:creationId xmlns:a16="http://schemas.microsoft.com/office/drawing/2014/main" id="{4B77FF07-F70A-99F9-00AD-A86B7D404F83}"/>
+                <a16:creationId xmlns:a16="http://schemas.microsoft.com/office/drawing/2014/main" id="{A4C4091E-CCD6-0945-EF50-D3F8BEB8A2C3}"/>
               </a:ext>
             </a:extLst>
           </p:cNvPr>
@@ -7736,7 +8396,7 @@
           <p:cNvPr id="4" name="文本框 3">
             <a:extLst>
               <a:ext uri="{FF2B5EF4-FFF2-40B4-BE49-F238E27FC236}">
-                <a16:creationId xmlns:a16="http://schemas.microsoft.com/office/drawing/2014/main" id="{3CACD4F5-9F2B-162D-72C5-415101AEBE2F}"/>
+                <a16:creationId xmlns:a16="http://schemas.microsoft.com/office/drawing/2014/main" id="{CDA23C5F-FF08-A342-D01D-3D00A4C83290}"/>
               </a:ext>
             </a:extLst>
           </p:cNvPr>
@@ -7768,7 +8428,7 @@
                 <a:ea typeface="等线"/>
                 <a:cs typeface="+mj-lt"/>
               </a:rPr>
-              <a:t>Empathy Calibration Score (ECS)</a:t>
+              <a:t>Datasets</a:t>
             </a:r>
           </a:p>
         </p:txBody>
@@ -7778,7 +8438,7 @@
           <p:cNvPr id="9" name="半闭框 8">
             <a:extLst>
               <a:ext uri="{FF2B5EF4-FFF2-40B4-BE49-F238E27FC236}">
-                <a16:creationId xmlns:a16="http://schemas.microsoft.com/office/drawing/2014/main" id="{D0B68E8D-E966-97DF-5398-77C29D8139C3}"/>
+                <a16:creationId xmlns:a16="http://schemas.microsoft.com/office/drawing/2014/main" id="{57B828DA-13A2-CAAA-C011-5FA821ED111B}"/>
               </a:ext>
             </a:extLst>
           </p:cNvPr>
@@ -7839,7 +8499,7 @@
           <p:cNvPr id="10" name="半闭框 9">
             <a:extLst>
               <a:ext uri="{FF2B5EF4-FFF2-40B4-BE49-F238E27FC236}">
-                <a16:creationId xmlns:a16="http://schemas.microsoft.com/office/drawing/2014/main" id="{B74D2438-1FC5-C43E-152F-7C8EB19255D4}"/>
+                <a16:creationId xmlns:a16="http://schemas.microsoft.com/office/drawing/2014/main" id="{3DCE1F55-A8BD-7933-D3BC-4F4D41E6E5D8}"/>
               </a:ext>
             </a:extLst>
           </p:cNvPr>
@@ -7904,7 +8564,7 @@
           <p:cNvPr id="13" name="直接连接符 12">
             <a:extLst>
               <a:ext uri="{FF2B5EF4-FFF2-40B4-BE49-F238E27FC236}">
-                <a16:creationId xmlns:a16="http://schemas.microsoft.com/office/drawing/2014/main" id="{2EB71867-BC2D-37F6-D2FE-B19B1046FA09}"/>
+                <a16:creationId xmlns:a16="http://schemas.microsoft.com/office/drawing/2014/main" id="{0A956E9B-3F5A-7063-C090-C8C0EDCEF859}"/>
               </a:ext>
             </a:extLst>
           </p:cNvPr>
@@ -7947,7 +8607,7 @@
           <p:cNvPr id="100" name="图片 99">
             <a:extLst>
               <a:ext uri="{FF2B5EF4-FFF2-40B4-BE49-F238E27FC236}">
-                <a16:creationId xmlns:a16="http://schemas.microsoft.com/office/drawing/2014/main" id="{B9C01B72-ACDA-3241-6442-2283ED4AD889}"/>
+                <a16:creationId xmlns:a16="http://schemas.microsoft.com/office/drawing/2014/main" id="{D451128E-751E-504F-140B-D1073940021A}"/>
               </a:ext>
             </a:extLst>
           </p:cNvPr>
@@ -7979,7 +8639,7 @@
           <p:cNvPr id="5" name="文本框 4">
             <a:extLst>
               <a:ext uri="{FF2B5EF4-FFF2-40B4-BE49-F238E27FC236}">
-                <a16:creationId xmlns:a16="http://schemas.microsoft.com/office/drawing/2014/main" id="{22D702D2-7240-025C-D1AF-F04EAF2D2C46}"/>
+                <a16:creationId xmlns:a16="http://schemas.microsoft.com/office/drawing/2014/main" id="{886DC045-0072-D48D-0D23-93DAD0056235}"/>
               </a:ext>
             </a:extLst>
           </p:cNvPr>
@@ -7989,7 +8649,7 @@
         <p:spPr>
           <a:xfrm>
             <a:off x="613543" y="1741049"/>
-            <a:ext cx="10964912" cy="2062103"/>
+            <a:ext cx="10964912" cy="1154162"/>
           </a:xfrm>
           <a:prstGeom prst="rect">
             <a:avLst/>
@@ -8018,213 +8678,84 @@
                 <a:ea typeface="宋体"/>
                 <a:cs typeface="Calibri"/>
               </a:rPr>
-              <a:t>The ECS is a two-dimensional rubric designed to measure not absolute empathy, but calibration— how well a response’s empathetic register matches what the customer’s expressed frustration level warrants.</a:t>
-            </a:r>
-          </a:p>
-        </p:txBody>
-      </p:sp>
-      <p:graphicFrame>
-        <p:nvGraphicFramePr>
-          <p:cNvPr id="2" name="表格 1">
-            <a:extLst>
-              <a:ext uri="{FF2B5EF4-FFF2-40B4-BE49-F238E27FC236}">
-                <a16:creationId xmlns:a16="http://schemas.microsoft.com/office/drawing/2014/main" id="{EBEB3E93-8E77-9C44-4C4D-10AF22356183}"/>
-              </a:ext>
-            </a:extLst>
-          </p:cNvPr>
-          <p:cNvGraphicFramePr>
-            <a:graphicFrameLocks noGrp="1"/>
-          </p:cNvGraphicFramePr>
+              <a:t>Customer Support on Twitter dataset (</a:t>
+            </a:r>
+            <a:r>
+              <a:rPr lang="en-US" altLang="zh-CN" sz="3200" dirty="0" err="1">
+                <a:solidFill>
+                  <a:srgbClr val="13294B"/>
+                </a:solidFill>
+                <a:latin typeface="Calibri"/>
+                <a:ea typeface="宋体"/>
+                <a:cs typeface="Calibri"/>
+              </a:rPr>
+              <a:t>Axelbrooke</a:t>
+            </a:r>
+            <a:r>
+              <a:rPr lang="en-US" altLang="zh-CN" sz="3200" dirty="0">
+                <a:solidFill>
+                  <a:srgbClr val="13294B"/>
+                </a:solidFill>
+                <a:latin typeface="Calibri"/>
+                <a:ea typeface="宋体"/>
+                <a:cs typeface="Calibri"/>
+              </a:rPr>
+              <a:t>, 2017)</a:t>
+            </a:r>
+          </a:p>
+          <a:p>
+            <a:pPr marL="457200" indent="-457200">
+              <a:spcAft>
+                <a:spcPts val="600"/>
+              </a:spcAft>
+              <a:buFont typeface="Arial" panose="020B0604020202020204" pitchFamily="34" charset="0"/>
+              <a:buChar char="•"/>
+            </a:pPr>
+            <a:endParaRPr lang="en-US" altLang="zh-CN" sz="3200" dirty="0">
+              <a:solidFill>
+                <a:srgbClr val="13294B"/>
+              </a:solidFill>
+              <a:latin typeface="Calibri"/>
+              <a:ea typeface="宋体"/>
+              <a:cs typeface="Calibri"/>
+            </a:endParaRPr>
+          </a:p>
+        </p:txBody>
+      </p:sp>
+      <p:pic>
+        <p:nvPicPr>
+          <p:cNvPr id="6" name="图片 5">
+            <a:extLst>
+              <a:ext uri="{FF2B5EF4-FFF2-40B4-BE49-F238E27FC236}">
+                <a16:creationId xmlns:a16="http://schemas.microsoft.com/office/drawing/2014/main" id="{21E9EC38-36A8-5BD2-5491-ED2CCE6F82DA}"/>
+              </a:ext>
+            </a:extLst>
+          </p:cNvPr>
+          <p:cNvPicPr>
+            <a:picLocks noChangeAspect="1"/>
+          </p:cNvPicPr>
           <p:nvPr/>
-        </p:nvGraphicFramePr>
-        <p:xfrm>
-          <a:off x="914401" y="3803152"/>
-          <a:ext cx="10469571" cy="2533953"/>
-        </p:xfrm>
-        <a:graphic>
-          <a:graphicData uri="http://schemas.openxmlformats.org/drawingml/2006/table">
-            <a:tbl>
-              <a:tblPr firstRow="1" bandRow="1">
-                <a:tableStyleId>{21E4AEA4-8DFA-4A89-87EB-49C32662AFE0}</a:tableStyleId>
-              </a:tblPr>
-              <a:tblGrid>
-                <a:gridCol w="3489857">
-                  <a:extLst>
-                    <a:ext uri="{9D8B030D-6E8A-4147-A177-3AD203B41FA5}">
-                      <a16:colId xmlns:a16="http://schemas.microsoft.com/office/drawing/2014/main" val="2473411904"/>
-                    </a:ext>
-                  </a:extLst>
-                </a:gridCol>
-                <a:gridCol w="3489857">
-                  <a:extLst>
-                    <a:ext uri="{9D8B030D-6E8A-4147-A177-3AD203B41FA5}">
-                      <a16:colId xmlns:a16="http://schemas.microsoft.com/office/drawing/2014/main" val="1406048790"/>
-                    </a:ext>
-                  </a:extLst>
-                </a:gridCol>
-                <a:gridCol w="3489857">
-                  <a:extLst>
-                    <a:ext uri="{9D8B030D-6E8A-4147-A177-3AD203B41FA5}">
-                      <a16:colId xmlns:a16="http://schemas.microsoft.com/office/drawing/2014/main" val="3813345470"/>
-                    </a:ext>
-                  </a:extLst>
-                </a:gridCol>
-              </a:tblGrid>
-              <a:tr h="317802">
-                <a:tc>
-                  <a:txBody>
-                    <a:bodyPr/>
-                    <a:lstStyle/>
-                    <a:p>
-                      <a:r>
-                        <a:rPr lang="en-US" altLang="zh-CN" dirty="0"/>
-                        <a:t>Dimension</a:t>
-                      </a:r>
-                      <a:endParaRPr lang="zh-CN" altLang="en-US" dirty="0"/>
-                    </a:p>
-                  </a:txBody>
-                  <a:tcPr/>
-                </a:tc>
-                <a:tc>
-                  <a:txBody>
-                    <a:bodyPr/>
-                    <a:lstStyle/>
-                    <a:p>
-                      <a:r>
-                        <a:rPr lang="en-US" altLang="zh-CN" dirty="0"/>
-                        <a:t>Measurement</a:t>
-                      </a:r>
-                      <a:endParaRPr lang="zh-CN" altLang="en-US" dirty="0"/>
-                    </a:p>
-                  </a:txBody>
-                  <a:tcPr/>
-                </a:tc>
-                <a:tc>
-                  <a:txBody>
-                    <a:bodyPr/>
-                    <a:lstStyle/>
-                    <a:p>
-                      <a:r>
-                        <a:rPr lang="en-US" altLang="zh-CN" dirty="0"/>
-                        <a:t>Weight at high FIS</a:t>
-                      </a:r>
-                      <a:endParaRPr lang="zh-CN" altLang="en-US" dirty="0"/>
-                    </a:p>
-                  </a:txBody>
-                  <a:tcPr/>
-                </a:tc>
-                <a:extLst>
-                  <a:ext uri="{0D108BD9-81ED-4DB2-BD59-A6C34878D82A}">
-                    <a16:rowId xmlns:a16="http://schemas.microsoft.com/office/drawing/2014/main" val="208840510"/>
-                  </a:ext>
-                </a:extLst>
-              </a:tr>
-              <a:tr h="783620">
-                <a:tc>
-                  <a:txBody>
-                    <a:bodyPr/>
-                    <a:lstStyle/>
-                    <a:p>
-                      <a:r>
-                        <a:rPr lang="en-US" altLang="zh-CN" dirty="0"/>
-                        <a:t>Apology density</a:t>
-                      </a:r>
-                      <a:endParaRPr lang="zh-CN" altLang="en-US" dirty="0"/>
-                    </a:p>
-                  </a:txBody>
-                  <a:tcPr/>
-                </a:tc>
-                <a:tc>
-                  <a:txBody>
-                    <a:bodyPr/>
-                    <a:lstStyle/>
-                    <a:p>
-                      <a:r>
-                        <a:rPr lang="en-US" altLang="zh-CN" dirty="0"/>
-                        <a:t>Normalized count of apology/regret terms (regex). Fully auto mated.</a:t>
-                      </a:r>
-                      <a:endParaRPr lang="zh-CN" altLang="en-US" dirty="0"/>
-                    </a:p>
-                  </a:txBody>
-                  <a:tcPr/>
-                </a:tc>
-                <a:tc>
-                  <a:txBody>
-                    <a:bodyPr/>
-                    <a:lstStyle/>
-                    <a:p>
-                      <a:r>
-                        <a:rPr lang="en-US" altLang="zh-CN" dirty="0"/>
-                        <a:t>Higher weight</a:t>
-                      </a:r>
-                      <a:endParaRPr lang="zh-CN" altLang="en-US" dirty="0"/>
-                    </a:p>
-                  </a:txBody>
-                  <a:tcPr/>
-                </a:tc>
-                <a:extLst>
-                  <a:ext uri="{0D108BD9-81ED-4DB2-BD59-A6C34878D82A}">
-                    <a16:rowId xmlns:a16="http://schemas.microsoft.com/office/drawing/2014/main" val="1428517476"/>
-                  </a:ext>
-                </a:extLst>
-              </a:tr>
-              <a:tr h="1253793">
-                <a:tc>
-                  <a:txBody>
-                    <a:bodyPr/>
-                    <a:lstStyle/>
-                    <a:p>
-                      <a:r>
-                        <a:rPr lang="en-US" altLang="zh-CN" dirty="0"/>
-                        <a:t>Tone-frustration fit</a:t>
-                      </a:r>
-                      <a:endParaRPr lang="zh-CN" altLang="en-US" dirty="0"/>
-                    </a:p>
-                  </a:txBody>
-                  <a:tcPr/>
-                </a:tc>
-                <a:tc>
-                  <a:txBody>
-                    <a:bodyPr/>
-                    <a:lstStyle/>
-                    <a:p>
-                      <a:r>
-                        <a:rPr lang="en-US" altLang="zh-CN" dirty="0"/>
-                        <a:t>LLM-as-judge (GPT 4o) scores 1–5: does the response tone match the emotional register of the complaint?</a:t>
-                      </a:r>
-                      <a:endParaRPr lang="zh-CN" altLang="en-US" dirty="0"/>
-                    </a:p>
-                  </a:txBody>
-                  <a:tcPr/>
-                </a:tc>
-                <a:tc>
-                  <a:txBody>
-                    <a:bodyPr/>
-                    <a:lstStyle/>
-                    <a:p>
-                      <a:r>
-                        <a:rPr lang="en-US" altLang="zh-CN" dirty="0"/>
-                        <a:t>Equal weight</a:t>
-                      </a:r>
-                      <a:endParaRPr lang="zh-CN" altLang="en-US" dirty="0"/>
-                    </a:p>
-                  </a:txBody>
-                  <a:tcPr/>
-                </a:tc>
-                <a:extLst>
-                  <a:ext uri="{0D108BD9-81ED-4DB2-BD59-A6C34878D82A}">
-                    <a16:rowId xmlns:a16="http://schemas.microsoft.com/office/drawing/2014/main" val="1053424"/>
-                  </a:ext>
-                </a:extLst>
-              </a:tr>
-            </a:tbl>
-          </a:graphicData>
-        </a:graphic>
-      </p:graphicFrame>
+        </p:nvPicPr>
+        <p:blipFill>
+          <a:blip r:embed="rId5"/>
+          <a:stretch>
+            <a:fillRect/>
+          </a:stretch>
+        </p:blipFill>
+        <p:spPr>
+          <a:xfrm>
+            <a:off x="1248054" y="2637790"/>
+            <a:ext cx="9695892" cy="2972253"/>
+          </a:xfrm>
+          <a:prstGeom prst="rect">
+            <a:avLst/>
+          </a:prstGeom>
+        </p:spPr>
+      </p:pic>
     </p:spTree>
     <p:extLst>
       <p:ext uri="{BB962C8B-B14F-4D97-AF65-F5344CB8AC3E}">
-        <p14:creationId xmlns:p14="http://schemas.microsoft.com/office/powerpoint/2010/main" val="2004030987"/>
+        <p14:creationId xmlns:p14="http://schemas.microsoft.com/office/powerpoint/2010/main" val="2298284123"/>
       </p:ext>
     </p:extLst>
   </p:cSld>
@@ -8242,7 +8773,7 @@
         <p:cNvPr id="1" name="">
           <a:extLst>
             <a:ext uri="{FF2B5EF4-FFF2-40B4-BE49-F238E27FC236}">
-              <a16:creationId xmlns:a16="http://schemas.microsoft.com/office/drawing/2014/main" id="{0A9DCC1F-156B-E4E3-A126-1FAC4D837FC0}"/>
+              <a16:creationId xmlns:a16="http://schemas.microsoft.com/office/drawing/2014/main" id="{540518A1-EFAC-7C9D-057C-B32B36CBE32D}"/>
             </a:ext>
           </a:extLst>
         </p:cNvPr>
@@ -8262,7 +8793,7 @@
           <p:cNvPr id="3" name="图文框 2">
             <a:extLst>
               <a:ext uri="{FF2B5EF4-FFF2-40B4-BE49-F238E27FC236}">
-                <a16:creationId xmlns:a16="http://schemas.microsoft.com/office/drawing/2014/main" id="{A4C4091E-CCD6-0945-EF50-D3F8BEB8A2C3}"/>
+                <a16:creationId xmlns:a16="http://schemas.microsoft.com/office/drawing/2014/main" id="{A6E32669-E43C-81AA-4A3F-E70AE73DC568}"/>
               </a:ext>
             </a:extLst>
           </p:cNvPr>
@@ -8325,7 +8856,7 @@
           <p:cNvPr id="4" name="文本框 3">
             <a:extLst>
               <a:ext uri="{FF2B5EF4-FFF2-40B4-BE49-F238E27FC236}">
-                <a16:creationId xmlns:a16="http://schemas.microsoft.com/office/drawing/2014/main" id="{CDA23C5F-FF08-A342-D01D-3D00A4C83290}"/>
+                <a16:creationId xmlns:a16="http://schemas.microsoft.com/office/drawing/2014/main" id="{9967CEFC-D833-F21C-C860-5048BCDD3CF2}"/>
               </a:ext>
             </a:extLst>
           </p:cNvPr>
@@ -8357,7 +8888,7 @@
                 <a:ea typeface="等线"/>
                 <a:cs typeface="+mj-lt"/>
               </a:rPr>
-              <a:t>Datasets</a:t>
+              <a:t>Experiments</a:t>
             </a:r>
           </a:p>
         </p:txBody>
@@ -8367,7 +8898,7 @@
           <p:cNvPr id="9" name="半闭框 8">
             <a:extLst>
               <a:ext uri="{FF2B5EF4-FFF2-40B4-BE49-F238E27FC236}">
-                <a16:creationId xmlns:a16="http://schemas.microsoft.com/office/drawing/2014/main" id="{57B828DA-13A2-CAAA-C011-5FA821ED111B}"/>
+                <a16:creationId xmlns:a16="http://schemas.microsoft.com/office/drawing/2014/main" id="{64A9240F-1D1D-6874-7429-2808239D696F}"/>
               </a:ext>
             </a:extLst>
           </p:cNvPr>
@@ -8428,7 +8959,7 @@
           <p:cNvPr id="10" name="半闭框 9">
             <a:extLst>
               <a:ext uri="{FF2B5EF4-FFF2-40B4-BE49-F238E27FC236}">
-                <a16:creationId xmlns:a16="http://schemas.microsoft.com/office/drawing/2014/main" id="{3DCE1F55-A8BD-7933-D3BC-4F4D41E6E5D8}"/>
+                <a16:creationId xmlns:a16="http://schemas.microsoft.com/office/drawing/2014/main" id="{9576FA6A-204D-6985-EC37-276C73AFCDD3}"/>
               </a:ext>
             </a:extLst>
           </p:cNvPr>
@@ -8493,7 +9024,7 @@
           <p:cNvPr id="13" name="直接连接符 12">
             <a:extLst>
               <a:ext uri="{FF2B5EF4-FFF2-40B4-BE49-F238E27FC236}">
-                <a16:creationId xmlns:a16="http://schemas.microsoft.com/office/drawing/2014/main" id="{0A956E9B-3F5A-7063-C090-C8C0EDCEF859}"/>
+                <a16:creationId xmlns:a16="http://schemas.microsoft.com/office/drawing/2014/main" id="{31BD4A4E-80DF-0416-D31D-CC380D09CDD4}"/>
               </a:ext>
             </a:extLst>
           </p:cNvPr>
@@ -8536,7 +9067,7 @@
           <p:cNvPr id="100" name="图片 99">
             <a:extLst>
               <a:ext uri="{FF2B5EF4-FFF2-40B4-BE49-F238E27FC236}">
-                <a16:creationId xmlns:a16="http://schemas.microsoft.com/office/drawing/2014/main" id="{D451128E-751E-504F-140B-D1073940021A}"/>
+                <a16:creationId xmlns:a16="http://schemas.microsoft.com/office/drawing/2014/main" id="{935D7731-4F21-633B-F9F4-4229D89C8FA7}"/>
               </a:ext>
             </a:extLst>
           </p:cNvPr>
@@ -8568,7 +9099,7 @@
           <p:cNvPr id="5" name="文本框 4">
             <a:extLst>
               <a:ext uri="{FF2B5EF4-FFF2-40B4-BE49-F238E27FC236}">
-                <a16:creationId xmlns:a16="http://schemas.microsoft.com/office/drawing/2014/main" id="{886DC045-0072-D48D-0D23-93DAD0056235}"/>
+                <a16:creationId xmlns:a16="http://schemas.microsoft.com/office/drawing/2014/main" id="{5BF4B121-8674-D6D4-D52B-D87EBFAE8564}"/>
               </a:ext>
             </a:extLst>
           </p:cNvPr>
@@ -8578,7 +9109,7 @@
         <p:spPr>
           <a:xfrm>
             <a:off x="613543" y="1741049"/>
-            <a:ext cx="10964912" cy="1154162"/>
+            <a:ext cx="10964912" cy="3462486"/>
           </a:xfrm>
           <a:prstGeom prst="rect">
             <a:avLst/>
@@ -8607,10 +9138,19 @@
                 <a:ea typeface="宋体"/>
                 <a:cs typeface="Calibri"/>
               </a:rPr>
-              <a:t>Customer Support on Twitter dataset (</a:t>
-            </a:r>
-            <a:r>
-              <a:rPr lang="en-US" altLang="zh-CN" sz="3200" dirty="0" err="1">
+              <a:t>Evaluation Metrics:</a:t>
+            </a:r>
+          </a:p>
+          <a:p>
+            <a:pPr marL="914400" lvl="1" indent="-457200">
+              <a:spcAft>
+                <a:spcPts val="600"/>
+              </a:spcAft>
+              <a:buFont typeface="Arial" panose="020B0604020202020204" pitchFamily="34" charset="0"/>
+              <a:buChar char="•"/>
+            </a:pPr>
+            <a:r>
+              <a:rPr lang="en-US" altLang="zh-CN" sz="2000" dirty="0">
                 <a:solidFill>
                   <a:srgbClr val="13294B"/>
                 </a:solidFill>
@@ -8618,18 +9158,7 @@
                 <a:ea typeface="宋体"/>
                 <a:cs typeface="Calibri"/>
               </a:rPr>
-              <a:t>Axelbrooke</a:t>
-            </a:r>
-            <a:r>
-              <a:rPr lang="en-US" altLang="zh-CN" sz="3200" dirty="0">
-                <a:solidFill>
-                  <a:srgbClr val="13294B"/>
-                </a:solidFill>
-                <a:latin typeface="Calibri"/>
-                <a:ea typeface="宋体"/>
-                <a:cs typeface="Calibri"/>
-              </a:rPr>
-              <a:t>, 2017)</a:t>
+              <a:t>The primary outcome is the calibration delta ∆ = ECS(LLM)−ECS(human), computed per instance and aggregated per model and domain. We also report apology density independently as a fully model-agnostic signal.</a:t>
             </a:r>
           </a:p>
           <a:p>
@@ -8640,51 +9169,44 @@
               <a:buFont typeface="Arial" panose="020B0604020202020204" pitchFamily="34" charset="0"/>
               <a:buChar char="•"/>
             </a:pPr>
-            <a:endParaRPr lang="en-US" altLang="zh-CN" sz="3200" dirty="0">
-              <a:solidFill>
-                <a:srgbClr val="13294B"/>
-              </a:solidFill>
-              <a:latin typeface="Calibri"/>
-              <a:ea typeface="宋体"/>
-              <a:cs typeface="Calibri"/>
-            </a:endParaRPr>
-          </a:p>
-        </p:txBody>
-      </p:sp>
-      <p:pic>
-        <p:nvPicPr>
-          <p:cNvPr id="6" name="图片 5">
-            <a:extLst>
-              <a:ext uri="{FF2B5EF4-FFF2-40B4-BE49-F238E27FC236}">
-                <a16:creationId xmlns:a16="http://schemas.microsoft.com/office/drawing/2014/main" id="{21E9EC38-36A8-5BD2-5491-ED2CCE6F82DA}"/>
-              </a:ext>
-            </a:extLst>
-          </p:cNvPr>
-          <p:cNvPicPr>
-            <a:picLocks noChangeAspect="1"/>
-          </p:cNvPicPr>
-          <p:nvPr/>
-        </p:nvPicPr>
-        <p:blipFill>
-          <a:blip r:embed="rId5"/>
-          <a:stretch>
-            <a:fillRect/>
-          </a:stretch>
-        </p:blipFill>
-        <p:spPr>
-          <a:xfrm>
-            <a:off x="1248054" y="2637790"/>
-            <a:ext cx="9695892" cy="2972253"/>
-          </a:xfrm>
-          <a:prstGeom prst="rect">
-            <a:avLst/>
-          </a:prstGeom>
-        </p:spPr>
-      </p:pic>
+            <a:r>
+              <a:rPr lang="en-US" altLang="zh-CN" sz="3200" dirty="0">
+                <a:solidFill>
+                  <a:srgbClr val="13294B"/>
+                </a:solidFill>
+                <a:latin typeface="Calibri"/>
+                <a:ea typeface="宋体"/>
+                <a:cs typeface="Calibri"/>
+              </a:rPr>
+              <a:t>Baselines:</a:t>
+            </a:r>
+          </a:p>
+          <a:p>
+            <a:pPr marL="914400" lvl="1" indent="-457200">
+              <a:spcAft>
+                <a:spcPts val="600"/>
+              </a:spcAft>
+              <a:buFont typeface="Arial" panose="020B0604020202020204" pitchFamily="34" charset="0"/>
+              <a:buChar char="•"/>
+            </a:pPr>
+            <a:r>
+              <a:rPr lang="en-US" altLang="zh-CN" sz="2000" dirty="0">
+                <a:solidFill>
+                  <a:srgbClr val="13294B"/>
+                </a:solidFill>
+                <a:latin typeface="Calibri"/>
+                <a:ea typeface="宋体"/>
+                <a:cs typeface="Calibri"/>
+              </a:rPr>
+              <a:t>We evaluate three frontier models as candidate systems: GPT-4o, Claude 4.6 Sonnet, and Gemini 3 Flash. All three are evaluated under the same minimal neutral prompt with no persona or tone instruction. The human agent responses from the Twitter dataset serve as the behavioral ground truth baseline.</a:t>
+            </a:r>
+          </a:p>
+        </p:txBody>
+      </p:sp>
     </p:spTree>
     <p:extLst>
       <p:ext uri="{BB962C8B-B14F-4D97-AF65-F5344CB8AC3E}">
-        <p14:creationId xmlns:p14="http://schemas.microsoft.com/office/powerpoint/2010/main" val="2298284123"/>
+        <p14:creationId xmlns:p14="http://schemas.microsoft.com/office/powerpoint/2010/main" val="648843724"/>
       </p:ext>
     </p:extLst>
   </p:cSld>
@@ -8702,7 +9224,7 @@
         <p:cNvPr id="1" name="">
           <a:extLst>
             <a:ext uri="{FF2B5EF4-FFF2-40B4-BE49-F238E27FC236}">
-              <a16:creationId xmlns:a16="http://schemas.microsoft.com/office/drawing/2014/main" id="{540518A1-EFAC-7C9D-057C-B32B36CBE32D}"/>
+              <a16:creationId xmlns:a16="http://schemas.microsoft.com/office/drawing/2014/main" id="{C315096F-3A92-E9AB-D4DC-68371996E91E}"/>
             </a:ext>
           </a:extLst>
         </p:cNvPr>
@@ -8722,7 +9244,7 @@
           <p:cNvPr id="3" name="图文框 2">
             <a:extLst>
               <a:ext uri="{FF2B5EF4-FFF2-40B4-BE49-F238E27FC236}">
-                <a16:creationId xmlns:a16="http://schemas.microsoft.com/office/drawing/2014/main" id="{A6E32669-E43C-81AA-4A3F-E70AE73DC568}"/>
+                <a16:creationId xmlns:a16="http://schemas.microsoft.com/office/drawing/2014/main" id="{38E4C8C1-0439-8CF3-1D3C-B869BFA310EB}"/>
               </a:ext>
             </a:extLst>
           </p:cNvPr>
@@ -8785,7 +9307,7 @@
           <p:cNvPr id="4" name="文本框 3">
             <a:extLst>
               <a:ext uri="{FF2B5EF4-FFF2-40B4-BE49-F238E27FC236}">
-                <a16:creationId xmlns:a16="http://schemas.microsoft.com/office/drawing/2014/main" id="{9967CEFC-D833-F21C-C860-5048BCDD3CF2}"/>
+                <a16:creationId xmlns:a16="http://schemas.microsoft.com/office/drawing/2014/main" id="{8321A214-2494-84E4-799C-D08B7F8DC0FB}"/>
               </a:ext>
             </a:extLst>
           </p:cNvPr>
@@ -8817,7 +9339,7 @@
                 <a:ea typeface="等线"/>
                 <a:cs typeface="+mj-lt"/>
               </a:rPr>
-              <a:t>Experiments</a:t>
+              <a:t>Results</a:t>
             </a:r>
           </a:p>
         </p:txBody>
@@ -8827,7 +9349,7 @@
           <p:cNvPr id="9" name="半闭框 8">
             <a:extLst>
               <a:ext uri="{FF2B5EF4-FFF2-40B4-BE49-F238E27FC236}">
-                <a16:creationId xmlns:a16="http://schemas.microsoft.com/office/drawing/2014/main" id="{64A9240F-1D1D-6874-7429-2808239D696F}"/>
+                <a16:creationId xmlns:a16="http://schemas.microsoft.com/office/drawing/2014/main" id="{315BCC47-11C5-9C98-E7ED-6FF7A3083D52}"/>
               </a:ext>
             </a:extLst>
           </p:cNvPr>
@@ -8888,7 +9410,7 @@
           <p:cNvPr id="10" name="半闭框 9">
             <a:extLst>
               <a:ext uri="{FF2B5EF4-FFF2-40B4-BE49-F238E27FC236}">
-                <a16:creationId xmlns:a16="http://schemas.microsoft.com/office/drawing/2014/main" id="{9576FA6A-204D-6985-EC37-276C73AFCDD3}"/>
+                <a16:creationId xmlns:a16="http://schemas.microsoft.com/office/drawing/2014/main" id="{C336E2CE-A10F-E135-D5DE-85CAC09B26BF}"/>
               </a:ext>
             </a:extLst>
           </p:cNvPr>
@@ -8953,7 +9475,7 @@
           <p:cNvPr id="13" name="直接连接符 12">
             <a:extLst>
               <a:ext uri="{FF2B5EF4-FFF2-40B4-BE49-F238E27FC236}">
-                <a16:creationId xmlns:a16="http://schemas.microsoft.com/office/drawing/2014/main" id="{31BD4A4E-80DF-0416-D31D-CC380D09CDD4}"/>
+                <a16:creationId xmlns:a16="http://schemas.microsoft.com/office/drawing/2014/main" id="{D16DD379-F2CD-5040-8929-0BDEFC38FDEE}"/>
               </a:ext>
             </a:extLst>
           </p:cNvPr>
@@ -8996,7 +9518,7 @@
           <p:cNvPr id="100" name="图片 99">
             <a:extLst>
               <a:ext uri="{FF2B5EF4-FFF2-40B4-BE49-F238E27FC236}">
-                <a16:creationId xmlns:a16="http://schemas.microsoft.com/office/drawing/2014/main" id="{935D7731-4F21-633B-F9F4-4229D89C8FA7}"/>
+                <a16:creationId xmlns:a16="http://schemas.microsoft.com/office/drawing/2014/main" id="{0C605A51-1FDC-6F17-F18F-56BE131BF26E}"/>
               </a:ext>
             </a:extLst>
           </p:cNvPr>
@@ -9028,7 +9550,7 @@
           <p:cNvPr id="5" name="文本框 4">
             <a:extLst>
               <a:ext uri="{FF2B5EF4-FFF2-40B4-BE49-F238E27FC236}">
-                <a16:creationId xmlns:a16="http://schemas.microsoft.com/office/drawing/2014/main" id="{5BF4B121-8674-D6D4-D52B-D87EBFAE8564}"/>
+                <a16:creationId xmlns:a16="http://schemas.microsoft.com/office/drawing/2014/main" id="{4A026E4D-2F9F-7E3C-EABE-E1351AA45336}"/>
               </a:ext>
             </a:extLst>
           </p:cNvPr>
@@ -9038,7 +9560,7 @@
         <p:spPr>
           <a:xfrm>
             <a:off x="613543" y="1741049"/>
-            <a:ext cx="10964912" cy="3462486"/>
+            <a:ext cx="10964912" cy="3308598"/>
           </a:xfrm>
           <a:prstGeom prst="rect">
             <a:avLst/>
@@ -9059,7 +9581,7 @@
               <a:buChar char="•"/>
             </a:pPr>
             <a:r>
-              <a:rPr lang="en-US" altLang="zh-CN" sz="3200" dirty="0">
+              <a:rPr lang="en-US" sz="3200" dirty="0">
                 <a:solidFill>
                   <a:srgbClr val="13294B"/>
                 </a:solidFill>
@@ -9067,7 +9589,7 @@
                 <a:ea typeface="宋体"/>
                 <a:cs typeface="Calibri"/>
               </a:rPr>
-              <a:t>Evaluation Metrics:</a:t>
+              <a:t>GPT4o: </a:t>
             </a:r>
           </a:p>
           <a:p>
@@ -9079,7 +9601,7 @@
               <a:buChar char="•"/>
             </a:pPr>
             <a:r>
-              <a:rPr lang="en-US" altLang="zh-CN" sz="2000" dirty="0">
+              <a:rPr lang="en-US" sz="3200" dirty="0">
                 <a:solidFill>
                   <a:srgbClr val="13294B"/>
                 </a:solidFill>
@@ -9087,19 +9609,61 @@
                 <a:ea typeface="宋体"/>
                 <a:cs typeface="Calibri"/>
               </a:rPr>
-              <a:t>The primary outcome is the calibration delta ∆ = ECS(LLM)−ECS(human), computed per instance and aggregated per model and domain. We also report apology density independently as a fully model-agnostic signal.</a:t>
-            </a:r>
-          </a:p>
-          <a:p>
-            <a:pPr marL="457200" indent="-457200">
+              <a:t>Composite </a:t>
+            </a:r>
+            <a:r>
+              <a:rPr lang="el-GR" sz="3200" dirty="0">
+                <a:solidFill>
+                  <a:srgbClr val="13294B"/>
+                </a:solidFill>
+                <a:latin typeface="Calibri"/>
+                <a:ea typeface="宋体"/>
+                <a:cs typeface="Calibri"/>
+              </a:rPr>
+              <a:t>Δ = +0.0973 </a:t>
+            </a:r>
+            <a:r>
+              <a:rPr lang="el-GR" sz="3200" b="1" dirty="0">
+                <a:solidFill>
+                  <a:srgbClr val="13294B"/>
+                </a:solidFill>
+                <a:latin typeface="Calibri"/>
+                <a:ea typeface="宋体"/>
+                <a:cs typeface="Calibri"/>
+              </a:rPr>
+              <a:t>(</a:t>
+            </a:r>
+            <a:r>
+              <a:rPr lang="en-US" sz="3200" b="1" dirty="0">
+                <a:solidFill>
+                  <a:srgbClr val="13294B"/>
+                </a:solidFill>
+                <a:latin typeface="Calibri"/>
+                <a:ea typeface="宋体"/>
+                <a:cs typeface="Calibri"/>
+              </a:rPr>
+              <a:t>over-empathizes) </a:t>
+            </a:r>
+            <a:r>
+              <a:rPr lang="en-US" sz="3200" dirty="0">
+                <a:solidFill>
+                  <a:srgbClr val="13294B"/>
+                </a:solidFill>
+                <a:latin typeface="Calibri"/>
+                <a:ea typeface="宋体"/>
+                <a:cs typeface="Calibri"/>
+              </a:rPr>
+              <a:t>:</a:t>
+            </a:r>
+          </a:p>
+          <a:p>
+            <a:pPr lvl="1">
               <a:spcAft>
                 <a:spcPts val="600"/>
               </a:spcAft>
-              <a:buFont typeface="Arial" panose="020B0604020202020204" pitchFamily="34" charset="0"/>
-              <a:buChar char="•"/>
             </a:pPr>
             <a:r>
-              <a:rPr lang="en-US" altLang="zh-CN" sz="3200" dirty="0">
+              <a:rPr lang="en-US" sz="3200" dirty="0">
                 <a:solidFill>
                   <a:srgbClr val="13294B"/>
                 </a:solidFill>
@@ -9107,7 +9671,18 @@
                 <a:ea typeface="宋体"/>
                 <a:cs typeface="Calibri"/>
               </a:rPr>
-              <a:t>Baselines:</a:t>
+              <a:t>	</a:t>
+            </a:r>
+            <a:r>
+              <a:rPr lang="en-US" sz="2400" dirty="0">
+                <a:solidFill>
+                  <a:srgbClr val="13294B"/>
+                </a:solidFill>
+                <a:latin typeface="Calibri"/>
+                <a:ea typeface="宋体"/>
+                <a:cs typeface="Calibri"/>
+              </a:rPr>
+              <a:t>95% CI = [0.0841, 0.1104] | t = 14.502, p = 0.0000</a:t>
             </a:r>
           </a:p>
           <a:p>
@@ -9119,7 +9694,7 @@
               <a:buChar char="•"/>
             </a:pPr>
             <a:r>
-              <a:rPr lang="en-US" altLang="zh-CN" sz="2000" dirty="0">
+              <a:rPr lang="en-US" sz="3200" dirty="0">
                 <a:solidFill>
                   <a:srgbClr val="13294B"/>
                 </a:solidFill>
@@ -9127,15 +9702,124 @@
                 <a:ea typeface="宋体"/>
                 <a:cs typeface="Calibri"/>
               </a:rPr>
-              <a:t>We evaluate three frontier models as candidate systems: GPT-4o, Claude 3.5 Sonnet, and Gemini 1.5 Flash. All three are evaluated under the same minimal neutral prompt with no persona or tone instruction. The human agent responses from the Twitter dataset serve as the behavioral ground truth baseline.</a:t>
-            </a:r>
+              <a:t>Decomposed: </a:t>
+            </a:r>
+          </a:p>
+          <a:p>
+            <a:pPr lvl="2">
+              <a:spcAft>
+                <a:spcPts val="600"/>
+              </a:spcAft>
+            </a:pPr>
+            <a:r>
+              <a:rPr lang="el-GR" sz="2400" dirty="0">
+                <a:solidFill>
+                  <a:srgbClr val="13294B"/>
+                </a:solidFill>
+                <a:latin typeface="Calibri"/>
+                <a:ea typeface="宋体"/>
+                <a:cs typeface="Calibri"/>
+              </a:rPr>
+              <a:t>Δ_</a:t>
+            </a:r>
+            <a:r>
+              <a:rPr lang="en-US" sz="2400" dirty="0" err="1">
+                <a:solidFill>
+                  <a:srgbClr val="13294B"/>
+                </a:solidFill>
+                <a:latin typeface="Calibri"/>
+                <a:ea typeface="宋体"/>
+                <a:cs typeface="Calibri"/>
+              </a:rPr>
+              <a:t>apology_density</a:t>
+            </a:r>
+            <a:r>
+              <a:rPr lang="en-US" sz="2400" dirty="0">
+                <a:solidFill>
+                  <a:srgbClr val="13294B"/>
+                </a:solidFill>
+                <a:latin typeface="Calibri"/>
+                <a:ea typeface="宋体"/>
+                <a:cs typeface="Calibri"/>
+              </a:rPr>
+              <a:t> = +0.1201 | </a:t>
+            </a:r>
+            <a:r>
+              <a:rPr lang="el-GR" sz="2400" dirty="0">
+                <a:solidFill>
+                  <a:srgbClr val="13294B"/>
+                </a:solidFill>
+                <a:latin typeface="Calibri"/>
+                <a:ea typeface="宋体"/>
+                <a:cs typeface="Calibri"/>
+              </a:rPr>
+              <a:t>Δ_</a:t>
+            </a:r>
+            <a:r>
+              <a:rPr lang="en-US" sz="2400" dirty="0" err="1">
+                <a:solidFill>
+                  <a:srgbClr val="13294B"/>
+                </a:solidFill>
+                <a:latin typeface="Calibri"/>
+                <a:ea typeface="宋体"/>
+                <a:cs typeface="Calibri"/>
+              </a:rPr>
+              <a:t>tone_fit</a:t>
+            </a:r>
+            <a:r>
+              <a:rPr lang="en-US" sz="2400" dirty="0">
+                <a:solidFill>
+                  <a:srgbClr val="13294B"/>
+                </a:solidFill>
+                <a:latin typeface="Calibri"/>
+                <a:ea typeface="宋体"/>
+                <a:cs typeface="Calibri"/>
+              </a:rPr>
+              <a:t> = +0.0694</a:t>
+            </a:r>
+            <a:endParaRPr lang="en-US" sz="3200" dirty="0">
+              <a:solidFill>
+                <a:srgbClr val="13294B"/>
+              </a:solidFill>
+              <a:latin typeface="Calibri"/>
+              <a:ea typeface="宋体"/>
+              <a:cs typeface="Calibri"/>
+            </a:endParaRPr>
+          </a:p>
+          <a:p>
+            <a:pPr marL="914400" lvl="1" indent="-457200">
+              <a:spcAft>
+                <a:spcPts val="600"/>
+              </a:spcAft>
+              <a:buFont typeface="Arial" panose="020B0604020202020204" pitchFamily="34" charset="0"/>
+              <a:buChar char="•"/>
+            </a:pPr>
+            <a:r>
+              <a:rPr lang="en-US" sz="3200" dirty="0">
+                <a:solidFill>
+                  <a:srgbClr val="13294B"/>
+                </a:solidFill>
+                <a:latin typeface="Calibri"/>
+                <a:ea typeface="宋体"/>
+                <a:cs typeface="Calibri"/>
+              </a:rPr>
+              <a:t>Primary driver: apology density</a:t>
+            </a:r>
+            <a:endParaRPr lang="en-US" altLang="zh-CN" sz="3200" dirty="0">
+              <a:solidFill>
+                <a:srgbClr val="13294B"/>
+              </a:solidFill>
+              <a:latin typeface="Calibri"/>
+              <a:ea typeface="宋体"/>
+              <a:cs typeface="Calibri"/>
+            </a:endParaRPr>
           </a:p>
         </p:txBody>
       </p:sp>
     </p:spTree>
     <p:extLst>
       <p:ext uri="{BB962C8B-B14F-4D97-AF65-F5344CB8AC3E}">
-        <p14:creationId xmlns:p14="http://schemas.microsoft.com/office/powerpoint/2010/main" val="648843724"/>
+        <p14:creationId xmlns:p14="http://schemas.microsoft.com/office/powerpoint/2010/main" val="818796419"/>
       </p:ext>
     </p:extLst>
   </p:cSld>
@@ -9268,7 +9952,7 @@
                 <a:ea typeface="等线"/>
                 <a:cs typeface="+mj-lt"/>
               </a:rPr>
-              <a:t>Experiments</a:t>
+              <a:t>Results</a:t>
             </a:r>
           </a:p>
         </p:txBody>
@@ -9489,7 +10173,7 @@
         <p:spPr>
           <a:xfrm>
             <a:off x="613543" y="1741049"/>
-            <a:ext cx="10964912" cy="584775"/>
+            <a:ext cx="10964912" cy="3308598"/>
           </a:xfrm>
           <a:prstGeom prst="rect">
             <a:avLst/>
@@ -9510,7 +10194,7 @@
               <a:buChar char="•"/>
             </a:pPr>
             <a:r>
-              <a:rPr lang="en-US" altLang="zh-CN" sz="3200" dirty="0">
+              <a:rPr lang="en-US" sz="3200" dirty="0">
                 <a:solidFill>
                   <a:srgbClr val="13294B"/>
                 </a:solidFill>
@@ -9518,9 +10202,184 @@
                 <a:ea typeface="宋体"/>
                 <a:cs typeface="Calibri"/>
               </a:rPr>
-              <a:t>Results:</a:t>
-            </a:r>
-            <a:endParaRPr lang="en-US" altLang="zh-CN" sz="2000" dirty="0">
+              <a:t>Gemini : </a:t>
+            </a:r>
+          </a:p>
+          <a:p>
+            <a:pPr marL="914400" lvl="1" indent="-457200">
+              <a:spcAft>
+                <a:spcPts val="600"/>
+              </a:spcAft>
+              <a:buFont typeface="Arial" panose="020B0604020202020204" pitchFamily="34" charset="0"/>
+              <a:buChar char="•"/>
+            </a:pPr>
+            <a:r>
+              <a:rPr lang="en-US" sz="3200" dirty="0">
+                <a:solidFill>
+                  <a:srgbClr val="13294B"/>
+                </a:solidFill>
+                <a:latin typeface="Calibri"/>
+                <a:ea typeface="宋体"/>
+                <a:cs typeface="Calibri"/>
+              </a:rPr>
+              <a:t>Composite </a:t>
+            </a:r>
+            <a:r>
+              <a:rPr lang="el-GR" sz="3200" dirty="0">
+                <a:solidFill>
+                  <a:srgbClr val="13294B"/>
+                </a:solidFill>
+                <a:latin typeface="Calibri"/>
+                <a:ea typeface="宋体"/>
+                <a:cs typeface="Calibri"/>
+              </a:rPr>
+              <a:t>Δ = +0.1736 </a:t>
+            </a:r>
+            <a:r>
+              <a:rPr lang="el-GR" sz="3200" b="1" dirty="0">
+                <a:solidFill>
+                  <a:srgbClr val="13294B"/>
+                </a:solidFill>
+                <a:latin typeface="Calibri"/>
+                <a:ea typeface="宋体"/>
+                <a:cs typeface="Calibri"/>
+              </a:rPr>
+              <a:t>(</a:t>
+            </a:r>
+            <a:r>
+              <a:rPr lang="en-US" sz="3200" b="1" dirty="0">
+                <a:solidFill>
+                  <a:srgbClr val="13294B"/>
+                </a:solidFill>
+                <a:latin typeface="Calibri"/>
+                <a:ea typeface="宋体"/>
+                <a:cs typeface="Calibri"/>
+              </a:rPr>
+              <a:t>over-empathizes) </a:t>
+            </a:r>
+          </a:p>
+          <a:p>
+            <a:pPr lvl="1">
+              <a:spcAft>
+                <a:spcPts val="600"/>
+              </a:spcAft>
+            </a:pPr>
+            <a:r>
+              <a:rPr lang="en-US" sz="3200" b="1" dirty="0">
+                <a:solidFill>
+                  <a:srgbClr val="13294B"/>
+                </a:solidFill>
+                <a:latin typeface="Calibri"/>
+                <a:ea typeface="宋体"/>
+                <a:cs typeface="Calibri"/>
+              </a:rPr>
+              <a:t>	</a:t>
+            </a:r>
+            <a:r>
+              <a:rPr lang="en-US" sz="2400" dirty="0">
+                <a:solidFill>
+                  <a:srgbClr val="13294B"/>
+                </a:solidFill>
+                <a:latin typeface="Calibri"/>
+                <a:ea typeface="宋体"/>
+                <a:cs typeface="Calibri"/>
+              </a:rPr>
+              <a:t>95% CI = [0.1596, 0.1876] | t = 24.354, p = 0.0000</a:t>
+            </a:r>
+          </a:p>
+          <a:p>
+            <a:pPr marL="914400" lvl="1" indent="-457200">
+              <a:spcAft>
+                <a:spcPts val="600"/>
+              </a:spcAft>
+              <a:buFont typeface="Arial" panose="020B0604020202020204" pitchFamily="34" charset="0"/>
+              <a:buChar char="•"/>
+            </a:pPr>
+            <a:r>
+              <a:rPr lang="en-US" sz="3200" dirty="0">
+                <a:solidFill>
+                  <a:srgbClr val="13294B"/>
+                </a:solidFill>
+                <a:latin typeface="Calibri"/>
+                <a:ea typeface="宋体"/>
+                <a:cs typeface="Calibri"/>
+              </a:rPr>
+              <a:t>Decomposed: </a:t>
+            </a:r>
+          </a:p>
+          <a:p>
+            <a:pPr lvl="2">
+              <a:spcAft>
+                <a:spcPts val="600"/>
+              </a:spcAft>
+            </a:pPr>
+            <a:r>
+              <a:rPr lang="el-GR" sz="2400" dirty="0">
+                <a:solidFill>
+                  <a:srgbClr val="13294B"/>
+                </a:solidFill>
+                <a:latin typeface="Calibri"/>
+                <a:ea typeface="宋体"/>
+                <a:cs typeface="Calibri"/>
+              </a:rPr>
+              <a:t>Δ_</a:t>
+            </a:r>
+            <a:r>
+              <a:rPr lang="en-US" sz="2400" dirty="0" err="1">
+                <a:solidFill>
+                  <a:srgbClr val="13294B"/>
+                </a:solidFill>
+                <a:latin typeface="Calibri"/>
+                <a:ea typeface="宋体"/>
+                <a:cs typeface="Calibri"/>
+              </a:rPr>
+              <a:t>apology_density</a:t>
+            </a:r>
+            <a:r>
+              <a:rPr lang="en-US" sz="2400" dirty="0">
+                <a:solidFill>
+                  <a:srgbClr val="13294B"/>
+                </a:solidFill>
+                <a:latin typeface="Calibri"/>
+                <a:ea typeface="宋体"/>
+                <a:cs typeface="Calibri"/>
+              </a:rPr>
+              <a:t> = +0.1072 | </a:t>
+            </a:r>
+            <a:r>
+              <a:rPr lang="el-GR" sz="2400" dirty="0">
+                <a:solidFill>
+                  <a:srgbClr val="13294B"/>
+                </a:solidFill>
+                <a:latin typeface="Calibri"/>
+                <a:ea typeface="宋体"/>
+                <a:cs typeface="Calibri"/>
+              </a:rPr>
+              <a:t>Δ_</a:t>
+            </a:r>
+            <a:r>
+              <a:rPr lang="en-US" sz="2400" dirty="0" err="1">
+                <a:solidFill>
+                  <a:srgbClr val="13294B"/>
+                </a:solidFill>
+                <a:latin typeface="Calibri"/>
+                <a:ea typeface="宋体"/>
+                <a:cs typeface="Calibri"/>
+              </a:rPr>
+              <a:t>tone_fit</a:t>
+            </a:r>
+            <a:r>
+              <a:rPr lang="en-US" sz="2400" dirty="0">
+                <a:solidFill>
+                  <a:srgbClr val="13294B"/>
+                </a:solidFill>
+                <a:latin typeface="Calibri"/>
+                <a:ea typeface="宋体"/>
+                <a:cs typeface="Calibri"/>
+              </a:rPr>
+              <a:t> = +0.2494</a:t>
+            </a:r>
+            <a:endParaRPr lang="en-US" sz="3200" dirty="0">
               <a:solidFill>
                 <a:srgbClr val="13294B"/>
               </a:solidFill>
@@ -9529,12 +10388,65 @@
               <a:cs typeface="Calibri"/>
             </a:endParaRPr>
           </a:p>
+          <a:p>
+            <a:pPr marL="914400" lvl="1" indent="-457200">
+              <a:spcAft>
+                <a:spcPts val="600"/>
+              </a:spcAft>
+              <a:buFont typeface="Arial" panose="020B0604020202020204" pitchFamily="34" charset="0"/>
+              <a:buChar char="•"/>
+            </a:pPr>
+            <a:r>
+              <a:rPr lang="en-US" sz="3200" dirty="0">
+                <a:solidFill>
+                  <a:srgbClr val="13294B"/>
+                </a:solidFill>
+                <a:latin typeface="Calibri"/>
+                <a:ea typeface="宋体"/>
+                <a:cs typeface="Calibri"/>
+              </a:rPr>
+              <a:t>Primary driver: tone-fit (</a:t>
+            </a:r>
+            <a:r>
+              <a:rPr lang="el-GR" sz="3200" dirty="0">
+                <a:solidFill>
+                  <a:srgbClr val="13294B"/>
+                </a:solidFill>
+                <a:latin typeface="Calibri"/>
+                <a:ea typeface="宋体"/>
+                <a:cs typeface="Calibri"/>
+              </a:rPr>
+              <a:t>Δ_</a:t>
+            </a:r>
+            <a:r>
+              <a:rPr lang="en-US" sz="3200" dirty="0" err="1">
+                <a:solidFill>
+                  <a:srgbClr val="13294B"/>
+                </a:solidFill>
+                <a:latin typeface="Calibri"/>
+                <a:ea typeface="宋体"/>
+                <a:cs typeface="Calibri"/>
+              </a:rPr>
+              <a:t>tf</a:t>
+            </a:r>
+            <a:r>
+              <a:rPr lang="en-US" sz="3200" dirty="0">
+                <a:solidFill>
+                  <a:srgbClr val="13294B"/>
+                </a:solidFill>
+                <a:latin typeface="Calibri"/>
+                <a:ea typeface="宋体"/>
+                <a:cs typeface="Calibri"/>
+              </a:rPr>
+              <a:t>=+0.2494)</a:t>
+            </a:r>
+          </a:p>
         </p:txBody>
       </p:sp>
     </p:spTree>
     <p:extLst>
       <p:ext uri="{BB962C8B-B14F-4D97-AF65-F5344CB8AC3E}">
-        <p14:creationId xmlns:p14="http://schemas.microsoft.com/office/powerpoint/2010/main" val="818796419"/>
+        <p14:creationId xmlns:p14="http://schemas.microsoft.com/office/powerpoint/2010/main" val="1440188543"/>
       </p:ext>
     </p:extLst>
   </p:cSld>
@@ -9552,7 +10464,7 @@
         <p:cNvPr id="1" name="">
           <a:extLst>
             <a:ext uri="{FF2B5EF4-FFF2-40B4-BE49-F238E27FC236}">
-              <a16:creationId xmlns:a16="http://schemas.microsoft.com/office/drawing/2014/main" id="{E7A27B3F-C0CE-A9E4-1359-4A4A0BE2AFC3}"/>
+              <a16:creationId xmlns:a16="http://schemas.microsoft.com/office/drawing/2014/main" id="{C315096F-3A92-E9AB-D4DC-68371996E91E}"/>
             </a:ext>
           </a:extLst>
         </p:cNvPr>
@@ -9572,7 +10484,7 @@
           <p:cNvPr id="3" name="图文框 2">
             <a:extLst>
               <a:ext uri="{FF2B5EF4-FFF2-40B4-BE49-F238E27FC236}">
-                <a16:creationId xmlns:a16="http://schemas.microsoft.com/office/drawing/2014/main" id="{8131D144-1C33-0B46-47AE-EF50F1FFB937}"/>
+                <a16:creationId xmlns:a16="http://schemas.microsoft.com/office/drawing/2014/main" id="{38E4C8C1-0439-8CF3-1D3C-B869BFA310EB}"/>
               </a:ext>
             </a:extLst>
           </p:cNvPr>
@@ -9635,7 +10547,7 @@
           <p:cNvPr id="4" name="文本框 3">
             <a:extLst>
               <a:ext uri="{FF2B5EF4-FFF2-40B4-BE49-F238E27FC236}">
-                <a16:creationId xmlns:a16="http://schemas.microsoft.com/office/drawing/2014/main" id="{ADE65386-35E8-BF11-F93A-219CCB3C9886}"/>
+                <a16:creationId xmlns:a16="http://schemas.microsoft.com/office/drawing/2014/main" id="{8321A214-2494-84E4-799C-D08B7F8DC0FB}"/>
               </a:ext>
             </a:extLst>
           </p:cNvPr>
@@ -9667,7 +10579,7 @@
                 <a:ea typeface="等线"/>
                 <a:cs typeface="+mj-lt"/>
               </a:rPr>
-              <a:t>Conclusion &amp; Limitation</a:t>
+              <a:t>Results</a:t>
             </a:r>
           </a:p>
         </p:txBody>
@@ -9677,7 +10589,7 @@
           <p:cNvPr id="9" name="半闭框 8">
             <a:extLst>
               <a:ext uri="{FF2B5EF4-FFF2-40B4-BE49-F238E27FC236}">
-                <a16:creationId xmlns:a16="http://schemas.microsoft.com/office/drawing/2014/main" id="{FDD4F1B0-E911-555A-86C0-A48E753525CD}"/>
+                <a16:creationId xmlns:a16="http://schemas.microsoft.com/office/drawing/2014/main" id="{315BCC47-11C5-9C98-E7ED-6FF7A3083D52}"/>
               </a:ext>
             </a:extLst>
           </p:cNvPr>
@@ -9738,7 +10650,7 @@
           <p:cNvPr id="10" name="半闭框 9">
             <a:extLst>
               <a:ext uri="{FF2B5EF4-FFF2-40B4-BE49-F238E27FC236}">
-                <a16:creationId xmlns:a16="http://schemas.microsoft.com/office/drawing/2014/main" id="{C169AE3C-9591-D19E-1694-127228FA4A4A}"/>
+                <a16:creationId xmlns:a16="http://schemas.microsoft.com/office/drawing/2014/main" id="{C336E2CE-A10F-E135-D5DE-85CAC09B26BF}"/>
               </a:ext>
             </a:extLst>
           </p:cNvPr>
@@ -9803,7 +10715,7 @@
           <p:cNvPr id="13" name="直接连接符 12">
             <a:extLst>
               <a:ext uri="{FF2B5EF4-FFF2-40B4-BE49-F238E27FC236}">
-                <a16:creationId xmlns:a16="http://schemas.microsoft.com/office/drawing/2014/main" id="{C43D726A-5493-F579-0CA0-10B9C9CA6E98}"/>
+                <a16:creationId xmlns:a16="http://schemas.microsoft.com/office/drawing/2014/main" id="{D16DD379-F2CD-5040-8929-0BDEFC38FDEE}"/>
               </a:ext>
             </a:extLst>
           </p:cNvPr>
@@ -9846,7 +10758,7 @@
           <p:cNvPr id="100" name="图片 99">
             <a:extLst>
               <a:ext uri="{FF2B5EF4-FFF2-40B4-BE49-F238E27FC236}">
-                <a16:creationId xmlns:a16="http://schemas.microsoft.com/office/drawing/2014/main" id="{F73F639D-26B1-9CD6-7383-43CB03DB13CF}"/>
+                <a16:creationId xmlns:a16="http://schemas.microsoft.com/office/drawing/2014/main" id="{0C605A51-1FDC-6F17-F18F-56BE131BF26E}"/>
               </a:ext>
             </a:extLst>
           </p:cNvPr>
@@ -9873,171 +10785,584 @@
           </a:ln>
         </p:spPr>
       </p:pic>
-      <p:sp>
-        <p:nvSpPr>
-          <p:cNvPr id="5" name="文本框 4">
-            <a:extLst>
-              <a:ext uri="{FF2B5EF4-FFF2-40B4-BE49-F238E27FC236}">
-                <a16:creationId xmlns:a16="http://schemas.microsoft.com/office/drawing/2014/main" id="{25D8EBBB-7D89-A5FE-3A8C-9E9CFB312697}"/>
-              </a:ext>
-            </a:extLst>
-          </p:cNvPr>
-          <p:cNvSpPr txBox="1"/>
-          <p:nvPr/>
-        </p:nvSpPr>
-        <p:spPr>
-          <a:xfrm>
-            <a:off x="613543" y="1741049"/>
-            <a:ext cx="10964912" cy="4001095"/>
-          </a:xfrm>
-          <a:prstGeom prst="rect">
-            <a:avLst/>
-          </a:prstGeom>
-          <a:noFill/>
-        </p:spPr>
-        <p:txBody>
-          <a:bodyPr wrap="square" lIns="91440" tIns="45720" rIns="91440" bIns="45720" rtlCol="0" anchor="t">
-            <a:spAutoFit/>
-          </a:bodyPr>
-          <a:lstStyle/>
-          <a:p>
-            <a:pPr marL="457200" indent="-457200">
-              <a:spcAft>
-                <a:spcPts val="600"/>
-              </a:spcAft>
-              <a:buFont typeface="Arial" panose="020B0604020202020204" pitchFamily="34" charset="0"/>
-              <a:buChar char="•"/>
-            </a:pPr>
-            <a:r>
-              <a:rPr lang="en-US" altLang="zh-CN" sz="3200" b="1" dirty="0">
-                <a:solidFill>
-                  <a:srgbClr val="13294B"/>
-                </a:solidFill>
-                <a:latin typeface="Calibri"/>
-                <a:ea typeface="宋体"/>
-                <a:cs typeface="Calibri"/>
-              </a:rPr>
-              <a:t>Conclusion 1:</a:t>
-            </a:r>
-          </a:p>
-          <a:p>
-            <a:pPr marL="914400" lvl="1" indent="-457200">
-              <a:spcAft>
-                <a:spcPts val="600"/>
-              </a:spcAft>
-              <a:buFont typeface="Arial" panose="020B0604020202020204" pitchFamily="34" charset="0"/>
-              <a:buChar char="•"/>
-            </a:pPr>
-            <a:r>
-              <a:rPr lang="en-US" altLang="zh-CN" sz="3200" dirty="0">
-                <a:solidFill>
-                  <a:srgbClr val="13294B"/>
-                </a:solidFill>
-                <a:latin typeface="Calibri"/>
-                <a:ea typeface="宋体"/>
-                <a:cs typeface="Calibri"/>
-              </a:rPr>
-              <a:t>11112222</a:t>
-            </a:r>
-          </a:p>
-          <a:p>
-            <a:pPr marL="457200" indent="-457200">
-              <a:spcAft>
-                <a:spcPts val="600"/>
-              </a:spcAft>
-              <a:buFont typeface="Arial" panose="020B0604020202020204" pitchFamily="34" charset="0"/>
-              <a:buChar char="•"/>
-            </a:pPr>
-            <a:r>
-              <a:rPr lang="en-US" altLang="zh-CN" sz="3200" b="1" dirty="0">
-                <a:solidFill>
-                  <a:srgbClr val="13294B"/>
-                </a:solidFill>
-                <a:latin typeface="Calibri"/>
-                <a:ea typeface="宋体"/>
-                <a:cs typeface="Calibri"/>
-              </a:rPr>
-              <a:t>Conclusion 2:</a:t>
-            </a:r>
-          </a:p>
-          <a:p>
-            <a:pPr marL="914400" lvl="1" indent="-457200">
-              <a:spcAft>
-                <a:spcPts val="600"/>
-              </a:spcAft>
-              <a:buFont typeface="Arial" panose="020B0604020202020204" pitchFamily="34" charset="0"/>
-              <a:buChar char="•"/>
-            </a:pPr>
-            <a:r>
-              <a:rPr lang="en-US" altLang="zh-CN" sz="3200" dirty="0">
-                <a:solidFill>
-                  <a:srgbClr val="13294B"/>
-                </a:solidFill>
-                <a:latin typeface="Calibri"/>
-                <a:ea typeface="宋体"/>
-                <a:cs typeface="Calibri"/>
-              </a:rPr>
-              <a:t>22223333</a:t>
-            </a:r>
-          </a:p>
-          <a:p>
-            <a:pPr marL="457200" indent="-457200">
-              <a:spcAft>
-                <a:spcPts val="600"/>
-              </a:spcAft>
-              <a:buFont typeface="Arial" panose="020B0604020202020204" pitchFamily="34" charset="0"/>
-              <a:buChar char="•"/>
-            </a:pPr>
-            <a:endParaRPr lang="en-US" altLang="zh-CN" sz="3200" b="1" dirty="0">
-              <a:solidFill>
-                <a:srgbClr val="13294B"/>
-              </a:solidFill>
-              <a:latin typeface="Calibri"/>
-              <a:ea typeface="宋体"/>
-              <a:cs typeface="Calibri"/>
-            </a:endParaRPr>
-          </a:p>
-          <a:p>
-            <a:pPr marL="457200" indent="-457200">
-              <a:spcAft>
-                <a:spcPts val="600"/>
-              </a:spcAft>
-              <a:buFont typeface="Arial" panose="020B0604020202020204" pitchFamily="34" charset="0"/>
-              <a:buChar char="•"/>
-            </a:pPr>
-            <a:endParaRPr lang="en-US" altLang="zh-CN" sz="3200" b="1" dirty="0">
-              <a:solidFill>
-                <a:srgbClr val="13294B"/>
-              </a:solidFill>
-              <a:latin typeface="Calibri"/>
-              <a:ea typeface="宋体"/>
-              <a:cs typeface="Calibri"/>
-            </a:endParaRPr>
-          </a:p>
-          <a:p>
-            <a:pPr>
-              <a:spcAft>
-                <a:spcPts val="600"/>
-              </a:spcAft>
-            </a:pPr>
-            <a:r>
-              <a:rPr lang="en-US" altLang="zh-CN" sz="3200" b="1" dirty="0">
-                <a:solidFill>
-                  <a:srgbClr val="13294B"/>
-                </a:solidFill>
-                <a:latin typeface="Calibri"/>
-                <a:ea typeface="宋体"/>
-                <a:cs typeface="Calibri"/>
-              </a:rPr>
-              <a:t> </a:t>
-            </a:r>
-          </a:p>
-        </p:txBody>
-      </p:sp>
+      <p:graphicFrame>
+        <p:nvGraphicFramePr>
+          <p:cNvPr id="2" name="Table 1">
+            <a:extLst>
+              <a:ext uri="{FF2B5EF4-FFF2-40B4-BE49-F238E27FC236}">
+                <a16:creationId xmlns:a16="http://schemas.microsoft.com/office/drawing/2014/main" id="{F723DECA-9E70-4AAC-8A26-3E32AA1C6700}"/>
+              </a:ext>
+            </a:extLst>
+          </p:cNvPr>
+          <p:cNvGraphicFramePr>
+            <a:graphicFrameLocks noGrp="1"/>
+          </p:cNvGraphicFramePr>
+          <p:nvPr>
+            <p:extLst>
+              <p:ext uri="{D42A27DB-BD31-4B8C-83A1-F6EECF244321}">
+                <p14:modId xmlns:p14="http://schemas.microsoft.com/office/powerpoint/2010/main" val="3572681025"/>
+              </p:ext>
+            </p:extLst>
+          </p:nvPr>
+        </p:nvGraphicFramePr>
+        <p:xfrm>
+          <a:off x="1785365" y="2838451"/>
+          <a:ext cx="8563804" cy="1381760"/>
+        </p:xfrm>
+        <a:graphic>
+          <a:graphicData uri="http://schemas.openxmlformats.org/drawingml/2006/table">
+            <a:tbl>
+              <a:tblPr firstRow="1" bandRow="1">
+                <a:tableStyleId>{21E4AEA4-8DFA-4A89-87EB-49C32662AFE0}</a:tableStyleId>
+              </a:tblPr>
+              <a:tblGrid>
+                <a:gridCol w="873125">
+                  <a:extLst>
+                    <a:ext uri="{9D8B030D-6E8A-4147-A177-3AD203B41FA5}">
+                      <a16:colId xmlns:a16="http://schemas.microsoft.com/office/drawing/2014/main" val="3195204535"/>
+                    </a:ext>
+                  </a:extLst>
+                </a:gridCol>
+                <a:gridCol w="1492469">
+                  <a:extLst>
+                    <a:ext uri="{9D8B030D-6E8A-4147-A177-3AD203B41FA5}">
+                      <a16:colId xmlns:a16="http://schemas.microsoft.com/office/drawing/2014/main" val="3166186206"/>
+                    </a:ext>
+                  </a:extLst>
+                </a:gridCol>
+                <a:gridCol w="2133600">
+                  <a:extLst>
+                    <a:ext uri="{9D8B030D-6E8A-4147-A177-3AD203B41FA5}">
+                      <a16:colId xmlns:a16="http://schemas.microsoft.com/office/drawing/2014/main" val="3630876195"/>
+                    </a:ext>
+                  </a:extLst>
+                </a:gridCol>
+                <a:gridCol w="1471449">
+                  <a:extLst>
+                    <a:ext uri="{9D8B030D-6E8A-4147-A177-3AD203B41FA5}">
+                      <a16:colId xmlns:a16="http://schemas.microsoft.com/office/drawing/2014/main" val="368232680"/>
+                    </a:ext>
+                  </a:extLst>
+                </a:gridCol>
+                <a:gridCol w="2593161">
+                  <a:extLst>
+                    <a:ext uri="{9D8B030D-6E8A-4147-A177-3AD203B41FA5}">
+                      <a16:colId xmlns:a16="http://schemas.microsoft.com/office/drawing/2014/main" val="148440585"/>
+                    </a:ext>
+                  </a:extLst>
+                </a:gridCol>
+              </a:tblGrid>
+              <a:tr h="370840">
+                <a:tc>
+                  <a:txBody>
+                    <a:bodyPr/>
+                    <a:lstStyle/>
+                    <a:p>
+                      <a:r>
+                        <a:rPr lang="en-US" sz="1800" dirty="0">
+                          <a:solidFill>
+                            <a:srgbClr val="13294B"/>
+                          </a:solidFill>
+                          <a:latin typeface="Calibri"/>
+                          <a:ea typeface="宋体"/>
+                          <a:cs typeface="Calibri"/>
+                        </a:rPr>
+                        <a:t>model</a:t>
+                      </a:r>
+                      <a:endParaRPr lang="en-TW" dirty="0"/>
+                    </a:p>
+                  </a:txBody>
+                  <a:tcPr/>
+                </a:tc>
+                <a:tc>
+                  <a:txBody>
+                    <a:bodyPr/>
+                    <a:lstStyle/>
+                    <a:p>
+                      <a:pPr marL="0" marR="0" lvl="0" indent="0" algn="l" defTabSz="914400" rtl="0" eaLnBrk="1" fontAlgn="auto" latinLnBrk="0" hangingPunct="1">
+                        <a:lnSpc>
+                          <a:spcPct val="100000"/>
+                        </a:lnSpc>
+                        <a:spcBef>
+                          <a:spcPts val="0"/>
+                        </a:spcBef>
+                        <a:spcAft>
+                          <a:spcPts val="0"/>
+                        </a:spcAft>
+                        <a:buClrTx/>
+                        <a:buSzTx/>
+                        <a:buFontTx/>
+                        <a:buNone/>
+                        <a:tabLst/>
+                        <a:defRPr/>
+                      </a:pPr>
+                      <a:r>
+                        <a:rPr lang="en-US" sz="1800" dirty="0">
+                          <a:solidFill>
+                            <a:srgbClr val="13294B"/>
+                          </a:solidFill>
+                          <a:latin typeface="Calibri"/>
+                          <a:ea typeface="宋体"/>
+                          <a:cs typeface="Calibri"/>
+                        </a:rPr>
+                        <a:t>composite </a:t>
+                      </a:r>
+                      <a:r>
+                        <a:rPr lang="el-GR" sz="1800" dirty="0">
+                          <a:solidFill>
+                            <a:srgbClr val="13294B"/>
+                          </a:solidFill>
+                          <a:latin typeface="Calibri"/>
+                          <a:ea typeface="宋体"/>
+                          <a:cs typeface="Calibri"/>
+                        </a:rPr>
+                        <a:t>Δ</a:t>
+                      </a:r>
+                      <a:endParaRPr lang="en-TW" dirty="0"/>
+                    </a:p>
+                  </a:txBody>
+                  <a:tcPr/>
+                </a:tc>
+                <a:tc>
+                  <a:txBody>
+                    <a:bodyPr/>
+                    <a:lstStyle/>
+                    <a:p>
+                      <a:pPr marL="0" marR="0" lvl="0" indent="0" algn="l" defTabSz="914400" rtl="0" eaLnBrk="1" fontAlgn="auto" latinLnBrk="0" hangingPunct="1">
+                        <a:lnSpc>
+                          <a:spcPct val="100000"/>
+                        </a:lnSpc>
+                        <a:spcBef>
+                          <a:spcPts val="0"/>
+                        </a:spcBef>
+                        <a:spcAft>
+                          <a:spcPts val="0"/>
+                        </a:spcAft>
+                        <a:buClrTx/>
+                        <a:buSzTx/>
+                        <a:buFontTx/>
+                        <a:buNone/>
+                        <a:tabLst/>
+                        <a:defRPr/>
+                      </a:pPr>
+                      <a:r>
+                        <a:rPr lang="el-GR" sz="1800" dirty="0">
+                          <a:solidFill>
+                            <a:srgbClr val="13294B"/>
+                          </a:solidFill>
+                          <a:latin typeface="Calibri"/>
+                          <a:ea typeface="宋体"/>
+                          <a:cs typeface="Calibri"/>
+                        </a:rPr>
+                        <a:t>Δ</a:t>
+                      </a:r>
+                      <a:r>
+                        <a:rPr lang="en-US" sz="1800" dirty="0">
+                          <a:solidFill>
+                            <a:srgbClr val="13294B"/>
+                          </a:solidFill>
+                          <a:latin typeface="Calibri"/>
+                          <a:ea typeface="宋体"/>
+                          <a:cs typeface="Calibri"/>
+                        </a:rPr>
+                        <a:t> </a:t>
+                      </a:r>
+                      <a:r>
+                        <a:rPr lang="en-US" sz="1800" dirty="0" err="1">
+                          <a:solidFill>
+                            <a:srgbClr val="13294B"/>
+                          </a:solidFill>
+                          <a:latin typeface="Calibri"/>
+                          <a:ea typeface="宋体"/>
+                          <a:cs typeface="Calibri"/>
+                        </a:rPr>
+                        <a:t>apology_density</a:t>
+                      </a:r>
+                      <a:endParaRPr lang="en-TW" dirty="0"/>
+                    </a:p>
+                    <a:p>
+                      <a:endParaRPr lang="en-TW" dirty="0"/>
+                    </a:p>
+                  </a:txBody>
+                  <a:tcPr/>
+                </a:tc>
+                <a:tc>
+                  <a:txBody>
+                    <a:bodyPr/>
+                    <a:lstStyle/>
+                    <a:p>
+                      <a:pPr marL="0" marR="0" lvl="0" indent="0" algn="l" defTabSz="914400" rtl="0" eaLnBrk="1" fontAlgn="auto" latinLnBrk="0" hangingPunct="1">
+                        <a:lnSpc>
+                          <a:spcPct val="100000"/>
+                        </a:lnSpc>
+                        <a:spcBef>
+                          <a:spcPts val="0"/>
+                        </a:spcBef>
+                        <a:spcAft>
+                          <a:spcPts val="0"/>
+                        </a:spcAft>
+                        <a:buClrTx/>
+                        <a:buSzTx/>
+                        <a:buFontTx/>
+                        <a:buNone/>
+                        <a:tabLst/>
+                        <a:defRPr/>
+                      </a:pPr>
+                      <a:r>
+                        <a:rPr lang="el-GR" sz="1800" dirty="0">
+                          <a:solidFill>
+                            <a:srgbClr val="13294B"/>
+                          </a:solidFill>
+                          <a:latin typeface="Calibri"/>
+                          <a:ea typeface="宋体"/>
+                          <a:cs typeface="Calibri"/>
+                        </a:rPr>
+                        <a:t>Δ </a:t>
+                      </a:r>
+                      <a:r>
+                        <a:rPr lang="en-US" sz="1800" dirty="0" err="1">
+                          <a:solidFill>
+                            <a:srgbClr val="13294B"/>
+                          </a:solidFill>
+                          <a:latin typeface="Calibri"/>
+                          <a:ea typeface="宋体"/>
+                          <a:cs typeface="Calibri"/>
+                        </a:rPr>
+                        <a:t>tone_fit</a:t>
+                      </a:r>
+                      <a:r>
+                        <a:rPr lang="en-US" sz="1800" dirty="0">
+                          <a:solidFill>
+                            <a:srgbClr val="13294B"/>
+                          </a:solidFill>
+                          <a:latin typeface="Calibri"/>
+                          <a:ea typeface="宋体"/>
+                          <a:cs typeface="Calibri"/>
+                        </a:rPr>
+                        <a:t> </a:t>
+                      </a:r>
+                      <a:endParaRPr lang="en-TW" dirty="0"/>
+                    </a:p>
+                    <a:p>
+                      <a:endParaRPr lang="en-TW" dirty="0"/>
+                    </a:p>
+                  </a:txBody>
+                  <a:tcPr/>
+                </a:tc>
+                <a:tc>
+                  <a:txBody>
+                    <a:bodyPr/>
+                    <a:lstStyle/>
+                    <a:p>
+                      <a:pPr marL="0" marR="0" lvl="0" indent="0" algn="l" defTabSz="914400" rtl="0" eaLnBrk="1" fontAlgn="auto" latinLnBrk="0" hangingPunct="1">
+                        <a:lnSpc>
+                          <a:spcPct val="100000"/>
+                        </a:lnSpc>
+                        <a:spcBef>
+                          <a:spcPts val="0"/>
+                        </a:spcBef>
+                        <a:spcAft>
+                          <a:spcPts val="0"/>
+                        </a:spcAft>
+                        <a:buClrTx/>
+                        <a:buSzTx/>
+                        <a:buFontTx/>
+                        <a:buNone/>
+                        <a:tabLst/>
+                        <a:defRPr/>
+                      </a:pPr>
+                      <a:r>
+                        <a:rPr lang="en-US" sz="1800" dirty="0">
+                          <a:solidFill>
+                            <a:srgbClr val="13294B"/>
+                          </a:solidFill>
+                          <a:latin typeface="Calibri"/>
+                          <a:ea typeface="宋体"/>
+                          <a:cs typeface="Calibri"/>
+                        </a:rPr>
+                        <a:t>driver</a:t>
+                      </a:r>
+                      <a:endParaRPr lang="en-TW" dirty="0"/>
+                    </a:p>
+                    <a:p>
+                      <a:endParaRPr lang="en-TW" dirty="0"/>
+                    </a:p>
+                  </a:txBody>
+                  <a:tcPr/>
+                </a:tc>
+                <a:extLst>
+                  <a:ext uri="{0D108BD9-81ED-4DB2-BD59-A6C34878D82A}">
+                    <a16:rowId xmlns:a16="http://schemas.microsoft.com/office/drawing/2014/main" val="4293091644"/>
+                  </a:ext>
+                </a:extLst>
+              </a:tr>
+              <a:tr h="370840">
+                <a:tc>
+                  <a:txBody>
+                    <a:bodyPr/>
+                    <a:lstStyle/>
+                    <a:p>
+                      <a:r>
+                        <a:rPr lang="en-US" sz="1800" dirty="0">
+                          <a:solidFill>
+                            <a:srgbClr val="13294B"/>
+                          </a:solidFill>
+                          <a:latin typeface="Calibri"/>
+                          <a:ea typeface="宋体"/>
+                          <a:cs typeface="Calibri"/>
+                        </a:rPr>
+                        <a:t>GPT4o</a:t>
+                      </a:r>
+                      <a:endParaRPr lang="en-TW" dirty="0"/>
+                    </a:p>
+                  </a:txBody>
+                  <a:tcPr/>
+                </a:tc>
+                <a:tc>
+                  <a:txBody>
+                    <a:bodyPr/>
+                    <a:lstStyle/>
+                    <a:p>
+                      <a:r>
+                        <a:rPr lang="en-US" sz="1800" dirty="0">
+                          <a:solidFill>
+                            <a:srgbClr val="13294B"/>
+                          </a:solidFill>
+                          <a:latin typeface="Calibri"/>
+                          <a:ea typeface="宋体"/>
+                          <a:cs typeface="Calibri"/>
+                        </a:rPr>
+                        <a:t>0.0973</a:t>
+                      </a:r>
+                      <a:endParaRPr lang="en-TW" dirty="0"/>
+                    </a:p>
+                  </a:txBody>
+                  <a:tcPr/>
+                </a:tc>
+                <a:tc>
+                  <a:txBody>
+                    <a:bodyPr/>
+                    <a:lstStyle/>
+                    <a:p>
+                      <a:r>
+                        <a:rPr lang="en-US" sz="1800" dirty="0">
+                          <a:solidFill>
+                            <a:srgbClr val="13294B"/>
+                          </a:solidFill>
+                          <a:latin typeface="Calibri"/>
+                          <a:ea typeface="宋体"/>
+                          <a:cs typeface="Calibri"/>
+                        </a:rPr>
+                        <a:t>0.1201</a:t>
+                      </a:r>
+                      <a:endParaRPr lang="en-TW" dirty="0"/>
+                    </a:p>
+                  </a:txBody>
+                  <a:tcPr/>
+                </a:tc>
+                <a:tc>
+                  <a:txBody>
+                    <a:bodyPr/>
+                    <a:lstStyle/>
+                    <a:p>
+                      <a:r>
+                        <a:rPr lang="en-US" sz="1800" dirty="0">
+                          <a:solidFill>
+                            <a:srgbClr val="13294B"/>
+                          </a:solidFill>
+                          <a:latin typeface="Calibri"/>
+                          <a:ea typeface="宋体"/>
+                          <a:cs typeface="Calibri"/>
+                        </a:rPr>
+                        <a:t>0.0694</a:t>
+                      </a:r>
+                      <a:endParaRPr lang="en-TW" dirty="0"/>
+                    </a:p>
+                  </a:txBody>
+                  <a:tcPr/>
+                </a:tc>
+                <a:tc>
+                  <a:txBody>
+                    <a:bodyPr/>
+                    <a:lstStyle/>
+                    <a:p>
+                      <a:r>
+                        <a:rPr lang="en-US" sz="1800" dirty="0" err="1">
+                          <a:solidFill>
+                            <a:srgbClr val="13294B"/>
+                          </a:solidFill>
+                          <a:latin typeface="Calibri"/>
+                          <a:ea typeface="宋体"/>
+                          <a:cs typeface="Calibri"/>
+                        </a:rPr>
+                        <a:t>apology_density</a:t>
+                      </a:r>
+                      <a:r>
+                        <a:rPr lang="en-US" sz="1800" dirty="0">
+                          <a:solidFill>
+                            <a:srgbClr val="13294B"/>
+                          </a:solidFill>
+                          <a:latin typeface="Calibri"/>
+                          <a:ea typeface="宋体"/>
+                          <a:cs typeface="Calibri"/>
+                        </a:rPr>
+                        <a:t> </a:t>
+                      </a:r>
+                      <a:endParaRPr lang="en-TW" dirty="0"/>
+                    </a:p>
+                  </a:txBody>
+                  <a:tcPr/>
+                </a:tc>
+                <a:extLst>
+                  <a:ext uri="{0D108BD9-81ED-4DB2-BD59-A6C34878D82A}">
+                    <a16:rowId xmlns:a16="http://schemas.microsoft.com/office/drawing/2014/main" val="1800357787"/>
+                  </a:ext>
+                </a:extLst>
+              </a:tr>
+              <a:tr h="370840">
+                <a:tc>
+                  <a:txBody>
+                    <a:bodyPr/>
+                    <a:lstStyle/>
+                    <a:p>
+                      <a:r>
+                        <a:rPr lang="en-US" sz="1800" dirty="0">
+                          <a:solidFill>
+                            <a:srgbClr val="13294B"/>
+                          </a:solidFill>
+                          <a:latin typeface="Calibri"/>
+                          <a:ea typeface="宋体"/>
+                          <a:cs typeface="Calibri"/>
+                        </a:rPr>
+                        <a:t>Gemini</a:t>
+                      </a:r>
+                      <a:endParaRPr lang="en-TW" dirty="0"/>
+                    </a:p>
+                  </a:txBody>
+                  <a:tcPr/>
+                </a:tc>
+                <a:tc>
+                  <a:txBody>
+                    <a:bodyPr/>
+                    <a:lstStyle/>
+                    <a:p>
+                      <a:r>
+                        <a:rPr lang="en-US" sz="1800" dirty="0">
+                          <a:solidFill>
+                            <a:srgbClr val="13294B"/>
+                          </a:solidFill>
+                          <a:latin typeface="Calibri"/>
+                          <a:ea typeface="宋体"/>
+                          <a:cs typeface="Calibri"/>
+                        </a:rPr>
+                        <a:t>0.1736</a:t>
+                      </a:r>
+                      <a:endParaRPr lang="en-TW" dirty="0"/>
+                    </a:p>
+                  </a:txBody>
+                  <a:tcPr/>
+                </a:tc>
+                <a:tc>
+                  <a:txBody>
+                    <a:bodyPr/>
+                    <a:lstStyle/>
+                    <a:p>
+                      <a:r>
+                        <a:rPr lang="en-US" sz="1800" dirty="0">
+                          <a:solidFill>
+                            <a:srgbClr val="13294B"/>
+                          </a:solidFill>
+                          <a:latin typeface="Calibri"/>
+                          <a:ea typeface="宋体"/>
+                          <a:cs typeface="Calibri"/>
+                        </a:rPr>
+                        <a:t>0.1072</a:t>
+                      </a:r>
+                      <a:endParaRPr lang="en-TW" dirty="0"/>
+                    </a:p>
+                  </a:txBody>
+                  <a:tcPr/>
+                </a:tc>
+                <a:tc>
+                  <a:txBody>
+                    <a:bodyPr/>
+                    <a:lstStyle/>
+                    <a:p>
+                      <a:r>
+                        <a:rPr lang="en-US" sz="1800" dirty="0">
+                          <a:solidFill>
+                            <a:srgbClr val="13294B"/>
+                          </a:solidFill>
+                          <a:latin typeface="Calibri"/>
+                          <a:ea typeface="宋体"/>
+                          <a:cs typeface="Calibri"/>
+                        </a:rPr>
+                        <a:t>0.2494</a:t>
+                      </a:r>
+                      <a:endParaRPr lang="en-TW" dirty="0"/>
+                    </a:p>
+                  </a:txBody>
+                  <a:tcPr/>
+                </a:tc>
+                <a:tc>
+                  <a:txBody>
+                    <a:bodyPr/>
+                    <a:lstStyle/>
+                    <a:p>
+                      <a:pPr marL="0" marR="0" lvl="0" indent="0" algn="l" defTabSz="914400" rtl="0" eaLnBrk="1" fontAlgn="auto" latinLnBrk="0" hangingPunct="1">
+                        <a:lnSpc>
+                          <a:spcPct val="100000"/>
+                        </a:lnSpc>
+                        <a:spcBef>
+                          <a:spcPts val="0"/>
+                        </a:spcBef>
+                        <a:spcAft>
+                          <a:spcPts val="0"/>
+                        </a:spcAft>
+                        <a:buClrTx/>
+                        <a:buSzTx/>
+                        <a:buFontTx/>
+                        <a:buNone/>
+                        <a:tabLst/>
+                        <a:defRPr/>
+                      </a:pPr>
+                      <a:r>
+                        <a:rPr lang="en-US" sz="1800" dirty="0" err="1">
+                          <a:solidFill>
+                            <a:srgbClr val="13294B"/>
+                          </a:solidFill>
+                          <a:latin typeface="Calibri"/>
+                          <a:ea typeface="宋体"/>
+                          <a:cs typeface="Calibri"/>
+                        </a:rPr>
+                        <a:t>tone_fit</a:t>
+                      </a:r>
+                      <a:endParaRPr lang="en-US" sz="1800" dirty="0">
+                        <a:solidFill>
+                          <a:srgbClr val="13294B"/>
+                        </a:solidFill>
+                        <a:latin typeface="Calibri"/>
+                        <a:ea typeface="宋体"/>
+                        <a:cs typeface="Calibri"/>
+                      </a:endParaRPr>
+                    </a:p>
+                  </a:txBody>
+                  <a:tcPr/>
+                </a:tc>
+                <a:extLst>
+                  <a:ext uri="{0D108BD9-81ED-4DB2-BD59-A6C34878D82A}">
+                    <a16:rowId xmlns:a16="http://schemas.microsoft.com/office/drawing/2014/main" val="3198097032"/>
+                  </a:ext>
+                </a:extLst>
+              </a:tr>
+            </a:tbl>
+          </a:graphicData>
+        </a:graphic>
+      </p:graphicFrame>
     </p:spTree>
     <p:extLst>
       <p:ext uri="{BB962C8B-B14F-4D97-AF65-F5344CB8AC3E}">
-        <p14:creationId xmlns:p14="http://schemas.microsoft.com/office/powerpoint/2010/main" val="3520523714"/>
+        <p14:creationId xmlns:p14="http://schemas.microsoft.com/office/powerpoint/2010/main" val="3949180066"/>
       </p:ext>
     </p:extLst>
   </p:cSld>
@@ -10055,7 +11380,7 @@
         <p:cNvPr id="1" name="">
           <a:extLst>
             <a:ext uri="{FF2B5EF4-FFF2-40B4-BE49-F238E27FC236}">
-              <a16:creationId xmlns:a16="http://schemas.microsoft.com/office/drawing/2014/main" id="{F0992A2E-AFD7-9943-2519-30DF0B2846D5}"/>
+              <a16:creationId xmlns:a16="http://schemas.microsoft.com/office/drawing/2014/main" id="{C315096F-3A92-E9AB-D4DC-68371996E91E}"/>
             </a:ext>
           </a:extLst>
         </p:cNvPr>
@@ -10075,7 +11400,7 @@
           <p:cNvPr id="3" name="图文框 2">
             <a:extLst>
               <a:ext uri="{FF2B5EF4-FFF2-40B4-BE49-F238E27FC236}">
-                <a16:creationId xmlns:a16="http://schemas.microsoft.com/office/drawing/2014/main" id="{2496E383-A7BE-C8AE-CAC4-8F5A48022BA5}"/>
+                <a16:creationId xmlns:a16="http://schemas.microsoft.com/office/drawing/2014/main" id="{38E4C8C1-0439-8CF3-1D3C-B869BFA310EB}"/>
               </a:ext>
             </a:extLst>
           </p:cNvPr>
@@ -10138,7 +11463,7 @@
           <p:cNvPr id="4" name="文本框 3">
             <a:extLst>
               <a:ext uri="{FF2B5EF4-FFF2-40B4-BE49-F238E27FC236}">
-                <a16:creationId xmlns:a16="http://schemas.microsoft.com/office/drawing/2014/main" id="{A9FB4F93-AF84-404A-0BBB-4422EC37B4FC}"/>
+                <a16:creationId xmlns:a16="http://schemas.microsoft.com/office/drawing/2014/main" id="{8321A214-2494-84E4-799C-D08B7F8DC0FB}"/>
               </a:ext>
             </a:extLst>
           </p:cNvPr>
@@ -10170,7 +11495,7 @@
                 <a:ea typeface="等线"/>
                 <a:cs typeface="+mj-lt"/>
               </a:rPr>
-              <a:t>Future Works</a:t>
+              <a:t>Results</a:t>
             </a:r>
           </a:p>
         </p:txBody>
@@ -10180,7 +11505,7 @@
           <p:cNvPr id="9" name="半闭框 8">
             <a:extLst>
               <a:ext uri="{FF2B5EF4-FFF2-40B4-BE49-F238E27FC236}">
-                <a16:creationId xmlns:a16="http://schemas.microsoft.com/office/drawing/2014/main" id="{3FF36AB2-62E7-1DE0-937F-961918895C1B}"/>
+                <a16:creationId xmlns:a16="http://schemas.microsoft.com/office/drawing/2014/main" id="{315BCC47-11C5-9C98-E7ED-6FF7A3083D52}"/>
               </a:ext>
             </a:extLst>
           </p:cNvPr>
@@ -10241,7 +11566,7 @@
           <p:cNvPr id="10" name="半闭框 9">
             <a:extLst>
               <a:ext uri="{FF2B5EF4-FFF2-40B4-BE49-F238E27FC236}">
-                <a16:creationId xmlns:a16="http://schemas.microsoft.com/office/drawing/2014/main" id="{619808A8-0E2B-499B-9C3E-6AFFF5F65A3F}"/>
+                <a16:creationId xmlns:a16="http://schemas.microsoft.com/office/drawing/2014/main" id="{C336E2CE-A10F-E135-D5DE-85CAC09B26BF}"/>
               </a:ext>
             </a:extLst>
           </p:cNvPr>
@@ -10306,7 +11631,7 @@
           <p:cNvPr id="13" name="直接连接符 12">
             <a:extLst>
               <a:ext uri="{FF2B5EF4-FFF2-40B4-BE49-F238E27FC236}">
-                <a16:creationId xmlns:a16="http://schemas.microsoft.com/office/drawing/2014/main" id="{2782AA16-8086-7957-4CEE-D968A6DB722F}"/>
+                <a16:creationId xmlns:a16="http://schemas.microsoft.com/office/drawing/2014/main" id="{D16DD379-F2CD-5040-8929-0BDEFC38FDEE}"/>
               </a:ext>
             </a:extLst>
           </p:cNvPr>
@@ -10349,7 +11674,7 @@
           <p:cNvPr id="100" name="图片 99">
             <a:extLst>
               <a:ext uri="{FF2B5EF4-FFF2-40B4-BE49-F238E27FC236}">
-                <a16:creationId xmlns:a16="http://schemas.microsoft.com/office/drawing/2014/main" id="{F71171B4-C3D9-CF5C-7B4B-56EFAAF3183B}"/>
+                <a16:creationId xmlns:a16="http://schemas.microsoft.com/office/drawing/2014/main" id="{0C605A51-1FDC-6F17-F18F-56BE131BF26E}"/>
               </a:ext>
             </a:extLst>
           </p:cNvPr>
@@ -10376,171 +11701,46 @@
           </a:ln>
         </p:spPr>
       </p:pic>
-      <p:sp>
-        <p:nvSpPr>
-          <p:cNvPr id="5" name="文本框 4">
-            <a:extLst>
-              <a:ext uri="{FF2B5EF4-FFF2-40B4-BE49-F238E27FC236}">
-                <a16:creationId xmlns:a16="http://schemas.microsoft.com/office/drawing/2014/main" id="{66732831-3A48-AA96-5C7E-EF953BA75DE0}"/>
-              </a:ext>
-            </a:extLst>
-          </p:cNvPr>
-          <p:cNvSpPr txBox="1"/>
+      <p:pic>
+        <p:nvPicPr>
+          <p:cNvPr id="6" name="Picture 5" descr="A graph of different sizes and colors&#10;&#10;Description automatically generated with medium confidence">
+            <a:extLst>
+              <a:ext uri="{FF2B5EF4-FFF2-40B4-BE49-F238E27FC236}">
+                <a16:creationId xmlns:a16="http://schemas.microsoft.com/office/drawing/2014/main" id="{0E8B74AF-3412-6B8E-C00E-2EC30A84B4C3}"/>
+              </a:ext>
+            </a:extLst>
+          </p:cNvPr>
+          <p:cNvPicPr>
+            <a:picLocks noChangeAspect="1"/>
+          </p:cNvPicPr>
           <p:nvPr/>
-        </p:nvSpPr>
+        </p:nvPicPr>
+        <p:blipFill>
+          <a:blip r:embed="rId5">
+            <a:extLst>
+              <a:ext uri="{28A0092B-C50C-407E-A947-70E740481C1C}">
+                <a14:useLocalDpi xmlns:a14="http://schemas.microsoft.com/office/drawing/2010/main" val="0"/>
+              </a:ext>
+            </a:extLst>
+          </a:blip>
+          <a:stretch>
+            <a:fillRect/>
+          </a:stretch>
+        </p:blipFill>
         <p:spPr>
           <a:xfrm>
-            <a:off x="613543" y="1741049"/>
-            <a:ext cx="10964912" cy="4001095"/>
+            <a:off x="650457" y="1942598"/>
+            <a:ext cx="10855424" cy="3775246"/>
           </a:xfrm>
           <a:prstGeom prst="rect">
             <a:avLst/>
           </a:prstGeom>
-          <a:noFill/>
         </p:spPr>
-        <p:txBody>
-          <a:bodyPr wrap="square" lIns="91440" tIns="45720" rIns="91440" bIns="45720" rtlCol="0" anchor="t">
-            <a:spAutoFit/>
-          </a:bodyPr>
-          <a:lstStyle/>
-          <a:p>
-            <a:pPr marL="457200" indent="-457200">
-              <a:spcAft>
-                <a:spcPts val="600"/>
-              </a:spcAft>
-              <a:buFont typeface="Arial" panose="020B0604020202020204" pitchFamily="34" charset="0"/>
-              <a:buChar char="•"/>
-            </a:pPr>
-            <a:r>
-              <a:rPr lang="en-US" altLang="zh-CN" sz="3200" b="1" dirty="0">
-                <a:solidFill>
-                  <a:srgbClr val="13294B"/>
-                </a:solidFill>
-                <a:latin typeface="Calibri"/>
-                <a:ea typeface="宋体"/>
-                <a:cs typeface="Calibri"/>
-              </a:rPr>
-              <a:t>Conclusion 1:</a:t>
-            </a:r>
-          </a:p>
-          <a:p>
-            <a:pPr marL="914400" lvl="1" indent="-457200">
-              <a:spcAft>
-                <a:spcPts val="600"/>
-              </a:spcAft>
-              <a:buFont typeface="Arial" panose="020B0604020202020204" pitchFamily="34" charset="0"/>
-              <a:buChar char="•"/>
-            </a:pPr>
-            <a:r>
-              <a:rPr lang="en-US" altLang="zh-CN" sz="3200" dirty="0">
-                <a:solidFill>
-                  <a:srgbClr val="13294B"/>
-                </a:solidFill>
-                <a:latin typeface="Calibri"/>
-                <a:ea typeface="宋体"/>
-                <a:cs typeface="Calibri"/>
-              </a:rPr>
-              <a:t>11112222</a:t>
-            </a:r>
-          </a:p>
-          <a:p>
-            <a:pPr marL="457200" indent="-457200">
-              <a:spcAft>
-                <a:spcPts val="600"/>
-              </a:spcAft>
-              <a:buFont typeface="Arial" panose="020B0604020202020204" pitchFamily="34" charset="0"/>
-              <a:buChar char="•"/>
-            </a:pPr>
-            <a:r>
-              <a:rPr lang="en-US" altLang="zh-CN" sz="3200" b="1" dirty="0">
-                <a:solidFill>
-                  <a:srgbClr val="13294B"/>
-                </a:solidFill>
-                <a:latin typeface="Calibri"/>
-                <a:ea typeface="宋体"/>
-                <a:cs typeface="Calibri"/>
-              </a:rPr>
-              <a:t>Conclusion 2:</a:t>
-            </a:r>
-          </a:p>
-          <a:p>
-            <a:pPr marL="914400" lvl="1" indent="-457200">
-              <a:spcAft>
-                <a:spcPts val="600"/>
-              </a:spcAft>
-              <a:buFont typeface="Arial" panose="020B0604020202020204" pitchFamily="34" charset="0"/>
-              <a:buChar char="•"/>
-            </a:pPr>
-            <a:r>
-              <a:rPr lang="en-US" altLang="zh-CN" sz="3200" dirty="0">
-                <a:solidFill>
-                  <a:srgbClr val="13294B"/>
-                </a:solidFill>
-                <a:latin typeface="Calibri"/>
-                <a:ea typeface="宋体"/>
-                <a:cs typeface="Calibri"/>
-              </a:rPr>
-              <a:t>22223333</a:t>
-            </a:r>
-          </a:p>
-          <a:p>
-            <a:pPr marL="457200" indent="-457200">
-              <a:spcAft>
-                <a:spcPts val="600"/>
-              </a:spcAft>
-              <a:buFont typeface="Arial" panose="020B0604020202020204" pitchFamily="34" charset="0"/>
-              <a:buChar char="•"/>
-            </a:pPr>
-            <a:endParaRPr lang="en-US" altLang="zh-CN" sz="3200" b="1" dirty="0">
-              <a:solidFill>
-                <a:srgbClr val="13294B"/>
-              </a:solidFill>
-              <a:latin typeface="Calibri"/>
-              <a:ea typeface="宋体"/>
-              <a:cs typeface="Calibri"/>
-            </a:endParaRPr>
-          </a:p>
-          <a:p>
-            <a:pPr marL="457200" indent="-457200">
-              <a:spcAft>
-                <a:spcPts val="600"/>
-              </a:spcAft>
-              <a:buFont typeface="Arial" panose="020B0604020202020204" pitchFamily="34" charset="0"/>
-              <a:buChar char="•"/>
-            </a:pPr>
-            <a:endParaRPr lang="en-US" altLang="zh-CN" sz="3200" b="1" dirty="0">
-              <a:solidFill>
-                <a:srgbClr val="13294B"/>
-              </a:solidFill>
-              <a:latin typeface="Calibri"/>
-              <a:ea typeface="宋体"/>
-              <a:cs typeface="Calibri"/>
-            </a:endParaRPr>
-          </a:p>
-          <a:p>
-            <a:pPr>
-              <a:spcAft>
-                <a:spcPts val="600"/>
-              </a:spcAft>
-            </a:pPr>
-            <a:r>
-              <a:rPr lang="en-US" altLang="zh-CN" sz="3200" b="1" dirty="0">
-                <a:solidFill>
-                  <a:srgbClr val="13294B"/>
-                </a:solidFill>
-                <a:latin typeface="Calibri"/>
-                <a:ea typeface="宋体"/>
-                <a:cs typeface="Calibri"/>
-              </a:rPr>
-              <a:t> </a:t>
-            </a:r>
-          </a:p>
-        </p:txBody>
-      </p:sp>
+      </p:pic>
     </p:spTree>
     <p:extLst>
       <p:ext uri="{BB962C8B-B14F-4D97-AF65-F5344CB8AC3E}">
-        <p14:creationId xmlns:p14="http://schemas.microsoft.com/office/powerpoint/2010/main" val="1859779982"/>
+        <p14:creationId xmlns:p14="http://schemas.microsoft.com/office/powerpoint/2010/main" val="3293654617"/>
       </p:ext>
     </p:extLst>
   </p:cSld>
@@ -10558,7 +11758,7 @@
         <p:cNvPr id="1" name="">
           <a:extLst>
             <a:ext uri="{FF2B5EF4-FFF2-40B4-BE49-F238E27FC236}">
-              <a16:creationId xmlns:a16="http://schemas.microsoft.com/office/drawing/2014/main" id="{132D79BF-ED01-067B-10A9-828B61A9DE19}"/>
+              <a16:creationId xmlns:a16="http://schemas.microsoft.com/office/drawing/2014/main" id="{C315096F-3A92-E9AB-D4DC-68371996E91E}"/>
             </a:ext>
           </a:extLst>
         </p:cNvPr>
@@ -10578,7 +11778,7 @@
           <p:cNvPr id="3" name="图文框 2">
             <a:extLst>
               <a:ext uri="{FF2B5EF4-FFF2-40B4-BE49-F238E27FC236}">
-                <a16:creationId xmlns:a16="http://schemas.microsoft.com/office/drawing/2014/main" id="{F361CDB9-483A-E9B1-5401-DB5169718418}"/>
+                <a16:creationId xmlns:a16="http://schemas.microsoft.com/office/drawing/2014/main" id="{38E4C8C1-0439-8CF3-1D3C-B869BFA310EB}"/>
               </a:ext>
             </a:extLst>
           </p:cNvPr>
@@ -10641,7 +11841,7 @@
           <p:cNvPr id="4" name="文本框 3">
             <a:extLst>
               <a:ext uri="{FF2B5EF4-FFF2-40B4-BE49-F238E27FC236}">
-                <a16:creationId xmlns:a16="http://schemas.microsoft.com/office/drawing/2014/main" id="{0EC7D77F-C731-B08D-E3AF-24869C9E7DD8}"/>
+                <a16:creationId xmlns:a16="http://schemas.microsoft.com/office/drawing/2014/main" id="{8321A214-2494-84E4-799C-D08B7F8DC0FB}"/>
               </a:ext>
             </a:extLst>
           </p:cNvPr>
@@ -10673,7 +11873,7 @@
                 <a:ea typeface="等线"/>
                 <a:cs typeface="+mj-lt"/>
               </a:rPr>
-              <a:t>References</a:t>
+              <a:t>Results</a:t>
             </a:r>
           </a:p>
         </p:txBody>
@@ -10683,7 +11883,7 @@
           <p:cNvPr id="9" name="半闭框 8">
             <a:extLst>
               <a:ext uri="{FF2B5EF4-FFF2-40B4-BE49-F238E27FC236}">
-                <a16:creationId xmlns:a16="http://schemas.microsoft.com/office/drawing/2014/main" id="{26ED32FE-E210-F419-3665-A72391890294}"/>
+                <a16:creationId xmlns:a16="http://schemas.microsoft.com/office/drawing/2014/main" id="{315BCC47-11C5-9C98-E7ED-6FF7A3083D52}"/>
               </a:ext>
             </a:extLst>
           </p:cNvPr>
@@ -10744,7 +11944,7 @@
           <p:cNvPr id="10" name="半闭框 9">
             <a:extLst>
               <a:ext uri="{FF2B5EF4-FFF2-40B4-BE49-F238E27FC236}">
-                <a16:creationId xmlns:a16="http://schemas.microsoft.com/office/drawing/2014/main" id="{DB9C76C6-520E-FD57-3D2F-9CBE4BC8EDEA}"/>
+                <a16:creationId xmlns:a16="http://schemas.microsoft.com/office/drawing/2014/main" id="{C336E2CE-A10F-E135-D5DE-85CAC09B26BF}"/>
               </a:ext>
             </a:extLst>
           </p:cNvPr>
@@ -10809,7 +12009,7 @@
           <p:cNvPr id="13" name="直接连接符 12">
             <a:extLst>
               <a:ext uri="{FF2B5EF4-FFF2-40B4-BE49-F238E27FC236}">
-                <a16:creationId xmlns:a16="http://schemas.microsoft.com/office/drawing/2014/main" id="{22FF11B7-EE23-11CD-90E6-31B0D9C94502}"/>
+                <a16:creationId xmlns:a16="http://schemas.microsoft.com/office/drawing/2014/main" id="{D16DD379-F2CD-5040-8929-0BDEFC38FDEE}"/>
               </a:ext>
             </a:extLst>
           </p:cNvPr>
@@ -10852,7 +12052,7 @@
           <p:cNvPr id="100" name="图片 99">
             <a:extLst>
               <a:ext uri="{FF2B5EF4-FFF2-40B4-BE49-F238E27FC236}">
-                <a16:creationId xmlns:a16="http://schemas.microsoft.com/office/drawing/2014/main" id="{2DFC5ECA-1FCF-2D31-54A1-2437E5B44571}"/>
+                <a16:creationId xmlns:a16="http://schemas.microsoft.com/office/drawing/2014/main" id="{0C605A51-1FDC-6F17-F18F-56BE131BF26E}"/>
               </a:ext>
             </a:extLst>
           </p:cNvPr>
@@ -10879,12 +12079,390 @@
           </a:ln>
         </p:spPr>
       </p:pic>
+      <p:pic>
+        <p:nvPicPr>
+          <p:cNvPr id="7" name="Picture 6" descr="Anova">
+            <a:extLst>
+              <a:ext uri="{FF2B5EF4-FFF2-40B4-BE49-F238E27FC236}">
+                <a16:creationId xmlns:a16="http://schemas.microsoft.com/office/drawing/2014/main" id="{5E114D69-1282-6D13-B7BA-66B8EBE7CC9E}"/>
+              </a:ext>
+            </a:extLst>
+          </p:cNvPr>
+          <p:cNvPicPr>
+            <a:picLocks noChangeAspect="1"/>
+          </p:cNvPicPr>
+          <p:nvPr/>
+        </p:nvPicPr>
+        <p:blipFill>
+          <a:blip r:embed="rId5">
+            <a:extLst>
+              <a:ext uri="{28A0092B-C50C-407E-A947-70E740481C1C}">
+                <a14:useLocalDpi xmlns:a14="http://schemas.microsoft.com/office/drawing/2010/main" val="0"/>
+              </a:ext>
+            </a:extLst>
+          </a:blip>
+          <a:stretch>
+            <a:fillRect/>
+          </a:stretch>
+        </p:blipFill>
+        <p:spPr>
+          <a:xfrm>
+            <a:off x="654641" y="1931816"/>
+            <a:ext cx="10979075" cy="3911936"/>
+          </a:xfrm>
+          <a:prstGeom prst="rect">
+            <a:avLst/>
+          </a:prstGeom>
+        </p:spPr>
+      </p:pic>
+    </p:spTree>
+    <p:extLst>
+      <p:ext uri="{BB962C8B-B14F-4D97-AF65-F5344CB8AC3E}">
+        <p14:creationId xmlns:p14="http://schemas.microsoft.com/office/powerpoint/2010/main" val="1616373676"/>
+      </p:ext>
+    </p:extLst>
+  </p:cSld>
+  <p:clrMapOvr>
+    <a:masterClrMapping/>
+  </p:clrMapOvr>
+</p:sld>
+</file>
+
+<file path=ppt/slides/slide17.xml><?xml version="1.0" encoding="utf-8"?>
+<p:sld xmlns:a="http://schemas.openxmlformats.org/drawingml/2006/main" xmlns:r="http://schemas.openxmlformats.org/officeDocument/2006/relationships" xmlns:p="http://schemas.openxmlformats.org/presentationml/2006/main">
+  <p:cSld>
+    <p:spTree>
+      <p:nvGrpSpPr>
+        <p:cNvPr id="1" name="">
+          <a:extLst>
+            <a:ext uri="{FF2B5EF4-FFF2-40B4-BE49-F238E27FC236}">
+              <a16:creationId xmlns:a16="http://schemas.microsoft.com/office/drawing/2014/main" id="{E7A27B3F-C0CE-A9E4-1359-4A4A0BE2AFC3}"/>
+            </a:ext>
+          </a:extLst>
+        </p:cNvPr>
+        <p:cNvGrpSpPr/>
+        <p:nvPr/>
+      </p:nvGrpSpPr>
+      <p:grpSpPr>
+        <a:xfrm>
+          <a:off x="0" y="0"/>
+          <a:ext cx="0" cy="0"/>
+          <a:chOff x="0" y="0"/>
+          <a:chExt cx="0" cy="0"/>
+        </a:xfrm>
+      </p:grpSpPr>
+      <p:sp>
+        <p:nvSpPr>
+          <p:cNvPr id="3" name="图文框 2">
+            <a:extLst>
+              <a:ext uri="{FF2B5EF4-FFF2-40B4-BE49-F238E27FC236}">
+                <a16:creationId xmlns:a16="http://schemas.microsoft.com/office/drawing/2014/main" id="{8131D144-1C33-0B46-47AE-EF50F1FFB937}"/>
+              </a:ext>
+            </a:extLst>
+          </p:cNvPr>
+          <p:cNvSpPr/>
+          <p:nvPr/>
+        </p:nvSpPr>
+        <p:spPr>
+          <a:xfrm>
+            <a:off x="164147" y="282575"/>
+            <a:ext cx="11863705" cy="6403975"/>
+          </a:xfrm>
+          <a:prstGeom prst="frame">
+            <a:avLst>
+              <a:gd name="adj1" fmla="val 1196"/>
+            </a:avLst>
+          </a:prstGeom>
+          <a:solidFill>
+            <a:srgbClr val="13294B"/>
+          </a:solidFill>
+          <a:ln>
+            <a:solidFill>
+              <a:srgbClr val="13294B"/>
+            </a:solidFill>
+          </a:ln>
+          <a:effectLst>
+            <a:innerShdw blurRad="63500" dist="50800" dir="13500000">
+              <a:prstClr val="black">
+                <a:alpha val="50000"/>
+              </a:prstClr>
+            </a:innerShdw>
+          </a:effectLst>
+        </p:spPr>
+        <p:style>
+          <a:lnRef idx="2">
+            <a:schemeClr val="accent1">
+              <a:lumMod val="75000"/>
+            </a:schemeClr>
+          </a:lnRef>
+          <a:fillRef idx="1">
+            <a:schemeClr val="accent1"/>
+          </a:fillRef>
+          <a:effectRef idx="0">
+            <a:srgbClr val="FFFFFF"/>
+          </a:effectRef>
+          <a:fontRef idx="minor">
+            <a:schemeClr val="lt1"/>
+          </a:fontRef>
+        </p:style>
+        <p:txBody>
+          <a:bodyPr rtlCol="0" anchor="ctr"/>
+          <a:lstStyle/>
+          <a:p>
+            <a:pPr algn="ctr"/>
+            <a:endParaRPr lang="zh-CN" altLang="en-US"/>
+          </a:p>
+        </p:txBody>
+      </p:sp>
+      <p:sp>
+        <p:nvSpPr>
+          <p:cNvPr id="4" name="文本框 3">
+            <a:extLst>
+              <a:ext uri="{FF2B5EF4-FFF2-40B4-BE49-F238E27FC236}">
+                <a16:creationId xmlns:a16="http://schemas.microsoft.com/office/drawing/2014/main" id="{ADE65386-35E8-BF11-F93A-219CCB3C9886}"/>
+              </a:ext>
+            </a:extLst>
+          </p:cNvPr>
+          <p:cNvSpPr txBox="1"/>
+          <p:nvPr/>
+        </p:nvSpPr>
+        <p:spPr>
+          <a:xfrm>
+            <a:off x="650457" y="614859"/>
+            <a:ext cx="9446043" cy="769441"/>
+          </a:xfrm>
+          <a:prstGeom prst="rect">
+            <a:avLst/>
+          </a:prstGeom>
+          <a:noFill/>
+        </p:spPr>
+        <p:txBody>
+          <a:bodyPr wrap="square" lIns="91440" tIns="45720" rIns="91440" bIns="45720" rtlCol="0" anchor="t">
+            <a:spAutoFit/>
+          </a:bodyPr>
+          <a:lstStyle/>
+          <a:p>
+            <a:r>
+              <a:rPr lang="en-US" altLang="zh-CN" sz="4400" b="1" dirty="0">
+                <a:solidFill>
+                  <a:srgbClr val="13294B"/>
+                </a:solidFill>
+                <a:latin typeface="Calibri"/>
+                <a:ea typeface="等线"/>
+                <a:cs typeface="+mj-lt"/>
+              </a:rPr>
+              <a:t>Conclusion &amp; Discussion</a:t>
+            </a:r>
+          </a:p>
+        </p:txBody>
+      </p:sp>
+      <p:sp>
+        <p:nvSpPr>
+          <p:cNvPr id="9" name="半闭框 8">
+            <a:extLst>
+              <a:ext uri="{FF2B5EF4-FFF2-40B4-BE49-F238E27FC236}">
+                <a16:creationId xmlns:a16="http://schemas.microsoft.com/office/drawing/2014/main" id="{FDD4F1B0-E911-555A-86C0-A48E753525CD}"/>
+              </a:ext>
+            </a:extLst>
+          </p:cNvPr>
+          <p:cNvSpPr/>
+          <p:nvPr/>
+        </p:nvSpPr>
+        <p:spPr>
+          <a:xfrm>
+            <a:off x="163830" y="282575"/>
+            <a:ext cx="3148330" cy="2355215"/>
+          </a:xfrm>
+          <a:prstGeom prst="halfFrame">
+            <a:avLst>
+              <a:gd name="adj1" fmla="val 4756"/>
+              <a:gd name="adj2" fmla="val 5021"/>
+            </a:avLst>
+          </a:prstGeom>
+          <a:solidFill>
+            <a:srgbClr val="FF5F05"/>
+          </a:solidFill>
+          <a:ln>
+            <a:solidFill>
+              <a:srgbClr val="FF5F05"/>
+            </a:solidFill>
+          </a:ln>
+        </p:spPr>
+        <p:style>
+          <a:lnRef idx="2">
+            <a:schemeClr val="accent1">
+              <a:lumMod val="75000"/>
+            </a:schemeClr>
+          </a:lnRef>
+          <a:fillRef idx="1">
+            <a:schemeClr val="accent1"/>
+          </a:fillRef>
+          <a:effectRef idx="0">
+            <a:srgbClr val="FFFFFF"/>
+          </a:effectRef>
+          <a:fontRef idx="minor">
+            <a:schemeClr val="lt1"/>
+          </a:fontRef>
+        </p:style>
+        <p:txBody>
+          <a:bodyPr rtlCol="0" anchor="ctr"/>
+          <a:lstStyle/>
+          <a:p>
+            <a:pPr algn="ctr"/>
+            <a:endParaRPr lang="zh-CN" altLang="en-US">
+              <a:solidFill>
+                <a:schemeClr val="tx1"/>
+              </a:solidFill>
+            </a:endParaRPr>
+          </a:p>
+        </p:txBody>
+      </p:sp>
+      <p:sp>
+        <p:nvSpPr>
+          <p:cNvPr id="10" name="半闭框 9">
+            <a:extLst>
+              <a:ext uri="{FF2B5EF4-FFF2-40B4-BE49-F238E27FC236}">
+                <a16:creationId xmlns:a16="http://schemas.microsoft.com/office/drawing/2014/main" id="{C169AE3C-9591-D19E-1694-127228FA4A4A}"/>
+              </a:ext>
+            </a:extLst>
+          </p:cNvPr>
+          <p:cNvSpPr/>
+          <p:nvPr>
+            <p:custDataLst>
+              <p:tags r:id="rId1"/>
+            </p:custDataLst>
+          </p:nvPr>
+        </p:nvSpPr>
+        <p:spPr>
+          <a:xfrm rot="10800000">
+            <a:off x="8357868" y="4262753"/>
+            <a:ext cx="3669983" cy="2423795"/>
+          </a:xfrm>
+          <a:prstGeom prst="halfFrame">
+            <a:avLst>
+              <a:gd name="adj1" fmla="val 4659"/>
+              <a:gd name="adj2" fmla="val 4349"/>
+            </a:avLst>
+          </a:prstGeom>
+          <a:solidFill>
+            <a:srgbClr val="FF5F05"/>
+          </a:solidFill>
+          <a:ln>
+            <a:solidFill>
+              <a:srgbClr val="FF5F05"/>
+            </a:solidFill>
+          </a:ln>
+        </p:spPr>
+        <p:style>
+          <a:lnRef idx="2">
+            <a:schemeClr val="accent1">
+              <a:lumMod val="75000"/>
+            </a:schemeClr>
+          </a:lnRef>
+          <a:fillRef idx="1">
+            <a:schemeClr val="accent1"/>
+          </a:fillRef>
+          <a:effectRef idx="0">
+            <a:srgbClr val="FFFFFF"/>
+          </a:effectRef>
+          <a:fontRef idx="minor">
+            <a:schemeClr val="lt1"/>
+          </a:fontRef>
+        </p:style>
+        <p:txBody>
+          <a:bodyPr rtlCol="0" anchor="ctr"/>
+          <a:lstStyle/>
+          <a:p>
+            <a:pPr algn="ctr"/>
+            <a:endParaRPr lang="zh-CN" altLang="en-US">
+              <a:solidFill>
+                <a:schemeClr val="tx1"/>
+              </a:solidFill>
+            </a:endParaRPr>
+          </a:p>
+        </p:txBody>
+      </p:sp>
+      <p:cxnSp>
+        <p:nvCxnSpPr>
+          <p:cNvPr id="13" name="直接连接符 12">
+            <a:extLst>
+              <a:ext uri="{FF2B5EF4-FFF2-40B4-BE49-F238E27FC236}">
+                <a16:creationId xmlns:a16="http://schemas.microsoft.com/office/drawing/2014/main" id="{C43D726A-5493-F579-0CA0-10B9C9CA6E98}"/>
+              </a:ext>
+            </a:extLst>
+          </p:cNvPr>
+          <p:cNvCxnSpPr/>
+          <p:nvPr/>
+        </p:nvCxnSpPr>
+        <p:spPr>
+          <a:xfrm>
+            <a:off x="650457" y="1480820"/>
+            <a:ext cx="6546850" cy="14605"/>
+          </a:xfrm>
+          <a:prstGeom prst="line">
+            <a:avLst/>
+          </a:prstGeom>
+          <a:ln w="57150">
+            <a:solidFill>
+              <a:srgbClr val="FF5F05">
+                <a:alpha val="81000"/>
+              </a:srgbClr>
+            </a:solidFill>
+          </a:ln>
+        </p:spPr>
+        <p:style>
+          <a:lnRef idx="2">
+            <a:schemeClr val="accent1"/>
+          </a:lnRef>
+          <a:fillRef idx="0">
+            <a:srgbClr val="FFFFFF"/>
+          </a:fillRef>
+          <a:effectRef idx="0">
+            <a:srgbClr val="FFFFFF"/>
+          </a:effectRef>
+          <a:fontRef idx="minor">
+            <a:schemeClr val="tx1"/>
+          </a:fontRef>
+        </p:style>
+      </p:cxnSp>
+      <p:pic>
+        <p:nvPicPr>
+          <p:cNvPr id="100" name="图片 99">
+            <a:extLst>
+              <a:ext uri="{FF2B5EF4-FFF2-40B4-BE49-F238E27FC236}">
+                <a16:creationId xmlns:a16="http://schemas.microsoft.com/office/drawing/2014/main" id="{F73F639D-26B1-9CD6-7383-43CB03DB13CF}"/>
+              </a:ext>
+            </a:extLst>
+          </p:cNvPr>
+          <p:cNvPicPr/>
+          <p:nvPr/>
+        </p:nvPicPr>
+        <p:blipFill>
+          <a:blip r:embed="rId4"/>
+          <a:stretch>
+            <a:fillRect/>
+          </a:stretch>
+        </p:blipFill>
+        <p:spPr>
+          <a:xfrm>
+            <a:off x="9906635" y="171450"/>
+            <a:ext cx="1906270" cy="1212850"/>
+          </a:xfrm>
+          <a:prstGeom prst="rect">
+            <a:avLst/>
+          </a:prstGeom>
+          <a:noFill/>
+          <a:ln w="9525">
+            <a:noFill/>
+          </a:ln>
+        </p:spPr>
+      </p:pic>
       <p:sp>
         <p:nvSpPr>
           <p:cNvPr id="5" name="文本框 4">
             <a:extLst>
               <a:ext uri="{FF2B5EF4-FFF2-40B4-BE49-F238E27FC236}">
-                <a16:creationId xmlns:a16="http://schemas.microsoft.com/office/drawing/2014/main" id="{95F89DC6-1B5B-DDAA-D624-9F2535720DC8}"/>
+                <a16:creationId xmlns:a16="http://schemas.microsoft.com/office/drawing/2014/main" id="{25D8EBBB-7D89-A5FE-3A8C-9E9CFB312697}"/>
               </a:ext>
             </a:extLst>
           </p:cNvPr>
@@ -10894,7 +12472,7 @@
         <p:spPr>
           <a:xfrm>
             <a:off x="613543" y="1741049"/>
-            <a:ext cx="10964912" cy="4462760"/>
+            <a:ext cx="10964912" cy="3400931"/>
           </a:xfrm>
           <a:prstGeom prst="rect">
             <a:avLst/>
@@ -10915,7 +12493,7 @@
               <a:buChar char="•"/>
             </a:pPr>
             <a:r>
-              <a:rPr lang="en-US" altLang="zh-CN" sz="2400" dirty="0">
+              <a:rPr lang="en-US" sz="3200" b="1" dirty="0">
                 <a:solidFill>
                   <a:srgbClr val="13294B"/>
                 </a:solidFill>
@@ -10923,10 +12501,17 @@
                 <a:ea typeface="宋体"/>
                 <a:cs typeface="Calibri"/>
               </a:rPr>
-              <a:t>Stuart </a:t>
-            </a:r>
-            <a:r>
-              <a:rPr lang="en-US" altLang="zh-CN" sz="2400" dirty="0" err="1">
+              <a:t>RQ1 — Do frontier LLMs systematically over- or under-empathize relative to human agents?</a:t>
+            </a:r>
+          </a:p>
+          <a:p>
+            <a:pPr lvl="1">
+              <a:spcAft>
+                <a:spcPts val="600"/>
+              </a:spcAft>
+            </a:pPr>
+            <a:r>
+              <a:rPr lang="en-US" sz="2400" dirty="0">
                 <a:solidFill>
                   <a:srgbClr val="13294B"/>
                 </a:solidFill>
@@ -10934,10 +12519,10 @@
                 <a:ea typeface="宋体"/>
                 <a:cs typeface="Calibri"/>
               </a:rPr>
-              <a:t>Axelbrooke</a:t>
-            </a:r>
-            <a:r>
-              <a:rPr lang="en-US" altLang="zh-CN" sz="2400" dirty="0">
+              <a:t>Both models show statistically significant positive calibration deltas, meaning both over-empathize relative to human agents. Also, there’s different tendency in </a:t>
+            </a:r>
+            <a:r>
+              <a:rPr lang="en-US" sz="2400" b="1" dirty="0">
                 <a:solidFill>
                   <a:srgbClr val="13294B"/>
                 </a:solidFill>
@@ -10945,21 +12530,21 @@
                 <a:ea typeface="宋体"/>
                 <a:cs typeface="Calibri"/>
               </a:rPr>
-              <a:t>. 2017. </a:t>
-            </a:r>
-            <a:r>
-              <a:rPr lang="en-US" altLang="zh-CN" sz="2400" dirty="0">
-                <a:solidFill>
-                  <a:srgbClr val="FF5F05"/>
+              <a:t>models</a:t>
+            </a:r>
+            <a:r>
+              <a:rPr lang="en-US" sz="2400" dirty="0">
+                <a:solidFill>
+                  <a:srgbClr val="13294B"/>
                 </a:solidFill>
                 <a:latin typeface="Calibri"/>
                 <a:ea typeface="宋体"/>
                 <a:cs typeface="Calibri"/>
               </a:rPr>
-              <a:t>Customer support on twitter</a:t>
-            </a:r>
-            <a:r>
-              <a:rPr lang="en-US" altLang="zh-CN" sz="2400" dirty="0">
+              <a:t> and </a:t>
+            </a:r>
+            <a:r>
+              <a:rPr lang="en-US" sz="2400" b="1" dirty="0">
                 <a:solidFill>
                   <a:srgbClr val="13294B"/>
                 </a:solidFill>
@@ -10967,7 +12552,7 @@
                 <a:ea typeface="宋体"/>
                 <a:cs typeface="Calibri"/>
               </a:rPr>
-              <a:t>.</a:t>
+              <a:t>frustration levels.</a:t>
             </a:r>
           </a:p>
           <a:p>
@@ -10978,8 +12563,23 @@
               <a:buFont typeface="Arial" panose="020B0604020202020204" pitchFamily="34" charset="0"/>
               <a:buChar char="•"/>
             </a:pPr>
-            <a:r>
-              <a:rPr lang="en-US" altLang="zh-CN" sz="2400" dirty="0">
+            <a:endParaRPr lang="en-US" altLang="zh-CN" sz="3200" b="1" dirty="0">
+              <a:solidFill>
+                <a:srgbClr val="13294B"/>
+              </a:solidFill>
+              <a:latin typeface="Calibri"/>
+              <a:ea typeface="宋体"/>
+              <a:cs typeface="Calibri"/>
+            </a:endParaRPr>
+          </a:p>
+          <a:p>
+            <a:pPr>
+              <a:spcAft>
+                <a:spcPts val="600"/>
+              </a:spcAft>
+            </a:pPr>
+            <a:r>
+              <a:rPr lang="en-US" altLang="zh-CN" sz="3200" b="1" dirty="0">
                 <a:solidFill>
                   <a:srgbClr val="13294B"/>
                 </a:solidFill>
@@ -10987,163 +12587,380 @@
                 <a:ea typeface="宋体"/>
                 <a:cs typeface="Calibri"/>
               </a:rPr>
-              <a:t>Adam Dahlgren Lindström, Leila </a:t>
-            </a:r>
-            <a:r>
-              <a:rPr lang="en-US" altLang="zh-CN" sz="2400" dirty="0" err="1">
+              <a:t> </a:t>
+            </a:r>
+          </a:p>
+        </p:txBody>
+      </p:sp>
+    </p:spTree>
+    <p:extLst>
+      <p:ext uri="{BB962C8B-B14F-4D97-AF65-F5344CB8AC3E}">
+        <p14:creationId xmlns:p14="http://schemas.microsoft.com/office/powerpoint/2010/main" val="3520523714"/>
+      </p:ext>
+    </p:extLst>
+  </p:cSld>
+  <p:clrMapOvr>
+    <a:masterClrMapping/>
+  </p:clrMapOvr>
+</p:sld>
+</file>
+
+<file path=ppt/slides/slide18.xml><?xml version="1.0" encoding="utf-8"?>
+<p:sld xmlns:a="http://schemas.openxmlformats.org/drawingml/2006/main" xmlns:r="http://schemas.openxmlformats.org/officeDocument/2006/relationships" xmlns:p="http://schemas.openxmlformats.org/presentationml/2006/main">
+  <p:cSld>
+    <p:spTree>
+      <p:nvGrpSpPr>
+        <p:cNvPr id="1" name="">
+          <a:extLst>
+            <a:ext uri="{FF2B5EF4-FFF2-40B4-BE49-F238E27FC236}">
+              <a16:creationId xmlns:a16="http://schemas.microsoft.com/office/drawing/2014/main" id="{E7A27B3F-C0CE-A9E4-1359-4A4A0BE2AFC3}"/>
+            </a:ext>
+          </a:extLst>
+        </p:cNvPr>
+        <p:cNvGrpSpPr/>
+        <p:nvPr/>
+      </p:nvGrpSpPr>
+      <p:grpSpPr>
+        <a:xfrm>
+          <a:off x="0" y="0"/>
+          <a:ext cx="0" cy="0"/>
+          <a:chOff x="0" y="0"/>
+          <a:chExt cx="0" cy="0"/>
+        </a:xfrm>
+      </p:grpSpPr>
+      <p:sp>
+        <p:nvSpPr>
+          <p:cNvPr id="3" name="图文框 2">
+            <a:extLst>
+              <a:ext uri="{FF2B5EF4-FFF2-40B4-BE49-F238E27FC236}">
+                <a16:creationId xmlns:a16="http://schemas.microsoft.com/office/drawing/2014/main" id="{8131D144-1C33-0B46-47AE-EF50F1FFB937}"/>
+              </a:ext>
+            </a:extLst>
+          </p:cNvPr>
+          <p:cNvSpPr/>
+          <p:nvPr/>
+        </p:nvSpPr>
+        <p:spPr>
+          <a:xfrm>
+            <a:off x="164147" y="282575"/>
+            <a:ext cx="11863705" cy="6403975"/>
+          </a:xfrm>
+          <a:prstGeom prst="frame">
+            <a:avLst>
+              <a:gd name="adj1" fmla="val 1196"/>
+            </a:avLst>
+          </a:prstGeom>
+          <a:solidFill>
+            <a:srgbClr val="13294B"/>
+          </a:solidFill>
+          <a:ln>
+            <a:solidFill>
+              <a:srgbClr val="13294B"/>
+            </a:solidFill>
+          </a:ln>
+          <a:effectLst>
+            <a:innerShdw blurRad="63500" dist="50800" dir="13500000">
+              <a:prstClr val="black">
+                <a:alpha val="50000"/>
+              </a:prstClr>
+            </a:innerShdw>
+          </a:effectLst>
+        </p:spPr>
+        <p:style>
+          <a:lnRef idx="2">
+            <a:schemeClr val="accent1">
+              <a:lumMod val="75000"/>
+            </a:schemeClr>
+          </a:lnRef>
+          <a:fillRef idx="1">
+            <a:schemeClr val="accent1"/>
+          </a:fillRef>
+          <a:effectRef idx="0">
+            <a:srgbClr val="FFFFFF"/>
+          </a:effectRef>
+          <a:fontRef idx="minor">
+            <a:schemeClr val="lt1"/>
+          </a:fontRef>
+        </p:style>
+        <p:txBody>
+          <a:bodyPr rtlCol="0" anchor="ctr"/>
+          <a:lstStyle/>
+          <a:p>
+            <a:pPr algn="ctr"/>
+            <a:endParaRPr lang="zh-CN" altLang="en-US"/>
+          </a:p>
+        </p:txBody>
+      </p:sp>
+      <p:sp>
+        <p:nvSpPr>
+          <p:cNvPr id="4" name="文本框 3">
+            <a:extLst>
+              <a:ext uri="{FF2B5EF4-FFF2-40B4-BE49-F238E27FC236}">
+                <a16:creationId xmlns:a16="http://schemas.microsoft.com/office/drawing/2014/main" id="{ADE65386-35E8-BF11-F93A-219CCB3C9886}"/>
+              </a:ext>
+            </a:extLst>
+          </p:cNvPr>
+          <p:cNvSpPr txBox="1"/>
+          <p:nvPr/>
+        </p:nvSpPr>
+        <p:spPr>
+          <a:xfrm>
+            <a:off x="650457" y="614859"/>
+            <a:ext cx="9446043" cy="769441"/>
+          </a:xfrm>
+          <a:prstGeom prst="rect">
+            <a:avLst/>
+          </a:prstGeom>
+          <a:noFill/>
+        </p:spPr>
+        <p:txBody>
+          <a:bodyPr wrap="square" lIns="91440" tIns="45720" rIns="91440" bIns="45720" rtlCol="0" anchor="t">
+            <a:spAutoFit/>
+          </a:bodyPr>
+          <a:lstStyle/>
+          <a:p>
+            <a:r>
+              <a:rPr lang="en-US" altLang="zh-CN" sz="4400" b="1" dirty="0">
                 <a:solidFill>
                   <a:srgbClr val="13294B"/>
                 </a:solidFill>
                 <a:latin typeface="Calibri"/>
-                <a:ea typeface="宋体"/>
-                <a:cs typeface="Calibri"/>
-              </a:rPr>
-              <a:t>Methnani</a:t>
-            </a:r>
-            <a:r>
-              <a:rPr lang="en-US" altLang="zh-CN" sz="2400" dirty="0">
-                <a:solidFill>
-                  <a:srgbClr val="13294B"/>
-                </a:solidFill>
-                <a:latin typeface="Calibri"/>
-                <a:ea typeface="宋体"/>
-                <a:cs typeface="Calibri"/>
-              </a:rPr>
-              <a:t>, Lea Krause, Petter Ericson, </a:t>
-            </a:r>
-            <a:r>
-              <a:rPr lang="en-US" altLang="zh-CN" sz="2400" dirty="0" err="1">
-                <a:solidFill>
-                  <a:srgbClr val="13294B"/>
-                </a:solidFill>
-                <a:latin typeface="Calibri"/>
-                <a:ea typeface="宋体"/>
-                <a:cs typeface="Calibri"/>
-              </a:rPr>
-              <a:t>Íñigo</a:t>
-            </a:r>
-            <a:r>
-              <a:rPr lang="en-US" altLang="zh-CN" sz="2400" dirty="0">
-                <a:solidFill>
-                  <a:srgbClr val="13294B"/>
-                </a:solidFill>
-                <a:latin typeface="Calibri"/>
-                <a:ea typeface="宋体"/>
-                <a:cs typeface="Calibri"/>
-              </a:rPr>
-              <a:t> Martínez de </a:t>
-            </a:r>
-            <a:r>
-              <a:rPr lang="en-US" altLang="zh-CN" sz="2400" dirty="0" err="1">
-                <a:solidFill>
-                  <a:srgbClr val="13294B"/>
-                </a:solidFill>
-                <a:latin typeface="Calibri"/>
-                <a:ea typeface="宋体"/>
-                <a:cs typeface="Calibri"/>
-              </a:rPr>
-              <a:t>Rituerto</a:t>
-            </a:r>
-            <a:r>
-              <a:rPr lang="en-US" altLang="zh-CN" sz="2400" dirty="0">
-                <a:solidFill>
-                  <a:srgbClr val="13294B"/>
-                </a:solidFill>
-                <a:latin typeface="Calibri"/>
-                <a:ea typeface="宋体"/>
-                <a:cs typeface="Calibri"/>
-              </a:rPr>
-              <a:t> de Troya, Dimitri Coelho Mollo, and Roel Dobbe. 2025. </a:t>
-            </a:r>
-            <a:r>
-              <a:rPr lang="en-US" altLang="zh-CN" sz="2400" dirty="0">
-                <a:solidFill>
-                  <a:srgbClr val="FF5F05"/>
-                </a:solidFill>
-                <a:latin typeface="Calibri"/>
-                <a:ea typeface="宋体"/>
-                <a:cs typeface="Calibri"/>
-              </a:rPr>
-              <a:t>Helpful, harmless, honest? sociotechnical limits of AI alignment and safety through reinforcement learn </a:t>
-            </a:r>
-            <a:r>
-              <a:rPr lang="en-US" altLang="zh-CN" sz="2400" dirty="0" err="1">
-                <a:solidFill>
-                  <a:srgbClr val="FF5F05"/>
-                </a:solidFill>
-                <a:latin typeface="Calibri"/>
-                <a:ea typeface="宋体"/>
-                <a:cs typeface="Calibri"/>
-              </a:rPr>
-              <a:t>ing</a:t>
-            </a:r>
-            <a:r>
-              <a:rPr lang="en-US" altLang="zh-CN" sz="2400" dirty="0">
-                <a:solidFill>
-                  <a:srgbClr val="FF5F05"/>
-                </a:solidFill>
-                <a:latin typeface="Calibri"/>
-                <a:ea typeface="宋体"/>
-                <a:cs typeface="Calibri"/>
-              </a:rPr>
-              <a:t> from human feedback</a:t>
-            </a:r>
-            <a:r>
-              <a:rPr lang="en-US" altLang="zh-CN" sz="2400" dirty="0">
-                <a:solidFill>
-                  <a:srgbClr val="13294B"/>
-                </a:solidFill>
-                <a:latin typeface="Calibri"/>
-                <a:ea typeface="宋体"/>
-                <a:cs typeface="Calibri"/>
-              </a:rPr>
-              <a:t>. </a:t>
-            </a:r>
-            <a:r>
-              <a:rPr lang="en-US" altLang="zh-CN" sz="2400" i="1" dirty="0">
-                <a:solidFill>
-                  <a:srgbClr val="13294B"/>
-                </a:solidFill>
-                <a:latin typeface="Calibri"/>
-                <a:ea typeface="宋体"/>
-                <a:cs typeface="Calibri"/>
-              </a:rPr>
-              <a:t>Ethics and Information Technology</a:t>
-            </a:r>
-            <a:r>
-              <a:rPr lang="en-US" altLang="zh-CN" sz="2400" dirty="0">
-                <a:solidFill>
-                  <a:srgbClr val="13294B"/>
-                </a:solidFill>
-                <a:latin typeface="Calibri"/>
-                <a:ea typeface="宋体"/>
-                <a:cs typeface="Calibri"/>
-              </a:rPr>
-              <a:t>, 27(2):28. </a:t>
-            </a:r>
-            <a:r>
-              <a:rPr lang="en-US" altLang="zh-CN" sz="2400" dirty="0" err="1">
-                <a:solidFill>
-                  <a:srgbClr val="13294B"/>
-                </a:solidFill>
-                <a:latin typeface="Calibri"/>
-                <a:ea typeface="宋体"/>
-                <a:cs typeface="Calibri"/>
-              </a:rPr>
-              <a:t>Epub</a:t>
-            </a:r>
-            <a:r>
-              <a:rPr lang="en-US" altLang="zh-CN" sz="2400" dirty="0">
-                <a:solidFill>
-                  <a:srgbClr val="13294B"/>
-                </a:solidFill>
-                <a:latin typeface="Calibri"/>
-                <a:ea typeface="宋体"/>
-                <a:cs typeface="Calibri"/>
-              </a:rPr>
-              <a:t> 2025 Jun 4.</a:t>
-            </a:r>
-          </a:p>
+                <a:ea typeface="等线"/>
+                <a:cs typeface="+mj-lt"/>
+              </a:rPr>
+              <a:t>Conclusion &amp; Discussion</a:t>
+            </a:r>
+          </a:p>
+        </p:txBody>
+      </p:sp>
+      <p:sp>
+        <p:nvSpPr>
+          <p:cNvPr id="9" name="半闭框 8">
+            <a:extLst>
+              <a:ext uri="{FF2B5EF4-FFF2-40B4-BE49-F238E27FC236}">
+                <a16:creationId xmlns:a16="http://schemas.microsoft.com/office/drawing/2014/main" id="{FDD4F1B0-E911-555A-86C0-A48E753525CD}"/>
+              </a:ext>
+            </a:extLst>
+          </p:cNvPr>
+          <p:cNvSpPr/>
+          <p:nvPr/>
+        </p:nvSpPr>
+        <p:spPr>
+          <a:xfrm>
+            <a:off x="163830" y="282575"/>
+            <a:ext cx="3148330" cy="2355215"/>
+          </a:xfrm>
+          <a:prstGeom prst="halfFrame">
+            <a:avLst>
+              <a:gd name="adj1" fmla="val 4756"/>
+              <a:gd name="adj2" fmla="val 5021"/>
+            </a:avLst>
+          </a:prstGeom>
+          <a:solidFill>
+            <a:srgbClr val="FF5F05"/>
+          </a:solidFill>
+          <a:ln>
+            <a:solidFill>
+              <a:srgbClr val="FF5F05"/>
+            </a:solidFill>
+          </a:ln>
+        </p:spPr>
+        <p:style>
+          <a:lnRef idx="2">
+            <a:schemeClr val="accent1">
+              <a:lumMod val="75000"/>
+            </a:schemeClr>
+          </a:lnRef>
+          <a:fillRef idx="1">
+            <a:schemeClr val="accent1"/>
+          </a:fillRef>
+          <a:effectRef idx="0">
+            <a:srgbClr val="FFFFFF"/>
+          </a:effectRef>
+          <a:fontRef idx="minor">
+            <a:schemeClr val="lt1"/>
+          </a:fontRef>
+        </p:style>
+        <p:txBody>
+          <a:bodyPr rtlCol="0" anchor="ctr"/>
+          <a:lstStyle/>
+          <a:p>
+            <a:pPr algn="ctr"/>
+            <a:endParaRPr lang="zh-CN" altLang="en-US">
+              <a:solidFill>
+                <a:schemeClr val="tx1"/>
+              </a:solidFill>
+            </a:endParaRPr>
+          </a:p>
+        </p:txBody>
+      </p:sp>
+      <p:sp>
+        <p:nvSpPr>
+          <p:cNvPr id="10" name="半闭框 9">
+            <a:extLst>
+              <a:ext uri="{FF2B5EF4-FFF2-40B4-BE49-F238E27FC236}">
+                <a16:creationId xmlns:a16="http://schemas.microsoft.com/office/drawing/2014/main" id="{C169AE3C-9591-D19E-1694-127228FA4A4A}"/>
+              </a:ext>
+            </a:extLst>
+          </p:cNvPr>
+          <p:cNvSpPr/>
+          <p:nvPr>
+            <p:custDataLst>
+              <p:tags r:id="rId1"/>
+            </p:custDataLst>
+          </p:nvPr>
+        </p:nvSpPr>
+        <p:spPr>
+          <a:xfrm rot="10800000">
+            <a:off x="8357868" y="4262753"/>
+            <a:ext cx="3669983" cy="2423795"/>
+          </a:xfrm>
+          <a:prstGeom prst="halfFrame">
+            <a:avLst>
+              <a:gd name="adj1" fmla="val 4659"/>
+              <a:gd name="adj2" fmla="val 4349"/>
+            </a:avLst>
+          </a:prstGeom>
+          <a:solidFill>
+            <a:srgbClr val="FF5F05"/>
+          </a:solidFill>
+          <a:ln>
+            <a:solidFill>
+              <a:srgbClr val="FF5F05"/>
+            </a:solidFill>
+          </a:ln>
+        </p:spPr>
+        <p:style>
+          <a:lnRef idx="2">
+            <a:schemeClr val="accent1">
+              <a:lumMod val="75000"/>
+            </a:schemeClr>
+          </a:lnRef>
+          <a:fillRef idx="1">
+            <a:schemeClr val="accent1"/>
+          </a:fillRef>
+          <a:effectRef idx="0">
+            <a:srgbClr val="FFFFFF"/>
+          </a:effectRef>
+          <a:fontRef idx="minor">
+            <a:schemeClr val="lt1"/>
+          </a:fontRef>
+        </p:style>
+        <p:txBody>
+          <a:bodyPr rtlCol="0" anchor="ctr"/>
+          <a:lstStyle/>
+          <a:p>
+            <a:pPr algn="ctr"/>
+            <a:endParaRPr lang="zh-CN" altLang="en-US">
+              <a:solidFill>
+                <a:schemeClr val="tx1"/>
+              </a:solidFill>
+            </a:endParaRPr>
+          </a:p>
+        </p:txBody>
+      </p:sp>
+      <p:cxnSp>
+        <p:nvCxnSpPr>
+          <p:cNvPr id="13" name="直接连接符 12">
+            <a:extLst>
+              <a:ext uri="{FF2B5EF4-FFF2-40B4-BE49-F238E27FC236}">
+                <a16:creationId xmlns:a16="http://schemas.microsoft.com/office/drawing/2014/main" id="{C43D726A-5493-F579-0CA0-10B9C9CA6E98}"/>
+              </a:ext>
+            </a:extLst>
+          </p:cNvPr>
+          <p:cNvCxnSpPr/>
+          <p:nvPr/>
+        </p:nvCxnSpPr>
+        <p:spPr>
+          <a:xfrm>
+            <a:off x="650457" y="1480820"/>
+            <a:ext cx="6546850" cy="14605"/>
+          </a:xfrm>
+          <a:prstGeom prst="line">
+            <a:avLst/>
+          </a:prstGeom>
+          <a:ln w="57150">
+            <a:solidFill>
+              <a:srgbClr val="FF5F05">
+                <a:alpha val="81000"/>
+              </a:srgbClr>
+            </a:solidFill>
+          </a:ln>
+        </p:spPr>
+        <p:style>
+          <a:lnRef idx="2">
+            <a:schemeClr val="accent1"/>
+          </a:lnRef>
+          <a:fillRef idx="0">
+            <a:srgbClr val="FFFFFF"/>
+          </a:fillRef>
+          <a:effectRef idx="0">
+            <a:srgbClr val="FFFFFF"/>
+          </a:effectRef>
+          <a:fontRef idx="minor">
+            <a:schemeClr val="tx1"/>
+          </a:fontRef>
+        </p:style>
+      </p:cxnSp>
+      <p:pic>
+        <p:nvPicPr>
+          <p:cNvPr id="100" name="图片 99">
+            <a:extLst>
+              <a:ext uri="{FF2B5EF4-FFF2-40B4-BE49-F238E27FC236}">
+                <a16:creationId xmlns:a16="http://schemas.microsoft.com/office/drawing/2014/main" id="{F73F639D-26B1-9CD6-7383-43CB03DB13CF}"/>
+              </a:ext>
+            </a:extLst>
+          </p:cNvPr>
+          <p:cNvPicPr/>
+          <p:nvPr/>
+        </p:nvPicPr>
+        <p:blipFill>
+          <a:blip r:embed="rId4"/>
+          <a:stretch>
+            <a:fillRect/>
+          </a:stretch>
+        </p:blipFill>
+        <p:spPr>
+          <a:xfrm>
+            <a:off x="9906635" y="171450"/>
+            <a:ext cx="1906270" cy="1212850"/>
+          </a:xfrm>
+          <a:prstGeom prst="rect">
+            <a:avLst/>
+          </a:prstGeom>
+          <a:noFill/>
+          <a:ln w="9525">
+            <a:noFill/>
+          </a:ln>
+        </p:spPr>
+      </p:pic>
+      <p:sp>
+        <p:nvSpPr>
+          <p:cNvPr id="5" name="文本框 4">
+            <a:extLst>
+              <a:ext uri="{FF2B5EF4-FFF2-40B4-BE49-F238E27FC236}">
+                <a16:creationId xmlns:a16="http://schemas.microsoft.com/office/drawing/2014/main" id="{25D8EBBB-7D89-A5FE-3A8C-9E9CFB312697}"/>
+              </a:ext>
+            </a:extLst>
+          </p:cNvPr>
+          <p:cNvSpPr txBox="1"/>
+          <p:nvPr/>
+        </p:nvSpPr>
+        <p:spPr>
+          <a:xfrm>
+            <a:off x="613543" y="1741049"/>
+            <a:ext cx="10964912" cy="3570208"/>
+          </a:xfrm>
+          <a:prstGeom prst="rect">
+            <a:avLst/>
+          </a:prstGeom>
+          <a:noFill/>
+        </p:spPr>
+        <p:txBody>
+          <a:bodyPr wrap="square" lIns="91440" tIns="45720" rIns="91440" bIns="45720" rtlCol="0" anchor="t">
+            <a:spAutoFit/>
+          </a:bodyPr>
+          <a:lstStyle/>
           <a:p>
             <a:pPr marL="457200" indent="-457200">
               <a:spcAft>
@@ -11153,7 +12970,7 @@
               <a:buChar char="•"/>
             </a:pPr>
             <a:r>
-              <a:rPr lang="en-US" altLang="zh-CN" sz="2400" dirty="0">
+              <a:rPr lang="en-US" sz="3200" b="1" dirty="0">
                 <a:solidFill>
                   <a:srgbClr val="13294B"/>
                 </a:solidFill>
@@ -11161,10 +12978,17 @@
                 <a:ea typeface="宋体"/>
                 <a:cs typeface="Calibri"/>
               </a:rPr>
-              <a:t>Yuna Hong, </a:t>
-            </a:r>
-            <a:r>
-              <a:rPr lang="en-US" altLang="zh-CN" sz="2400" dirty="0" err="1">
+              <a:t>RQ2 — Is this miscalibration consistent across industry domains (airline vs. technology)?</a:t>
+            </a:r>
+          </a:p>
+          <a:p>
+            <a:pPr lvl="1">
+              <a:spcAft>
+                <a:spcPts val="600"/>
+              </a:spcAft>
+            </a:pPr>
+            <a:r>
+              <a:rPr lang="en-US" sz="2400" dirty="0">
                 <a:solidFill>
                   <a:srgbClr val="13294B"/>
                 </a:solidFill>
@@ -11172,96 +12996,16 @@
                 <a:ea typeface="宋体"/>
                 <a:cs typeface="Calibri"/>
               </a:rPr>
-              <a:t>Bonhwa</a:t>
-            </a:r>
-            <a:r>
-              <a:rPr lang="en-US" altLang="zh-CN" sz="2400" dirty="0">
-                <a:solidFill>
-                  <a:srgbClr val="13294B"/>
-                </a:solidFill>
-                <a:latin typeface="Calibri"/>
-                <a:ea typeface="宋体"/>
-                <a:cs typeface="Calibri"/>
-              </a:rPr>
-              <a:t> Ku, and </a:t>
-            </a:r>
-            <a:r>
-              <a:rPr lang="en-US" altLang="zh-CN" sz="2400" dirty="0" err="1">
-                <a:solidFill>
-                  <a:srgbClr val="13294B"/>
-                </a:solidFill>
-                <a:latin typeface="Calibri"/>
-                <a:ea typeface="宋体"/>
-                <a:cs typeface="Calibri"/>
-              </a:rPr>
-              <a:t>Hanseok</a:t>
-            </a:r>
-            <a:r>
-              <a:rPr lang="en-US" altLang="zh-CN" sz="2400" dirty="0">
-                <a:solidFill>
-                  <a:srgbClr val="13294B"/>
-                </a:solidFill>
-                <a:latin typeface="Calibri"/>
-                <a:ea typeface="宋体"/>
-                <a:cs typeface="Calibri"/>
-              </a:rPr>
-              <a:t> Ko. 2025. </a:t>
-            </a:r>
-            <a:r>
-              <a:rPr lang="en-US" altLang="zh-CN" sz="2400" dirty="0">
-                <a:solidFill>
-                  <a:srgbClr val="FF5F05"/>
-                </a:solidFill>
-                <a:latin typeface="Calibri"/>
-                <a:ea typeface="宋体"/>
-                <a:cs typeface="Calibri"/>
-              </a:rPr>
-              <a:t>Performance evaluation metrics for empathetic </a:t>
-            </a:r>
-            <a:r>
-              <a:rPr lang="en-US" altLang="zh-CN" sz="2400" dirty="0" err="1">
-                <a:solidFill>
-                  <a:srgbClr val="FF5F05"/>
-                </a:solidFill>
-                <a:latin typeface="Calibri"/>
-                <a:ea typeface="宋体"/>
-                <a:cs typeface="Calibri"/>
-              </a:rPr>
-              <a:t>llms</a:t>
-            </a:r>
-            <a:r>
-              <a:rPr lang="en-US" altLang="zh-CN" sz="2400" dirty="0">
-                <a:solidFill>
-                  <a:srgbClr val="13294B"/>
-                </a:solidFill>
-                <a:latin typeface="Calibri"/>
-                <a:ea typeface="宋体"/>
-                <a:cs typeface="Calibri"/>
-              </a:rPr>
-              <a:t>. </a:t>
-            </a:r>
-            <a:r>
-              <a:rPr lang="en-US" altLang="zh-CN" sz="2400" i="1" dirty="0">
-                <a:solidFill>
-                  <a:srgbClr val="13294B"/>
-                </a:solidFill>
-                <a:latin typeface="Calibri"/>
-                <a:ea typeface="宋体"/>
-                <a:cs typeface="Calibri"/>
-              </a:rPr>
-              <a:t>Information</a:t>
-            </a:r>
-            <a:r>
-              <a:rPr lang="en-US" altLang="zh-CN" sz="2400" dirty="0">
-                <a:solidFill>
-                  <a:srgbClr val="13294B"/>
-                </a:solidFill>
-                <a:latin typeface="Calibri"/>
-                <a:ea typeface="宋体"/>
-                <a:cs typeface="Calibri"/>
-              </a:rPr>
-              <a:t>, 16(11).</a:t>
-            </a:r>
+              <a:t>The two-way ANOVA finds a significant main effect of domain, meaning both models over-empathize more in the technology sector than in the airline sector. A plausible interpretation: technology-sector human agents in the dataset tend to write more procedural, lower-warmth replies, so LLM defaults diverge more from that baseline than from the warmer airline-agent style.</a:t>
+            </a:r>
+            <a:endParaRPr lang="en-US" sz="3200" dirty="0">
+              <a:solidFill>
+                <a:srgbClr val="13294B"/>
+              </a:solidFill>
+              <a:latin typeface="Calibri"/>
+              <a:ea typeface="宋体"/>
+              <a:cs typeface="Calibri"/>
+            </a:endParaRPr>
           </a:p>
           <a:p>
             <a:pPr marL="457200" indent="-457200">
@@ -11271,8 +13015,396 @@
               <a:buFont typeface="Arial" panose="020B0604020202020204" pitchFamily="34" charset="0"/>
               <a:buChar char="•"/>
             </a:pPr>
-            <a:r>
-              <a:rPr lang="en-US" altLang="zh-CN" sz="2400" dirty="0">
+            <a:endParaRPr lang="en-US" sz="3200" b="1" dirty="0">
+              <a:solidFill>
+                <a:srgbClr val="13294B"/>
+              </a:solidFill>
+              <a:latin typeface="Calibri"/>
+              <a:ea typeface="宋体"/>
+              <a:cs typeface="Calibri"/>
+            </a:endParaRPr>
+          </a:p>
+        </p:txBody>
+      </p:sp>
+    </p:spTree>
+    <p:extLst>
+      <p:ext uri="{BB962C8B-B14F-4D97-AF65-F5344CB8AC3E}">
+        <p14:creationId xmlns:p14="http://schemas.microsoft.com/office/powerpoint/2010/main" val="263997215"/>
+      </p:ext>
+    </p:extLst>
+  </p:cSld>
+  <p:clrMapOvr>
+    <a:masterClrMapping/>
+  </p:clrMapOvr>
+</p:sld>
+</file>
+
+<file path=ppt/slides/slide19.xml><?xml version="1.0" encoding="utf-8"?>
+<p:sld xmlns:a="http://schemas.openxmlformats.org/drawingml/2006/main" xmlns:r="http://schemas.openxmlformats.org/officeDocument/2006/relationships" xmlns:p="http://schemas.openxmlformats.org/presentationml/2006/main">
+  <p:cSld>
+    <p:spTree>
+      <p:nvGrpSpPr>
+        <p:cNvPr id="1" name="">
+          <a:extLst>
+            <a:ext uri="{FF2B5EF4-FFF2-40B4-BE49-F238E27FC236}">
+              <a16:creationId xmlns:a16="http://schemas.microsoft.com/office/drawing/2014/main" id="{F0992A2E-AFD7-9943-2519-30DF0B2846D5}"/>
+            </a:ext>
+          </a:extLst>
+        </p:cNvPr>
+        <p:cNvGrpSpPr/>
+        <p:nvPr/>
+      </p:nvGrpSpPr>
+      <p:grpSpPr>
+        <a:xfrm>
+          <a:off x="0" y="0"/>
+          <a:ext cx="0" cy="0"/>
+          <a:chOff x="0" y="0"/>
+          <a:chExt cx="0" cy="0"/>
+        </a:xfrm>
+      </p:grpSpPr>
+      <p:sp>
+        <p:nvSpPr>
+          <p:cNvPr id="3" name="图文框 2">
+            <a:extLst>
+              <a:ext uri="{FF2B5EF4-FFF2-40B4-BE49-F238E27FC236}">
+                <a16:creationId xmlns:a16="http://schemas.microsoft.com/office/drawing/2014/main" id="{2496E383-A7BE-C8AE-CAC4-8F5A48022BA5}"/>
+              </a:ext>
+            </a:extLst>
+          </p:cNvPr>
+          <p:cNvSpPr/>
+          <p:nvPr/>
+        </p:nvSpPr>
+        <p:spPr>
+          <a:xfrm>
+            <a:off x="164147" y="282575"/>
+            <a:ext cx="11863705" cy="6403975"/>
+          </a:xfrm>
+          <a:prstGeom prst="frame">
+            <a:avLst>
+              <a:gd name="adj1" fmla="val 1196"/>
+            </a:avLst>
+          </a:prstGeom>
+          <a:solidFill>
+            <a:srgbClr val="13294B"/>
+          </a:solidFill>
+          <a:ln>
+            <a:solidFill>
+              <a:srgbClr val="13294B"/>
+            </a:solidFill>
+          </a:ln>
+          <a:effectLst>
+            <a:innerShdw blurRad="63500" dist="50800" dir="13500000">
+              <a:prstClr val="black">
+                <a:alpha val="50000"/>
+              </a:prstClr>
+            </a:innerShdw>
+          </a:effectLst>
+        </p:spPr>
+        <p:style>
+          <a:lnRef idx="2">
+            <a:schemeClr val="accent1">
+              <a:lumMod val="75000"/>
+            </a:schemeClr>
+          </a:lnRef>
+          <a:fillRef idx="1">
+            <a:schemeClr val="accent1"/>
+          </a:fillRef>
+          <a:effectRef idx="0">
+            <a:srgbClr val="FFFFFF"/>
+          </a:effectRef>
+          <a:fontRef idx="minor">
+            <a:schemeClr val="lt1"/>
+          </a:fontRef>
+        </p:style>
+        <p:txBody>
+          <a:bodyPr rtlCol="0" anchor="ctr"/>
+          <a:lstStyle/>
+          <a:p>
+            <a:pPr algn="ctr"/>
+            <a:endParaRPr lang="zh-CN" altLang="en-US"/>
+          </a:p>
+        </p:txBody>
+      </p:sp>
+      <p:sp>
+        <p:nvSpPr>
+          <p:cNvPr id="4" name="文本框 3">
+            <a:extLst>
+              <a:ext uri="{FF2B5EF4-FFF2-40B4-BE49-F238E27FC236}">
+                <a16:creationId xmlns:a16="http://schemas.microsoft.com/office/drawing/2014/main" id="{A9FB4F93-AF84-404A-0BBB-4422EC37B4FC}"/>
+              </a:ext>
+            </a:extLst>
+          </p:cNvPr>
+          <p:cNvSpPr txBox="1"/>
+          <p:nvPr/>
+        </p:nvSpPr>
+        <p:spPr>
+          <a:xfrm>
+            <a:off x="650457" y="614859"/>
+            <a:ext cx="9446043" cy="769441"/>
+          </a:xfrm>
+          <a:prstGeom prst="rect">
+            <a:avLst/>
+          </a:prstGeom>
+          <a:noFill/>
+        </p:spPr>
+        <p:txBody>
+          <a:bodyPr wrap="square" lIns="91440" tIns="45720" rIns="91440" bIns="45720" rtlCol="0" anchor="t">
+            <a:spAutoFit/>
+          </a:bodyPr>
+          <a:lstStyle/>
+          <a:p>
+            <a:r>
+              <a:rPr lang="en-US" altLang="zh-CN" sz="4400" b="1" dirty="0">
+                <a:solidFill>
+                  <a:srgbClr val="13294B"/>
+                </a:solidFill>
+                <a:latin typeface="Calibri"/>
+                <a:ea typeface="等线"/>
+                <a:cs typeface="+mj-lt"/>
+              </a:rPr>
+              <a:t>Future Works</a:t>
+            </a:r>
+          </a:p>
+        </p:txBody>
+      </p:sp>
+      <p:sp>
+        <p:nvSpPr>
+          <p:cNvPr id="9" name="半闭框 8">
+            <a:extLst>
+              <a:ext uri="{FF2B5EF4-FFF2-40B4-BE49-F238E27FC236}">
+                <a16:creationId xmlns:a16="http://schemas.microsoft.com/office/drawing/2014/main" id="{3FF36AB2-62E7-1DE0-937F-961918895C1B}"/>
+              </a:ext>
+            </a:extLst>
+          </p:cNvPr>
+          <p:cNvSpPr/>
+          <p:nvPr/>
+        </p:nvSpPr>
+        <p:spPr>
+          <a:xfrm>
+            <a:off x="163830" y="282575"/>
+            <a:ext cx="3148330" cy="2355215"/>
+          </a:xfrm>
+          <a:prstGeom prst="halfFrame">
+            <a:avLst>
+              <a:gd name="adj1" fmla="val 4756"/>
+              <a:gd name="adj2" fmla="val 5021"/>
+            </a:avLst>
+          </a:prstGeom>
+          <a:solidFill>
+            <a:srgbClr val="FF5F05"/>
+          </a:solidFill>
+          <a:ln>
+            <a:solidFill>
+              <a:srgbClr val="FF5F05"/>
+            </a:solidFill>
+          </a:ln>
+        </p:spPr>
+        <p:style>
+          <a:lnRef idx="2">
+            <a:schemeClr val="accent1">
+              <a:lumMod val="75000"/>
+            </a:schemeClr>
+          </a:lnRef>
+          <a:fillRef idx="1">
+            <a:schemeClr val="accent1"/>
+          </a:fillRef>
+          <a:effectRef idx="0">
+            <a:srgbClr val="FFFFFF"/>
+          </a:effectRef>
+          <a:fontRef idx="minor">
+            <a:schemeClr val="lt1"/>
+          </a:fontRef>
+        </p:style>
+        <p:txBody>
+          <a:bodyPr rtlCol="0" anchor="ctr"/>
+          <a:lstStyle/>
+          <a:p>
+            <a:pPr algn="ctr"/>
+            <a:endParaRPr lang="zh-CN" altLang="en-US">
+              <a:solidFill>
+                <a:schemeClr val="tx1"/>
+              </a:solidFill>
+            </a:endParaRPr>
+          </a:p>
+        </p:txBody>
+      </p:sp>
+      <p:sp>
+        <p:nvSpPr>
+          <p:cNvPr id="10" name="半闭框 9">
+            <a:extLst>
+              <a:ext uri="{FF2B5EF4-FFF2-40B4-BE49-F238E27FC236}">
+                <a16:creationId xmlns:a16="http://schemas.microsoft.com/office/drawing/2014/main" id="{619808A8-0E2B-499B-9C3E-6AFFF5F65A3F}"/>
+              </a:ext>
+            </a:extLst>
+          </p:cNvPr>
+          <p:cNvSpPr/>
+          <p:nvPr>
+            <p:custDataLst>
+              <p:tags r:id="rId1"/>
+            </p:custDataLst>
+          </p:nvPr>
+        </p:nvSpPr>
+        <p:spPr>
+          <a:xfrm rot="10800000">
+            <a:off x="8357868" y="4262753"/>
+            <a:ext cx="3669983" cy="2423795"/>
+          </a:xfrm>
+          <a:prstGeom prst="halfFrame">
+            <a:avLst>
+              <a:gd name="adj1" fmla="val 4659"/>
+              <a:gd name="adj2" fmla="val 4349"/>
+            </a:avLst>
+          </a:prstGeom>
+          <a:solidFill>
+            <a:srgbClr val="FF5F05"/>
+          </a:solidFill>
+          <a:ln>
+            <a:solidFill>
+              <a:srgbClr val="FF5F05"/>
+            </a:solidFill>
+          </a:ln>
+        </p:spPr>
+        <p:style>
+          <a:lnRef idx="2">
+            <a:schemeClr val="accent1">
+              <a:lumMod val="75000"/>
+            </a:schemeClr>
+          </a:lnRef>
+          <a:fillRef idx="1">
+            <a:schemeClr val="accent1"/>
+          </a:fillRef>
+          <a:effectRef idx="0">
+            <a:srgbClr val="FFFFFF"/>
+          </a:effectRef>
+          <a:fontRef idx="minor">
+            <a:schemeClr val="lt1"/>
+          </a:fontRef>
+        </p:style>
+        <p:txBody>
+          <a:bodyPr rtlCol="0" anchor="ctr"/>
+          <a:lstStyle/>
+          <a:p>
+            <a:pPr algn="ctr"/>
+            <a:endParaRPr lang="zh-CN" altLang="en-US">
+              <a:solidFill>
+                <a:schemeClr val="tx1"/>
+              </a:solidFill>
+            </a:endParaRPr>
+          </a:p>
+        </p:txBody>
+      </p:sp>
+      <p:cxnSp>
+        <p:nvCxnSpPr>
+          <p:cNvPr id="13" name="直接连接符 12">
+            <a:extLst>
+              <a:ext uri="{FF2B5EF4-FFF2-40B4-BE49-F238E27FC236}">
+                <a16:creationId xmlns:a16="http://schemas.microsoft.com/office/drawing/2014/main" id="{2782AA16-8086-7957-4CEE-D968A6DB722F}"/>
+              </a:ext>
+            </a:extLst>
+          </p:cNvPr>
+          <p:cNvCxnSpPr/>
+          <p:nvPr/>
+        </p:nvCxnSpPr>
+        <p:spPr>
+          <a:xfrm>
+            <a:off x="650457" y="1480820"/>
+            <a:ext cx="6546850" cy="14605"/>
+          </a:xfrm>
+          <a:prstGeom prst="line">
+            <a:avLst/>
+          </a:prstGeom>
+          <a:ln w="57150">
+            <a:solidFill>
+              <a:srgbClr val="FF5F05">
+                <a:alpha val="81000"/>
+              </a:srgbClr>
+            </a:solidFill>
+          </a:ln>
+        </p:spPr>
+        <p:style>
+          <a:lnRef idx="2">
+            <a:schemeClr val="accent1"/>
+          </a:lnRef>
+          <a:fillRef idx="0">
+            <a:srgbClr val="FFFFFF"/>
+          </a:fillRef>
+          <a:effectRef idx="0">
+            <a:srgbClr val="FFFFFF"/>
+          </a:effectRef>
+          <a:fontRef idx="minor">
+            <a:schemeClr val="tx1"/>
+          </a:fontRef>
+        </p:style>
+      </p:cxnSp>
+      <p:pic>
+        <p:nvPicPr>
+          <p:cNvPr id="100" name="图片 99">
+            <a:extLst>
+              <a:ext uri="{FF2B5EF4-FFF2-40B4-BE49-F238E27FC236}">
+                <a16:creationId xmlns:a16="http://schemas.microsoft.com/office/drawing/2014/main" id="{F71171B4-C3D9-CF5C-7B4B-56EFAAF3183B}"/>
+              </a:ext>
+            </a:extLst>
+          </p:cNvPr>
+          <p:cNvPicPr/>
+          <p:nvPr/>
+        </p:nvPicPr>
+        <p:blipFill>
+          <a:blip r:embed="rId4"/>
+          <a:stretch>
+            <a:fillRect/>
+          </a:stretch>
+        </p:blipFill>
+        <p:spPr>
+          <a:xfrm>
+            <a:off x="9906635" y="171450"/>
+            <a:ext cx="1906270" cy="1212850"/>
+          </a:xfrm>
+          <a:prstGeom prst="rect">
+            <a:avLst/>
+          </a:prstGeom>
+          <a:noFill/>
+          <a:ln w="9525">
+            <a:noFill/>
+          </a:ln>
+        </p:spPr>
+      </p:pic>
+      <p:sp>
+        <p:nvSpPr>
+          <p:cNvPr id="5" name="文本框 4">
+            <a:extLst>
+              <a:ext uri="{FF2B5EF4-FFF2-40B4-BE49-F238E27FC236}">
+                <a16:creationId xmlns:a16="http://schemas.microsoft.com/office/drawing/2014/main" id="{66732831-3A48-AA96-5C7E-EF953BA75DE0}"/>
+              </a:ext>
+            </a:extLst>
+          </p:cNvPr>
+          <p:cNvSpPr txBox="1"/>
+          <p:nvPr/>
+        </p:nvSpPr>
+        <p:spPr>
+          <a:xfrm>
+            <a:off x="613543" y="1741049"/>
+            <a:ext cx="10964912" cy="3431709"/>
+          </a:xfrm>
+          <a:prstGeom prst="rect">
+            <a:avLst/>
+          </a:prstGeom>
+          <a:noFill/>
+        </p:spPr>
+        <p:txBody>
+          <a:bodyPr wrap="square" lIns="91440" tIns="45720" rIns="91440" bIns="45720" rtlCol="0" anchor="t">
+            <a:spAutoFit/>
+          </a:bodyPr>
+          <a:lstStyle/>
+          <a:p>
+            <a:pPr marL="457200" indent="-457200">
+              <a:spcAft>
+                <a:spcPts val="600"/>
+              </a:spcAft>
+              <a:buFont typeface="Arial" panose="020B0604020202020204" pitchFamily="34" charset="0"/>
+              <a:buChar char="•"/>
+            </a:pPr>
+            <a:r>
+              <a:rPr lang="en-US" altLang="zh-CN" sz="3200" b="1" dirty="0">
                 <a:solidFill>
                   <a:srgbClr val="13294B"/>
                 </a:solidFill>
@@ -11280,10 +13412,10 @@
                 <a:ea typeface="宋体"/>
                 <a:cs typeface="Calibri"/>
               </a:rPr>
-              <a:t>Laya Iyer, Kriti Aggarwal, </a:t>
-            </a:r>
-            <a:r>
-              <a:rPr lang="en-US" altLang="zh-CN" sz="2400" dirty="0" err="1">
+              <a:t>Evaluate more models (Claude/Grok/</a:t>
+            </a:r>
+            <a:r>
+              <a:rPr lang="en-US" altLang="zh-CN" sz="3200" b="1" dirty="0" err="1">
                 <a:solidFill>
                   <a:srgbClr val="13294B"/>
                 </a:solidFill>
@@ -11291,10 +13423,10 @@
                 <a:ea typeface="宋体"/>
                 <a:cs typeface="Calibri"/>
               </a:rPr>
-              <a:t>Sanmi</a:t>
-            </a:r>
-            <a:r>
-              <a:rPr lang="en-US" altLang="zh-CN" sz="2400" dirty="0">
+              <a:t>Qwen</a:t>
+            </a:r>
+            <a:r>
+              <a:rPr lang="en-US" altLang="zh-CN" sz="3200" b="1" dirty="0">
                 <a:solidFill>
                   <a:srgbClr val="13294B"/>
                 </a:solidFill>
@@ -11302,10 +13434,19 @@
                 <a:ea typeface="宋体"/>
                 <a:cs typeface="Calibri"/>
               </a:rPr>
-              <a:t> </a:t>
-            </a:r>
-            <a:r>
-              <a:rPr lang="en-US" altLang="zh-CN" sz="2400" dirty="0" err="1">
+              <a:t>)</a:t>
+            </a:r>
+          </a:p>
+          <a:p>
+            <a:pPr marL="457200" indent="-457200">
+              <a:spcAft>
+                <a:spcPts val="600"/>
+              </a:spcAft>
+              <a:buFont typeface="Arial" panose="020B0604020202020204" pitchFamily="34" charset="0"/>
+              <a:buChar char="•"/>
+            </a:pPr>
+            <a:r>
+              <a:rPr lang="en-US" altLang="zh-CN" sz="3200" b="1" dirty="0">
                 <a:solidFill>
                   <a:srgbClr val="13294B"/>
                 </a:solidFill>
@@ -11313,10 +13454,19 @@
                 <a:ea typeface="宋体"/>
                 <a:cs typeface="Calibri"/>
               </a:rPr>
-              <a:t>Koyejo</a:t>
-            </a:r>
-            <a:r>
-              <a:rPr lang="en-US" altLang="zh-CN" sz="2400" dirty="0">
+              <a:t>Further tuning LLM-as-judge to evaluate tone-fit score</a:t>
+            </a:r>
+          </a:p>
+          <a:p>
+            <a:pPr marL="457200" indent="-457200">
+              <a:spcAft>
+                <a:spcPts val="600"/>
+              </a:spcAft>
+              <a:buFont typeface="Arial" panose="020B0604020202020204" pitchFamily="34" charset="0"/>
+              <a:buChar char="•"/>
+            </a:pPr>
+            <a:r>
+              <a:rPr lang="en-US" altLang="zh-CN" sz="3200" b="1" dirty="0">
                 <a:solidFill>
                   <a:srgbClr val="13294B"/>
                 </a:solidFill>
@@ -11324,10 +13474,19 @@
                 <a:ea typeface="宋体"/>
                 <a:cs typeface="Calibri"/>
               </a:rPr>
-              <a:t>, Gail Heyman, Desmond C. Ong, and </a:t>
-            </a:r>
-            <a:r>
-              <a:rPr lang="en-US" altLang="zh-CN" sz="2400" dirty="0" err="1">
+              <a:t>Multi-trial Averaging for tone-fit score</a:t>
+            </a:r>
+          </a:p>
+          <a:p>
+            <a:pPr marL="457200" indent="-457200">
+              <a:spcAft>
+                <a:spcPts val="600"/>
+              </a:spcAft>
+              <a:buFont typeface="Arial" panose="020B0604020202020204" pitchFamily="34" charset="0"/>
+              <a:buChar char="•"/>
+            </a:pPr>
+            <a:r>
+              <a:rPr lang="en-US" altLang="zh-CN" sz="3200" b="1" dirty="0">
                 <a:solidFill>
                   <a:srgbClr val="13294B"/>
                 </a:solidFill>
@@ -11335,10 +13494,34 @@
                 <a:ea typeface="宋体"/>
                 <a:cs typeface="Calibri"/>
               </a:rPr>
-              <a:t>Subhabrata</a:t>
-            </a:r>
-            <a:r>
-              <a:rPr lang="en-US" altLang="zh-CN" sz="2400" dirty="0">
+              <a:t>Incorporate more dimension in ECS</a:t>
+            </a:r>
+          </a:p>
+          <a:p>
+            <a:pPr marL="457200" indent="-457200">
+              <a:spcAft>
+                <a:spcPts val="600"/>
+              </a:spcAft>
+              <a:buFont typeface="Arial" panose="020B0604020202020204" pitchFamily="34" charset="0"/>
+              <a:buChar char="•"/>
+            </a:pPr>
+            <a:endParaRPr lang="en-US" altLang="zh-CN" sz="3200" b="1" dirty="0">
+              <a:solidFill>
+                <a:srgbClr val="13294B"/>
+              </a:solidFill>
+              <a:latin typeface="Calibri"/>
+              <a:ea typeface="宋体"/>
+              <a:cs typeface="Calibri"/>
+            </a:endParaRPr>
+          </a:p>
+          <a:p>
+            <a:pPr>
+              <a:spcAft>
+                <a:spcPts val="600"/>
+              </a:spcAft>
+            </a:pPr>
+            <a:r>
+              <a:rPr lang="en-US" altLang="zh-CN" sz="3200" b="1" dirty="0">
                 <a:solidFill>
                   <a:srgbClr val="13294B"/>
                 </a:solidFill>
@@ -11346,51 +13529,7 @@
                 <a:ea typeface="宋体"/>
                 <a:cs typeface="Calibri"/>
               </a:rPr>
-              <a:t> Mukherjee. 2026. </a:t>
-            </a:r>
-            <a:r>
-              <a:rPr lang="en-US" altLang="zh-CN" sz="2400" dirty="0">
-                <a:solidFill>
-                  <a:srgbClr val="FF5F05"/>
-                </a:solidFill>
-                <a:latin typeface="Calibri"/>
-                <a:ea typeface="宋体"/>
-                <a:cs typeface="Calibri"/>
-              </a:rPr>
-              <a:t>Heart: A unified benchmark for assessing humans and </a:t>
-            </a:r>
-            <a:r>
-              <a:rPr lang="en-US" altLang="zh-CN" sz="2400" dirty="0" err="1">
-                <a:solidFill>
-                  <a:srgbClr val="FF5F05"/>
-                </a:solidFill>
-                <a:latin typeface="Calibri"/>
-                <a:ea typeface="宋体"/>
-                <a:cs typeface="Calibri"/>
-              </a:rPr>
-              <a:t>llms</a:t>
-            </a:r>
-            <a:r>
-              <a:rPr lang="en-US" altLang="zh-CN" sz="2400" dirty="0">
-                <a:solidFill>
-                  <a:srgbClr val="FF5F05"/>
-                </a:solidFill>
-                <a:latin typeface="Calibri"/>
-                <a:ea typeface="宋体"/>
-                <a:cs typeface="Calibri"/>
-              </a:rPr>
-              <a:t> in emotional support dialogue</a:t>
-            </a:r>
-            <a:r>
-              <a:rPr lang="en-US" altLang="zh-CN" sz="2400" dirty="0">
-                <a:solidFill>
-                  <a:srgbClr val="13294B"/>
-                </a:solidFill>
-                <a:latin typeface="Calibri"/>
-                <a:ea typeface="宋体"/>
-                <a:cs typeface="Calibri"/>
-              </a:rPr>
-              <a:t>.</a:t>
+              <a:t> </a:t>
             </a:r>
           </a:p>
         </p:txBody>
@@ -11398,7 +13537,7 @@
     </p:spTree>
     <p:extLst>
       <p:ext uri="{BB962C8B-B14F-4D97-AF65-F5344CB8AC3E}">
-        <p14:creationId xmlns:p14="http://schemas.microsoft.com/office/powerpoint/2010/main" val="3947458893"/>
+        <p14:creationId xmlns:p14="http://schemas.microsoft.com/office/powerpoint/2010/main" val="1859779982"/>
       </p:ext>
     </p:extLst>
   </p:cSld>
@@ -12144,6 +14283,864 @@
 </p:sld>
 </file>
 
+<file path=ppt/slides/slide20.xml><?xml version="1.0" encoding="utf-8"?>
+<p:sld xmlns:a="http://schemas.openxmlformats.org/drawingml/2006/main" xmlns:r="http://schemas.openxmlformats.org/officeDocument/2006/relationships" xmlns:p="http://schemas.openxmlformats.org/presentationml/2006/main">
+  <p:cSld>
+    <p:spTree>
+      <p:nvGrpSpPr>
+        <p:cNvPr id="1" name="">
+          <a:extLst>
+            <a:ext uri="{FF2B5EF4-FFF2-40B4-BE49-F238E27FC236}">
+              <a16:creationId xmlns:a16="http://schemas.microsoft.com/office/drawing/2014/main" id="{132D79BF-ED01-067B-10A9-828B61A9DE19}"/>
+            </a:ext>
+          </a:extLst>
+        </p:cNvPr>
+        <p:cNvGrpSpPr/>
+        <p:nvPr/>
+      </p:nvGrpSpPr>
+      <p:grpSpPr>
+        <a:xfrm>
+          <a:off x="0" y="0"/>
+          <a:ext cx="0" cy="0"/>
+          <a:chOff x="0" y="0"/>
+          <a:chExt cx="0" cy="0"/>
+        </a:xfrm>
+      </p:grpSpPr>
+      <p:sp>
+        <p:nvSpPr>
+          <p:cNvPr id="3" name="图文框 2">
+            <a:extLst>
+              <a:ext uri="{FF2B5EF4-FFF2-40B4-BE49-F238E27FC236}">
+                <a16:creationId xmlns:a16="http://schemas.microsoft.com/office/drawing/2014/main" id="{F361CDB9-483A-E9B1-5401-DB5169718418}"/>
+              </a:ext>
+            </a:extLst>
+          </p:cNvPr>
+          <p:cNvSpPr/>
+          <p:nvPr/>
+        </p:nvSpPr>
+        <p:spPr>
+          <a:xfrm>
+            <a:off x="164147" y="282575"/>
+            <a:ext cx="11863705" cy="6403975"/>
+          </a:xfrm>
+          <a:prstGeom prst="frame">
+            <a:avLst>
+              <a:gd name="adj1" fmla="val 1196"/>
+            </a:avLst>
+          </a:prstGeom>
+          <a:solidFill>
+            <a:srgbClr val="13294B"/>
+          </a:solidFill>
+          <a:ln>
+            <a:solidFill>
+              <a:srgbClr val="13294B"/>
+            </a:solidFill>
+          </a:ln>
+          <a:effectLst>
+            <a:innerShdw blurRad="63500" dist="50800" dir="13500000">
+              <a:prstClr val="black">
+                <a:alpha val="50000"/>
+              </a:prstClr>
+            </a:innerShdw>
+          </a:effectLst>
+        </p:spPr>
+        <p:style>
+          <a:lnRef idx="2">
+            <a:schemeClr val="accent1">
+              <a:lumMod val="75000"/>
+            </a:schemeClr>
+          </a:lnRef>
+          <a:fillRef idx="1">
+            <a:schemeClr val="accent1"/>
+          </a:fillRef>
+          <a:effectRef idx="0">
+            <a:srgbClr val="FFFFFF"/>
+          </a:effectRef>
+          <a:fontRef idx="minor">
+            <a:schemeClr val="lt1"/>
+          </a:fontRef>
+        </p:style>
+        <p:txBody>
+          <a:bodyPr rtlCol="0" anchor="ctr"/>
+          <a:lstStyle/>
+          <a:p>
+            <a:pPr algn="ctr"/>
+            <a:endParaRPr lang="zh-CN" altLang="en-US"/>
+          </a:p>
+        </p:txBody>
+      </p:sp>
+      <p:sp>
+        <p:nvSpPr>
+          <p:cNvPr id="4" name="文本框 3">
+            <a:extLst>
+              <a:ext uri="{FF2B5EF4-FFF2-40B4-BE49-F238E27FC236}">
+                <a16:creationId xmlns:a16="http://schemas.microsoft.com/office/drawing/2014/main" id="{0EC7D77F-C731-B08D-E3AF-24869C9E7DD8}"/>
+              </a:ext>
+            </a:extLst>
+          </p:cNvPr>
+          <p:cNvSpPr txBox="1"/>
+          <p:nvPr/>
+        </p:nvSpPr>
+        <p:spPr>
+          <a:xfrm>
+            <a:off x="650457" y="614859"/>
+            <a:ext cx="9446043" cy="769441"/>
+          </a:xfrm>
+          <a:prstGeom prst="rect">
+            <a:avLst/>
+          </a:prstGeom>
+          <a:noFill/>
+        </p:spPr>
+        <p:txBody>
+          <a:bodyPr wrap="square" lIns="91440" tIns="45720" rIns="91440" bIns="45720" rtlCol="0" anchor="t">
+            <a:spAutoFit/>
+          </a:bodyPr>
+          <a:lstStyle/>
+          <a:p>
+            <a:r>
+              <a:rPr lang="en-US" altLang="zh-CN" sz="4400" b="1" dirty="0">
+                <a:solidFill>
+                  <a:srgbClr val="13294B"/>
+                </a:solidFill>
+                <a:latin typeface="Calibri"/>
+                <a:ea typeface="等线"/>
+                <a:cs typeface="+mj-lt"/>
+              </a:rPr>
+              <a:t>References</a:t>
+            </a:r>
+          </a:p>
+        </p:txBody>
+      </p:sp>
+      <p:sp>
+        <p:nvSpPr>
+          <p:cNvPr id="9" name="半闭框 8">
+            <a:extLst>
+              <a:ext uri="{FF2B5EF4-FFF2-40B4-BE49-F238E27FC236}">
+                <a16:creationId xmlns:a16="http://schemas.microsoft.com/office/drawing/2014/main" id="{26ED32FE-E210-F419-3665-A72391890294}"/>
+              </a:ext>
+            </a:extLst>
+          </p:cNvPr>
+          <p:cNvSpPr/>
+          <p:nvPr/>
+        </p:nvSpPr>
+        <p:spPr>
+          <a:xfrm>
+            <a:off x="163830" y="282575"/>
+            <a:ext cx="3148330" cy="2355215"/>
+          </a:xfrm>
+          <a:prstGeom prst="halfFrame">
+            <a:avLst>
+              <a:gd name="adj1" fmla="val 4756"/>
+              <a:gd name="adj2" fmla="val 5021"/>
+            </a:avLst>
+          </a:prstGeom>
+          <a:solidFill>
+            <a:srgbClr val="FF5F05"/>
+          </a:solidFill>
+          <a:ln>
+            <a:solidFill>
+              <a:srgbClr val="FF5F05"/>
+            </a:solidFill>
+          </a:ln>
+        </p:spPr>
+        <p:style>
+          <a:lnRef idx="2">
+            <a:schemeClr val="accent1">
+              <a:lumMod val="75000"/>
+            </a:schemeClr>
+          </a:lnRef>
+          <a:fillRef idx="1">
+            <a:schemeClr val="accent1"/>
+          </a:fillRef>
+          <a:effectRef idx="0">
+            <a:srgbClr val="FFFFFF"/>
+          </a:effectRef>
+          <a:fontRef idx="minor">
+            <a:schemeClr val="lt1"/>
+          </a:fontRef>
+        </p:style>
+        <p:txBody>
+          <a:bodyPr rtlCol="0" anchor="ctr"/>
+          <a:lstStyle/>
+          <a:p>
+            <a:pPr algn="ctr"/>
+            <a:endParaRPr lang="zh-CN" altLang="en-US">
+              <a:solidFill>
+                <a:schemeClr val="tx1"/>
+              </a:solidFill>
+            </a:endParaRPr>
+          </a:p>
+        </p:txBody>
+      </p:sp>
+      <p:sp>
+        <p:nvSpPr>
+          <p:cNvPr id="10" name="半闭框 9">
+            <a:extLst>
+              <a:ext uri="{FF2B5EF4-FFF2-40B4-BE49-F238E27FC236}">
+                <a16:creationId xmlns:a16="http://schemas.microsoft.com/office/drawing/2014/main" id="{DB9C76C6-520E-FD57-3D2F-9CBE4BC8EDEA}"/>
+              </a:ext>
+            </a:extLst>
+          </p:cNvPr>
+          <p:cNvSpPr/>
+          <p:nvPr>
+            <p:custDataLst>
+              <p:tags r:id="rId1"/>
+            </p:custDataLst>
+          </p:nvPr>
+        </p:nvSpPr>
+        <p:spPr>
+          <a:xfrm rot="10800000">
+            <a:off x="8357868" y="4262753"/>
+            <a:ext cx="3669983" cy="2423795"/>
+          </a:xfrm>
+          <a:prstGeom prst="halfFrame">
+            <a:avLst>
+              <a:gd name="adj1" fmla="val 4659"/>
+              <a:gd name="adj2" fmla="val 4349"/>
+            </a:avLst>
+          </a:prstGeom>
+          <a:solidFill>
+            <a:srgbClr val="FF5F05"/>
+          </a:solidFill>
+          <a:ln>
+            <a:solidFill>
+              <a:srgbClr val="FF5F05"/>
+            </a:solidFill>
+          </a:ln>
+        </p:spPr>
+        <p:style>
+          <a:lnRef idx="2">
+            <a:schemeClr val="accent1">
+              <a:lumMod val="75000"/>
+            </a:schemeClr>
+          </a:lnRef>
+          <a:fillRef idx="1">
+            <a:schemeClr val="accent1"/>
+          </a:fillRef>
+          <a:effectRef idx="0">
+            <a:srgbClr val="FFFFFF"/>
+          </a:effectRef>
+          <a:fontRef idx="minor">
+            <a:schemeClr val="lt1"/>
+          </a:fontRef>
+        </p:style>
+        <p:txBody>
+          <a:bodyPr rtlCol="0" anchor="ctr"/>
+          <a:lstStyle/>
+          <a:p>
+            <a:pPr algn="ctr"/>
+            <a:endParaRPr lang="zh-CN" altLang="en-US">
+              <a:solidFill>
+                <a:schemeClr val="tx1"/>
+              </a:solidFill>
+            </a:endParaRPr>
+          </a:p>
+        </p:txBody>
+      </p:sp>
+      <p:cxnSp>
+        <p:nvCxnSpPr>
+          <p:cNvPr id="13" name="直接连接符 12">
+            <a:extLst>
+              <a:ext uri="{FF2B5EF4-FFF2-40B4-BE49-F238E27FC236}">
+                <a16:creationId xmlns:a16="http://schemas.microsoft.com/office/drawing/2014/main" id="{22FF11B7-EE23-11CD-90E6-31B0D9C94502}"/>
+              </a:ext>
+            </a:extLst>
+          </p:cNvPr>
+          <p:cNvCxnSpPr/>
+          <p:nvPr/>
+        </p:nvCxnSpPr>
+        <p:spPr>
+          <a:xfrm>
+            <a:off x="650457" y="1480820"/>
+            <a:ext cx="6546850" cy="14605"/>
+          </a:xfrm>
+          <a:prstGeom prst="line">
+            <a:avLst/>
+          </a:prstGeom>
+          <a:ln w="57150">
+            <a:solidFill>
+              <a:srgbClr val="FF5F05">
+                <a:alpha val="81000"/>
+              </a:srgbClr>
+            </a:solidFill>
+          </a:ln>
+        </p:spPr>
+        <p:style>
+          <a:lnRef idx="2">
+            <a:schemeClr val="accent1"/>
+          </a:lnRef>
+          <a:fillRef idx="0">
+            <a:srgbClr val="FFFFFF"/>
+          </a:fillRef>
+          <a:effectRef idx="0">
+            <a:srgbClr val="FFFFFF"/>
+          </a:effectRef>
+          <a:fontRef idx="minor">
+            <a:schemeClr val="tx1"/>
+          </a:fontRef>
+        </p:style>
+      </p:cxnSp>
+      <p:pic>
+        <p:nvPicPr>
+          <p:cNvPr id="100" name="图片 99">
+            <a:extLst>
+              <a:ext uri="{FF2B5EF4-FFF2-40B4-BE49-F238E27FC236}">
+                <a16:creationId xmlns:a16="http://schemas.microsoft.com/office/drawing/2014/main" id="{2DFC5ECA-1FCF-2D31-54A1-2437E5B44571}"/>
+              </a:ext>
+            </a:extLst>
+          </p:cNvPr>
+          <p:cNvPicPr/>
+          <p:nvPr/>
+        </p:nvPicPr>
+        <p:blipFill>
+          <a:blip r:embed="rId4"/>
+          <a:stretch>
+            <a:fillRect/>
+          </a:stretch>
+        </p:blipFill>
+        <p:spPr>
+          <a:xfrm>
+            <a:off x="9906635" y="171450"/>
+            <a:ext cx="1906270" cy="1212850"/>
+          </a:xfrm>
+          <a:prstGeom prst="rect">
+            <a:avLst/>
+          </a:prstGeom>
+          <a:noFill/>
+          <a:ln w="9525">
+            <a:noFill/>
+          </a:ln>
+        </p:spPr>
+      </p:pic>
+      <p:sp>
+        <p:nvSpPr>
+          <p:cNvPr id="5" name="文本框 4">
+            <a:extLst>
+              <a:ext uri="{FF2B5EF4-FFF2-40B4-BE49-F238E27FC236}">
+                <a16:creationId xmlns:a16="http://schemas.microsoft.com/office/drawing/2014/main" id="{95F89DC6-1B5B-DDAA-D624-9F2535720DC8}"/>
+              </a:ext>
+            </a:extLst>
+          </p:cNvPr>
+          <p:cNvSpPr txBox="1"/>
+          <p:nvPr/>
+        </p:nvSpPr>
+        <p:spPr>
+          <a:xfrm>
+            <a:off x="613543" y="1741049"/>
+            <a:ext cx="10964912" cy="4462760"/>
+          </a:xfrm>
+          <a:prstGeom prst="rect">
+            <a:avLst/>
+          </a:prstGeom>
+          <a:noFill/>
+        </p:spPr>
+        <p:txBody>
+          <a:bodyPr wrap="square" lIns="91440" tIns="45720" rIns="91440" bIns="45720" rtlCol="0" anchor="t">
+            <a:spAutoFit/>
+          </a:bodyPr>
+          <a:lstStyle/>
+          <a:p>
+            <a:pPr marL="457200" indent="-457200">
+              <a:spcAft>
+                <a:spcPts val="600"/>
+              </a:spcAft>
+              <a:buFont typeface="Arial" panose="020B0604020202020204" pitchFamily="34" charset="0"/>
+              <a:buChar char="•"/>
+            </a:pPr>
+            <a:r>
+              <a:rPr lang="en-US" altLang="zh-CN" sz="2400" dirty="0">
+                <a:solidFill>
+                  <a:srgbClr val="13294B"/>
+                </a:solidFill>
+                <a:latin typeface="Calibri"/>
+                <a:ea typeface="宋体"/>
+                <a:cs typeface="Calibri"/>
+              </a:rPr>
+              <a:t>Stuart </a:t>
+            </a:r>
+            <a:r>
+              <a:rPr lang="en-US" altLang="zh-CN" sz="2400" dirty="0" err="1">
+                <a:solidFill>
+                  <a:srgbClr val="13294B"/>
+                </a:solidFill>
+                <a:latin typeface="Calibri"/>
+                <a:ea typeface="宋体"/>
+                <a:cs typeface="Calibri"/>
+              </a:rPr>
+              <a:t>Axelbrooke</a:t>
+            </a:r>
+            <a:r>
+              <a:rPr lang="en-US" altLang="zh-CN" sz="2400" dirty="0">
+                <a:solidFill>
+                  <a:srgbClr val="13294B"/>
+                </a:solidFill>
+                <a:latin typeface="Calibri"/>
+                <a:ea typeface="宋体"/>
+                <a:cs typeface="Calibri"/>
+              </a:rPr>
+              <a:t>. 2017. </a:t>
+            </a:r>
+            <a:r>
+              <a:rPr lang="en-US" altLang="zh-CN" sz="2400" dirty="0">
+                <a:solidFill>
+                  <a:srgbClr val="FF5F05"/>
+                </a:solidFill>
+                <a:latin typeface="Calibri"/>
+                <a:ea typeface="宋体"/>
+                <a:cs typeface="Calibri"/>
+              </a:rPr>
+              <a:t>Customer support on twitter</a:t>
+            </a:r>
+            <a:r>
+              <a:rPr lang="en-US" altLang="zh-CN" sz="2400" dirty="0">
+                <a:solidFill>
+                  <a:srgbClr val="13294B"/>
+                </a:solidFill>
+                <a:latin typeface="Calibri"/>
+                <a:ea typeface="宋体"/>
+                <a:cs typeface="Calibri"/>
+              </a:rPr>
+              <a:t>.</a:t>
+            </a:r>
+          </a:p>
+          <a:p>
+            <a:pPr marL="457200" indent="-457200">
+              <a:spcAft>
+                <a:spcPts val="600"/>
+              </a:spcAft>
+              <a:buFont typeface="Arial" panose="020B0604020202020204" pitchFamily="34" charset="0"/>
+              <a:buChar char="•"/>
+            </a:pPr>
+            <a:r>
+              <a:rPr lang="en-US" altLang="zh-CN" sz="2400" dirty="0">
+                <a:solidFill>
+                  <a:srgbClr val="13294B"/>
+                </a:solidFill>
+                <a:latin typeface="Calibri"/>
+                <a:ea typeface="宋体"/>
+                <a:cs typeface="Calibri"/>
+              </a:rPr>
+              <a:t>Adam Dahlgren Lindström, Leila </a:t>
+            </a:r>
+            <a:r>
+              <a:rPr lang="en-US" altLang="zh-CN" sz="2400" dirty="0" err="1">
+                <a:solidFill>
+                  <a:srgbClr val="13294B"/>
+                </a:solidFill>
+                <a:latin typeface="Calibri"/>
+                <a:ea typeface="宋体"/>
+                <a:cs typeface="Calibri"/>
+              </a:rPr>
+              <a:t>Methnani</a:t>
+            </a:r>
+            <a:r>
+              <a:rPr lang="en-US" altLang="zh-CN" sz="2400" dirty="0">
+                <a:solidFill>
+                  <a:srgbClr val="13294B"/>
+                </a:solidFill>
+                <a:latin typeface="Calibri"/>
+                <a:ea typeface="宋体"/>
+                <a:cs typeface="Calibri"/>
+              </a:rPr>
+              <a:t>, Lea Krause, Petter Ericson, </a:t>
+            </a:r>
+            <a:r>
+              <a:rPr lang="en-US" altLang="zh-CN" sz="2400" dirty="0" err="1">
+                <a:solidFill>
+                  <a:srgbClr val="13294B"/>
+                </a:solidFill>
+                <a:latin typeface="Calibri"/>
+                <a:ea typeface="宋体"/>
+                <a:cs typeface="Calibri"/>
+              </a:rPr>
+              <a:t>Íñigo</a:t>
+            </a:r>
+            <a:r>
+              <a:rPr lang="en-US" altLang="zh-CN" sz="2400" dirty="0">
+                <a:solidFill>
+                  <a:srgbClr val="13294B"/>
+                </a:solidFill>
+                <a:latin typeface="Calibri"/>
+                <a:ea typeface="宋体"/>
+                <a:cs typeface="Calibri"/>
+              </a:rPr>
+              <a:t> Martínez de </a:t>
+            </a:r>
+            <a:r>
+              <a:rPr lang="en-US" altLang="zh-CN" sz="2400" dirty="0" err="1">
+                <a:solidFill>
+                  <a:srgbClr val="13294B"/>
+                </a:solidFill>
+                <a:latin typeface="Calibri"/>
+                <a:ea typeface="宋体"/>
+                <a:cs typeface="Calibri"/>
+              </a:rPr>
+              <a:t>Rituerto</a:t>
+            </a:r>
+            <a:r>
+              <a:rPr lang="en-US" altLang="zh-CN" sz="2400" dirty="0">
+                <a:solidFill>
+                  <a:srgbClr val="13294B"/>
+                </a:solidFill>
+                <a:latin typeface="Calibri"/>
+                <a:ea typeface="宋体"/>
+                <a:cs typeface="Calibri"/>
+              </a:rPr>
+              <a:t> de Troya, Dimitri Coelho Mollo, and Roel Dobbe. 2025. </a:t>
+            </a:r>
+            <a:r>
+              <a:rPr lang="en-US" altLang="zh-CN" sz="2400" dirty="0">
+                <a:solidFill>
+                  <a:srgbClr val="FF5F05"/>
+                </a:solidFill>
+                <a:latin typeface="Calibri"/>
+                <a:ea typeface="宋体"/>
+                <a:cs typeface="Calibri"/>
+              </a:rPr>
+              <a:t>Helpful, harmless, honest? sociotechnical limits of AI alignment and safety through reinforcement learn </a:t>
+            </a:r>
+            <a:r>
+              <a:rPr lang="en-US" altLang="zh-CN" sz="2400" dirty="0" err="1">
+                <a:solidFill>
+                  <a:srgbClr val="FF5F05"/>
+                </a:solidFill>
+                <a:latin typeface="Calibri"/>
+                <a:ea typeface="宋体"/>
+                <a:cs typeface="Calibri"/>
+              </a:rPr>
+              <a:t>ing</a:t>
+            </a:r>
+            <a:r>
+              <a:rPr lang="en-US" altLang="zh-CN" sz="2400" dirty="0">
+                <a:solidFill>
+                  <a:srgbClr val="FF5F05"/>
+                </a:solidFill>
+                <a:latin typeface="Calibri"/>
+                <a:ea typeface="宋体"/>
+                <a:cs typeface="Calibri"/>
+              </a:rPr>
+              <a:t> from human feedback</a:t>
+            </a:r>
+            <a:r>
+              <a:rPr lang="en-US" altLang="zh-CN" sz="2400" dirty="0">
+                <a:solidFill>
+                  <a:srgbClr val="13294B"/>
+                </a:solidFill>
+                <a:latin typeface="Calibri"/>
+                <a:ea typeface="宋体"/>
+                <a:cs typeface="Calibri"/>
+              </a:rPr>
+              <a:t>. </a:t>
+            </a:r>
+            <a:r>
+              <a:rPr lang="en-US" altLang="zh-CN" sz="2400" i="1" dirty="0">
+                <a:solidFill>
+                  <a:srgbClr val="13294B"/>
+                </a:solidFill>
+                <a:latin typeface="Calibri"/>
+                <a:ea typeface="宋体"/>
+                <a:cs typeface="Calibri"/>
+              </a:rPr>
+              <a:t>Ethics and Information Technology</a:t>
+            </a:r>
+            <a:r>
+              <a:rPr lang="en-US" altLang="zh-CN" sz="2400" dirty="0">
+                <a:solidFill>
+                  <a:srgbClr val="13294B"/>
+                </a:solidFill>
+                <a:latin typeface="Calibri"/>
+                <a:ea typeface="宋体"/>
+                <a:cs typeface="Calibri"/>
+              </a:rPr>
+              <a:t>, 27(2):28. </a:t>
+            </a:r>
+            <a:r>
+              <a:rPr lang="en-US" altLang="zh-CN" sz="2400" dirty="0" err="1">
+                <a:solidFill>
+                  <a:srgbClr val="13294B"/>
+                </a:solidFill>
+                <a:latin typeface="Calibri"/>
+                <a:ea typeface="宋体"/>
+                <a:cs typeface="Calibri"/>
+              </a:rPr>
+              <a:t>Epub</a:t>
+            </a:r>
+            <a:r>
+              <a:rPr lang="en-US" altLang="zh-CN" sz="2400" dirty="0">
+                <a:solidFill>
+                  <a:srgbClr val="13294B"/>
+                </a:solidFill>
+                <a:latin typeface="Calibri"/>
+                <a:ea typeface="宋体"/>
+                <a:cs typeface="Calibri"/>
+              </a:rPr>
+              <a:t> 2025 Jun 4.</a:t>
+            </a:r>
+          </a:p>
+          <a:p>
+            <a:pPr marL="457200" indent="-457200">
+              <a:spcAft>
+                <a:spcPts val="600"/>
+              </a:spcAft>
+              <a:buFont typeface="Arial" panose="020B0604020202020204" pitchFamily="34" charset="0"/>
+              <a:buChar char="•"/>
+            </a:pPr>
+            <a:r>
+              <a:rPr lang="en-US" altLang="zh-CN" sz="2400" dirty="0">
+                <a:solidFill>
+                  <a:srgbClr val="13294B"/>
+                </a:solidFill>
+                <a:latin typeface="Calibri"/>
+                <a:ea typeface="宋体"/>
+                <a:cs typeface="Calibri"/>
+              </a:rPr>
+              <a:t>Yuna Hong, </a:t>
+            </a:r>
+            <a:r>
+              <a:rPr lang="en-US" altLang="zh-CN" sz="2400" dirty="0" err="1">
+                <a:solidFill>
+                  <a:srgbClr val="13294B"/>
+                </a:solidFill>
+                <a:latin typeface="Calibri"/>
+                <a:ea typeface="宋体"/>
+                <a:cs typeface="Calibri"/>
+              </a:rPr>
+              <a:t>Bonhwa</a:t>
+            </a:r>
+            <a:r>
+              <a:rPr lang="en-US" altLang="zh-CN" sz="2400" dirty="0">
+                <a:solidFill>
+                  <a:srgbClr val="13294B"/>
+                </a:solidFill>
+                <a:latin typeface="Calibri"/>
+                <a:ea typeface="宋体"/>
+                <a:cs typeface="Calibri"/>
+              </a:rPr>
+              <a:t> Ku, and </a:t>
+            </a:r>
+            <a:r>
+              <a:rPr lang="en-US" altLang="zh-CN" sz="2400" dirty="0" err="1">
+                <a:solidFill>
+                  <a:srgbClr val="13294B"/>
+                </a:solidFill>
+                <a:latin typeface="Calibri"/>
+                <a:ea typeface="宋体"/>
+                <a:cs typeface="Calibri"/>
+              </a:rPr>
+              <a:t>Hanseok</a:t>
+            </a:r>
+            <a:r>
+              <a:rPr lang="en-US" altLang="zh-CN" sz="2400" dirty="0">
+                <a:solidFill>
+                  <a:srgbClr val="13294B"/>
+                </a:solidFill>
+                <a:latin typeface="Calibri"/>
+                <a:ea typeface="宋体"/>
+                <a:cs typeface="Calibri"/>
+              </a:rPr>
+              <a:t> Ko. 2025. </a:t>
+            </a:r>
+            <a:r>
+              <a:rPr lang="en-US" altLang="zh-CN" sz="2400" dirty="0">
+                <a:solidFill>
+                  <a:srgbClr val="FF5F05"/>
+                </a:solidFill>
+                <a:latin typeface="Calibri"/>
+                <a:ea typeface="宋体"/>
+                <a:cs typeface="Calibri"/>
+              </a:rPr>
+              <a:t>Performance evaluation metrics for empathetic </a:t>
+            </a:r>
+            <a:r>
+              <a:rPr lang="en-US" altLang="zh-CN" sz="2400" dirty="0" err="1">
+                <a:solidFill>
+                  <a:srgbClr val="FF5F05"/>
+                </a:solidFill>
+                <a:latin typeface="Calibri"/>
+                <a:ea typeface="宋体"/>
+                <a:cs typeface="Calibri"/>
+              </a:rPr>
+              <a:t>llms</a:t>
+            </a:r>
+            <a:r>
+              <a:rPr lang="en-US" altLang="zh-CN" sz="2400" dirty="0">
+                <a:solidFill>
+                  <a:srgbClr val="13294B"/>
+                </a:solidFill>
+                <a:latin typeface="Calibri"/>
+                <a:ea typeface="宋体"/>
+                <a:cs typeface="Calibri"/>
+              </a:rPr>
+              <a:t>. </a:t>
+            </a:r>
+            <a:r>
+              <a:rPr lang="en-US" altLang="zh-CN" sz="2400" i="1" dirty="0">
+                <a:solidFill>
+                  <a:srgbClr val="13294B"/>
+                </a:solidFill>
+                <a:latin typeface="Calibri"/>
+                <a:ea typeface="宋体"/>
+                <a:cs typeface="Calibri"/>
+              </a:rPr>
+              <a:t>Information</a:t>
+            </a:r>
+            <a:r>
+              <a:rPr lang="en-US" altLang="zh-CN" sz="2400" dirty="0">
+                <a:solidFill>
+                  <a:srgbClr val="13294B"/>
+                </a:solidFill>
+                <a:latin typeface="Calibri"/>
+                <a:ea typeface="宋体"/>
+                <a:cs typeface="Calibri"/>
+              </a:rPr>
+              <a:t>, 16(11).</a:t>
+            </a:r>
+          </a:p>
+          <a:p>
+            <a:pPr marL="457200" indent="-457200">
+              <a:spcAft>
+                <a:spcPts val="600"/>
+              </a:spcAft>
+              <a:buFont typeface="Arial" panose="020B0604020202020204" pitchFamily="34" charset="0"/>
+              <a:buChar char="•"/>
+            </a:pPr>
+            <a:r>
+              <a:rPr lang="en-US" altLang="zh-CN" sz="2400" dirty="0">
+                <a:solidFill>
+                  <a:srgbClr val="13294B"/>
+                </a:solidFill>
+                <a:latin typeface="Calibri"/>
+                <a:ea typeface="宋体"/>
+                <a:cs typeface="Calibri"/>
+              </a:rPr>
+              <a:t>Laya Iyer, Kriti Aggarwal, </a:t>
+            </a:r>
+            <a:r>
+              <a:rPr lang="en-US" altLang="zh-CN" sz="2400" dirty="0" err="1">
+                <a:solidFill>
+                  <a:srgbClr val="13294B"/>
+                </a:solidFill>
+                <a:latin typeface="Calibri"/>
+                <a:ea typeface="宋体"/>
+                <a:cs typeface="Calibri"/>
+              </a:rPr>
+              <a:t>Sanmi</a:t>
+            </a:r>
+            <a:r>
+              <a:rPr lang="en-US" altLang="zh-CN" sz="2400" dirty="0">
+                <a:solidFill>
+                  <a:srgbClr val="13294B"/>
+                </a:solidFill>
+                <a:latin typeface="Calibri"/>
+                <a:ea typeface="宋体"/>
+                <a:cs typeface="Calibri"/>
+              </a:rPr>
+              <a:t> </a:t>
+            </a:r>
+            <a:r>
+              <a:rPr lang="en-US" altLang="zh-CN" sz="2400" dirty="0" err="1">
+                <a:solidFill>
+                  <a:srgbClr val="13294B"/>
+                </a:solidFill>
+                <a:latin typeface="Calibri"/>
+                <a:ea typeface="宋体"/>
+                <a:cs typeface="Calibri"/>
+              </a:rPr>
+              <a:t>Koyejo</a:t>
+            </a:r>
+            <a:r>
+              <a:rPr lang="en-US" altLang="zh-CN" sz="2400" dirty="0">
+                <a:solidFill>
+                  <a:srgbClr val="13294B"/>
+                </a:solidFill>
+                <a:latin typeface="Calibri"/>
+                <a:ea typeface="宋体"/>
+                <a:cs typeface="Calibri"/>
+              </a:rPr>
+              <a:t>, Gail Heyman, Desmond C. Ong, and </a:t>
+            </a:r>
+            <a:r>
+              <a:rPr lang="en-US" altLang="zh-CN" sz="2400" dirty="0" err="1">
+                <a:solidFill>
+                  <a:srgbClr val="13294B"/>
+                </a:solidFill>
+                <a:latin typeface="Calibri"/>
+                <a:ea typeface="宋体"/>
+                <a:cs typeface="Calibri"/>
+              </a:rPr>
+              <a:t>Subhabrata</a:t>
+            </a:r>
+            <a:r>
+              <a:rPr lang="en-US" altLang="zh-CN" sz="2400" dirty="0">
+                <a:solidFill>
+                  <a:srgbClr val="13294B"/>
+                </a:solidFill>
+                <a:latin typeface="Calibri"/>
+                <a:ea typeface="宋体"/>
+                <a:cs typeface="Calibri"/>
+              </a:rPr>
+              <a:t> Mukherjee. 2026. </a:t>
+            </a:r>
+            <a:r>
+              <a:rPr lang="en-US" altLang="zh-CN" sz="2400" dirty="0">
+                <a:solidFill>
+                  <a:srgbClr val="FF5F05"/>
+                </a:solidFill>
+                <a:latin typeface="Calibri"/>
+                <a:ea typeface="宋体"/>
+                <a:cs typeface="Calibri"/>
+              </a:rPr>
+              <a:t>Heart: A unified benchmark for assessing humans and </a:t>
+            </a:r>
+            <a:r>
+              <a:rPr lang="en-US" altLang="zh-CN" sz="2400" dirty="0" err="1">
+                <a:solidFill>
+                  <a:srgbClr val="FF5F05"/>
+                </a:solidFill>
+                <a:latin typeface="Calibri"/>
+                <a:ea typeface="宋体"/>
+                <a:cs typeface="Calibri"/>
+              </a:rPr>
+              <a:t>llms</a:t>
+            </a:r>
+            <a:r>
+              <a:rPr lang="en-US" altLang="zh-CN" sz="2400" dirty="0">
+                <a:solidFill>
+                  <a:srgbClr val="FF5F05"/>
+                </a:solidFill>
+                <a:latin typeface="Calibri"/>
+                <a:ea typeface="宋体"/>
+                <a:cs typeface="Calibri"/>
+              </a:rPr>
+              <a:t> in emotional support dialogue</a:t>
+            </a:r>
+            <a:r>
+              <a:rPr lang="en-US" altLang="zh-CN" sz="2400" dirty="0">
+                <a:solidFill>
+                  <a:srgbClr val="13294B"/>
+                </a:solidFill>
+                <a:latin typeface="Calibri"/>
+                <a:ea typeface="宋体"/>
+                <a:cs typeface="Calibri"/>
+              </a:rPr>
+              <a:t>.</a:t>
+            </a:r>
+          </a:p>
+        </p:txBody>
+      </p:sp>
+    </p:spTree>
+    <p:extLst>
+      <p:ext uri="{BB962C8B-B14F-4D97-AF65-F5344CB8AC3E}">
+        <p14:creationId xmlns:p14="http://schemas.microsoft.com/office/powerpoint/2010/main" val="3947458893"/>
+      </p:ext>
+    </p:extLst>
+  </p:cSld>
+  <p:clrMapOvr>
+    <a:masterClrMapping/>
+  </p:clrMapOvr>
+</p:sld>
+</file>
+
 <file path=ppt/slides/slide3.xml><?xml version="1.0" encoding="utf-8"?>
 <p:sld xmlns:a="http://schemas.openxmlformats.org/drawingml/2006/main" xmlns:r="http://schemas.openxmlformats.org/officeDocument/2006/relationships" xmlns:p="http://schemas.openxmlformats.org/presentationml/2006/main">
   <p:cSld>
@@ -12984,7 +15981,7 @@
                 <a:ea typeface="宋体"/>
                 <a:cs typeface="Calibri"/>
               </a:rPr>
-              <a:t>Is this empathy miscalibration consistent across industry domains, or does it vary by context—specifically between airlines and telecom?</a:t>
+              <a:t>Is this empathy miscalibration consistent across industry domains, or does it vary by context—specifically between airlines and technology support (telecom/apple/amazon)?</a:t>
             </a:r>
           </a:p>
         </p:txBody>
@@ -15055,7 +18052,7 @@
         <p:cNvPr id="1" name="">
           <a:extLst>
             <a:ext uri="{FF2B5EF4-FFF2-40B4-BE49-F238E27FC236}">
-              <a16:creationId xmlns:a16="http://schemas.microsoft.com/office/drawing/2014/main" id="{5924EE15-657C-E1BE-12BC-396E28BED21E}"/>
+              <a16:creationId xmlns:a16="http://schemas.microsoft.com/office/drawing/2014/main" id="{F91C1AA8-633B-0E63-2970-BD86F8762D1B}"/>
             </a:ext>
           </a:extLst>
         </p:cNvPr>
@@ -15075,7 +18072,7 @@
           <p:cNvPr id="3" name="图文框 2">
             <a:extLst>
               <a:ext uri="{FF2B5EF4-FFF2-40B4-BE49-F238E27FC236}">
-                <a16:creationId xmlns:a16="http://schemas.microsoft.com/office/drawing/2014/main" id="{AF05072A-D479-E840-B88F-DF8176D606C0}"/>
+                <a16:creationId xmlns:a16="http://schemas.microsoft.com/office/drawing/2014/main" id="{4B77FF07-F70A-99F9-00AD-A86B7D404F83}"/>
               </a:ext>
             </a:extLst>
           </p:cNvPr>
@@ -15138,7 +18135,7 @@
           <p:cNvPr id="4" name="文本框 3">
             <a:extLst>
               <a:ext uri="{FF2B5EF4-FFF2-40B4-BE49-F238E27FC236}">
-                <a16:creationId xmlns:a16="http://schemas.microsoft.com/office/drawing/2014/main" id="{2C1F6BDC-B7C9-D88B-FC8A-17F809BE126B}"/>
+                <a16:creationId xmlns:a16="http://schemas.microsoft.com/office/drawing/2014/main" id="{3CACD4F5-9F2B-162D-72C5-415101AEBE2F}"/>
               </a:ext>
             </a:extLst>
           </p:cNvPr>
@@ -15180,7 +18177,7 @@
           <p:cNvPr id="9" name="半闭框 8">
             <a:extLst>
               <a:ext uri="{FF2B5EF4-FFF2-40B4-BE49-F238E27FC236}">
-                <a16:creationId xmlns:a16="http://schemas.microsoft.com/office/drawing/2014/main" id="{94AAEBAE-9D2F-9263-05DC-ECECE2320254}"/>
+                <a16:creationId xmlns:a16="http://schemas.microsoft.com/office/drawing/2014/main" id="{D0B68E8D-E966-97DF-5398-77C29D8139C3}"/>
               </a:ext>
             </a:extLst>
           </p:cNvPr>
@@ -15241,7 +18238,7 @@
           <p:cNvPr id="10" name="半闭框 9">
             <a:extLst>
               <a:ext uri="{FF2B5EF4-FFF2-40B4-BE49-F238E27FC236}">
-                <a16:creationId xmlns:a16="http://schemas.microsoft.com/office/drawing/2014/main" id="{FE586475-6379-515B-A8C7-357240F33B6B}"/>
+                <a16:creationId xmlns:a16="http://schemas.microsoft.com/office/drawing/2014/main" id="{B74D2438-1FC5-C43E-152F-7C8EB19255D4}"/>
               </a:ext>
             </a:extLst>
           </p:cNvPr>
@@ -15306,7 +18303,7 @@
           <p:cNvPr id="13" name="直接连接符 12">
             <a:extLst>
               <a:ext uri="{FF2B5EF4-FFF2-40B4-BE49-F238E27FC236}">
-                <a16:creationId xmlns:a16="http://schemas.microsoft.com/office/drawing/2014/main" id="{CADDF9A0-848B-41BB-ED8B-EEDD7C7754A6}"/>
+                <a16:creationId xmlns:a16="http://schemas.microsoft.com/office/drawing/2014/main" id="{2EB71867-BC2D-37F6-D2FE-B19B1046FA09}"/>
               </a:ext>
             </a:extLst>
           </p:cNvPr>
@@ -15349,7 +18346,7 @@
           <p:cNvPr id="100" name="图片 99">
             <a:extLst>
               <a:ext uri="{FF2B5EF4-FFF2-40B4-BE49-F238E27FC236}">
-                <a16:creationId xmlns:a16="http://schemas.microsoft.com/office/drawing/2014/main" id="{BBFAD97B-9ECD-B243-06E5-0C59695D79CB}"/>
+                <a16:creationId xmlns:a16="http://schemas.microsoft.com/office/drawing/2014/main" id="{B9C01B72-ACDA-3241-6442-2283ED4AD889}"/>
               </a:ext>
             </a:extLst>
           </p:cNvPr>
@@ -15381,7 +18378,7 @@
           <p:cNvPr id="5" name="文本框 4">
             <a:extLst>
               <a:ext uri="{FF2B5EF4-FFF2-40B4-BE49-F238E27FC236}">
-                <a16:creationId xmlns:a16="http://schemas.microsoft.com/office/drawing/2014/main" id="{983ADD24-6931-539A-526C-9EE7C3AE6976}"/>
+                <a16:creationId xmlns:a16="http://schemas.microsoft.com/office/drawing/2014/main" id="{22D702D2-7240-025C-D1AF-F04EAF2D2C46}"/>
               </a:ext>
             </a:extLst>
           </p:cNvPr>
@@ -15425,214 +18422,524 @@
           </a:p>
         </p:txBody>
       </p:sp>
-      <p:graphicFrame>
-        <p:nvGraphicFramePr>
-          <p:cNvPr id="2" name="表格 1">
-            <a:extLst>
-              <a:ext uri="{FF2B5EF4-FFF2-40B4-BE49-F238E27FC236}">
-                <a16:creationId xmlns:a16="http://schemas.microsoft.com/office/drawing/2014/main" id="{5B173359-1CCA-714D-463D-B6A0401E7C9C}"/>
-              </a:ext>
-            </a:extLst>
-          </p:cNvPr>
-          <p:cNvGraphicFramePr>
-            <a:graphicFrameLocks noGrp="1"/>
-          </p:cNvGraphicFramePr>
-          <p:nvPr>
-            <p:extLst>
-              <p:ext uri="{D42A27DB-BD31-4B8C-83A1-F6EECF244321}">
-                <p14:modId xmlns:p14="http://schemas.microsoft.com/office/powerpoint/2010/main" val="2090334612"/>
-              </p:ext>
-            </p:extLst>
-          </p:nvPr>
-        </p:nvGraphicFramePr>
-        <p:xfrm>
-          <a:off x="914401" y="3803152"/>
-          <a:ext cx="10469571" cy="2533953"/>
-        </p:xfrm>
-        <a:graphic>
-          <a:graphicData uri="http://schemas.openxmlformats.org/drawingml/2006/table">
-            <a:tbl>
-              <a:tblPr firstRow="1" bandRow="1">
-                <a:tableStyleId>{21E4AEA4-8DFA-4A89-87EB-49C32662AFE0}</a:tableStyleId>
-              </a:tblPr>
-              <a:tblGrid>
-                <a:gridCol w="3489857">
-                  <a:extLst>
-                    <a:ext uri="{9D8B030D-6E8A-4147-A177-3AD203B41FA5}">
-                      <a16:colId xmlns:a16="http://schemas.microsoft.com/office/drawing/2014/main" val="2473411904"/>
-                    </a:ext>
-                  </a:extLst>
-                </a:gridCol>
-                <a:gridCol w="3489857">
-                  <a:extLst>
-                    <a:ext uri="{9D8B030D-6E8A-4147-A177-3AD203B41FA5}">
-                      <a16:colId xmlns:a16="http://schemas.microsoft.com/office/drawing/2014/main" val="1406048790"/>
-                    </a:ext>
-                  </a:extLst>
-                </a:gridCol>
-                <a:gridCol w="3489857">
-                  <a:extLst>
-                    <a:ext uri="{9D8B030D-6E8A-4147-A177-3AD203B41FA5}">
-                      <a16:colId xmlns:a16="http://schemas.microsoft.com/office/drawing/2014/main" val="3813345470"/>
-                    </a:ext>
-                  </a:extLst>
-                </a:gridCol>
-              </a:tblGrid>
-              <a:tr h="317802">
-                <a:tc>
-                  <a:txBody>
-                    <a:bodyPr/>
-                    <a:lstStyle/>
-                    <a:p>
-                      <a:r>
-                        <a:rPr lang="en-US" altLang="zh-CN" dirty="0"/>
-                        <a:t>Dimension</a:t>
-                      </a:r>
-                      <a:endParaRPr lang="zh-CN" altLang="en-US" dirty="0"/>
-                    </a:p>
-                  </a:txBody>
-                  <a:tcPr/>
-                </a:tc>
-                <a:tc>
-                  <a:txBody>
-                    <a:bodyPr/>
-                    <a:lstStyle/>
-                    <a:p>
-                      <a:r>
-                        <a:rPr lang="en-US" altLang="zh-CN" dirty="0"/>
-                        <a:t>Measurement</a:t>
-                      </a:r>
-                      <a:endParaRPr lang="zh-CN" altLang="en-US" dirty="0"/>
-                    </a:p>
-                  </a:txBody>
-                  <a:tcPr/>
-                </a:tc>
-                <a:tc>
-                  <a:txBody>
-                    <a:bodyPr/>
-                    <a:lstStyle/>
-                    <a:p>
-                      <a:r>
-                        <a:rPr lang="en-US" altLang="zh-CN" dirty="0"/>
-                        <a:t>Weight at high FIS</a:t>
-                      </a:r>
-                      <a:endParaRPr lang="zh-CN" altLang="en-US" dirty="0"/>
-                    </a:p>
-                  </a:txBody>
-                  <a:tcPr/>
-                </a:tc>
+      <mc:AlternateContent xmlns:mc="http://schemas.openxmlformats.org/markup-compatibility/2006">
+        <mc:Choice xmlns:a14="http://schemas.microsoft.com/office/drawing/2010/main" Requires="a14">
+          <p:graphicFrame>
+            <p:nvGraphicFramePr>
+              <p:cNvPr id="2" name="表格 1">
                 <a:extLst>
-                  <a:ext uri="{0D108BD9-81ED-4DB2-BD59-A6C34878D82A}">
-                    <a16:rowId xmlns:a16="http://schemas.microsoft.com/office/drawing/2014/main" val="208840510"/>
+                  <a:ext uri="{FF2B5EF4-FFF2-40B4-BE49-F238E27FC236}">
+                    <a16:creationId xmlns:a16="http://schemas.microsoft.com/office/drawing/2014/main" id="{EBEB3E93-8E77-9C44-4C4D-10AF22356183}"/>
                   </a:ext>
                 </a:extLst>
-              </a:tr>
-              <a:tr h="783620">
-                <a:tc>
-                  <a:txBody>
-                    <a:bodyPr/>
-                    <a:lstStyle/>
-                    <a:p>
-                      <a:r>
-                        <a:rPr lang="en-US" altLang="zh-CN" dirty="0"/>
-                        <a:t>Apology density</a:t>
-                      </a:r>
-                      <a:endParaRPr lang="zh-CN" altLang="en-US" dirty="0"/>
-                    </a:p>
-                  </a:txBody>
-                  <a:tcPr/>
-                </a:tc>
-                <a:tc>
-                  <a:txBody>
-                    <a:bodyPr/>
-                    <a:lstStyle/>
-                    <a:p>
-                      <a:r>
-                        <a:rPr lang="en-US" altLang="zh-CN" dirty="0"/>
-                        <a:t>Normalized count of apology/regret terms (regex). Fully auto mated.</a:t>
-                      </a:r>
-                      <a:endParaRPr lang="zh-CN" altLang="en-US" dirty="0"/>
-                    </a:p>
-                  </a:txBody>
-                  <a:tcPr/>
-                </a:tc>
-                <a:tc>
-                  <a:txBody>
-                    <a:bodyPr/>
-                    <a:lstStyle/>
-                    <a:p>
-                      <a:r>
-                        <a:rPr lang="en-US" altLang="zh-CN" dirty="0"/>
-                        <a:t>Higher weight</a:t>
-                      </a:r>
-                      <a:endParaRPr lang="zh-CN" altLang="en-US" dirty="0"/>
-                    </a:p>
-                  </a:txBody>
-                  <a:tcPr/>
-                </a:tc>
+              </p:cNvPr>
+              <p:cNvGraphicFramePr>
+                <a:graphicFrameLocks noGrp="1"/>
+              </p:cNvGraphicFramePr>
+              <p:nvPr>
+                <p:extLst>
+                  <p:ext uri="{D42A27DB-BD31-4B8C-83A1-F6EECF244321}">
+                    <p14:modId xmlns:p14="http://schemas.microsoft.com/office/powerpoint/2010/main" val="3421086298"/>
+                  </p:ext>
+                </p:extLst>
+              </p:nvPr>
+            </p:nvGraphicFramePr>
+            <p:xfrm>
+              <a:off x="914401" y="3803152"/>
+              <a:ext cx="10469571" cy="2664890"/>
+            </p:xfrm>
+            <a:graphic>
+              <a:graphicData uri="http://schemas.openxmlformats.org/drawingml/2006/table">
+                <a:tbl>
+                  <a:tblPr firstRow="1" bandRow="1">
+                    <a:tableStyleId>{21E4AEA4-8DFA-4A89-87EB-49C32662AFE0}</a:tableStyleId>
+                  </a:tblPr>
+                  <a:tblGrid>
+                    <a:gridCol w="3489857">
+                      <a:extLst>
+                        <a:ext uri="{9D8B030D-6E8A-4147-A177-3AD203B41FA5}">
+                          <a16:colId xmlns:a16="http://schemas.microsoft.com/office/drawing/2014/main" val="2473411904"/>
+                        </a:ext>
+                      </a:extLst>
+                    </a:gridCol>
+                    <a:gridCol w="3489857">
+                      <a:extLst>
+                        <a:ext uri="{9D8B030D-6E8A-4147-A177-3AD203B41FA5}">
+                          <a16:colId xmlns:a16="http://schemas.microsoft.com/office/drawing/2014/main" val="1406048790"/>
+                        </a:ext>
+                      </a:extLst>
+                    </a:gridCol>
+                    <a:gridCol w="3489857">
+                      <a:extLst>
+                        <a:ext uri="{9D8B030D-6E8A-4147-A177-3AD203B41FA5}">
+                          <a16:colId xmlns:a16="http://schemas.microsoft.com/office/drawing/2014/main" val="3813345470"/>
+                        </a:ext>
+                      </a:extLst>
+                    </a:gridCol>
+                  </a:tblGrid>
+                  <a:tr h="317802">
+                    <a:tc>
+                      <a:txBody>
+                        <a:bodyPr/>
+                        <a:lstStyle/>
+                        <a:p>
+                          <a:r>
+                            <a:rPr lang="en-US" altLang="zh-CN" dirty="0"/>
+                            <a:t>Dimension</a:t>
+                          </a:r>
+                          <a:endParaRPr lang="zh-CN" altLang="en-US" dirty="0"/>
+                        </a:p>
+                      </a:txBody>
+                      <a:tcPr/>
+                    </a:tc>
+                    <a:tc>
+                      <a:txBody>
+                        <a:bodyPr/>
+                        <a:lstStyle/>
+                        <a:p>
+                          <a:r>
+                            <a:rPr lang="en-US" altLang="zh-CN" dirty="0"/>
+                            <a:t>Measurement</a:t>
+                          </a:r>
+                          <a:endParaRPr lang="zh-CN" altLang="en-US" dirty="0"/>
+                        </a:p>
+                      </a:txBody>
+                      <a:tcPr/>
+                    </a:tc>
+                    <a:tc>
+                      <a:txBody>
+                        <a:bodyPr/>
+                        <a:lstStyle/>
+                        <a:p>
+                          <a:r>
+                            <a:rPr lang="en-US" altLang="zh-CN" dirty="0"/>
+                            <a:t>Weight at high FIS</a:t>
+                          </a:r>
+                          <a:endParaRPr lang="zh-CN" altLang="en-US" dirty="0"/>
+                        </a:p>
+                      </a:txBody>
+                      <a:tcPr/>
+                    </a:tc>
+                    <a:extLst>
+                      <a:ext uri="{0D108BD9-81ED-4DB2-BD59-A6C34878D82A}">
+                        <a16:rowId xmlns:a16="http://schemas.microsoft.com/office/drawing/2014/main" val="208840510"/>
+                      </a:ext>
+                    </a:extLst>
+                  </a:tr>
+                  <a:tr h="783620">
+                    <a:tc>
+                      <a:txBody>
+                        <a:bodyPr/>
+                        <a:lstStyle/>
+                        <a:p>
+                          <a:r>
+                            <a:rPr lang="en-US" altLang="zh-CN" dirty="0"/>
+                            <a:t>Apology density</a:t>
+                          </a:r>
+                          <a:endParaRPr lang="zh-CN" altLang="en-US" dirty="0"/>
+                        </a:p>
+                      </a:txBody>
+                      <a:tcPr/>
+                    </a:tc>
+                    <a:tc>
+                      <a:txBody>
+                        <a:bodyPr/>
+                        <a:lstStyle/>
+                        <a:p>
+                          <a:r>
+                            <a:rPr lang="en-US" dirty="0"/>
+                            <a:t>Square-root transformed frequency of apology terms.</a:t>
+                          </a:r>
+                        </a:p>
+                        <a:p>
+                          <a14:m>
+                            <m:oMathPara xmlns:m="http://schemas.openxmlformats.org/officeDocument/2006/math">
+                              <m:oMathParaPr>
+                                <m:jc m:val="centerGroup"/>
+                              </m:oMathParaPr>
+                              <m:oMath xmlns:m="http://schemas.openxmlformats.org/officeDocument/2006/math">
+                                <m:rad>
+                                  <m:radPr>
+                                    <m:degHide m:val="on"/>
+                                    <m:ctrlPr>
+                                      <a:rPr lang="en-US" altLang="zh-CN" sz="900" i="1" smtClean="0">
+                                        <a:latin typeface="Cambria Math" panose="02040503050406030204" pitchFamily="18" charset="0"/>
+                                      </a:rPr>
+                                    </m:ctrlPr>
+                                  </m:radPr>
+                                  <m:deg/>
+                                  <m:e>
+                                    <m:f>
+                                      <m:fPr>
+                                        <m:ctrlPr>
+                                          <a:rPr lang="en-US" altLang="zh-CN" sz="900" i="1" smtClean="0">
+                                            <a:latin typeface="Cambria Math" panose="02040503050406030204" pitchFamily="18" charset="0"/>
+                                          </a:rPr>
+                                        </m:ctrlPr>
+                                      </m:fPr>
+                                      <m:num>
+                                        <m:r>
+                                          <a:rPr lang="en-US" altLang="zh-CN" sz="900" b="0" i="1" smtClean="0">
+                                            <a:latin typeface="Cambria Math" panose="02040503050406030204" pitchFamily="18" charset="0"/>
+                                          </a:rPr>
+                                          <m:t>𝐶𝑜𝑢𝑛𝑡</m:t>
+                                        </m:r>
+                                        <m:r>
+                                          <a:rPr lang="en-US" altLang="zh-CN" sz="900" b="0" i="1" smtClean="0">
+                                            <a:latin typeface="Cambria Math" panose="02040503050406030204" pitchFamily="18" charset="0"/>
+                                          </a:rPr>
+                                          <m:t> </m:t>
+                                        </m:r>
+                                        <m:r>
+                                          <a:rPr lang="en-US" altLang="zh-CN" sz="900" b="0" i="1" smtClean="0">
+                                            <a:latin typeface="Cambria Math" panose="02040503050406030204" pitchFamily="18" charset="0"/>
+                                          </a:rPr>
+                                          <m:t>𝑜𝑓</m:t>
+                                        </m:r>
+                                        <m:r>
+                                          <a:rPr lang="en-US" altLang="zh-CN" sz="900" b="0" i="1" smtClean="0">
+                                            <a:latin typeface="Cambria Math" panose="02040503050406030204" pitchFamily="18" charset="0"/>
+                                          </a:rPr>
+                                          <m:t> </m:t>
+                                        </m:r>
+                                        <m:r>
+                                          <a:rPr lang="en-US" altLang="zh-CN" sz="900" b="0" i="1" smtClean="0">
+                                            <a:latin typeface="Cambria Math" panose="02040503050406030204" pitchFamily="18" charset="0"/>
+                                          </a:rPr>
+                                          <m:t>𝐴𝑝𝑜𝑙𝑜𝑔𝑦</m:t>
+                                        </m:r>
+                                        <m:r>
+                                          <a:rPr lang="en-US" altLang="zh-CN" sz="900" b="0" i="1" smtClean="0">
+                                            <a:latin typeface="Cambria Math" panose="02040503050406030204" pitchFamily="18" charset="0"/>
+                                          </a:rPr>
+                                          <m:t> </m:t>
+                                        </m:r>
+                                        <m:r>
+                                          <a:rPr lang="en-US" altLang="zh-CN" sz="900" b="0" i="1" smtClean="0">
+                                            <a:latin typeface="Cambria Math" panose="02040503050406030204" pitchFamily="18" charset="0"/>
+                                          </a:rPr>
+                                          <m:t>𝑊𝑜𝑟𝑑𝑠</m:t>
+                                        </m:r>
+                                      </m:num>
+                                      <m:den>
+                                        <m:r>
+                                          <a:rPr lang="en-US" altLang="zh-CN" sz="900" b="0" i="1" smtClean="0">
+                                            <a:latin typeface="Cambria Math" panose="02040503050406030204" pitchFamily="18" charset="0"/>
+                                          </a:rPr>
+                                          <m:t>𝑇𝑜𝑡𝑎𝑙</m:t>
+                                        </m:r>
+                                        <m:r>
+                                          <a:rPr lang="en-US" altLang="zh-CN" sz="900" b="0" i="1" smtClean="0">
+                                            <a:latin typeface="Cambria Math" panose="02040503050406030204" pitchFamily="18" charset="0"/>
+                                          </a:rPr>
+                                          <m:t> </m:t>
+                                        </m:r>
+                                        <m:r>
+                                          <a:rPr lang="en-US" altLang="zh-CN" sz="900" b="0" i="1" smtClean="0">
+                                            <a:latin typeface="Cambria Math" panose="02040503050406030204" pitchFamily="18" charset="0"/>
+                                          </a:rPr>
+                                          <m:t>𝑊𝑜𝑟𝑑𝑠</m:t>
+                                        </m:r>
+                                      </m:den>
+                                    </m:f>
+                                  </m:e>
+                                </m:rad>
+                              </m:oMath>
+                            </m:oMathPara>
+                          </a14:m>
+                          <a:endParaRPr lang="en-US" altLang="zh-CN" dirty="0"/>
+                        </a:p>
+                      </a:txBody>
+                      <a:tcPr/>
+                    </a:tc>
+                    <a:tc>
+                      <a:txBody>
+                        <a:bodyPr/>
+                        <a:lstStyle/>
+                        <a:p>
+                          <a:r>
+                            <a:rPr lang="en-US" altLang="zh-CN" dirty="0"/>
+                            <a:t>Higher weight</a:t>
+                          </a:r>
+                          <a:endParaRPr lang="zh-CN" altLang="en-US" dirty="0"/>
+                        </a:p>
+                      </a:txBody>
+                      <a:tcPr/>
+                    </a:tc>
+                    <a:extLst>
+                      <a:ext uri="{0D108BD9-81ED-4DB2-BD59-A6C34878D82A}">
+                        <a16:rowId xmlns:a16="http://schemas.microsoft.com/office/drawing/2014/main" val="1428517476"/>
+                      </a:ext>
+                    </a:extLst>
+                  </a:tr>
+                  <a:tr h="1253793">
+                    <a:tc>
+                      <a:txBody>
+                        <a:bodyPr/>
+                        <a:lstStyle/>
+                        <a:p>
+                          <a:r>
+                            <a:rPr lang="en-US" altLang="zh-CN" dirty="0"/>
+                            <a:t>Tone-frustration fit</a:t>
+                          </a:r>
+                          <a:endParaRPr lang="zh-CN" altLang="en-US" dirty="0"/>
+                        </a:p>
+                      </a:txBody>
+                      <a:tcPr/>
+                    </a:tc>
+                    <a:tc>
+                      <a:txBody>
+                        <a:bodyPr/>
+                        <a:lstStyle/>
+                        <a:p>
+                          <a:r>
+                            <a:rPr lang="en-US" altLang="zh-CN" dirty="0"/>
+                            <a:t>LLM-as-judge (GPT 4o) scores 1–3: does the response tone match the emotional register of the complaint?</a:t>
+                          </a:r>
+                          <a:endParaRPr lang="zh-CN" altLang="en-US" dirty="0"/>
+                        </a:p>
+                      </a:txBody>
+                      <a:tcPr/>
+                    </a:tc>
+                    <a:tc>
+                      <a:txBody>
+                        <a:bodyPr/>
+                        <a:lstStyle/>
+                        <a:p>
+                          <a:r>
+                            <a:rPr lang="en-US" altLang="zh-CN" dirty="0"/>
+                            <a:t>Equal weight</a:t>
+                          </a:r>
+                          <a:endParaRPr lang="zh-CN" altLang="en-US" dirty="0"/>
+                        </a:p>
+                      </a:txBody>
+                      <a:tcPr/>
+                    </a:tc>
+                    <a:extLst>
+                      <a:ext uri="{0D108BD9-81ED-4DB2-BD59-A6C34878D82A}">
+                        <a16:rowId xmlns:a16="http://schemas.microsoft.com/office/drawing/2014/main" val="1053424"/>
+                      </a:ext>
+                    </a:extLst>
+                  </a:tr>
+                </a:tbl>
+              </a:graphicData>
+            </a:graphic>
+          </p:graphicFrame>
+        </mc:Choice>
+        <mc:Fallback>
+          <p:graphicFrame>
+            <p:nvGraphicFramePr>
+              <p:cNvPr id="2" name="表格 1">
                 <a:extLst>
-                  <a:ext uri="{0D108BD9-81ED-4DB2-BD59-A6C34878D82A}">
-                    <a16:rowId xmlns:a16="http://schemas.microsoft.com/office/drawing/2014/main" val="1428517476"/>
+                  <a:ext uri="{FF2B5EF4-FFF2-40B4-BE49-F238E27FC236}">
+                    <a16:creationId xmlns:a16="http://schemas.microsoft.com/office/drawing/2014/main" id="{EBEB3E93-8E77-9C44-4C4D-10AF22356183}"/>
                   </a:ext>
                 </a:extLst>
-              </a:tr>
-              <a:tr h="1253793">
-                <a:tc>
-                  <a:txBody>
-                    <a:bodyPr/>
-                    <a:lstStyle/>
-                    <a:p>
-                      <a:r>
-                        <a:rPr lang="en-US" altLang="zh-CN" dirty="0"/>
-                        <a:t>Tone-frustration fit</a:t>
-                      </a:r>
-                      <a:endParaRPr lang="zh-CN" altLang="en-US" dirty="0"/>
-                    </a:p>
-                  </a:txBody>
-                  <a:tcPr/>
-                </a:tc>
-                <a:tc>
-                  <a:txBody>
-                    <a:bodyPr/>
-                    <a:lstStyle/>
-                    <a:p>
-                      <a:r>
-                        <a:rPr lang="en-US" altLang="zh-CN" dirty="0"/>
-                        <a:t>LLM-as-judge (GPT 4o) scores 1–5: does the response tone match the emotional register of the complaint?</a:t>
-                      </a:r>
-                      <a:endParaRPr lang="zh-CN" altLang="en-US" dirty="0"/>
-                    </a:p>
-                  </a:txBody>
-                  <a:tcPr/>
-                </a:tc>
-                <a:tc>
-                  <a:txBody>
-                    <a:bodyPr/>
-                    <a:lstStyle/>
-                    <a:p>
-                      <a:r>
-                        <a:rPr lang="en-US" altLang="zh-CN" dirty="0"/>
-                        <a:t>Equal weight</a:t>
-                      </a:r>
-                      <a:endParaRPr lang="zh-CN" altLang="en-US" dirty="0"/>
-                    </a:p>
-                  </a:txBody>
-                  <a:tcPr/>
-                </a:tc>
-                <a:extLst>
-                  <a:ext uri="{0D108BD9-81ED-4DB2-BD59-A6C34878D82A}">
-                    <a16:rowId xmlns:a16="http://schemas.microsoft.com/office/drawing/2014/main" val="1053424"/>
-                  </a:ext>
-                </a:extLst>
-              </a:tr>
-            </a:tbl>
-          </a:graphicData>
-        </a:graphic>
-      </p:graphicFrame>
+              </p:cNvPr>
+              <p:cNvGraphicFramePr>
+                <a:graphicFrameLocks noGrp="1"/>
+              </p:cNvGraphicFramePr>
+              <p:nvPr>
+                <p:extLst>
+                  <p:ext uri="{D42A27DB-BD31-4B8C-83A1-F6EECF244321}">
+                    <p14:modId xmlns:p14="http://schemas.microsoft.com/office/powerpoint/2010/main" val="3421086298"/>
+                  </p:ext>
+                </p:extLst>
+              </p:nvPr>
+            </p:nvGraphicFramePr>
+            <p:xfrm>
+              <a:off x="914401" y="3803152"/>
+              <a:ext cx="10469571" cy="2664890"/>
+            </p:xfrm>
+            <a:graphic>
+              <a:graphicData uri="http://schemas.openxmlformats.org/drawingml/2006/table">
+                <a:tbl>
+                  <a:tblPr firstRow="1" bandRow="1">
+                    <a:tableStyleId>{21E4AEA4-8DFA-4A89-87EB-49C32662AFE0}</a:tableStyleId>
+                  </a:tblPr>
+                  <a:tblGrid>
+                    <a:gridCol w="3489857">
+                      <a:extLst>
+                        <a:ext uri="{9D8B030D-6E8A-4147-A177-3AD203B41FA5}">
+                          <a16:colId xmlns:a16="http://schemas.microsoft.com/office/drawing/2014/main" val="2473411904"/>
+                        </a:ext>
+                      </a:extLst>
+                    </a:gridCol>
+                    <a:gridCol w="3489857">
+                      <a:extLst>
+                        <a:ext uri="{9D8B030D-6E8A-4147-A177-3AD203B41FA5}">
+                          <a16:colId xmlns:a16="http://schemas.microsoft.com/office/drawing/2014/main" val="1406048790"/>
+                        </a:ext>
+                      </a:extLst>
+                    </a:gridCol>
+                    <a:gridCol w="3489857">
+                      <a:extLst>
+                        <a:ext uri="{9D8B030D-6E8A-4147-A177-3AD203B41FA5}">
+                          <a16:colId xmlns:a16="http://schemas.microsoft.com/office/drawing/2014/main" val="3813345470"/>
+                        </a:ext>
+                      </a:extLst>
+                    </a:gridCol>
+                  </a:tblGrid>
+                  <a:tr h="365760">
+                    <a:tc>
+                      <a:txBody>
+                        <a:bodyPr/>
+                        <a:lstStyle/>
+                        <a:p>
+                          <a:r>
+                            <a:rPr lang="en-US" altLang="zh-CN" dirty="0"/>
+                            <a:t>Dimension</a:t>
+                          </a:r>
+                          <a:endParaRPr lang="zh-CN" altLang="en-US" dirty="0"/>
+                        </a:p>
+                      </a:txBody>
+                      <a:tcPr/>
+                    </a:tc>
+                    <a:tc>
+                      <a:txBody>
+                        <a:bodyPr/>
+                        <a:lstStyle/>
+                        <a:p>
+                          <a:r>
+                            <a:rPr lang="en-US" altLang="zh-CN" dirty="0"/>
+                            <a:t>Measurement</a:t>
+                          </a:r>
+                          <a:endParaRPr lang="zh-CN" altLang="en-US" dirty="0"/>
+                        </a:p>
+                      </a:txBody>
+                      <a:tcPr/>
+                    </a:tc>
+                    <a:tc>
+                      <a:txBody>
+                        <a:bodyPr/>
+                        <a:lstStyle/>
+                        <a:p>
+                          <a:r>
+                            <a:rPr lang="en-US" altLang="zh-CN" dirty="0"/>
+                            <a:t>Weight at high FIS</a:t>
+                          </a:r>
+                          <a:endParaRPr lang="zh-CN" altLang="en-US" dirty="0"/>
+                        </a:p>
+                      </a:txBody>
+                      <a:tcPr/>
+                    </a:tc>
+                    <a:extLst>
+                      <a:ext uri="{0D108BD9-81ED-4DB2-BD59-A6C34878D82A}">
+                        <a16:rowId xmlns:a16="http://schemas.microsoft.com/office/drawing/2014/main" val="208840510"/>
+                      </a:ext>
+                    </a:extLst>
+                  </a:tr>
+                  <a:tr h="1045337">
+                    <a:tc>
+                      <a:txBody>
+                        <a:bodyPr/>
+                        <a:lstStyle/>
+                        <a:p>
+                          <a:r>
+                            <a:rPr lang="en-US" altLang="zh-CN" dirty="0"/>
+                            <a:t>Apology density</a:t>
+                          </a:r>
+                          <a:endParaRPr lang="zh-CN" altLang="en-US" dirty="0"/>
+                        </a:p>
+                      </a:txBody>
+                      <a:tcPr/>
+                    </a:tc>
+                    <a:tc>
+                      <a:txBody>
+                        <a:bodyPr/>
+                        <a:lstStyle/>
+                        <a:p>
+                          <a:endParaRPr lang="en-TW"/>
+                        </a:p>
+                      </a:txBody>
+                      <a:tcPr>
+                        <a:blipFill>
+                          <a:blip r:embed="rId5"/>
+                          <a:stretch>
+                            <a:fillRect l="-100364" t="-37349" r="-100727" b="-122892"/>
+                          </a:stretch>
+                        </a:blipFill>
+                      </a:tcPr>
+                    </a:tc>
+                    <a:tc>
+                      <a:txBody>
+                        <a:bodyPr/>
+                        <a:lstStyle/>
+                        <a:p>
+                          <a:r>
+                            <a:rPr lang="en-US" altLang="zh-CN" dirty="0"/>
+                            <a:t>Higher weight</a:t>
+                          </a:r>
+                          <a:endParaRPr lang="zh-CN" altLang="en-US" dirty="0"/>
+                        </a:p>
+                      </a:txBody>
+                      <a:tcPr/>
+                    </a:tc>
+                    <a:extLst>
+                      <a:ext uri="{0D108BD9-81ED-4DB2-BD59-A6C34878D82A}">
+                        <a16:rowId xmlns:a16="http://schemas.microsoft.com/office/drawing/2014/main" val="1428517476"/>
+                      </a:ext>
+                    </a:extLst>
+                  </a:tr>
+                  <a:tr h="1253793">
+                    <a:tc>
+                      <a:txBody>
+                        <a:bodyPr/>
+                        <a:lstStyle/>
+                        <a:p>
+                          <a:r>
+                            <a:rPr lang="en-US" altLang="zh-CN" dirty="0"/>
+                            <a:t>Tone-frustration fit</a:t>
+                          </a:r>
+                          <a:endParaRPr lang="zh-CN" altLang="en-US" dirty="0"/>
+                        </a:p>
+                      </a:txBody>
+                      <a:tcPr/>
+                    </a:tc>
+                    <a:tc>
+                      <a:txBody>
+                        <a:bodyPr/>
+                        <a:lstStyle/>
+                        <a:p>
+                          <a:r>
+                            <a:rPr lang="en-US" altLang="zh-CN" dirty="0"/>
+                            <a:t>LLM-as-judge (GPT 4o) scores 1–3: does the response tone match the emotional register of the complaint?</a:t>
+                          </a:r>
+                          <a:endParaRPr lang="zh-CN" altLang="en-US" dirty="0"/>
+                        </a:p>
+                      </a:txBody>
+                      <a:tcPr/>
+                    </a:tc>
+                    <a:tc>
+                      <a:txBody>
+                        <a:bodyPr/>
+                        <a:lstStyle/>
+                        <a:p>
+                          <a:r>
+                            <a:rPr lang="en-US" altLang="zh-CN" dirty="0"/>
+                            <a:t>Equal weight</a:t>
+                          </a:r>
+                          <a:endParaRPr lang="zh-CN" altLang="en-US" dirty="0"/>
+                        </a:p>
+                      </a:txBody>
+                      <a:tcPr/>
+                    </a:tc>
+                    <a:extLst>
+                      <a:ext uri="{0D108BD9-81ED-4DB2-BD59-A6C34878D82A}">
+                        <a16:rowId xmlns:a16="http://schemas.microsoft.com/office/drawing/2014/main" val="1053424"/>
+                      </a:ext>
+                    </a:extLst>
+                  </a:tr>
+                </a:tbl>
+              </a:graphicData>
+            </a:graphic>
+          </p:graphicFrame>
+        </mc:Fallback>
+      </mc:AlternateContent>
     </p:spTree>
     <p:extLst>
       <p:ext uri="{BB962C8B-B14F-4D97-AF65-F5344CB8AC3E}">
-        <p14:creationId xmlns:p14="http://schemas.microsoft.com/office/powerpoint/2010/main" val="2558277820"/>
+        <p14:creationId xmlns:p14="http://schemas.microsoft.com/office/powerpoint/2010/main" val="2004030987"/>
       </p:ext>
     </p:extLst>
   </p:cSld>
@@ -15690,7 +18997,31 @@
 </p:tagLst>
 </file>
 
+<file path=ppt/tags/tag17.xml><?xml version="1.0" encoding="utf-8"?>
+<p:tagLst xmlns:a="http://schemas.openxmlformats.org/drawingml/2006/main" xmlns:r="http://schemas.openxmlformats.org/officeDocument/2006/relationships" xmlns:p="http://schemas.openxmlformats.org/presentationml/2006/main">
+  <p:tag name="KSO_WM_BEAUTIFY_FLAG" val=""/>
+</p:tagLst>
+</file>
+
+<file path=ppt/tags/tag18.xml><?xml version="1.0" encoding="utf-8"?>
+<p:tagLst xmlns:a="http://schemas.openxmlformats.org/drawingml/2006/main" xmlns:r="http://schemas.openxmlformats.org/officeDocument/2006/relationships" xmlns:p="http://schemas.openxmlformats.org/presentationml/2006/main">
+  <p:tag name="KSO_WM_BEAUTIFY_FLAG" val=""/>
+</p:tagLst>
+</file>
+
+<file path=ppt/tags/tag19.xml><?xml version="1.0" encoding="utf-8"?>
+<p:tagLst xmlns:a="http://schemas.openxmlformats.org/drawingml/2006/main" xmlns:r="http://schemas.openxmlformats.org/officeDocument/2006/relationships" xmlns:p="http://schemas.openxmlformats.org/presentationml/2006/main">
+  <p:tag name="KSO_WM_BEAUTIFY_FLAG" val=""/>
+</p:tagLst>
+</file>
+
 <file path=ppt/tags/tag2.xml><?xml version="1.0" encoding="utf-8"?>
+<p:tagLst xmlns:a="http://schemas.openxmlformats.org/drawingml/2006/main" xmlns:r="http://schemas.openxmlformats.org/officeDocument/2006/relationships" xmlns:p="http://schemas.openxmlformats.org/presentationml/2006/main">
+  <p:tag name="KSO_WM_BEAUTIFY_FLAG" val=""/>
+</p:tagLst>
+</file>
+
+<file path=ppt/tags/tag20.xml><?xml version="1.0" encoding="utf-8"?>
 <p:tagLst xmlns:a="http://schemas.openxmlformats.org/drawingml/2006/main" xmlns:r="http://schemas.openxmlformats.org/officeDocument/2006/relationships" xmlns:p="http://schemas.openxmlformats.org/presentationml/2006/main">
   <p:tag name="KSO_WM_BEAUTIFY_FLAG" val=""/>
 </p:tagLst>

--- a/src/Files/Final_ppt.pptx
+++ b/src/Files/Final_ppt.pptx
@@ -10,9 +10,9 @@
   <p:sldIdLst>
     <p:sldId id="263" r:id="rId2"/>
     <p:sldId id="272" r:id="rId3"/>
-    <p:sldId id="297" r:id="rId4"/>
-    <p:sldId id="277" r:id="rId5"/>
-    <p:sldId id="298" r:id="rId6"/>
+    <p:sldId id="315" r:id="rId4"/>
+    <p:sldId id="316" r:id="rId5"/>
+    <p:sldId id="317" r:id="rId6"/>
     <p:sldId id="299" r:id="rId7"/>
     <p:sldId id="304" r:id="rId8"/>
     <p:sldId id="305" r:id="rId9"/>
@@ -1137,7 +1137,7 @@
           <a:p>
             <a:fld id="{D2C19FB4-6E42-4667-9259-F43FF51FF684}" type="datetimeFigureOut">
               <a:rPr lang="zh-CN" altLang="en-US" smtClean="0"/>
-              <a:t>2026/4/29</a:t>
+              <a:t>2026/4/30</a:t>
             </a:fld>
             <a:endParaRPr lang="zh-CN" altLang="en-US"/>
           </a:p>
@@ -3562,170 +3562,6 @@
         <p:cNvPr id="1" name="">
           <a:extLst>
             <a:ext uri="{FF2B5EF4-FFF2-40B4-BE49-F238E27FC236}">
-              <a16:creationId xmlns:a16="http://schemas.microsoft.com/office/drawing/2014/main" id="{C99A4FFB-D8FF-F77F-B6D3-161F9726D9C3}"/>
-            </a:ext>
-          </a:extLst>
-        </p:cNvPr>
-        <p:cNvGrpSpPr/>
-        <p:nvPr/>
-      </p:nvGrpSpPr>
-      <p:grpSpPr>
-        <a:xfrm>
-          <a:off x="0" y="0"/>
-          <a:ext cx="0" cy="0"/>
-          <a:chOff x="0" y="0"/>
-          <a:chExt cx="0" cy="0"/>
-        </a:xfrm>
-      </p:grpSpPr>
-      <p:sp>
-        <p:nvSpPr>
-          <p:cNvPr id="2" name="幻灯片图像占位符 1">
-            <a:extLst>
-              <a:ext uri="{FF2B5EF4-FFF2-40B4-BE49-F238E27FC236}">
-                <a16:creationId xmlns:a16="http://schemas.microsoft.com/office/drawing/2014/main" id="{4EAC9962-BF4C-7B93-5FCD-230ADFC6B335}"/>
-              </a:ext>
-            </a:extLst>
-          </p:cNvPr>
-          <p:cNvSpPr>
-            <a:spLocks noGrp="1" noRot="1" noChangeAspect="1"/>
-          </p:cNvSpPr>
-          <p:nvPr>
-            <p:ph type="sldImg"/>
-          </p:nvPr>
-        </p:nvSpPr>
-        <p:spPr/>
-      </p:sp>
-      <p:sp>
-        <p:nvSpPr>
-          <p:cNvPr id="3" name="备注占位符 2">
-            <a:extLst>
-              <a:ext uri="{FF2B5EF4-FFF2-40B4-BE49-F238E27FC236}">
-                <a16:creationId xmlns:a16="http://schemas.microsoft.com/office/drawing/2014/main" id="{29E234C0-616B-5CD1-3DC3-B6B48136D085}"/>
-              </a:ext>
-            </a:extLst>
-          </p:cNvPr>
-          <p:cNvSpPr>
-            <a:spLocks noGrp="1"/>
-          </p:cNvSpPr>
-          <p:nvPr>
-            <p:ph type="body" idx="1"/>
-          </p:nvPr>
-        </p:nvSpPr>
-        <p:spPr/>
-        <p:txBody>
-          <a:bodyPr/>
-          <a:lstStyle/>
-          <a:p>
-            <a:pPr algn="l">
-              <a:spcBef>
-                <a:spcPts val="450"/>
-              </a:spcBef>
-              <a:spcAft>
-                <a:spcPts val="450"/>
-              </a:spcAft>
-            </a:pPr>
-            <a:r>
-              <a:rPr lang="en-US" altLang="zh-CN" sz="1800" b="1" i="0">
-                <a:solidFill>
-                  <a:srgbClr val="2D3B45"/>
-                </a:solidFill>
-                <a:effectLst/>
-                <a:latin typeface="Lato Extended"/>
-              </a:rPr>
-              <a:t>Introduction Slide</a:t>
-            </a:r>
-            <a:endParaRPr lang="en-US" altLang="zh-CN" sz="1800" b="0" i="0">
-              <a:solidFill>
-                <a:srgbClr val="2D3B45"/>
-              </a:solidFill>
-              <a:effectLst/>
-              <a:latin typeface="Lato Extended"/>
-            </a:endParaRPr>
-          </a:p>
-          <a:p>
-            <a:pPr algn="l">
-              <a:spcAft>
-                <a:spcPts val="450"/>
-              </a:spcAft>
-              <a:buFont typeface="Arial" panose="020B0604020202020204" pitchFamily="34" charset="0"/>
-              <a:buChar char="•"/>
-            </a:pPr>
-            <a:r>
-              <a:rPr lang="en-US" altLang="zh-CN" sz="1800" b="1" i="0">
-                <a:solidFill>
-                  <a:srgbClr val="2D3B45"/>
-                </a:solidFill>
-                <a:effectLst/>
-                <a:latin typeface="v-sans"/>
-              </a:rPr>
-              <a:t>Brief Introduction:</a:t>
-            </a:r>
-            <a:r>
-              <a:rPr lang="en-US" altLang="zh-CN" sz="1800" b="0" i="0">
-                <a:solidFill>
-                  <a:srgbClr val="2D3B45"/>
-                </a:solidFill>
-                <a:effectLst/>
-                <a:latin typeface="v-sans"/>
-              </a:rPr>
-              <a:t> of the team and the topic</a:t>
-            </a:r>
-          </a:p>
-          <a:p>
-            <a:endParaRPr lang="zh-CN" altLang="en-US"/>
-          </a:p>
-        </p:txBody>
-      </p:sp>
-      <p:sp>
-        <p:nvSpPr>
-          <p:cNvPr id="4" name="灯片编号占位符 3">
-            <a:extLst>
-              <a:ext uri="{FF2B5EF4-FFF2-40B4-BE49-F238E27FC236}">
-                <a16:creationId xmlns:a16="http://schemas.microsoft.com/office/drawing/2014/main" id="{CD02C3D5-768E-C1B1-FBC5-2A6D674543A0}"/>
-              </a:ext>
-            </a:extLst>
-          </p:cNvPr>
-          <p:cNvSpPr>
-            <a:spLocks noGrp="1"/>
-          </p:cNvSpPr>
-          <p:nvPr>
-            <p:ph type="sldNum" sz="quarter" idx="5"/>
-          </p:nvPr>
-        </p:nvSpPr>
-        <p:spPr/>
-        <p:txBody>
-          <a:bodyPr/>
-          <a:lstStyle/>
-          <a:p>
-            <a:fld id="{EED2C466-1B0F-4591-A952-5F31096967DE}" type="slidenum">
-              <a:rPr lang="zh-CN" altLang="en-US" smtClean="0"/>
-              <a:t>3</a:t>
-            </a:fld>
-            <a:endParaRPr lang="zh-CN" altLang="en-US"/>
-          </a:p>
-        </p:txBody>
-      </p:sp>
-    </p:spTree>
-    <p:extLst>
-      <p:ext uri="{BB962C8B-B14F-4D97-AF65-F5344CB8AC3E}">
-        <p14:creationId xmlns:p14="http://schemas.microsoft.com/office/powerpoint/2010/main" val="1757984631"/>
-      </p:ext>
-    </p:extLst>
-  </p:cSld>
-  <p:clrMapOvr>
-    <a:masterClrMapping/>
-  </p:clrMapOvr>
-</p:notes>
-</file>
-
-<file path=ppt/notesSlides/notesSlide4.xml><?xml version="1.0" encoding="utf-8"?>
-<p:notes xmlns:a="http://schemas.openxmlformats.org/drawingml/2006/main" xmlns:r="http://schemas.openxmlformats.org/officeDocument/2006/relationships" xmlns:p="http://schemas.openxmlformats.org/presentationml/2006/main">
-  <p:cSld>
-    <p:spTree>
-      <p:nvGrpSpPr>
-        <p:cNvPr id="1" name="">
-          <a:extLst>
-            <a:ext uri="{FF2B5EF4-FFF2-40B4-BE49-F238E27FC236}">
               <a16:creationId xmlns:a16="http://schemas.microsoft.com/office/drawing/2014/main" id="{C5D51511-BAA7-D887-1580-D79D906E0228}"/>
             </a:ext>
           </a:extLst>
@@ -3863,7 +3699,7 @@
           <a:p>
             <a:fld id="{EED2C466-1B0F-4591-A952-5F31096967DE}" type="slidenum">
               <a:rPr lang="zh-CN" altLang="en-US" smtClean="0"/>
-              <a:t>4</a:t>
+              <a:t>3</a:t>
             </a:fld>
             <a:endParaRPr lang="zh-CN" altLang="en-US"/>
           </a:p>
@@ -3882,7 +3718,7 @@
 </p:notes>
 </file>
 
-<file path=ppt/notesSlides/notesSlide5.xml><?xml version="1.0" encoding="utf-8"?>
+<file path=ppt/notesSlides/notesSlide4.xml><?xml version="1.0" encoding="utf-8"?>
 <p:notes xmlns:a="http://schemas.openxmlformats.org/drawingml/2006/main" xmlns:r="http://schemas.openxmlformats.org/officeDocument/2006/relationships" xmlns:p="http://schemas.openxmlformats.org/presentationml/2006/main">
   <p:cSld>
     <p:spTree>
@@ -4027,7 +3863,7 @@
           <a:p>
             <a:fld id="{EED2C466-1B0F-4591-A952-5F31096967DE}" type="slidenum">
               <a:rPr lang="zh-CN" altLang="en-US" smtClean="0"/>
-              <a:t>5</a:t>
+              <a:t>4</a:t>
             </a:fld>
             <a:endParaRPr lang="zh-CN" altLang="en-US"/>
           </a:p>
@@ -4037,6 +3873,170 @@
     <p:extLst>
       <p:ext uri="{BB962C8B-B14F-4D97-AF65-F5344CB8AC3E}">
         <p14:creationId xmlns:p14="http://schemas.microsoft.com/office/powerpoint/2010/main" val="792041235"/>
+      </p:ext>
+    </p:extLst>
+  </p:cSld>
+  <p:clrMapOvr>
+    <a:masterClrMapping/>
+  </p:clrMapOvr>
+</p:notes>
+</file>
+
+<file path=ppt/notesSlides/notesSlide5.xml><?xml version="1.0" encoding="utf-8"?>
+<p:notes xmlns:a="http://schemas.openxmlformats.org/drawingml/2006/main" xmlns:r="http://schemas.openxmlformats.org/officeDocument/2006/relationships" xmlns:p="http://schemas.openxmlformats.org/presentationml/2006/main">
+  <p:cSld>
+    <p:spTree>
+      <p:nvGrpSpPr>
+        <p:cNvPr id="1" name="">
+          <a:extLst>
+            <a:ext uri="{FF2B5EF4-FFF2-40B4-BE49-F238E27FC236}">
+              <a16:creationId xmlns:a16="http://schemas.microsoft.com/office/drawing/2014/main" id="{D1B6132A-B803-ED4F-A2A3-F6936AF16EBB}"/>
+            </a:ext>
+          </a:extLst>
+        </p:cNvPr>
+        <p:cNvGrpSpPr/>
+        <p:nvPr/>
+      </p:nvGrpSpPr>
+      <p:grpSpPr>
+        <a:xfrm>
+          <a:off x="0" y="0"/>
+          <a:ext cx="0" cy="0"/>
+          <a:chOff x="0" y="0"/>
+          <a:chExt cx="0" cy="0"/>
+        </a:xfrm>
+      </p:grpSpPr>
+      <p:sp>
+        <p:nvSpPr>
+          <p:cNvPr id="2" name="幻灯片图像占位符 1">
+            <a:extLst>
+              <a:ext uri="{FF2B5EF4-FFF2-40B4-BE49-F238E27FC236}">
+                <a16:creationId xmlns:a16="http://schemas.microsoft.com/office/drawing/2014/main" id="{E6A59B16-2CF6-6E32-0D11-D6F97D825B90}"/>
+              </a:ext>
+            </a:extLst>
+          </p:cNvPr>
+          <p:cNvSpPr>
+            <a:spLocks noGrp="1" noRot="1" noChangeAspect="1"/>
+          </p:cNvSpPr>
+          <p:nvPr>
+            <p:ph type="sldImg"/>
+          </p:nvPr>
+        </p:nvSpPr>
+        <p:spPr/>
+      </p:sp>
+      <p:sp>
+        <p:nvSpPr>
+          <p:cNvPr id="3" name="备注占位符 2">
+            <a:extLst>
+              <a:ext uri="{FF2B5EF4-FFF2-40B4-BE49-F238E27FC236}">
+                <a16:creationId xmlns:a16="http://schemas.microsoft.com/office/drawing/2014/main" id="{921616EB-8305-6357-163B-4EF465896EBF}"/>
+              </a:ext>
+            </a:extLst>
+          </p:cNvPr>
+          <p:cNvSpPr>
+            <a:spLocks noGrp="1"/>
+          </p:cNvSpPr>
+          <p:nvPr>
+            <p:ph type="body" idx="1"/>
+          </p:nvPr>
+        </p:nvSpPr>
+        <p:spPr/>
+        <p:txBody>
+          <a:bodyPr/>
+          <a:lstStyle/>
+          <a:p>
+            <a:pPr algn="l">
+              <a:spcBef>
+                <a:spcPts val="450"/>
+              </a:spcBef>
+              <a:spcAft>
+                <a:spcPts val="450"/>
+              </a:spcAft>
+            </a:pPr>
+            <a:r>
+              <a:rPr lang="en-US" altLang="zh-CN" sz="1800" b="1" i="0">
+                <a:solidFill>
+                  <a:srgbClr val="2D3B45"/>
+                </a:solidFill>
+                <a:effectLst/>
+                <a:latin typeface="Lato Extended"/>
+              </a:rPr>
+              <a:t>Introduction Slide</a:t>
+            </a:r>
+            <a:endParaRPr lang="en-US" altLang="zh-CN" sz="1800" b="0" i="0">
+              <a:solidFill>
+                <a:srgbClr val="2D3B45"/>
+              </a:solidFill>
+              <a:effectLst/>
+              <a:latin typeface="Lato Extended"/>
+            </a:endParaRPr>
+          </a:p>
+          <a:p>
+            <a:pPr algn="l">
+              <a:spcAft>
+                <a:spcPts val="450"/>
+              </a:spcAft>
+              <a:buFont typeface="Arial" panose="020B0604020202020204" pitchFamily="34" charset="0"/>
+              <a:buChar char="•"/>
+            </a:pPr>
+            <a:r>
+              <a:rPr lang="en-US" altLang="zh-CN" sz="1800" b="1" i="0">
+                <a:solidFill>
+                  <a:srgbClr val="2D3B45"/>
+                </a:solidFill>
+                <a:effectLst/>
+                <a:latin typeface="v-sans"/>
+              </a:rPr>
+              <a:t>Brief Introduction:</a:t>
+            </a:r>
+            <a:r>
+              <a:rPr lang="en-US" altLang="zh-CN" sz="1800" b="0" i="0">
+                <a:solidFill>
+                  <a:srgbClr val="2D3B45"/>
+                </a:solidFill>
+                <a:effectLst/>
+                <a:latin typeface="v-sans"/>
+              </a:rPr>
+              <a:t> of the team and the topic</a:t>
+            </a:r>
+          </a:p>
+          <a:p>
+            <a:endParaRPr lang="zh-CN" altLang="en-US"/>
+          </a:p>
+        </p:txBody>
+      </p:sp>
+      <p:sp>
+        <p:nvSpPr>
+          <p:cNvPr id="4" name="灯片编号占位符 3">
+            <a:extLst>
+              <a:ext uri="{FF2B5EF4-FFF2-40B4-BE49-F238E27FC236}">
+                <a16:creationId xmlns:a16="http://schemas.microsoft.com/office/drawing/2014/main" id="{D8244A0C-C891-E6C3-38AA-F52EB1CAE714}"/>
+              </a:ext>
+            </a:extLst>
+          </p:cNvPr>
+          <p:cNvSpPr>
+            <a:spLocks noGrp="1"/>
+          </p:cNvSpPr>
+          <p:nvPr>
+            <p:ph type="sldNum" sz="quarter" idx="5"/>
+          </p:nvPr>
+        </p:nvSpPr>
+        <p:spPr/>
+        <p:txBody>
+          <a:bodyPr/>
+          <a:lstStyle/>
+          <a:p>
+            <a:fld id="{EED2C466-1B0F-4591-A952-5F31096967DE}" type="slidenum">
+              <a:rPr lang="zh-CN" altLang="en-US" smtClean="0"/>
+              <a:t>5</a:t>
+            </a:fld>
+            <a:endParaRPr lang="zh-CN" altLang="en-US"/>
+          </a:p>
+        </p:txBody>
+      </p:sp>
+    </p:spTree>
+    <p:extLst>
+      <p:ext uri="{BB962C8B-B14F-4D97-AF65-F5344CB8AC3E}">
+        <p14:creationId xmlns:p14="http://schemas.microsoft.com/office/powerpoint/2010/main" val="2766418503"/>
       </p:ext>
     </p:extLst>
   </p:cSld>
@@ -4849,7 +4849,7 @@
           <a:p>
             <a:fld id="{A89603F3-32BE-40D2-9B36-4E0B8A351D34}" type="datetimeFigureOut">
               <a:rPr lang="zh-CN" altLang="en-US" smtClean="0"/>
-              <a:t>2026/4/29</a:t>
+              <a:t>2026/4/30</a:t>
             </a:fld>
             <a:endParaRPr lang="zh-CN" altLang="en-US"/>
           </a:p>
@@ -5048,7 +5048,7 @@
           <a:p>
             <a:fld id="{A89603F3-32BE-40D2-9B36-4E0B8A351D34}" type="datetimeFigureOut">
               <a:rPr lang="zh-CN" altLang="en-US" smtClean="0"/>
-              <a:t>2026/4/29</a:t>
+              <a:t>2026/4/30</a:t>
             </a:fld>
             <a:endParaRPr lang="zh-CN" altLang="en-US"/>
           </a:p>
@@ -5257,7 +5257,7 @@
           <a:p>
             <a:fld id="{A89603F3-32BE-40D2-9B36-4E0B8A351D34}" type="datetimeFigureOut">
               <a:rPr lang="zh-CN" altLang="en-US" smtClean="0"/>
-              <a:t>2026/4/29</a:t>
+              <a:t>2026/4/30</a:t>
             </a:fld>
             <a:endParaRPr lang="zh-CN" altLang="en-US"/>
           </a:p>
@@ -5456,7 +5456,7 @@
           <a:p>
             <a:fld id="{A89603F3-32BE-40D2-9B36-4E0B8A351D34}" type="datetimeFigureOut">
               <a:rPr lang="zh-CN" altLang="en-US" smtClean="0"/>
-              <a:t>2026/4/29</a:t>
+              <a:t>2026/4/30</a:t>
             </a:fld>
             <a:endParaRPr lang="zh-CN" altLang="en-US"/>
           </a:p>
@@ -5732,7 +5732,7 @@
           <a:p>
             <a:fld id="{A89603F3-32BE-40D2-9B36-4E0B8A351D34}" type="datetimeFigureOut">
               <a:rPr lang="zh-CN" altLang="en-US" smtClean="0"/>
-              <a:t>2026/4/29</a:t>
+              <a:t>2026/4/30</a:t>
             </a:fld>
             <a:endParaRPr lang="zh-CN" altLang="en-US"/>
           </a:p>
@@ -5998,7 +5998,7 @@
           <a:p>
             <a:fld id="{A89603F3-32BE-40D2-9B36-4E0B8A351D34}" type="datetimeFigureOut">
               <a:rPr lang="zh-CN" altLang="en-US" smtClean="0"/>
-              <a:t>2026/4/29</a:t>
+              <a:t>2026/4/30</a:t>
             </a:fld>
             <a:endParaRPr lang="zh-CN" altLang="en-US"/>
           </a:p>
@@ -6411,7 +6411,7 @@
           <a:p>
             <a:fld id="{A89603F3-32BE-40D2-9B36-4E0B8A351D34}" type="datetimeFigureOut">
               <a:rPr lang="zh-CN" altLang="en-US" smtClean="0"/>
-              <a:t>2026/4/29</a:t>
+              <a:t>2026/4/30</a:t>
             </a:fld>
             <a:endParaRPr lang="zh-CN" altLang="en-US"/>
           </a:p>
@@ -6553,7 +6553,7 @@
           <a:p>
             <a:fld id="{A89603F3-32BE-40D2-9B36-4E0B8A351D34}" type="datetimeFigureOut">
               <a:rPr lang="zh-CN" altLang="en-US" smtClean="0"/>
-              <a:t>2026/4/29</a:t>
+              <a:t>2026/4/30</a:t>
             </a:fld>
             <a:endParaRPr lang="zh-CN" altLang="en-US"/>
           </a:p>
@@ -6667,7 +6667,7 @@
           <a:p>
             <a:fld id="{A89603F3-32BE-40D2-9B36-4E0B8A351D34}" type="datetimeFigureOut">
               <a:rPr lang="zh-CN" altLang="en-US" smtClean="0"/>
-              <a:t>2026/4/29</a:t>
+              <a:t>2026/4/30</a:t>
             </a:fld>
             <a:endParaRPr lang="zh-CN" altLang="en-US"/>
           </a:p>
@@ -6979,7 +6979,7 @@
           <a:p>
             <a:fld id="{A89603F3-32BE-40D2-9B36-4E0B8A351D34}" type="datetimeFigureOut">
               <a:rPr lang="zh-CN" altLang="en-US" smtClean="0"/>
-              <a:t>2026/4/29</a:t>
+              <a:t>2026/4/30</a:t>
             </a:fld>
             <a:endParaRPr lang="zh-CN" altLang="en-US"/>
           </a:p>
@@ -7268,7 +7268,7 @@
           <a:p>
             <a:fld id="{A89603F3-32BE-40D2-9B36-4E0B8A351D34}" type="datetimeFigureOut">
               <a:rPr lang="zh-CN" altLang="en-US" smtClean="0"/>
-              <a:t>2026/4/29</a:t>
+              <a:t>2026/4/30</a:t>
             </a:fld>
             <a:endParaRPr lang="zh-CN" altLang="en-US"/>
           </a:p>
@@ -7510,7 +7510,7 @@
           <a:p>
             <a:fld id="{A89603F3-32BE-40D2-9B36-4E0B8A351D34}" type="datetimeFigureOut">
               <a:rPr lang="zh-CN" altLang="en-US" smtClean="0"/>
-              <a:t>2026/4/29</a:t>
+              <a:t>2026/4/30</a:t>
             </a:fld>
             <a:endParaRPr lang="zh-CN" altLang="en-US"/>
           </a:p>
@@ -13992,7 +13992,7 @@
           <p:nvPr>
             <p:extLst>
               <p:ext uri="{D42A27DB-BD31-4B8C-83A1-F6EECF244321}">
-                <p14:modId xmlns:p14="http://schemas.microsoft.com/office/powerpoint/2010/main" val="1183900994"/>
+                <p14:modId xmlns:p14="http://schemas.microsoft.com/office/powerpoint/2010/main" val="1028319729"/>
               </p:ext>
             </p:extLst>
           </p:nvPr>
@@ -14030,17 +14030,6 @@
                     <a:lstStyle/>
                     <a:p>
                       <a:r>
-                        <a:rPr lang="en-US" altLang="zh-CN" sz="3200" dirty="0" err="1">
-                          <a:solidFill>
-                            <a:srgbClr val="13294B"/>
-                          </a:solidFill>
-                          <a:latin typeface="Calibri"/>
-                          <a:ea typeface="宋体"/>
-                          <a:cs typeface="Calibri"/>
-                        </a:rPr>
-                        <a:t>Yuliang</a:t>
-                      </a:r>
-                      <a:r>
                         <a:rPr lang="en-US" altLang="zh-CN" sz="3200" dirty="0">
                           <a:solidFill>
                             <a:srgbClr val="13294B"/>
@@ -14049,7 +14038,7 @@
                           <a:ea typeface="宋体"/>
                           <a:cs typeface="Calibri"/>
                         </a:rPr>
-                        <a:t> Lin</a:t>
+                        <a:t>Yu-Liang Lin</a:t>
                       </a:r>
                       <a:endParaRPr lang="zh-CN" altLang="en-US" sz="3200" kern="1200" dirty="0">
                         <a:solidFill>
@@ -15149,7 +15138,7 @@
         <p:cNvPr id="1" name="">
           <a:extLst>
             <a:ext uri="{FF2B5EF4-FFF2-40B4-BE49-F238E27FC236}">
-              <a16:creationId xmlns:a16="http://schemas.microsoft.com/office/drawing/2014/main" id="{3F2CAE9D-349C-8D29-97B8-45694169D71D}"/>
+              <a16:creationId xmlns:a16="http://schemas.microsoft.com/office/drawing/2014/main" id="{317A35A1-5778-B4EF-992B-7E0E94CA0B42}"/>
             </a:ext>
           </a:extLst>
         </p:cNvPr>
@@ -15169,7 +15158,7 @@
           <p:cNvPr id="3" name="图文框 2">
             <a:extLst>
               <a:ext uri="{FF2B5EF4-FFF2-40B4-BE49-F238E27FC236}">
-                <a16:creationId xmlns:a16="http://schemas.microsoft.com/office/drawing/2014/main" id="{685D7C8E-817E-F563-219D-B815CCCAE039}"/>
+                <a16:creationId xmlns:a16="http://schemas.microsoft.com/office/drawing/2014/main" id="{F7EE8400-517A-752C-DAE0-9F501C140119}"/>
               </a:ext>
             </a:extLst>
           </p:cNvPr>
@@ -15232,7 +15221,7 @@
           <p:cNvPr id="4" name="文本框 3">
             <a:extLst>
               <a:ext uri="{FF2B5EF4-FFF2-40B4-BE49-F238E27FC236}">
-                <a16:creationId xmlns:a16="http://schemas.microsoft.com/office/drawing/2014/main" id="{E1E581F1-1B4E-5233-3881-67F0423276DD}"/>
+                <a16:creationId xmlns:a16="http://schemas.microsoft.com/office/drawing/2014/main" id="{1D3F4BA2-9F0E-BBBA-18C6-18EDBF20C131}"/>
               </a:ext>
             </a:extLst>
           </p:cNvPr>
@@ -15256,7 +15245,7 @@
           <a:lstStyle/>
           <a:p>
             <a:r>
-              <a:rPr lang="en-US" altLang="zh-CN" sz="4400" b="1" dirty="0">
+              <a:rPr lang="en-US" altLang="zh-CN" sz="4400" b="1">
                 <a:solidFill>
                   <a:srgbClr val="13294B"/>
                 </a:solidFill>
@@ -15274,7 +15263,7 @@
           <p:cNvPr id="9" name="半闭框 8">
             <a:extLst>
               <a:ext uri="{FF2B5EF4-FFF2-40B4-BE49-F238E27FC236}">
-                <a16:creationId xmlns:a16="http://schemas.microsoft.com/office/drawing/2014/main" id="{86571FCB-A371-3723-B078-6158F6C766C2}"/>
+                <a16:creationId xmlns:a16="http://schemas.microsoft.com/office/drawing/2014/main" id="{F80FF26F-7E9E-7626-DE5B-19520869686A}"/>
               </a:ext>
             </a:extLst>
           </p:cNvPr>
@@ -15335,7 +15324,7 @@
           <p:cNvPr id="10" name="半闭框 9">
             <a:extLst>
               <a:ext uri="{FF2B5EF4-FFF2-40B4-BE49-F238E27FC236}">
-                <a16:creationId xmlns:a16="http://schemas.microsoft.com/office/drawing/2014/main" id="{839E0284-D281-0F11-E08C-21A49FA2B942}"/>
+                <a16:creationId xmlns:a16="http://schemas.microsoft.com/office/drawing/2014/main" id="{5E7DFC05-0556-27C9-3AD0-F40903155AFF}"/>
               </a:ext>
             </a:extLst>
           </p:cNvPr>
@@ -15400,7 +15389,7 @@
           <p:cNvPr id="13" name="直接连接符 12">
             <a:extLst>
               <a:ext uri="{FF2B5EF4-FFF2-40B4-BE49-F238E27FC236}">
-                <a16:creationId xmlns:a16="http://schemas.microsoft.com/office/drawing/2014/main" id="{1C533638-ED2B-C619-B532-12760C01B352}"/>
+                <a16:creationId xmlns:a16="http://schemas.microsoft.com/office/drawing/2014/main" id="{6C8A3EAC-9D25-201B-2716-D5E58EB7A8E8}"/>
               </a:ext>
             </a:extLst>
           </p:cNvPr>
@@ -15443,7 +15432,7 @@
           <p:cNvPr id="100" name="图片 99">
             <a:extLst>
               <a:ext uri="{FF2B5EF4-FFF2-40B4-BE49-F238E27FC236}">
-                <a16:creationId xmlns:a16="http://schemas.microsoft.com/office/drawing/2014/main" id="{64A3B441-0C5C-103B-36DF-98D7E0A6D3A6}"/>
+                <a16:creationId xmlns:a16="http://schemas.microsoft.com/office/drawing/2014/main" id="{D54AB51E-4E14-026B-B58D-980D99E66D24}"/>
               </a:ext>
             </a:extLst>
           </p:cNvPr>
@@ -15475,7 +15464,7 @@
           <p:cNvPr id="5" name="文本框 4">
             <a:extLst>
               <a:ext uri="{FF2B5EF4-FFF2-40B4-BE49-F238E27FC236}">
-                <a16:creationId xmlns:a16="http://schemas.microsoft.com/office/drawing/2014/main" id="{8D56EAC2-1C7E-0BD3-A8C8-CE21FE5081D1}"/>
+                <a16:creationId xmlns:a16="http://schemas.microsoft.com/office/drawing/2014/main" id="{8DB3CBD7-6A1D-40A7-8E72-11C7AFAA332C}"/>
               </a:ext>
             </a:extLst>
           </p:cNvPr>
@@ -15485,7 +15474,7 @@
         <p:spPr>
           <a:xfrm>
             <a:off x="613543" y="1741049"/>
-            <a:ext cx="5719751" cy="4170372"/>
+            <a:ext cx="10964912" cy="3616375"/>
           </a:xfrm>
           <a:prstGeom prst="rect">
             <a:avLst/>
@@ -15506,7 +15495,7 @@
               <a:buChar char="•"/>
             </a:pPr>
             <a:r>
-              <a:rPr lang="en-US" altLang="zh-CN" sz="3200" b="1" dirty="0">
+              <a:rPr lang="en-US" altLang="zh-CN" sz="3200" dirty="0">
                 <a:solidFill>
                   <a:srgbClr val="13294B"/>
                 </a:solidFill>
@@ -15514,11 +15503,33 @@
                 <a:ea typeface="宋体"/>
                 <a:cs typeface="Calibri"/>
               </a:rPr>
-              <a:t>Have you ever gone through this situation?</a:t>
-            </a:r>
-          </a:p>
-          <a:p>
-            <a:pPr marL="914400" lvl="1" indent="-457200">
+              <a:t>Do frontier LLMs systematically </a:t>
+            </a:r>
+            <a:r>
+              <a:rPr lang="en-US" altLang="zh-CN" sz="3200" dirty="0">
+                <a:solidFill>
+                  <a:srgbClr val="FF5F05"/>
+                </a:solidFill>
+                <a:latin typeface="Calibri"/>
+                <a:ea typeface="宋体"/>
+                <a:cs typeface="Calibri"/>
+              </a:rPr>
+              <a:t>over empathize or under-empathize</a:t>
+            </a:r>
+            <a:r>
+              <a:rPr lang="en-US" altLang="zh-CN" sz="3200" dirty="0">
+                <a:solidFill>
+                  <a:srgbClr val="13294B"/>
+                </a:solidFill>
+                <a:latin typeface="Calibri"/>
+                <a:ea typeface="宋体"/>
+                <a:cs typeface="Calibri"/>
+              </a:rPr>
+              <a:t> relative to trained human customer support agents, as measured by a calibration delta against a naturalistic behavioral benchmark?</a:t>
+            </a:r>
+          </a:p>
+          <a:p>
+            <a:pPr marL="457200" indent="-457200">
               <a:spcAft>
                 <a:spcPts val="600"/>
               </a:spcAft>
@@ -15526,7 +15537,7 @@
               <a:buChar char="•"/>
             </a:pPr>
             <a:r>
-              <a:rPr lang="en-US" altLang="zh-CN" sz="2800" dirty="0">
+              <a:rPr lang="en-US" altLang="zh-CN" sz="3200" dirty="0">
                 <a:solidFill>
                   <a:srgbClr val="13294B"/>
                 </a:solidFill>
@@ -15534,51 +15545,37 @@
                 <a:ea typeface="宋体"/>
                 <a:cs typeface="Calibri"/>
               </a:rPr>
-              <a:t>When you try to chat or ask an question with an AI assistance, it keeps saying “sorry” and “I don’t know”. Then, they ask you to call a customer service and redirect you to another chat bot.</a:t>
-            </a:r>
-          </a:p>
-        </p:txBody>
-      </p:sp>
-      <p:pic>
-        <p:nvPicPr>
-          <p:cNvPr id="6" name="图片 5" descr="图形用户界面, 文本, 应用程序, 聊天或短信&#10;&#10;AI 生成的内容可能不正确。">
-            <a:extLst>
-              <a:ext uri="{FF2B5EF4-FFF2-40B4-BE49-F238E27FC236}">
-                <a16:creationId xmlns:a16="http://schemas.microsoft.com/office/drawing/2014/main" id="{879F0E7A-A5D7-4C8E-F0B6-DBA4125AE1D4}"/>
-              </a:ext>
-            </a:extLst>
-          </p:cNvPr>
-          <p:cNvPicPr>
-            <a:picLocks noChangeAspect="1"/>
-          </p:cNvPicPr>
-          <p:nvPr/>
-        </p:nvPicPr>
-        <p:blipFill>
-          <a:blip r:embed="rId5">
-            <a:extLst>
-              <a:ext uri="{28A0092B-C50C-407E-A947-70E740481C1C}">
-                <a14:useLocalDpi xmlns:a14="http://schemas.microsoft.com/office/drawing/2010/main" val="0"/>
-              </a:ext>
-            </a:extLst>
-          </a:blip>
-          <a:stretch>
-            <a:fillRect/>
-          </a:stretch>
-        </p:blipFill>
-        <p:spPr>
-          <a:xfrm>
-            <a:off x="6495604" y="1852174"/>
-            <a:ext cx="5202357" cy="4108817"/>
-          </a:xfrm>
-          <a:prstGeom prst="rect">
-            <a:avLst/>
-          </a:prstGeom>
-        </p:spPr>
-      </p:pic>
+              <a:t>Is this empathy miscalibration consistent across industry domains, or </a:t>
+            </a:r>
+            <a:r>
+              <a:rPr lang="en-US" altLang="zh-CN" sz="3200" dirty="0">
+                <a:solidFill>
+                  <a:srgbClr val="FF5F05"/>
+                </a:solidFill>
+                <a:latin typeface="Calibri"/>
+                <a:ea typeface="宋体"/>
+                <a:cs typeface="Calibri"/>
+              </a:rPr>
+              <a:t>does it vary by context</a:t>
+            </a:r>
+            <a:r>
+              <a:rPr lang="en-US" altLang="zh-CN" sz="3200" dirty="0">
+                <a:solidFill>
+                  <a:srgbClr val="13294B"/>
+                </a:solidFill>
+                <a:latin typeface="Calibri"/>
+                <a:ea typeface="宋体"/>
+                <a:cs typeface="Calibri"/>
+              </a:rPr>
+              <a:t>—specifically between airlines and telecom?</a:t>
+            </a:r>
+          </a:p>
+        </p:txBody>
+      </p:sp>
     </p:spTree>
     <p:extLst>
       <p:ext uri="{BB962C8B-B14F-4D97-AF65-F5344CB8AC3E}">
-        <p14:creationId xmlns:p14="http://schemas.microsoft.com/office/powerpoint/2010/main" val="825763644"/>
+        <p14:creationId xmlns:p14="http://schemas.microsoft.com/office/powerpoint/2010/main" val="1684372179"/>
       </p:ext>
     </p:extLst>
   </p:cSld>
@@ -15596,7 +15593,7 @@
         <p:cNvPr id="1" name="">
           <a:extLst>
             <a:ext uri="{FF2B5EF4-FFF2-40B4-BE49-F238E27FC236}">
-              <a16:creationId xmlns:a16="http://schemas.microsoft.com/office/drawing/2014/main" id="{317A35A1-5778-B4EF-992B-7E0E94CA0B42}"/>
+              <a16:creationId xmlns:a16="http://schemas.microsoft.com/office/drawing/2014/main" id="{1D539558-D6D7-2F6D-241F-20C72E1C3901}"/>
             </a:ext>
           </a:extLst>
         </p:cNvPr>
@@ -15616,7 +15613,7 @@
           <p:cNvPr id="3" name="图文框 2">
             <a:extLst>
               <a:ext uri="{FF2B5EF4-FFF2-40B4-BE49-F238E27FC236}">
-                <a16:creationId xmlns:a16="http://schemas.microsoft.com/office/drawing/2014/main" id="{F7EE8400-517A-752C-DAE0-9F501C140119}"/>
+                <a16:creationId xmlns:a16="http://schemas.microsoft.com/office/drawing/2014/main" id="{7C75D02B-F965-1522-762C-F028E8E40A18}"/>
               </a:ext>
             </a:extLst>
           </p:cNvPr>
@@ -15679,7 +15676,7 @@
           <p:cNvPr id="4" name="文本框 3">
             <a:extLst>
               <a:ext uri="{FF2B5EF4-FFF2-40B4-BE49-F238E27FC236}">
-                <a16:creationId xmlns:a16="http://schemas.microsoft.com/office/drawing/2014/main" id="{1D3F4BA2-9F0E-BBBA-18C6-18EDBF20C131}"/>
+                <a16:creationId xmlns:a16="http://schemas.microsoft.com/office/drawing/2014/main" id="{950A3583-6FBB-A7A0-8335-D547CE74FA2B}"/>
               </a:ext>
             </a:extLst>
           </p:cNvPr>
@@ -15703,7 +15700,7 @@
           <a:lstStyle/>
           <a:p>
             <a:r>
-              <a:rPr lang="en-US" altLang="zh-CN" sz="4400" b="1">
+              <a:rPr lang="en-US" altLang="zh-CN" sz="4400" b="1" dirty="0">
                 <a:solidFill>
                   <a:srgbClr val="13294B"/>
                 </a:solidFill>
@@ -15711,7 +15708,7 @@
                 <a:ea typeface="等线"/>
                 <a:cs typeface="+mj-lt"/>
               </a:rPr>
-              <a:t>Research Question</a:t>
+              <a:t>Related Work</a:t>
             </a:r>
           </a:p>
         </p:txBody>
@@ -15721,7 +15718,7 @@
           <p:cNvPr id="9" name="半闭框 8">
             <a:extLst>
               <a:ext uri="{FF2B5EF4-FFF2-40B4-BE49-F238E27FC236}">
-                <a16:creationId xmlns:a16="http://schemas.microsoft.com/office/drawing/2014/main" id="{F80FF26F-7E9E-7626-DE5B-19520869686A}"/>
+                <a16:creationId xmlns:a16="http://schemas.microsoft.com/office/drawing/2014/main" id="{6955840B-04C6-A985-2FA5-B84B1F68E8B8}"/>
               </a:ext>
             </a:extLst>
           </p:cNvPr>
@@ -15782,7 +15779,7 @@
           <p:cNvPr id="10" name="半闭框 9">
             <a:extLst>
               <a:ext uri="{FF2B5EF4-FFF2-40B4-BE49-F238E27FC236}">
-                <a16:creationId xmlns:a16="http://schemas.microsoft.com/office/drawing/2014/main" id="{5E7DFC05-0556-27C9-3AD0-F40903155AFF}"/>
+                <a16:creationId xmlns:a16="http://schemas.microsoft.com/office/drawing/2014/main" id="{E71B38FD-C561-CB1D-DE33-5CAFE6EB3875}"/>
               </a:ext>
             </a:extLst>
           </p:cNvPr>
@@ -15847,7 +15844,7 @@
           <p:cNvPr id="13" name="直接连接符 12">
             <a:extLst>
               <a:ext uri="{FF2B5EF4-FFF2-40B4-BE49-F238E27FC236}">
-                <a16:creationId xmlns:a16="http://schemas.microsoft.com/office/drawing/2014/main" id="{6C8A3EAC-9D25-201B-2716-D5E58EB7A8E8}"/>
+                <a16:creationId xmlns:a16="http://schemas.microsoft.com/office/drawing/2014/main" id="{2C01279C-4772-BAA9-51D8-214FF25EA3F2}"/>
               </a:ext>
             </a:extLst>
           </p:cNvPr>
@@ -15890,7 +15887,7 @@
           <p:cNvPr id="100" name="图片 99">
             <a:extLst>
               <a:ext uri="{FF2B5EF4-FFF2-40B4-BE49-F238E27FC236}">
-                <a16:creationId xmlns:a16="http://schemas.microsoft.com/office/drawing/2014/main" id="{D54AB51E-4E14-026B-B58D-980D99E66D24}"/>
+                <a16:creationId xmlns:a16="http://schemas.microsoft.com/office/drawing/2014/main" id="{8A9598FD-1781-C932-7821-2E27A7E8C750}"/>
               </a:ext>
             </a:extLst>
           </p:cNvPr>
@@ -15922,7 +15919,7 @@
           <p:cNvPr id="5" name="文本框 4">
             <a:extLst>
               <a:ext uri="{FF2B5EF4-FFF2-40B4-BE49-F238E27FC236}">
-                <a16:creationId xmlns:a16="http://schemas.microsoft.com/office/drawing/2014/main" id="{8DB3CBD7-6A1D-40A7-8E72-11C7AFAA332C}"/>
+                <a16:creationId xmlns:a16="http://schemas.microsoft.com/office/drawing/2014/main" id="{0318EC4D-82AE-CC0A-6522-170E10D354CE}"/>
               </a:ext>
             </a:extLst>
           </p:cNvPr>
@@ -15932,7 +15929,7 @@
         <p:spPr>
           <a:xfrm>
             <a:off x="613543" y="1741049"/>
-            <a:ext cx="10964912" cy="3616375"/>
+            <a:ext cx="10964912" cy="4693593"/>
           </a:xfrm>
           <a:prstGeom prst="rect">
             <a:avLst/>
@@ -15953,7 +15950,7 @@
               <a:buChar char="•"/>
             </a:pPr>
             <a:r>
-              <a:rPr lang="en-US" altLang="zh-CN" sz="3200" b="1" dirty="0">
+              <a:rPr lang="en-US" altLang="zh-CN" sz="2800" dirty="0">
                 <a:solidFill>
                   <a:srgbClr val="13294B"/>
                 </a:solidFill>
@@ -15961,7 +15958,29 @@
                 <a:ea typeface="宋体"/>
                 <a:cs typeface="Calibri"/>
               </a:rPr>
-              <a:t> Do frontier LLMs systematically over empathize or under-empathize relative to trained human customer support agents, as measured by a calibration delta against a naturalistic behavioral benchmark?</a:t>
+              <a:t>A well-documented failure mode of RLHF-trained models is sycophancy—the </a:t>
+            </a:r>
+            <a:r>
+              <a:rPr lang="en-US" altLang="zh-CN" sz="2800" dirty="0">
+                <a:solidFill>
+                  <a:srgbClr val="FF5F05"/>
+                </a:solidFill>
+                <a:latin typeface="Calibri"/>
+                <a:ea typeface="宋体"/>
+                <a:cs typeface="Calibri"/>
+              </a:rPr>
+              <a:t>tendency to agree with or flatter users </a:t>
+            </a:r>
+            <a:r>
+              <a:rPr lang="en-US" altLang="zh-CN" sz="2800" dirty="0">
+                <a:solidFill>
+                  <a:srgbClr val="13294B"/>
+                </a:solidFill>
+                <a:latin typeface="Calibri"/>
+                <a:ea typeface="宋体"/>
+                <a:cs typeface="Calibri"/>
+              </a:rPr>
+              <a:t>at the expense of accuracy or appropriate restraint</a:t>
             </a:r>
           </a:p>
           <a:p>
@@ -15973,7 +15992,7 @@
               <a:buChar char="•"/>
             </a:pPr>
             <a:r>
-              <a:rPr lang="en-US" altLang="zh-CN" sz="3200" b="1" dirty="0">
+              <a:rPr lang="en-US" altLang="zh-CN" sz="2800" dirty="0">
                 <a:solidFill>
                   <a:srgbClr val="13294B"/>
                 </a:solidFill>
@@ -15981,15 +16000,74 @@
                 <a:ea typeface="宋体"/>
                 <a:cs typeface="Calibri"/>
               </a:rPr>
-              <a:t>Is this empathy miscalibration consistent across industry domains, or does it vary by context—specifically between airlines and technology support (telecom/apple/amazon)?</a:t>
-            </a:r>
+              <a:t>The NLP empathy literature is </a:t>
+            </a:r>
+            <a:r>
+              <a:rPr lang="en-US" altLang="zh-CN" sz="2800" dirty="0">
+                <a:solidFill>
+                  <a:srgbClr val="FF5F05"/>
+                </a:solidFill>
+                <a:latin typeface="Calibri"/>
+                <a:ea typeface="宋体"/>
+                <a:cs typeface="Calibri"/>
+              </a:rPr>
+              <a:t>growing but domain-narrow</a:t>
+            </a:r>
+            <a:r>
+              <a:rPr lang="en-US" altLang="zh-CN" sz="2800" dirty="0">
+                <a:solidFill>
+                  <a:srgbClr val="13294B"/>
+                </a:solidFill>
+                <a:latin typeface="Calibri"/>
+                <a:ea typeface="宋体"/>
+                <a:cs typeface="Calibri"/>
+              </a:rPr>
+              <a:t>. A systematic review of 12 studies on LLMs and empathy found that 7 focused exclusively on medical contexts.</a:t>
+            </a:r>
+          </a:p>
+          <a:p>
+            <a:pPr marL="457200" indent="-457200">
+              <a:spcAft>
+                <a:spcPts val="600"/>
+              </a:spcAft>
+              <a:buFont typeface="Arial" panose="020B0604020202020204" pitchFamily="34" charset="0"/>
+              <a:buChar char="•"/>
+            </a:pPr>
+            <a:r>
+              <a:rPr lang="en-US" altLang="zh-CN" sz="2800" dirty="0">
+                <a:solidFill>
+                  <a:srgbClr val="13294B"/>
+                </a:solidFill>
+                <a:latin typeface="Calibri"/>
+                <a:ea typeface="宋体"/>
+                <a:cs typeface="Calibri"/>
+              </a:rPr>
+              <a:t>Meanwhile, LLMs nearly match expert reliability when judging empathic communication but was limited to personal-problems contexts, rather than transactional service dialogues.</a:t>
+            </a:r>
+          </a:p>
+          <a:p>
+            <a:pPr marL="457200" indent="-457200">
+              <a:spcAft>
+                <a:spcPts val="600"/>
+              </a:spcAft>
+              <a:buFont typeface="Arial" panose="020B0604020202020204" pitchFamily="34" charset="0"/>
+              <a:buChar char="•"/>
+            </a:pPr>
+            <a:endParaRPr lang="en-US" altLang="zh-CN" sz="3200" dirty="0">
+              <a:solidFill>
+                <a:srgbClr val="13294B"/>
+              </a:solidFill>
+              <a:latin typeface="Calibri"/>
+              <a:ea typeface="宋体"/>
+              <a:cs typeface="Calibri"/>
+            </a:endParaRPr>
           </a:p>
         </p:txBody>
       </p:sp>
     </p:spTree>
     <p:extLst>
       <p:ext uri="{BB962C8B-B14F-4D97-AF65-F5344CB8AC3E}">
-        <p14:creationId xmlns:p14="http://schemas.microsoft.com/office/powerpoint/2010/main" val="3351992377"/>
+        <p14:creationId xmlns:p14="http://schemas.microsoft.com/office/powerpoint/2010/main" val="1973932520"/>
       </p:ext>
     </p:extLst>
   </p:cSld>
@@ -16007,7 +16085,7 @@
         <p:cNvPr id="1" name="">
           <a:extLst>
             <a:ext uri="{FF2B5EF4-FFF2-40B4-BE49-F238E27FC236}">
-              <a16:creationId xmlns:a16="http://schemas.microsoft.com/office/drawing/2014/main" id="{1D539558-D6D7-2F6D-241F-20C72E1C3901}"/>
+              <a16:creationId xmlns:a16="http://schemas.microsoft.com/office/drawing/2014/main" id="{4F7E1851-927A-B265-E122-FF50BB7F778E}"/>
             </a:ext>
           </a:extLst>
         </p:cNvPr>
@@ -16027,7 +16105,7 @@
           <p:cNvPr id="3" name="图文框 2">
             <a:extLst>
               <a:ext uri="{FF2B5EF4-FFF2-40B4-BE49-F238E27FC236}">
-                <a16:creationId xmlns:a16="http://schemas.microsoft.com/office/drawing/2014/main" id="{7C75D02B-F965-1522-762C-F028E8E40A18}"/>
+                <a16:creationId xmlns:a16="http://schemas.microsoft.com/office/drawing/2014/main" id="{D220B63A-D205-550F-CE68-F10F7F88DDF2}"/>
               </a:ext>
             </a:extLst>
           </p:cNvPr>
@@ -16090,7 +16168,7 @@
           <p:cNvPr id="4" name="文本框 3">
             <a:extLst>
               <a:ext uri="{FF2B5EF4-FFF2-40B4-BE49-F238E27FC236}">
-                <a16:creationId xmlns:a16="http://schemas.microsoft.com/office/drawing/2014/main" id="{950A3583-6FBB-A7A0-8335-D547CE74FA2B}"/>
+                <a16:creationId xmlns:a16="http://schemas.microsoft.com/office/drawing/2014/main" id="{D5564321-B1AA-80EE-EF3F-D1BD240944B4}"/>
               </a:ext>
             </a:extLst>
           </p:cNvPr>
@@ -16122,7 +16200,7 @@
                 <a:ea typeface="等线"/>
                 <a:cs typeface="+mj-lt"/>
               </a:rPr>
-              <a:t>Related Work</a:t>
+              <a:t>Gap</a:t>
             </a:r>
           </a:p>
         </p:txBody>
@@ -16132,7 +16210,7 @@
           <p:cNvPr id="9" name="半闭框 8">
             <a:extLst>
               <a:ext uri="{FF2B5EF4-FFF2-40B4-BE49-F238E27FC236}">
-                <a16:creationId xmlns:a16="http://schemas.microsoft.com/office/drawing/2014/main" id="{6955840B-04C6-A985-2FA5-B84B1F68E8B8}"/>
+                <a16:creationId xmlns:a16="http://schemas.microsoft.com/office/drawing/2014/main" id="{1DA82BCC-7E88-6D72-FD17-F895A05294FD}"/>
               </a:ext>
             </a:extLst>
           </p:cNvPr>
@@ -16193,7 +16271,7 @@
           <p:cNvPr id="10" name="半闭框 9">
             <a:extLst>
               <a:ext uri="{FF2B5EF4-FFF2-40B4-BE49-F238E27FC236}">
-                <a16:creationId xmlns:a16="http://schemas.microsoft.com/office/drawing/2014/main" id="{E71B38FD-C561-CB1D-DE33-5CAFE6EB3875}"/>
+                <a16:creationId xmlns:a16="http://schemas.microsoft.com/office/drawing/2014/main" id="{15925586-2913-BEFD-4E00-F7DAED0D824D}"/>
               </a:ext>
             </a:extLst>
           </p:cNvPr>
@@ -16258,7 +16336,7 @@
           <p:cNvPr id="13" name="直接连接符 12">
             <a:extLst>
               <a:ext uri="{FF2B5EF4-FFF2-40B4-BE49-F238E27FC236}">
-                <a16:creationId xmlns:a16="http://schemas.microsoft.com/office/drawing/2014/main" id="{2C01279C-4772-BAA9-51D8-214FF25EA3F2}"/>
+                <a16:creationId xmlns:a16="http://schemas.microsoft.com/office/drawing/2014/main" id="{A3DC0BFC-571D-2143-6E7D-61F157F348FD}"/>
               </a:ext>
             </a:extLst>
           </p:cNvPr>
@@ -16301,7 +16379,7 @@
           <p:cNvPr id="100" name="图片 99">
             <a:extLst>
               <a:ext uri="{FF2B5EF4-FFF2-40B4-BE49-F238E27FC236}">
-                <a16:creationId xmlns:a16="http://schemas.microsoft.com/office/drawing/2014/main" id="{8A9598FD-1781-C932-7821-2E27A7E8C750}"/>
+                <a16:creationId xmlns:a16="http://schemas.microsoft.com/office/drawing/2014/main" id="{34B27C66-754D-6FD4-05C4-D2319A7A941B}"/>
               </a:ext>
             </a:extLst>
           </p:cNvPr>
@@ -16333,7 +16411,7 @@
           <p:cNvPr id="5" name="文本框 4">
             <a:extLst>
               <a:ext uri="{FF2B5EF4-FFF2-40B4-BE49-F238E27FC236}">
-                <a16:creationId xmlns:a16="http://schemas.microsoft.com/office/drawing/2014/main" id="{0318EC4D-82AE-CC0A-6522-170E10D354CE}"/>
+                <a16:creationId xmlns:a16="http://schemas.microsoft.com/office/drawing/2014/main" id="{1C185285-89B3-B00D-896A-38CDDD591A4B}"/>
               </a:ext>
             </a:extLst>
           </p:cNvPr>
@@ -16343,7 +16421,7 @@
         <p:spPr>
           <a:xfrm>
             <a:off x="613543" y="1741049"/>
-            <a:ext cx="10964912" cy="2708434"/>
+            <a:ext cx="10892338" cy="4401205"/>
           </a:xfrm>
           <a:prstGeom prst="rect">
             <a:avLst/>
@@ -16364,7 +16442,7 @@
               <a:buChar char="•"/>
             </a:pPr>
             <a:r>
-              <a:rPr lang="en-US" altLang="zh-CN" sz="3200" dirty="0">
+              <a:rPr lang="en-US" altLang="zh-CN" sz="2800" dirty="0">
                 <a:solidFill>
                   <a:srgbClr val="13294B"/>
                 </a:solidFill>
@@ -16372,10 +16450,10 @@
                 <a:ea typeface="宋体"/>
                 <a:cs typeface="Calibri"/>
               </a:rPr>
-              <a:t>A well-documented failure mode of RLHF-trained models is sycophancy—the </a:t>
-            </a:r>
-            <a:r>
-              <a:rPr lang="en-US" altLang="zh-CN" sz="3200" dirty="0">
+              <a:t>A </a:t>
+            </a:r>
+            <a:r>
+              <a:rPr lang="en-US" altLang="zh-CN" sz="2800" dirty="0">
                 <a:solidFill>
                   <a:srgbClr val="FF5F05"/>
                 </a:solidFill>
@@ -16383,10 +16461,10 @@
                 <a:ea typeface="宋体"/>
                 <a:cs typeface="Calibri"/>
               </a:rPr>
-              <a:t>tendency to agree with or flatter users </a:t>
-            </a:r>
-            <a:r>
-              <a:rPr lang="en-US" altLang="zh-CN" sz="3200" dirty="0">
+              <a:t>Sycophancy</a:t>
+            </a:r>
+            <a:r>
+              <a:rPr lang="en-US" altLang="zh-CN" sz="2800" dirty="0">
                 <a:solidFill>
                   <a:srgbClr val="13294B"/>
                 </a:solidFill>
@@ -16394,7 +16472,7 @@
                 <a:ea typeface="宋体"/>
                 <a:cs typeface="Calibri"/>
               </a:rPr>
-              <a:t>at the expense of accuracy or appropriate restraint</a:t>
+              <a:t> research measures opinion-conformity, not tonal appropriateness. </a:t>
             </a:r>
           </a:p>
           <a:p>
@@ -16406,37 +16484,26 @@
               <a:buChar char="•"/>
             </a:pPr>
             <a:r>
-              <a:rPr lang="en-US" altLang="zh-CN" sz="3200" dirty="0">
-                <a:solidFill>
-                  <a:srgbClr val="13294B"/>
+              <a:rPr lang="en-US" altLang="zh-CN" sz="2800" dirty="0">
+                <a:solidFill>
+                  <a:srgbClr val="FF5F05"/>
                 </a:solidFill>
                 <a:latin typeface="Calibri"/>
                 <a:ea typeface="宋体"/>
                 <a:cs typeface="Calibri"/>
               </a:rPr>
-              <a:t>The NLP empathy literature is </a:t>
-            </a:r>
-            <a:r>
-              <a:rPr lang="en-US" altLang="zh-CN" sz="3200" dirty="0">
-                <a:solidFill>
-                  <a:srgbClr val="FF5F05"/>
+              <a:t>Empathy</a:t>
+            </a:r>
+            <a:r>
+              <a:rPr lang="en-US" altLang="zh-CN" sz="2800" dirty="0">
+                <a:solidFill>
+                  <a:srgbClr val="13294B"/>
                 </a:solidFill>
                 <a:latin typeface="Calibri"/>
                 <a:ea typeface="宋体"/>
                 <a:cs typeface="Calibri"/>
               </a:rPr>
-              <a:t>growing but domain-narrow</a:t>
-            </a:r>
-            <a:r>
-              <a:rPr lang="en-US" altLang="zh-CN" sz="3200" dirty="0">
-                <a:solidFill>
-                  <a:srgbClr val="13294B"/>
-                </a:solidFill>
-                <a:latin typeface="Calibri"/>
-                <a:ea typeface="宋体"/>
-                <a:cs typeface="Calibri"/>
-              </a:rPr>
-              <a:t>.</a:t>
+              <a:t> research evaluates support-context warmth, not calibration to frustration level. </a:t>
             </a:r>
           </a:p>
           <a:p>
@@ -16447,7 +16514,71 @@
               <a:buFont typeface="Arial" panose="020B0604020202020204" pitchFamily="34" charset="0"/>
               <a:buChar char="•"/>
             </a:pPr>
-            <a:endParaRPr lang="en-US" altLang="zh-CN" sz="3200" dirty="0">
+            <a:r>
+              <a:rPr lang="en-US" altLang="zh-CN" sz="2800" dirty="0">
+                <a:solidFill>
+                  <a:srgbClr val="FF5F05"/>
+                </a:solidFill>
+                <a:latin typeface="Calibri"/>
+                <a:ea typeface="宋体"/>
+                <a:cs typeface="Calibri"/>
+              </a:rPr>
+              <a:t>Customer service NLP </a:t>
+            </a:r>
+            <a:r>
+              <a:rPr lang="en-US" altLang="zh-CN" sz="2800" dirty="0">
+                <a:solidFill>
+                  <a:srgbClr val="13294B"/>
+                </a:solidFill>
+                <a:latin typeface="Calibri"/>
+                <a:ea typeface="宋体"/>
+                <a:cs typeface="Calibri"/>
+              </a:rPr>
+              <a:t>evaluates response quality against idealized rewrites, not observed human behavior.</a:t>
+            </a:r>
+          </a:p>
+          <a:p>
+            <a:pPr marL="457200" indent="-457200">
+              <a:spcAft>
+                <a:spcPts val="600"/>
+              </a:spcAft>
+              <a:buFont typeface="Arial" panose="020B0604020202020204" pitchFamily="34" charset="0"/>
+              <a:buChar char="•"/>
+            </a:pPr>
+            <a:r>
+              <a:rPr lang="en-US" altLang="zh-CN" sz="2800" dirty="0">
+                <a:solidFill>
+                  <a:srgbClr val="13294B"/>
+                </a:solidFill>
+                <a:latin typeface="Calibri"/>
+                <a:ea typeface="宋体"/>
+                <a:cs typeface="Calibri"/>
+              </a:rPr>
+              <a:t>Our study sits at the </a:t>
+            </a:r>
+            <a:r>
+              <a:rPr lang="en-US" altLang="zh-CN" sz="2800" dirty="0">
+                <a:solidFill>
+                  <a:srgbClr val="FF5F05"/>
+                </a:solidFill>
+                <a:latin typeface="Calibri"/>
+                <a:ea typeface="宋体"/>
+                <a:cs typeface="Calibri"/>
+              </a:rPr>
+              <a:t>intersection of all three</a:t>
+            </a:r>
+            <a:r>
+              <a:rPr lang="en-US" altLang="zh-CN" sz="2800" dirty="0">
+                <a:solidFill>
+                  <a:srgbClr val="13294B"/>
+                </a:solidFill>
+                <a:latin typeface="Calibri"/>
+                <a:ea typeface="宋体"/>
+                <a:cs typeface="Calibri"/>
+              </a:rPr>
+              <a:t> and uses a unique data asset—naturalistic, multi-domain, paired conversational data—to fill it.</a:t>
+            </a:r>
+            <a:endParaRPr lang="en-US" altLang="zh-CN" sz="3600" dirty="0">
               <a:solidFill>
                 <a:srgbClr val="13294B"/>
               </a:solidFill>
@@ -16456,12 +16587,29 @@
               <a:cs typeface="Calibri"/>
             </a:endParaRPr>
           </a:p>
+          <a:p>
+            <a:pPr marL="457200" indent="-457200">
+              <a:spcAft>
+                <a:spcPts val="600"/>
+              </a:spcAft>
+              <a:buFont typeface="Arial" panose="020B0604020202020204" pitchFamily="34" charset="0"/>
+              <a:buChar char="•"/>
+            </a:pPr>
+            <a:endParaRPr lang="en-US" altLang="zh-CN" sz="3600" dirty="0">
+              <a:solidFill>
+                <a:srgbClr val="13294B"/>
+              </a:solidFill>
+              <a:latin typeface="Calibri"/>
+              <a:ea typeface="宋体"/>
+              <a:cs typeface="Calibri"/>
+            </a:endParaRPr>
+          </a:p>
         </p:txBody>
       </p:sp>
     </p:spTree>
     <p:extLst>
       <p:ext uri="{BB962C8B-B14F-4D97-AF65-F5344CB8AC3E}">
-        <p14:creationId xmlns:p14="http://schemas.microsoft.com/office/powerpoint/2010/main" val="870060052"/>
+        <p14:creationId xmlns:p14="http://schemas.microsoft.com/office/powerpoint/2010/main" val="1357738753"/>
       </p:ext>
     </p:extLst>
   </p:cSld>
@@ -16815,7 +16963,7 @@
         <p:spPr>
           <a:xfrm>
             <a:off x="613543" y="1741049"/>
-            <a:ext cx="10964912" cy="2785378"/>
+            <a:ext cx="10964912" cy="2292935"/>
           </a:xfrm>
           <a:prstGeom prst="rect">
             <a:avLst/>
@@ -16844,11 +16992,11 @@
                 <a:ea typeface="宋体"/>
                 <a:cs typeface="Calibri"/>
               </a:rPr>
-              <a:t>The study follows a three-phase empirical design: </a:t>
-            </a:r>
-          </a:p>
-          <a:p>
-            <a:pPr marL="457200" indent="-457200">
+              <a:t>Our study follows a three steps empirical design: </a:t>
+            </a:r>
+          </a:p>
+          <a:p>
+            <a:pPr marL="914400" lvl="1" indent="-457200">
               <a:spcAft>
                 <a:spcPts val="600"/>
               </a:spcAft>
@@ -16868,7 +17016,7 @@
             </a:r>
           </a:p>
           <a:p>
-            <a:pPr marL="457200" indent="-457200">
+            <a:pPr marL="914400" lvl="1" indent="-457200">
               <a:spcAft>
                 <a:spcPts val="600"/>
               </a:spcAft>
@@ -16888,7 +17036,7 @@
             </a:r>
           </a:p>
           <a:p>
-            <a:pPr marL="457200" indent="-457200">
+            <a:pPr marL="914400" lvl="1" indent="-457200">
               <a:spcAft>
                 <a:spcPts val="600"/>
               </a:spcAft>
@@ -16904,7 +17052,7 @@
                 <a:ea typeface="宋体"/>
                 <a:cs typeface="Calibri"/>
               </a:rPr>
-              <a:t>(3) calibration scoring and statistical comparison. No model training is required.</a:t>
+              <a:t>(3) calibration scoring and statistical comparison.</a:t>
             </a:r>
           </a:p>
         </p:txBody>
@@ -18422,8 +18570,8 @@
           </a:p>
         </p:txBody>
       </p:sp>
-      <mc:AlternateContent xmlns:mc="http://schemas.openxmlformats.org/markup-compatibility/2006">
-        <mc:Choice xmlns:a14="http://schemas.microsoft.com/office/drawing/2010/main" Requires="a14">
+      <mc:AlternateContent xmlns:mc="http://schemas.openxmlformats.org/markup-compatibility/2006" xmlns:a14="http://schemas.microsoft.com/office/drawing/2010/main">
+        <mc:Choice Requires="a14">
           <p:graphicFrame>
             <p:nvGraphicFramePr>
               <p:cNvPr id="2" name="表格 1">
@@ -18552,6 +18700,7 @@
                           </a:r>
                         </a:p>
                         <a:p>
+                          <a:pPr/>
                           <a14:m>
                             <m:oMathPara xmlns:m="http://schemas.openxmlformats.org/officeDocument/2006/math">
                               <m:oMathParaPr>
@@ -18726,7 +18875,7 @@
             </a:graphic>
           </p:graphicFrame>
         </mc:Choice>
-        <mc:Fallback>
+        <mc:Fallback xmlns="">
           <p:graphicFrame>
             <p:nvGraphicFramePr>
               <p:cNvPr id="2" name="表格 1">
